--- a/docs/presentation/capstone_midterm_presentation_compact.pptx
+++ b/docs/presentation/capstone_midterm_presentation_compact.pptx
@@ -1,16 +1,16 @@
 
 <file path=ppt/presentation.xml><?xml version="1.0" encoding="utf-8"?>
-<p:presentation xmlns:a="http://schemas.openxmlformats.org/drawingml/2006/main" xmlns:ns1="http://schemas.openxmlformats.org/officeDocument/2006/relationships" xmlns:ns3="http://schemas.microsoft.com/office/powerpoint/2012/main" xmlns:p="http://schemas.openxmlformats.org/presentationml/2006/main" saveSubsetFonts="1">
+<p:presentation xmlns:a="http://schemas.openxmlformats.org/drawingml/2006/main" xmlns:r="http://schemas.openxmlformats.org/officeDocument/2006/relationships" xmlns:p="http://schemas.openxmlformats.org/presentationml/2006/main" saveSubsetFonts="1">
   <p:sldMasterIdLst>
-    <p:sldMasterId id="2147483660" ns1:id="rId1"/>
+    <p:sldMasterId id="2147483660" r:id="rId1"/>
   </p:sldMasterIdLst>
   <p:notesMasterIdLst>
-    <p:notesMasterId ns1:id="rId3"/>
+    <p:notesMasterId r:id="rId3"/>
   </p:notesMasterIdLst>
   <p:sldIdLst>
-    <p:sldId id="256" ns1:id="rId2"/>
+    <p:sldId id="256" r:id="rId2"/>
   </p:sldIdLst>
-  <p:sldSz cx="7559867" cy="10703358"/>
+  <p:sldSz cx="7559675" cy="10691813"/>
   <p:notesSz cx="6858000" cy="9144000"/>
   <p:defaultTextStyle>
     <a:defPPr>
@@ -109,7 +109,7 @@
   </p:defaultTextStyle>
   <p:extLst>
     <p:ext uri="{EFAFB233-063F-42B5-8137-9DF3F51BA10A}">
-      <ns3:sldGuideLst/>
+      <p15:sldGuideLst xmlns:p15="http://schemas.microsoft.com/office/powerpoint/2012/main"/>
     </p:ext>
   </p:extLst>
 </p:presentation>
@@ -465,7 +465,7 @@
 </file>
 
 <file path=ppt/notesSlides/notesSlide1.xml><?xml version="1.0" encoding="utf-8"?>
-<p:notes xmlns:a="http://schemas.openxmlformats.org/drawingml/2006/main" xmlns:ns2="http://schemas.microsoft.com/office/powerpoint/2010/main" xmlns:p="http://schemas.openxmlformats.org/presentationml/2006/main">
+<p:notes xmlns:a="http://schemas.openxmlformats.org/drawingml/2006/main" xmlns:r="http://schemas.openxmlformats.org/officeDocument/2006/relationships" xmlns:p="http://schemas.openxmlformats.org/presentationml/2006/main">
   <p:cSld>
     <p:spTree>
       <p:nvGrpSpPr>
@@ -491,7 +491,12 @@
             <p:ph type="sldImg"/>
           </p:nvPr>
         </p:nvSpPr>
-        <p:spPr/>
+        <p:spPr>
+          <a:xfrm>
+            <a:off x="2338388" y="1143000"/>
+            <a:ext cx="2181225" cy="3086100"/>
+          </a:xfrm>
+        </p:spPr>
       </p:sp>
       <p:sp>
         <p:nvSpPr>
@@ -538,7 +543,7 @@
     </p:spTree>
     <p:extLst>
       <p:ext uri="{BB962C8B-B14F-4D97-AF65-F5344CB8AC3E}">
-        <ns2:creationId val="2124398520"/>
+        <p14:creationId xmlns:p14="http://schemas.microsoft.com/office/powerpoint/2010/main" val="2124398520"/>
       </p:ext>
     </p:extLst>
   </p:cSld>
@@ -577,15 +582,15 @@
         </p:nvSpPr>
         <p:spPr>
           <a:xfrm>
-            <a:off x="1603772" y="4954765"/>
-            <a:ext cx="18176081" cy="10540259"/>
+            <a:off x="566976" y="1749796"/>
+            <a:ext cx="6425724" cy="3722335"/>
           </a:xfrm>
         </p:spPr>
         <p:txBody>
           <a:bodyPr anchor="b"/>
           <a:lstStyle>
             <a:lvl1pPr algn="ctr">
-              <a:defRPr sz="14031"/>
+              <a:defRPr sz="1752"/>
             </a:lvl1pPr>
           </a:lstStyle>
           <a:p>
@@ -609,8 +614,8 @@
         </p:nvSpPr>
         <p:spPr>
           <a:xfrm>
-            <a:off x="2672953" y="15901497"/>
-            <a:ext cx="16037719" cy="7309499"/>
+            <a:off x="944960" y="5615678"/>
+            <a:ext cx="5669756" cy="2581379"/>
           </a:xfrm>
         </p:spPr>
         <p:txBody>
@@ -618,39 +623,39 @@
           <a:lstStyle>
             <a:lvl1pPr marL="0" indent="0" algn="ctr">
               <a:buNone/>
-              <a:defRPr sz="5612"/>
+              <a:defRPr sz="701"/>
             </a:lvl1pPr>
-            <a:lvl2pPr marL="1069162" indent="0" algn="ctr">
+            <a:lvl2pPr marL="133492" indent="0" algn="ctr">
               <a:buNone/>
-              <a:defRPr sz="4677"/>
+              <a:defRPr sz="584"/>
             </a:lvl2pPr>
-            <a:lvl3pPr marL="2138324" indent="0" algn="ctr">
+            <a:lvl3pPr marL="266983" indent="0" algn="ctr">
               <a:buNone/>
-              <a:defRPr sz="4209"/>
+              <a:defRPr sz="526"/>
             </a:lvl3pPr>
-            <a:lvl4pPr marL="3207487" indent="0" algn="ctr">
+            <a:lvl4pPr marL="400475" indent="0" algn="ctr">
               <a:buNone/>
-              <a:defRPr sz="3742"/>
+              <a:defRPr sz="467"/>
             </a:lvl4pPr>
-            <a:lvl5pPr marL="4276649" indent="0" algn="ctr">
+            <a:lvl5pPr marL="533966" indent="0" algn="ctr">
               <a:buNone/>
-              <a:defRPr sz="3742"/>
+              <a:defRPr sz="467"/>
             </a:lvl5pPr>
-            <a:lvl6pPr marL="5345811" indent="0" algn="ctr">
+            <a:lvl6pPr marL="667458" indent="0" algn="ctr">
               <a:buNone/>
-              <a:defRPr sz="3742"/>
+              <a:defRPr sz="467"/>
             </a:lvl6pPr>
-            <a:lvl7pPr marL="6414973" indent="0" algn="ctr">
+            <a:lvl7pPr marL="800949" indent="0" algn="ctr">
               <a:buNone/>
-              <a:defRPr sz="3742"/>
+              <a:defRPr sz="467"/>
             </a:lvl7pPr>
-            <a:lvl8pPr marL="7484135" indent="0" algn="ctr">
+            <a:lvl8pPr marL="934441" indent="0" algn="ctr">
               <a:buNone/>
-              <a:defRPr sz="3742"/>
+              <a:defRPr sz="467"/>
             </a:lvl8pPr>
-            <a:lvl9pPr marL="8553298" indent="0" algn="ctr">
+            <a:lvl9pPr marL="1067932" indent="0" algn="ctr">
               <a:buNone/>
-              <a:defRPr sz="3742"/>
+              <a:defRPr sz="467"/>
             </a:lvl9pPr>
           </a:lstStyle>
           <a:p>
@@ -939,8 +944,8 @@
         </p:nvSpPr>
         <p:spPr>
           <a:xfrm>
-            <a:off x="15302658" y="1611875"/>
-            <a:ext cx="4610844" cy="25656844"/>
+            <a:off x="5409894" y="569240"/>
+            <a:ext cx="1630055" cy="9060817"/>
           </a:xfrm>
         </p:spPr>
         <p:txBody>
@@ -967,8 +972,8 @@
         </p:nvSpPr>
         <p:spPr>
           <a:xfrm>
-            <a:off x="1470125" y="1611875"/>
-            <a:ext cx="13565237" cy="25656844"/>
+            <a:off x="519729" y="569240"/>
+            <a:ext cx="4795669" cy="9060817"/>
           </a:xfrm>
         </p:spPr>
         <p:txBody>
@@ -1289,15 +1294,15 @@
         </p:nvSpPr>
         <p:spPr>
           <a:xfrm>
-            <a:off x="1458988" y="7547788"/>
-            <a:ext cx="18443377" cy="12593645"/>
+            <a:off x="515791" y="2665532"/>
+            <a:ext cx="6520220" cy="4447496"/>
           </a:xfrm>
         </p:spPr>
         <p:txBody>
           <a:bodyPr anchor="b"/>
           <a:lstStyle>
             <a:lvl1pPr>
-              <a:defRPr sz="14031"/>
+              <a:defRPr sz="1752"/>
             </a:lvl1pPr>
           </a:lstStyle>
           <a:p>
@@ -1321,8 +1326,8 @@
         </p:nvSpPr>
         <p:spPr>
           <a:xfrm>
-            <a:off x="1458988" y="20260574"/>
-            <a:ext cx="18443377" cy="6622701"/>
+            <a:off x="515791" y="7155104"/>
+            <a:ext cx="6520220" cy="2338833"/>
           </a:xfrm>
         </p:spPr>
         <p:txBody>
@@ -1330,7 +1335,7 @@
           <a:lstStyle>
             <a:lvl1pPr marL="0" indent="0">
               <a:buNone/>
-              <a:defRPr sz="5612">
+              <a:defRPr sz="701">
                 <a:solidFill>
                   <a:schemeClr val="tx1">
                     <a:tint val="82000"/>
@@ -1338,9 +1343,9 @@
                 </a:solidFill>
               </a:defRPr>
             </a:lvl1pPr>
-            <a:lvl2pPr marL="1069162" indent="0">
+            <a:lvl2pPr marL="133492" indent="0">
               <a:buNone/>
-              <a:defRPr sz="4677">
+              <a:defRPr sz="584">
                 <a:solidFill>
                   <a:schemeClr val="tx1">
                     <a:tint val="82000"/>
@@ -1348,9 +1353,9 @@
                 </a:solidFill>
               </a:defRPr>
             </a:lvl2pPr>
-            <a:lvl3pPr marL="2138324" indent="0">
+            <a:lvl3pPr marL="266983" indent="0">
               <a:buNone/>
-              <a:defRPr sz="4209">
+              <a:defRPr sz="526">
                 <a:solidFill>
                   <a:schemeClr val="tx1">
                     <a:tint val="82000"/>
@@ -1358,9 +1363,9 @@
                 </a:solidFill>
               </a:defRPr>
             </a:lvl3pPr>
-            <a:lvl4pPr marL="3207487" indent="0">
+            <a:lvl4pPr marL="400475" indent="0">
               <a:buNone/>
-              <a:defRPr sz="3742">
+              <a:defRPr sz="467">
                 <a:solidFill>
                   <a:schemeClr val="tx1">
                     <a:tint val="82000"/>
@@ -1368,9 +1373,9 @@
                 </a:solidFill>
               </a:defRPr>
             </a:lvl4pPr>
-            <a:lvl5pPr marL="4276649" indent="0">
+            <a:lvl5pPr marL="533966" indent="0">
               <a:buNone/>
-              <a:defRPr sz="3742">
+              <a:defRPr sz="467">
                 <a:solidFill>
                   <a:schemeClr val="tx1">
                     <a:tint val="82000"/>
@@ -1378,9 +1383,9 @@
                 </a:solidFill>
               </a:defRPr>
             </a:lvl5pPr>
-            <a:lvl6pPr marL="5345811" indent="0">
+            <a:lvl6pPr marL="667458" indent="0">
               <a:buNone/>
-              <a:defRPr sz="3742">
+              <a:defRPr sz="467">
                 <a:solidFill>
                   <a:schemeClr val="tx1">
                     <a:tint val="82000"/>
@@ -1388,9 +1393,9 @@
                 </a:solidFill>
               </a:defRPr>
             </a:lvl6pPr>
-            <a:lvl7pPr marL="6414973" indent="0">
+            <a:lvl7pPr marL="800949" indent="0">
               <a:buNone/>
-              <a:defRPr sz="3742">
+              <a:defRPr sz="467">
                 <a:solidFill>
                   <a:schemeClr val="tx1">
                     <a:tint val="82000"/>
@@ -1398,9 +1403,9 @@
                 </a:solidFill>
               </a:defRPr>
             </a:lvl7pPr>
-            <a:lvl8pPr marL="7484135" indent="0">
+            <a:lvl8pPr marL="934441" indent="0">
               <a:buNone/>
-              <a:defRPr sz="3742">
+              <a:defRPr sz="467">
                 <a:solidFill>
                   <a:schemeClr val="tx1">
                     <a:tint val="82000"/>
@@ -1408,9 +1413,9 @@
                 </a:solidFill>
               </a:defRPr>
             </a:lvl8pPr>
-            <a:lvl9pPr marL="8553298" indent="0">
+            <a:lvl9pPr marL="1067932" indent="0">
               <a:buNone/>
-              <a:defRPr sz="3742">
+              <a:defRPr sz="467">
                 <a:solidFill>
                   <a:schemeClr val="tx1">
                     <a:tint val="82000"/>
@@ -1558,8 +1563,8 @@
         </p:nvSpPr>
         <p:spPr>
           <a:xfrm>
-            <a:off x="1470124" y="8059374"/>
-            <a:ext cx="9088041" cy="19209345"/>
+            <a:off x="519728" y="2846201"/>
+            <a:ext cx="3212862" cy="6783857"/>
           </a:xfrm>
         </p:spPr>
         <p:txBody>
@@ -1615,8 +1620,8 @@
         </p:nvSpPr>
         <p:spPr>
           <a:xfrm>
-            <a:off x="10825460" y="8059374"/>
-            <a:ext cx="9088041" cy="19209345"/>
+            <a:off x="3827086" y="2846201"/>
+            <a:ext cx="3212862" cy="6783857"/>
           </a:xfrm>
         </p:spPr>
         <p:txBody>
@@ -1767,8 +1772,8 @@
         </p:nvSpPr>
         <p:spPr>
           <a:xfrm>
-            <a:off x="1472909" y="1611882"/>
-            <a:ext cx="18443377" cy="5851808"/>
+            <a:off x="520712" y="569243"/>
+            <a:ext cx="6520220" cy="2066589"/>
           </a:xfrm>
         </p:spPr>
         <p:txBody>
@@ -1795,8 +1800,8 @@
         </p:nvSpPr>
         <p:spPr>
           <a:xfrm>
-            <a:off x="1472912" y="7421634"/>
-            <a:ext cx="9046274" cy="3637228"/>
+            <a:off x="520713" y="2620980"/>
+            <a:ext cx="3198096" cy="1284502"/>
           </a:xfrm>
         </p:spPr>
         <p:txBody>
@@ -1804,39 +1809,39 @@
           <a:lstStyle>
             <a:lvl1pPr marL="0" indent="0">
               <a:buNone/>
-              <a:defRPr sz="5612" b="1"/>
+              <a:defRPr sz="701" b="1"/>
             </a:lvl1pPr>
-            <a:lvl2pPr marL="1069162" indent="0">
+            <a:lvl2pPr marL="133492" indent="0">
               <a:buNone/>
-              <a:defRPr sz="4677" b="1"/>
+              <a:defRPr sz="584" b="1"/>
             </a:lvl2pPr>
-            <a:lvl3pPr marL="2138324" indent="0">
+            <a:lvl3pPr marL="266983" indent="0">
               <a:buNone/>
-              <a:defRPr sz="4209" b="1"/>
+              <a:defRPr sz="526" b="1"/>
             </a:lvl3pPr>
-            <a:lvl4pPr marL="3207487" indent="0">
+            <a:lvl4pPr marL="400475" indent="0">
               <a:buNone/>
-              <a:defRPr sz="3742" b="1"/>
+              <a:defRPr sz="467" b="1"/>
             </a:lvl4pPr>
-            <a:lvl5pPr marL="4276649" indent="0">
+            <a:lvl5pPr marL="533966" indent="0">
               <a:buNone/>
-              <a:defRPr sz="3742" b="1"/>
+              <a:defRPr sz="467" b="1"/>
             </a:lvl5pPr>
-            <a:lvl6pPr marL="5345811" indent="0">
+            <a:lvl6pPr marL="667458" indent="0">
               <a:buNone/>
-              <a:defRPr sz="3742" b="1"/>
+              <a:defRPr sz="467" b="1"/>
             </a:lvl6pPr>
-            <a:lvl7pPr marL="6414973" indent="0">
+            <a:lvl7pPr marL="800949" indent="0">
               <a:buNone/>
-              <a:defRPr sz="3742" b="1"/>
+              <a:defRPr sz="467" b="1"/>
             </a:lvl7pPr>
-            <a:lvl8pPr marL="7484135" indent="0">
+            <a:lvl8pPr marL="934441" indent="0">
               <a:buNone/>
-              <a:defRPr sz="3742" b="1"/>
+              <a:defRPr sz="467" b="1"/>
             </a:lvl8pPr>
-            <a:lvl9pPr marL="8553298" indent="0">
+            <a:lvl9pPr marL="1067932" indent="0">
               <a:buNone/>
-              <a:defRPr sz="3742" b="1"/>
+              <a:defRPr sz="467" b="1"/>
             </a:lvl9pPr>
           </a:lstStyle>
           <a:p>
@@ -1860,8 +1865,8 @@
         </p:nvSpPr>
         <p:spPr>
           <a:xfrm>
-            <a:off x="1472912" y="11058863"/>
-            <a:ext cx="9046274" cy="16265921"/>
+            <a:off x="520713" y="3905483"/>
+            <a:ext cx="3198096" cy="5744375"/>
           </a:xfrm>
         </p:spPr>
         <p:txBody>
@@ -1917,8 +1922,8 @@
         </p:nvSpPr>
         <p:spPr>
           <a:xfrm>
-            <a:off x="10825461" y="7421634"/>
-            <a:ext cx="9090826" cy="3637228"/>
+            <a:off x="3827087" y="2620980"/>
+            <a:ext cx="3213847" cy="1284502"/>
           </a:xfrm>
         </p:spPr>
         <p:txBody>
@@ -1926,39 +1931,39 @@
           <a:lstStyle>
             <a:lvl1pPr marL="0" indent="0">
               <a:buNone/>
-              <a:defRPr sz="5612" b="1"/>
+              <a:defRPr sz="701" b="1"/>
             </a:lvl1pPr>
-            <a:lvl2pPr marL="1069162" indent="0">
+            <a:lvl2pPr marL="133492" indent="0">
               <a:buNone/>
-              <a:defRPr sz="4677" b="1"/>
+              <a:defRPr sz="584" b="1"/>
             </a:lvl2pPr>
-            <a:lvl3pPr marL="2138324" indent="0">
+            <a:lvl3pPr marL="266983" indent="0">
               <a:buNone/>
-              <a:defRPr sz="4209" b="1"/>
+              <a:defRPr sz="526" b="1"/>
             </a:lvl3pPr>
-            <a:lvl4pPr marL="3207487" indent="0">
+            <a:lvl4pPr marL="400475" indent="0">
               <a:buNone/>
-              <a:defRPr sz="3742" b="1"/>
+              <a:defRPr sz="467" b="1"/>
             </a:lvl4pPr>
-            <a:lvl5pPr marL="4276649" indent="0">
+            <a:lvl5pPr marL="533966" indent="0">
               <a:buNone/>
-              <a:defRPr sz="3742" b="1"/>
+              <a:defRPr sz="467" b="1"/>
             </a:lvl5pPr>
-            <a:lvl6pPr marL="5345811" indent="0">
+            <a:lvl6pPr marL="667458" indent="0">
               <a:buNone/>
-              <a:defRPr sz="3742" b="1"/>
+              <a:defRPr sz="467" b="1"/>
             </a:lvl6pPr>
-            <a:lvl7pPr marL="6414973" indent="0">
+            <a:lvl7pPr marL="800949" indent="0">
               <a:buNone/>
-              <a:defRPr sz="3742" b="1"/>
+              <a:defRPr sz="467" b="1"/>
             </a:lvl7pPr>
-            <a:lvl8pPr marL="7484135" indent="0">
+            <a:lvl8pPr marL="934441" indent="0">
               <a:buNone/>
-              <a:defRPr sz="3742" b="1"/>
+              <a:defRPr sz="467" b="1"/>
             </a:lvl8pPr>
-            <a:lvl9pPr marL="8553298" indent="0">
+            <a:lvl9pPr marL="1067932" indent="0">
               <a:buNone/>
-              <a:defRPr sz="3742" b="1"/>
+              <a:defRPr sz="467" b="1"/>
             </a:lvl9pPr>
           </a:lstStyle>
           <a:p>
@@ -1982,8 +1987,8 @@
         </p:nvSpPr>
         <p:spPr>
           <a:xfrm>
-            <a:off x="10825461" y="11058863"/>
-            <a:ext cx="9090826" cy="16265921"/>
+            <a:off x="3827087" y="3905483"/>
+            <a:ext cx="3213847" cy="5744375"/>
           </a:xfrm>
         </p:spPr>
         <p:txBody>
@@ -2347,15 +2352,15 @@
         </p:nvSpPr>
         <p:spPr>
           <a:xfrm>
-            <a:off x="1472909" y="2018348"/>
-            <a:ext cx="6896776" cy="7064216"/>
+            <a:off x="520712" y="712788"/>
+            <a:ext cx="2438192" cy="2494756"/>
           </a:xfrm>
         </p:spPr>
         <p:txBody>
           <a:bodyPr anchor="b"/>
           <a:lstStyle>
             <a:lvl1pPr>
-              <a:defRPr sz="7483"/>
+              <a:defRPr sz="934"/>
             </a:lvl1pPr>
           </a:lstStyle>
           <a:p>
@@ -2379,39 +2384,39 @@
         </p:nvSpPr>
         <p:spPr>
           <a:xfrm>
-            <a:off x="9090826" y="4359077"/>
-            <a:ext cx="10825460" cy="21515024"/>
+            <a:off x="3213848" y="1539426"/>
+            <a:ext cx="3827085" cy="7598117"/>
           </a:xfrm>
         </p:spPr>
         <p:txBody>
           <a:bodyPr/>
           <a:lstStyle>
             <a:lvl1pPr>
-              <a:defRPr sz="7483"/>
+              <a:defRPr sz="934"/>
             </a:lvl1pPr>
             <a:lvl2pPr>
-              <a:defRPr sz="6548"/>
+              <a:defRPr sz="818"/>
             </a:lvl2pPr>
             <a:lvl3pPr>
-              <a:defRPr sz="5612"/>
+              <a:defRPr sz="701"/>
             </a:lvl3pPr>
             <a:lvl4pPr>
-              <a:defRPr sz="4677"/>
+              <a:defRPr sz="584"/>
             </a:lvl4pPr>
             <a:lvl5pPr>
-              <a:defRPr sz="4677"/>
+              <a:defRPr sz="584"/>
             </a:lvl5pPr>
             <a:lvl6pPr>
-              <a:defRPr sz="4677"/>
+              <a:defRPr sz="584"/>
             </a:lvl6pPr>
             <a:lvl7pPr>
-              <a:defRPr sz="4677"/>
+              <a:defRPr sz="584"/>
             </a:lvl7pPr>
             <a:lvl8pPr>
-              <a:defRPr sz="4677"/>
+              <a:defRPr sz="584"/>
             </a:lvl8pPr>
             <a:lvl9pPr>
-              <a:defRPr sz="4677"/>
+              <a:defRPr sz="584"/>
             </a:lvl9pPr>
           </a:lstStyle>
           <a:p>
@@ -2464,8 +2469,8 @@
         </p:nvSpPr>
         <p:spPr>
           <a:xfrm>
-            <a:off x="1472909" y="9082564"/>
-            <a:ext cx="6896776" cy="16826573"/>
+            <a:off x="520712" y="3207544"/>
+            <a:ext cx="2438192" cy="5942372"/>
           </a:xfrm>
         </p:spPr>
         <p:txBody>
@@ -2473,39 +2478,39 @@
           <a:lstStyle>
             <a:lvl1pPr marL="0" indent="0">
               <a:buNone/>
-              <a:defRPr sz="3742"/>
+              <a:defRPr sz="467"/>
             </a:lvl1pPr>
-            <a:lvl2pPr marL="1069162" indent="0">
+            <a:lvl2pPr marL="133492" indent="0">
               <a:buNone/>
-              <a:defRPr sz="3274"/>
+              <a:defRPr sz="409"/>
             </a:lvl2pPr>
-            <a:lvl3pPr marL="2138324" indent="0">
+            <a:lvl3pPr marL="266983" indent="0">
               <a:buNone/>
-              <a:defRPr sz="2806"/>
+              <a:defRPr sz="350"/>
             </a:lvl3pPr>
-            <a:lvl4pPr marL="3207487" indent="0">
+            <a:lvl4pPr marL="400475" indent="0">
               <a:buNone/>
-              <a:defRPr sz="2339"/>
+              <a:defRPr sz="292"/>
             </a:lvl4pPr>
-            <a:lvl5pPr marL="4276649" indent="0">
+            <a:lvl5pPr marL="533966" indent="0">
               <a:buNone/>
-              <a:defRPr sz="2339"/>
+              <a:defRPr sz="292"/>
             </a:lvl5pPr>
-            <a:lvl6pPr marL="5345811" indent="0">
+            <a:lvl6pPr marL="667458" indent="0">
               <a:buNone/>
-              <a:defRPr sz="2339"/>
+              <a:defRPr sz="292"/>
             </a:lvl6pPr>
-            <a:lvl7pPr marL="6414973" indent="0">
+            <a:lvl7pPr marL="800949" indent="0">
               <a:buNone/>
-              <a:defRPr sz="2339"/>
+              <a:defRPr sz="292"/>
             </a:lvl7pPr>
-            <a:lvl8pPr marL="7484135" indent="0">
+            <a:lvl8pPr marL="934441" indent="0">
               <a:buNone/>
-              <a:defRPr sz="2339"/>
+              <a:defRPr sz="292"/>
             </a:lvl8pPr>
-            <a:lvl9pPr marL="8553298" indent="0">
+            <a:lvl9pPr marL="1067932" indent="0">
               <a:buNone/>
-              <a:defRPr sz="2339"/>
+              <a:defRPr sz="292"/>
             </a:lvl9pPr>
           </a:lstStyle>
           <a:p>
@@ -2624,15 +2629,15 @@
         </p:nvSpPr>
         <p:spPr>
           <a:xfrm>
-            <a:off x="1472909" y="2018348"/>
-            <a:ext cx="6896776" cy="7064216"/>
+            <a:off x="520712" y="712788"/>
+            <a:ext cx="2438192" cy="2494756"/>
           </a:xfrm>
         </p:spPr>
         <p:txBody>
           <a:bodyPr anchor="b"/>
           <a:lstStyle>
             <a:lvl1pPr>
-              <a:defRPr sz="7483"/>
+              <a:defRPr sz="934"/>
             </a:lvl1pPr>
           </a:lstStyle>
           <a:p>
@@ -2656,8 +2661,8 @@
         </p:nvSpPr>
         <p:spPr>
           <a:xfrm>
-            <a:off x="9090826" y="4359077"/>
-            <a:ext cx="10825460" cy="21515024"/>
+            <a:off x="3213848" y="1539426"/>
+            <a:ext cx="3827085" cy="7598117"/>
           </a:xfrm>
         </p:spPr>
         <p:txBody>
@@ -2665,39 +2670,39 @@
           <a:lstStyle>
             <a:lvl1pPr marL="0" indent="0">
               <a:buNone/>
-              <a:defRPr sz="7483"/>
+              <a:defRPr sz="934"/>
             </a:lvl1pPr>
-            <a:lvl2pPr marL="1069162" indent="0">
+            <a:lvl2pPr marL="133492" indent="0">
               <a:buNone/>
-              <a:defRPr sz="6548"/>
+              <a:defRPr sz="818"/>
             </a:lvl2pPr>
-            <a:lvl3pPr marL="2138324" indent="0">
+            <a:lvl3pPr marL="266983" indent="0">
               <a:buNone/>
-              <a:defRPr sz="5612"/>
+              <a:defRPr sz="701"/>
             </a:lvl3pPr>
-            <a:lvl4pPr marL="3207487" indent="0">
+            <a:lvl4pPr marL="400475" indent="0">
               <a:buNone/>
-              <a:defRPr sz="4677"/>
+              <a:defRPr sz="584"/>
             </a:lvl4pPr>
-            <a:lvl5pPr marL="4276649" indent="0">
+            <a:lvl5pPr marL="533966" indent="0">
               <a:buNone/>
-              <a:defRPr sz="4677"/>
+              <a:defRPr sz="584"/>
             </a:lvl5pPr>
-            <a:lvl6pPr marL="5345811" indent="0">
+            <a:lvl6pPr marL="667458" indent="0">
               <a:buNone/>
-              <a:defRPr sz="4677"/>
+              <a:defRPr sz="584"/>
             </a:lvl6pPr>
-            <a:lvl7pPr marL="6414973" indent="0">
+            <a:lvl7pPr marL="800949" indent="0">
               <a:buNone/>
-              <a:defRPr sz="4677"/>
+              <a:defRPr sz="584"/>
             </a:lvl7pPr>
-            <a:lvl8pPr marL="7484135" indent="0">
+            <a:lvl8pPr marL="934441" indent="0">
               <a:buNone/>
-              <a:defRPr sz="4677"/>
+              <a:defRPr sz="584"/>
             </a:lvl8pPr>
-            <a:lvl9pPr marL="8553298" indent="0">
+            <a:lvl9pPr marL="1067932" indent="0">
               <a:buNone/>
-              <a:defRPr sz="4677"/>
+              <a:defRPr sz="584"/>
             </a:lvl9pPr>
           </a:lstStyle>
           <a:p>
@@ -2721,8 +2726,8 @@
         </p:nvSpPr>
         <p:spPr>
           <a:xfrm>
-            <a:off x="1472909" y="9082564"/>
-            <a:ext cx="6896776" cy="16826573"/>
+            <a:off x="520712" y="3207544"/>
+            <a:ext cx="2438192" cy="5942372"/>
           </a:xfrm>
         </p:spPr>
         <p:txBody>
@@ -2730,39 +2735,39 @@
           <a:lstStyle>
             <a:lvl1pPr marL="0" indent="0">
               <a:buNone/>
-              <a:defRPr sz="3742"/>
+              <a:defRPr sz="467"/>
             </a:lvl1pPr>
-            <a:lvl2pPr marL="1069162" indent="0">
+            <a:lvl2pPr marL="133492" indent="0">
               <a:buNone/>
-              <a:defRPr sz="3274"/>
+              <a:defRPr sz="409"/>
             </a:lvl2pPr>
-            <a:lvl3pPr marL="2138324" indent="0">
+            <a:lvl3pPr marL="266983" indent="0">
               <a:buNone/>
-              <a:defRPr sz="2806"/>
+              <a:defRPr sz="350"/>
             </a:lvl3pPr>
-            <a:lvl4pPr marL="3207487" indent="0">
+            <a:lvl4pPr marL="400475" indent="0">
               <a:buNone/>
-              <a:defRPr sz="2339"/>
+              <a:defRPr sz="292"/>
             </a:lvl4pPr>
-            <a:lvl5pPr marL="4276649" indent="0">
+            <a:lvl5pPr marL="533966" indent="0">
               <a:buNone/>
-              <a:defRPr sz="2339"/>
+              <a:defRPr sz="292"/>
             </a:lvl5pPr>
-            <a:lvl6pPr marL="5345811" indent="0">
+            <a:lvl6pPr marL="667458" indent="0">
               <a:buNone/>
-              <a:defRPr sz="2339"/>
+              <a:defRPr sz="292"/>
             </a:lvl6pPr>
-            <a:lvl7pPr marL="6414973" indent="0">
+            <a:lvl7pPr marL="800949" indent="0">
               <a:buNone/>
-              <a:defRPr sz="2339"/>
+              <a:defRPr sz="292"/>
             </a:lvl7pPr>
-            <a:lvl8pPr marL="7484135" indent="0">
+            <a:lvl8pPr marL="934441" indent="0">
               <a:buNone/>
-              <a:defRPr sz="2339"/>
+              <a:defRPr sz="292"/>
             </a:lvl8pPr>
-            <a:lvl9pPr marL="8553298" indent="0">
+            <a:lvl9pPr marL="1067932" indent="0">
               <a:buNone/>
-              <a:defRPr sz="2339"/>
+              <a:defRPr sz="292"/>
             </a:lvl9pPr>
           </a:lstStyle>
           <a:p>
@@ -2886,8 +2891,8 @@
         </p:nvSpPr>
         <p:spPr>
           <a:xfrm>
-            <a:off x="1470124" y="1611882"/>
-            <a:ext cx="18443377" cy="5851808"/>
+            <a:off x="519728" y="569243"/>
+            <a:ext cx="6520220" cy="2066589"/>
           </a:xfrm>
           <a:prstGeom prst="rect">
             <a:avLst/>
@@ -2919,8 +2924,8 @@
         </p:nvSpPr>
         <p:spPr>
           <a:xfrm>
-            <a:off x="1470124" y="8059374"/>
-            <a:ext cx="18443377" cy="19209345"/>
+            <a:off x="519728" y="2846201"/>
+            <a:ext cx="6520220" cy="6783857"/>
           </a:xfrm>
           <a:prstGeom prst="rect">
             <a:avLst/>
@@ -2981,8 +2986,8 @@
         </p:nvSpPr>
         <p:spPr>
           <a:xfrm>
-            <a:off x="1470124" y="28060644"/>
-            <a:ext cx="4811316" cy="1611875"/>
+            <a:off x="519729" y="9909730"/>
+            <a:ext cx="1700927" cy="569240"/>
           </a:xfrm>
           <a:prstGeom prst="rect">
             <a:avLst/>
@@ -2992,7 +2997,7 @@
           <a:bodyPr vert="horz" lIns="91440" tIns="45720" rIns="91440" bIns="45720" rtlCol="0" anchor="ctr"/>
           <a:lstStyle>
             <a:lvl1pPr algn="l">
-              <a:defRPr sz="2806">
+              <a:defRPr sz="350">
                 <a:solidFill>
                   <a:schemeClr val="tx1">
                     <a:tint val="82000"/>
@@ -3022,8 +3027,8 @@
         </p:nvSpPr>
         <p:spPr>
           <a:xfrm>
-            <a:off x="7083326" y="28060644"/>
-            <a:ext cx="7216973" cy="1611875"/>
+            <a:off x="2504143" y="9909730"/>
+            <a:ext cx="2551390" cy="569240"/>
           </a:xfrm>
           <a:prstGeom prst="rect">
             <a:avLst/>
@@ -3033,7 +3038,7 @@
           <a:bodyPr vert="horz" lIns="91440" tIns="45720" rIns="91440" bIns="45720" rtlCol="0" anchor="ctr"/>
           <a:lstStyle>
             <a:lvl1pPr algn="ctr">
-              <a:defRPr sz="2806">
+              <a:defRPr sz="350">
                 <a:solidFill>
                   <a:schemeClr val="tx1">
                     <a:tint val="82000"/>
@@ -3059,8 +3064,8 @@
         </p:nvSpPr>
         <p:spPr>
           <a:xfrm>
-            <a:off x="15102185" y="28060644"/>
-            <a:ext cx="4811316" cy="1611875"/>
+            <a:off x="5339021" y="9909730"/>
+            <a:ext cx="1700927" cy="569240"/>
           </a:xfrm>
           <a:prstGeom prst="rect">
             <a:avLst/>
@@ -3070,7 +3075,7 @@
           <a:bodyPr vert="horz" lIns="91440" tIns="45720" rIns="91440" bIns="45720" rtlCol="0" anchor="ctr"/>
           <a:lstStyle>
             <a:lvl1pPr algn="r">
-              <a:defRPr sz="2806">
+              <a:defRPr sz="350">
                 <a:solidFill>
                   <a:schemeClr val="tx1">
                     <a:tint val="82000"/>
@@ -3111,7 +3116,7 @@
   </p:sldLayoutIdLst>
   <p:txStyles>
     <p:titleStyle>
-      <a:lvl1pPr algn="l" defTabSz="2138324" rtl="0" eaLnBrk="1" latinLnBrk="1" hangingPunct="1">
+      <a:lvl1pPr algn="l" defTabSz="266983" rtl="0" eaLnBrk="1" latinLnBrk="1" hangingPunct="1">
         <a:lnSpc>
           <a:spcPct val="90000"/>
         </a:lnSpc>
@@ -3119,7 +3124,7 @@
           <a:spcPct val="0"/>
         </a:spcBef>
         <a:buNone/>
-        <a:defRPr sz="10289" kern="1200">
+        <a:defRPr sz="1285" kern="1200">
           <a:solidFill>
             <a:schemeClr val="tx1"/>
           </a:solidFill>
@@ -3130,16 +3135,16 @@
       </a:lvl1pPr>
     </p:titleStyle>
     <p:bodyStyle>
-      <a:lvl1pPr marL="534581" indent="-534581" algn="l" defTabSz="2138324" rtl="0" eaLnBrk="1" latinLnBrk="1" hangingPunct="1">
+      <a:lvl1pPr marL="66746" indent="-66746" algn="l" defTabSz="266983" rtl="0" eaLnBrk="1" latinLnBrk="1" hangingPunct="1">
         <a:lnSpc>
           <a:spcPct val="90000"/>
         </a:lnSpc>
         <a:spcBef>
-          <a:spcPts val="2339"/>
+          <a:spcPts val="292"/>
         </a:spcBef>
         <a:buFont typeface="Arial" panose="020B0604020202020204" pitchFamily="34" charset="0"/>
         <a:buChar char="•"/>
-        <a:defRPr sz="6548" kern="1200">
+        <a:defRPr sz="818" kern="1200">
           <a:solidFill>
             <a:schemeClr val="tx1"/>
           </a:solidFill>
@@ -3148,16 +3153,16 @@
           <a:cs typeface="+mn-cs"/>
         </a:defRPr>
       </a:lvl1pPr>
-      <a:lvl2pPr marL="1603743" indent="-534581" algn="l" defTabSz="2138324" rtl="0" eaLnBrk="1" latinLnBrk="1" hangingPunct="1">
+      <a:lvl2pPr marL="200237" indent="-66746" algn="l" defTabSz="266983" rtl="0" eaLnBrk="1" latinLnBrk="1" hangingPunct="1">
         <a:lnSpc>
           <a:spcPct val="90000"/>
         </a:lnSpc>
         <a:spcBef>
-          <a:spcPts val="1169"/>
+          <a:spcPts val="146"/>
         </a:spcBef>
         <a:buFont typeface="Arial" panose="020B0604020202020204" pitchFamily="34" charset="0"/>
         <a:buChar char="•"/>
-        <a:defRPr sz="5612" kern="1200">
+        <a:defRPr sz="701" kern="1200">
           <a:solidFill>
             <a:schemeClr val="tx1"/>
           </a:solidFill>
@@ -3166,16 +3171,16 @@
           <a:cs typeface="+mn-cs"/>
         </a:defRPr>
       </a:lvl2pPr>
-      <a:lvl3pPr marL="2672906" indent="-534581" algn="l" defTabSz="2138324" rtl="0" eaLnBrk="1" latinLnBrk="1" hangingPunct="1">
+      <a:lvl3pPr marL="333729" indent="-66746" algn="l" defTabSz="266983" rtl="0" eaLnBrk="1" latinLnBrk="1" hangingPunct="1">
         <a:lnSpc>
           <a:spcPct val="90000"/>
         </a:lnSpc>
         <a:spcBef>
-          <a:spcPts val="1169"/>
+          <a:spcPts val="146"/>
         </a:spcBef>
         <a:buFont typeface="Arial" panose="020B0604020202020204" pitchFamily="34" charset="0"/>
         <a:buChar char="•"/>
-        <a:defRPr sz="4677" kern="1200">
+        <a:defRPr sz="584" kern="1200">
           <a:solidFill>
             <a:schemeClr val="tx1"/>
           </a:solidFill>
@@ -3184,16 +3189,16 @@
           <a:cs typeface="+mn-cs"/>
         </a:defRPr>
       </a:lvl3pPr>
-      <a:lvl4pPr marL="3742068" indent="-534581" algn="l" defTabSz="2138324" rtl="0" eaLnBrk="1" latinLnBrk="1" hangingPunct="1">
+      <a:lvl4pPr marL="467220" indent="-66746" algn="l" defTabSz="266983" rtl="0" eaLnBrk="1" latinLnBrk="1" hangingPunct="1">
         <a:lnSpc>
           <a:spcPct val="90000"/>
         </a:lnSpc>
         <a:spcBef>
-          <a:spcPts val="1169"/>
+          <a:spcPts val="146"/>
         </a:spcBef>
         <a:buFont typeface="Arial" panose="020B0604020202020204" pitchFamily="34" charset="0"/>
         <a:buChar char="•"/>
-        <a:defRPr sz="4209" kern="1200">
+        <a:defRPr sz="526" kern="1200">
           <a:solidFill>
             <a:schemeClr val="tx1"/>
           </a:solidFill>
@@ -3202,16 +3207,16 @@
           <a:cs typeface="+mn-cs"/>
         </a:defRPr>
       </a:lvl4pPr>
-      <a:lvl5pPr marL="4811230" indent="-534581" algn="l" defTabSz="2138324" rtl="0" eaLnBrk="1" latinLnBrk="1" hangingPunct="1">
+      <a:lvl5pPr marL="600712" indent="-66746" algn="l" defTabSz="266983" rtl="0" eaLnBrk="1" latinLnBrk="1" hangingPunct="1">
         <a:lnSpc>
           <a:spcPct val="90000"/>
         </a:lnSpc>
         <a:spcBef>
-          <a:spcPts val="1169"/>
+          <a:spcPts val="146"/>
         </a:spcBef>
         <a:buFont typeface="Arial" panose="020B0604020202020204" pitchFamily="34" charset="0"/>
         <a:buChar char="•"/>
-        <a:defRPr sz="4209" kern="1200">
+        <a:defRPr sz="526" kern="1200">
           <a:solidFill>
             <a:schemeClr val="tx1"/>
           </a:solidFill>
@@ -3220,16 +3225,16 @@
           <a:cs typeface="+mn-cs"/>
         </a:defRPr>
       </a:lvl5pPr>
-      <a:lvl6pPr marL="5880392" indent="-534581" algn="l" defTabSz="2138324" rtl="0" eaLnBrk="1" latinLnBrk="1" hangingPunct="1">
+      <a:lvl6pPr marL="734204" indent="-66746" algn="l" defTabSz="266983" rtl="0" eaLnBrk="1" latinLnBrk="1" hangingPunct="1">
         <a:lnSpc>
           <a:spcPct val="90000"/>
         </a:lnSpc>
         <a:spcBef>
-          <a:spcPts val="1169"/>
+          <a:spcPts val="146"/>
         </a:spcBef>
         <a:buFont typeface="Arial" panose="020B0604020202020204" pitchFamily="34" charset="0"/>
         <a:buChar char="•"/>
-        <a:defRPr sz="4209" kern="1200">
+        <a:defRPr sz="526" kern="1200">
           <a:solidFill>
             <a:schemeClr val="tx1"/>
           </a:solidFill>
@@ -3238,16 +3243,16 @@
           <a:cs typeface="+mn-cs"/>
         </a:defRPr>
       </a:lvl6pPr>
-      <a:lvl7pPr marL="6949554" indent="-534581" algn="l" defTabSz="2138324" rtl="0" eaLnBrk="1" latinLnBrk="1" hangingPunct="1">
+      <a:lvl7pPr marL="867695" indent="-66746" algn="l" defTabSz="266983" rtl="0" eaLnBrk="1" latinLnBrk="1" hangingPunct="1">
         <a:lnSpc>
           <a:spcPct val="90000"/>
         </a:lnSpc>
         <a:spcBef>
-          <a:spcPts val="1169"/>
+          <a:spcPts val="146"/>
         </a:spcBef>
         <a:buFont typeface="Arial" panose="020B0604020202020204" pitchFamily="34" charset="0"/>
         <a:buChar char="•"/>
-        <a:defRPr sz="4209" kern="1200">
+        <a:defRPr sz="526" kern="1200">
           <a:solidFill>
             <a:schemeClr val="tx1"/>
           </a:solidFill>
@@ -3256,16 +3261,16 @@
           <a:cs typeface="+mn-cs"/>
         </a:defRPr>
       </a:lvl7pPr>
-      <a:lvl8pPr marL="8018717" indent="-534581" algn="l" defTabSz="2138324" rtl="0" eaLnBrk="1" latinLnBrk="1" hangingPunct="1">
+      <a:lvl8pPr marL="1001186" indent="-66746" algn="l" defTabSz="266983" rtl="0" eaLnBrk="1" latinLnBrk="1" hangingPunct="1">
         <a:lnSpc>
           <a:spcPct val="90000"/>
         </a:lnSpc>
         <a:spcBef>
-          <a:spcPts val="1169"/>
+          <a:spcPts val="146"/>
         </a:spcBef>
         <a:buFont typeface="Arial" panose="020B0604020202020204" pitchFamily="34" charset="0"/>
         <a:buChar char="•"/>
-        <a:defRPr sz="4209" kern="1200">
+        <a:defRPr sz="526" kern="1200">
           <a:solidFill>
             <a:schemeClr val="tx1"/>
           </a:solidFill>
@@ -3274,16 +3279,16 @@
           <a:cs typeface="+mn-cs"/>
         </a:defRPr>
       </a:lvl8pPr>
-      <a:lvl9pPr marL="9087879" indent="-534581" algn="l" defTabSz="2138324" rtl="0" eaLnBrk="1" latinLnBrk="1" hangingPunct="1">
+      <a:lvl9pPr marL="1134678" indent="-66746" algn="l" defTabSz="266983" rtl="0" eaLnBrk="1" latinLnBrk="1" hangingPunct="1">
         <a:lnSpc>
           <a:spcPct val="90000"/>
         </a:lnSpc>
         <a:spcBef>
-          <a:spcPts val="1169"/>
+          <a:spcPts val="146"/>
         </a:spcBef>
         <a:buFont typeface="Arial" panose="020B0604020202020204" pitchFamily="34" charset="0"/>
         <a:buChar char="•"/>
-        <a:defRPr sz="4209" kern="1200">
+        <a:defRPr sz="526" kern="1200">
           <a:solidFill>
             <a:schemeClr val="tx1"/>
           </a:solidFill>
@@ -3297,8 +3302,8 @@
       <a:defPPr>
         <a:defRPr lang="en-US"/>
       </a:defPPr>
-      <a:lvl1pPr marL="0" algn="l" defTabSz="2138324" rtl="0" eaLnBrk="1" latinLnBrk="1" hangingPunct="1">
-        <a:defRPr sz="4209" kern="1200">
+      <a:lvl1pPr marL="0" algn="l" defTabSz="266983" rtl="0" eaLnBrk="1" latinLnBrk="1" hangingPunct="1">
+        <a:defRPr sz="526" kern="1200">
           <a:solidFill>
             <a:schemeClr val="tx1"/>
           </a:solidFill>
@@ -3307,8 +3312,8 @@
           <a:cs typeface="+mn-cs"/>
         </a:defRPr>
       </a:lvl1pPr>
-      <a:lvl2pPr marL="1069162" algn="l" defTabSz="2138324" rtl="0" eaLnBrk="1" latinLnBrk="1" hangingPunct="1">
-        <a:defRPr sz="4209" kern="1200">
+      <a:lvl2pPr marL="133492" algn="l" defTabSz="266983" rtl="0" eaLnBrk="1" latinLnBrk="1" hangingPunct="1">
+        <a:defRPr sz="526" kern="1200">
           <a:solidFill>
             <a:schemeClr val="tx1"/>
           </a:solidFill>
@@ -3317,8 +3322,8 @@
           <a:cs typeface="+mn-cs"/>
         </a:defRPr>
       </a:lvl2pPr>
-      <a:lvl3pPr marL="2138324" algn="l" defTabSz="2138324" rtl="0" eaLnBrk="1" latinLnBrk="1" hangingPunct="1">
-        <a:defRPr sz="4209" kern="1200">
+      <a:lvl3pPr marL="266983" algn="l" defTabSz="266983" rtl="0" eaLnBrk="1" latinLnBrk="1" hangingPunct="1">
+        <a:defRPr sz="526" kern="1200">
           <a:solidFill>
             <a:schemeClr val="tx1"/>
           </a:solidFill>
@@ -3327,8 +3332,8 @@
           <a:cs typeface="+mn-cs"/>
         </a:defRPr>
       </a:lvl3pPr>
-      <a:lvl4pPr marL="3207487" algn="l" defTabSz="2138324" rtl="0" eaLnBrk="1" latinLnBrk="1" hangingPunct="1">
-        <a:defRPr sz="4209" kern="1200">
+      <a:lvl4pPr marL="400475" algn="l" defTabSz="266983" rtl="0" eaLnBrk="1" latinLnBrk="1" hangingPunct="1">
+        <a:defRPr sz="526" kern="1200">
           <a:solidFill>
             <a:schemeClr val="tx1"/>
           </a:solidFill>
@@ -3337,8 +3342,8 @@
           <a:cs typeface="+mn-cs"/>
         </a:defRPr>
       </a:lvl4pPr>
-      <a:lvl5pPr marL="4276649" algn="l" defTabSz="2138324" rtl="0" eaLnBrk="1" latinLnBrk="1" hangingPunct="1">
-        <a:defRPr sz="4209" kern="1200">
+      <a:lvl5pPr marL="533966" algn="l" defTabSz="266983" rtl="0" eaLnBrk="1" latinLnBrk="1" hangingPunct="1">
+        <a:defRPr sz="526" kern="1200">
           <a:solidFill>
             <a:schemeClr val="tx1"/>
           </a:solidFill>
@@ -3347,8 +3352,8 @@
           <a:cs typeface="+mn-cs"/>
         </a:defRPr>
       </a:lvl5pPr>
-      <a:lvl6pPr marL="5345811" algn="l" defTabSz="2138324" rtl="0" eaLnBrk="1" latinLnBrk="1" hangingPunct="1">
-        <a:defRPr sz="4209" kern="1200">
+      <a:lvl6pPr marL="667458" algn="l" defTabSz="266983" rtl="0" eaLnBrk="1" latinLnBrk="1" hangingPunct="1">
+        <a:defRPr sz="526" kern="1200">
           <a:solidFill>
             <a:schemeClr val="tx1"/>
           </a:solidFill>
@@ -3357,8 +3362,8 @@
           <a:cs typeface="+mn-cs"/>
         </a:defRPr>
       </a:lvl6pPr>
-      <a:lvl7pPr marL="6414973" algn="l" defTabSz="2138324" rtl="0" eaLnBrk="1" latinLnBrk="1" hangingPunct="1">
-        <a:defRPr sz="4209" kern="1200">
+      <a:lvl7pPr marL="800949" algn="l" defTabSz="266983" rtl="0" eaLnBrk="1" latinLnBrk="1" hangingPunct="1">
+        <a:defRPr sz="526" kern="1200">
           <a:solidFill>
             <a:schemeClr val="tx1"/>
           </a:solidFill>
@@ -3367,8 +3372,8 @@
           <a:cs typeface="+mn-cs"/>
         </a:defRPr>
       </a:lvl7pPr>
-      <a:lvl8pPr marL="7484135" algn="l" defTabSz="2138324" rtl="0" eaLnBrk="1" latinLnBrk="1" hangingPunct="1">
-        <a:defRPr sz="4209" kern="1200">
+      <a:lvl8pPr marL="934441" algn="l" defTabSz="266983" rtl="0" eaLnBrk="1" latinLnBrk="1" hangingPunct="1">
+        <a:defRPr sz="526" kern="1200">
           <a:solidFill>
             <a:schemeClr val="tx1"/>
           </a:solidFill>
@@ -3377,8 +3382,8 @@
           <a:cs typeface="+mn-cs"/>
         </a:defRPr>
       </a:lvl8pPr>
-      <a:lvl9pPr marL="8553298" algn="l" defTabSz="2138324" rtl="0" eaLnBrk="1" latinLnBrk="1" hangingPunct="1">
-        <a:defRPr sz="4209" kern="1200">
+      <a:lvl9pPr marL="1067932" algn="l" defTabSz="266983" rtl="0" eaLnBrk="1" latinLnBrk="1" hangingPunct="1">
+        <a:defRPr sz="526" kern="1200">
           <a:solidFill>
             <a:schemeClr val="tx1"/>
           </a:solidFill>
@@ -3393,7 +3398,7 @@
 </file>
 
 <file path=ppt/slides/slide1.xml><?xml version="1.0" encoding="utf-8"?>
-<p:sld xmlns:a="http://schemas.openxmlformats.org/drawingml/2006/main" xmlns:ns2="http://schemas.microsoft.com/office/drawing/2014/main" xmlns:ns3="http://schemas.openxmlformats.org/officeDocument/2006/relationships" xmlns:ns4="http://schemas.microsoft.com/office/drawing/2010/main" xmlns:ns5="http://schemas.openxmlformats.org/markup-compatibility/2006" xmlns:ns6="http://schemas.openxmlformats.org/officeDocument/2006/math" xmlns:ns7="http://schemas.microsoft.com/office/powerpoint/2010/main" xmlns:p="http://schemas.openxmlformats.org/presentationml/2006/main">
+<p:sld xmlns:a="http://schemas.openxmlformats.org/drawingml/2006/main" xmlns:r="http://schemas.openxmlformats.org/officeDocument/2006/relationships" xmlns:p="http://schemas.openxmlformats.org/presentationml/2006/main">
   <p:cSld>
     <p:spTree>
       <p:nvGrpSpPr>
@@ -3414,7 +3419,7 @@
           <p:cNvPr id="70" name="그림 69">
             <a:extLst>
               <a:ext uri="{FF2B5EF4-FFF2-40B4-BE49-F238E27FC236}">
-                <ns2:creationId id="{960D056F-BB26-F74E-8730-70D872199D00}"/>
+                <a16:creationId xmlns:a16="http://schemas.microsoft.com/office/drawing/2014/main" id="{960D056F-BB26-F74E-8730-70D872199D00}"/>
               </a:ext>
             </a:extLst>
           </p:cNvPr>
@@ -3424,15 +3429,15 @@
           <p:nvPr/>
         </p:nvPicPr>
         <p:blipFill>
-          <a:blip ns3:embed="rId3"/>
+          <a:blip r:embed="rId3"/>
           <a:stretch>
             <a:fillRect/>
           </a:stretch>
         </p:blipFill>
         <p:spPr>
           <a:xfrm>
-            <a:off x="3833812" y="3130353"/>
-            <a:ext cx="3497490" cy="1794168"/>
+            <a:off x="3798864" y="4561456"/>
+            <a:ext cx="1235122" cy="633601"/>
           </a:xfrm>
           <a:prstGeom prst="rect">
             <a:avLst/>
@@ -3444,7 +3449,7 @@
           <p:cNvPr id="4" name="TextBox 3">
             <a:extLst>
               <a:ext uri="{FF2B5EF4-FFF2-40B4-BE49-F238E27FC236}">
-                <ns2:creationId id="{F837C99B-9CE4-13DD-7E3A-61A600B1E6F9}"/>
+                <a16:creationId xmlns:a16="http://schemas.microsoft.com/office/drawing/2014/main" id="{F837C99B-9CE4-13DD-7E3A-61A600B1E6F9}"/>
               </a:ext>
             </a:extLst>
           </p:cNvPr>
@@ -3453,8 +3458,8 @@
         </p:nvSpPr>
         <p:spPr>
           <a:xfrm>
-            <a:off x="184727" y="165268"/>
-            <a:ext cx="7190412" cy="359073"/>
+            <a:off x="2510208" y="3514351"/>
+            <a:ext cx="2539259" cy="207621"/>
           </a:xfrm>
           <a:prstGeom prst="rect">
             <a:avLst/>
@@ -3469,14 +3474,14 @@
           <a:p>
             <a:pPr algn="ctr"/>
             <a:r>
-              <a:rPr lang="en-US" altLang="ko-KR" sz="2121" b="1" dirty="0"/>
+              <a:rPr lang="en-US" altLang="ko-KR" sz="749" b="1" dirty="0"/>
               <a:t>BEHAVIOR-1K </a:t>
             </a:r>
             <a:r>
-              <a:rPr lang="ko-KR" altLang="en-US" sz="2121" b="1" dirty="0"/>
+              <a:rPr lang="ko-KR" altLang="en-US" sz="749" b="1" dirty="0"/>
               <a:t>기반 양팔 로봇 정책 학습</a:t>
             </a:r>
-            <a:endParaRPr lang="ko-KR" altLang="en-US" sz="1909" b="1" dirty="0"/>
+            <a:endParaRPr lang="ko-KR" altLang="en-US" sz="674" b="1" dirty="0"/>
           </a:p>
         </p:txBody>
       </p:sp>
@@ -3485,7 +3490,7 @@
           <p:cNvPr id="5" name="TextBox 4">
             <a:extLst>
               <a:ext uri="{FF2B5EF4-FFF2-40B4-BE49-F238E27FC236}">
-                <ns2:creationId id="{3EA791E0-6CF5-D63E-BD9E-794012C4381A}"/>
+                <a16:creationId xmlns:a16="http://schemas.microsoft.com/office/drawing/2014/main" id="{3EA791E0-6CF5-D63E-BD9E-794012C4381A}"/>
               </a:ext>
             </a:extLst>
           </p:cNvPr>
@@ -3494,14 +3499,14 @@
         </p:nvSpPr>
         <p:spPr>
           <a:xfrm>
-            <a:off x="181191" y="624796"/>
-            <a:ext cx="3598743" cy="293787"/>
+            <a:off x="2508959" y="3676631"/>
+            <a:ext cx="1270878" cy="184538"/>
           </a:xfrm>
           <a:prstGeom prst="rect">
             <a:avLst/>
           </a:prstGeom>
           <a:noFill/>
-          <a:ln w="20205">
+          <a:ln w="57150">
             <a:solidFill>
               <a:schemeClr val="accent4">
                 <a:lumMod val="50000"/>
@@ -3517,25 +3522,25 @@
           <a:p>
             <a:pPr algn="ctr"/>
             <a:r>
-              <a:rPr lang="ko-KR" altLang="en-US" sz="1697" b="1" dirty="0">
+              <a:rPr lang="ko-KR" altLang="en-US" sz="599" b="1" dirty="0">
                 <a:latin typeface="+mn-ea"/>
               </a:rPr>
               <a:t>지도 교수님</a:t>
             </a:r>
             <a:r>
-              <a:rPr lang="en-US" altLang="ko-KR" sz="1697" b="1" dirty="0">
+              <a:rPr lang="en-US" altLang="ko-KR" sz="599" b="1" dirty="0">
                 <a:latin typeface="+mn-ea"/>
               </a:rPr>
               <a:t>: </a:t>
             </a:r>
             <a:r>
-              <a:rPr lang="ko-KR" altLang="en-US" sz="1697" b="1" dirty="0" err="1">
+              <a:rPr lang="ko-KR" altLang="en-US" sz="599" b="1" dirty="0" err="1">
                 <a:latin typeface="+mn-ea"/>
               </a:rPr>
               <a:t>하종은</a:t>
             </a:r>
             <a:r>
-              <a:rPr lang="ko-KR" altLang="en-US" sz="1697" b="1" dirty="0">
+              <a:rPr lang="ko-KR" altLang="en-US" sz="599" b="1" dirty="0">
                 <a:latin typeface="+mn-ea"/>
               </a:rPr>
               <a:t> 교수님</a:t>
@@ -3548,7 +3553,7 @@
           <p:cNvPr id="6" name="TextBox 5">
             <a:extLst>
               <a:ext uri="{FF2B5EF4-FFF2-40B4-BE49-F238E27FC236}">
-                <ns2:creationId id="{28CC29D6-F5C9-1FEE-2470-ECFA1AD996C6}"/>
+                <a16:creationId xmlns:a16="http://schemas.microsoft.com/office/drawing/2014/main" id="{28CC29D6-F5C9-1FEE-2470-ECFA1AD996C6}"/>
               </a:ext>
             </a:extLst>
           </p:cNvPr>
@@ -3557,14 +3562,14 @@
         </p:nvSpPr>
         <p:spPr>
           <a:xfrm>
-            <a:off x="3779934" y="624796"/>
-            <a:ext cx="3597547" cy="293787"/>
+            <a:off x="3779837" y="3676631"/>
+            <a:ext cx="1270456" cy="184538"/>
           </a:xfrm>
           <a:prstGeom prst="rect">
             <a:avLst/>
           </a:prstGeom>
           <a:noFill/>
-          <a:ln w="20205">
+          <a:ln w="57150">
             <a:solidFill>
               <a:schemeClr val="accent4">
                 <a:lumMod val="50000"/>
@@ -3580,36 +3585,36 @@
           <a:p>
             <a:pPr algn="ctr"/>
             <a:r>
-              <a:rPr lang="ko-KR" altLang="en-US" sz="1697" b="1" dirty="0">
+              <a:rPr lang="ko-KR" altLang="en-US" sz="599" b="1" dirty="0">
                 <a:latin typeface="+mn-ea"/>
               </a:rPr>
               <a:t>조원</a:t>
             </a:r>
             <a:r>
-              <a:rPr lang="en-US" altLang="ko-KR" sz="1697" b="1" dirty="0">
+              <a:rPr lang="en-US" altLang="ko-KR" sz="599" b="1" dirty="0">
                 <a:latin typeface="+mn-ea"/>
               </a:rPr>
               <a:t>: </a:t>
             </a:r>
             <a:r>
-              <a:rPr lang="ko-KR" altLang="en-US" sz="1697" b="1" dirty="0">
+              <a:rPr lang="ko-KR" altLang="en-US" sz="599" b="1" dirty="0">
                 <a:latin typeface="+mn-ea"/>
               </a:rPr>
               <a:t>강지호</a:t>
             </a:r>
             <a:r>
-              <a:rPr lang="en-US" altLang="ko-KR" sz="1697" b="1" dirty="0">
+              <a:rPr lang="en-US" altLang="ko-KR" sz="599" b="1" dirty="0">
                 <a:latin typeface="+mn-ea"/>
               </a:rPr>
               <a:t>, </a:t>
             </a:r>
             <a:r>
-              <a:rPr lang="ko-KR" altLang="en-US" sz="1697" b="1" dirty="0" err="1">
+              <a:rPr lang="ko-KR" altLang="en-US" sz="599" b="1" dirty="0" err="1">
                 <a:latin typeface="+mn-ea"/>
               </a:rPr>
               <a:t>문병선</a:t>
             </a:r>
-            <a:endParaRPr lang="ko-KR" altLang="en-US" sz="1697" b="1" dirty="0">
+            <a:endParaRPr lang="ko-KR" altLang="en-US" sz="599" b="1" dirty="0">
               <a:latin typeface="+mn-ea"/>
             </a:endParaRPr>
           </a:p>
@@ -3620,7 +3625,7 @@
           <p:cNvPr id="7" name="TextBox 6">
             <a:extLst>
               <a:ext uri="{FF2B5EF4-FFF2-40B4-BE49-F238E27FC236}">
-                <ns2:creationId id="{ACF21E68-84F7-27E5-88B3-AD831848791A}"/>
+                <a16:creationId xmlns:a16="http://schemas.microsoft.com/office/drawing/2014/main" id="{ACF21E68-84F7-27E5-88B3-AD831848791A}"/>
               </a:ext>
             </a:extLst>
           </p:cNvPr>
@@ -3629,14 +3634,14 @@
         </p:nvSpPr>
         <p:spPr>
           <a:xfrm>
-            <a:off x="181788" y="918582"/>
-            <a:ext cx="3598145" cy="1262195"/>
+            <a:off x="2509170" y="3780380"/>
+            <a:ext cx="1270667" cy="573106"/>
           </a:xfrm>
           <a:prstGeom prst="rect">
             <a:avLst/>
           </a:prstGeom>
           <a:noFill/>
-          <a:ln w="20205">
+          <a:ln w="57150">
             <a:solidFill>
               <a:schemeClr val="accent4">
                 <a:lumMod val="50000"/>
@@ -3651,102 +3656,102 @@
           <a:lstStyle/>
           <a:p>
             <a:pPr algn="ctr"/>
-            <a:endParaRPr lang="en-US" altLang="ko-KR" sz="1909" b="1" dirty="0">
+            <a:endParaRPr lang="en-US" altLang="ko-KR" sz="674" b="1" dirty="0">
               <a:latin typeface="+mn-ea"/>
             </a:endParaRPr>
           </a:p>
           <a:p>
-            <a:pPr marL="121227" indent="1" algn="ctr">
+            <a:pPr marL="42813" indent="-42813" algn="ctr">
               <a:buFont typeface="Arial" panose="020B0604020202020204" pitchFamily="34" charset="0"/>
               <a:buChar char="•"/>
             </a:pPr>
             <a:r>
-              <a:rPr lang="en-US" altLang="ko-KR" sz="848" dirty="0">
+              <a:rPr lang="en-US" altLang="ko-KR" sz="300" dirty="0">
                 <a:latin typeface="+mn-ea"/>
               </a:rPr>
               <a:t>BEHAVIOR-1K </a:t>
             </a:r>
             <a:r>
-              <a:rPr lang="ko-KR" altLang="en-US" sz="848" dirty="0">
+              <a:rPr lang="ko-KR" altLang="en-US" sz="300" dirty="0">
                 <a:latin typeface="+mn-ea"/>
               </a:rPr>
               <a:t>환경에서 </a:t>
             </a:r>
             <a:r>
-              <a:rPr lang="en-US" altLang="ko-KR" sz="848" dirty="0">
+              <a:rPr lang="en-US" altLang="ko-KR" sz="300" dirty="0">
                 <a:latin typeface="+mn-ea"/>
               </a:rPr>
               <a:t>Vision-Language-Action </a:t>
             </a:r>
             <a:r>
-              <a:rPr lang="ko-KR" altLang="en-US" sz="848" dirty="0">
+              <a:rPr lang="ko-KR" altLang="en-US" sz="300" dirty="0">
                 <a:latin typeface="+mn-ea"/>
               </a:rPr>
               <a:t>기반 양팔 로봇 조작 정책을 구현하고 평가</a:t>
             </a:r>
-            <a:endParaRPr lang="en-US" altLang="ko-KR" sz="848" dirty="0">
+            <a:endParaRPr lang="en-US" altLang="ko-KR" sz="300" dirty="0">
               <a:latin typeface="+mn-ea"/>
             </a:endParaRPr>
           </a:p>
           <a:p>
-            <a:pPr marL="101023" indent="1" algn="ctr">
+            <a:pPr marL="35678" indent="-35678" algn="ctr">
               <a:buFont typeface="Arial" panose="020B0604020202020204" pitchFamily="34" charset="0"/>
               <a:buChar char="•"/>
             </a:pPr>
-            <a:endParaRPr lang="en-US" altLang="ko-KR" dirty="0"/>
-          </a:p>
-          <a:p>
-            <a:pPr marL="121227" indent="1" algn="ctr">
+            <a:endParaRPr lang="en-US" altLang="ko-KR" sz="225" dirty="0"/>
+          </a:p>
+          <a:p>
+            <a:pPr marL="42813" indent="-42813" algn="ctr">
               <a:buFont typeface="Arial" panose="020B0604020202020204" pitchFamily="34" charset="0"/>
               <a:buChar char="•"/>
             </a:pPr>
             <a:r>
-              <a:rPr lang="ko-KR" altLang="ko-KR" sz="848" dirty="0"/>
+              <a:rPr lang="ko-KR" altLang="ko-KR" sz="300" dirty="0"/>
               <a:t>Pi0.5 기반 모델을 활용하여 장기 시퀀스 작업 수행 성능을 분석하고, </a:t>
             </a:r>
             <a:r>
-              <a:rPr lang="ko-KR" altLang="ko-KR" sz="848" dirty="0" err="1"/>
+              <a:rPr lang="ko-KR" altLang="ko-KR" sz="300" dirty="0" err="1"/>
               <a:t>Flow</a:t>
             </a:r>
             <a:r>
-              <a:rPr lang="ko-KR" altLang="ko-KR" sz="848" dirty="0"/>
+              <a:rPr lang="ko-KR" altLang="ko-KR" sz="300" dirty="0"/>
               <a:t> </a:t>
             </a:r>
             <a:r>
-              <a:rPr lang="ko-KR" altLang="ko-KR" sz="848" dirty="0" err="1"/>
+              <a:rPr lang="ko-KR" altLang="ko-KR" sz="300" dirty="0" err="1"/>
               <a:t>Matching</a:t>
             </a:r>
             <a:r>
-              <a:rPr lang="ko-KR" altLang="ko-KR" sz="848" dirty="0"/>
+              <a:rPr lang="ko-KR" altLang="ko-KR" sz="300" dirty="0"/>
               <a:t> 기반 정책 학습 구조를 적용</a:t>
             </a:r>
-            <a:endParaRPr lang="en-US" altLang="ko-KR" sz="848" dirty="0"/>
-          </a:p>
-          <a:p>
-            <a:pPr marL="121227" indent="1" algn="ctr">
+            <a:endParaRPr lang="en-US" altLang="ko-KR" sz="300" dirty="0"/>
+          </a:p>
+          <a:p>
+            <a:pPr marL="42813" indent="-42813" algn="ctr">
               <a:buFont typeface="Arial" panose="020B0604020202020204" pitchFamily="34" charset="0"/>
               <a:buChar char="•"/>
             </a:pPr>
-            <a:endParaRPr lang="en-US" altLang="ko-KR" dirty="0"/>
-          </a:p>
-          <a:p>
-            <a:pPr marL="121227" indent="1" algn="ctr">
+            <a:endParaRPr lang="en-US" altLang="ko-KR" sz="225" dirty="0"/>
+          </a:p>
+          <a:p>
+            <a:pPr marL="42813" indent="-42813" algn="ctr">
               <a:buFont typeface="Arial" panose="020B0604020202020204" pitchFamily="34" charset="0"/>
               <a:buChar char="•"/>
             </a:pPr>
             <a:r>
-              <a:rPr lang="ko-KR" altLang="ko-KR" sz="848" dirty="0" err="1"/>
+              <a:rPr lang="ko-KR" altLang="ko-KR" sz="300" dirty="0" err="1"/>
               <a:t>OmniGibson</a:t>
             </a:r>
             <a:r>
-              <a:rPr lang="ko-KR" altLang="ko-KR" sz="848" dirty="0"/>
+              <a:rPr lang="ko-KR" altLang="ko-KR" sz="300" dirty="0"/>
               <a:t> 환경에서 다양한 작업 수행 결과를 통해 모델의 실효성 검증</a:t>
             </a:r>
-            <a:endParaRPr lang="en-US" altLang="ko-KR" sz="848" dirty="0"/>
+            <a:endParaRPr lang="en-US" altLang="ko-KR" sz="300" dirty="0"/>
           </a:p>
           <a:p>
             <a:pPr algn="ctr"/>
-            <a:endParaRPr lang="en-US" altLang="ko-KR" sz="566" dirty="0"/>
+            <a:endParaRPr lang="en-US" altLang="ko-KR" sz="200" dirty="0"/>
           </a:p>
         </p:txBody>
       </p:sp>
@@ -3755,7 +3760,7 @@
           <p:cNvPr id="8" name="TextBox 7">
             <a:extLst>
               <a:ext uri="{FF2B5EF4-FFF2-40B4-BE49-F238E27FC236}">
-                <ns2:creationId id="{2E8A191C-5F83-480C-7015-4DA81E72DAFF}"/>
+                <a16:creationId xmlns:a16="http://schemas.microsoft.com/office/drawing/2014/main" id="{2E8A191C-5F83-480C-7015-4DA81E72DAFF}"/>
               </a:ext>
             </a:extLst>
           </p:cNvPr>
@@ -3764,8 +3769,8 @@
         </p:nvSpPr>
         <p:spPr>
           <a:xfrm>
-            <a:off x="187421" y="918582"/>
-            <a:ext cx="1420861" cy="228501"/>
+            <a:off x="2511159" y="3780380"/>
+            <a:ext cx="501770" cy="161583"/>
           </a:xfrm>
           <a:prstGeom prst="rect">
             <a:avLst/>
@@ -3799,7 +3804,7 @@
               <a:fillToRect l="50000" t="50000" r="50000" b="50000"/>
             </a:path>
           </a:gradFill>
-          <a:ln w="20205">
+          <a:ln w="57150">
             <a:solidFill>
               <a:schemeClr val="accent4">
                 <a:lumMod val="50000"/>
@@ -3815,7 +3820,7 @@
           <a:p>
             <a:pPr algn="ctr"/>
             <a:r>
-              <a:rPr lang="ko-KR" altLang="en-US" sz="1273" b="1" dirty="0">
+              <a:rPr lang="ko-KR" altLang="en-US" sz="450" b="1" dirty="0">
                 <a:solidFill>
                   <a:schemeClr val="bg1"/>
                 </a:solidFill>
@@ -3831,7 +3836,7 @@
           <p:cNvPr id="11" name="TextBox 10">
             <a:extLst>
               <a:ext uri="{FF2B5EF4-FFF2-40B4-BE49-F238E27FC236}">
-                <ns2:creationId id="{3836297D-C66E-2FF3-A2C5-91FB5F095DDA}"/>
+                <a16:creationId xmlns:a16="http://schemas.microsoft.com/office/drawing/2014/main" id="{3836297D-C66E-2FF3-A2C5-91FB5F095DDA}"/>
               </a:ext>
             </a:extLst>
           </p:cNvPr>
@@ -3840,14 +3845,14 @@
         </p:nvSpPr>
         <p:spPr>
           <a:xfrm>
-            <a:off x="3782872" y="914976"/>
-            <a:ext cx="3594609" cy="2100031"/>
+            <a:off x="3780875" y="3779107"/>
+            <a:ext cx="1269418" cy="815608"/>
           </a:xfrm>
           <a:prstGeom prst="rect">
             <a:avLst/>
           </a:prstGeom>
           <a:noFill/>
-          <a:ln w="20205">
+          <a:ln w="57150">
             <a:solidFill>
               <a:schemeClr val="accent4">
                 <a:lumMod val="50000"/>
@@ -3862,67 +3867,67 @@
           <a:lstStyle/>
           <a:p>
             <a:pPr algn="ctr"/>
-            <a:endParaRPr lang="en-US" altLang="ko-KR" sz="1273" b="1" dirty="0">
+            <a:endParaRPr lang="en-US" altLang="ko-KR" sz="450" b="1" dirty="0">
               <a:latin typeface="+mn-ea"/>
             </a:endParaRPr>
           </a:p>
           <a:p>
             <a:pPr algn="ctr"/>
-            <a:endParaRPr lang="en-US" altLang="ko-KR" sz="1273" dirty="0">
+            <a:endParaRPr lang="en-US" altLang="ko-KR" sz="450" dirty="0">
               <a:latin typeface="+mn-ea"/>
             </a:endParaRPr>
           </a:p>
           <a:p>
             <a:pPr algn="ctr"/>
-            <a:endParaRPr lang="en-US" altLang="ko-KR" sz="1273" dirty="0">
+            <a:endParaRPr lang="en-US" altLang="ko-KR" sz="450" dirty="0">
               <a:latin typeface="+mn-ea"/>
             </a:endParaRPr>
           </a:p>
           <a:p>
             <a:pPr algn="ctr"/>
-            <a:endParaRPr lang="en-US" altLang="ko-KR" sz="1273" dirty="0">
+            <a:endParaRPr lang="en-US" altLang="ko-KR" sz="450" dirty="0">
               <a:latin typeface="+mn-ea"/>
             </a:endParaRPr>
           </a:p>
           <a:p>
             <a:pPr algn="ctr"/>
-            <a:endParaRPr lang="en-US" altLang="ko-KR" sz="1273" dirty="0">
+            <a:endParaRPr lang="en-US" altLang="ko-KR" sz="450" dirty="0">
               <a:latin typeface="+mn-ea"/>
             </a:endParaRPr>
           </a:p>
           <a:p>
             <a:pPr algn="ctr"/>
-            <a:endParaRPr lang="en-US" altLang="ko-KR" sz="1273" dirty="0">
+            <a:endParaRPr lang="en-US" altLang="ko-KR" sz="450" dirty="0">
               <a:latin typeface="+mn-ea"/>
             </a:endParaRPr>
           </a:p>
           <a:p>
             <a:pPr algn="ctr"/>
-            <a:endParaRPr lang="en-US" altLang="ko-KR" sz="1273" dirty="0">
+            <a:endParaRPr lang="en-US" altLang="ko-KR" sz="450" dirty="0">
               <a:latin typeface="+mn-ea"/>
             </a:endParaRPr>
           </a:p>
           <a:p>
             <a:pPr algn="ctr"/>
-            <a:endParaRPr lang="en-US" altLang="ko-KR" sz="1273" dirty="0">
+            <a:endParaRPr lang="en-US" altLang="ko-KR" sz="450" dirty="0">
               <a:latin typeface="+mn-ea"/>
             </a:endParaRPr>
           </a:p>
           <a:p>
             <a:pPr algn="ctr"/>
-            <a:endParaRPr lang="en-US" altLang="ko-KR" sz="1273" dirty="0">
+            <a:endParaRPr lang="en-US" altLang="ko-KR" sz="450" dirty="0">
               <a:latin typeface="+mn-ea"/>
             </a:endParaRPr>
           </a:p>
           <a:p>
             <a:pPr algn="ctr"/>
-            <a:endParaRPr lang="en-US" altLang="ko-KR" sz="1273" dirty="0">
+            <a:endParaRPr lang="en-US" altLang="ko-KR" sz="450" dirty="0">
               <a:latin typeface="+mn-ea"/>
             </a:endParaRPr>
           </a:p>
           <a:p>
             <a:pPr algn="ctr"/>
-            <a:endParaRPr lang="en-US" altLang="ko-KR" sz="566" dirty="0">
+            <a:endParaRPr lang="en-US" altLang="ko-KR" sz="200" dirty="0">
               <a:latin typeface="+mn-ea"/>
             </a:endParaRPr>
           </a:p>
@@ -3933,7 +3938,7 @@
           <p:cNvPr id="12" name="TextBox 11">
             <a:extLst>
               <a:ext uri="{FF2B5EF4-FFF2-40B4-BE49-F238E27FC236}">
-                <ns2:creationId id="{EE4BA792-A182-B99F-83BD-30DF7E0EBF88}"/>
+                <a16:creationId xmlns:a16="http://schemas.microsoft.com/office/drawing/2014/main" id="{EE4BA792-A182-B99F-83BD-30DF7E0EBF88}"/>
               </a:ext>
             </a:extLst>
           </p:cNvPr>
@@ -3942,8 +3947,8 @@
         </p:nvSpPr>
         <p:spPr>
           <a:xfrm>
-            <a:off x="3779933" y="918582"/>
-            <a:ext cx="2867880" cy="228501"/>
+            <a:off x="3779837" y="3780380"/>
+            <a:ext cx="1012778" cy="161583"/>
           </a:xfrm>
           <a:prstGeom prst="rect">
             <a:avLst/>
@@ -3977,7 +3982,7 @@
               <a:fillToRect l="50000" t="50000" r="50000" b="50000"/>
             </a:path>
           </a:gradFill>
-          <a:ln w="20205">
+          <a:ln w="57150">
             <a:solidFill>
               <a:schemeClr val="accent4">
                 <a:lumMod val="50000"/>
@@ -3993,7 +3998,7 @@
           <a:p>
             <a:pPr algn="ctr"/>
             <a:r>
-              <a:rPr lang="ko-KR" altLang="en-US" sz="1273" b="1" dirty="0">
+              <a:rPr lang="ko-KR" altLang="en-US" sz="450" b="1" dirty="0">
                 <a:solidFill>
                   <a:schemeClr val="bg1"/>
                 </a:solidFill>
@@ -4009,7 +4014,7 @@
           <p:cNvPr id="13" name="TextBox 12">
             <a:extLst>
               <a:ext uri="{FF2B5EF4-FFF2-40B4-BE49-F238E27FC236}">
-                <ns2:creationId id="{C4E37084-1706-89B6-3818-C425F45E15B4}"/>
+                <a16:creationId xmlns:a16="http://schemas.microsoft.com/office/drawing/2014/main" id="{C4E37084-1706-89B6-3818-C425F45E15B4}"/>
               </a:ext>
             </a:extLst>
           </p:cNvPr>
@@ -4018,14 +4023,14 @@
         </p:nvSpPr>
         <p:spPr>
           <a:xfrm>
-            <a:off x="3779933" y="1182022"/>
-            <a:ext cx="1797603" cy="1468934"/>
+            <a:off x="3779837" y="3873413"/>
+            <a:ext cx="634815" cy="1200329"/>
           </a:xfrm>
           <a:prstGeom prst="rect">
             <a:avLst/>
           </a:prstGeom>
           <a:noFill/>
-          <a:ln w="20205">
+          <a:ln w="57150">
             <a:noFill/>
             <a:prstDash val="dash"/>
           </a:ln>
@@ -4037,162 +4042,162 @@
           <a:lstStyle/>
           <a:p>
             <a:r>
-              <a:rPr lang="en-US" altLang="ko-KR" sz="848" dirty="0"/>
+              <a:rPr lang="en-US" altLang="ko-KR" sz="300" dirty="0"/>
               <a:t> 1</a:t>
             </a:r>
             <a:r>
-              <a:rPr lang="ko-KR" altLang="en-US" sz="848" dirty="0"/>
+              <a:rPr lang="ko-KR" altLang="en-US" sz="300" dirty="0"/>
               <a:t>주차</a:t>
             </a:r>
             <a:r>
-              <a:rPr lang="en-US" altLang="ko-KR" sz="848" dirty="0"/>
+              <a:rPr lang="en-US" altLang="ko-KR" sz="300" dirty="0"/>
               <a:t>: </a:t>
             </a:r>
             <a:r>
-              <a:rPr lang="ko-KR" altLang="en-US" sz="848" dirty="0"/>
+              <a:rPr lang="ko-KR" altLang="en-US" sz="300" dirty="0"/>
               <a:t>프로젝트 주제 선정 및 개발 </a:t>
             </a:r>
             <a:r>
-              <a:rPr lang="en-US" altLang="ko-KR" sz="848" dirty="0"/>
+              <a:rPr lang="en-US" altLang="ko-KR" sz="300" dirty="0"/>
               <a:t>		</a:t>
             </a:r>
             <a:r>
-              <a:rPr lang="ko-KR" altLang="en-US" sz="848" dirty="0"/>
+              <a:rPr lang="ko-KR" altLang="en-US" sz="300" dirty="0"/>
               <a:t>환경 조사</a:t>
             </a:r>
-            <a:endParaRPr lang="en-US" altLang="ko-KR" sz="848" dirty="0"/>
-          </a:p>
-          <a:p>
-            <a:r>
-              <a:rPr lang="en-US" altLang="ko-KR" sz="848" dirty="0"/>
+            <a:endParaRPr lang="en-US" altLang="ko-KR" sz="300" dirty="0"/>
+          </a:p>
+          <a:p>
+            <a:r>
+              <a:rPr lang="en-US" altLang="ko-KR" sz="300" dirty="0"/>
               <a:t> 2</a:t>
             </a:r>
             <a:r>
-              <a:rPr lang="ko-KR" altLang="en-US" sz="848" dirty="0"/>
+              <a:rPr lang="ko-KR" altLang="en-US" sz="300" dirty="0"/>
               <a:t>주차</a:t>
             </a:r>
             <a:r>
-              <a:rPr lang="en-US" altLang="ko-KR" sz="848" dirty="0"/>
+              <a:rPr lang="en-US" altLang="ko-KR" sz="300" dirty="0"/>
               <a:t>: </a:t>
             </a:r>
             <a:r>
-              <a:rPr lang="ko-KR" altLang="ko-KR" sz="848" dirty="0"/>
+              <a:rPr lang="ko-KR" altLang="ko-KR" sz="300" dirty="0"/>
               <a:t>OpenPI·Pi0.5 기반 코드 구조 </a:t>
             </a:r>
             <a:r>
-              <a:rPr lang="en-US" altLang="ko-KR" sz="848" dirty="0"/>
+              <a:rPr lang="en-US" altLang="ko-KR" sz="300" dirty="0"/>
               <a:t>		</a:t>
             </a:r>
             <a:r>
-              <a:rPr lang="ko-KR" altLang="ko-KR" sz="848" dirty="0"/>
+              <a:rPr lang="ko-KR" altLang="ko-KR" sz="300" dirty="0"/>
               <a:t>분석 및 학습 파이프라인 구축</a:t>
             </a:r>
-            <a:endParaRPr lang="en-US" altLang="ko-KR" sz="848" dirty="0"/>
-          </a:p>
-          <a:p>
-            <a:r>
-              <a:rPr lang="en-US" altLang="ko-KR" sz="848" dirty="0"/>
+            <a:endParaRPr lang="en-US" altLang="ko-KR" sz="300" dirty="0"/>
+          </a:p>
+          <a:p>
+            <a:r>
+              <a:rPr lang="en-US" altLang="ko-KR" sz="300" dirty="0"/>
               <a:t> 3</a:t>
             </a:r>
             <a:r>
-              <a:rPr lang="ko-KR" altLang="en-US" sz="848" dirty="0"/>
+              <a:rPr lang="ko-KR" altLang="en-US" sz="300" dirty="0"/>
               <a:t>주차</a:t>
             </a:r>
             <a:r>
-              <a:rPr lang="en-US" altLang="ko-KR" sz="848" dirty="0"/>
+              <a:rPr lang="en-US" altLang="ko-KR" sz="300" dirty="0"/>
               <a:t>: </a:t>
             </a:r>
             <a:r>
-              <a:rPr lang="ko-KR" altLang="ko-KR" sz="848" dirty="0"/>
+              <a:rPr lang="ko-KR" altLang="ko-KR" sz="300" dirty="0"/>
               <a:t>모델 구조 설계 및 실험 환경 </a:t>
             </a:r>
             <a:r>
-              <a:rPr lang="en-US" altLang="ko-KR" sz="848" dirty="0"/>
+              <a:rPr lang="en-US" altLang="ko-KR" sz="300" dirty="0"/>
               <a:t>		</a:t>
             </a:r>
             <a:r>
-              <a:rPr lang="ko-KR" altLang="ko-KR" sz="848" dirty="0"/>
+              <a:rPr lang="ko-KR" altLang="ko-KR" sz="300" dirty="0"/>
               <a:t>구성</a:t>
             </a:r>
-            <a:endParaRPr lang="en-US" altLang="ko-KR" sz="848" dirty="0"/>
-          </a:p>
-          <a:p>
-            <a:r>
-              <a:rPr lang="en-US" altLang="ko-KR" sz="848" dirty="0"/>
+            <a:endParaRPr lang="en-US" altLang="ko-KR" sz="300" dirty="0"/>
+          </a:p>
+          <a:p>
+            <a:r>
+              <a:rPr lang="en-US" altLang="ko-KR" sz="300" dirty="0"/>
               <a:t> 4</a:t>
             </a:r>
             <a:r>
-              <a:rPr lang="ko-KR" altLang="en-US" sz="848" dirty="0"/>
+              <a:rPr lang="ko-KR" altLang="en-US" sz="300" dirty="0"/>
               <a:t>주차</a:t>
             </a:r>
             <a:r>
-              <a:rPr lang="en-US" altLang="ko-KR" sz="848" dirty="0"/>
+              <a:rPr lang="en-US" altLang="ko-KR" sz="300" dirty="0"/>
               <a:t>:  </a:t>
             </a:r>
             <a:r>
-              <a:rPr lang="ko-KR" altLang="ko-KR" sz="848" dirty="0" err="1"/>
+              <a:rPr lang="ko-KR" altLang="ko-KR" sz="300" dirty="0" err="1"/>
               <a:t>OmniGibson</a:t>
             </a:r>
             <a:r>
-              <a:rPr lang="ko-KR" altLang="ko-KR" sz="848" dirty="0"/>
+              <a:rPr lang="ko-KR" altLang="ko-KR" sz="300" dirty="0"/>
               <a:t> 평가 환경 구축</a:t>
             </a:r>
-            <a:endParaRPr lang="en-US" altLang="ko-KR" sz="848" dirty="0"/>
-          </a:p>
-          <a:p>
-            <a:r>
-              <a:rPr lang="en-US" altLang="ko-KR" sz="848" dirty="0"/>
+            <a:endParaRPr lang="en-US" altLang="ko-KR" sz="300" dirty="0"/>
+          </a:p>
+          <a:p>
+            <a:r>
+              <a:rPr lang="en-US" altLang="ko-KR" sz="300" dirty="0"/>
               <a:t> 5</a:t>
             </a:r>
             <a:r>
-              <a:rPr lang="ko-KR" altLang="en-US" sz="848" dirty="0"/>
+              <a:rPr lang="ko-KR" altLang="en-US" sz="300" dirty="0"/>
               <a:t>주차</a:t>
             </a:r>
             <a:r>
-              <a:rPr lang="en-US" altLang="ko-KR" sz="848" dirty="0"/>
+              <a:rPr lang="en-US" altLang="ko-KR" sz="300" dirty="0"/>
               <a:t>: </a:t>
             </a:r>
             <a:r>
-              <a:rPr lang="ko-KR" altLang="ko-KR" sz="848" dirty="0"/>
+              <a:rPr lang="ko-KR" altLang="ko-KR" sz="300" dirty="0"/>
               <a:t>실데이터 학습 파이프라인 </a:t>
             </a:r>
             <a:r>
-              <a:rPr lang="en-US" altLang="ko-KR" sz="848" dirty="0"/>
+              <a:rPr lang="en-US" altLang="ko-KR" sz="300" dirty="0"/>
               <a:t>			</a:t>
             </a:r>
             <a:r>
-              <a:rPr lang="ko-KR" altLang="ko-KR" sz="848" dirty="0"/>
+              <a:rPr lang="ko-KR" altLang="ko-KR" sz="300" dirty="0"/>
               <a:t>구현</a:t>
             </a:r>
-            <a:endParaRPr lang="en-US" altLang="ko-KR" sz="848" dirty="0"/>
-          </a:p>
-          <a:p>
-            <a:r>
-              <a:rPr lang="en-US" altLang="ko-KR" sz="848" dirty="0"/>
+            <a:endParaRPr lang="en-US" altLang="ko-KR" sz="300" dirty="0"/>
+          </a:p>
+          <a:p>
+            <a:r>
+              <a:rPr lang="en-US" altLang="ko-KR" sz="300" dirty="0"/>
               <a:t> 6</a:t>
             </a:r>
             <a:r>
-              <a:rPr lang="ko-KR" altLang="en-US" sz="848" dirty="0"/>
+              <a:rPr lang="ko-KR" altLang="en-US" sz="300" dirty="0"/>
               <a:t>주차</a:t>
             </a:r>
             <a:r>
-              <a:rPr lang="en-US" altLang="ko-KR" sz="848" dirty="0"/>
+              <a:rPr lang="en-US" altLang="ko-KR" sz="300" dirty="0"/>
               <a:t>: </a:t>
             </a:r>
             <a:r>
-              <a:rPr lang="ko-KR" altLang="ko-KR" sz="848" dirty="0"/>
+              <a:rPr lang="ko-KR" altLang="ko-KR" sz="300" dirty="0"/>
               <a:t>메모리 최적화 및 학습 성능 </a:t>
             </a:r>
             <a:r>
-              <a:rPr lang="en-US" altLang="ko-KR" sz="848" dirty="0"/>
+              <a:rPr lang="en-US" altLang="ko-KR" sz="300" dirty="0"/>
               <a:t>		</a:t>
             </a:r>
             <a:r>
-              <a:rPr lang="ko-KR" altLang="ko-KR" sz="848" dirty="0"/>
+              <a:rPr lang="ko-KR" altLang="ko-KR" sz="300" dirty="0"/>
               <a:t>분석</a:t>
             </a:r>
             <a:r>
-              <a:rPr lang="en-US" altLang="ko-KR" sz="848" dirty="0"/>
+              <a:rPr lang="en-US" altLang="ko-KR" sz="300" dirty="0"/>
               <a:t> </a:t>
             </a:r>
           </a:p>
@@ -4203,7 +4208,7 @@
           <p:cNvPr id="18" name="TextBox 17">
             <a:extLst>
               <a:ext uri="{FF2B5EF4-FFF2-40B4-BE49-F238E27FC236}">
-                <ns2:creationId id="{2CFBE48B-B887-151D-2BF6-D02E76534210}"/>
+                <a16:creationId xmlns:a16="http://schemas.microsoft.com/office/drawing/2014/main" id="{2CFBE48B-B887-151D-2BF6-D02E76534210}"/>
               </a:ext>
             </a:extLst>
           </p:cNvPr>
@@ -4212,14 +4217,14 @@
         </p:nvSpPr>
         <p:spPr>
           <a:xfrm>
-            <a:off x="5577536" y="1168845"/>
-            <a:ext cx="1797603" cy="1044575"/>
+            <a:off x="4414651" y="3868759"/>
+            <a:ext cx="634815" cy="680956"/>
           </a:xfrm>
           <a:prstGeom prst="rect">
             <a:avLst/>
           </a:prstGeom>
           <a:noFill/>
-          <a:ln w="20205">
+          <a:ln w="57150">
             <a:noFill/>
             <a:prstDash val="dash"/>
           </a:ln>
@@ -4231,128 +4236,128 @@
           <a:lstStyle/>
           <a:p>
             <a:r>
-              <a:rPr lang="en-US" altLang="ko-KR" sz="848" dirty="0"/>
+              <a:rPr lang="en-US" altLang="ko-KR" sz="300" dirty="0"/>
               <a:t> 7</a:t>
             </a:r>
             <a:r>
-              <a:rPr lang="ko-KR" altLang="en-US" sz="848" dirty="0"/>
+              <a:rPr lang="ko-KR" altLang="en-US" sz="300" dirty="0"/>
               <a:t>주차</a:t>
             </a:r>
             <a:r>
-              <a:rPr lang="en-US" altLang="ko-KR" sz="848" dirty="0"/>
+              <a:rPr lang="en-US" altLang="ko-KR" sz="300" dirty="0"/>
               <a:t>: </a:t>
             </a:r>
             <a:r>
-              <a:rPr lang="ko-KR" altLang="ko-KR" sz="848" dirty="0"/>
+              <a:rPr lang="ko-KR" altLang="ko-KR" sz="300" dirty="0"/>
               <a:t>학습 및 W&amp;B 로깅 시스템 </a:t>
             </a:r>
             <a:r>
-              <a:rPr lang="en-US" altLang="ko-KR" sz="848" dirty="0"/>
+              <a:rPr lang="en-US" altLang="ko-KR" sz="300" dirty="0"/>
               <a:t>			</a:t>
             </a:r>
             <a:r>
-              <a:rPr lang="ko-KR" altLang="ko-KR" sz="848" dirty="0"/>
+              <a:rPr lang="ko-KR" altLang="ko-KR" sz="300" dirty="0"/>
               <a:t>구축</a:t>
             </a:r>
-            <a:endParaRPr lang="en-US" altLang="ko-KR" sz="848" dirty="0"/>
-          </a:p>
-          <a:p>
-            <a:r>
-              <a:rPr lang="en-US" altLang="ko-KR" sz="848" dirty="0"/>
+            <a:endParaRPr lang="en-US" altLang="ko-KR" sz="300" dirty="0"/>
+          </a:p>
+          <a:p>
+            <a:r>
+              <a:rPr lang="en-US" altLang="ko-KR" sz="300" dirty="0"/>
               <a:t> 8</a:t>
             </a:r>
             <a:r>
-              <a:rPr lang="ko-KR" altLang="en-US" sz="848" dirty="0"/>
+              <a:rPr lang="ko-KR" altLang="en-US" sz="300" dirty="0"/>
               <a:t>주차</a:t>
             </a:r>
             <a:r>
-              <a:rPr lang="en-US" altLang="ko-KR" sz="848" dirty="0"/>
+              <a:rPr lang="en-US" altLang="ko-KR" sz="300" dirty="0"/>
               <a:t>: </a:t>
             </a:r>
             <a:r>
-              <a:rPr lang="ko-KR" altLang="en-US" sz="848" dirty="0"/>
+              <a:rPr lang="ko-KR" altLang="en-US" sz="300" dirty="0"/>
               <a:t>경량화 모델 학습</a:t>
             </a:r>
-            <a:endParaRPr lang="en-US" altLang="ko-KR" sz="848" dirty="0"/>
-          </a:p>
-          <a:p>
-            <a:r>
-              <a:rPr lang="en-US" altLang="ko-KR" sz="848" dirty="0"/>
+            <a:endParaRPr lang="en-US" altLang="ko-KR" sz="300" dirty="0"/>
+          </a:p>
+          <a:p>
+            <a:r>
+              <a:rPr lang="en-US" altLang="ko-KR" sz="300" dirty="0"/>
               <a:t> 9</a:t>
             </a:r>
             <a:r>
-              <a:rPr lang="ko-KR" altLang="en-US" sz="848" dirty="0"/>
+              <a:rPr lang="ko-KR" altLang="en-US" sz="300" dirty="0"/>
               <a:t>주차</a:t>
             </a:r>
             <a:r>
-              <a:rPr lang="en-US" altLang="ko-KR" sz="848" dirty="0"/>
+              <a:rPr lang="en-US" altLang="ko-KR" sz="300" dirty="0"/>
               <a:t>: </a:t>
             </a:r>
             <a:r>
-              <a:rPr lang="ko-KR" altLang="en-US" sz="848" dirty="0"/>
+              <a:rPr lang="ko-KR" altLang="en-US" sz="300" dirty="0"/>
               <a:t>경량화 모델 학습</a:t>
             </a:r>
-            <a:endParaRPr lang="en-US" altLang="ko-KR" sz="848" dirty="0"/>
-          </a:p>
-          <a:p>
-            <a:r>
-              <a:rPr lang="en-US" altLang="ko-KR" sz="848" dirty="0"/>
+            <a:endParaRPr lang="en-US" altLang="ko-KR" sz="300" dirty="0"/>
+          </a:p>
+          <a:p>
+            <a:r>
+              <a:rPr lang="en-US" altLang="ko-KR" sz="300" dirty="0"/>
               <a:t> 10</a:t>
             </a:r>
             <a:r>
-              <a:rPr lang="ko-KR" altLang="en-US" sz="848" dirty="0"/>
+              <a:rPr lang="ko-KR" altLang="en-US" sz="300" dirty="0"/>
               <a:t>주차</a:t>
             </a:r>
             <a:r>
-              <a:rPr lang="en-US" altLang="ko-KR" sz="848" dirty="0"/>
+              <a:rPr lang="en-US" altLang="ko-KR" sz="300" dirty="0"/>
               <a:t>: </a:t>
             </a:r>
             <a:r>
-              <a:rPr lang="ko-KR" altLang="en-US" sz="848" dirty="0"/>
+              <a:rPr lang="ko-KR" altLang="en-US" sz="300" dirty="0"/>
               <a:t>경량화 모델 학습</a:t>
             </a:r>
-            <a:endParaRPr lang="en-US" altLang="ko-KR" sz="848" dirty="0"/>
-          </a:p>
-          <a:p>
-            <a:r>
-              <a:rPr lang="en-US" altLang="ko-KR" sz="848" dirty="0"/>
+            <a:endParaRPr lang="en-US" altLang="ko-KR" sz="300" dirty="0"/>
+          </a:p>
+          <a:p>
+            <a:r>
+              <a:rPr lang="en-US" altLang="ko-KR" sz="300" dirty="0"/>
               <a:t> 11</a:t>
             </a:r>
             <a:r>
-              <a:rPr lang="ko-KR" altLang="en-US" sz="848" dirty="0"/>
+              <a:rPr lang="ko-KR" altLang="en-US" sz="300" dirty="0"/>
               <a:t>주차</a:t>
             </a:r>
             <a:r>
-              <a:rPr lang="en-US" altLang="ko-KR" sz="848" dirty="0"/>
+              <a:rPr lang="en-US" altLang="ko-KR" sz="300" dirty="0"/>
               <a:t>: rollout </a:t>
             </a:r>
             <a:r>
-              <a:rPr lang="ko-KR" altLang="en-US" sz="848" dirty="0"/>
+              <a:rPr lang="ko-KR" altLang="en-US" sz="300" dirty="0"/>
               <a:t>안정화 및 평가 개선</a:t>
             </a:r>
-            <a:endParaRPr lang="en-US" altLang="ko-KR" sz="848" dirty="0"/>
-          </a:p>
-          <a:p>
-            <a:r>
-              <a:rPr lang="en-US" altLang="ko-KR" sz="848" dirty="0"/>
+            <a:endParaRPr lang="en-US" altLang="ko-KR" sz="300" dirty="0"/>
+          </a:p>
+          <a:p>
+            <a:r>
+              <a:rPr lang="en-US" altLang="ko-KR" sz="300" dirty="0"/>
               <a:t> 12</a:t>
             </a:r>
             <a:r>
-              <a:rPr lang="ko-KR" altLang="en-US" sz="848" dirty="0"/>
+              <a:rPr lang="ko-KR" altLang="en-US" sz="300" dirty="0"/>
               <a:t>주차</a:t>
             </a:r>
             <a:r>
-              <a:rPr lang="en-US" altLang="ko-KR" sz="848" dirty="0"/>
+              <a:rPr lang="en-US" altLang="ko-KR" sz="300" dirty="0"/>
               <a:t>: </a:t>
             </a:r>
             <a:r>
-              <a:rPr lang="ko-KR" altLang="ko-KR" sz="848" dirty="0"/>
+              <a:rPr lang="ko-KR" altLang="ko-KR" sz="300" dirty="0"/>
               <a:t>최종 실험 결과 정리</a:t>
             </a:r>
-            <a:endParaRPr lang="en-US" altLang="ko-KR" sz="848" dirty="0"/>
-          </a:p>
-          <a:p>
-            <a:endParaRPr lang="ko-KR" altLang="en-US" dirty="0"/>
+            <a:endParaRPr lang="en-US" altLang="ko-KR" sz="300" dirty="0"/>
+          </a:p>
+          <a:p>
+            <a:endParaRPr lang="ko-KR" altLang="en-US" sz="225" dirty="0"/>
           </a:p>
         </p:txBody>
       </p:sp>
@@ -4361,7 +4366,7 @@
           <p:cNvPr id="24" name="TextBox 23">
             <a:extLst>
               <a:ext uri="{FF2B5EF4-FFF2-40B4-BE49-F238E27FC236}">
-                <ns2:creationId id="{2028F00E-856C-97B8-EDC1-27E6B218DCA2}"/>
+                <a16:creationId xmlns:a16="http://schemas.microsoft.com/office/drawing/2014/main" id="{2028F00E-856C-97B8-EDC1-27E6B218DCA2}"/>
               </a:ext>
             </a:extLst>
           </p:cNvPr>
@@ -4370,14 +4375,14 @@
         </p:nvSpPr>
         <p:spPr>
           <a:xfrm>
-            <a:off x="3779933" y="2695134"/>
-            <a:ext cx="3595206" cy="293787"/>
+            <a:off x="3779837" y="4407760"/>
+            <a:ext cx="1269629" cy="184666"/>
           </a:xfrm>
           <a:prstGeom prst="rect">
             <a:avLst/>
           </a:prstGeom>
           <a:noFill/>
-          <a:ln w="20205">
+          <a:ln w="57150">
             <a:noFill/>
           </a:ln>
         </p:spPr>
@@ -4388,69 +4393,69 @@
           <a:lstStyle/>
           <a:p>
             <a:r>
-              <a:rPr lang="ko-KR" altLang="en-US" sz="848" dirty="0">
+              <a:rPr lang="ko-KR" altLang="en-US" sz="300" dirty="0">
                 <a:latin typeface="+mn-ea"/>
               </a:rPr>
               <a:t> 강지호</a:t>
             </a:r>
             <a:r>
-              <a:rPr lang="en-US" altLang="ko-KR" sz="848" dirty="0">
+              <a:rPr lang="en-US" altLang="ko-KR" sz="300" dirty="0">
                 <a:latin typeface="+mn-ea"/>
               </a:rPr>
               <a:t>: </a:t>
             </a:r>
             <a:r>
-              <a:rPr lang="ko-KR" altLang="ko-KR" sz="848" dirty="0"/>
+              <a:rPr lang="ko-KR" altLang="ko-KR" sz="300" dirty="0"/>
               <a:t>VLA 모델 </a:t>
             </a:r>
             <a:r>
-              <a:rPr lang="ko-KR" altLang="ko-KR" sz="848" dirty="0" err="1"/>
+              <a:rPr lang="ko-KR" altLang="ko-KR" sz="300" dirty="0" err="1"/>
               <a:t>구현·학습</a:t>
             </a:r>
             <a:r>
-              <a:rPr lang="ko-KR" altLang="ko-KR" sz="848" dirty="0"/>
+              <a:rPr lang="ko-KR" altLang="ko-KR" sz="300" dirty="0"/>
               <a:t> 및 핵심 알고리즘 실험 진행</a:t>
             </a:r>
-            <a:endParaRPr lang="en-US" altLang="ko-KR" sz="848" dirty="0">
+            <a:endParaRPr lang="en-US" altLang="ko-KR" sz="300" dirty="0">
               <a:latin typeface="+mn-ea"/>
             </a:endParaRPr>
           </a:p>
           <a:p>
             <a:r>
-              <a:rPr lang="ko-KR" altLang="en-US" sz="848" dirty="0">
+              <a:rPr lang="ko-KR" altLang="en-US" sz="300" dirty="0">
                 <a:latin typeface="+mn-ea"/>
               </a:rPr>
               <a:t> </a:t>
             </a:r>
             <a:r>
-              <a:rPr lang="ko-KR" altLang="en-US" sz="848" dirty="0" err="1">
+              <a:rPr lang="ko-KR" altLang="en-US" sz="300" dirty="0" err="1">
                 <a:latin typeface="+mn-ea"/>
               </a:rPr>
               <a:t>문병선</a:t>
             </a:r>
             <a:r>
-              <a:rPr lang="en-US" altLang="ko-KR" sz="848" dirty="0">
+              <a:rPr lang="en-US" altLang="ko-KR" sz="300" dirty="0">
                 <a:latin typeface="+mn-ea"/>
               </a:rPr>
               <a:t>: </a:t>
             </a:r>
             <a:r>
-              <a:rPr lang="ko-KR" altLang="ko-KR" sz="848" dirty="0" err="1"/>
+              <a:rPr lang="ko-KR" altLang="ko-KR" sz="300" dirty="0" err="1"/>
               <a:t>OmniGibson</a:t>
             </a:r>
             <a:r>
-              <a:rPr lang="ko-KR" altLang="ko-KR" sz="848" dirty="0"/>
+              <a:rPr lang="ko-KR" altLang="ko-KR" sz="300" dirty="0"/>
               <a:t> 평가 환경 </a:t>
             </a:r>
             <a:r>
-              <a:rPr lang="ko-KR" altLang="ko-KR" sz="848" dirty="0" err="1"/>
+              <a:rPr lang="ko-KR" altLang="ko-KR" sz="300" dirty="0" err="1"/>
               <a:t>구축·영상</a:t>
             </a:r>
             <a:r>
-              <a:rPr lang="ko-KR" altLang="ko-KR" sz="848" dirty="0"/>
+              <a:rPr lang="ko-KR" altLang="ko-KR" sz="300" dirty="0"/>
               <a:t> 생성 및 결과 정리</a:t>
             </a:r>
-            <a:endParaRPr lang="en-US" altLang="ko-KR" sz="848" dirty="0">
+            <a:endParaRPr lang="en-US" altLang="ko-KR" sz="300" dirty="0">
               <a:latin typeface="+mn-ea"/>
             </a:endParaRPr>
           </a:p>
@@ -4461,7 +4466,7 @@
           <p:cNvPr id="27" name="TextBox 26">
             <a:extLst>
               <a:ext uri="{FF2B5EF4-FFF2-40B4-BE49-F238E27FC236}">
-                <ns2:creationId id="{AD26A61D-12C0-0739-A1E6-47055D9A7D9B}"/>
+                <a16:creationId xmlns:a16="http://schemas.microsoft.com/office/drawing/2014/main" id="{AD26A61D-12C0-0739-A1E6-47055D9A7D9B}"/>
               </a:ext>
             </a:extLst>
           </p:cNvPr>
@@ -4470,14 +4475,14 @@
         </p:nvSpPr>
         <p:spPr>
           <a:xfrm>
-            <a:off x="181789" y="2181299"/>
-            <a:ext cx="3601094" cy="5353447"/>
+            <a:off x="2509170" y="4226302"/>
+            <a:ext cx="1271708" cy="1973489"/>
           </a:xfrm>
           <a:prstGeom prst="rect">
             <a:avLst/>
           </a:prstGeom>
           <a:noFill/>
-          <a:ln w="20205">
+          <a:ln w="57150">
             <a:solidFill>
               <a:schemeClr val="accent4">
                 <a:lumMod val="50000"/>
@@ -4492,77 +4497,77 @@
           <a:lstStyle/>
           <a:p>
             <a:pPr algn="ctr"/>
-            <a:endParaRPr lang="en-US" altLang="ko-KR" sz="1909" b="1" dirty="0">
+            <a:endParaRPr lang="en-US" altLang="ko-KR" sz="674" b="1" dirty="0">
               <a:latin typeface="+mn-ea"/>
             </a:endParaRPr>
           </a:p>
           <a:p>
             <a:pPr algn="ctr"/>
-            <a:endParaRPr lang="en-US" altLang="ko-KR" sz="1273" dirty="0">
+            <a:endParaRPr lang="en-US" altLang="ko-KR" sz="450" dirty="0">
               <a:latin typeface="+mn-ea"/>
             </a:endParaRPr>
           </a:p>
           <a:p>
             <a:pPr algn="ctr"/>
-            <a:endParaRPr lang="en-US" altLang="ko-KR" sz="1273" dirty="0">
+            <a:endParaRPr lang="en-US" altLang="ko-KR" sz="450" dirty="0">
               <a:latin typeface="+mn-ea"/>
             </a:endParaRPr>
           </a:p>
           <a:p>
             <a:pPr algn="ctr"/>
-            <a:endParaRPr lang="en-US" altLang="ko-KR" sz="1273" dirty="0">
+            <a:endParaRPr lang="en-US" altLang="ko-KR" sz="450" dirty="0">
               <a:latin typeface="+mn-ea"/>
             </a:endParaRPr>
           </a:p>
           <a:p>
             <a:pPr algn="ctr"/>
-            <a:endParaRPr lang="en-US" altLang="ko-KR" sz="1273" dirty="0">
+            <a:endParaRPr lang="en-US" altLang="ko-KR" sz="450" dirty="0">
               <a:latin typeface="+mn-ea"/>
             </a:endParaRPr>
           </a:p>
           <a:p>
             <a:pPr algn="ctr"/>
-            <a:endParaRPr lang="en-US" altLang="ko-KR" sz="1273" dirty="0">
+            <a:endParaRPr lang="en-US" altLang="ko-KR" sz="450" dirty="0">
               <a:latin typeface="+mn-ea"/>
             </a:endParaRPr>
           </a:p>
           <a:p>
             <a:pPr algn="ctr"/>
-            <a:endParaRPr lang="en-US" altLang="ko-KR" sz="1273" dirty="0">
+            <a:endParaRPr lang="en-US" altLang="ko-KR" sz="450" dirty="0">
               <a:latin typeface="+mn-ea"/>
             </a:endParaRPr>
           </a:p>
           <a:p>
             <a:pPr algn="ctr"/>
-            <a:endParaRPr lang="en-US" altLang="ko-KR" sz="1273" dirty="0">
+            <a:endParaRPr lang="en-US" altLang="ko-KR" sz="450" dirty="0">
               <a:latin typeface="+mn-ea"/>
             </a:endParaRPr>
           </a:p>
           <a:p>
             <a:pPr algn="ctr"/>
-            <a:endParaRPr lang="en-US" altLang="ko-KR" sz="1273" dirty="0">
+            <a:endParaRPr lang="en-US" altLang="ko-KR" sz="450" dirty="0">
               <a:latin typeface="+mn-ea"/>
             </a:endParaRPr>
           </a:p>
           <a:p>
             <a:pPr algn="ctr"/>
-            <a:endParaRPr lang="en-US" altLang="ko-KR" sz="1273" dirty="0">
+            <a:endParaRPr lang="en-US" altLang="ko-KR" sz="450" dirty="0">
               <a:latin typeface="+mn-ea"/>
             </a:endParaRPr>
           </a:p>
           <a:p>
             <a:pPr algn="ctr"/>
-            <a:endParaRPr lang="en-US" altLang="ko-KR" sz="1273" dirty="0">
+            <a:endParaRPr lang="en-US" altLang="ko-KR" sz="450" dirty="0">
               <a:latin typeface="+mn-ea"/>
             </a:endParaRPr>
           </a:p>
           <a:p>
-            <a:pPr marL="121227" indent="1">
+            <a:pPr marL="42813" indent="-42813">
               <a:buFont typeface="Arial" panose="020B0604020202020204" pitchFamily="34" charset="0"/>
               <a:buChar char="•"/>
             </a:pPr>
             <a:r>
-              <a:rPr lang="en-US" altLang="ko-KR" sz="848" b="1" dirty="0">
+              <a:rPr lang="en-US" altLang="ko-KR" sz="300" b="1" dirty="0">
                 <a:latin typeface="+mn-ea"/>
               </a:rPr>
               <a:t>Model Architecture</a:t>
@@ -4570,175 +4575,175 @@
           </a:p>
           <a:p>
             <a:r>
-              <a:rPr lang="en-US" altLang="ko-KR" sz="848" dirty="0">
+              <a:rPr lang="en-US" altLang="ko-KR" sz="300" dirty="0">
                 <a:latin typeface="+mn-ea"/>
               </a:rPr>
               <a:t> </a:t>
             </a:r>
             <a:r>
-              <a:rPr lang="en-US" altLang="ko-KR" sz="848" b="1" dirty="0">
+              <a:rPr lang="en-US" altLang="ko-KR" sz="300" b="1" dirty="0">
                 <a:latin typeface="+mn-ea"/>
               </a:rPr>
               <a:t>Backbone:</a:t>
             </a:r>
             <a:r>
-              <a:rPr lang="en-US" altLang="ko-KR" sz="848" dirty="0">
+              <a:rPr lang="en-US" altLang="ko-KR" sz="300" dirty="0">
                 <a:latin typeface="+mn-ea"/>
               </a:rPr>
               <a:t> </a:t>
             </a:r>
             <a:r>
-              <a:rPr lang="ko-KR" altLang="ko-KR" sz="848" dirty="0" err="1">
+              <a:rPr lang="ko-KR" altLang="ko-KR" sz="300" dirty="0" err="1">
                 <a:latin typeface="+mn-ea"/>
               </a:rPr>
               <a:t>OpenPI의</a:t>
             </a:r>
             <a:r>
-              <a:rPr lang="ko-KR" altLang="ko-KR" sz="848" dirty="0">
+              <a:rPr lang="ko-KR" altLang="ko-KR" sz="300" dirty="0">
                 <a:latin typeface="+mn-ea"/>
               </a:rPr>
               <a:t> Pi0.5 기반 구조(</a:t>
             </a:r>
             <a:r>
-              <a:rPr lang="ko-KR" altLang="ko-KR" sz="848" dirty="0" err="1">
+              <a:rPr lang="ko-KR" altLang="ko-KR" sz="300" dirty="0" err="1">
                 <a:latin typeface="+mn-ea"/>
               </a:rPr>
               <a:t>SigLIP</a:t>
             </a:r>
             <a:r>
-              <a:rPr lang="en-US" altLang="ko-KR" sz="848" dirty="0">
+              <a:rPr lang="en-US" altLang="ko-KR" sz="300" dirty="0">
                 <a:latin typeface="+mn-ea"/>
               </a:rPr>
               <a:t> </a:t>
             </a:r>
             <a:r>
-              <a:rPr lang="ko-KR" altLang="ko-KR" sz="848" dirty="0">
+              <a:rPr lang="ko-KR" altLang="ko-KR" sz="300" dirty="0">
                 <a:latin typeface="+mn-ea"/>
               </a:rPr>
               <a:t>+</a:t>
             </a:r>
             <a:r>
-              <a:rPr lang="en-US" altLang="ko-KR" sz="848" dirty="0">
+              <a:rPr lang="en-US" altLang="ko-KR" sz="300" dirty="0">
                 <a:latin typeface="+mn-ea"/>
               </a:rPr>
               <a:t> </a:t>
             </a:r>
             <a:r>
-              <a:rPr lang="ko-KR" altLang="ko-KR" sz="848" dirty="0" err="1">
+              <a:rPr lang="ko-KR" altLang="ko-KR" sz="300" dirty="0" err="1">
                 <a:latin typeface="+mn-ea"/>
               </a:rPr>
               <a:t>PaliGemma</a:t>
             </a:r>
             <a:r>
-              <a:rPr lang="en-US" altLang="ko-KR" sz="848" dirty="0">
+              <a:rPr lang="en-US" altLang="ko-KR" sz="300" dirty="0">
                 <a:latin typeface="+mn-ea"/>
               </a:rPr>
               <a:t> + </a:t>
             </a:r>
             <a:r>
-              <a:rPr lang="ko-KR" altLang="ko-KR" sz="848" dirty="0" err="1">
+              <a:rPr lang="ko-KR" altLang="ko-KR" sz="300" dirty="0" err="1">
                 <a:latin typeface="+mn-ea"/>
               </a:rPr>
               <a:t>Flow</a:t>
             </a:r>
             <a:r>
-              <a:rPr lang="en-US" altLang="ko-KR" sz="848" dirty="0">
+              <a:rPr lang="en-US" altLang="ko-KR" sz="300" dirty="0">
                 <a:latin typeface="+mn-ea"/>
               </a:rPr>
               <a:t> </a:t>
             </a:r>
             <a:r>
-              <a:rPr lang="ko-KR" altLang="ko-KR" sz="848" dirty="0" err="1">
+              <a:rPr lang="ko-KR" altLang="ko-KR" sz="300" dirty="0" err="1">
                 <a:latin typeface="+mn-ea"/>
               </a:rPr>
               <a:t>Matching</a:t>
             </a:r>
             <a:r>
-              <a:rPr lang="en-US" altLang="ko-KR" sz="848" dirty="0">
+              <a:rPr lang="en-US" altLang="ko-KR" sz="300" dirty="0">
                 <a:latin typeface="+mn-ea"/>
               </a:rPr>
               <a:t> </a:t>
             </a:r>
             <a:r>
-              <a:rPr lang="ko-KR" altLang="ko-KR" sz="848" dirty="0" err="1">
+              <a:rPr lang="ko-KR" altLang="ko-KR" sz="300" dirty="0" err="1">
                 <a:latin typeface="+mn-ea"/>
               </a:rPr>
               <a:t>Action</a:t>
             </a:r>
             <a:r>
-              <a:rPr lang="ko-KR" altLang="ko-KR" sz="848" dirty="0">
+              <a:rPr lang="ko-KR" altLang="ko-KR" sz="300" dirty="0">
                 <a:latin typeface="+mn-ea"/>
               </a:rPr>
               <a:t> </a:t>
             </a:r>
             <a:r>
-              <a:rPr lang="ko-KR" altLang="ko-KR" sz="848" dirty="0" err="1">
+              <a:rPr lang="ko-KR" altLang="ko-KR" sz="300" dirty="0" err="1">
                 <a:latin typeface="+mn-ea"/>
               </a:rPr>
               <a:t>Expert</a:t>
             </a:r>
             <a:r>
-              <a:rPr lang="ko-KR" altLang="ko-KR" sz="848" dirty="0">
+              <a:rPr lang="ko-KR" altLang="ko-KR" sz="300" dirty="0">
                 <a:latin typeface="+mn-ea"/>
               </a:rPr>
               <a:t>)</a:t>
             </a:r>
-            <a:endParaRPr lang="en-US" altLang="ko-KR" sz="848" dirty="0">
+            <a:endParaRPr lang="en-US" altLang="ko-KR" sz="300" dirty="0">
               <a:latin typeface="+mn-ea"/>
             </a:endParaRPr>
           </a:p>
           <a:p>
-            <a:endParaRPr lang="en-US" altLang="ko-KR" sz="848" dirty="0">
+            <a:endParaRPr lang="en-US" altLang="ko-KR" sz="300" dirty="0">
               <a:latin typeface="+mn-ea"/>
             </a:endParaRPr>
           </a:p>
           <a:p>
             <a:r>
-              <a:rPr lang="en-US" altLang="ko-KR" sz="848" b="1" dirty="0">
+              <a:rPr lang="en-US" altLang="ko-KR" sz="300" b="1" dirty="0">
                 <a:latin typeface="+mn-ea"/>
               </a:rPr>
               <a:t> System 2 Stage Tracking</a:t>
             </a:r>
-            <a:endParaRPr lang="en-US" altLang="ko-KR" sz="848" dirty="0">
+            <a:endParaRPr lang="en-US" altLang="ko-KR" sz="300" dirty="0">
               <a:latin typeface="+mn-ea"/>
             </a:endParaRPr>
           </a:p>
           <a:p>
             <a:r>
-              <a:rPr lang="en-US" altLang="ko-KR" sz="848" b="1" dirty="0">
+              <a:rPr lang="en-US" altLang="ko-KR" sz="300" b="1" dirty="0">
                 <a:latin typeface="+mn-ea"/>
               </a:rPr>
               <a:t> Task Embedding</a:t>
             </a:r>
-            <a:endParaRPr lang="en-US" altLang="ko-KR" sz="848" dirty="0">
+            <a:endParaRPr lang="en-US" altLang="ko-KR" sz="300" dirty="0">
               <a:latin typeface="+mn-ea"/>
             </a:endParaRPr>
           </a:p>
           <a:p>
             <a:r>
-              <a:rPr lang="en-US" altLang="ko-KR" sz="848" b="1" dirty="0">
+              <a:rPr lang="en-US" altLang="ko-KR" sz="300" b="1" dirty="0">
                 <a:latin typeface="+mn-ea"/>
               </a:rPr>
               <a:t> FAST Auxiliary</a:t>
             </a:r>
-            <a:endParaRPr lang="en-US" altLang="ko-KR" sz="848" dirty="0">
+            <a:endParaRPr lang="en-US" altLang="ko-KR" sz="300" dirty="0">
               <a:latin typeface="+mn-ea"/>
             </a:endParaRPr>
           </a:p>
           <a:p>
             <a:r>
-              <a:rPr lang="en-US" altLang="ko-KR" sz="848" b="1" dirty="0">
+              <a:rPr lang="en-US" altLang="ko-KR" sz="300" b="1" dirty="0">
                 <a:latin typeface="+mn-ea"/>
               </a:rPr>
               <a:t> Correlated Noise</a:t>
             </a:r>
-            <a:endParaRPr lang="en-US" altLang="ko-KR" sz="848" dirty="0">
+            <a:endParaRPr lang="en-US" altLang="ko-KR" sz="300" dirty="0">
               <a:latin typeface="+mn-ea"/>
             </a:endParaRPr>
           </a:p>
           <a:p>
             <a:r>
-              <a:rPr lang="en-US" altLang="ko-KR" sz="848" b="1" dirty="0">
+              <a:rPr lang="en-US" altLang="ko-KR" sz="300" b="1" dirty="0">
                 <a:latin typeface="+mn-ea"/>
               </a:rPr>
               <a:t> KV Transform</a:t>
@@ -4746,74 +4751,74 @@
           </a:p>
           <a:p>
             <a:r>
-              <a:rPr lang="en-US" altLang="ko-KR" sz="848" b="1" dirty="0">
+              <a:rPr lang="en-US" altLang="ko-KR" sz="300" b="1" dirty="0">
                 <a:latin typeface="+mn-ea"/>
               </a:rPr>
               <a:t> Custom Attention Masks</a:t>
             </a:r>
           </a:p>
           <a:p>
-            <a:endParaRPr lang="en-US" altLang="ko-KR" sz="848" b="1" dirty="0">
+            <a:endParaRPr lang="en-US" altLang="ko-KR" sz="300" b="1" dirty="0">
               <a:latin typeface="+mn-ea"/>
             </a:endParaRPr>
           </a:p>
           <a:p>
-            <a:endParaRPr lang="en-US" altLang="ko-KR" sz="848" b="1" dirty="0">
+            <a:endParaRPr lang="en-US" altLang="ko-KR" sz="300" b="1" dirty="0">
               <a:latin typeface="+mn-ea"/>
             </a:endParaRPr>
           </a:p>
           <a:p>
-            <a:endParaRPr lang="en-US" altLang="ko-KR" sz="848" b="1" dirty="0">
+            <a:endParaRPr lang="en-US" altLang="ko-KR" sz="300" b="1" dirty="0">
               <a:latin typeface="+mn-ea"/>
             </a:endParaRPr>
           </a:p>
           <a:p>
-            <a:endParaRPr lang="en-US" altLang="ko-KR" sz="848" b="1" dirty="0">
+            <a:endParaRPr lang="en-US" altLang="ko-KR" sz="300" b="1" dirty="0">
               <a:latin typeface="+mn-ea"/>
             </a:endParaRPr>
           </a:p>
           <a:p>
-            <a:endParaRPr lang="en-US" altLang="ko-KR" sz="848" b="1" dirty="0">
+            <a:endParaRPr lang="en-US" altLang="ko-KR" sz="300" b="1" dirty="0">
               <a:latin typeface="+mn-ea"/>
             </a:endParaRPr>
           </a:p>
           <a:p>
-            <a:endParaRPr lang="en-US" altLang="ko-KR" sz="848" b="1" dirty="0">
+            <a:endParaRPr lang="en-US" altLang="ko-KR" sz="300" b="1" dirty="0">
               <a:latin typeface="+mn-ea"/>
             </a:endParaRPr>
           </a:p>
           <a:p>
-            <a:endParaRPr lang="en-US" altLang="ko-KR" sz="848" b="1" dirty="0">
+            <a:endParaRPr lang="en-US" altLang="ko-KR" sz="300" b="1" dirty="0">
               <a:latin typeface="+mn-ea"/>
             </a:endParaRPr>
           </a:p>
           <a:p>
-            <a:endParaRPr lang="en-US" altLang="ko-KR" sz="848" b="1" dirty="0">
+            <a:endParaRPr lang="en-US" altLang="ko-KR" sz="300" b="1" dirty="0">
               <a:latin typeface="+mn-ea"/>
             </a:endParaRPr>
           </a:p>
           <a:p>
-            <a:endParaRPr lang="en-US" altLang="ko-KR" sz="848" b="1" dirty="0">
+            <a:endParaRPr lang="en-US" altLang="ko-KR" sz="300" b="1" dirty="0">
               <a:latin typeface="+mn-ea"/>
             </a:endParaRPr>
           </a:p>
           <a:p>
-            <a:endParaRPr lang="en-US" altLang="ko-KR" sz="848" b="1" dirty="0">
+            <a:endParaRPr lang="en-US" altLang="ko-KR" sz="300" b="1" dirty="0">
               <a:latin typeface="+mn-ea"/>
             </a:endParaRPr>
           </a:p>
           <a:p>
-            <a:endParaRPr lang="en-US" altLang="ko-KR" sz="848" b="1" dirty="0">
+            <a:endParaRPr lang="en-US" altLang="ko-KR" sz="300" b="1" dirty="0">
               <a:latin typeface="+mn-ea"/>
             </a:endParaRPr>
           </a:p>
           <a:p>
-            <a:endParaRPr lang="en-US" altLang="ko-KR" sz="848" b="1" dirty="0">
+            <a:endParaRPr lang="en-US" altLang="ko-KR" sz="300" b="1" dirty="0">
               <a:latin typeface="+mn-ea"/>
             </a:endParaRPr>
           </a:p>
           <a:p>
-            <a:endParaRPr lang="en-US" altLang="ko-KR" sz="1273" b="1" dirty="0">
+            <a:endParaRPr lang="en-US" altLang="ko-KR" sz="450" b="1" dirty="0">
               <a:latin typeface="+mn-ea"/>
             </a:endParaRPr>
           </a:p>
@@ -4824,7 +4829,7 @@
           <p:cNvPr id="28" name="TextBox 27">
             <a:extLst>
               <a:ext uri="{FF2B5EF4-FFF2-40B4-BE49-F238E27FC236}">
-                <ns2:creationId id="{FA8B75AA-D85E-C3A4-7671-DD508ADE16BA}"/>
+                <a16:creationId xmlns:a16="http://schemas.microsoft.com/office/drawing/2014/main" id="{FA8B75AA-D85E-C3A4-7671-DD508ADE16BA}"/>
               </a:ext>
             </a:extLst>
           </p:cNvPr>
@@ -4833,8 +4838,8 @@
         </p:nvSpPr>
         <p:spPr>
           <a:xfrm>
-            <a:off x="187676" y="2181299"/>
-            <a:ext cx="1420861" cy="228501"/>
+            <a:off x="2511249" y="4226302"/>
+            <a:ext cx="501770" cy="161583"/>
           </a:xfrm>
           <a:prstGeom prst="rect">
             <a:avLst/>
@@ -4869,7 +4874,7 @@
             </a:path>
             <a:tileRect/>
           </a:gradFill>
-          <a:ln w="20205">
+          <a:ln w="57150">
             <a:solidFill>
               <a:schemeClr val="accent4">
                 <a:lumMod val="50000"/>
@@ -4885,7 +4890,7 @@
           <a:p>
             <a:pPr algn="ctr"/>
             <a:r>
-              <a:rPr lang="ko-KR" altLang="en-US" sz="1273" b="1" dirty="0">
+              <a:rPr lang="ko-KR" altLang="en-US" sz="450" b="1" dirty="0">
                 <a:solidFill>
                   <a:schemeClr val="bg1"/>
                 </a:solidFill>
@@ -4901,7 +4906,7 @@
           <p:cNvPr id="29" name="그룹 28">
             <a:extLst>
               <a:ext uri="{FF2B5EF4-FFF2-40B4-BE49-F238E27FC236}">
-                <ns2:creationId id="{0EC81771-B908-395D-7D63-8730307F9584}"/>
+                <a16:creationId xmlns:a16="http://schemas.microsoft.com/office/drawing/2014/main" id="{0EC81771-B908-395D-7D63-8730307F9584}"/>
               </a:ext>
             </a:extLst>
           </p:cNvPr>
@@ -4910,10 +4915,10 @@
         </p:nvGrpSpPr>
         <p:grpSpPr>
           <a:xfrm>
-            <a:off x="3782088" y="3017326"/>
-            <a:ext cx="3595392" cy="3851870"/>
-            <a:chOff x="187628" y="933953"/>
-            <a:chExt cx="3595206" cy="3851870"/>
+            <a:off x="3780598" y="4521541"/>
+            <a:ext cx="1269695" cy="1442574"/>
+            <a:chOff x="530719" y="2641752"/>
+            <a:chExt cx="10169298" cy="11554526"/>
           </a:xfrm>
         </p:grpSpPr>
         <p:sp>
@@ -4921,7 +4926,7 @@
             <p:cNvPr id="30" name="TextBox 29">
               <a:extLst>
                 <a:ext uri="{FF2B5EF4-FFF2-40B4-BE49-F238E27FC236}">
-                  <ns2:creationId id="{067BA1A4-385E-3AA0-0B3B-48717AC870FC}"/>
+                  <a16:creationId xmlns:a16="http://schemas.microsoft.com/office/drawing/2014/main" id="{067BA1A4-385E-3AA0-0B3B-48717AC870FC}"/>
                 </a:ext>
               </a:extLst>
             </p:cNvPr>
@@ -4930,14 +4935,14 @@
           </p:nvSpPr>
           <p:spPr>
             <a:xfrm>
-              <a:off x="187628" y="933953"/>
-              <a:ext cx="3595206" cy="3851870"/>
+              <a:off x="530719" y="2641752"/>
+              <a:ext cx="10169298" cy="11554526"/>
             </a:xfrm>
             <a:prstGeom prst="rect">
               <a:avLst/>
             </a:prstGeom>
             <a:noFill/>
-            <a:ln w="20205">
+            <a:ln w="57150">
               <a:solidFill>
                 <a:schemeClr val="accent4">
                   <a:lumMod val="50000"/>
@@ -4952,115 +4957,115 @@
             <a:lstStyle/>
             <a:p>
               <a:pPr algn="ctr"/>
-              <a:endParaRPr lang="en-US" altLang="ko-KR" sz="1909" b="1" dirty="0">
+              <a:endParaRPr lang="en-US" altLang="ko-KR" sz="674" b="1" dirty="0">
                 <a:latin typeface="+mn-ea"/>
               </a:endParaRPr>
             </a:p>
             <a:p>
               <a:pPr algn="ctr"/>
-              <a:endParaRPr lang="en-US" altLang="ko-KR" sz="1273" dirty="0">
+              <a:endParaRPr lang="en-US" altLang="ko-KR" sz="450" dirty="0">
                 <a:latin typeface="+mn-ea"/>
               </a:endParaRPr>
             </a:p>
             <a:p>
               <a:pPr algn="ctr"/>
-              <a:endParaRPr lang="en-US" altLang="ko-KR" sz="1273" dirty="0">
+              <a:endParaRPr lang="en-US" altLang="ko-KR" sz="450" dirty="0">
                 <a:latin typeface="+mn-ea"/>
               </a:endParaRPr>
             </a:p>
             <a:p>
               <a:pPr algn="ctr"/>
-              <a:endParaRPr lang="en-US" altLang="ko-KR" sz="1273" dirty="0">
+              <a:endParaRPr lang="en-US" altLang="ko-KR" sz="450" dirty="0">
                 <a:latin typeface="+mn-ea"/>
               </a:endParaRPr>
             </a:p>
             <a:p>
               <a:pPr algn="ctr"/>
-              <a:endParaRPr lang="en-US" altLang="ko-KR" sz="1273" dirty="0">
+              <a:endParaRPr lang="en-US" altLang="ko-KR" sz="450" dirty="0">
                 <a:latin typeface="+mn-ea"/>
               </a:endParaRPr>
             </a:p>
             <a:p>
               <a:pPr algn="ctr"/>
-              <a:endParaRPr lang="en-US" altLang="ko-KR" sz="1273" dirty="0">
+              <a:endParaRPr lang="en-US" altLang="ko-KR" sz="450" dirty="0">
                 <a:latin typeface="+mn-ea"/>
               </a:endParaRPr>
             </a:p>
             <a:p>
               <a:pPr algn="ctr"/>
-              <a:endParaRPr lang="en-US" altLang="ko-KR" sz="1273" dirty="0">
+              <a:endParaRPr lang="en-US" altLang="ko-KR" sz="450" dirty="0">
                 <a:latin typeface="+mn-ea"/>
               </a:endParaRPr>
             </a:p>
             <a:p>
               <a:pPr algn="ctr"/>
-              <a:endParaRPr lang="en-US" altLang="ko-KR" sz="1273" dirty="0">
+              <a:endParaRPr lang="en-US" altLang="ko-KR" sz="450" dirty="0">
                 <a:latin typeface="+mn-ea"/>
               </a:endParaRPr>
             </a:p>
             <a:p>
               <a:pPr algn="ctr"/>
-              <a:endParaRPr lang="en-US" altLang="ko-KR" sz="1273" dirty="0">
+              <a:endParaRPr lang="en-US" altLang="ko-KR" sz="450" dirty="0">
                 <a:latin typeface="+mn-ea"/>
               </a:endParaRPr>
             </a:p>
             <a:p>
               <a:pPr algn="ctr"/>
-              <a:endParaRPr lang="en-US" altLang="ko-KR" sz="1273" dirty="0">
+              <a:endParaRPr lang="en-US" altLang="ko-KR" sz="450" dirty="0">
                 <a:latin typeface="+mn-ea"/>
               </a:endParaRPr>
             </a:p>
             <a:p>
               <a:pPr algn="ctr"/>
-              <a:endParaRPr lang="en-US" altLang="ko-KR" sz="1273" dirty="0">
+              <a:endParaRPr lang="en-US" altLang="ko-KR" sz="450" dirty="0">
                 <a:latin typeface="+mn-ea"/>
               </a:endParaRPr>
             </a:p>
             <a:p>
               <a:pPr algn="ctr"/>
-              <a:endParaRPr lang="en-US" altLang="ko-KR" sz="1273" dirty="0">
+              <a:endParaRPr lang="en-US" altLang="ko-KR" sz="450" dirty="0">
                 <a:latin typeface="+mn-ea"/>
               </a:endParaRPr>
             </a:p>
             <a:p>
               <a:pPr algn="ctr"/>
-              <a:endParaRPr lang="en-US" altLang="ko-KR" sz="1273" dirty="0">
+              <a:endParaRPr lang="en-US" altLang="ko-KR" sz="450" dirty="0">
                 <a:latin typeface="+mn-ea"/>
               </a:endParaRPr>
             </a:p>
             <a:p>
               <a:pPr algn="ctr"/>
-              <a:endParaRPr lang="en-US" altLang="ko-KR" sz="1273" dirty="0">
+              <a:endParaRPr lang="en-US" altLang="ko-KR" sz="450" dirty="0">
                 <a:latin typeface="+mn-ea"/>
               </a:endParaRPr>
             </a:p>
             <a:p>
               <a:pPr algn="ctr"/>
-              <a:endParaRPr lang="en-US" altLang="ko-KR" sz="1273" dirty="0">
+              <a:endParaRPr lang="en-US" altLang="ko-KR" sz="450" dirty="0">
                 <a:latin typeface="+mn-ea"/>
               </a:endParaRPr>
             </a:p>
             <a:p>
               <a:pPr algn="ctr"/>
-              <a:endParaRPr lang="en-US" altLang="ko-KR" sz="1273" dirty="0">
+              <a:endParaRPr lang="en-US" altLang="ko-KR" sz="450" dirty="0">
                 <a:latin typeface="+mn-ea"/>
               </a:endParaRPr>
             </a:p>
             <a:p>
               <a:pPr algn="ctr"/>
-              <a:endParaRPr lang="en-US" altLang="ko-KR" sz="1273" dirty="0">
+              <a:endParaRPr lang="en-US" altLang="ko-KR" sz="450" dirty="0">
                 <a:latin typeface="+mn-ea"/>
               </a:endParaRPr>
             </a:p>
             <a:p>
               <a:pPr algn="ctr"/>
-              <a:endParaRPr lang="en-US" altLang="ko-KR" sz="1273" dirty="0">
+              <a:endParaRPr lang="en-US" altLang="ko-KR" sz="450" dirty="0">
                 <a:latin typeface="+mn-ea"/>
               </a:endParaRPr>
             </a:p>
             <a:p>
               <a:pPr algn="ctr"/>
-              <a:endParaRPr lang="en-US" altLang="ko-KR" sz="1273" dirty="0">
+              <a:endParaRPr lang="en-US" altLang="ko-KR" sz="450" dirty="0">
                 <a:latin typeface="+mn-ea"/>
               </a:endParaRPr>
             </a:p>
@@ -5071,7 +5076,7 @@
             <p:cNvPr id="31" name="TextBox 30">
               <a:extLst>
                 <a:ext uri="{FF2B5EF4-FFF2-40B4-BE49-F238E27FC236}">
-                  <ns2:creationId id="{E30C0648-3A2F-0131-FB4B-1DCD67DE1899}"/>
+                  <a16:creationId xmlns:a16="http://schemas.microsoft.com/office/drawing/2014/main" id="{E30C0648-3A2F-0131-FB4B-1DCD67DE1899}"/>
                 </a:ext>
               </a:extLst>
             </p:cNvPr>
@@ -5080,8 +5085,8 @@
           </p:nvSpPr>
           <p:spPr>
             <a:xfrm>
-              <a:off x="192911" y="947133"/>
-              <a:ext cx="1420861" cy="228501"/>
+              <a:off x="545664" y="2679037"/>
+              <a:ext cx="4019007" cy="1294225"/>
             </a:xfrm>
             <a:prstGeom prst="rect">
               <a:avLst/>
@@ -5115,7 +5120,7 @@
                 <a:fillToRect l="50000" t="50000" r="50000" b="50000"/>
               </a:path>
             </a:gradFill>
-            <a:ln w="20205">
+            <a:ln w="57150">
               <a:solidFill>
                 <a:schemeClr val="accent4">
                   <a:lumMod val="50000"/>
@@ -5131,7 +5136,7 @@
             <a:p>
               <a:pPr algn="ctr"/>
               <a:r>
-                <a:rPr lang="ko-KR" altLang="en-US" sz="1273" b="1" dirty="0">
+                <a:rPr lang="ko-KR" altLang="en-US" sz="450" b="1" dirty="0">
                   <a:solidFill>
                     <a:schemeClr val="bg1"/>
                   </a:solidFill>
@@ -5148,7 +5153,7 @@
           <p:cNvPr id="35" name="그룹 34">
             <a:extLst>
               <a:ext uri="{FF2B5EF4-FFF2-40B4-BE49-F238E27FC236}">
-                <ns2:creationId id="{C4B32F19-1AD2-59DB-F0B3-02E986BA816C}"/>
+                <a16:creationId xmlns:a16="http://schemas.microsoft.com/office/drawing/2014/main" id="{C4B32F19-1AD2-59DB-F0B3-02E986BA816C}"/>
               </a:ext>
             </a:extLst>
           </p:cNvPr>
@@ -5157,10 +5162,10 @@
         </p:nvGrpSpPr>
         <p:grpSpPr>
           <a:xfrm>
-            <a:off x="3782730" y="6871101"/>
-            <a:ext cx="3595206" cy="848717"/>
-            <a:chOff x="183431" y="946134"/>
-            <a:chExt cx="3595206" cy="802004"/>
+            <a:off x="3780825" y="5882483"/>
+            <a:ext cx="1269629" cy="473078"/>
+            <a:chOff x="518849" y="2676208"/>
+            <a:chExt cx="10169298" cy="3580629"/>
           </a:xfrm>
         </p:grpSpPr>
         <p:sp>
@@ -5168,7 +5173,7 @@
             <p:cNvPr id="36" name="TextBox 35">
               <a:extLst>
                 <a:ext uri="{FF2B5EF4-FFF2-40B4-BE49-F238E27FC236}">
-                  <ns2:creationId id="{A7BA84FD-51C9-6B5E-DE5D-64607CD4740D}"/>
+                  <a16:creationId xmlns:a16="http://schemas.microsoft.com/office/drawing/2014/main" id="{A7BA84FD-51C9-6B5E-DE5D-64607CD4740D}"/>
                 </a:ext>
               </a:extLst>
             </p:cNvPr>
@@ -5177,14 +5182,14 @@
           </p:nvSpPr>
           <p:spPr>
             <a:xfrm>
-              <a:off x="183431" y="946134"/>
-              <a:ext cx="3595206" cy="802004"/>
+              <a:off x="518849" y="2676208"/>
+              <a:ext cx="10169298" cy="3580629"/>
             </a:xfrm>
             <a:prstGeom prst="rect">
               <a:avLst/>
             </a:prstGeom>
             <a:noFill/>
-            <a:ln w="20205">
+            <a:ln w="57150">
               <a:solidFill>
                 <a:schemeClr val="accent4">
                   <a:lumMod val="50000"/>
@@ -5199,123 +5204,123 @@
             <a:lstStyle/>
             <a:p>
               <a:pPr algn="ctr"/>
-              <a:endParaRPr lang="en-US" altLang="ko-KR" sz="1909" b="1" dirty="0">
+              <a:endParaRPr lang="en-US" altLang="ko-KR" sz="674" b="1" dirty="0">
                 <a:latin typeface="+mn-ea"/>
               </a:endParaRPr>
             </a:p>
             <a:p>
-              <a:pPr marL="121227" indent="1">
+              <a:pPr marL="42813" indent="-42813">
                 <a:buFont typeface="Arial" panose="020B0604020202020204" pitchFamily="34" charset="0"/>
                 <a:buChar char="•"/>
               </a:pPr>
               <a:r>
-                <a:rPr lang="ko-KR" altLang="ko-KR" sz="848" dirty="0" err="1"/>
+                <a:rPr lang="ko-KR" altLang="ko-KR" sz="300" dirty="0" err="1"/>
                 <a:t>Loss는</a:t>
               </a:r>
               <a:r>
-                <a:rPr lang="ko-KR" altLang="ko-KR" sz="848" dirty="0"/>
+                <a:rPr lang="ko-KR" altLang="ko-KR" sz="300" dirty="0"/>
                 <a:t> 안정적으로 감소했으나 실제 </a:t>
               </a:r>
               <a:r>
-                <a:rPr lang="ko-KR" altLang="ko-KR" sz="848" dirty="0" err="1"/>
+                <a:rPr lang="ko-KR" altLang="ko-KR" sz="300" dirty="0" err="1"/>
                 <a:t>rollout</a:t>
               </a:r>
               <a:r>
-                <a:rPr lang="ko-KR" altLang="ko-KR" sz="848" dirty="0"/>
+                <a:rPr lang="ko-KR" altLang="ko-KR" sz="300" dirty="0"/>
                 <a:t> 성능과 완전히 비례하지 않음</a:t>
               </a:r>
-              <a:endParaRPr lang="en-US" altLang="ko-KR" sz="848" dirty="0"/>
+              <a:endParaRPr lang="en-US" altLang="ko-KR" sz="300" dirty="0"/>
             </a:p>
             <a:p>
-              <a:pPr marL="121227" indent="1">
+              <a:pPr marL="42813" indent="-42813">
                 <a:buFont typeface="Arial" panose="020B0604020202020204" pitchFamily="34" charset="0"/>
                 <a:buChar char="•"/>
               </a:pPr>
               <a:r>
-                <a:rPr lang="ko-KR" altLang="ko-KR" sz="848" dirty="0" err="1"/>
+                <a:rPr lang="ko-KR" altLang="ko-KR" sz="300" dirty="0" err="1"/>
                 <a:t>Out</a:t>
               </a:r>
               <a:r>
-                <a:rPr lang="ko-KR" altLang="ko-KR" sz="848" dirty="0"/>
+                <a:rPr lang="ko-KR" altLang="ko-KR" sz="300" dirty="0"/>
                 <a:t>-of-</a:t>
               </a:r>
               <a:r>
-                <a:rPr lang="ko-KR" altLang="ko-KR" sz="848" dirty="0" err="1"/>
+                <a:rPr lang="ko-KR" altLang="ko-KR" sz="300" dirty="0" err="1"/>
                 <a:t>Distribution</a:t>
               </a:r>
               <a:r>
-                <a:rPr lang="ko-KR" altLang="ko-KR" sz="848" dirty="0"/>
+                <a:rPr lang="ko-KR" altLang="ko-KR" sz="300" dirty="0"/>
                 <a:t>(OOD) 상태 취약성</a:t>
               </a:r>
-              <a:endParaRPr lang="en-US" altLang="ko-KR" sz="1273" dirty="0">
+              <a:endParaRPr lang="en-US" altLang="ko-KR" sz="450" dirty="0">
                 <a:latin typeface="+mn-ea"/>
               </a:endParaRPr>
             </a:p>
             <a:p>
-              <a:pPr marL="121227" indent="1">
+              <a:pPr marL="42813" indent="-42813">
                 <a:buFont typeface="Arial" panose="020B0604020202020204" pitchFamily="34" charset="0"/>
                 <a:buChar char="•"/>
               </a:pPr>
               <a:r>
-                <a:rPr lang="ko-KR" altLang="ko-KR" sz="848" dirty="0" err="1"/>
+                <a:rPr lang="ko-KR" altLang="ko-KR" sz="300" dirty="0" err="1"/>
                 <a:t>Stage</a:t>
               </a:r>
               <a:r>
-                <a:rPr lang="ko-KR" altLang="ko-KR" sz="848" dirty="0"/>
+                <a:rPr lang="ko-KR" altLang="ko-KR" sz="300" dirty="0"/>
                 <a:t> </a:t>
               </a:r>
               <a:r>
-                <a:rPr lang="ko-KR" altLang="ko-KR" sz="848" dirty="0" err="1"/>
+                <a:rPr lang="ko-KR" altLang="ko-KR" sz="300" dirty="0" err="1"/>
                 <a:t>Tracking</a:t>
               </a:r>
               <a:r>
-                <a:rPr lang="ko-KR" altLang="ko-KR" sz="848" dirty="0"/>
+                <a:rPr lang="ko-KR" altLang="ko-KR" sz="300" dirty="0"/>
                 <a:t> 한계</a:t>
               </a:r>
-              <a:endParaRPr lang="en-US" altLang="ko-KR" sz="848" dirty="0"/>
+              <a:endParaRPr lang="en-US" altLang="ko-KR" sz="300" dirty="0"/>
             </a:p>
             <a:p>
-              <a:pPr marL="121227" indent="1">
+              <a:pPr marL="42813" indent="-42813">
                 <a:buFont typeface="Arial" panose="020B0604020202020204" pitchFamily="34" charset="0"/>
                 <a:buChar char="•"/>
               </a:pPr>
               <a:r>
-                <a:rPr lang="ko-KR" altLang="ko-KR" sz="848" dirty="0"/>
+                <a:rPr lang="ko-KR" altLang="ko-KR" sz="300" dirty="0"/>
                 <a:t>제한된 GPU 자원 환경에서 </a:t>
               </a:r>
               <a:r>
-                <a:rPr lang="ko-KR" altLang="ko-KR" sz="848" dirty="0" err="1"/>
+                <a:rPr lang="ko-KR" altLang="ko-KR" sz="300" dirty="0" err="1"/>
                 <a:t>stable</a:t>
               </a:r>
               <a:r>
-                <a:rPr lang="ko-KR" altLang="ko-KR" sz="848" dirty="0"/>
+                <a:rPr lang="ko-KR" altLang="ko-KR" sz="300" dirty="0"/>
                 <a:t> </a:t>
               </a:r>
               <a:r>
-                <a:rPr lang="ko-KR" altLang="ko-KR" sz="848" dirty="0" err="1"/>
+                <a:rPr lang="ko-KR" altLang="ko-KR" sz="300" dirty="0" err="1"/>
                 <a:t>training</a:t>
               </a:r>
               <a:r>
-                <a:rPr lang="ko-KR" altLang="ko-KR" sz="848" dirty="0"/>
+                <a:rPr lang="ko-KR" altLang="ko-KR" sz="300" dirty="0"/>
                 <a:t> 및 </a:t>
               </a:r>
               <a:r>
-                <a:rPr lang="ko-KR" altLang="ko-KR" sz="848" dirty="0" err="1"/>
+                <a:rPr lang="ko-KR" altLang="ko-KR" sz="300" dirty="0" err="1"/>
                 <a:t>rollout</a:t>
               </a:r>
               <a:r>
-                <a:rPr lang="ko-KR" altLang="ko-KR" sz="848" dirty="0"/>
+                <a:rPr lang="ko-KR" altLang="ko-KR" sz="300" dirty="0"/>
                 <a:t> </a:t>
               </a:r>
               <a:r>
-                <a:rPr lang="ko-KR" altLang="ko-KR" sz="848" dirty="0" err="1"/>
+                <a:rPr lang="ko-KR" altLang="ko-KR" sz="300" dirty="0" err="1"/>
                 <a:t>pipeline</a:t>
               </a:r>
               <a:r>
-                <a:rPr lang="ko-KR" altLang="ko-KR" sz="848" dirty="0"/>
+                <a:rPr lang="ko-KR" altLang="ko-KR" sz="300" dirty="0"/>
                 <a:t> 검증</a:t>
               </a:r>
-              <a:endParaRPr lang="en-US" altLang="ko-KR" sz="848" dirty="0"/>
+              <a:endParaRPr lang="en-US" altLang="ko-KR" sz="300" dirty="0"/>
             </a:p>
           </p:txBody>
         </p:sp>
@@ -5324,7 +5329,7 @@
             <p:cNvPr id="37" name="TextBox 36">
               <a:extLst>
                 <a:ext uri="{FF2B5EF4-FFF2-40B4-BE49-F238E27FC236}">
-                  <ns2:creationId id="{C2CDF326-5257-9AED-0676-9B3040D78972}"/>
+                  <a16:creationId xmlns:a16="http://schemas.microsoft.com/office/drawing/2014/main" id="{C2CDF326-5257-9AED-0676-9B3040D78972}"/>
                 </a:ext>
               </a:extLst>
             </p:cNvPr>
@@ -5333,8 +5338,8 @@
           </p:nvSpPr>
           <p:spPr>
             <a:xfrm>
-              <a:off x="184727" y="951225"/>
-              <a:ext cx="1420861" cy="215924"/>
+              <a:off x="522509" y="2690611"/>
+              <a:ext cx="4019008" cy="1222988"/>
             </a:xfrm>
             <a:prstGeom prst="rect">
               <a:avLst/>
@@ -5368,7 +5373,7 @@
                 <a:fillToRect l="50000" t="50000" r="50000" b="50000"/>
               </a:path>
             </a:gradFill>
-            <a:ln w="20205">
+            <a:ln w="57150">
               <a:solidFill>
                 <a:schemeClr val="accent4">
                   <a:lumMod val="50000"/>
@@ -5384,7 +5389,7 @@
             <a:p>
               <a:pPr algn="ctr"/>
               <a:r>
-                <a:rPr lang="ko-KR" altLang="en-US" sz="1273" b="1" dirty="0">
+                <a:rPr lang="ko-KR" altLang="en-US" sz="450" b="1" dirty="0">
                   <a:solidFill>
                     <a:schemeClr val="bg1"/>
                   </a:solidFill>
@@ -5401,7 +5406,7 @@
           <p:cNvPr id="39" name="TextBox 38">
             <a:extLst>
               <a:ext uri="{FF2B5EF4-FFF2-40B4-BE49-F238E27FC236}">
-                <ns2:creationId id="{2B7E9E23-A4B9-47D5-4A0D-B241E1F2049F}"/>
+                <a16:creationId xmlns:a16="http://schemas.microsoft.com/office/drawing/2014/main" id="{2B7E9E23-A4B9-47D5-4A0D-B241E1F2049F}"/>
               </a:ext>
             </a:extLst>
           </p:cNvPr>
@@ -5410,14 +5415,14 @@
         </p:nvSpPr>
         <p:spPr>
           <a:xfrm>
-            <a:off x="181788" y="7400700"/>
-            <a:ext cx="3600486" cy="2241484"/>
+            <a:off x="2509170" y="6069508"/>
+            <a:ext cx="1271494" cy="873188"/>
           </a:xfrm>
           <a:prstGeom prst="rect">
             <a:avLst/>
           </a:prstGeom>
           <a:noFill/>
-          <a:ln w="20205">
+          <a:ln w="57150">
             <a:solidFill>
               <a:schemeClr val="accent4">
                 <a:lumMod val="50000"/>
@@ -5432,13 +5437,13 @@
           <a:lstStyle/>
           <a:p>
             <a:pPr algn="ctr"/>
-            <a:endParaRPr lang="en-US" altLang="ko-KR" sz="1909" b="1" dirty="0">
+            <a:endParaRPr lang="en-US" altLang="ko-KR" sz="674" b="1" dirty="0">
               <a:latin typeface="+mn-ea"/>
             </a:endParaRPr>
           </a:p>
           <a:p>
             <a:r>
-              <a:rPr lang="en-US" altLang="ko-KR" sz="848" b="1" dirty="0">
+              <a:rPr lang="en-US" altLang="ko-KR" sz="300" b="1" dirty="0">
                 <a:latin typeface="+mn-ea"/>
               </a:rPr>
               <a:t> 1. Hardware Environment</a:t>
@@ -5446,73 +5451,73 @@
           </a:p>
           <a:p>
             <a:r>
-              <a:rPr lang="en-US" altLang="ko-KR" sz="848" dirty="0">
+              <a:rPr lang="en-US" altLang="ko-KR" sz="300" dirty="0">
                 <a:latin typeface="+mn-ea"/>
               </a:rPr>
               <a:t> A100 80GB GPU Server, RTX 5070 PC, Ubuntu + JAX/Flax</a:t>
             </a:r>
           </a:p>
           <a:p>
-            <a:endParaRPr lang="en-US" altLang="ko-KR" sz="990" b="1" dirty="0">
+            <a:endParaRPr lang="en-US" altLang="ko-KR" sz="350" b="1" dirty="0">
               <a:latin typeface="+mn-ea"/>
             </a:endParaRPr>
           </a:p>
           <a:p>
             <a:r>
-              <a:rPr lang="en-US" altLang="ko-KR" sz="848" b="1" dirty="0">
+              <a:rPr lang="en-US" altLang="ko-KR" sz="300" b="1" dirty="0">
                 <a:latin typeface="+mn-ea"/>
               </a:rPr>
               <a:t> 2. </a:t>
             </a:r>
             <a:r>
-              <a:rPr lang="ko-KR" altLang="en-US" sz="848" b="1" dirty="0">
+              <a:rPr lang="ko-KR" altLang="en-US" sz="300" b="1" dirty="0">
                 <a:latin typeface="+mn-ea"/>
               </a:rPr>
               <a:t>실험 및 모델 경량화</a:t>
             </a:r>
-            <a:endParaRPr lang="en-US" altLang="ko-KR" sz="848" b="1" dirty="0">
+            <a:endParaRPr lang="en-US" altLang="ko-KR" sz="300" b="1" dirty="0">
               <a:latin typeface="+mn-ea"/>
             </a:endParaRPr>
           </a:p>
           <a:p>
             <a:pPr algn="ctr"/>
-            <a:endParaRPr lang="en-US" altLang="ko-KR" sz="1273" dirty="0">
+            <a:endParaRPr lang="en-US" altLang="ko-KR" sz="450" dirty="0">
               <a:latin typeface="+mn-ea"/>
             </a:endParaRPr>
           </a:p>
           <a:p>
             <a:pPr algn="ctr"/>
-            <a:endParaRPr lang="en-US" altLang="ko-KR" sz="1273" dirty="0">
+            <a:endParaRPr lang="en-US" altLang="ko-KR" sz="450" dirty="0">
               <a:latin typeface="+mn-ea"/>
             </a:endParaRPr>
           </a:p>
           <a:p>
             <a:pPr algn="ctr"/>
-            <a:endParaRPr lang="en-US" altLang="ko-KR" sz="1273" dirty="0">
+            <a:endParaRPr lang="en-US" altLang="ko-KR" sz="450" dirty="0">
               <a:latin typeface="+mn-ea"/>
             </a:endParaRPr>
           </a:p>
           <a:p>
             <a:pPr algn="ctr"/>
-            <a:endParaRPr lang="en-US" altLang="ko-KR" sz="1273" dirty="0">
+            <a:endParaRPr lang="en-US" altLang="ko-KR" sz="450" dirty="0">
               <a:latin typeface="+mn-ea"/>
             </a:endParaRPr>
           </a:p>
           <a:p>
             <a:pPr algn="ctr"/>
-            <a:endParaRPr lang="en-US" altLang="ko-KR" sz="1273" dirty="0">
+            <a:endParaRPr lang="en-US" altLang="ko-KR" sz="450" dirty="0">
               <a:latin typeface="+mn-ea"/>
             </a:endParaRPr>
           </a:p>
           <a:p>
             <a:pPr algn="ctr"/>
-            <a:endParaRPr lang="en-US" altLang="ko-KR" sz="1273" dirty="0">
+            <a:endParaRPr lang="en-US" altLang="ko-KR" sz="450" dirty="0">
               <a:latin typeface="+mn-ea"/>
             </a:endParaRPr>
           </a:p>
           <a:p>
             <a:pPr algn="ctr"/>
-            <a:endParaRPr lang="en-US" altLang="ko-KR" sz="1273" dirty="0">
+            <a:endParaRPr lang="en-US" altLang="ko-KR" sz="450" dirty="0">
               <a:latin typeface="+mn-ea"/>
             </a:endParaRPr>
           </a:p>
@@ -5523,7 +5528,7 @@
           <p:cNvPr id="40" name="TextBox 39">
             <a:extLst>
               <a:ext uri="{FF2B5EF4-FFF2-40B4-BE49-F238E27FC236}">
-                <ns2:creationId id="{6109C2A2-C8D4-4271-EA33-35C6312F93C8}"/>
+                <a16:creationId xmlns:a16="http://schemas.microsoft.com/office/drawing/2014/main" id="{6109C2A2-C8D4-4271-EA33-35C6312F93C8}"/>
               </a:ext>
             </a:extLst>
           </p:cNvPr>
@@ -5532,8 +5537,8 @@
         </p:nvSpPr>
         <p:spPr>
           <a:xfrm>
-            <a:off x="188819" y="7400700"/>
-            <a:ext cx="1419243" cy="228501"/>
+            <a:off x="2511653" y="6069508"/>
+            <a:ext cx="501199" cy="161583"/>
           </a:xfrm>
           <a:prstGeom prst="rect">
             <a:avLst/>
@@ -5567,7 +5572,7 @@
               <a:fillToRect l="50000" t="50000" r="50000" b="50000"/>
             </a:path>
           </a:gradFill>
-          <a:ln w="20205">
+          <a:ln w="57150">
             <a:solidFill>
               <a:schemeClr val="accent4">
                 <a:lumMod val="50000"/>
@@ -5583,7 +5588,7 @@
           <a:p>
             <a:pPr algn="ctr"/>
             <a:r>
-              <a:rPr lang="ko-KR" altLang="en-US" sz="1273" b="1" dirty="0">
+              <a:rPr lang="ko-KR" altLang="en-US" sz="450" b="1" dirty="0">
                 <a:solidFill>
                   <a:schemeClr val="bg1"/>
                 </a:solidFill>
@@ -5599,7 +5604,7 @@
           <p:cNvPr id="42" name="TextBox 41">
             <a:extLst>
               <a:ext uri="{FF2B5EF4-FFF2-40B4-BE49-F238E27FC236}">
-                <ns2:creationId id="{47EC2704-2B83-6385-71E3-0D0E8ABD844A}"/>
+                <a16:creationId xmlns:a16="http://schemas.microsoft.com/office/drawing/2014/main" id="{47EC2704-2B83-6385-71E3-0D0E8ABD844A}"/>
               </a:ext>
             </a:extLst>
           </p:cNvPr>
@@ -5608,14 +5613,14 @@
         </p:nvSpPr>
         <p:spPr>
           <a:xfrm>
-            <a:off x="181789" y="9641256"/>
-            <a:ext cx="7195692" cy="801818"/>
+            <a:off x="2509170" y="6860750"/>
+            <a:ext cx="2541123" cy="407676"/>
           </a:xfrm>
           <a:prstGeom prst="rect">
             <a:avLst/>
           </a:prstGeom>
           <a:noFill/>
-          <a:ln w="20205">
+          <a:ln w="57150">
             <a:solidFill>
               <a:schemeClr val="accent4">
                 <a:lumMod val="50000"/>
@@ -5629,449 +5634,449 @@
           </a:bodyPr>
           <a:lstStyle/>
           <a:p>
-            <a:endParaRPr lang="en-US" altLang="ko-KR" sz="1556" b="1" dirty="0">
+            <a:endParaRPr lang="en-US" altLang="ko-KR" sz="549" b="1" dirty="0">
               <a:latin typeface="+mn-ea"/>
             </a:endParaRPr>
           </a:p>
           <a:p>
             <a:r>
-              <a:rPr lang="en-US" altLang="ko-KR" sz="848" dirty="0"/>
+              <a:rPr lang="en-US" altLang="ko-KR" sz="300" dirty="0"/>
               <a:t>1.</a:t>
             </a:r>
             <a:r>
-              <a:rPr lang="ko-KR" altLang="ko-KR" sz="848" dirty="0"/>
+              <a:rPr lang="ko-KR" altLang="ko-KR" sz="300" dirty="0"/>
               <a:t> </a:t>
             </a:r>
             <a:r>
-              <a:rPr lang="ko-KR" altLang="ko-KR" sz="848" dirty="0" err="1"/>
+              <a:rPr lang="ko-KR" altLang="ko-KR" sz="300" dirty="0" err="1"/>
               <a:t>Ilia</a:t>
             </a:r>
             <a:r>
-              <a:rPr lang="ko-KR" altLang="ko-KR" sz="848" dirty="0"/>
+              <a:rPr lang="ko-KR" altLang="ko-KR" sz="300" dirty="0"/>
               <a:t> </a:t>
             </a:r>
             <a:r>
-              <a:rPr lang="ko-KR" altLang="ko-KR" sz="848" dirty="0" err="1"/>
+              <a:rPr lang="ko-KR" altLang="ko-KR" sz="300" dirty="0" err="1"/>
               <a:t>Larchenko</a:t>
             </a:r>
             <a:r>
-              <a:rPr lang="ko-KR" altLang="ko-KR" sz="848" dirty="0"/>
+              <a:rPr lang="ko-KR" altLang="ko-KR" sz="300" dirty="0"/>
               <a:t> </a:t>
             </a:r>
             <a:r>
-              <a:rPr lang="ko-KR" altLang="ko-KR" sz="848" dirty="0" err="1"/>
+              <a:rPr lang="ko-KR" altLang="ko-KR" sz="300" dirty="0" err="1"/>
               <a:t>et</a:t>
             </a:r>
             <a:r>
-              <a:rPr lang="ko-KR" altLang="ko-KR" sz="848" dirty="0"/>
+              <a:rPr lang="ko-KR" altLang="ko-KR" sz="300" dirty="0"/>
               <a:t> </a:t>
             </a:r>
             <a:r>
-              <a:rPr lang="ko-KR" altLang="ko-KR" sz="848" dirty="0" err="1"/>
+              <a:rPr lang="ko-KR" altLang="ko-KR" sz="300" dirty="0" err="1"/>
               <a:t>al</a:t>
             </a:r>
             <a:r>
-              <a:rPr lang="ko-KR" altLang="ko-KR" sz="848" dirty="0"/>
+              <a:rPr lang="ko-KR" altLang="ko-KR" sz="300" dirty="0"/>
               <a:t>., “</a:t>
             </a:r>
             <a:r>
-              <a:rPr lang="ko-KR" altLang="ko-KR" sz="848" dirty="0" err="1"/>
+              <a:rPr lang="ko-KR" altLang="ko-KR" sz="300" dirty="0" err="1"/>
               <a:t>Task</a:t>
             </a:r>
             <a:r>
-              <a:rPr lang="ko-KR" altLang="ko-KR" sz="848" dirty="0"/>
+              <a:rPr lang="ko-KR" altLang="ko-KR" sz="300" dirty="0"/>
               <a:t> </a:t>
             </a:r>
             <a:r>
-              <a:rPr lang="ko-KR" altLang="ko-KR" sz="848" dirty="0" err="1"/>
+              <a:rPr lang="ko-KR" altLang="ko-KR" sz="300" dirty="0" err="1"/>
               <a:t>Adaptation</a:t>
             </a:r>
             <a:r>
-              <a:rPr lang="ko-KR" altLang="ko-KR" sz="848" dirty="0"/>
+              <a:rPr lang="ko-KR" altLang="ko-KR" sz="300" dirty="0"/>
               <a:t> of </a:t>
             </a:r>
             <a:r>
-              <a:rPr lang="ko-KR" altLang="ko-KR" sz="848" dirty="0" err="1"/>
+              <a:rPr lang="ko-KR" altLang="ko-KR" sz="300" dirty="0" err="1"/>
               <a:t>Vision-Language-Action</a:t>
             </a:r>
             <a:r>
-              <a:rPr lang="ko-KR" altLang="ko-KR" sz="848" dirty="0"/>
+              <a:rPr lang="ko-KR" altLang="ko-KR" sz="300" dirty="0"/>
               <a:t> </a:t>
             </a:r>
             <a:r>
-              <a:rPr lang="ko-KR" altLang="ko-KR" sz="848" dirty="0" err="1"/>
+              <a:rPr lang="ko-KR" altLang="ko-KR" sz="300" dirty="0" err="1"/>
               <a:t>Model</a:t>
             </a:r>
             <a:r>
-              <a:rPr lang="ko-KR" altLang="ko-KR" sz="848" dirty="0"/>
+              <a:rPr lang="ko-KR" altLang="ko-KR" sz="300" dirty="0"/>
               <a:t>: 1st </a:t>
             </a:r>
             <a:r>
-              <a:rPr lang="ko-KR" altLang="ko-KR" sz="848" dirty="0" err="1"/>
+              <a:rPr lang="ko-KR" altLang="ko-KR" sz="300" dirty="0" err="1"/>
               <a:t>Place</a:t>
             </a:r>
             <a:r>
-              <a:rPr lang="ko-KR" altLang="ko-KR" sz="848" dirty="0"/>
+              <a:rPr lang="ko-KR" altLang="ko-KR" sz="300" dirty="0"/>
               <a:t> </a:t>
             </a:r>
             <a:r>
-              <a:rPr lang="ko-KR" altLang="ko-KR" sz="848" dirty="0" err="1"/>
+              <a:rPr lang="ko-KR" altLang="ko-KR" sz="300" dirty="0" err="1"/>
               <a:t>Solution</a:t>
             </a:r>
             <a:r>
-              <a:rPr lang="ko-KR" altLang="ko-KR" sz="848" dirty="0"/>
+              <a:rPr lang="ko-KR" altLang="ko-KR" sz="300" dirty="0"/>
               <a:t> </a:t>
             </a:r>
             <a:r>
-              <a:rPr lang="ko-KR" altLang="ko-KR" sz="848" dirty="0" err="1"/>
+              <a:rPr lang="ko-KR" altLang="ko-KR" sz="300" dirty="0" err="1"/>
               <a:t>for</a:t>
             </a:r>
             <a:r>
-              <a:rPr lang="ko-KR" altLang="ko-KR" sz="848" dirty="0"/>
+              <a:rPr lang="ko-KR" altLang="ko-KR" sz="300" dirty="0"/>
               <a:t> </a:t>
             </a:r>
             <a:r>
-              <a:rPr lang="ko-KR" altLang="ko-KR" sz="848" dirty="0" err="1"/>
+              <a:rPr lang="ko-KR" altLang="ko-KR" sz="300" dirty="0" err="1"/>
               <a:t>the</a:t>
             </a:r>
             <a:r>
-              <a:rPr lang="ko-KR" altLang="ko-KR" sz="848" dirty="0"/>
+              <a:rPr lang="ko-KR" altLang="ko-KR" sz="300" dirty="0"/>
               <a:t> 2025 BEHAVIOR </a:t>
             </a:r>
             <a:r>
-              <a:rPr lang="ko-KR" altLang="ko-KR" sz="848" dirty="0" err="1"/>
+              <a:rPr lang="ko-KR" altLang="ko-KR" sz="300" dirty="0" err="1"/>
               <a:t>Challenge</a:t>
             </a:r>
             <a:r>
-              <a:rPr lang="ko-KR" altLang="ko-KR" sz="848" dirty="0"/>
+              <a:rPr lang="ko-KR" altLang="ko-KR" sz="300" dirty="0"/>
               <a:t>”, 2025</a:t>
             </a:r>
             <a:br>
-              <a:rPr lang="ko-KR" altLang="ko-KR" sz="848" dirty="0"/>
+              <a:rPr lang="ko-KR" altLang="ko-KR" sz="300" dirty="0"/>
             </a:br>
             <a:r>
-              <a:rPr lang="ko-KR" altLang="ko-KR" sz="848" dirty="0"/>
+              <a:rPr lang="ko-KR" altLang="ko-KR" sz="300" dirty="0"/>
               <a:t>2. </a:t>
             </a:r>
             <a:r>
-              <a:rPr lang="ko-KR" altLang="ko-KR" sz="848" dirty="0" err="1"/>
+              <a:rPr lang="ko-KR" altLang="ko-KR" sz="300" dirty="0" err="1"/>
               <a:t>M</a:t>
             </a:r>
             <a:r>
-              <a:rPr lang="ko-KR" altLang="ko-KR" sz="848" dirty="0"/>
+              <a:rPr lang="ko-KR" altLang="ko-KR" sz="300" dirty="0"/>
               <a:t>. </a:t>
             </a:r>
             <a:r>
-              <a:rPr lang="ko-KR" altLang="ko-KR" sz="848" dirty="0" err="1"/>
+              <a:rPr lang="ko-KR" altLang="ko-KR" sz="300" dirty="0" err="1"/>
               <a:t>Torne</a:t>
             </a:r>
             <a:r>
-              <a:rPr lang="ko-KR" altLang="ko-KR" sz="848" dirty="0"/>
+              <a:rPr lang="ko-KR" altLang="ko-KR" sz="300" dirty="0"/>
               <a:t> </a:t>
             </a:r>
             <a:r>
-              <a:rPr lang="ko-KR" altLang="ko-KR" sz="848" dirty="0" err="1"/>
+              <a:rPr lang="ko-KR" altLang="ko-KR" sz="300" dirty="0" err="1"/>
               <a:t>et</a:t>
             </a:r>
             <a:r>
-              <a:rPr lang="ko-KR" altLang="ko-KR" sz="848" dirty="0"/>
+              <a:rPr lang="ko-KR" altLang="ko-KR" sz="300" dirty="0"/>
               <a:t> </a:t>
             </a:r>
             <a:r>
-              <a:rPr lang="ko-KR" altLang="ko-KR" sz="848" dirty="0" err="1"/>
+              <a:rPr lang="ko-KR" altLang="ko-KR" sz="300" dirty="0" err="1"/>
               <a:t>al</a:t>
             </a:r>
             <a:r>
-              <a:rPr lang="ko-KR" altLang="ko-KR" sz="848" dirty="0"/>
+              <a:rPr lang="ko-KR" altLang="ko-KR" sz="300" dirty="0"/>
               <a:t>.,</a:t>
             </a:r>
             <a:r>
-              <a:rPr lang="en-US" altLang="ko-KR" sz="848" dirty="0"/>
+              <a:rPr lang="en-US" altLang="ko-KR" sz="300" dirty="0"/>
               <a:t> </a:t>
             </a:r>
             <a:r>
-              <a:rPr lang="ko-KR" altLang="ko-KR" sz="848" dirty="0"/>
+              <a:rPr lang="ko-KR" altLang="ko-KR" sz="300" dirty="0"/>
               <a:t>“</a:t>
             </a:r>
             <a:r>
-              <a:rPr lang="ko-KR" altLang="ko-KR" sz="848" dirty="0" err="1"/>
+              <a:rPr lang="ko-KR" altLang="ko-KR" sz="300" dirty="0" err="1"/>
               <a:t>MeM</a:t>
             </a:r>
             <a:r>
-              <a:rPr lang="ko-KR" altLang="ko-KR" sz="848" dirty="0"/>
+              <a:rPr lang="ko-KR" altLang="ko-KR" sz="300" dirty="0"/>
               <a:t>: </a:t>
             </a:r>
             <a:r>
-              <a:rPr lang="ko-KR" altLang="ko-KR" sz="848" dirty="0" err="1"/>
+              <a:rPr lang="ko-KR" altLang="ko-KR" sz="300" dirty="0" err="1"/>
               <a:t>Multi-Scale</a:t>
             </a:r>
             <a:r>
-              <a:rPr lang="ko-KR" altLang="ko-KR" sz="848" dirty="0"/>
+              <a:rPr lang="ko-KR" altLang="ko-KR" sz="300" dirty="0"/>
               <a:t> </a:t>
             </a:r>
             <a:r>
-              <a:rPr lang="ko-KR" altLang="ko-KR" sz="848" dirty="0" err="1"/>
+              <a:rPr lang="ko-KR" altLang="ko-KR" sz="300" dirty="0" err="1"/>
               <a:t>Embodied</a:t>
             </a:r>
             <a:r>
-              <a:rPr lang="ko-KR" altLang="ko-KR" sz="848" dirty="0"/>
+              <a:rPr lang="ko-KR" altLang="ko-KR" sz="300" dirty="0"/>
               <a:t> </a:t>
             </a:r>
             <a:r>
-              <a:rPr lang="ko-KR" altLang="ko-KR" sz="848" dirty="0" err="1"/>
+              <a:rPr lang="ko-KR" altLang="ko-KR" sz="300" dirty="0" err="1"/>
               <a:t>Memory</a:t>
             </a:r>
             <a:r>
-              <a:rPr lang="ko-KR" altLang="ko-KR" sz="848" dirty="0"/>
+              <a:rPr lang="ko-KR" altLang="ko-KR" sz="300" dirty="0"/>
               <a:t> </a:t>
             </a:r>
             <a:r>
-              <a:rPr lang="ko-KR" altLang="ko-KR" sz="848" dirty="0" err="1"/>
+              <a:rPr lang="ko-KR" altLang="ko-KR" sz="300" dirty="0" err="1"/>
               <a:t>for</a:t>
             </a:r>
             <a:r>
-              <a:rPr lang="ko-KR" altLang="ko-KR" sz="848" dirty="0"/>
+              <a:rPr lang="ko-KR" altLang="ko-KR" sz="300" dirty="0"/>
               <a:t> </a:t>
             </a:r>
             <a:r>
-              <a:rPr lang="ko-KR" altLang="ko-KR" sz="848" dirty="0" err="1"/>
+              <a:rPr lang="ko-KR" altLang="ko-KR" sz="300" dirty="0" err="1"/>
               <a:t>Vision-Language-Action</a:t>
             </a:r>
             <a:r>
-              <a:rPr lang="ko-KR" altLang="ko-KR" sz="848" dirty="0"/>
+              <a:rPr lang="ko-KR" altLang="ko-KR" sz="300" dirty="0"/>
               <a:t> </a:t>
             </a:r>
             <a:r>
-              <a:rPr lang="ko-KR" altLang="ko-KR" sz="848" dirty="0" err="1"/>
+              <a:rPr lang="ko-KR" altLang="ko-KR" sz="300" dirty="0" err="1"/>
               <a:t>Models</a:t>
             </a:r>
             <a:r>
-              <a:rPr lang="ko-KR" altLang="ko-KR" sz="848" dirty="0"/>
+              <a:rPr lang="ko-KR" altLang="ko-KR" sz="300" dirty="0"/>
               <a:t>”, 2026</a:t>
             </a:r>
             <a:br>
-              <a:rPr lang="ko-KR" altLang="ko-KR" sz="848" dirty="0"/>
+              <a:rPr lang="ko-KR" altLang="ko-KR" sz="300" dirty="0"/>
             </a:br>
             <a:r>
-              <a:rPr lang="ko-KR" altLang="ko-KR" sz="848" dirty="0"/>
+              <a:rPr lang="ko-KR" altLang="ko-KR" sz="300" dirty="0"/>
               <a:t>3. </a:t>
             </a:r>
             <a:r>
-              <a:rPr lang="ko-KR" altLang="ko-KR" sz="848" dirty="0" err="1"/>
+              <a:rPr lang="ko-KR" altLang="ko-KR" sz="300" dirty="0" err="1"/>
               <a:t>Y</a:t>
             </a:r>
             <a:r>
-              <a:rPr lang="ko-KR" altLang="ko-KR" sz="848" dirty="0"/>
+              <a:rPr lang="ko-KR" altLang="ko-KR" sz="300" dirty="0"/>
               <a:t>. </a:t>
             </a:r>
             <a:r>
-              <a:rPr lang="ko-KR" altLang="ko-KR" sz="848" dirty="0" err="1"/>
+              <a:rPr lang="ko-KR" altLang="ko-KR" sz="300" dirty="0" err="1"/>
               <a:t>Tur</a:t>
             </a:r>
             <a:r>
-              <a:rPr lang="ko-KR" altLang="ko-KR" sz="848" dirty="0"/>
+              <a:rPr lang="ko-KR" altLang="ko-KR" sz="300" dirty="0"/>
               <a:t> </a:t>
             </a:r>
             <a:r>
-              <a:rPr lang="ko-KR" altLang="ko-KR" sz="848" dirty="0" err="1"/>
+              <a:rPr lang="ko-KR" altLang="ko-KR" sz="300" dirty="0" err="1"/>
               <a:t>et</a:t>
             </a:r>
             <a:r>
-              <a:rPr lang="ko-KR" altLang="ko-KR" sz="848" dirty="0"/>
+              <a:rPr lang="ko-KR" altLang="ko-KR" sz="300" dirty="0"/>
               <a:t> </a:t>
             </a:r>
             <a:r>
-              <a:rPr lang="ko-KR" altLang="ko-KR" sz="848" dirty="0" err="1"/>
+              <a:rPr lang="ko-KR" altLang="ko-KR" sz="300" dirty="0" err="1"/>
               <a:t>al</a:t>
             </a:r>
             <a:r>
-              <a:rPr lang="ko-KR" altLang="ko-KR" sz="848" dirty="0"/>
+              <a:rPr lang="ko-KR" altLang="ko-KR" sz="300" dirty="0"/>
               <a:t>.,</a:t>
             </a:r>
             <a:r>
-              <a:rPr lang="en-US" altLang="ko-KR" sz="848" dirty="0"/>
+              <a:rPr lang="en-US" altLang="ko-KR" sz="300" dirty="0"/>
               <a:t> </a:t>
             </a:r>
             <a:r>
-              <a:rPr lang="ko-KR" altLang="ko-KR" sz="848" dirty="0"/>
+              <a:rPr lang="ko-KR" altLang="ko-KR" sz="300" dirty="0"/>
               <a:t>“</a:t>
             </a:r>
             <a:r>
-              <a:rPr lang="ko-KR" altLang="ko-KR" sz="848" dirty="0" err="1"/>
+              <a:rPr lang="ko-KR" altLang="ko-KR" sz="300" dirty="0" err="1"/>
               <a:t>Recurrent-Depth</a:t>
             </a:r>
             <a:r>
-              <a:rPr lang="ko-KR" altLang="ko-KR" sz="848" dirty="0"/>
+              <a:rPr lang="ko-KR" altLang="ko-KR" sz="300" dirty="0"/>
               <a:t> VLA: </a:t>
             </a:r>
             <a:r>
-              <a:rPr lang="ko-KR" altLang="ko-KR" sz="848" dirty="0" err="1"/>
+              <a:rPr lang="ko-KR" altLang="ko-KR" sz="300" dirty="0" err="1"/>
               <a:t>Implicit</a:t>
             </a:r>
             <a:r>
-              <a:rPr lang="ko-KR" altLang="ko-KR" sz="848" dirty="0"/>
+              <a:rPr lang="ko-KR" altLang="ko-KR" sz="300" dirty="0"/>
               <a:t> </a:t>
             </a:r>
             <a:r>
-              <a:rPr lang="ko-KR" altLang="ko-KR" sz="848" dirty="0" err="1"/>
+              <a:rPr lang="ko-KR" altLang="ko-KR" sz="300" dirty="0" err="1"/>
               <a:t>Test</a:t>
             </a:r>
             <a:r>
-              <a:rPr lang="ko-KR" altLang="ko-KR" sz="848" dirty="0"/>
+              <a:rPr lang="ko-KR" altLang="ko-KR" sz="300" dirty="0"/>
               <a:t>-Time </a:t>
             </a:r>
             <a:r>
-              <a:rPr lang="ko-KR" altLang="ko-KR" sz="848" dirty="0" err="1"/>
+              <a:rPr lang="ko-KR" altLang="ko-KR" sz="300" dirty="0" err="1"/>
               <a:t>Compute</a:t>
             </a:r>
             <a:r>
-              <a:rPr lang="ko-KR" altLang="ko-KR" sz="848" dirty="0"/>
+              <a:rPr lang="ko-KR" altLang="ko-KR" sz="300" dirty="0"/>
               <a:t> </a:t>
             </a:r>
             <a:r>
-              <a:rPr lang="ko-KR" altLang="ko-KR" sz="848" dirty="0" err="1"/>
+              <a:rPr lang="ko-KR" altLang="ko-KR" sz="300" dirty="0" err="1"/>
               <a:t>Scaling</a:t>
             </a:r>
             <a:r>
-              <a:rPr lang="ko-KR" altLang="ko-KR" sz="848" dirty="0"/>
+              <a:rPr lang="ko-KR" altLang="ko-KR" sz="300" dirty="0"/>
               <a:t> of </a:t>
             </a:r>
             <a:r>
-              <a:rPr lang="ko-KR" altLang="ko-KR" sz="848" dirty="0" err="1"/>
+              <a:rPr lang="ko-KR" altLang="ko-KR" sz="300" dirty="0" err="1"/>
               <a:t>Vision-Language-Action</a:t>
             </a:r>
             <a:r>
-              <a:rPr lang="ko-KR" altLang="ko-KR" sz="848" dirty="0"/>
+              <a:rPr lang="ko-KR" altLang="ko-KR" sz="300" dirty="0"/>
               <a:t> </a:t>
             </a:r>
             <a:r>
-              <a:rPr lang="ko-KR" altLang="ko-KR" sz="848" dirty="0" err="1"/>
+              <a:rPr lang="ko-KR" altLang="ko-KR" sz="300" dirty="0" err="1"/>
               <a:t>Models</a:t>
             </a:r>
             <a:r>
-              <a:rPr lang="ko-KR" altLang="ko-KR" sz="848" dirty="0"/>
+              <a:rPr lang="ko-KR" altLang="ko-KR" sz="300" dirty="0"/>
               <a:t> </a:t>
             </a:r>
             <a:r>
-              <a:rPr lang="ko-KR" altLang="ko-KR" sz="848" dirty="0" err="1"/>
+              <a:rPr lang="ko-KR" altLang="ko-KR" sz="300" dirty="0" err="1"/>
               <a:t>via</a:t>
             </a:r>
             <a:r>
-              <a:rPr lang="ko-KR" altLang="ko-KR" sz="848" dirty="0"/>
+              <a:rPr lang="ko-KR" altLang="ko-KR" sz="300" dirty="0"/>
               <a:t> </a:t>
             </a:r>
             <a:r>
-              <a:rPr lang="ko-KR" altLang="ko-KR" sz="848" dirty="0" err="1"/>
+              <a:rPr lang="ko-KR" altLang="ko-KR" sz="300" dirty="0" err="1"/>
               <a:t>Latent</a:t>
             </a:r>
             <a:r>
-              <a:rPr lang="ko-KR" altLang="ko-KR" sz="848" dirty="0"/>
+              <a:rPr lang="ko-KR" altLang="ko-KR" sz="300" dirty="0"/>
               <a:t> </a:t>
             </a:r>
             <a:r>
-              <a:rPr lang="ko-KR" altLang="ko-KR" sz="848" dirty="0" err="1"/>
+              <a:rPr lang="ko-KR" altLang="ko-KR" sz="300" dirty="0" err="1"/>
               <a:t>Iterative</a:t>
             </a:r>
             <a:r>
-              <a:rPr lang="ko-KR" altLang="ko-KR" sz="848" dirty="0"/>
+              <a:rPr lang="ko-KR" altLang="ko-KR" sz="300" dirty="0"/>
               <a:t> </a:t>
             </a:r>
             <a:r>
-              <a:rPr lang="ko-KR" altLang="ko-KR" sz="848" dirty="0" err="1"/>
+              <a:rPr lang="ko-KR" altLang="ko-KR" sz="300" dirty="0" err="1"/>
               <a:t>Reasoning</a:t>
             </a:r>
             <a:r>
-              <a:rPr lang="ko-KR" altLang="ko-KR" sz="848" dirty="0"/>
+              <a:rPr lang="ko-KR" altLang="ko-KR" sz="300" dirty="0"/>
               <a:t>”, 2026</a:t>
             </a:r>
             <a:br>
-              <a:rPr lang="ko-KR" altLang="ko-KR" sz="848" dirty="0"/>
+              <a:rPr lang="ko-KR" altLang="ko-KR" sz="300" dirty="0"/>
             </a:br>
             <a:r>
-              <a:rPr lang="ko-KR" altLang="ko-KR" sz="848" dirty="0"/>
+              <a:rPr lang="ko-KR" altLang="ko-KR" sz="300" dirty="0"/>
               <a:t>4. </a:t>
             </a:r>
             <a:r>
-              <a:rPr lang="ko-KR" altLang="ko-KR" sz="848" dirty="0" err="1"/>
+              <a:rPr lang="ko-KR" altLang="ko-KR" sz="300" dirty="0" err="1"/>
               <a:t>Physical</a:t>
             </a:r>
             <a:r>
-              <a:rPr lang="ko-KR" altLang="ko-KR" sz="848" dirty="0"/>
+              <a:rPr lang="ko-KR" altLang="ko-KR" sz="300" dirty="0"/>
               <a:t> </a:t>
             </a:r>
             <a:r>
-              <a:rPr lang="ko-KR" altLang="ko-KR" sz="848" dirty="0" err="1"/>
+              <a:rPr lang="ko-KR" altLang="ko-KR" sz="300" dirty="0" err="1"/>
               <a:t>Intelligence</a:t>
             </a:r>
             <a:r>
-              <a:rPr lang="ko-KR" altLang="ko-KR" sz="848" dirty="0"/>
+              <a:rPr lang="ko-KR" altLang="ko-KR" sz="300" dirty="0"/>
               <a:t>,</a:t>
             </a:r>
             <a:r>
-              <a:rPr lang="en-US" altLang="ko-KR" sz="848" dirty="0"/>
+              <a:rPr lang="en-US" altLang="ko-KR" sz="300" dirty="0"/>
               <a:t> </a:t>
             </a:r>
             <a:r>
-              <a:rPr lang="ko-KR" altLang="ko-KR" sz="848" dirty="0"/>
+              <a:rPr lang="ko-KR" altLang="ko-KR" sz="300" dirty="0"/>
               <a:t>“π*0.6: </a:t>
             </a:r>
             <a:r>
-              <a:rPr lang="ko-KR" altLang="ko-KR" sz="848" dirty="0" err="1"/>
+              <a:rPr lang="ko-KR" altLang="ko-KR" sz="300" dirty="0" err="1"/>
               <a:t>A</a:t>
             </a:r>
             <a:r>
-              <a:rPr lang="ko-KR" altLang="ko-KR" sz="848" dirty="0"/>
+              <a:rPr lang="ko-KR" altLang="ko-KR" sz="300" dirty="0"/>
               <a:t> </a:t>
             </a:r>
             <a:r>
-              <a:rPr lang="ko-KR" altLang="ko-KR" sz="848" dirty="0" err="1"/>
+              <a:rPr lang="ko-KR" altLang="ko-KR" sz="300" dirty="0" err="1"/>
               <a:t>Vision-Language-Action</a:t>
             </a:r>
             <a:r>
-              <a:rPr lang="ko-KR" altLang="ko-KR" sz="848" dirty="0"/>
+              <a:rPr lang="ko-KR" altLang="ko-KR" sz="300" dirty="0"/>
               <a:t> </a:t>
             </a:r>
             <a:r>
-              <a:rPr lang="ko-KR" altLang="ko-KR" sz="848" dirty="0" err="1"/>
+              <a:rPr lang="ko-KR" altLang="ko-KR" sz="300" dirty="0" err="1"/>
               <a:t>Model</a:t>
             </a:r>
             <a:r>
-              <a:rPr lang="ko-KR" altLang="ko-KR" sz="848" dirty="0"/>
+              <a:rPr lang="ko-KR" altLang="ko-KR" sz="300" dirty="0"/>
               <a:t> </a:t>
             </a:r>
             <a:r>
-              <a:rPr lang="ko-KR" altLang="ko-KR" sz="848" dirty="0" err="1"/>
+              <a:rPr lang="ko-KR" altLang="ko-KR" sz="300" dirty="0" err="1"/>
               <a:t>That</a:t>
             </a:r>
             <a:r>
-              <a:rPr lang="ko-KR" altLang="ko-KR" sz="848" dirty="0"/>
+              <a:rPr lang="ko-KR" altLang="ko-KR" sz="300" dirty="0"/>
               <a:t> </a:t>
             </a:r>
             <a:r>
-              <a:rPr lang="ko-KR" altLang="ko-KR" sz="848" dirty="0" err="1"/>
+              <a:rPr lang="ko-KR" altLang="ko-KR" sz="300" dirty="0" err="1"/>
               <a:t>Learns</a:t>
             </a:r>
             <a:r>
-              <a:rPr lang="ko-KR" altLang="ko-KR" sz="848" dirty="0"/>
+              <a:rPr lang="ko-KR" altLang="ko-KR" sz="300" dirty="0"/>
               <a:t> </a:t>
             </a:r>
             <a:r>
-              <a:rPr lang="ko-KR" altLang="ko-KR" sz="848" dirty="0" err="1"/>
+              <a:rPr lang="ko-KR" altLang="ko-KR" sz="300" dirty="0" err="1"/>
               <a:t>From</a:t>
             </a:r>
             <a:r>
-              <a:rPr lang="ko-KR" altLang="ko-KR" sz="848" dirty="0"/>
+              <a:rPr lang="ko-KR" altLang="ko-KR" sz="300" dirty="0"/>
               <a:t> </a:t>
             </a:r>
             <a:r>
-              <a:rPr lang="ko-KR" altLang="ko-KR" sz="848" dirty="0" err="1"/>
+              <a:rPr lang="ko-KR" altLang="ko-KR" sz="300" dirty="0" err="1"/>
               <a:t>Experience</a:t>
             </a:r>
             <a:r>
-              <a:rPr lang="ko-KR" altLang="ko-KR" sz="848" dirty="0"/>
+              <a:rPr lang="ko-KR" altLang="ko-KR" sz="300" dirty="0"/>
               <a:t>”, 2025</a:t>
             </a:r>
-            <a:endParaRPr lang="en-US" altLang="ko-KR" sz="1273" dirty="0">
+            <a:endParaRPr lang="en-US" altLang="ko-KR" sz="450" dirty="0">
               <a:latin typeface="+mn-ea"/>
             </a:endParaRPr>
           </a:p>
@@ -6082,7 +6087,7 @@
           <p:cNvPr id="43" name="TextBox 42">
             <a:extLst>
               <a:ext uri="{FF2B5EF4-FFF2-40B4-BE49-F238E27FC236}">
-                <ns2:creationId id="{C655A3BA-B8CA-CFC2-B324-40802DD3C8F7}"/>
+                <a16:creationId xmlns:a16="http://schemas.microsoft.com/office/drawing/2014/main" id="{C655A3BA-B8CA-CFC2-B324-40802DD3C8F7}"/>
               </a:ext>
             </a:extLst>
           </p:cNvPr>
@@ -6091,8 +6096,8 @@
         </p:nvSpPr>
         <p:spPr>
           <a:xfrm>
-            <a:off x="187430" y="9641256"/>
-            <a:ext cx="1421904" cy="228501"/>
+            <a:off x="2511163" y="6860749"/>
+            <a:ext cx="502138" cy="161583"/>
           </a:xfrm>
           <a:prstGeom prst="rect">
             <a:avLst/>
@@ -6126,7 +6131,7 @@
               <a:fillToRect l="50000" t="50000" r="50000" b="50000"/>
             </a:path>
           </a:gradFill>
-          <a:ln w="20205">
+          <a:ln w="57150">
             <a:solidFill>
               <a:schemeClr val="accent4">
                 <a:lumMod val="50000"/>
@@ -6142,7 +6147,7 @@
           <a:p>
             <a:pPr algn="ctr"/>
             <a:r>
-              <a:rPr lang="ko-KR" altLang="en-US" sz="1273" b="1" dirty="0">
+              <a:rPr lang="ko-KR" altLang="en-US" sz="450" b="1" dirty="0">
                 <a:solidFill>
                   <a:schemeClr val="bg1"/>
                 </a:solidFill>
@@ -6150,7 +6155,7 @@
               </a:rPr>
               <a:t>참고 문헌</a:t>
             </a:r>
-            <a:endParaRPr lang="en-US" altLang="ko-KR" sz="1273" b="1" dirty="0">
+            <a:endParaRPr lang="en-US" altLang="ko-KR" sz="450" b="1" dirty="0">
               <a:solidFill>
                 <a:schemeClr val="bg1"/>
               </a:solidFill>
@@ -6164,7 +6169,7 @@
           <p:cNvPr id="45" name="직선 연결선 44">
             <a:extLst>
               <a:ext uri="{FF2B5EF4-FFF2-40B4-BE49-F238E27FC236}">
-                <ns2:creationId id="{A9ECEE2F-DA3C-A19B-0A1C-3EFB6CB0D3AF}"/>
+                <a16:creationId xmlns:a16="http://schemas.microsoft.com/office/drawing/2014/main" id="{A9ECEE2F-DA3C-A19B-0A1C-3EFB6CB0D3AF}"/>
               </a:ext>
             </a:extLst>
           </p:cNvPr>
@@ -6175,13 +6180,13 @@
         </p:nvCxnSpPr>
         <p:spPr>
           <a:xfrm>
-            <a:off x="5577536" y="1211948"/>
-            <a:ext cx="0" cy="1395785"/>
+            <a:off x="4414651" y="3883980"/>
+            <a:ext cx="0" cy="492915"/>
           </a:xfrm>
           <a:prstGeom prst="line">
             <a:avLst/>
           </a:prstGeom>
-          <a:ln w="13470">
+          <a:ln w="38100">
             <a:solidFill>
               <a:schemeClr val="accent4">
                 <a:lumMod val="50000"/>
@@ -6209,7 +6214,7 @@
           <p:cNvPr id="47" name="직선 연결선 46">
             <a:extLst>
               <a:ext uri="{FF2B5EF4-FFF2-40B4-BE49-F238E27FC236}">
-                <ns2:creationId id="{98D0F76D-4880-0354-E114-EE979387E359}"/>
+                <a16:creationId xmlns:a16="http://schemas.microsoft.com/office/drawing/2014/main" id="{98D0F76D-4880-0354-E114-EE979387E359}"/>
               </a:ext>
             </a:extLst>
           </p:cNvPr>
@@ -6220,13 +6225,13 @@
         </p:nvCxnSpPr>
         <p:spPr>
           <a:xfrm>
-            <a:off x="3873885" y="2661297"/>
-            <a:ext cx="3410527" cy="0"/>
+            <a:off x="3813015" y="4395811"/>
+            <a:ext cx="1204411" cy="0"/>
           </a:xfrm>
           <a:prstGeom prst="line">
             <a:avLst/>
           </a:prstGeom>
-          <a:ln w="13470">
+          <a:ln w="38100">
             <a:solidFill>
               <a:schemeClr val="accent4">
                 <a:lumMod val="50000"/>
@@ -6254,7 +6259,7 @@
           <p:cNvPr id="49" name="그림 48">
             <a:extLst>
               <a:ext uri="{FF2B5EF4-FFF2-40B4-BE49-F238E27FC236}">
-                <ns2:creationId id="{0E319863-8D29-8677-0528-71E664C10909}"/>
+                <a16:creationId xmlns:a16="http://schemas.microsoft.com/office/drawing/2014/main" id="{0E319863-8D29-8677-0528-71E664C10909}"/>
               </a:ext>
             </a:extLst>
           </p:cNvPr>
@@ -6264,15 +6269,15 @@
           <p:nvPr/>
         </p:nvPicPr>
         <p:blipFill>
-          <a:blip ns3:embed="rId4"/>
+          <a:blip r:embed="rId4"/>
           <a:stretch>
             <a:fillRect/>
           </a:stretch>
         </p:blipFill>
         <p:spPr>
           <a:xfrm>
-            <a:off x="286222" y="2490151"/>
-            <a:ext cx="3392214" cy="1827311"/>
+            <a:off x="2546050" y="4335372"/>
+            <a:ext cx="1197944" cy="645306"/>
           </a:xfrm>
           <a:prstGeom prst="rect">
             <a:avLst/>
@@ -6284,7 +6289,7 @@
           <p:cNvPr id="63" name="AutoShape 8">
             <a:extLst>
               <a:ext uri="{FF2B5EF4-FFF2-40B4-BE49-F238E27FC236}">
-                <ns2:creationId id="{FB9C8253-00AC-F309-D968-60B6A8055BAA}"/>
+                <a16:creationId xmlns:a16="http://schemas.microsoft.com/office/drawing/2014/main" id="{FB9C8253-00AC-F309-D968-60B6A8055BAA}"/>
               </a:ext>
             </a:extLst>
           </p:cNvPr>
@@ -6295,8 +6300,8 @@
         </p:nvSpPr>
         <p:spPr bwMode="auto">
           <a:xfrm>
-            <a:off x="3726055" y="5297520"/>
-            <a:ext cx="107758" cy="107758"/>
+            <a:off x="3760810" y="5326780"/>
+            <a:ext cx="38054" cy="38054"/>
           </a:xfrm>
           <a:prstGeom prst="rect">
             <a:avLst/>
@@ -6304,23 +6309,23 @@
           <a:noFill/>
           <a:extLst>
             <a:ext uri="{909E8E84-426E-40DD-AFC4-6F175D3DCCD1}">
-              <ns4:hiddenFill>
+              <a14:hiddenFill xmlns:a14="http://schemas.microsoft.com/office/drawing/2010/main">
                 <a:solidFill>
                   <a:srgbClr val="FFFFFF"/>
                 </a:solidFill>
-              </ns4:hiddenFill>
+              </a14:hiddenFill>
             </a:ext>
           </a:extLst>
         </p:spPr>
         <p:txBody>
-          <a:bodyPr vert="horz" wrap="square" lIns="91440" tIns="45720" rIns="91440" bIns="45720" numCol="1" anchor="t" anchorCtr="0" compatLnSpc="1">
+          <a:bodyPr vert="horz" wrap="square" lIns="11416" tIns="5708" rIns="11416" bIns="5708" numCol="1" anchor="t" anchorCtr="0" compatLnSpc="1">
             <a:prstTxWarp prst="textNoShape">
               <a:avLst/>
             </a:prstTxWarp>
           </a:bodyPr>
           <a:lstStyle/>
           <a:p>
-            <a:endParaRPr lang="ko-KR" altLang="en-US"/>
+            <a:endParaRPr lang="ko-KR" altLang="en-US" sz="225"/>
           </a:p>
         </p:txBody>
       </p:sp>
@@ -6329,7 +6334,7 @@
           <p:cNvPr id="67" name="그림 66">
             <a:extLst>
               <a:ext uri="{FF2B5EF4-FFF2-40B4-BE49-F238E27FC236}">
-                <ns2:creationId id="{8983FFBB-814B-2803-43F3-68CC70CD6173}"/>
+                <a16:creationId xmlns:a16="http://schemas.microsoft.com/office/drawing/2014/main" id="{8983FFBB-814B-2803-43F3-68CC70CD6173}"/>
               </a:ext>
             </a:extLst>
           </p:cNvPr>
@@ -6339,29 +6344,29 @@
           <p:nvPr/>
         </p:nvPicPr>
         <p:blipFill>
-          <a:blip ns3:embed="rId5"/>
+          <a:blip r:embed="rId5"/>
           <a:stretch>
             <a:fillRect/>
           </a:stretch>
         </p:blipFill>
         <p:spPr>
           <a:xfrm>
-            <a:off x="3833812" y="4907145"/>
-            <a:ext cx="3497491" cy="1794167"/>
+            <a:off x="3798864" y="5188921"/>
+            <a:ext cx="1235122" cy="633601"/>
           </a:xfrm>
           <a:prstGeom prst="rect">
             <a:avLst/>
           </a:prstGeom>
         </p:spPr>
       </p:pic>
-      <ns5:AlternateContent>
-        <ns5:Choice Requires="a14">
+      <mc:AlternateContent xmlns:mc="http://schemas.openxmlformats.org/markup-compatibility/2006">
+        <mc:Choice xmlns:a14="http://schemas.microsoft.com/office/drawing/2010/main" Requires="a14">
           <p:sp>
             <p:nvSpPr>
               <p:cNvPr id="76" name="TextBox 75">
                 <a:extLst>
                   <a:ext uri="{FF2B5EF4-FFF2-40B4-BE49-F238E27FC236}">
-                    <ns2:creationId id="{95FFC5BA-CB4A-01E7-524A-DE54FC1B8E73}"/>
+                    <a16:creationId xmlns:a16="http://schemas.microsoft.com/office/drawing/2014/main" id="{95FFC5BA-CB4A-01E7-524A-DE54FC1B8E73}"/>
                   </a:ext>
                 </a:extLst>
               </p:cNvPr>
@@ -6370,8 +6375,8 @@
             </p:nvSpPr>
             <p:spPr>
               <a:xfrm>
-                <a:off x="4401156" y="4049221"/>
-                <a:ext cx="2366760" cy="489554"/>
+                <a:off x="3999219" y="4885950"/>
+                <a:ext cx="835810" cy="173637"/>
               </a:xfrm>
               <a:prstGeom prst="rect">
                 <a:avLst/>
@@ -6393,41 +6398,41 @@
               <a:p>
                 <a:pPr algn="ctr"/>
                 <a:r>
-                  <a:rPr lang="ko-KR" altLang="ko-KR" sz="919" b="1" dirty="0"/>
+                  <a:rPr lang="ko-KR" altLang="ko-KR" sz="325" b="1" dirty="0"/>
                   <a:t>System2 </a:t>
                 </a:r>
                 <a:r>
-                  <a:rPr lang="ko-KR" altLang="ko-KR" sz="919" b="1" dirty="0" err="1"/>
+                  <a:rPr lang="ko-KR" altLang="ko-KR" sz="325" b="1" dirty="0" err="1"/>
                   <a:t>stage</a:t>
                 </a:r>
                 <a:r>
-                  <a:rPr lang="ko-KR" altLang="ko-KR" sz="919" b="1" dirty="0"/>
+                  <a:rPr lang="ko-KR" altLang="ko-KR" sz="325" b="1" dirty="0"/>
                   <a:t>/</a:t>
                 </a:r>
                 <a:r>
-                  <a:rPr lang="ko-KR" altLang="ko-KR" sz="919" b="1" dirty="0" err="1"/>
+                  <a:rPr lang="ko-KR" altLang="ko-KR" sz="325" b="1" dirty="0" err="1"/>
                   <a:t>subtask</a:t>
                 </a:r>
                 <a:r>
-                  <a:rPr lang="ko-KR" altLang="ko-KR" sz="919" b="1" dirty="0"/>
+                  <a:rPr lang="ko-KR" altLang="ko-KR" sz="325" b="1" dirty="0"/>
                   <a:t> </a:t>
                 </a:r>
                 <a:r>
-                  <a:rPr lang="ko-KR" altLang="ko-KR" sz="919" b="1" dirty="0" err="1"/>
+                  <a:rPr lang="ko-KR" altLang="ko-KR" sz="325" b="1" dirty="0" err="1"/>
                   <a:t>prediction의</a:t>
                 </a:r>
                 <a:r>
-                  <a:rPr lang="ko-KR" altLang="ko-KR" sz="919" b="1" dirty="0"/>
+                  <a:rPr lang="ko-KR" altLang="ko-KR" sz="325" b="1" dirty="0"/>
                   <a:t> 정확도</a:t>
                 </a:r>
-                <a:endParaRPr lang="en-US" altLang="ko-KR" sz="919" b="1" dirty="0"/>
+                <a:endParaRPr lang="en-US" altLang="ko-KR" sz="325" b="1" dirty="0"/>
               </a:p>
               <a:p>
-                <a:pPr marL="121227" indent="1" algn="ctr">
+                <a:pPr marL="42813" indent="-42813" algn="ctr">
                   <a:buFont typeface="Arial" panose="020B0604020202020204" pitchFamily="34" charset="0"/>
                   <a:buChar char="•"/>
                 </a:pPr>
-                <a:endParaRPr lang="en-US" altLang="ko-KR" sz="919" b="1" dirty="0">
+                <a:endParaRPr lang="en-US" altLang="ko-KR" sz="325" b="1" dirty="0">
                   <a:latin typeface="+mj-ea"/>
                   <a:ea typeface="+mj-ea"/>
                 </a:endParaRPr>
@@ -6435,133 +6440,133 @@
               <a:p>
                 <a:pPr algn="ctr"/>
                 <a:r>
-                  <a:rPr lang="en-US" altLang="ko-KR" sz="919" dirty="0">
+                  <a:rPr lang="en-US" altLang="ko-KR" sz="325" dirty="0">
                     <a:latin typeface="+mj-ea"/>
                     <a:ea typeface="+mj-ea"/>
                   </a:rPr>
                   <a:t>Accuracy = </a:t>
                 </a:r>
-                <ns4:m>
-                  <ns6:oMath>
-                    <ns6:f>
-                      <ns6:fPr>
-                        <ns6:ctrlPr>
-                          <a:rPr lang="ko-KR" altLang="en-US" sz="919" i="1" smtClean="0">
+                <a14:m>
+                  <m:oMath xmlns:m="http://schemas.openxmlformats.org/officeDocument/2006/math">
+                    <m:f>
+                      <m:fPr>
+                        <m:ctrlPr>
+                          <a:rPr lang="ko-KR" altLang="en-US" sz="325" i="1">
                             <a:latin typeface="Cambria Math" panose="02040503050406030204" pitchFamily="18" charset="0"/>
                             <a:ea typeface="+mj-ea"/>
                           </a:rPr>
-                        </ns6:ctrlPr>
-                      </ns6:fPr>
-                      <ns6:num>
-                        <ns6:r>
-                          <ns6:rPr>
-                            <ns6:sty ns6:val="p"/>
-                          </ns6:rPr>
-                          <a:rPr lang="en-US" altLang="ko-KR" sz="919" b="0" i="0" smtClean="0">
+                        </m:ctrlPr>
+                      </m:fPr>
+                      <m:num>
+                        <m:r>
+                          <m:rPr>
+                            <m:sty m:val="p"/>
+                          </m:rPr>
+                          <a:rPr lang="en-US" altLang="ko-KR" sz="325">
                             <a:latin typeface="Cambria Math" panose="02040503050406030204" pitchFamily="18" charset="0"/>
                             <a:ea typeface="+mj-ea"/>
                           </a:rPr>
-                          <ns6:t>Number</ns6:t>
-                        </ns6:r>
-                        <ns6:r>
-                          <a:rPr lang="en-US" altLang="ko-KR" sz="919" b="0" i="0" smtClean="0">
+                          <m:t>Number</m:t>
+                        </m:r>
+                        <m:r>
+                          <a:rPr lang="en-US" altLang="ko-KR" sz="325">
                             <a:latin typeface="Cambria Math" panose="02040503050406030204" pitchFamily="18" charset="0"/>
                             <a:ea typeface="+mj-ea"/>
                           </a:rPr>
-                          <ns6:t> </ns6:t>
-                        </ns6:r>
-                        <ns6:r>
-                          <ns6:rPr>
-                            <ns6:sty ns6:val="p"/>
-                          </ns6:rPr>
-                          <a:rPr lang="en-US" altLang="ko-KR" sz="919" b="0" i="0" smtClean="0">
+                          <m:t> </m:t>
+                        </m:r>
+                        <m:r>
+                          <m:rPr>
+                            <m:sty m:val="p"/>
+                          </m:rPr>
+                          <a:rPr lang="en-US" altLang="ko-KR" sz="325">
                             <a:latin typeface="Cambria Math" panose="02040503050406030204" pitchFamily="18" charset="0"/>
                             <a:ea typeface="+mj-ea"/>
                           </a:rPr>
-                          <ns6:t>of</ns6:t>
-                        </ns6:r>
-                        <ns6:r>
-                          <a:rPr lang="en-US" altLang="ko-KR" sz="919" b="0" i="0" smtClean="0">
+                          <m:t>of</m:t>
+                        </m:r>
+                        <m:r>
+                          <a:rPr lang="en-US" altLang="ko-KR" sz="325">
                             <a:latin typeface="Cambria Math" panose="02040503050406030204" pitchFamily="18" charset="0"/>
                             <a:ea typeface="+mj-ea"/>
                           </a:rPr>
-                          <ns6:t> </ns6:t>
-                        </ns6:r>
-                        <ns6:r>
-                          <ns6:rPr>
-                            <ns6:sty ns6:val="p"/>
-                          </ns6:rPr>
-                          <a:rPr lang="en-US" altLang="ko-KR" sz="919" b="0" i="0" smtClean="0">
+                          <m:t> </m:t>
+                        </m:r>
+                        <m:r>
+                          <m:rPr>
+                            <m:sty m:val="p"/>
+                          </m:rPr>
+                          <a:rPr lang="en-US" altLang="ko-KR" sz="325">
                             <a:latin typeface="Cambria Math" panose="02040503050406030204" pitchFamily="18" charset="0"/>
                             <a:ea typeface="+mj-ea"/>
                           </a:rPr>
-                          <ns6:t>Correct</ns6:t>
-                        </ns6:r>
-                        <ns6:r>
-                          <a:rPr lang="en-US" altLang="ko-KR" sz="919" b="0" i="0" smtClean="0">
+                          <m:t>Correct</m:t>
+                        </m:r>
+                        <m:r>
+                          <a:rPr lang="en-US" altLang="ko-KR" sz="325">
                             <a:latin typeface="Cambria Math" panose="02040503050406030204" pitchFamily="18" charset="0"/>
                             <a:ea typeface="+mj-ea"/>
                           </a:rPr>
-                          <ns6:t> </ns6:t>
-                        </ns6:r>
-                        <ns6:r>
-                          <ns6:rPr>
-                            <ns6:sty ns6:val="p"/>
-                          </ns6:rPr>
-                          <a:rPr lang="en-US" altLang="ko-KR" sz="919" b="0" i="0" smtClean="0">
+                          <m:t> </m:t>
+                        </m:r>
+                        <m:r>
+                          <m:rPr>
+                            <m:sty m:val="p"/>
+                          </m:rPr>
+                          <a:rPr lang="en-US" altLang="ko-KR" sz="325">
                             <a:latin typeface="Cambria Math" panose="02040503050406030204" pitchFamily="18" charset="0"/>
                             <a:ea typeface="+mj-ea"/>
                           </a:rPr>
-                          <ns6:t>Prediction</ns6:t>
-                        </ns6:r>
-                      </ns6:num>
-                      <ns6:den>
-                        <ns6:r>
-                          <ns6:rPr>
-                            <ns6:sty ns6:val="p"/>
-                          </ns6:rPr>
-                          <a:rPr lang="en-US" altLang="ko-KR" sz="919" b="0" i="0" smtClean="0">
+                          <m:t>Prediction</m:t>
+                        </m:r>
+                      </m:num>
+                      <m:den>
+                        <m:r>
+                          <m:rPr>
+                            <m:sty m:val="p"/>
+                          </m:rPr>
+                          <a:rPr lang="en-US" altLang="ko-KR" sz="325">
                             <a:latin typeface="Cambria Math" panose="02040503050406030204" pitchFamily="18" charset="0"/>
                             <a:ea typeface="+mj-ea"/>
                           </a:rPr>
-                          <ns6:t>Total</ns6:t>
-                        </ns6:r>
-                        <ns6:r>
-                          <a:rPr lang="en-US" altLang="ko-KR" sz="919" b="0" i="0" smtClean="0">
+                          <m:t>Total</m:t>
+                        </m:r>
+                        <m:r>
+                          <a:rPr lang="en-US" altLang="ko-KR" sz="325">
                             <a:latin typeface="Cambria Math" panose="02040503050406030204" pitchFamily="18" charset="0"/>
                             <a:ea typeface="+mj-ea"/>
                           </a:rPr>
-                          <ns6:t> </ns6:t>
-                        </ns6:r>
-                        <ns6:r>
-                          <ns6:rPr>
-                            <ns6:sty ns6:val="p"/>
-                          </ns6:rPr>
-                          <a:rPr lang="en-US" altLang="ko-KR" sz="919" b="0" i="0" smtClean="0">
+                          <m:t> </m:t>
+                        </m:r>
+                        <m:r>
+                          <m:rPr>
+                            <m:sty m:val="p"/>
+                          </m:rPr>
+                          <a:rPr lang="en-US" altLang="ko-KR" sz="325">
                             <a:latin typeface="Cambria Math" panose="02040503050406030204" pitchFamily="18" charset="0"/>
                             <a:ea typeface="+mj-ea"/>
                           </a:rPr>
-                          <ns6:t>Prediction</ns6:t>
-                        </ns6:r>
-                      </ns6:den>
-                    </ns6:f>
-                  </ns6:oMath>
-                </ns4:m>
-                <a:endParaRPr lang="ko-KR" altLang="en-US" sz="919" dirty="0">
+                          <m:t>Prediction</m:t>
+                        </m:r>
+                      </m:den>
+                    </m:f>
+                  </m:oMath>
+                </a14:m>
+                <a:endParaRPr lang="ko-KR" altLang="en-US" sz="325" dirty="0">
                   <a:latin typeface="+mj-ea"/>
                   <a:ea typeface="+mj-ea"/>
                 </a:endParaRPr>
               </a:p>
             </p:txBody>
           </p:sp>
-        </ns5:Choice>
-        <ns5:Fallback>
+        </mc:Choice>
+        <mc:Fallback>
           <p:sp>
             <p:nvSpPr>
               <p:cNvPr id="76" name="TextBox 75">
                 <a:extLst>
                   <a:ext uri="{FF2B5EF4-FFF2-40B4-BE49-F238E27FC236}">
-                    <ns2:creationId id="{95FFC5BA-CB4A-01E7-524A-DE54FC1B8E73}"/>
+                    <a16:creationId xmlns:a16="http://schemas.microsoft.com/office/drawing/2014/main" id="{95FFC5BA-CB4A-01E7-524A-DE54FC1B8E73}"/>
                   </a:ext>
                 </a:extLst>
               </p:cNvPr>
@@ -6572,16 +6577,16 @@
             </p:nvSpPr>
             <p:spPr>
               <a:xfrm>
-                <a:off x="4401156" y="4049221"/>
-                <a:ext cx="2366760" cy="489554"/>
+                <a:off x="3999219" y="4885950"/>
+                <a:ext cx="835810" cy="173637"/>
               </a:xfrm>
               <a:prstGeom prst="rect">
                 <a:avLst/>
               </a:prstGeom>
               <a:blipFill>
-                <a:blip ns3:embed="rId6"/>
+                <a:blip r:embed="rId6"/>
                 <a:stretch>
-                  <a:fillRect l="-1364" t="-7860" r="-1364" b="-6114"/>
+                  <a:fillRect l="-1439" t="-6667" r="-2158" b="-6667"/>
                 </a:stretch>
               </a:blipFill>
               <a:ln>
@@ -6603,16 +6608,16 @@
               </a:p>
             </p:txBody>
           </p:sp>
-        </ns5:Fallback>
-      </ns5:AlternateContent>
-      <ns5:AlternateContent>
-        <ns5:Choice Requires="a14">
+        </mc:Fallback>
+      </mc:AlternateContent>
+      <mc:AlternateContent xmlns:mc="http://schemas.openxmlformats.org/markup-compatibility/2006">
+        <mc:Choice xmlns:a14="http://schemas.microsoft.com/office/drawing/2010/main" Requires="a14">
           <p:sp>
             <p:nvSpPr>
               <p:cNvPr id="77" name="TextBox 76">
                 <a:extLst>
                   <a:ext uri="{FF2B5EF4-FFF2-40B4-BE49-F238E27FC236}">
-                    <ns2:creationId id="{75D4B410-2449-16E0-3BAA-69809814850A}"/>
+                    <a16:creationId xmlns:a16="http://schemas.microsoft.com/office/drawing/2014/main" id="{75D4B410-2449-16E0-3BAA-69809814850A}"/>
                   </a:ext>
                 </a:extLst>
               </p:cNvPr>
@@ -6621,8 +6626,8 @@
             </p:nvSpPr>
             <p:spPr>
               <a:xfrm>
-                <a:off x="4631293" y="5341081"/>
-                <a:ext cx="1906485" cy="437756"/>
+                <a:off x="4084565" y="5342164"/>
+                <a:ext cx="665118" cy="154145"/>
               </a:xfrm>
               <a:prstGeom prst="rect">
                 <a:avLst/>
@@ -6644,14 +6649,14 @@
               <a:p>
                 <a:pPr algn="ctr"/>
                 <a:r>
-                  <a:rPr lang="ko-KR" altLang="en-US" sz="919" b="1" dirty="0">
+                  <a:rPr lang="ko-KR" altLang="en-US" sz="325" b="1" dirty="0">
                     <a:latin typeface="+mj-ea"/>
                     <a:ea typeface="+mj-ea"/>
                   </a:rPr>
                   <a:t>모델의 전체 학습 손실</a:t>
                 </a:r>
                 <a:r>
-                  <a:rPr lang="en-US" altLang="ko-KR" sz="919" b="1" dirty="0">
+                  <a:rPr lang="en-US" altLang="ko-KR" sz="325" b="1" dirty="0">
                     <a:latin typeface="+mj-ea"/>
                     <a:ea typeface="+mj-ea"/>
                   </a:rPr>
@@ -6659,258 +6664,258 @@
                 </a:r>
               </a:p>
               <a:p>
-                <a:pPr marL="121227" indent="1">
+                <a:pPr marL="42813" indent="-42813">
                   <a:buFont typeface="Arial" panose="020B0604020202020204" pitchFamily="34" charset="0"/>
                   <a:buChar char="•"/>
                 </a:pPr>
-                <a:endParaRPr lang="en-US" altLang="ko-KR" sz="919" i="1" dirty="0">
+                <a:endParaRPr lang="en-US" altLang="ko-KR" sz="325" i="1" dirty="0">
                   <a:latin typeface="+mj-ea"/>
                   <a:ea typeface="+mj-ea"/>
                 </a:endParaRPr>
               </a:p>
               <a:p>
                 <a:pPr algn="ctr"/>
-                <ns4:m>
-                  <ns6:oMath>
-                    <ns6:sSub>
-                      <ns6:sSubPr>
-                        <ns6:ctrlPr>
-                          <a:rPr lang="ko-KR" altLang="en-US" sz="919" i="1" smtClean="0">
+                <a14:m>
+                  <m:oMath xmlns:m="http://schemas.openxmlformats.org/officeDocument/2006/math">
+                    <m:sSub>
+                      <m:sSubPr>
+                        <m:ctrlPr>
+                          <a:rPr lang="ko-KR" altLang="en-US" sz="325" i="1">
                             <a:latin typeface="Cambria Math" panose="02040503050406030204" pitchFamily="18" charset="0"/>
                             <a:ea typeface="+mj-ea"/>
                           </a:rPr>
-                        </ns6:ctrlPr>
-                      </ns6:sSubPr>
-                      <ns6:e>
-                        <ns6:r>
-                          <a:rPr lang="en-US" altLang="ko-KR" sz="919" b="0" i="1" smtClean="0">
+                        </m:ctrlPr>
+                      </m:sSubPr>
+                      <m:e>
+                        <m:r>
+                          <a:rPr lang="en-US" altLang="ko-KR" sz="325" i="1">
                             <a:latin typeface="Cambria Math" panose="02040503050406030204" pitchFamily="18" charset="0"/>
                             <a:ea typeface="+mj-ea"/>
                           </a:rPr>
-                          <ns6:t>𝐿</ns6:t>
-                        </ns6:r>
-                      </ns6:e>
-                      <ns6:sub>
-                        <ns6:r>
-                          <a:rPr lang="en-US" altLang="ko-KR" sz="919" b="0" i="1" smtClean="0">
+                          <m:t>𝐿</m:t>
+                        </m:r>
+                      </m:e>
+                      <m:sub>
+                        <m:r>
+                          <a:rPr lang="en-US" altLang="ko-KR" sz="325" i="1">
                             <a:latin typeface="Cambria Math" panose="02040503050406030204" pitchFamily="18" charset="0"/>
                             <a:ea typeface="+mj-ea"/>
                           </a:rPr>
-                          <ns6:t>𝑡𝑜𝑡𝑎𝑙</ns6:t>
-                        </ns6:r>
-                      </ns6:sub>
-                    </ns6:sSub>
-                  </ns6:oMath>
-                </ns4:m>
+                          <m:t>𝑡𝑜𝑡𝑎𝑙</m:t>
+                        </m:r>
+                      </m:sub>
+                    </m:sSub>
+                  </m:oMath>
+                </a14:m>
                 <a:r>
-                  <a:rPr lang="ko-KR" altLang="en-US" sz="919" dirty="0">
+                  <a:rPr lang="ko-KR" altLang="en-US" sz="325" dirty="0">
                     <a:latin typeface="+mj-ea"/>
                     <a:ea typeface="+mj-ea"/>
                   </a:rPr>
                   <a:t> </a:t>
                 </a:r>
                 <a:r>
-                  <a:rPr lang="en-US" altLang="ko-KR" sz="919" dirty="0">
+                  <a:rPr lang="en-US" altLang="ko-KR" sz="325" dirty="0">
                     <a:latin typeface="+mj-ea"/>
                     <a:ea typeface="+mj-ea"/>
                   </a:rPr>
                   <a:t>= </a:t>
                 </a:r>
-                <ns4:m>
-                  <ns6:oMath>
-                    <ns6:sSub>
-                      <ns6:sSubPr>
-                        <ns6:ctrlPr>
-                          <a:rPr lang="ko-KR" altLang="en-US" sz="919" i="1">
+                <a14:m>
+                  <m:oMath xmlns:m="http://schemas.openxmlformats.org/officeDocument/2006/math">
+                    <m:sSub>
+                      <m:sSubPr>
+                        <m:ctrlPr>
+                          <a:rPr lang="ko-KR" altLang="en-US" sz="325" i="1">
                             <a:latin typeface="Cambria Math" panose="02040503050406030204" pitchFamily="18" charset="0"/>
                             <a:ea typeface="+mj-ea"/>
                           </a:rPr>
-                        </ns6:ctrlPr>
-                      </ns6:sSubPr>
-                      <ns6:e>
-                        <ns6:r>
-                          <a:rPr lang="en-US" altLang="ko-KR" sz="919" b="0" i="1">
+                        </m:ctrlPr>
+                      </m:sSubPr>
+                      <m:e>
+                        <m:r>
+                          <a:rPr lang="en-US" altLang="ko-KR" sz="325" i="1">
                             <a:latin typeface="Cambria Math" panose="02040503050406030204" pitchFamily="18" charset="0"/>
                             <a:ea typeface="+mj-ea"/>
                           </a:rPr>
-                          <ns6:t>𝐿</ns6:t>
-                        </ns6:r>
-                      </ns6:e>
-                      <ns6:sub>
-                        <ns6:r>
-                          <a:rPr lang="en-US" altLang="ko-KR" sz="919" b="0" i="1" smtClean="0">
+                          <m:t>𝐿</m:t>
+                        </m:r>
+                      </m:e>
+                      <m:sub>
+                        <m:r>
+                          <a:rPr lang="en-US" altLang="ko-KR" sz="325" i="1">
                             <a:latin typeface="Cambria Math" panose="02040503050406030204" pitchFamily="18" charset="0"/>
                             <a:ea typeface="+mj-ea"/>
                           </a:rPr>
-                          <ns6:t>𝑎𝑐𝑡𝑖𝑜𝑛</ns6:t>
-                        </ns6:r>
-                      </ns6:sub>
-                    </ns6:sSub>
-                  </ns6:oMath>
-                </ns4:m>
+                          <m:t>𝑎𝑐𝑡𝑖𝑜𝑛</m:t>
+                        </m:r>
+                      </m:sub>
+                    </m:sSub>
+                  </m:oMath>
+                </a14:m>
                 <a:r>
-                  <a:rPr lang="ko-KR" altLang="en-US" sz="919" dirty="0">
+                  <a:rPr lang="ko-KR" altLang="en-US" sz="325" dirty="0">
                     <a:latin typeface="+mj-ea"/>
                     <a:ea typeface="+mj-ea"/>
                   </a:rPr>
                   <a:t> </a:t>
                 </a:r>
                 <a:r>
-                  <a:rPr lang="en-US" altLang="ko-KR" sz="919" dirty="0">
+                  <a:rPr lang="en-US" altLang="ko-KR" sz="325" dirty="0">
                     <a:latin typeface="+mj-ea"/>
                     <a:ea typeface="+mj-ea"/>
                   </a:rPr>
                   <a:t>+ </a:t>
                 </a:r>
-                <ns4:m>
-                  <ns6:oMath>
-                    <ns6:sSub>
-                      <ns6:sSubPr>
-                        <ns6:ctrlPr>
-                          <a:rPr lang="ko-KR" altLang="en-US" sz="919" i="1">
+                <a14:m>
+                  <m:oMath xmlns:m="http://schemas.openxmlformats.org/officeDocument/2006/math">
+                    <m:sSub>
+                      <m:sSubPr>
+                        <m:ctrlPr>
+                          <a:rPr lang="ko-KR" altLang="en-US" sz="325" i="1">
                             <a:latin typeface="Cambria Math" panose="02040503050406030204" pitchFamily="18" charset="0"/>
                             <a:ea typeface="+mj-ea"/>
                           </a:rPr>
-                        </ns6:ctrlPr>
-                      </ns6:sSubPr>
-                      <ns6:e>
-                        <ns6:sSub>
-                          <ns6:sSubPr>
-                            <ns6:ctrlPr>
-                              <a:rPr lang="ko-KR" altLang="en-US" sz="919" i="1">
+                        </m:ctrlPr>
+                      </m:sSubPr>
+                      <m:e>
+                        <m:sSub>
+                          <m:sSubPr>
+                            <m:ctrlPr>
+                              <a:rPr lang="ko-KR" altLang="en-US" sz="325" i="1">
                                 <a:latin typeface="Cambria Math" panose="02040503050406030204" pitchFamily="18" charset="0"/>
                                 <a:ea typeface="+mj-ea"/>
                               </a:rPr>
-                            </ns6:ctrlPr>
-                          </ns6:sSubPr>
-                          <ns6:e>
-                            <ns6:r>
-                              <a:rPr lang="ko-KR" altLang="en-US" sz="919" b="0" i="1" smtClean="0">
+                            </m:ctrlPr>
+                          </m:sSubPr>
+                          <m:e>
+                            <m:r>
+                              <a:rPr lang="ko-KR" altLang="en-US" sz="325" i="1">
                                 <a:latin typeface="Cambria Math" panose="02040503050406030204" pitchFamily="18" charset="0"/>
                                 <a:ea typeface="+mj-ea"/>
                               </a:rPr>
-                              <ns6:t>𝜆</ns6:t>
-                            </ns6:r>
-                          </ns6:e>
-                          <ns6:sub>
-                            <ns6:r>
-                              <a:rPr lang="en-US" altLang="ko-KR" sz="919" b="0" i="1" smtClean="0">
+                              <m:t>𝜆</m:t>
+                            </m:r>
+                          </m:e>
+                          <m:sub>
+                            <m:r>
+                              <a:rPr lang="en-US" altLang="ko-KR" sz="325" i="1">
                                 <a:latin typeface="Cambria Math" panose="02040503050406030204" pitchFamily="18" charset="0"/>
                                 <a:ea typeface="+mj-ea"/>
                               </a:rPr>
-                              <ns6:t>𝑠</ns6:t>
-                            </ns6:r>
-                          </ns6:sub>
-                        </ns6:sSub>
-                        <ns6:r>
-                          <a:rPr lang="en-US" altLang="ko-KR" sz="919" b="0" i="1">
+                              <m:t>𝑠</m:t>
+                            </m:r>
+                          </m:sub>
+                        </m:sSub>
+                        <m:r>
+                          <a:rPr lang="en-US" altLang="ko-KR" sz="325" i="1">
                             <a:latin typeface="Cambria Math" panose="02040503050406030204" pitchFamily="18" charset="0"/>
                             <a:ea typeface="+mj-ea"/>
                           </a:rPr>
-                          <ns6:t>𝐿</ns6:t>
-                        </ns6:r>
-                      </ns6:e>
-                      <ns6:sub>
-                        <ns6:r>
-                          <a:rPr lang="en-US" altLang="ko-KR" sz="919" b="0" i="1" smtClean="0">
+                          <m:t>𝐿</m:t>
+                        </m:r>
+                      </m:e>
+                      <m:sub>
+                        <m:r>
+                          <a:rPr lang="en-US" altLang="ko-KR" sz="325" i="1">
                             <a:latin typeface="Cambria Math" panose="02040503050406030204" pitchFamily="18" charset="0"/>
                             <a:ea typeface="+mj-ea"/>
                           </a:rPr>
-                          <ns6:t>𝑠𝑡𝑎𝑔𝑒</ns6:t>
-                        </ns6:r>
-                      </ns6:sub>
-                    </ns6:sSub>
-                  </ns6:oMath>
-                </ns4:m>
+                          <m:t>𝑠𝑡𝑎𝑔𝑒</m:t>
+                        </m:r>
+                      </m:sub>
+                    </m:sSub>
+                  </m:oMath>
+                </a14:m>
                 <a:r>
-                  <a:rPr lang="ko-KR" altLang="en-US" sz="919" dirty="0">
+                  <a:rPr lang="ko-KR" altLang="en-US" sz="325" dirty="0">
                     <a:latin typeface="+mj-ea"/>
                     <a:ea typeface="+mj-ea"/>
                   </a:rPr>
                   <a:t> </a:t>
                 </a:r>
                 <a:r>
-                  <a:rPr lang="en-US" altLang="ko-KR" sz="919" dirty="0">
+                  <a:rPr lang="en-US" altLang="ko-KR" sz="325" dirty="0">
                     <a:latin typeface="+mj-ea"/>
                     <a:ea typeface="+mj-ea"/>
                   </a:rPr>
                   <a:t>+</a:t>
                 </a:r>
-                <ns4:m>
-                  <ns6:oMath>
-                    <ns6:sSub>
-                      <ns6:sSubPr>
-                        <ns6:ctrlPr>
-                          <a:rPr lang="ko-KR" altLang="en-US" sz="919" i="1">
+                <a14:m>
+                  <m:oMath xmlns:m="http://schemas.openxmlformats.org/officeDocument/2006/math">
+                    <m:sSub>
+                      <m:sSubPr>
+                        <m:ctrlPr>
+                          <a:rPr lang="ko-KR" altLang="en-US" sz="325" i="1">
                             <a:latin typeface="Cambria Math" panose="02040503050406030204" pitchFamily="18" charset="0"/>
                             <a:ea typeface="+mj-ea"/>
                           </a:rPr>
-                        </ns6:ctrlPr>
-                      </ns6:sSubPr>
-                      <ns6:e>
-                        <ns6:r>
-                          <a:rPr lang="ko-KR" altLang="en-US" sz="919" b="0" i="1">
+                        </m:ctrlPr>
+                      </m:sSubPr>
+                      <m:e>
+                        <m:r>
+                          <a:rPr lang="ko-KR" altLang="en-US" sz="325" i="1">
                             <a:latin typeface="Cambria Math" panose="02040503050406030204" pitchFamily="18" charset="0"/>
                             <a:ea typeface="+mj-ea"/>
                           </a:rPr>
-                          <ns6:t>𝜆</ns6:t>
-                        </ns6:r>
-                      </ns6:e>
-                      <ns6:sub>
-                        <ns6:r>
-                          <a:rPr lang="en-US" altLang="ko-KR" sz="919" b="0" i="1" smtClean="0">
+                          <m:t>𝜆</m:t>
+                        </m:r>
+                      </m:e>
+                      <m:sub>
+                        <m:r>
+                          <a:rPr lang="en-US" altLang="ko-KR" sz="325" i="1">
                             <a:latin typeface="Cambria Math" panose="02040503050406030204" pitchFamily="18" charset="0"/>
                             <a:ea typeface="+mj-ea"/>
                           </a:rPr>
-                          <ns6:t>𝑓</ns6:t>
-                        </ns6:r>
-                      </ns6:sub>
-                    </ns6:sSub>
-                    <ns6:sSub>
-                      <ns6:sSubPr>
-                        <ns6:ctrlPr>
-                          <a:rPr lang="ko-KR" altLang="en-US" sz="919" i="1">
+                          <m:t>𝑓</m:t>
+                        </m:r>
+                      </m:sub>
+                    </m:sSub>
+                    <m:sSub>
+                      <m:sSubPr>
+                        <m:ctrlPr>
+                          <a:rPr lang="ko-KR" altLang="en-US" sz="325" i="1">
                             <a:latin typeface="Cambria Math" panose="02040503050406030204" pitchFamily="18" charset="0"/>
                             <a:ea typeface="+mj-ea"/>
                           </a:rPr>
-                        </ns6:ctrlPr>
-                      </ns6:sSubPr>
-                      <ns6:e>
-                        <ns6:r>
-                          <a:rPr lang="en-US" altLang="ko-KR" sz="919" b="0" i="1">
+                        </m:ctrlPr>
+                      </m:sSubPr>
+                      <m:e>
+                        <m:r>
+                          <a:rPr lang="en-US" altLang="ko-KR" sz="325" i="1">
                             <a:latin typeface="Cambria Math" panose="02040503050406030204" pitchFamily="18" charset="0"/>
                             <a:ea typeface="+mj-ea"/>
                           </a:rPr>
-                          <ns6:t>𝐿</ns6:t>
-                        </ns6:r>
-                      </ns6:e>
-                      <ns6:sub>
-                        <ns6:r>
-                          <a:rPr lang="en-US" altLang="ko-KR" sz="919" b="0" i="1" smtClean="0">
+                          <m:t>𝐿</m:t>
+                        </m:r>
+                      </m:e>
+                      <m:sub>
+                        <m:r>
+                          <a:rPr lang="en-US" altLang="ko-KR" sz="325" i="1">
                             <a:latin typeface="Cambria Math" panose="02040503050406030204" pitchFamily="18" charset="0"/>
                             <a:ea typeface="+mj-ea"/>
                           </a:rPr>
-                          <ns6:t>𝐹𝐴𝑆𝑇</ns6:t>
-                        </ns6:r>
-                      </ns6:sub>
-                    </ns6:sSub>
-                  </ns6:oMath>
-                </ns4:m>
-                <a:endParaRPr lang="ko-KR" altLang="en-US" sz="919" dirty="0">
+                          <m:t>𝐹𝐴𝑆𝑇</m:t>
+                        </m:r>
+                      </m:sub>
+                    </m:sSub>
+                  </m:oMath>
+                </a14:m>
+                <a:endParaRPr lang="ko-KR" altLang="en-US" sz="325" dirty="0">
                   <a:latin typeface="+mj-ea"/>
                   <a:ea typeface="+mj-ea"/>
                 </a:endParaRPr>
               </a:p>
             </p:txBody>
           </p:sp>
-        </ns5:Choice>
-        <ns5:Fallback>
+        </mc:Choice>
+        <mc:Fallback>
           <p:sp>
             <p:nvSpPr>
               <p:cNvPr id="77" name="TextBox 76">
                 <a:extLst>
                   <a:ext uri="{FF2B5EF4-FFF2-40B4-BE49-F238E27FC236}">
-                    <ns2:creationId id="{75D4B410-2449-16E0-3BAA-69809814850A}"/>
+                    <a16:creationId xmlns:a16="http://schemas.microsoft.com/office/drawing/2014/main" id="{75D4B410-2449-16E0-3BAA-69809814850A}"/>
                   </a:ext>
                 </a:extLst>
               </p:cNvPr>
@@ -6921,16 +6926,16 @@
             </p:nvSpPr>
             <p:spPr>
               <a:xfrm>
-                <a:off x="4631293" y="5341081"/>
-                <a:ext cx="1906485" cy="437756"/>
+                <a:off x="4084565" y="5342164"/>
+                <a:ext cx="665118" cy="154145"/>
               </a:xfrm>
               <a:prstGeom prst="rect">
                 <a:avLst/>
               </a:prstGeom>
               <a:blipFill>
-                <a:blip ns3:embed="rId7"/>
+                <a:blip r:embed="rId7"/>
                 <a:stretch>
-                  <a:fillRect t="-7317" b="-11220"/>
+                  <a:fillRect l="-1802" r="-1802" b="-10714"/>
                 </a:stretch>
               </a:blipFill>
               <a:ln>
@@ -6952,14 +6957,14 @@
               </a:p>
             </p:txBody>
           </p:sp>
-        </ns5:Fallback>
-      </ns5:AlternateContent>
+        </mc:Fallback>
+      </mc:AlternateContent>
       <p:graphicFrame>
         <p:nvGraphicFramePr>
           <p:cNvPr id="79" name="표 78">
             <a:extLst>
               <a:ext uri="{FF2B5EF4-FFF2-40B4-BE49-F238E27FC236}">
-                <ns2:creationId id="{48999F9D-D38D-4137-315A-515D9D102609}"/>
+                <a16:creationId xmlns:a16="http://schemas.microsoft.com/office/drawing/2014/main" id="{48999F9D-D38D-4137-315A-515D9D102609}"/>
               </a:ext>
             </a:extLst>
           </p:cNvPr>
@@ -6969,14 +6974,14 @@
           <p:nvPr>
             <p:extLst>
               <p:ext uri="{D42A27DB-BD31-4B8C-83A1-F6EECF244321}">
-                <ns7:modId val="3069877192"/>
+                <p14:modId xmlns:p14="http://schemas.microsoft.com/office/powerpoint/2010/main" val="3069877192"/>
               </p:ext>
             </p:extLst>
           </p:nvPr>
         </p:nvGraphicFramePr>
         <p:xfrm>
-          <a:off x="621122" y="8304635"/>
-          <a:ext cx="2718880" cy="1282315"/>
+          <a:off x="2664319" y="6388728"/>
+          <a:ext cx="960159" cy="452843"/>
         </p:xfrm>
         <a:graphic>
           <a:graphicData uri="http://schemas.openxmlformats.org/drawingml/2006/table">
@@ -6985,39 +6990,39 @@
                 <a:tableStyleId>{3B4B98B0-60AC-42C2-AFA5-B58CD77FA1E5}</a:tableStyleId>
               </a:tblPr>
               <a:tblGrid>
-                <a:gridCol w="1911858">
+                <a:gridCol w="238694">
                   <a:extLst>
                     <a:ext uri="{9D8B030D-6E8A-4147-A177-3AD203B41FA5}">
-                      <ns2:colId val="75515524"/>
+                      <a16:colId xmlns:a16="http://schemas.microsoft.com/office/drawing/2014/main" val="75515524"/>
                     </a:ext>
                   </a:extLst>
                 </a:gridCol>
-                <a:gridCol w="2971101">
+                <a:gridCol w="370940">
                   <a:extLst>
                     <a:ext uri="{9D8B030D-6E8A-4147-A177-3AD203B41FA5}">
-                      <ns2:colId val="3559314400"/>
+                      <a16:colId xmlns:a16="http://schemas.microsoft.com/office/drawing/2014/main" val="3559314400"/>
                     </a:ext>
                   </a:extLst>
                 </a:gridCol>
-                <a:gridCol w="2807589">
+                <a:gridCol w="350525">
                   <a:extLst>
                     <a:ext uri="{9D8B030D-6E8A-4147-A177-3AD203B41FA5}">
-                      <ns2:colId val="1007297346"/>
+                      <a16:colId xmlns:a16="http://schemas.microsoft.com/office/drawing/2014/main" val="1007297346"/>
                     </a:ext>
                   </a:extLst>
                 </a:gridCol>
               </a:tblGrid>
-              <a:tr h="370840">
+              <a:tr h="65237">
                 <a:tc>
                   <a:txBody>
                     <a:bodyPr/>
                     <a:lstStyle/>
                     <a:p>
                       <a:pPr latinLnBrk="1"/>
-                      <a:endParaRPr lang="ko-KR" altLang="en-US" sz="990" dirty="0"/>
+                      <a:endParaRPr lang="ko-KR" altLang="en-US" sz="400" dirty="0"/>
                     </a:p>
                   </a:txBody>
-                  <a:tcPr/>
+                  <a:tcPr marL="11416" marR="11416" marT="5708" marB="5708"/>
                 </a:tc>
                 <a:tc>
                   <a:txBody>
@@ -7026,21 +7031,21 @@
                     <a:p>
                       <a:pPr algn="ctr" latinLnBrk="1"/>
                       <a:r>
-                        <a:rPr lang="en-US" altLang="ko-KR" sz="990" dirty="0"/>
+                        <a:rPr lang="en-US" altLang="ko-KR" sz="400" dirty="0"/>
                         <a:t>1</a:t>
                       </a:r>
                       <a:r>
-                        <a:rPr lang="en-US" altLang="ko-KR" sz="990" baseline="30000" dirty="0"/>
+                        <a:rPr lang="en-US" altLang="ko-KR" sz="400" baseline="30000" dirty="0"/>
                         <a:t>st</a:t>
                       </a:r>
                       <a:r>
-                        <a:rPr lang="en-US" altLang="ko-KR" sz="990" dirty="0"/>
+                        <a:rPr lang="en-US" altLang="ko-KR" sz="400" dirty="0"/>
                         <a:t> </a:t>
                       </a:r>
-                      <a:endParaRPr lang="ko-KR" altLang="en-US" sz="990" dirty="0"/>
+                      <a:endParaRPr lang="ko-KR" altLang="en-US" sz="400" dirty="0"/>
                     </a:p>
                   </a:txBody>
-                  <a:tcPr/>
+                  <a:tcPr marL="11416" marR="11416" marT="5708" marB="5708"/>
                 </a:tc>
                 <a:tc>
                   <a:txBody>
@@ -7049,20 +7054,20 @@
                     <a:p>
                       <a:pPr algn="ctr" latinLnBrk="1"/>
                       <a:r>
-                        <a:rPr lang="ko-KR" altLang="en-US" sz="990" dirty="0"/>
+                        <a:rPr lang="ko-KR" altLang="en-US" sz="400" dirty="0"/>
                         <a:t>경량화 모델</a:t>
                       </a:r>
                     </a:p>
                   </a:txBody>
-                  <a:tcPr/>
+                  <a:tcPr marL="11416" marR="11416" marT="5708" marB="5708"/>
                 </a:tc>
                 <a:extLst>
                   <a:ext uri="{0D108BD9-81ED-4DB2-BD59-A6C34878D82A}">
-                    <ns2:rowId val="2583884862"/>
+                    <a16:rowId xmlns:a16="http://schemas.microsoft.com/office/drawing/2014/main" val="2583884862"/>
                   </a:ext>
                 </a:extLst>
               </a:tr>
-              <a:tr h="370840">
+              <a:tr h="102746">
                 <a:tc>
                   <a:txBody>
                     <a:bodyPr/>
@@ -7070,13 +7075,13 @@
                     <a:p>
                       <a:pPr latinLnBrk="1"/>
                       <a:r>
-                        <a:rPr lang="en-US" altLang="ko-KR" sz="848" dirty="0"/>
+                        <a:rPr lang="en-US" altLang="ko-KR" sz="300" dirty="0"/>
                         <a:t>GPU</a:t>
                       </a:r>
-                      <a:endParaRPr lang="ko-KR" altLang="en-US" sz="848" dirty="0"/>
+                      <a:endParaRPr lang="ko-KR" altLang="en-US" sz="300" dirty="0"/>
                     </a:p>
                   </a:txBody>
-                  <a:tcPr/>
+                  <a:tcPr marL="11416" marR="11416" marT="5708" marB="5708"/>
                 </a:tc>
                 <a:tc>
                   <a:txBody>
@@ -7085,28 +7090,28 @@
                     <a:p>
                       <a:pPr algn="ctr" latinLnBrk="1"/>
                       <a:r>
-                        <a:rPr lang="en-US" altLang="ko-KR" sz="848" dirty="0"/>
+                        <a:rPr lang="en-US" altLang="ko-KR" sz="300" dirty="0"/>
                         <a:t>H200 x 8</a:t>
                       </a:r>
                     </a:p>
                     <a:p>
                       <a:pPr algn="ctr" latinLnBrk="1"/>
                       <a:r>
-                        <a:rPr lang="en-US" altLang="ko-KR" sz="848" dirty="0"/>
+                        <a:rPr lang="en-US" altLang="ko-KR" sz="300" dirty="0"/>
                         <a:t>RTX 4090 x</a:t>
                       </a:r>
                       <a:r>
-                        <a:rPr lang="ko-KR" altLang="en-US" sz="848" dirty="0"/>
+                        <a:rPr lang="ko-KR" altLang="en-US" sz="300" dirty="0"/>
                         <a:t> </a:t>
                       </a:r>
                       <a:r>
-                        <a:rPr lang="en-US" altLang="ko-KR" sz="848" dirty="0"/>
+                        <a:rPr lang="en-US" altLang="ko-KR" sz="300" dirty="0"/>
                         <a:t>20</a:t>
                       </a:r>
-                      <a:endParaRPr lang="ko-KR" altLang="en-US" sz="848" dirty="0"/>
+                      <a:endParaRPr lang="ko-KR" altLang="en-US" sz="300" dirty="0"/>
                     </a:p>
                   </a:txBody>
-                  <a:tcPr/>
+                  <a:tcPr marL="11416" marR="11416" marT="5708" marB="5708"/>
                 </a:tc>
                 <a:tc>
                   <a:txBody>
@@ -7115,28 +7120,28 @@
                     <a:p>
                       <a:pPr algn="ctr" latinLnBrk="1"/>
                       <a:r>
-                        <a:rPr lang="en-US" altLang="ko-KR" sz="848" dirty="0"/>
+                        <a:rPr lang="en-US" altLang="ko-KR" sz="300" dirty="0"/>
                         <a:t>A100 x 1</a:t>
                       </a:r>
                     </a:p>
                     <a:p>
                       <a:pPr algn="ctr" latinLnBrk="1"/>
                       <a:r>
-                        <a:rPr lang="en-US" altLang="ko-KR" sz="848" dirty="0"/>
+                        <a:rPr lang="en-US" altLang="ko-KR" sz="300" dirty="0"/>
                         <a:t>RTX 5070 x 2</a:t>
                       </a:r>
-                      <a:endParaRPr lang="ko-KR" altLang="en-US" sz="848" dirty="0"/>
+                      <a:endParaRPr lang="ko-KR" altLang="en-US" sz="300" dirty="0"/>
                     </a:p>
                   </a:txBody>
-                  <a:tcPr/>
+                  <a:tcPr marL="11416" marR="11416" marT="5708" marB="5708"/>
                 </a:tc>
                 <a:extLst>
                   <a:ext uri="{0D108BD9-81ED-4DB2-BD59-A6C34878D82A}">
-                    <ns2:rowId val="955945739"/>
+                    <a16:rowId xmlns:a16="http://schemas.microsoft.com/office/drawing/2014/main" val="955945739"/>
                   </a:ext>
                 </a:extLst>
               </a:tr>
-              <a:tr h="370840">
+              <a:tr h="57081">
                 <a:tc>
                   <a:txBody>
                     <a:bodyPr/>
@@ -7144,13 +7149,13 @@
                     <a:p>
                       <a:pPr latinLnBrk="1"/>
                       <a:r>
-                        <a:rPr lang="en-US" altLang="ko-KR" sz="848" dirty="0"/>
+                        <a:rPr lang="en-US" altLang="ko-KR" sz="300" dirty="0"/>
                         <a:t>Task</a:t>
                       </a:r>
-                      <a:endParaRPr lang="ko-KR" altLang="en-US" sz="848" dirty="0"/>
+                      <a:endParaRPr lang="ko-KR" altLang="en-US" sz="300" dirty="0"/>
                     </a:p>
                   </a:txBody>
-                  <a:tcPr/>
+                  <a:tcPr marL="11416" marR="11416" marT="5708" marB="5708"/>
                 </a:tc>
                 <a:tc>
                   <a:txBody>
@@ -7159,13 +7164,13 @@
                     <a:p>
                       <a:pPr algn="ctr" latinLnBrk="1"/>
                       <a:r>
-                        <a:rPr lang="en-US" altLang="ko-KR" sz="848" dirty="0"/>
+                        <a:rPr lang="en-US" altLang="ko-KR" sz="300" dirty="0"/>
                         <a:t>50</a:t>
                       </a:r>
-                      <a:endParaRPr lang="ko-KR" altLang="en-US" sz="848" dirty="0"/>
+                      <a:endParaRPr lang="ko-KR" altLang="en-US" sz="300" dirty="0"/>
                     </a:p>
                   </a:txBody>
-                  <a:tcPr/>
+                  <a:tcPr marL="11416" marR="11416" marT="5708" marB="5708"/>
                 </a:tc>
                 <a:tc>
                   <a:txBody>
@@ -7174,21 +7179,21 @@
                     <a:p>
                       <a:pPr algn="ctr" latinLnBrk="1"/>
                       <a:r>
-                        <a:rPr lang="en-US" altLang="ko-KR" sz="848" dirty="0"/>
+                        <a:rPr lang="en-US" altLang="ko-KR" sz="300" dirty="0"/>
                         <a:t>12</a:t>
                       </a:r>
-                      <a:endParaRPr lang="ko-KR" altLang="en-US" sz="848" dirty="0"/>
+                      <a:endParaRPr lang="ko-KR" altLang="en-US" sz="300" dirty="0"/>
                     </a:p>
                   </a:txBody>
-                  <a:tcPr/>
+                  <a:tcPr marL="11416" marR="11416" marT="5708" marB="5708"/>
                 </a:tc>
                 <a:extLst>
                   <a:ext uri="{0D108BD9-81ED-4DB2-BD59-A6C34878D82A}">
-                    <ns2:rowId val="714784605"/>
+                    <a16:rowId xmlns:a16="http://schemas.microsoft.com/office/drawing/2014/main" val="714784605"/>
                   </a:ext>
                 </a:extLst>
               </a:tr>
-              <a:tr h="370840">
+              <a:tr h="57081">
                 <a:tc>
                   <a:txBody>
                     <a:bodyPr/>
@@ -7196,13 +7201,13 @@
                     <a:p>
                       <a:pPr latinLnBrk="1"/>
                       <a:r>
-                        <a:rPr lang="en-US" altLang="ko-KR" sz="848" dirty="0"/>
+                        <a:rPr lang="en-US" altLang="ko-KR" sz="300" dirty="0"/>
                         <a:t>Batch size</a:t>
                       </a:r>
-                      <a:endParaRPr lang="ko-KR" altLang="en-US" sz="848" dirty="0"/>
+                      <a:endParaRPr lang="ko-KR" altLang="en-US" sz="300" dirty="0"/>
                     </a:p>
                   </a:txBody>
-                  <a:tcPr/>
+                  <a:tcPr marL="11416" marR="11416" marT="5708" marB="5708"/>
                 </a:tc>
                 <a:tc>
                   <a:txBody>
@@ -7211,13 +7216,13 @@
                     <a:p>
                       <a:pPr algn="ctr" latinLnBrk="1"/>
                       <a:r>
-                        <a:rPr lang="en-US" altLang="ko-KR" sz="848" dirty="0"/>
+                        <a:rPr lang="en-US" altLang="ko-KR" sz="300" dirty="0"/>
                         <a:t>2048</a:t>
                       </a:r>
-                      <a:endParaRPr lang="ko-KR" altLang="en-US" sz="848" dirty="0"/>
+                      <a:endParaRPr lang="ko-KR" altLang="en-US" sz="300" dirty="0"/>
                     </a:p>
                   </a:txBody>
-                  <a:tcPr/>
+                  <a:tcPr marL="11416" marR="11416" marT="5708" marB="5708"/>
                 </a:tc>
                 <a:tc>
                   <a:txBody>
@@ -7226,21 +7231,21 @@
                     <a:p>
                       <a:pPr algn="ctr" latinLnBrk="1"/>
                       <a:r>
-                        <a:rPr lang="en-US" altLang="ko-KR" sz="848" dirty="0"/>
+                        <a:rPr lang="en-US" altLang="ko-KR" sz="300" dirty="0"/>
                         <a:t>16</a:t>
                       </a:r>
-                      <a:endParaRPr lang="ko-KR" altLang="en-US" sz="848" dirty="0"/>
+                      <a:endParaRPr lang="ko-KR" altLang="en-US" sz="300" dirty="0"/>
                     </a:p>
                   </a:txBody>
-                  <a:tcPr/>
+                  <a:tcPr marL="11416" marR="11416" marT="5708" marB="5708"/>
                 </a:tc>
                 <a:extLst>
                   <a:ext uri="{0D108BD9-81ED-4DB2-BD59-A6C34878D82A}">
-                    <ns2:rowId val="4209851271"/>
+                    <a16:rowId xmlns:a16="http://schemas.microsoft.com/office/drawing/2014/main" val="4209851271"/>
                   </a:ext>
                 </a:extLst>
               </a:tr>
-              <a:tr h="370840">
+              <a:tr h="57081">
                 <a:tc>
                   <a:txBody>
                     <a:bodyPr/>
@@ -7248,13 +7253,13 @@
                     <a:p>
                       <a:pPr latinLnBrk="1"/>
                       <a:r>
-                        <a:rPr lang="en-US" altLang="ko-KR" sz="848" dirty="0"/>
+                        <a:rPr lang="en-US" altLang="ko-KR" sz="300" dirty="0"/>
                         <a:t>Step</a:t>
                       </a:r>
-                      <a:endParaRPr lang="ko-KR" altLang="en-US" sz="848" dirty="0"/>
+                      <a:endParaRPr lang="ko-KR" altLang="en-US" sz="300" dirty="0"/>
                     </a:p>
                   </a:txBody>
-                  <a:tcPr/>
+                  <a:tcPr marL="11416" marR="11416" marT="5708" marB="5708"/>
                 </a:tc>
                 <a:tc>
                   <a:txBody>
@@ -7263,13 +7268,13 @@
                     <a:p>
                       <a:pPr algn="ctr" latinLnBrk="1"/>
                       <a:r>
-                        <a:rPr lang="en-US" altLang="ko-KR" sz="848" dirty="0"/>
+                        <a:rPr lang="en-US" altLang="ko-KR" sz="300" dirty="0"/>
                         <a:t>200,000</a:t>
                       </a:r>
-                      <a:endParaRPr lang="ko-KR" altLang="en-US" sz="848" dirty="0"/>
+                      <a:endParaRPr lang="ko-KR" altLang="en-US" sz="300" dirty="0"/>
                     </a:p>
                   </a:txBody>
-                  <a:tcPr/>
+                  <a:tcPr marL="11416" marR="11416" marT="5708" marB="5708"/>
                 </a:tc>
                 <a:tc>
                   <a:txBody>
@@ -7278,21 +7283,21 @@
                     <a:p>
                       <a:pPr algn="ctr" latinLnBrk="1"/>
                       <a:r>
-                        <a:rPr lang="en-US" altLang="ko-KR" sz="848" dirty="0"/>
+                        <a:rPr lang="en-US" altLang="ko-KR" sz="300" dirty="0"/>
                         <a:t>70,000</a:t>
                       </a:r>
-                      <a:endParaRPr lang="ko-KR" altLang="en-US" sz="848" dirty="0"/>
+                      <a:endParaRPr lang="ko-KR" altLang="en-US" sz="300" dirty="0"/>
                     </a:p>
                   </a:txBody>
-                  <a:tcPr/>
+                  <a:tcPr marL="11416" marR="11416" marT="5708" marB="5708"/>
                 </a:tc>
                 <a:extLst>
                   <a:ext uri="{0D108BD9-81ED-4DB2-BD59-A6C34878D82A}">
-                    <ns2:rowId val="2231449676"/>
+                    <a16:rowId xmlns:a16="http://schemas.microsoft.com/office/drawing/2014/main" val="2231449676"/>
                   </a:ext>
                 </a:extLst>
               </a:tr>
-              <a:tr h="370840">
+              <a:tr h="57081">
                 <a:tc>
                   <a:txBody>
                     <a:bodyPr/>
@@ -7300,13 +7305,13 @@
                     <a:p>
                       <a:pPr latinLnBrk="1"/>
                       <a:r>
-                        <a:rPr lang="en-US" altLang="ko-KR" sz="848" dirty="0"/>
+                        <a:rPr lang="en-US" altLang="ko-KR" sz="300" dirty="0"/>
                         <a:t>Flow sample</a:t>
                       </a:r>
-                      <a:endParaRPr lang="ko-KR" altLang="en-US" sz="848" dirty="0"/>
+                      <a:endParaRPr lang="ko-KR" altLang="en-US" sz="300" dirty="0"/>
                     </a:p>
                   </a:txBody>
-                  <a:tcPr/>
+                  <a:tcPr marL="11416" marR="11416" marT="5708" marB="5708"/>
                 </a:tc>
                 <a:tc>
                   <a:txBody>
@@ -7315,13 +7320,13 @@
                     <a:p>
                       <a:pPr algn="ctr" latinLnBrk="1"/>
                       <a:r>
-                        <a:rPr lang="en-US" altLang="ko-KR" sz="848" dirty="0"/>
+                        <a:rPr lang="en-US" altLang="ko-KR" sz="300" dirty="0"/>
                         <a:t>15</a:t>
                       </a:r>
-                      <a:endParaRPr lang="ko-KR" altLang="en-US" sz="848" dirty="0"/>
+                      <a:endParaRPr lang="ko-KR" altLang="en-US" sz="300" dirty="0"/>
                     </a:p>
                   </a:txBody>
-                  <a:tcPr/>
+                  <a:tcPr marL="11416" marR="11416" marT="5708" marB="5708"/>
                 </a:tc>
                 <a:tc>
                   <a:txBody>
@@ -7330,21 +7335,21 @@
                     <a:p>
                       <a:pPr algn="ctr" latinLnBrk="1"/>
                       <a:r>
-                        <a:rPr lang="en-US" altLang="ko-KR" sz="848" dirty="0"/>
+                        <a:rPr lang="en-US" altLang="ko-KR" sz="300" dirty="0"/>
                         <a:t>1</a:t>
                       </a:r>
-                      <a:endParaRPr lang="ko-KR" altLang="en-US" sz="848" dirty="0"/>
+                      <a:endParaRPr lang="ko-KR" altLang="en-US" sz="300" dirty="0"/>
                     </a:p>
                   </a:txBody>
-                  <a:tcPr/>
+                  <a:tcPr marL="11416" marR="11416" marT="5708" marB="5708"/>
                 </a:tc>
                 <a:extLst>
                   <a:ext uri="{0D108BD9-81ED-4DB2-BD59-A6C34878D82A}">
-                    <ns2:rowId val="2162482212"/>
+                    <a16:rowId xmlns:a16="http://schemas.microsoft.com/office/drawing/2014/main" val="2162482212"/>
                   </a:ext>
                 </a:extLst>
               </a:tr>
-              <a:tr h="370840">
+              <a:tr h="57081">
                 <a:tc>
                   <a:txBody>
                     <a:bodyPr/>
@@ -7352,13 +7357,13 @@
                     <a:p>
                       <a:pPr latinLnBrk="1"/>
                       <a:r>
-                        <a:rPr lang="en-US" altLang="ko-KR" sz="848" dirty="0"/>
+                        <a:rPr lang="en-US" altLang="ko-KR" sz="300" dirty="0"/>
                         <a:t>evaluation</a:t>
                       </a:r>
-                      <a:endParaRPr lang="ko-KR" altLang="en-US" sz="848" dirty="0"/>
+                      <a:endParaRPr lang="ko-KR" altLang="en-US" sz="300" dirty="0"/>
                     </a:p>
                   </a:txBody>
-                  <a:tcPr/>
+                  <a:tcPr marL="11416" marR="11416" marT="5708" marB="5708"/>
                 </a:tc>
                 <a:tc>
                   <a:txBody>
@@ -7367,13 +7372,13 @@
                     <a:p>
                       <a:pPr algn="ctr" latinLnBrk="1"/>
                       <a:r>
-                        <a:rPr lang="en-US" altLang="ko-KR" sz="848" dirty="0"/>
+                        <a:rPr lang="en-US" altLang="ko-KR" sz="300" dirty="0"/>
                         <a:t>50 task x 10 instance</a:t>
                       </a:r>
-                      <a:endParaRPr lang="ko-KR" altLang="en-US" sz="848" dirty="0"/>
+                      <a:endParaRPr lang="ko-KR" altLang="en-US" sz="300" dirty="0"/>
                     </a:p>
                   </a:txBody>
-                  <a:tcPr/>
+                  <a:tcPr marL="11416" marR="11416" marT="5708" marB="5708"/>
                 </a:tc>
                 <a:tc>
                   <a:txBody>
@@ -7382,17 +7387,17 @@
                     <a:p>
                       <a:pPr algn="ctr" latinLnBrk="1"/>
                       <a:r>
-                        <a:rPr lang="en-US" altLang="ko-KR" sz="848" dirty="0"/>
+                        <a:rPr lang="en-US" altLang="ko-KR" sz="300" dirty="0"/>
                         <a:t>12 task x 1 instance</a:t>
                       </a:r>
-                      <a:endParaRPr lang="ko-KR" altLang="en-US" sz="848" dirty="0"/>
+                      <a:endParaRPr lang="ko-KR" altLang="en-US" sz="300" dirty="0"/>
                     </a:p>
                   </a:txBody>
-                  <a:tcPr/>
+                  <a:tcPr marL="11416" marR="11416" marT="5708" marB="5708"/>
                 </a:tc>
                 <a:extLst>
                   <a:ext uri="{0D108BD9-81ED-4DB2-BD59-A6C34878D82A}">
-                    <ns2:rowId val="1255022273"/>
+                    <a16:rowId xmlns:a16="http://schemas.microsoft.com/office/drawing/2014/main" val="1255022273"/>
                   </a:ext>
                 </a:extLst>
               </a:tr>
@@ -7405,7 +7410,7 @@
           <p:cNvPr id="88" name="TextBox 87">
             <a:extLst>
               <a:ext uri="{FF2B5EF4-FFF2-40B4-BE49-F238E27FC236}">
-                <ns2:creationId id="{8BC2F8D5-B6FF-D3FA-99B9-5DE02FA7AD64}"/>
+                <a16:creationId xmlns:a16="http://schemas.microsoft.com/office/drawing/2014/main" id="{8BC2F8D5-B6FF-D3FA-99B9-5DE02FA7AD64}"/>
               </a:ext>
             </a:extLst>
           </p:cNvPr>
@@ -7414,14 +7419,14 @@
         </p:nvSpPr>
         <p:spPr>
           <a:xfrm>
-            <a:off x="3782274" y="7720034"/>
-            <a:ext cx="3595206" cy="1921818"/>
+            <a:off x="3780664" y="6182279"/>
+            <a:ext cx="1269629" cy="850105"/>
           </a:xfrm>
           <a:prstGeom prst="rect">
             <a:avLst/>
           </a:prstGeom>
           <a:noFill/>
-          <a:ln w="20205">
+          <a:ln w="57150">
             <a:solidFill>
               <a:schemeClr val="accent4">
                 <a:lumMod val="50000"/>
@@ -7436,58 +7441,58 @@
           <a:lstStyle/>
           <a:p>
             <a:pPr algn="ctr"/>
-            <a:endParaRPr lang="en-US" altLang="ko-KR" sz="1909" b="1" dirty="0">
+            <a:endParaRPr lang="en-US" altLang="ko-KR" sz="674" b="1" dirty="0">
               <a:latin typeface="+mn-ea"/>
             </a:endParaRPr>
           </a:p>
           <a:p>
             <a:r>
-              <a:rPr lang="en-US" altLang="ko-KR" sz="848" b="1" dirty="0"/>
+              <a:rPr lang="en-US" altLang="ko-KR" sz="300" b="1" dirty="0"/>
               <a:t>1. </a:t>
             </a:r>
             <a:r>
-              <a:rPr lang="ko-KR" altLang="en-US" sz="848" b="1" dirty="0"/>
+              <a:rPr lang="ko-KR" altLang="en-US" sz="300" b="1" dirty="0"/>
               <a:t>학습 관련</a:t>
             </a:r>
-            <a:endParaRPr lang="en-US" altLang="ko-KR" sz="848" b="1" dirty="0"/>
-          </a:p>
-          <a:p>
-            <a:r>
-              <a:rPr lang="ko-KR" altLang="ko-KR" sz="848" dirty="0"/>
+            <a:endParaRPr lang="en-US" altLang="ko-KR" sz="300" b="1" dirty="0"/>
+          </a:p>
+          <a:p>
+            <a:r>
+              <a:rPr lang="ko-KR" altLang="ko-KR" sz="300" dirty="0"/>
               <a:t>학습 </a:t>
             </a:r>
             <a:r>
-              <a:rPr lang="ko-KR" altLang="ko-KR" sz="848" dirty="0" err="1"/>
+              <a:rPr lang="ko-KR" altLang="ko-KR" sz="300" dirty="0" err="1"/>
               <a:t>step</a:t>
             </a:r>
             <a:r>
-              <a:rPr lang="ko-KR" altLang="ko-KR" sz="848" dirty="0"/>
+              <a:rPr lang="ko-KR" altLang="ko-KR" sz="300" dirty="0"/>
               <a:t> 증가를 통한 장기 수렴 성능 분석</a:t>
             </a:r>
-            <a:endParaRPr lang="en-US" altLang="ko-KR" sz="848" dirty="0"/>
-          </a:p>
-          <a:p>
-            <a:r>
-              <a:rPr lang="ko-KR" altLang="ko-KR" sz="848" dirty="0">
+            <a:endParaRPr lang="en-US" altLang="ko-KR" sz="300" dirty="0"/>
+          </a:p>
+          <a:p>
+            <a:r>
+              <a:rPr lang="ko-KR" altLang="ko-KR" sz="300" dirty="0">
                 <a:latin typeface="Arial" panose="020B0604020202020204" pitchFamily="34" charset="0"/>
               </a:rPr>
               <a:t>다양한 </a:t>
             </a:r>
             <a:r>
-              <a:rPr lang="ko-KR" altLang="ko-KR" sz="848" dirty="0" err="1">
+              <a:rPr lang="ko-KR" altLang="ko-KR" sz="300" dirty="0" err="1">
                 <a:latin typeface="Arial" panose="020B0604020202020204" pitchFamily="34" charset="0"/>
               </a:rPr>
               <a:t>seed</a:t>
             </a:r>
             <a:r>
-              <a:rPr lang="ko-KR" altLang="ko-KR" sz="848" dirty="0">
+              <a:rPr lang="ko-KR" altLang="ko-KR" sz="300" dirty="0">
                 <a:latin typeface="Arial" panose="020B0604020202020204" pitchFamily="34" charset="0"/>
               </a:rPr>
               <a:t> 기반 반복 실험을 통한 모델 재현성 검증 </a:t>
             </a:r>
           </a:p>
           <a:p>
-            <a:pPr lvl="0" defTabSz="914400" eaLnBrk="0" fontAlgn="base" hangingPunct="0">
+            <a:pPr defTabSz="114168" eaLnBrk="0" fontAlgn="base" hangingPunct="0">
               <a:spcBef>
                 <a:spcPct val="0"/>
               </a:spcBef>
@@ -7496,311 +7501,311 @@
               </a:spcAft>
             </a:pPr>
             <a:r>
-              <a:rPr lang="ko-KR" altLang="ko-KR" sz="848" dirty="0" err="1">
+              <a:rPr lang="ko-KR" altLang="ko-KR" sz="300" dirty="0" err="1">
                 <a:latin typeface="Arial" panose="020B0604020202020204" pitchFamily="34" charset="0"/>
               </a:rPr>
               <a:t>Task</a:t>
             </a:r>
             <a:r>
-              <a:rPr lang="ko-KR" altLang="ko-KR" sz="848" dirty="0">
+              <a:rPr lang="ko-KR" altLang="ko-KR" sz="300" dirty="0">
                 <a:latin typeface="Arial" panose="020B0604020202020204" pitchFamily="34" charset="0"/>
               </a:rPr>
               <a:t> 수 확장을 통한 </a:t>
             </a:r>
             <a:r>
-              <a:rPr lang="ko-KR" altLang="ko-KR" sz="848" dirty="0" err="1">
+              <a:rPr lang="ko-KR" altLang="ko-KR" sz="300" dirty="0" err="1">
                 <a:latin typeface="Arial" panose="020B0604020202020204" pitchFamily="34" charset="0"/>
               </a:rPr>
               <a:t>multi-task</a:t>
             </a:r>
             <a:r>
-              <a:rPr lang="ko-KR" altLang="ko-KR" sz="848" dirty="0">
+              <a:rPr lang="ko-KR" altLang="ko-KR" sz="300" dirty="0">
                 <a:latin typeface="Arial" panose="020B0604020202020204" pitchFamily="34" charset="0"/>
               </a:rPr>
               <a:t> </a:t>
             </a:r>
             <a:r>
-              <a:rPr lang="ko-KR" altLang="ko-KR" sz="848" dirty="0" err="1">
+              <a:rPr lang="ko-KR" altLang="ko-KR" sz="300" dirty="0" err="1">
                 <a:latin typeface="Arial" panose="020B0604020202020204" pitchFamily="34" charset="0"/>
               </a:rPr>
               <a:t>generalization</a:t>
             </a:r>
             <a:r>
-              <a:rPr lang="ko-KR" altLang="ko-KR" sz="848" dirty="0">
+              <a:rPr lang="ko-KR" altLang="ko-KR" sz="300" dirty="0">
                 <a:latin typeface="Arial" panose="020B0604020202020204" pitchFamily="34" charset="0"/>
               </a:rPr>
               <a:t> 성능 분석 </a:t>
             </a:r>
-            <a:endParaRPr lang="en-US" altLang="ko-KR" sz="848" dirty="0"/>
-          </a:p>
-          <a:p>
-            <a:endParaRPr lang="en-US" altLang="ko-KR" sz="990" b="1" dirty="0">
+            <a:endParaRPr lang="en-US" altLang="ko-KR" sz="300" dirty="0"/>
+          </a:p>
+          <a:p>
+            <a:endParaRPr lang="en-US" altLang="ko-KR" sz="350" b="1" dirty="0">
               <a:latin typeface="+mn-ea"/>
             </a:endParaRPr>
           </a:p>
           <a:p>
             <a:r>
-              <a:rPr lang="en-US" altLang="ko-KR" sz="848" b="1" dirty="0"/>
+              <a:rPr lang="en-US" altLang="ko-KR" sz="300" b="1" dirty="0"/>
               <a:t>2. </a:t>
             </a:r>
             <a:r>
-              <a:rPr lang="ko-KR" altLang="en-US" sz="848" b="1" dirty="0"/>
+              <a:rPr lang="ko-KR" altLang="en-US" sz="300" b="1" dirty="0"/>
               <a:t>추가 </a:t>
             </a:r>
             <a:r>
-              <a:rPr lang="en-US" altLang="ko-KR" sz="848" b="1" dirty="0"/>
+              <a:rPr lang="en-US" altLang="ko-KR" sz="300" b="1" dirty="0"/>
               <a:t>VLA </a:t>
             </a:r>
             <a:r>
-              <a:rPr lang="ko-KR" altLang="en-US" sz="848" b="1" dirty="0"/>
+              <a:rPr lang="ko-KR" altLang="en-US" sz="300" b="1" dirty="0"/>
               <a:t>기술</a:t>
             </a:r>
-            <a:endParaRPr lang="en-US" altLang="ko-KR" sz="848" b="1" dirty="0"/>
-          </a:p>
-          <a:p>
-            <a:r>
-              <a:rPr lang="ko-KR" altLang="ko-KR" sz="848" b="1" dirty="0" err="1"/>
+            <a:endParaRPr lang="en-US" altLang="ko-KR" sz="300" b="1" dirty="0"/>
+          </a:p>
+          <a:p>
+            <a:r>
+              <a:rPr lang="ko-KR" altLang="ko-KR" sz="300" b="1" dirty="0" err="1"/>
               <a:t>MeM</a:t>
             </a:r>
             <a:r>
-              <a:rPr lang="ko-KR" altLang="ko-KR" sz="848" b="1" dirty="0"/>
+              <a:rPr lang="ko-KR" altLang="ko-KR" sz="300" b="1" dirty="0"/>
               <a:t> (</a:t>
             </a:r>
             <a:r>
-              <a:rPr lang="ko-KR" altLang="ko-KR" sz="848" b="1" dirty="0" err="1"/>
+              <a:rPr lang="ko-KR" altLang="ko-KR" sz="300" b="1" dirty="0" err="1"/>
               <a:t>Multi-Scale</a:t>
             </a:r>
             <a:r>
-              <a:rPr lang="ko-KR" altLang="ko-KR" sz="848" b="1" dirty="0"/>
+              <a:rPr lang="ko-KR" altLang="ko-KR" sz="300" b="1" dirty="0"/>
               <a:t> </a:t>
             </a:r>
             <a:r>
-              <a:rPr lang="ko-KR" altLang="ko-KR" sz="848" b="1" dirty="0" err="1"/>
+              <a:rPr lang="ko-KR" altLang="ko-KR" sz="300" b="1" dirty="0" err="1"/>
               <a:t>Embodied</a:t>
             </a:r>
             <a:r>
-              <a:rPr lang="ko-KR" altLang="ko-KR" sz="848" b="1" dirty="0"/>
+              <a:rPr lang="ko-KR" altLang="ko-KR" sz="300" b="1" dirty="0"/>
               <a:t> </a:t>
             </a:r>
             <a:r>
-              <a:rPr lang="ko-KR" altLang="ko-KR" sz="848" b="1" dirty="0" err="1"/>
+              <a:rPr lang="ko-KR" altLang="ko-KR" sz="300" b="1" dirty="0" err="1"/>
               <a:t>Memory</a:t>
             </a:r>
             <a:r>
-              <a:rPr lang="ko-KR" altLang="ko-KR" sz="848" b="1" dirty="0"/>
+              <a:rPr lang="ko-KR" altLang="ko-KR" sz="300" b="1" dirty="0"/>
               <a:t>)</a:t>
             </a:r>
             <a:r>
-              <a:rPr lang="en-US" altLang="ko-KR" sz="848" b="1" dirty="0"/>
+              <a:rPr lang="en-US" altLang="ko-KR" sz="300" b="1" dirty="0"/>
               <a:t>:</a:t>
             </a:r>
             <a:r>
-              <a:rPr lang="ko-KR" altLang="ko-KR" sz="848" dirty="0"/>
+              <a:rPr lang="ko-KR" altLang="ko-KR" sz="300" dirty="0"/>
               <a:t> </a:t>
             </a:r>
             <a:r>
-              <a:rPr lang="ko-KR" altLang="ko-KR" sz="848" dirty="0" err="1"/>
+              <a:rPr lang="ko-KR" altLang="ko-KR" sz="300" dirty="0" err="1"/>
               <a:t>short-term</a:t>
             </a:r>
             <a:r>
-              <a:rPr lang="ko-KR" altLang="ko-KR" sz="848" dirty="0"/>
+              <a:rPr lang="ko-KR" altLang="ko-KR" sz="300" dirty="0"/>
               <a:t> / </a:t>
             </a:r>
             <a:r>
-              <a:rPr lang="ko-KR" altLang="ko-KR" sz="848" dirty="0" err="1"/>
+              <a:rPr lang="ko-KR" altLang="ko-KR" sz="300" dirty="0" err="1"/>
               <a:t>long-term</a:t>
             </a:r>
             <a:r>
-              <a:rPr lang="ko-KR" altLang="ko-KR" sz="848" dirty="0"/>
+              <a:rPr lang="ko-KR" altLang="ko-KR" sz="300" dirty="0"/>
               <a:t> </a:t>
             </a:r>
             <a:r>
-              <a:rPr lang="ko-KR" altLang="ko-KR" sz="848" dirty="0" err="1"/>
+              <a:rPr lang="ko-KR" altLang="ko-KR" sz="300" dirty="0" err="1"/>
               <a:t>memory</a:t>
             </a:r>
             <a:r>
-              <a:rPr lang="ko-KR" altLang="ko-KR" sz="848" dirty="0"/>
+              <a:rPr lang="ko-KR" altLang="ko-KR" sz="300" dirty="0"/>
               <a:t> 기반 </a:t>
             </a:r>
             <a:r>
-              <a:rPr lang="ko-KR" altLang="ko-KR" sz="848" dirty="0" err="1"/>
+              <a:rPr lang="ko-KR" altLang="ko-KR" sz="300" dirty="0" err="1"/>
               <a:t>long-horizon</a:t>
             </a:r>
             <a:r>
-              <a:rPr lang="ko-KR" altLang="ko-KR" sz="848" dirty="0"/>
+              <a:rPr lang="ko-KR" altLang="ko-KR" sz="300" dirty="0"/>
               <a:t> </a:t>
             </a:r>
             <a:r>
-              <a:rPr lang="ko-KR" altLang="ko-KR" sz="848" dirty="0" err="1"/>
+              <a:rPr lang="ko-KR" altLang="ko-KR" sz="300" dirty="0" err="1"/>
               <a:t>task</a:t>
             </a:r>
             <a:r>
-              <a:rPr lang="ko-KR" altLang="ko-KR" sz="848" dirty="0"/>
+              <a:rPr lang="ko-KR" altLang="ko-KR" sz="300" dirty="0"/>
               <a:t> 안정성 향상</a:t>
             </a:r>
-            <a:endParaRPr lang="en-US" altLang="ko-KR" sz="848" dirty="0"/>
-          </a:p>
-          <a:p>
-            <a:r>
-              <a:rPr lang="ko-KR" altLang="ko-KR" sz="848" b="1" dirty="0"/>
+            <a:endParaRPr lang="en-US" altLang="ko-KR" sz="300" dirty="0"/>
+          </a:p>
+          <a:p>
+            <a:r>
+              <a:rPr lang="ko-KR" altLang="ko-KR" sz="300" b="1" dirty="0"/>
               <a:t>RD-VLA (</a:t>
             </a:r>
             <a:r>
-              <a:rPr lang="ko-KR" altLang="ko-KR" sz="848" b="1" dirty="0" err="1"/>
+              <a:rPr lang="ko-KR" altLang="ko-KR" sz="300" b="1" dirty="0" err="1"/>
               <a:t>Recurrent-Depth</a:t>
             </a:r>
             <a:r>
-              <a:rPr lang="ko-KR" altLang="ko-KR" sz="848" b="1" dirty="0"/>
+              <a:rPr lang="ko-KR" altLang="ko-KR" sz="300" b="1" dirty="0"/>
               <a:t> VLA)</a:t>
             </a:r>
             <a:r>
-              <a:rPr lang="en-US" altLang="ko-KR" sz="848" b="1" dirty="0"/>
+              <a:rPr lang="en-US" altLang="ko-KR" sz="300" b="1" dirty="0"/>
               <a:t>: </a:t>
             </a:r>
             <a:r>
-              <a:rPr lang="ko-KR" altLang="ko-KR" sz="848" dirty="0" err="1"/>
+              <a:rPr lang="ko-KR" altLang="ko-KR" sz="300" dirty="0" err="1"/>
               <a:t>latent</a:t>
             </a:r>
             <a:r>
-              <a:rPr lang="ko-KR" altLang="ko-KR" sz="848" dirty="0"/>
+              <a:rPr lang="ko-KR" altLang="ko-KR" sz="300" dirty="0"/>
               <a:t> </a:t>
             </a:r>
             <a:r>
-              <a:rPr lang="ko-KR" altLang="ko-KR" sz="848" dirty="0" err="1"/>
+              <a:rPr lang="ko-KR" altLang="ko-KR" sz="300" dirty="0" err="1"/>
               <a:t>action</a:t>
             </a:r>
             <a:r>
-              <a:rPr lang="ko-KR" altLang="ko-KR" sz="848" dirty="0"/>
+              <a:rPr lang="ko-KR" altLang="ko-KR" sz="300" dirty="0"/>
               <a:t> </a:t>
             </a:r>
             <a:r>
-              <a:rPr lang="ko-KR" altLang="ko-KR" sz="848" dirty="0" err="1"/>
+              <a:rPr lang="ko-KR" altLang="ko-KR" sz="300" dirty="0" err="1"/>
               <a:t>plan을</a:t>
             </a:r>
             <a:r>
-              <a:rPr lang="ko-KR" altLang="ko-KR" sz="848" dirty="0"/>
+              <a:rPr lang="ko-KR" altLang="ko-KR" sz="300" dirty="0"/>
               <a:t> 반복적으로 </a:t>
             </a:r>
             <a:r>
-              <a:rPr lang="ko-KR" altLang="ko-KR" sz="848" dirty="0" err="1"/>
+              <a:rPr lang="ko-KR" altLang="ko-KR" sz="300" dirty="0" err="1"/>
               <a:t>refinement하여</a:t>
             </a:r>
             <a:r>
-              <a:rPr lang="ko-KR" altLang="ko-KR" sz="848" dirty="0"/>
+              <a:rPr lang="ko-KR" altLang="ko-KR" sz="300" dirty="0"/>
               <a:t> </a:t>
             </a:r>
             <a:r>
-              <a:rPr lang="ko-KR" altLang="ko-KR" sz="848" dirty="0" err="1"/>
+              <a:rPr lang="ko-KR" altLang="ko-KR" sz="300" dirty="0" err="1"/>
               <a:t>long-horizon</a:t>
             </a:r>
             <a:r>
-              <a:rPr lang="ko-KR" altLang="ko-KR" sz="848" dirty="0"/>
+              <a:rPr lang="ko-KR" altLang="ko-KR" sz="300" dirty="0"/>
               <a:t> </a:t>
             </a:r>
             <a:r>
-              <a:rPr lang="ko-KR" altLang="ko-KR" sz="848" dirty="0" err="1"/>
+              <a:rPr lang="ko-KR" altLang="ko-KR" sz="300" dirty="0" err="1"/>
               <a:t>task에서</a:t>
             </a:r>
             <a:r>
-              <a:rPr lang="ko-KR" altLang="ko-KR" sz="848" dirty="0"/>
+              <a:rPr lang="ko-KR" altLang="ko-KR" sz="300" dirty="0"/>
               <a:t> 더 정밀한 </a:t>
             </a:r>
             <a:r>
-              <a:rPr lang="ko-KR" altLang="ko-KR" sz="848" dirty="0" err="1"/>
+              <a:rPr lang="ko-KR" altLang="ko-KR" sz="300" dirty="0" err="1"/>
               <a:t>action</a:t>
             </a:r>
             <a:r>
-              <a:rPr lang="ko-KR" altLang="ko-KR" sz="848" dirty="0"/>
+              <a:rPr lang="ko-KR" altLang="ko-KR" sz="300" dirty="0"/>
               <a:t> </a:t>
             </a:r>
             <a:r>
-              <a:rPr lang="ko-KR" altLang="ko-KR" sz="848" dirty="0" err="1"/>
+              <a:rPr lang="ko-KR" altLang="ko-KR" sz="300" dirty="0" err="1"/>
               <a:t>trajectory</a:t>
             </a:r>
             <a:r>
-              <a:rPr lang="ko-KR" altLang="ko-KR" sz="848" dirty="0"/>
+              <a:rPr lang="ko-KR" altLang="ko-KR" sz="300" dirty="0"/>
               <a:t> 생성</a:t>
             </a:r>
           </a:p>
           <a:p>
             <a:r>
-              <a:rPr lang="ko-KR" altLang="ko-KR" sz="848" b="1" dirty="0"/>
+              <a:rPr lang="ko-KR" altLang="ko-KR" sz="300" b="1" dirty="0"/>
               <a:t>π*0.6-lite </a:t>
             </a:r>
             <a:r>
-              <a:rPr lang="ko-KR" altLang="ko-KR" sz="848" b="1" dirty="0" err="1"/>
+              <a:rPr lang="ko-KR" altLang="ko-KR" sz="300" b="1" dirty="0" err="1"/>
               <a:t>Recovery</a:t>
             </a:r>
             <a:r>
-              <a:rPr lang="ko-KR" altLang="ko-KR" sz="848" b="1" dirty="0"/>
+              <a:rPr lang="ko-KR" altLang="ko-KR" sz="300" b="1" dirty="0"/>
               <a:t> </a:t>
             </a:r>
             <a:r>
-              <a:rPr lang="ko-KR" altLang="ko-KR" sz="848" b="1" dirty="0" err="1"/>
+              <a:rPr lang="ko-KR" altLang="ko-KR" sz="300" b="1" dirty="0" err="1"/>
               <a:t>Learning</a:t>
             </a:r>
             <a:r>
-              <a:rPr lang="en-US" altLang="ko-KR" sz="848" b="1" dirty="0"/>
+              <a:rPr lang="en-US" altLang="ko-KR" sz="300" b="1" dirty="0"/>
               <a:t>: </a:t>
             </a:r>
             <a:r>
-              <a:rPr lang="ko-KR" altLang="ko-KR" sz="848" dirty="0"/>
+              <a:rPr lang="ko-KR" altLang="ko-KR" sz="300" dirty="0"/>
               <a:t>실패 </a:t>
             </a:r>
             <a:r>
-              <a:rPr lang="ko-KR" altLang="ko-KR" sz="848" dirty="0" err="1"/>
+              <a:rPr lang="ko-KR" altLang="ko-KR" sz="300" dirty="0" err="1"/>
               <a:t>rollout과</a:t>
             </a:r>
             <a:r>
-              <a:rPr lang="ko-KR" altLang="ko-KR" sz="848" dirty="0"/>
+              <a:rPr lang="ko-KR" altLang="ko-KR" sz="300" dirty="0"/>
               <a:t> </a:t>
             </a:r>
             <a:r>
-              <a:rPr lang="ko-KR" altLang="ko-KR" sz="848" dirty="0" err="1"/>
+              <a:rPr lang="ko-KR" altLang="ko-KR" sz="300" dirty="0" err="1"/>
               <a:t>stage</a:t>
             </a:r>
             <a:r>
-              <a:rPr lang="ko-KR" altLang="ko-KR" sz="848" dirty="0"/>
+              <a:rPr lang="ko-KR" altLang="ko-KR" sz="300" dirty="0"/>
               <a:t>/</a:t>
             </a:r>
             <a:r>
-              <a:rPr lang="ko-KR" altLang="ko-KR" sz="848" dirty="0" err="1"/>
+              <a:rPr lang="ko-KR" altLang="ko-KR" sz="300" dirty="0" err="1"/>
               <a:t>value</a:t>
             </a:r>
             <a:r>
-              <a:rPr lang="ko-KR" altLang="ko-KR" sz="848" dirty="0"/>
+              <a:rPr lang="ko-KR" altLang="ko-KR" sz="300" dirty="0"/>
               <a:t> 정보를 활용하여 OOD 상태에서 </a:t>
             </a:r>
             <a:r>
-              <a:rPr lang="ko-KR" altLang="ko-KR" sz="848" dirty="0" err="1"/>
+              <a:rPr lang="ko-KR" altLang="ko-KR" sz="300" dirty="0" err="1"/>
               <a:t>recovery</a:t>
             </a:r>
             <a:r>
-              <a:rPr lang="ko-KR" altLang="ko-KR" sz="848" dirty="0"/>
+              <a:rPr lang="ko-KR" altLang="ko-KR" sz="300" dirty="0"/>
               <a:t> </a:t>
             </a:r>
             <a:r>
-              <a:rPr lang="ko-KR" altLang="ko-KR" sz="848" dirty="0" err="1"/>
+              <a:rPr lang="ko-KR" altLang="ko-KR" sz="300" dirty="0" err="1"/>
               <a:t>behavior</a:t>
             </a:r>
             <a:r>
-              <a:rPr lang="ko-KR" altLang="ko-KR" sz="848" dirty="0"/>
+              <a:rPr lang="ko-KR" altLang="ko-KR" sz="300" dirty="0"/>
               <a:t> 및 </a:t>
             </a:r>
             <a:r>
-              <a:rPr lang="ko-KR" altLang="ko-KR" sz="848" dirty="0" err="1"/>
+              <a:rPr lang="ko-KR" altLang="ko-KR" sz="300" dirty="0" err="1"/>
               <a:t>rollout</a:t>
             </a:r>
             <a:r>
-              <a:rPr lang="ko-KR" altLang="ko-KR" sz="848" dirty="0"/>
+              <a:rPr lang="ko-KR" altLang="ko-KR" sz="300" dirty="0"/>
               <a:t> </a:t>
             </a:r>
             <a:r>
-              <a:rPr lang="ko-KR" altLang="ko-KR" sz="848" dirty="0" err="1"/>
+              <a:rPr lang="ko-KR" altLang="ko-KR" sz="300" dirty="0" err="1"/>
               <a:t>robustness</a:t>
             </a:r>
             <a:r>
-              <a:rPr lang="ko-KR" altLang="ko-KR" sz="848" dirty="0"/>
+              <a:rPr lang="ko-KR" altLang="ko-KR" sz="300" dirty="0"/>
               <a:t> 향상</a:t>
             </a:r>
           </a:p>
@@ -7811,7 +7816,7 @@
           <p:cNvPr id="89" name="TextBox 88">
             <a:extLst>
               <a:ext uri="{FF2B5EF4-FFF2-40B4-BE49-F238E27FC236}">
-                <ns2:creationId id="{412367E2-2923-2FE1-2E7E-78D4E1A602A4}"/>
+                <a16:creationId xmlns:a16="http://schemas.microsoft.com/office/drawing/2014/main" id="{412367E2-2923-2FE1-2E7E-78D4E1A602A4}"/>
               </a:ext>
             </a:extLst>
           </p:cNvPr>
@@ -7820,8 +7825,8 @@
         </p:nvSpPr>
         <p:spPr>
           <a:xfrm>
-            <a:off x="3783569" y="7720830"/>
-            <a:ext cx="1420861" cy="228501"/>
+            <a:off x="3781121" y="6182560"/>
+            <a:ext cx="501770" cy="161583"/>
           </a:xfrm>
           <a:prstGeom prst="rect">
             <a:avLst/>
@@ -7855,7 +7860,7 @@
               <a:fillToRect l="50000" t="50000" r="50000" b="50000"/>
             </a:path>
           </a:gradFill>
-          <a:ln w="20205">
+          <a:ln w="57150">
             <a:solidFill>
               <a:schemeClr val="accent4">
                 <a:lumMod val="50000"/>
@@ -7871,7 +7876,7 @@
           <a:p>
             <a:pPr algn="ctr"/>
             <a:r>
-              <a:rPr lang="ko-KR" altLang="en-US" sz="1273" b="1" dirty="0">
+              <a:rPr lang="ko-KR" altLang="en-US" sz="450" b="1" dirty="0">
                 <a:solidFill>
                   <a:schemeClr val="bg1"/>
                 </a:solidFill>
@@ -7887,7 +7892,7 @@
           <p:cNvPr id="96" name="그림 95">
             <a:extLst>
               <a:ext uri="{FF2B5EF4-FFF2-40B4-BE49-F238E27FC236}">
-                <ns2:creationId id="{3967B010-75E5-F8F0-58B6-DD939BD4F9C5}"/>
+                <a16:creationId xmlns:a16="http://schemas.microsoft.com/office/drawing/2014/main" id="{3967B010-75E5-F8F0-58B6-DD939BD4F9C5}"/>
               </a:ext>
             </a:extLst>
           </p:cNvPr>
@@ -7897,15 +7902,15 @@
           <p:nvPr/>
         </p:nvPicPr>
         <p:blipFill>
-          <a:blip ns3:embed="rId8"/>
+          <a:blip r:embed="rId8"/>
           <a:stretch>
             <a:fillRect/>
           </a:stretch>
         </p:blipFill>
         <p:spPr>
           <a:xfrm>
-            <a:off x="228564" y="5763472"/>
-            <a:ext cx="1619637" cy="1564920"/>
+            <a:off x="2525689" y="5491329"/>
+            <a:ext cx="571967" cy="552644"/>
           </a:xfrm>
           <a:prstGeom prst="rect">
             <a:avLst/>
@@ -7917,7 +7922,7 @@
           <p:cNvPr id="98" name="그림 97">
             <a:extLst>
               <a:ext uri="{FF2B5EF4-FFF2-40B4-BE49-F238E27FC236}">
-                <ns2:creationId id="{4196D2DC-283E-6471-F5DA-2B9B9FE0AFFC}"/>
+                <a16:creationId xmlns:a16="http://schemas.microsoft.com/office/drawing/2014/main" id="{4196D2DC-283E-6471-F5DA-2B9B9FE0AFFC}"/>
               </a:ext>
             </a:extLst>
           </p:cNvPr>
@@ -7927,15 +7932,15 @@
           <p:nvPr/>
         </p:nvPicPr>
         <p:blipFill>
-          <a:blip ns3:embed="rId9"/>
+          <a:blip r:embed="rId9"/>
           <a:stretch>
             <a:fillRect/>
           </a:stretch>
         </p:blipFill>
         <p:spPr>
           <a:xfrm>
-            <a:off x="1869883" y="5593761"/>
-            <a:ext cx="1878971" cy="1731551"/>
+            <a:off x="3105312" y="5431396"/>
+            <a:ext cx="663549" cy="611489"/>
           </a:xfrm>
           <a:prstGeom prst="rect">
             <a:avLst/>
@@ -7945,7 +7950,7 @@
     </p:spTree>
     <p:extLst>
       <p:ext uri="{BB962C8B-B14F-4D97-AF65-F5344CB8AC3E}">
-        <ns7:creationId val="1314877583"/>
+        <p14:creationId xmlns:p14="http://schemas.microsoft.com/office/powerpoint/2010/main" val="1314877583"/>
       </p:ext>
     </p:extLst>
   </p:cSld>

--- a/docs/presentation/capstone_midterm_presentation_compact.pptx
+++ b/docs/presentation/capstone_midterm_presentation_compact.pptx
@@ -10,7 +10,7 @@
   <p:sldIdLst>
     <p:sldId id="256" r:id="rId2"/>
   </p:sldIdLst>
-  <p:sldSz cx="7559675" cy="10691813"/>
+  <p:sldSz cx="21383625" cy="30275213"/>
   <p:notesSz cx="6858000" cy="9144000"/>
   <p:defaultTextStyle>
     <a:defPPr>
@@ -197,7 +197,7 @@
           <a:p>
             <a:fld id="{EC3CE3CB-5277-48E6-BCBF-B434DC32A1C2}" type="datetimeFigureOut">
               <a:rPr lang="ko-KR" altLang="en-US" smtClean="0"/>
-              <a:t>2026-05-26</a:t>
+              <a:t>2026-05-28</a:t>
             </a:fld>
             <a:endParaRPr lang="ko-KR" altLang="en-US"/>
           </a:p>
@@ -491,12 +491,7 @@
             <p:ph type="sldImg"/>
           </p:nvPr>
         </p:nvSpPr>
-        <p:spPr>
-          <a:xfrm>
-            <a:off x="2338388" y="1143000"/>
-            <a:ext cx="2181225" cy="3086100"/>
-          </a:xfrm>
-        </p:spPr>
+        <p:spPr/>
       </p:sp>
       <p:sp>
         <p:nvSpPr>
@@ -582,15 +577,15 @@
         </p:nvSpPr>
         <p:spPr>
           <a:xfrm>
-            <a:off x="566976" y="1749796"/>
-            <a:ext cx="6425724" cy="3722335"/>
+            <a:off x="1603772" y="4954765"/>
+            <a:ext cx="18176081" cy="10540259"/>
           </a:xfrm>
         </p:spPr>
         <p:txBody>
           <a:bodyPr anchor="b"/>
           <a:lstStyle>
             <a:lvl1pPr algn="ctr">
-              <a:defRPr sz="1752"/>
+              <a:defRPr sz="14031"/>
             </a:lvl1pPr>
           </a:lstStyle>
           <a:p>
@@ -614,8 +609,8 @@
         </p:nvSpPr>
         <p:spPr>
           <a:xfrm>
-            <a:off x="944960" y="5615678"/>
-            <a:ext cx="5669756" cy="2581379"/>
+            <a:off x="2672953" y="15901497"/>
+            <a:ext cx="16037719" cy="7309499"/>
           </a:xfrm>
         </p:spPr>
         <p:txBody>
@@ -623,39 +618,39 @@
           <a:lstStyle>
             <a:lvl1pPr marL="0" indent="0" algn="ctr">
               <a:buNone/>
-              <a:defRPr sz="701"/>
+              <a:defRPr sz="5612"/>
             </a:lvl1pPr>
-            <a:lvl2pPr marL="133492" indent="0" algn="ctr">
+            <a:lvl2pPr marL="1069162" indent="0" algn="ctr">
               <a:buNone/>
-              <a:defRPr sz="584"/>
+              <a:defRPr sz="4677"/>
             </a:lvl2pPr>
-            <a:lvl3pPr marL="266983" indent="0" algn="ctr">
+            <a:lvl3pPr marL="2138324" indent="0" algn="ctr">
               <a:buNone/>
-              <a:defRPr sz="526"/>
+              <a:defRPr sz="4209"/>
             </a:lvl3pPr>
-            <a:lvl4pPr marL="400475" indent="0" algn="ctr">
+            <a:lvl4pPr marL="3207487" indent="0" algn="ctr">
               <a:buNone/>
-              <a:defRPr sz="467"/>
+              <a:defRPr sz="3742"/>
             </a:lvl4pPr>
-            <a:lvl5pPr marL="533966" indent="0" algn="ctr">
+            <a:lvl5pPr marL="4276649" indent="0" algn="ctr">
               <a:buNone/>
-              <a:defRPr sz="467"/>
+              <a:defRPr sz="3742"/>
             </a:lvl5pPr>
-            <a:lvl6pPr marL="667458" indent="0" algn="ctr">
+            <a:lvl6pPr marL="5345811" indent="0" algn="ctr">
               <a:buNone/>
-              <a:defRPr sz="467"/>
+              <a:defRPr sz="3742"/>
             </a:lvl6pPr>
-            <a:lvl7pPr marL="800949" indent="0" algn="ctr">
+            <a:lvl7pPr marL="6414973" indent="0" algn="ctr">
               <a:buNone/>
-              <a:defRPr sz="467"/>
+              <a:defRPr sz="3742"/>
             </a:lvl7pPr>
-            <a:lvl8pPr marL="934441" indent="0" algn="ctr">
+            <a:lvl8pPr marL="7484135" indent="0" algn="ctr">
               <a:buNone/>
-              <a:defRPr sz="467"/>
+              <a:defRPr sz="3742"/>
             </a:lvl8pPr>
-            <a:lvl9pPr marL="1067932" indent="0" algn="ctr">
+            <a:lvl9pPr marL="8553298" indent="0" algn="ctr">
               <a:buNone/>
-              <a:defRPr sz="467"/>
+              <a:defRPr sz="3742"/>
             </a:lvl9pPr>
           </a:lstStyle>
           <a:p>
@@ -684,7 +679,7 @@
           <a:p>
             <a:fld id="{E6031A69-130F-4AFA-87E1-41757229F71B}" type="datetimeFigureOut">
               <a:rPr lang="ko-KR" altLang="en-US" smtClean="0"/>
-              <a:t>2026-05-26</a:t>
+              <a:t>2026-05-28</a:t>
             </a:fld>
             <a:endParaRPr lang="ko-KR" altLang="en-US"/>
           </a:p>
@@ -854,7 +849,7 @@
           <a:p>
             <a:fld id="{E6031A69-130F-4AFA-87E1-41757229F71B}" type="datetimeFigureOut">
               <a:rPr lang="ko-KR" altLang="en-US" smtClean="0"/>
-              <a:t>2026-05-26</a:t>
+              <a:t>2026-05-28</a:t>
             </a:fld>
             <a:endParaRPr lang="ko-KR" altLang="en-US"/>
           </a:p>
@@ -944,8 +939,8 @@
         </p:nvSpPr>
         <p:spPr>
           <a:xfrm>
-            <a:off x="5409894" y="569240"/>
-            <a:ext cx="1630055" cy="9060817"/>
+            <a:off x="15302658" y="1611875"/>
+            <a:ext cx="4610844" cy="25656844"/>
           </a:xfrm>
         </p:spPr>
         <p:txBody>
@@ -972,8 +967,8 @@
         </p:nvSpPr>
         <p:spPr>
           <a:xfrm>
-            <a:off x="519729" y="569240"/>
-            <a:ext cx="4795669" cy="9060817"/>
+            <a:off x="1470125" y="1611875"/>
+            <a:ext cx="13565237" cy="25656844"/>
           </a:xfrm>
         </p:spPr>
         <p:txBody>
@@ -1034,7 +1029,7 @@
           <a:p>
             <a:fld id="{E6031A69-130F-4AFA-87E1-41757229F71B}" type="datetimeFigureOut">
               <a:rPr lang="ko-KR" altLang="en-US" smtClean="0"/>
-              <a:t>2026-05-26</a:t>
+              <a:t>2026-05-28</a:t>
             </a:fld>
             <a:endParaRPr lang="ko-KR" altLang="en-US"/>
           </a:p>
@@ -1204,7 +1199,7 @@
           <a:p>
             <a:fld id="{E6031A69-130F-4AFA-87E1-41757229F71B}" type="datetimeFigureOut">
               <a:rPr lang="ko-KR" altLang="en-US" smtClean="0"/>
-              <a:t>2026-05-26</a:t>
+              <a:t>2026-05-28</a:t>
             </a:fld>
             <a:endParaRPr lang="ko-KR" altLang="en-US"/>
           </a:p>
@@ -1294,15 +1289,15 @@
         </p:nvSpPr>
         <p:spPr>
           <a:xfrm>
-            <a:off x="515791" y="2665532"/>
-            <a:ext cx="6520220" cy="4447496"/>
+            <a:off x="1458988" y="7547788"/>
+            <a:ext cx="18443377" cy="12593645"/>
           </a:xfrm>
         </p:spPr>
         <p:txBody>
           <a:bodyPr anchor="b"/>
           <a:lstStyle>
             <a:lvl1pPr>
-              <a:defRPr sz="1752"/>
+              <a:defRPr sz="14031"/>
             </a:lvl1pPr>
           </a:lstStyle>
           <a:p>
@@ -1326,8 +1321,8 @@
         </p:nvSpPr>
         <p:spPr>
           <a:xfrm>
-            <a:off x="515791" y="7155104"/>
-            <a:ext cx="6520220" cy="2338833"/>
+            <a:off x="1458988" y="20260574"/>
+            <a:ext cx="18443377" cy="6622701"/>
           </a:xfrm>
         </p:spPr>
         <p:txBody>
@@ -1335,7 +1330,7 @@
           <a:lstStyle>
             <a:lvl1pPr marL="0" indent="0">
               <a:buNone/>
-              <a:defRPr sz="701">
+              <a:defRPr sz="5612">
                 <a:solidFill>
                   <a:schemeClr val="tx1">
                     <a:tint val="82000"/>
@@ -1343,9 +1338,9 @@
                 </a:solidFill>
               </a:defRPr>
             </a:lvl1pPr>
-            <a:lvl2pPr marL="133492" indent="0">
+            <a:lvl2pPr marL="1069162" indent="0">
               <a:buNone/>
-              <a:defRPr sz="584">
+              <a:defRPr sz="4677">
                 <a:solidFill>
                   <a:schemeClr val="tx1">
                     <a:tint val="82000"/>
@@ -1353,9 +1348,9 @@
                 </a:solidFill>
               </a:defRPr>
             </a:lvl2pPr>
-            <a:lvl3pPr marL="266983" indent="0">
+            <a:lvl3pPr marL="2138324" indent="0">
               <a:buNone/>
-              <a:defRPr sz="526">
+              <a:defRPr sz="4209">
                 <a:solidFill>
                   <a:schemeClr val="tx1">
                     <a:tint val="82000"/>
@@ -1363,9 +1358,9 @@
                 </a:solidFill>
               </a:defRPr>
             </a:lvl3pPr>
-            <a:lvl4pPr marL="400475" indent="0">
+            <a:lvl4pPr marL="3207487" indent="0">
               <a:buNone/>
-              <a:defRPr sz="467">
+              <a:defRPr sz="3742">
                 <a:solidFill>
                   <a:schemeClr val="tx1">
                     <a:tint val="82000"/>
@@ -1373,9 +1368,9 @@
                 </a:solidFill>
               </a:defRPr>
             </a:lvl4pPr>
-            <a:lvl5pPr marL="533966" indent="0">
+            <a:lvl5pPr marL="4276649" indent="0">
               <a:buNone/>
-              <a:defRPr sz="467">
+              <a:defRPr sz="3742">
                 <a:solidFill>
                   <a:schemeClr val="tx1">
                     <a:tint val="82000"/>
@@ -1383,9 +1378,9 @@
                 </a:solidFill>
               </a:defRPr>
             </a:lvl5pPr>
-            <a:lvl6pPr marL="667458" indent="0">
+            <a:lvl6pPr marL="5345811" indent="0">
               <a:buNone/>
-              <a:defRPr sz="467">
+              <a:defRPr sz="3742">
                 <a:solidFill>
                   <a:schemeClr val="tx1">
                     <a:tint val="82000"/>
@@ -1393,9 +1388,9 @@
                 </a:solidFill>
               </a:defRPr>
             </a:lvl6pPr>
-            <a:lvl7pPr marL="800949" indent="0">
+            <a:lvl7pPr marL="6414973" indent="0">
               <a:buNone/>
-              <a:defRPr sz="467">
+              <a:defRPr sz="3742">
                 <a:solidFill>
                   <a:schemeClr val="tx1">
                     <a:tint val="82000"/>
@@ -1403,9 +1398,9 @@
                 </a:solidFill>
               </a:defRPr>
             </a:lvl7pPr>
-            <a:lvl8pPr marL="934441" indent="0">
+            <a:lvl8pPr marL="7484135" indent="0">
               <a:buNone/>
-              <a:defRPr sz="467">
+              <a:defRPr sz="3742">
                 <a:solidFill>
                   <a:schemeClr val="tx1">
                     <a:tint val="82000"/>
@@ -1413,9 +1408,9 @@
                 </a:solidFill>
               </a:defRPr>
             </a:lvl8pPr>
-            <a:lvl9pPr marL="1067932" indent="0">
+            <a:lvl9pPr marL="8553298" indent="0">
               <a:buNone/>
-              <a:defRPr sz="467">
+              <a:defRPr sz="3742">
                 <a:solidFill>
                   <a:schemeClr val="tx1">
                     <a:tint val="82000"/>
@@ -1450,7 +1445,7 @@
           <a:p>
             <a:fld id="{E6031A69-130F-4AFA-87E1-41757229F71B}" type="datetimeFigureOut">
               <a:rPr lang="ko-KR" altLang="en-US" smtClean="0"/>
-              <a:t>2026-05-26</a:t>
+              <a:t>2026-05-28</a:t>
             </a:fld>
             <a:endParaRPr lang="ko-KR" altLang="en-US"/>
           </a:p>
@@ -1563,8 +1558,8 @@
         </p:nvSpPr>
         <p:spPr>
           <a:xfrm>
-            <a:off x="519728" y="2846201"/>
-            <a:ext cx="3212862" cy="6783857"/>
+            <a:off x="1470124" y="8059374"/>
+            <a:ext cx="9088041" cy="19209345"/>
           </a:xfrm>
         </p:spPr>
         <p:txBody>
@@ -1620,8 +1615,8 @@
         </p:nvSpPr>
         <p:spPr>
           <a:xfrm>
-            <a:off x="3827086" y="2846201"/>
-            <a:ext cx="3212862" cy="6783857"/>
+            <a:off x="10825460" y="8059374"/>
+            <a:ext cx="9088041" cy="19209345"/>
           </a:xfrm>
         </p:spPr>
         <p:txBody>
@@ -1682,7 +1677,7 @@
           <a:p>
             <a:fld id="{E6031A69-130F-4AFA-87E1-41757229F71B}" type="datetimeFigureOut">
               <a:rPr lang="ko-KR" altLang="en-US" smtClean="0"/>
-              <a:t>2026-05-26</a:t>
+              <a:t>2026-05-28</a:t>
             </a:fld>
             <a:endParaRPr lang="ko-KR" altLang="en-US"/>
           </a:p>
@@ -1772,8 +1767,8 @@
         </p:nvSpPr>
         <p:spPr>
           <a:xfrm>
-            <a:off x="520712" y="569243"/>
-            <a:ext cx="6520220" cy="2066589"/>
+            <a:off x="1472909" y="1611882"/>
+            <a:ext cx="18443377" cy="5851808"/>
           </a:xfrm>
         </p:spPr>
         <p:txBody>
@@ -1800,8 +1795,8 @@
         </p:nvSpPr>
         <p:spPr>
           <a:xfrm>
-            <a:off x="520713" y="2620980"/>
-            <a:ext cx="3198096" cy="1284502"/>
+            <a:off x="1472912" y="7421634"/>
+            <a:ext cx="9046274" cy="3637228"/>
           </a:xfrm>
         </p:spPr>
         <p:txBody>
@@ -1809,39 +1804,39 @@
           <a:lstStyle>
             <a:lvl1pPr marL="0" indent="0">
               <a:buNone/>
-              <a:defRPr sz="701" b="1"/>
+              <a:defRPr sz="5612" b="1"/>
             </a:lvl1pPr>
-            <a:lvl2pPr marL="133492" indent="0">
+            <a:lvl2pPr marL="1069162" indent="0">
               <a:buNone/>
-              <a:defRPr sz="584" b="1"/>
+              <a:defRPr sz="4677" b="1"/>
             </a:lvl2pPr>
-            <a:lvl3pPr marL="266983" indent="0">
+            <a:lvl3pPr marL="2138324" indent="0">
               <a:buNone/>
-              <a:defRPr sz="526" b="1"/>
+              <a:defRPr sz="4209" b="1"/>
             </a:lvl3pPr>
-            <a:lvl4pPr marL="400475" indent="0">
+            <a:lvl4pPr marL="3207487" indent="0">
               <a:buNone/>
-              <a:defRPr sz="467" b="1"/>
+              <a:defRPr sz="3742" b="1"/>
             </a:lvl4pPr>
-            <a:lvl5pPr marL="533966" indent="0">
+            <a:lvl5pPr marL="4276649" indent="0">
               <a:buNone/>
-              <a:defRPr sz="467" b="1"/>
+              <a:defRPr sz="3742" b="1"/>
             </a:lvl5pPr>
-            <a:lvl6pPr marL="667458" indent="0">
+            <a:lvl6pPr marL="5345811" indent="0">
               <a:buNone/>
-              <a:defRPr sz="467" b="1"/>
+              <a:defRPr sz="3742" b="1"/>
             </a:lvl6pPr>
-            <a:lvl7pPr marL="800949" indent="0">
+            <a:lvl7pPr marL="6414973" indent="0">
               <a:buNone/>
-              <a:defRPr sz="467" b="1"/>
+              <a:defRPr sz="3742" b="1"/>
             </a:lvl7pPr>
-            <a:lvl8pPr marL="934441" indent="0">
+            <a:lvl8pPr marL="7484135" indent="0">
               <a:buNone/>
-              <a:defRPr sz="467" b="1"/>
+              <a:defRPr sz="3742" b="1"/>
             </a:lvl8pPr>
-            <a:lvl9pPr marL="1067932" indent="0">
+            <a:lvl9pPr marL="8553298" indent="0">
               <a:buNone/>
-              <a:defRPr sz="467" b="1"/>
+              <a:defRPr sz="3742" b="1"/>
             </a:lvl9pPr>
           </a:lstStyle>
           <a:p>
@@ -1865,8 +1860,8 @@
         </p:nvSpPr>
         <p:spPr>
           <a:xfrm>
-            <a:off x="520713" y="3905483"/>
-            <a:ext cx="3198096" cy="5744375"/>
+            <a:off x="1472912" y="11058863"/>
+            <a:ext cx="9046274" cy="16265921"/>
           </a:xfrm>
         </p:spPr>
         <p:txBody>
@@ -1922,8 +1917,8 @@
         </p:nvSpPr>
         <p:spPr>
           <a:xfrm>
-            <a:off x="3827087" y="2620980"/>
-            <a:ext cx="3213847" cy="1284502"/>
+            <a:off x="10825461" y="7421634"/>
+            <a:ext cx="9090826" cy="3637228"/>
           </a:xfrm>
         </p:spPr>
         <p:txBody>
@@ -1931,39 +1926,39 @@
           <a:lstStyle>
             <a:lvl1pPr marL="0" indent="0">
               <a:buNone/>
-              <a:defRPr sz="701" b="1"/>
+              <a:defRPr sz="5612" b="1"/>
             </a:lvl1pPr>
-            <a:lvl2pPr marL="133492" indent="0">
+            <a:lvl2pPr marL="1069162" indent="0">
               <a:buNone/>
-              <a:defRPr sz="584" b="1"/>
+              <a:defRPr sz="4677" b="1"/>
             </a:lvl2pPr>
-            <a:lvl3pPr marL="266983" indent="0">
+            <a:lvl3pPr marL="2138324" indent="0">
               <a:buNone/>
-              <a:defRPr sz="526" b="1"/>
+              <a:defRPr sz="4209" b="1"/>
             </a:lvl3pPr>
-            <a:lvl4pPr marL="400475" indent="0">
+            <a:lvl4pPr marL="3207487" indent="0">
               <a:buNone/>
-              <a:defRPr sz="467" b="1"/>
+              <a:defRPr sz="3742" b="1"/>
             </a:lvl4pPr>
-            <a:lvl5pPr marL="533966" indent="0">
+            <a:lvl5pPr marL="4276649" indent="0">
               <a:buNone/>
-              <a:defRPr sz="467" b="1"/>
+              <a:defRPr sz="3742" b="1"/>
             </a:lvl5pPr>
-            <a:lvl6pPr marL="667458" indent="0">
+            <a:lvl6pPr marL="5345811" indent="0">
               <a:buNone/>
-              <a:defRPr sz="467" b="1"/>
+              <a:defRPr sz="3742" b="1"/>
             </a:lvl6pPr>
-            <a:lvl7pPr marL="800949" indent="0">
+            <a:lvl7pPr marL="6414973" indent="0">
               <a:buNone/>
-              <a:defRPr sz="467" b="1"/>
+              <a:defRPr sz="3742" b="1"/>
             </a:lvl7pPr>
-            <a:lvl8pPr marL="934441" indent="0">
+            <a:lvl8pPr marL="7484135" indent="0">
               <a:buNone/>
-              <a:defRPr sz="467" b="1"/>
+              <a:defRPr sz="3742" b="1"/>
             </a:lvl8pPr>
-            <a:lvl9pPr marL="1067932" indent="0">
+            <a:lvl9pPr marL="8553298" indent="0">
               <a:buNone/>
-              <a:defRPr sz="467" b="1"/>
+              <a:defRPr sz="3742" b="1"/>
             </a:lvl9pPr>
           </a:lstStyle>
           <a:p>
@@ -1987,8 +1982,8 @@
         </p:nvSpPr>
         <p:spPr>
           <a:xfrm>
-            <a:off x="3827087" y="3905483"/>
-            <a:ext cx="3213847" cy="5744375"/>
+            <a:off x="10825461" y="11058863"/>
+            <a:ext cx="9090826" cy="16265921"/>
           </a:xfrm>
         </p:spPr>
         <p:txBody>
@@ -2049,7 +2044,7 @@
           <a:p>
             <a:fld id="{E6031A69-130F-4AFA-87E1-41757229F71B}" type="datetimeFigureOut">
               <a:rPr lang="ko-KR" altLang="en-US" smtClean="0"/>
-              <a:t>2026-05-26</a:t>
+              <a:t>2026-05-28</a:t>
             </a:fld>
             <a:endParaRPr lang="ko-KR" altLang="en-US"/>
           </a:p>
@@ -2167,7 +2162,7 @@
           <a:p>
             <a:fld id="{E6031A69-130F-4AFA-87E1-41757229F71B}" type="datetimeFigureOut">
               <a:rPr lang="ko-KR" altLang="en-US" smtClean="0"/>
-              <a:t>2026-05-26</a:t>
+              <a:t>2026-05-28</a:t>
             </a:fld>
             <a:endParaRPr lang="ko-KR" altLang="en-US"/>
           </a:p>
@@ -2262,7 +2257,7 @@
           <a:p>
             <a:fld id="{E6031A69-130F-4AFA-87E1-41757229F71B}" type="datetimeFigureOut">
               <a:rPr lang="ko-KR" altLang="en-US" smtClean="0"/>
-              <a:t>2026-05-26</a:t>
+              <a:t>2026-05-28</a:t>
             </a:fld>
             <a:endParaRPr lang="ko-KR" altLang="en-US"/>
           </a:p>
@@ -2352,15 +2347,15 @@
         </p:nvSpPr>
         <p:spPr>
           <a:xfrm>
-            <a:off x="520712" y="712788"/>
-            <a:ext cx="2438192" cy="2494756"/>
+            <a:off x="1472909" y="2018348"/>
+            <a:ext cx="6896776" cy="7064216"/>
           </a:xfrm>
         </p:spPr>
         <p:txBody>
           <a:bodyPr anchor="b"/>
           <a:lstStyle>
             <a:lvl1pPr>
-              <a:defRPr sz="934"/>
+              <a:defRPr sz="7483"/>
             </a:lvl1pPr>
           </a:lstStyle>
           <a:p>
@@ -2384,39 +2379,39 @@
         </p:nvSpPr>
         <p:spPr>
           <a:xfrm>
-            <a:off x="3213848" y="1539426"/>
-            <a:ext cx="3827085" cy="7598117"/>
+            <a:off x="9090826" y="4359077"/>
+            <a:ext cx="10825460" cy="21515024"/>
           </a:xfrm>
         </p:spPr>
         <p:txBody>
           <a:bodyPr/>
           <a:lstStyle>
             <a:lvl1pPr>
-              <a:defRPr sz="934"/>
+              <a:defRPr sz="7483"/>
             </a:lvl1pPr>
             <a:lvl2pPr>
-              <a:defRPr sz="818"/>
+              <a:defRPr sz="6548"/>
             </a:lvl2pPr>
             <a:lvl3pPr>
-              <a:defRPr sz="701"/>
+              <a:defRPr sz="5612"/>
             </a:lvl3pPr>
             <a:lvl4pPr>
-              <a:defRPr sz="584"/>
+              <a:defRPr sz="4677"/>
             </a:lvl4pPr>
             <a:lvl5pPr>
-              <a:defRPr sz="584"/>
+              <a:defRPr sz="4677"/>
             </a:lvl5pPr>
             <a:lvl6pPr>
-              <a:defRPr sz="584"/>
+              <a:defRPr sz="4677"/>
             </a:lvl6pPr>
             <a:lvl7pPr>
-              <a:defRPr sz="584"/>
+              <a:defRPr sz="4677"/>
             </a:lvl7pPr>
             <a:lvl8pPr>
-              <a:defRPr sz="584"/>
+              <a:defRPr sz="4677"/>
             </a:lvl8pPr>
             <a:lvl9pPr>
-              <a:defRPr sz="584"/>
+              <a:defRPr sz="4677"/>
             </a:lvl9pPr>
           </a:lstStyle>
           <a:p>
@@ -2469,8 +2464,8 @@
         </p:nvSpPr>
         <p:spPr>
           <a:xfrm>
-            <a:off x="520712" y="3207544"/>
-            <a:ext cx="2438192" cy="5942372"/>
+            <a:off x="1472909" y="9082564"/>
+            <a:ext cx="6896776" cy="16826573"/>
           </a:xfrm>
         </p:spPr>
         <p:txBody>
@@ -2478,39 +2473,39 @@
           <a:lstStyle>
             <a:lvl1pPr marL="0" indent="0">
               <a:buNone/>
-              <a:defRPr sz="467"/>
+              <a:defRPr sz="3742"/>
             </a:lvl1pPr>
-            <a:lvl2pPr marL="133492" indent="0">
+            <a:lvl2pPr marL="1069162" indent="0">
               <a:buNone/>
-              <a:defRPr sz="409"/>
+              <a:defRPr sz="3274"/>
             </a:lvl2pPr>
-            <a:lvl3pPr marL="266983" indent="0">
+            <a:lvl3pPr marL="2138324" indent="0">
               <a:buNone/>
-              <a:defRPr sz="350"/>
+              <a:defRPr sz="2806"/>
             </a:lvl3pPr>
-            <a:lvl4pPr marL="400475" indent="0">
+            <a:lvl4pPr marL="3207487" indent="0">
               <a:buNone/>
-              <a:defRPr sz="292"/>
+              <a:defRPr sz="2339"/>
             </a:lvl4pPr>
-            <a:lvl5pPr marL="533966" indent="0">
+            <a:lvl5pPr marL="4276649" indent="0">
               <a:buNone/>
-              <a:defRPr sz="292"/>
+              <a:defRPr sz="2339"/>
             </a:lvl5pPr>
-            <a:lvl6pPr marL="667458" indent="0">
+            <a:lvl6pPr marL="5345811" indent="0">
               <a:buNone/>
-              <a:defRPr sz="292"/>
+              <a:defRPr sz="2339"/>
             </a:lvl6pPr>
-            <a:lvl7pPr marL="800949" indent="0">
+            <a:lvl7pPr marL="6414973" indent="0">
               <a:buNone/>
-              <a:defRPr sz="292"/>
+              <a:defRPr sz="2339"/>
             </a:lvl7pPr>
-            <a:lvl8pPr marL="934441" indent="0">
+            <a:lvl8pPr marL="7484135" indent="0">
               <a:buNone/>
-              <a:defRPr sz="292"/>
+              <a:defRPr sz="2339"/>
             </a:lvl8pPr>
-            <a:lvl9pPr marL="1067932" indent="0">
+            <a:lvl9pPr marL="8553298" indent="0">
               <a:buNone/>
-              <a:defRPr sz="292"/>
+              <a:defRPr sz="2339"/>
             </a:lvl9pPr>
           </a:lstStyle>
           <a:p>
@@ -2539,7 +2534,7 @@
           <a:p>
             <a:fld id="{E6031A69-130F-4AFA-87E1-41757229F71B}" type="datetimeFigureOut">
               <a:rPr lang="ko-KR" altLang="en-US" smtClean="0"/>
-              <a:t>2026-05-26</a:t>
+              <a:t>2026-05-28</a:t>
             </a:fld>
             <a:endParaRPr lang="ko-KR" altLang="en-US"/>
           </a:p>
@@ -2629,15 +2624,15 @@
         </p:nvSpPr>
         <p:spPr>
           <a:xfrm>
-            <a:off x="520712" y="712788"/>
-            <a:ext cx="2438192" cy="2494756"/>
+            <a:off x="1472909" y="2018348"/>
+            <a:ext cx="6896776" cy="7064216"/>
           </a:xfrm>
         </p:spPr>
         <p:txBody>
           <a:bodyPr anchor="b"/>
           <a:lstStyle>
             <a:lvl1pPr>
-              <a:defRPr sz="934"/>
+              <a:defRPr sz="7483"/>
             </a:lvl1pPr>
           </a:lstStyle>
           <a:p>
@@ -2661,8 +2656,8 @@
         </p:nvSpPr>
         <p:spPr>
           <a:xfrm>
-            <a:off x="3213848" y="1539426"/>
-            <a:ext cx="3827085" cy="7598117"/>
+            <a:off x="9090826" y="4359077"/>
+            <a:ext cx="10825460" cy="21515024"/>
           </a:xfrm>
         </p:spPr>
         <p:txBody>
@@ -2670,39 +2665,39 @@
           <a:lstStyle>
             <a:lvl1pPr marL="0" indent="0">
               <a:buNone/>
-              <a:defRPr sz="934"/>
+              <a:defRPr sz="7483"/>
             </a:lvl1pPr>
-            <a:lvl2pPr marL="133492" indent="0">
+            <a:lvl2pPr marL="1069162" indent="0">
               <a:buNone/>
-              <a:defRPr sz="818"/>
+              <a:defRPr sz="6548"/>
             </a:lvl2pPr>
-            <a:lvl3pPr marL="266983" indent="0">
+            <a:lvl3pPr marL="2138324" indent="0">
               <a:buNone/>
-              <a:defRPr sz="701"/>
+              <a:defRPr sz="5612"/>
             </a:lvl3pPr>
-            <a:lvl4pPr marL="400475" indent="0">
+            <a:lvl4pPr marL="3207487" indent="0">
               <a:buNone/>
-              <a:defRPr sz="584"/>
+              <a:defRPr sz="4677"/>
             </a:lvl4pPr>
-            <a:lvl5pPr marL="533966" indent="0">
+            <a:lvl5pPr marL="4276649" indent="0">
               <a:buNone/>
-              <a:defRPr sz="584"/>
+              <a:defRPr sz="4677"/>
             </a:lvl5pPr>
-            <a:lvl6pPr marL="667458" indent="0">
+            <a:lvl6pPr marL="5345811" indent="0">
               <a:buNone/>
-              <a:defRPr sz="584"/>
+              <a:defRPr sz="4677"/>
             </a:lvl6pPr>
-            <a:lvl7pPr marL="800949" indent="0">
+            <a:lvl7pPr marL="6414973" indent="0">
               <a:buNone/>
-              <a:defRPr sz="584"/>
+              <a:defRPr sz="4677"/>
             </a:lvl7pPr>
-            <a:lvl8pPr marL="934441" indent="0">
+            <a:lvl8pPr marL="7484135" indent="0">
               <a:buNone/>
-              <a:defRPr sz="584"/>
+              <a:defRPr sz="4677"/>
             </a:lvl8pPr>
-            <a:lvl9pPr marL="1067932" indent="0">
+            <a:lvl9pPr marL="8553298" indent="0">
               <a:buNone/>
-              <a:defRPr sz="584"/>
+              <a:defRPr sz="4677"/>
             </a:lvl9pPr>
           </a:lstStyle>
           <a:p>
@@ -2726,8 +2721,8 @@
         </p:nvSpPr>
         <p:spPr>
           <a:xfrm>
-            <a:off x="520712" y="3207544"/>
-            <a:ext cx="2438192" cy="5942372"/>
+            <a:off x="1472909" y="9082564"/>
+            <a:ext cx="6896776" cy="16826573"/>
           </a:xfrm>
         </p:spPr>
         <p:txBody>
@@ -2735,39 +2730,39 @@
           <a:lstStyle>
             <a:lvl1pPr marL="0" indent="0">
               <a:buNone/>
-              <a:defRPr sz="467"/>
+              <a:defRPr sz="3742"/>
             </a:lvl1pPr>
-            <a:lvl2pPr marL="133492" indent="0">
+            <a:lvl2pPr marL="1069162" indent="0">
               <a:buNone/>
-              <a:defRPr sz="409"/>
+              <a:defRPr sz="3274"/>
             </a:lvl2pPr>
-            <a:lvl3pPr marL="266983" indent="0">
+            <a:lvl3pPr marL="2138324" indent="0">
               <a:buNone/>
-              <a:defRPr sz="350"/>
+              <a:defRPr sz="2806"/>
             </a:lvl3pPr>
-            <a:lvl4pPr marL="400475" indent="0">
+            <a:lvl4pPr marL="3207487" indent="0">
               <a:buNone/>
-              <a:defRPr sz="292"/>
+              <a:defRPr sz="2339"/>
             </a:lvl4pPr>
-            <a:lvl5pPr marL="533966" indent="0">
+            <a:lvl5pPr marL="4276649" indent="0">
               <a:buNone/>
-              <a:defRPr sz="292"/>
+              <a:defRPr sz="2339"/>
             </a:lvl5pPr>
-            <a:lvl6pPr marL="667458" indent="0">
+            <a:lvl6pPr marL="5345811" indent="0">
               <a:buNone/>
-              <a:defRPr sz="292"/>
+              <a:defRPr sz="2339"/>
             </a:lvl6pPr>
-            <a:lvl7pPr marL="800949" indent="0">
+            <a:lvl7pPr marL="6414973" indent="0">
               <a:buNone/>
-              <a:defRPr sz="292"/>
+              <a:defRPr sz="2339"/>
             </a:lvl7pPr>
-            <a:lvl8pPr marL="934441" indent="0">
+            <a:lvl8pPr marL="7484135" indent="0">
               <a:buNone/>
-              <a:defRPr sz="292"/>
+              <a:defRPr sz="2339"/>
             </a:lvl8pPr>
-            <a:lvl9pPr marL="1067932" indent="0">
+            <a:lvl9pPr marL="8553298" indent="0">
               <a:buNone/>
-              <a:defRPr sz="292"/>
+              <a:defRPr sz="2339"/>
             </a:lvl9pPr>
           </a:lstStyle>
           <a:p>
@@ -2796,7 +2791,7 @@
           <a:p>
             <a:fld id="{E6031A69-130F-4AFA-87E1-41757229F71B}" type="datetimeFigureOut">
               <a:rPr lang="ko-KR" altLang="en-US" smtClean="0"/>
-              <a:t>2026-05-26</a:t>
+              <a:t>2026-05-28</a:t>
             </a:fld>
             <a:endParaRPr lang="ko-KR" altLang="en-US"/>
           </a:p>
@@ -2891,8 +2886,8 @@
         </p:nvSpPr>
         <p:spPr>
           <a:xfrm>
-            <a:off x="519728" y="569243"/>
-            <a:ext cx="6520220" cy="2066589"/>
+            <a:off x="1470124" y="1611882"/>
+            <a:ext cx="18443377" cy="5851808"/>
           </a:xfrm>
           <a:prstGeom prst="rect">
             <a:avLst/>
@@ -2924,8 +2919,8 @@
         </p:nvSpPr>
         <p:spPr>
           <a:xfrm>
-            <a:off x="519728" y="2846201"/>
-            <a:ext cx="6520220" cy="6783857"/>
+            <a:off x="1470124" y="8059374"/>
+            <a:ext cx="18443377" cy="19209345"/>
           </a:xfrm>
           <a:prstGeom prst="rect">
             <a:avLst/>
@@ -2986,8 +2981,8 @@
         </p:nvSpPr>
         <p:spPr>
           <a:xfrm>
-            <a:off x="519729" y="9909730"/>
-            <a:ext cx="1700927" cy="569240"/>
+            <a:off x="1470124" y="28060644"/>
+            <a:ext cx="4811316" cy="1611875"/>
           </a:xfrm>
           <a:prstGeom prst="rect">
             <a:avLst/>
@@ -2997,7 +2992,7 @@
           <a:bodyPr vert="horz" lIns="91440" tIns="45720" rIns="91440" bIns="45720" rtlCol="0" anchor="ctr"/>
           <a:lstStyle>
             <a:lvl1pPr algn="l">
-              <a:defRPr sz="350">
+              <a:defRPr sz="2806">
                 <a:solidFill>
                   <a:schemeClr val="tx1">
                     <a:tint val="82000"/>
@@ -3009,7 +3004,7 @@
           <a:p>
             <a:fld id="{E6031A69-130F-4AFA-87E1-41757229F71B}" type="datetimeFigureOut">
               <a:rPr lang="ko-KR" altLang="en-US" smtClean="0"/>
-              <a:t>2026-05-26</a:t>
+              <a:t>2026-05-28</a:t>
             </a:fld>
             <a:endParaRPr lang="ko-KR" altLang="en-US"/>
           </a:p>
@@ -3027,8 +3022,8 @@
         </p:nvSpPr>
         <p:spPr>
           <a:xfrm>
-            <a:off x="2504143" y="9909730"/>
-            <a:ext cx="2551390" cy="569240"/>
+            <a:off x="7083326" y="28060644"/>
+            <a:ext cx="7216973" cy="1611875"/>
           </a:xfrm>
           <a:prstGeom prst="rect">
             <a:avLst/>
@@ -3038,7 +3033,7 @@
           <a:bodyPr vert="horz" lIns="91440" tIns="45720" rIns="91440" bIns="45720" rtlCol="0" anchor="ctr"/>
           <a:lstStyle>
             <a:lvl1pPr algn="ctr">
-              <a:defRPr sz="350">
+              <a:defRPr sz="2806">
                 <a:solidFill>
                   <a:schemeClr val="tx1">
                     <a:tint val="82000"/>
@@ -3064,8 +3059,8 @@
         </p:nvSpPr>
         <p:spPr>
           <a:xfrm>
-            <a:off x="5339021" y="9909730"/>
-            <a:ext cx="1700927" cy="569240"/>
+            <a:off x="15102185" y="28060644"/>
+            <a:ext cx="4811316" cy="1611875"/>
           </a:xfrm>
           <a:prstGeom prst="rect">
             <a:avLst/>
@@ -3075,7 +3070,7 @@
           <a:bodyPr vert="horz" lIns="91440" tIns="45720" rIns="91440" bIns="45720" rtlCol="0" anchor="ctr"/>
           <a:lstStyle>
             <a:lvl1pPr algn="r">
-              <a:defRPr sz="350">
+              <a:defRPr sz="2806">
                 <a:solidFill>
                   <a:schemeClr val="tx1">
                     <a:tint val="82000"/>
@@ -3116,7 +3111,7 @@
   </p:sldLayoutIdLst>
   <p:txStyles>
     <p:titleStyle>
-      <a:lvl1pPr algn="l" defTabSz="266983" rtl="0" eaLnBrk="1" latinLnBrk="1" hangingPunct="1">
+      <a:lvl1pPr algn="l" defTabSz="2138324" rtl="0" eaLnBrk="1" latinLnBrk="1" hangingPunct="1">
         <a:lnSpc>
           <a:spcPct val="90000"/>
         </a:lnSpc>
@@ -3124,7 +3119,7 @@
           <a:spcPct val="0"/>
         </a:spcBef>
         <a:buNone/>
-        <a:defRPr sz="1285" kern="1200">
+        <a:defRPr sz="10289" kern="1200">
           <a:solidFill>
             <a:schemeClr val="tx1"/>
           </a:solidFill>
@@ -3135,16 +3130,16 @@
       </a:lvl1pPr>
     </p:titleStyle>
     <p:bodyStyle>
-      <a:lvl1pPr marL="66746" indent="-66746" algn="l" defTabSz="266983" rtl="0" eaLnBrk="1" latinLnBrk="1" hangingPunct="1">
+      <a:lvl1pPr marL="534581" indent="-534581" algn="l" defTabSz="2138324" rtl="0" eaLnBrk="1" latinLnBrk="1" hangingPunct="1">
         <a:lnSpc>
           <a:spcPct val="90000"/>
         </a:lnSpc>
         <a:spcBef>
-          <a:spcPts val="292"/>
+          <a:spcPts val="2339"/>
         </a:spcBef>
         <a:buFont typeface="Arial" panose="020B0604020202020204" pitchFamily="34" charset="0"/>
         <a:buChar char="•"/>
-        <a:defRPr sz="818" kern="1200">
+        <a:defRPr sz="6548" kern="1200">
           <a:solidFill>
             <a:schemeClr val="tx1"/>
           </a:solidFill>
@@ -3153,16 +3148,16 @@
           <a:cs typeface="+mn-cs"/>
         </a:defRPr>
       </a:lvl1pPr>
-      <a:lvl2pPr marL="200237" indent="-66746" algn="l" defTabSz="266983" rtl="0" eaLnBrk="1" latinLnBrk="1" hangingPunct="1">
+      <a:lvl2pPr marL="1603743" indent="-534581" algn="l" defTabSz="2138324" rtl="0" eaLnBrk="1" latinLnBrk="1" hangingPunct="1">
         <a:lnSpc>
           <a:spcPct val="90000"/>
         </a:lnSpc>
         <a:spcBef>
-          <a:spcPts val="146"/>
+          <a:spcPts val="1169"/>
         </a:spcBef>
         <a:buFont typeface="Arial" panose="020B0604020202020204" pitchFamily="34" charset="0"/>
         <a:buChar char="•"/>
-        <a:defRPr sz="701" kern="1200">
+        <a:defRPr sz="5612" kern="1200">
           <a:solidFill>
             <a:schemeClr val="tx1"/>
           </a:solidFill>
@@ -3171,16 +3166,16 @@
           <a:cs typeface="+mn-cs"/>
         </a:defRPr>
       </a:lvl2pPr>
-      <a:lvl3pPr marL="333729" indent="-66746" algn="l" defTabSz="266983" rtl="0" eaLnBrk="1" latinLnBrk="1" hangingPunct="1">
+      <a:lvl3pPr marL="2672906" indent="-534581" algn="l" defTabSz="2138324" rtl="0" eaLnBrk="1" latinLnBrk="1" hangingPunct="1">
         <a:lnSpc>
           <a:spcPct val="90000"/>
         </a:lnSpc>
         <a:spcBef>
-          <a:spcPts val="146"/>
+          <a:spcPts val="1169"/>
         </a:spcBef>
         <a:buFont typeface="Arial" panose="020B0604020202020204" pitchFamily="34" charset="0"/>
         <a:buChar char="•"/>
-        <a:defRPr sz="584" kern="1200">
+        <a:defRPr sz="4677" kern="1200">
           <a:solidFill>
             <a:schemeClr val="tx1"/>
           </a:solidFill>
@@ -3189,16 +3184,16 @@
           <a:cs typeface="+mn-cs"/>
         </a:defRPr>
       </a:lvl3pPr>
-      <a:lvl4pPr marL="467220" indent="-66746" algn="l" defTabSz="266983" rtl="0" eaLnBrk="1" latinLnBrk="1" hangingPunct="1">
+      <a:lvl4pPr marL="3742068" indent="-534581" algn="l" defTabSz="2138324" rtl="0" eaLnBrk="1" latinLnBrk="1" hangingPunct="1">
         <a:lnSpc>
           <a:spcPct val="90000"/>
         </a:lnSpc>
         <a:spcBef>
-          <a:spcPts val="146"/>
+          <a:spcPts val="1169"/>
         </a:spcBef>
         <a:buFont typeface="Arial" panose="020B0604020202020204" pitchFamily="34" charset="0"/>
         <a:buChar char="•"/>
-        <a:defRPr sz="526" kern="1200">
+        <a:defRPr sz="4209" kern="1200">
           <a:solidFill>
             <a:schemeClr val="tx1"/>
           </a:solidFill>
@@ -3207,16 +3202,16 @@
           <a:cs typeface="+mn-cs"/>
         </a:defRPr>
       </a:lvl4pPr>
-      <a:lvl5pPr marL="600712" indent="-66746" algn="l" defTabSz="266983" rtl="0" eaLnBrk="1" latinLnBrk="1" hangingPunct="1">
+      <a:lvl5pPr marL="4811230" indent="-534581" algn="l" defTabSz="2138324" rtl="0" eaLnBrk="1" latinLnBrk="1" hangingPunct="1">
         <a:lnSpc>
           <a:spcPct val="90000"/>
         </a:lnSpc>
         <a:spcBef>
-          <a:spcPts val="146"/>
+          <a:spcPts val="1169"/>
         </a:spcBef>
         <a:buFont typeface="Arial" panose="020B0604020202020204" pitchFamily="34" charset="0"/>
         <a:buChar char="•"/>
-        <a:defRPr sz="526" kern="1200">
+        <a:defRPr sz="4209" kern="1200">
           <a:solidFill>
             <a:schemeClr val="tx1"/>
           </a:solidFill>
@@ -3225,16 +3220,16 @@
           <a:cs typeface="+mn-cs"/>
         </a:defRPr>
       </a:lvl5pPr>
-      <a:lvl6pPr marL="734204" indent="-66746" algn="l" defTabSz="266983" rtl="0" eaLnBrk="1" latinLnBrk="1" hangingPunct="1">
+      <a:lvl6pPr marL="5880392" indent="-534581" algn="l" defTabSz="2138324" rtl="0" eaLnBrk="1" latinLnBrk="1" hangingPunct="1">
         <a:lnSpc>
           <a:spcPct val="90000"/>
         </a:lnSpc>
         <a:spcBef>
-          <a:spcPts val="146"/>
+          <a:spcPts val="1169"/>
         </a:spcBef>
         <a:buFont typeface="Arial" panose="020B0604020202020204" pitchFamily="34" charset="0"/>
         <a:buChar char="•"/>
-        <a:defRPr sz="526" kern="1200">
+        <a:defRPr sz="4209" kern="1200">
           <a:solidFill>
             <a:schemeClr val="tx1"/>
           </a:solidFill>
@@ -3243,16 +3238,16 @@
           <a:cs typeface="+mn-cs"/>
         </a:defRPr>
       </a:lvl6pPr>
-      <a:lvl7pPr marL="867695" indent="-66746" algn="l" defTabSz="266983" rtl="0" eaLnBrk="1" latinLnBrk="1" hangingPunct="1">
+      <a:lvl7pPr marL="6949554" indent="-534581" algn="l" defTabSz="2138324" rtl="0" eaLnBrk="1" latinLnBrk="1" hangingPunct="1">
         <a:lnSpc>
           <a:spcPct val="90000"/>
         </a:lnSpc>
         <a:spcBef>
-          <a:spcPts val="146"/>
+          <a:spcPts val="1169"/>
         </a:spcBef>
         <a:buFont typeface="Arial" panose="020B0604020202020204" pitchFamily="34" charset="0"/>
         <a:buChar char="•"/>
-        <a:defRPr sz="526" kern="1200">
+        <a:defRPr sz="4209" kern="1200">
           <a:solidFill>
             <a:schemeClr val="tx1"/>
           </a:solidFill>
@@ -3261,16 +3256,16 @@
           <a:cs typeface="+mn-cs"/>
         </a:defRPr>
       </a:lvl7pPr>
-      <a:lvl8pPr marL="1001186" indent="-66746" algn="l" defTabSz="266983" rtl="0" eaLnBrk="1" latinLnBrk="1" hangingPunct="1">
+      <a:lvl8pPr marL="8018717" indent="-534581" algn="l" defTabSz="2138324" rtl="0" eaLnBrk="1" latinLnBrk="1" hangingPunct="1">
         <a:lnSpc>
           <a:spcPct val="90000"/>
         </a:lnSpc>
         <a:spcBef>
-          <a:spcPts val="146"/>
+          <a:spcPts val="1169"/>
         </a:spcBef>
         <a:buFont typeface="Arial" panose="020B0604020202020204" pitchFamily="34" charset="0"/>
         <a:buChar char="•"/>
-        <a:defRPr sz="526" kern="1200">
+        <a:defRPr sz="4209" kern="1200">
           <a:solidFill>
             <a:schemeClr val="tx1"/>
           </a:solidFill>
@@ -3279,16 +3274,16 @@
           <a:cs typeface="+mn-cs"/>
         </a:defRPr>
       </a:lvl8pPr>
-      <a:lvl9pPr marL="1134678" indent="-66746" algn="l" defTabSz="266983" rtl="0" eaLnBrk="1" latinLnBrk="1" hangingPunct="1">
+      <a:lvl9pPr marL="9087879" indent="-534581" algn="l" defTabSz="2138324" rtl="0" eaLnBrk="1" latinLnBrk="1" hangingPunct="1">
         <a:lnSpc>
           <a:spcPct val="90000"/>
         </a:lnSpc>
         <a:spcBef>
-          <a:spcPts val="146"/>
+          <a:spcPts val="1169"/>
         </a:spcBef>
         <a:buFont typeface="Arial" panose="020B0604020202020204" pitchFamily="34" charset="0"/>
         <a:buChar char="•"/>
-        <a:defRPr sz="526" kern="1200">
+        <a:defRPr sz="4209" kern="1200">
           <a:solidFill>
             <a:schemeClr val="tx1"/>
           </a:solidFill>
@@ -3302,8 +3297,8 @@
       <a:defPPr>
         <a:defRPr lang="en-US"/>
       </a:defPPr>
-      <a:lvl1pPr marL="0" algn="l" defTabSz="266983" rtl="0" eaLnBrk="1" latinLnBrk="1" hangingPunct="1">
-        <a:defRPr sz="526" kern="1200">
+      <a:lvl1pPr marL="0" algn="l" defTabSz="2138324" rtl="0" eaLnBrk="1" latinLnBrk="1" hangingPunct="1">
+        <a:defRPr sz="4209" kern="1200">
           <a:solidFill>
             <a:schemeClr val="tx1"/>
           </a:solidFill>
@@ -3312,8 +3307,8 @@
           <a:cs typeface="+mn-cs"/>
         </a:defRPr>
       </a:lvl1pPr>
-      <a:lvl2pPr marL="133492" algn="l" defTabSz="266983" rtl="0" eaLnBrk="1" latinLnBrk="1" hangingPunct="1">
-        <a:defRPr sz="526" kern="1200">
+      <a:lvl2pPr marL="1069162" algn="l" defTabSz="2138324" rtl="0" eaLnBrk="1" latinLnBrk="1" hangingPunct="1">
+        <a:defRPr sz="4209" kern="1200">
           <a:solidFill>
             <a:schemeClr val="tx1"/>
           </a:solidFill>
@@ -3322,8 +3317,8 @@
           <a:cs typeface="+mn-cs"/>
         </a:defRPr>
       </a:lvl2pPr>
-      <a:lvl3pPr marL="266983" algn="l" defTabSz="266983" rtl="0" eaLnBrk="1" latinLnBrk="1" hangingPunct="1">
-        <a:defRPr sz="526" kern="1200">
+      <a:lvl3pPr marL="2138324" algn="l" defTabSz="2138324" rtl="0" eaLnBrk="1" latinLnBrk="1" hangingPunct="1">
+        <a:defRPr sz="4209" kern="1200">
           <a:solidFill>
             <a:schemeClr val="tx1"/>
           </a:solidFill>
@@ -3332,8 +3327,8 @@
           <a:cs typeface="+mn-cs"/>
         </a:defRPr>
       </a:lvl3pPr>
-      <a:lvl4pPr marL="400475" algn="l" defTabSz="266983" rtl="0" eaLnBrk="1" latinLnBrk="1" hangingPunct="1">
-        <a:defRPr sz="526" kern="1200">
+      <a:lvl4pPr marL="3207487" algn="l" defTabSz="2138324" rtl="0" eaLnBrk="1" latinLnBrk="1" hangingPunct="1">
+        <a:defRPr sz="4209" kern="1200">
           <a:solidFill>
             <a:schemeClr val="tx1"/>
           </a:solidFill>
@@ -3342,8 +3337,8 @@
           <a:cs typeface="+mn-cs"/>
         </a:defRPr>
       </a:lvl4pPr>
-      <a:lvl5pPr marL="533966" algn="l" defTabSz="266983" rtl="0" eaLnBrk="1" latinLnBrk="1" hangingPunct="1">
-        <a:defRPr sz="526" kern="1200">
+      <a:lvl5pPr marL="4276649" algn="l" defTabSz="2138324" rtl="0" eaLnBrk="1" latinLnBrk="1" hangingPunct="1">
+        <a:defRPr sz="4209" kern="1200">
           <a:solidFill>
             <a:schemeClr val="tx1"/>
           </a:solidFill>
@@ -3352,8 +3347,8 @@
           <a:cs typeface="+mn-cs"/>
         </a:defRPr>
       </a:lvl5pPr>
-      <a:lvl6pPr marL="667458" algn="l" defTabSz="266983" rtl="0" eaLnBrk="1" latinLnBrk="1" hangingPunct="1">
-        <a:defRPr sz="526" kern="1200">
+      <a:lvl6pPr marL="5345811" algn="l" defTabSz="2138324" rtl="0" eaLnBrk="1" latinLnBrk="1" hangingPunct="1">
+        <a:defRPr sz="4209" kern="1200">
           <a:solidFill>
             <a:schemeClr val="tx1"/>
           </a:solidFill>
@@ -3362,8 +3357,8 @@
           <a:cs typeface="+mn-cs"/>
         </a:defRPr>
       </a:lvl6pPr>
-      <a:lvl7pPr marL="800949" algn="l" defTabSz="266983" rtl="0" eaLnBrk="1" latinLnBrk="1" hangingPunct="1">
-        <a:defRPr sz="526" kern="1200">
+      <a:lvl7pPr marL="6414973" algn="l" defTabSz="2138324" rtl="0" eaLnBrk="1" latinLnBrk="1" hangingPunct="1">
+        <a:defRPr sz="4209" kern="1200">
           <a:solidFill>
             <a:schemeClr val="tx1"/>
           </a:solidFill>
@@ -3372,8 +3367,8 @@
           <a:cs typeface="+mn-cs"/>
         </a:defRPr>
       </a:lvl7pPr>
-      <a:lvl8pPr marL="934441" algn="l" defTabSz="266983" rtl="0" eaLnBrk="1" latinLnBrk="1" hangingPunct="1">
-        <a:defRPr sz="526" kern="1200">
+      <a:lvl8pPr marL="7484135" algn="l" defTabSz="2138324" rtl="0" eaLnBrk="1" latinLnBrk="1" hangingPunct="1">
+        <a:defRPr sz="4209" kern="1200">
           <a:solidFill>
             <a:schemeClr val="tx1"/>
           </a:solidFill>
@@ -3382,8 +3377,8 @@
           <a:cs typeface="+mn-cs"/>
         </a:defRPr>
       </a:lvl8pPr>
-      <a:lvl9pPr marL="1067932" algn="l" defTabSz="266983" rtl="0" eaLnBrk="1" latinLnBrk="1" hangingPunct="1">
-        <a:defRPr sz="526" kern="1200">
+      <a:lvl9pPr marL="8553298" algn="l" defTabSz="2138324" rtl="0" eaLnBrk="1" latinLnBrk="1" hangingPunct="1">
+        <a:defRPr sz="4209" kern="1200">
           <a:solidFill>
             <a:schemeClr val="tx1"/>
           </a:solidFill>
@@ -3414,1493 +3409,6 @@
           <a:chExt cx="0" cy="0"/>
         </a:xfrm>
       </p:grpSpPr>
-      <p:pic>
-        <p:nvPicPr>
-          <p:cNvPr id="70" name="그림 69">
-            <a:extLst>
-              <a:ext uri="{FF2B5EF4-FFF2-40B4-BE49-F238E27FC236}">
-                <a16:creationId xmlns:a16="http://schemas.microsoft.com/office/drawing/2014/main" id="{960D056F-BB26-F74E-8730-70D872199D00}"/>
-              </a:ext>
-            </a:extLst>
-          </p:cNvPr>
-          <p:cNvPicPr>
-            <a:picLocks noChangeAspect="1"/>
-          </p:cNvPicPr>
-          <p:nvPr/>
-        </p:nvPicPr>
-        <p:blipFill>
-          <a:blip r:embed="rId3"/>
-          <a:stretch>
-            <a:fillRect/>
-          </a:stretch>
-        </p:blipFill>
-        <p:spPr>
-          <a:xfrm>
-            <a:off x="3798864" y="4561456"/>
-            <a:ext cx="1235122" cy="633601"/>
-          </a:xfrm>
-          <a:prstGeom prst="rect">
-            <a:avLst/>
-          </a:prstGeom>
-        </p:spPr>
-      </p:pic>
-      <p:sp>
-        <p:nvSpPr>
-          <p:cNvPr id="4" name="TextBox 3">
-            <a:extLst>
-              <a:ext uri="{FF2B5EF4-FFF2-40B4-BE49-F238E27FC236}">
-                <a16:creationId xmlns:a16="http://schemas.microsoft.com/office/drawing/2014/main" id="{F837C99B-9CE4-13DD-7E3A-61A600B1E6F9}"/>
-              </a:ext>
-            </a:extLst>
-          </p:cNvPr>
-          <p:cNvSpPr txBox="1"/>
-          <p:nvPr/>
-        </p:nvSpPr>
-        <p:spPr>
-          <a:xfrm>
-            <a:off x="2510208" y="3514351"/>
-            <a:ext cx="2539259" cy="207621"/>
-          </a:xfrm>
-          <a:prstGeom prst="rect">
-            <a:avLst/>
-          </a:prstGeom>
-          <a:noFill/>
-        </p:spPr>
-        <p:txBody>
-          <a:bodyPr wrap="square" rtlCol="0">
-            <a:spAutoFit/>
-          </a:bodyPr>
-          <a:lstStyle/>
-          <a:p>
-            <a:pPr algn="ctr"/>
-            <a:r>
-              <a:rPr lang="en-US" altLang="ko-KR" sz="749" b="1" dirty="0"/>
-              <a:t>BEHAVIOR-1K </a:t>
-            </a:r>
-            <a:r>
-              <a:rPr lang="ko-KR" altLang="en-US" sz="749" b="1" dirty="0"/>
-              <a:t>기반 양팔 로봇 정책 학습</a:t>
-            </a:r>
-            <a:endParaRPr lang="ko-KR" altLang="en-US" sz="674" b="1" dirty="0"/>
-          </a:p>
-        </p:txBody>
-      </p:sp>
-      <p:sp>
-        <p:nvSpPr>
-          <p:cNvPr id="5" name="TextBox 4">
-            <a:extLst>
-              <a:ext uri="{FF2B5EF4-FFF2-40B4-BE49-F238E27FC236}">
-                <a16:creationId xmlns:a16="http://schemas.microsoft.com/office/drawing/2014/main" id="{3EA791E0-6CF5-D63E-BD9E-794012C4381A}"/>
-              </a:ext>
-            </a:extLst>
-          </p:cNvPr>
-          <p:cNvSpPr txBox="1"/>
-          <p:nvPr/>
-        </p:nvSpPr>
-        <p:spPr>
-          <a:xfrm>
-            <a:off x="2508959" y="3676631"/>
-            <a:ext cx="1270878" cy="184538"/>
-          </a:xfrm>
-          <a:prstGeom prst="rect">
-            <a:avLst/>
-          </a:prstGeom>
-          <a:noFill/>
-          <a:ln w="57150">
-            <a:solidFill>
-              <a:schemeClr val="accent4">
-                <a:lumMod val="50000"/>
-              </a:schemeClr>
-            </a:solidFill>
-          </a:ln>
-        </p:spPr>
-        <p:txBody>
-          <a:bodyPr wrap="square" rtlCol="0">
-            <a:spAutoFit/>
-          </a:bodyPr>
-          <a:lstStyle/>
-          <a:p>
-            <a:pPr algn="ctr"/>
-            <a:r>
-              <a:rPr lang="ko-KR" altLang="en-US" sz="599" b="1" dirty="0">
-                <a:latin typeface="+mn-ea"/>
-              </a:rPr>
-              <a:t>지도 교수님</a:t>
-            </a:r>
-            <a:r>
-              <a:rPr lang="en-US" altLang="ko-KR" sz="599" b="1" dirty="0">
-                <a:latin typeface="+mn-ea"/>
-              </a:rPr>
-              <a:t>: </a:t>
-            </a:r>
-            <a:r>
-              <a:rPr lang="ko-KR" altLang="en-US" sz="599" b="1" dirty="0" err="1">
-                <a:latin typeface="+mn-ea"/>
-              </a:rPr>
-              <a:t>하종은</a:t>
-            </a:r>
-            <a:r>
-              <a:rPr lang="ko-KR" altLang="en-US" sz="599" b="1" dirty="0">
-                <a:latin typeface="+mn-ea"/>
-              </a:rPr>
-              <a:t> 교수님</a:t>
-            </a:r>
-          </a:p>
-        </p:txBody>
-      </p:sp>
-      <p:sp>
-        <p:nvSpPr>
-          <p:cNvPr id="6" name="TextBox 5">
-            <a:extLst>
-              <a:ext uri="{FF2B5EF4-FFF2-40B4-BE49-F238E27FC236}">
-                <a16:creationId xmlns:a16="http://schemas.microsoft.com/office/drawing/2014/main" id="{28CC29D6-F5C9-1FEE-2470-ECFA1AD996C6}"/>
-              </a:ext>
-            </a:extLst>
-          </p:cNvPr>
-          <p:cNvSpPr txBox="1"/>
-          <p:nvPr/>
-        </p:nvSpPr>
-        <p:spPr>
-          <a:xfrm>
-            <a:off x="3779837" y="3676631"/>
-            <a:ext cx="1270456" cy="184538"/>
-          </a:xfrm>
-          <a:prstGeom prst="rect">
-            <a:avLst/>
-          </a:prstGeom>
-          <a:noFill/>
-          <a:ln w="57150">
-            <a:solidFill>
-              <a:schemeClr val="accent4">
-                <a:lumMod val="50000"/>
-              </a:schemeClr>
-            </a:solidFill>
-          </a:ln>
-        </p:spPr>
-        <p:txBody>
-          <a:bodyPr wrap="square" rtlCol="0">
-            <a:spAutoFit/>
-          </a:bodyPr>
-          <a:lstStyle/>
-          <a:p>
-            <a:pPr algn="ctr"/>
-            <a:r>
-              <a:rPr lang="ko-KR" altLang="en-US" sz="599" b="1" dirty="0">
-                <a:latin typeface="+mn-ea"/>
-              </a:rPr>
-              <a:t>조원</a:t>
-            </a:r>
-            <a:r>
-              <a:rPr lang="en-US" altLang="ko-KR" sz="599" b="1" dirty="0">
-                <a:latin typeface="+mn-ea"/>
-              </a:rPr>
-              <a:t>: </a:t>
-            </a:r>
-            <a:r>
-              <a:rPr lang="ko-KR" altLang="en-US" sz="599" b="1" dirty="0">
-                <a:latin typeface="+mn-ea"/>
-              </a:rPr>
-              <a:t>강지호</a:t>
-            </a:r>
-            <a:r>
-              <a:rPr lang="en-US" altLang="ko-KR" sz="599" b="1" dirty="0">
-                <a:latin typeface="+mn-ea"/>
-              </a:rPr>
-              <a:t>, </a:t>
-            </a:r>
-            <a:r>
-              <a:rPr lang="ko-KR" altLang="en-US" sz="599" b="1" dirty="0" err="1">
-                <a:latin typeface="+mn-ea"/>
-              </a:rPr>
-              <a:t>문병선</a:t>
-            </a:r>
-            <a:endParaRPr lang="ko-KR" altLang="en-US" sz="599" b="1" dirty="0">
-              <a:latin typeface="+mn-ea"/>
-            </a:endParaRPr>
-          </a:p>
-        </p:txBody>
-      </p:sp>
-      <p:sp>
-        <p:nvSpPr>
-          <p:cNvPr id="7" name="TextBox 6">
-            <a:extLst>
-              <a:ext uri="{FF2B5EF4-FFF2-40B4-BE49-F238E27FC236}">
-                <a16:creationId xmlns:a16="http://schemas.microsoft.com/office/drawing/2014/main" id="{ACF21E68-84F7-27E5-88B3-AD831848791A}"/>
-              </a:ext>
-            </a:extLst>
-          </p:cNvPr>
-          <p:cNvSpPr txBox="1"/>
-          <p:nvPr/>
-        </p:nvSpPr>
-        <p:spPr>
-          <a:xfrm>
-            <a:off x="2509170" y="3780380"/>
-            <a:ext cx="1270667" cy="573106"/>
-          </a:xfrm>
-          <a:prstGeom prst="rect">
-            <a:avLst/>
-          </a:prstGeom>
-          <a:noFill/>
-          <a:ln w="57150">
-            <a:solidFill>
-              <a:schemeClr val="accent4">
-                <a:lumMod val="50000"/>
-              </a:schemeClr>
-            </a:solidFill>
-          </a:ln>
-        </p:spPr>
-        <p:txBody>
-          <a:bodyPr wrap="square" rtlCol="0">
-            <a:spAutoFit/>
-          </a:bodyPr>
-          <a:lstStyle/>
-          <a:p>
-            <a:pPr algn="ctr"/>
-            <a:endParaRPr lang="en-US" altLang="ko-KR" sz="674" b="1" dirty="0">
-              <a:latin typeface="+mn-ea"/>
-            </a:endParaRPr>
-          </a:p>
-          <a:p>
-            <a:pPr marL="42813" indent="-42813" algn="ctr">
-              <a:buFont typeface="Arial" panose="020B0604020202020204" pitchFamily="34" charset="0"/>
-              <a:buChar char="•"/>
-            </a:pPr>
-            <a:r>
-              <a:rPr lang="en-US" altLang="ko-KR" sz="300" dirty="0">
-                <a:latin typeface="+mn-ea"/>
-              </a:rPr>
-              <a:t>BEHAVIOR-1K </a:t>
-            </a:r>
-            <a:r>
-              <a:rPr lang="ko-KR" altLang="en-US" sz="300" dirty="0">
-                <a:latin typeface="+mn-ea"/>
-              </a:rPr>
-              <a:t>환경에서 </a:t>
-            </a:r>
-            <a:r>
-              <a:rPr lang="en-US" altLang="ko-KR" sz="300" dirty="0">
-                <a:latin typeface="+mn-ea"/>
-              </a:rPr>
-              <a:t>Vision-Language-Action </a:t>
-            </a:r>
-            <a:r>
-              <a:rPr lang="ko-KR" altLang="en-US" sz="300" dirty="0">
-                <a:latin typeface="+mn-ea"/>
-              </a:rPr>
-              <a:t>기반 양팔 로봇 조작 정책을 구현하고 평가</a:t>
-            </a:r>
-            <a:endParaRPr lang="en-US" altLang="ko-KR" sz="300" dirty="0">
-              <a:latin typeface="+mn-ea"/>
-            </a:endParaRPr>
-          </a:p>
-          <a:p>
-            <a:pPr marL="35678" indent="-35678" algn="ctr">
-              <a:buFont typeface="Arial" panose="020B0604020202020204" pitchFamily="34" charset="0"/>
-              <a:buChar char="•"/>
-            </a:pPr>
-            <a:endParaRPr lang="en-US" altLang="ko-KR" sz="225" dirty="0"/>
-          </a:p>
-          <a:p>
-            <a:pPr marL="42813" indent="-42813" algn="ctr">
-              <a:buFont typeface="Arial" panose="020B0604020202020204" pitchFamily="34" charset="0"/>
-              <a:buChar char="•"/>
-            </a:pPr>
-            <a:r>
-              <a:rPr lang="ko-KR" altLang="ko-KR" sz="300" dirty="0"/>
-              <a:t>Pi0.5 기반 모델을 활용하여 장기 시퀀스 작업 수행 성능을 분석하고, </a:t>
-            </a:r>
-            <a:r>
-              <a:rPr lang="ko-KR" altLang="ko-KR" sz="300" dirty="0" err="1"/>
-              <a:t>Flow</a:t>
-            </a:r>
-            <a:r>
-              <a:rPr lang="ko-KR" altLang="ko-KR" sz="300" dirty="0"/>
-              <a:t> </a:t>
-            </a:r>
-            <a:r>
-              <a:rPr lang="ko-KR" altLang="ko-KR" sz="300" dirty="0" err="1"/>
-              <a:t>Matching</a:t>
-            </a:r>
-            <a:r>
-              <a:rPr lang="ko-KR" altLang="ko-KR" sz="300" dirty="0"/>
-              <a:t> 기반 정책 학습 구조를 적용</a:t>
-            </a:r>
-            <a:endParaRPr lang="en-US" altLang="ko-KR" sz="300" dirty="0"/>
-          </a:p>
-          <a:p>
-            <a:pPr marL="42813" indent="-42813" algn="ctr">
-              <a:buFont typeface="Arial" panose="020B0604020202020204" pitchFamily="34" charset="0"/>
-              <a:buChar char="•"/>
-            </a:pPr>
-            <a:endParaRPr lang="en-US" altLang="ko-KR" sz="225" dirty="0"/>
-          </a:p>
-          <a:p>
-            <a:pPr marL="42813" indent="-42813" algn="ctr">
-              <a:buFont typeface="Arial" panose="020B0604020202020204" pitchFamily="34" charset="0"/>
-              <a:buChar char="•"/>
-            </a:pPr>
-            <a:r>
-              <a:rPr lang="ko-KR" altLang="ko-KR" sz="300" dirty="0" err="1"/>
-              <a:t>OmniGibson</a:t>
-            </a:r>
-            <a:r>
-              <a:rPr lang="ko-KR" altLang="ko-KR" sz="300" dirty="0"/>
-              <a:t> 환경에서 다양한 작업 수행 결과를 통해 모델의 실효성 검증</a:t>
-            </a:r>
-            <a:endParaRPr lang="en-US" altLang="ko-KR" sz="300" dirty="0"/>
-          </a:p>
-          <a:p>
-            <a:pPr algn="ctr"/>
-            <a:endParaRPr lang="en-US" altLang="ko-KR" sz="200" dirty="0"/>
-          </a:p>
-        </p:txBody>
-      </p:sp>
-      <p:sp>
-        <p:nvSpPr>
-          <p:cNvPr id="8" name="TextBox 7">
-            <a:extLst>
-              <a:ext uri="{FF2B5EF4-FFF2-40B4-BE49-F238E27FC236}">
-                <a16:creationId xmlns:a16="http://schemas.microsoft.com/office/drawing/2014/main" id="{2E8A191C-5F83-480C-7015-4DA81E72DAFF}"/>
-              </a:ext>
-            </a:extLst>
-          </p:cNvPr>
-          <p:cNvSpPr txBox="1"/>
-          <p:nvPr/>
-        </p:nvSpPr>
-        <p:spPr>
-          <a:xfrm>
-            <a:off x="2511159" y="3780380"/>
-            <a:ext cx="501770" cy="161583"/>
-          </a:xfrm>
-          <a:prstGeom prst="rect">
-            <a:avLst/>
-          </a:prstGeom>
-          <a:gradFill>
-            <a:gsLst>
-              <a:gs pos="0">
-                <a:schemeClr val="accent4">
-                  <a:shade val="30000"/>
-                  <a:satMod val="115000"/>
-                  <a:lumMod val="48000"/>
-                  <a:alpha val="95000"/>
-                </a:schemeClr>
-              </a:gs>
-              <a:gs pos="50000">
-                <a:schemeClr val="accent4">
-                  <a:lumMod val="50000"/>
-                  <a:shade val="67500"/>
-                  <a:satMod val="115000"/>
-                </a:schemeClr>
-              </a:gs>
-              <a:gs pos="100000">
-                <a:schemeClr val="accent4">
-                  <a:lumMod val="50000"/>
-                  <a:shade val="100000"/>
-                  <a:satMod val="115000"/>
-                </a:schemeClr>
-              </a:gs>
-            </a:gsLst>
-            <a:path path="rect">
-              <a:fillToRect l="50000" t="50000" r="50000" b="50000"/>
-            </a:path>
-          </a:gradFill>
-          <a:ln w="57150">
-            <a:solidFill>
-              <a:schemeClr val="accent4">
-                <a:lumMod val="50000"/>
-              </a:schemeClr>
-            </a:solidFill>
-          </a:ln>
-        </p:spPr>
-        <p:txBody>
-          <a:bodyPr wrap="square" rtlCol="0">
-            <a:spAutoFit/>
-          </a:bodyPr>
-          <a:lstStyle/>
-          <a:p>
-            <a:pPr algn="ctr"/>
-            <a:r>
-              <a:rPr lang="ko-KR" altLang="en-US" sz="450" b="1" dirty="0">
-                <a:solidFill>
-                  <a:schemeClr val="bg1"/>
-                </a:solidFill>
-                <a:latin typeface="+mn-ea"/>
-              </a:rPr>
-              <a:t>연구 목적</a:t>
-            </a:r>
-          </a:p>
-        </p:txBody>
-      </p:sp>
-      <p:sp>
-        <p:nvSpPr>
-          <p:cNvPr id="11" name="TextBox 10">
-            <a:extLst>
-              <a:ext uri="{FF2B5EF4-FFF2-40B4-BE49-F238E27FC236}">
-                <a16:creationId xmlns:a16="http://schemas.microsoft.com/office/drawing/2014/main" id="{3836297D-C66E-2FF3-A2C5-91FB5F095DDA}"/>
-              </a:ext>
-            </a:extLst>
-          </p:cNvPr>
-          <p:cNvSpPr txBox="1"/>
-          <p:nvPr/>
-        </p:nvSpPr>
-        <p:spPr>
-          <a:xfrm>
-            <a:off x="3780875" y="3779107"/>
-            <a:ext cx="1269418" cy="815608"/>
-          </a:xfrm>
-          <a:prstGeom prst="rect">
-            <a:avLst/>
-          </a:prstGeom>
-          <a:noFill/>
-          <a:ln w="57150">
-            <a:solidFill>
-              <a:schemeClr val="accent4">
-                <a:lumMod val="50000"/>
-              </a:schemeClr>
-            </a:solidFill>
-          </a:ln>
-        </p:spPr>
-        <p:txBody>
-          <a:bodyPr wrap="square" rtlCol="0">
-            <a:spAutoFit/>
-          </a:bodyPr>
-          <a:lstStyle/>
-          <a:p>
-            <a:pPr algn="ctr"/>
-            <a:endParaRPr lang="en-US" altLang="ko-KR" sz="450" b="1" dirty="0">
-              <a:latin typeface="+mn-ea"/>
-            </a:endParaRPr>
-          </a:p>
-          <a:p>
-            <a:pPr algn="ctr"/>
-            <a:endParaRPr lang="en-US" altLang="ko-KR" sz="450" dirty="0">
-              <a:latin typeface="+mn-ea"/>
-            </a:endParaRPr>
-          </a:p>
-          <a:p>
-            <a:pPr algn="ctr"/>
-            <a:endParaRPr lang="en-US" altLang="ko-KR" sz="450" dirty="0">
-              <a:latin typeface="+mn-ea"/>
-            </a:endParaRPr>
-          </a:p>
-          <a:p>
-            <a:pPr algn="ctr"/>
-            <a:endParaRPr lang="en-US" altLang="ko-KR" sz="450" dirty="0">
-              <a:latin typeface="+mn-ea"/>
-            </a:endParaRPr>
-          </a:p>
-          <a:p>
-            <a:pPr algn="ctr"/>
-            <a:endParaRPr lang="en-US" altLang="ko-KR" sz="450" dirty="0">
-              <a:latin typeface="+mn-ea"/>
-            </a:endParaRPr>
-          </a:p>
-          <a:p>
-            <a:pPr algn="ctr"/>
-            <a:endParaRPr lang="en-US" altLang="ko-KR" sz="450" dirty="0">
-              <a:latin typeface="+mn-ea"/>
-            </a:endParaRPr>
-          </a:p>
-          <a:p>
-            <a:pPr algn="ctr"/>
-            <a:endParaRPr lang="en-US" altLang="ko-KR" sz="450" dirty="0">
-              <a:latin typeface="+mn-ea"/>
-            </a:endParaRPr>
-          </a:p>
-          <a:p>
-            <a:pPr algn="ctr"/>
-            <a:endParaRPr lang="en-US" altLang="ko-KR" sz="450" dirty="0">
-              <a:latin typeface="+mn-ea"/>
-            </a:endParaRPr>
-          </a:p>
-          <a:p>
-            <a:pPr algn="ctr"/>
-            <a:endParaRPr lang="en-US" altLang="ko-KR" sz="450" dirty="0">
-              <a:latin typeface="+mn-ea"/>
-            </a:endParaRPr>
-          </a:p>
-          <a:p>
-            <a:pPr algn="ctr"/>
-            <a:endParaRPr lang="en-US" altLang="ko-KR" sz="450" dirty="0">
-              <a:latin typeface="+mn-ea"/>
-            </a:endParaRPr>
-          </a:p>
-          <a:p>
-            <a:pPr algn="ctr"/>
-            <a:endParaRPr lang="en-US" altLang="ko-KR" sz="200" dirty="0">
-              <a:latin typeface="+mn-ea"/>
-            </a:endParaRPr>
-          </a:p>
-        </p:txBody>
-      </p:sp>
-      <p:sp>
-        <p:nvSpPr>
-          <p:cNvPr id="12" name="TextBox 11">
-            <a:extLst>
-              <a:ext uri="{FF2B5EF4-FFF2-40B4-BE49-F238E27FC236}">
-                <a16:creationId xmlns:a16="http://schemas.microsoft.com/office/drawing/2014/main" id="{EE4BA792-A182-B99F-83BD-30DF7E0EBF88}"/>
-              </a:ext>
-            </a:extLst>
-          </p:cNvPr>
-          <p:cNvSpPr txBox="1"/>
-          <p:nvPr/>
-        </p:nvSpPr>
-        <p:spPr>
-          <a:xfrm>
-            <a:off x="3779837" y="3780380"/>
-            <a:ext cx="1012778" cy="161583"/>
-          </a:xfrm>
-          <a:prstGeom prst="rect">
-            <a:avLst/>
-          </a:prstGeom>
-          <a:gradFill>
-            <a:gsLst>
-              <a:gs pos="0">
-                <a:schemeClr val="accent4">
-                  <a:shade val="30000"/>
-                  <a:satMod val="115000"/>
-                  <a:lumMod val="48000"/>
-                  <a:alpha val="95000"/>
-                </a:schemeClr>
-              </a:gs>
-              <a:gs pos="50000">
-                <a:schemeClr val="accent4">
-                  <a:lumMod val="50000"/>
-                  <a:shade val="67500"/>
-                  <a:satMod val="115000"/>
-                </a:schemeClr>
-              </a:gs>
-              <a:gs pos="100000">
-                <a:schemeClr val="accent4">
-                  <a:lumMod val="50000"/>
-                  <a:shade val="100000"/>
-                  <a:satMod val="115000"/>
-                </a:schemeClr>
-              </a:gs>
-            </a:gsLst>
-            <a:path path="rect">
-              <a:fillToRect l="50000" t="50000" r="50000" b="50000"/>
-            </a:path>
-          </a:gradFill>
-          <a:ln w="57150">
-            <a:solidFill>
-              <a:schemeClr val="accent4">
-                <a:lumMod val="50000"/>
-              </a:schemeClr>
-            </a:solidFill>
-          </a:ln>
-        </p:spPr>
-        <p:txBody>
-          <a:bodyPr wrap="square" rtlCol="0">
-            <a:spAutoFit/>
-          </a:bodyPr>
-          <a:lstStyle/>
-          <a:p>
-            <a:pPr algn="ctr"/>
-            <a:r>
-              <a:rPr lang="ko-KR" altLang="en-US" sz="450" b="1" dirty="0">
-                <a:solidFill>
-                  <a:schemeClr val="bg1"/>
-                </a:solidFill>
-                <a:latin typeface="+mn-ea"/>
-              </a:rPr>
-              <a:t>주차별 진행 상황 및 역할 분담</a:t>
-            </a:r>
-          </a:p>
-        </p:txBody>
-      </p:sp>
-      <p:sp>
-        <p:nvSpPr>
-          <p:cNvPr id="13" name="TextBox 12">
-            <a:extLst>
-              <a:ext uri="{FF2B5EF4-FFF2-40B4-BE49-F238E27FC236}">
-                <a16:creationId xmlns:a16="http://schemas.microsoft.com/office/drawing/2014/main" id="{C4E37084-1706-89B6-3818-C425F45E15B4}"/>
-              </a:ext>
-            </a:extLst>
-          </p:cNvPr>
-          <p:cNvSpPr txBox="1"/>
-          <p:nvPr/>
-        </p:nvSpPr>
-        <p:spPr>
-          <a:xfrm>
-            <a:off x="3779837" y="3873413"/>
-            <a:ext cx="634815" cy="1200329"/>
-          </a:xfrm>
-          <a:prstGeom prst="rect">
-            <a:avLst/>
-          </a:prstGeom>
-          <a:noFill/>
-          <a:ln w="57150">
-            <a:noFill/>
-            <a:prstDash val="dash"/>
-          </a:ln>
-        </p:spPr>
-        <p:txBody>
-          <a:bodyPr wrap="square" rtlCol="0">
-            <a:spAutoFit/>
-          </a:bodyPr>
-          <a:lstStyle/>
-          <a:p>
-            <a:r>
-              <a:rPr lang="en-US" altLang="ko-KR" sz="300" dirty="0"/>
-              <a:t> 1</a:t>
-            </a:r>
-            <a:r>
-              <a:rPr lang="ko-KR" altLang="en-US" sz="300" dirty="0"/>
-              <a:t>주차</a:t>
-            </a:r>
-            <a:r>
-              <a:rPr lang="en-US" altLang="ko-KR" sz="300" dirty="0"/>
-              <a:t>: </a:t>
-            </a:r>
-            <a:r>
-              <a:rPr lang="ko-KR" altLang="en-US" sz="300" dirty="0"/>
-              <a:t>프로젝트 주제 선정 및 개발 </a:t>
-            </a:r>
-            <a:r>
-              <a:rPr lang="en-US" altLang="ko-KR" sz="300" dirty="0"/>
-              <a:t>		</a:t>
-            </a:r>
-            <a:r>
-              <a:rPr lang="ko-KR" altLang="en-US" sz="300" dirty="0"/>
-              <a:t>환경 조사</a:t>
-            </a:r>
-            <a:endParaRPr lang="en-US" altLang="ko-KR" sz="300" dirty="0"/>
-          </a:p>
-          <a:p>
-            <a:r>
-              <a:rPr lang="en-US" altLang="ko-KR" sz="300" dirty="0"/>
-              <a:t> 2</a:t>
-            </a:r>
-            <a:r>
-              <a:rPr lang="ko-KR" altLang="en-US" sz="300" dirty="0"/>
-              <a:t>주차</a:t>
-            </a:r>
-            <a:r>
-              <a:rPr lang="en-US" altLang="ko-KR" sz="300" dirty="0"/>
-              <a:t>: </a:t>
-            </a:r>
-            <a:r>
-              <a:rPr lang="ko-KR" altLang="ko-KR" sz="300" dirty="0"/>
-              <a:t>OpenPI·Pi0.5 기반 코드 구조 </a:t>
-            </a:r>
-            <a:r>
-              <a:rPr lang="en-US" altLang="ko-KR" sz="300" dirty="0"/>
-              <a:t>		</a:t>
-            </a:r>
-            <a:r>
-              <a:rPr lang="ko-KR" altLang="ko-KR" sz="300" dirty="0"/>
-              <a:t>분석 및 학습 파이프라인 구축</a:t>
-            </a:r>
-            <a:endParaRPr lang="en-US" altLang="ko-KR" sz="300" dirty="0"/>
-          </a:p>
-          <a:p>
-            <a:r>
-              <a:rPr lang="en-US" altLang="ko-KR" sz="300" dirty="0"/>
-              <a:t> 3</a:t>
-            </a:r>
-            <a:r>
-              <a:rPr lang="ko-KR" altLang="en-US" sz="300" dirty="0"/>
-              <a:t>주차</a:t>
-            </a:r>
-            <a:r>
-              <a:rPr lang="en-US" altLang="ko-KR" sz="300" dirty="0"/>
-              <a:t>: </a:t>
-            </a:r>
-            <a:r>
-              <a:rPr lang="ko-KR" altLang="ko-KR" sz="300" dirty="0"/>
-              <a:t>모델 구조 설계 및 실험 환경 </a:t>
-            </a:r>
-            <a:r>
-              <a:rPr lang="en-US" altLang="ko-KR" sz="300" dirty="0"/>
-              <a:t>		</a:t>
-            </a:r>
-            <a:r>
-              <a:rPr lang="ko-KR" altLang="ko-KR" sz="300" dirty="0"/>
-              <a:t>구성</a:t>
-            </a:r>
-            <a:endParaRPr lang="en-US" altLang="ko-KR" sz="300" dirty="0"/>
-          </a:p>
-          <a:p>
-            <a:r>
-              <a:rPr lang="en-US" altLang="ko-KR" sz="300" dirty="0"/>
-              <a:t> 4</a:t>
-            </a:r>
-            <a:r>
-              <a:rPr lang="ko-KR" altLang="en-US" sz="300" dirty="0"/>
-              <a:t>주차</a:t>
-            </a:r>
-            <a:r>
-              <a:rPr lang="en-US" altLang="ko-KR" sz="300" dirty="0"/>
-              <a:t>:  </a:t>
-            </a:r>
-            <a:r>
-              <a:rPr lang="ko-KR" altLang="ko-KR" sz="300" dirty="0" err="1"/>
-              <a:t>OmniGibson</a:t>
-            </a:r>
-            <a:r>
-              <a:rPr lang="ko-KR" altLang="ko-KR" sz="300" dirty="0"/>
-              <a:t> 평가 환경 구축</a:t>
-            </a:r>
-            <a:endParaRPr lang="en-US" altLang="ko-KR" sz="300" dirty="0"/>
-          </a:p>
-          <a:p>
-            <a:r>
-              <a:rPr lang="en-US" altLang="ko-KR" sz="300" dirty="0"/>
-              <a:t> 5</a:t>
-            </a:r>
-            <a:r>
-              <a:rPr lang="ko-KR" altLang="en-US" sz="300" dirty="0"/>
-              <a:t>주차</a:t>
-            </a:r>
-            <a:r>
-              <a:rPr lang="en-US" altLang="ko-KR" sz="300" dirty="0"/>
-              <a:t>: </a:t>
-            </a:r>
-            <a:r>
-              <a:rPr lang="ko-KR" altLang="ko-KR" sz="300" dirty="0"/>
-              <a:t>실데이터 학습 파이프라인 </a:t>
-            </a:r>
-            <a:r>
-              <a:rPr lang="en-US" altLang="ko-KR" sz="300" dirty="0"/>
-              <a:t>			</a:t>
-            </a:r>
-            <a:r>
-              <a:rPr lang="ko-KR" altLang="ko-KR" sz="300" dirty="0"/>
-              <a:t>구현</a:t>
-            </a:r>
-            <a:endParaRPr lang="en-US" altLang="ko-KR" sz="300" dirty="0"/>
-          </a:p>
-          <a:p>
-            <a:r>
-              <a:rPr lang="en-US" altLang="ko-KR" sz="300" dirty="0"/>
-              <a:t> 6</a:t>
-            </a:r>
-            <a:r>
-              <a:rPr lang="ko-KR" altLang="en-US" sz="300" dirty="0"/>
-              <a:t>주차</a:t>
-            </a:r>
-            <a:r>
-              <a:rPr lang="en-US" altLang="ko-KR" sz="300" dirty="0"/>
-              <a:t>: </a:t>
-            </a:r>
-            <a:r>
-              <a:rPr lang="ko-KR" altLang="ko-KR" sz="300" dirty="0"/>
-              <a:t>메모리 최적화 및 학습 성능 </a:t>
-            </a:r>
-            <a:r>
-              <a:rPr lang="en-US" altLang="ko-KR" sz="300" dirty="0"/>
-              <a:t>		</a:t>
-            </a:r>
-            <a:r>
-              <a:rPr lang="ko-KR" altLang="ko-KR" sz="300" dirty="0"/>
-              <a:t>분석</a:t>
-            </a:r>
-            <a:r>
-              <a:rPr lang="en-US" altLang="ko-KR" sz="300" dirty="0"/>
-              <a:t> </a:t>
-            </a:r>
-          </a:p>
-        </p:txBody>
-      </p:sp>
-      <p:sp>
-        <p:nvSpPr>
-          <p:cNvPr id="18" name="TextBox 17">
-            <a:extLst>
-              <a:ext uri="{FF2B5EF4-FFF2-40B4-BE49-F238E27FC236}">
-                <a16:creationId xmlns:a16="http://schemas.microsoft.com/office/drawing/2014/main" id="{2CFBE48B-B887-151D-2BF6-D02E76534210}"/>
-              </a:ext>
-            </a:extLst>
-          </p:cNvPr>
-          <p:cNvSpPr txBox="1"/>
-          <p:nvPr/>
-        </p:nvSpPr>
-        <p:spPr>
-          <a:xfrm>
-            <a:off x="4414651" y="3868759"/>
-            <a:ext cx="634815" cy="680956"/>
-          </a:xfrm>
-          <a:prstGeom prst="rect">
-            <a:avLst/>
-          </a:prstGeom>
-          <a:noFill/>
-          <a:ln w="57150">
-            <a:noFill/>
-            <a:prstDash val="dash"/>
-          </a:ln>
-        </p:spPr>
-        <p:txBody>
-          <a:bodyPr wrap="square" rtlCol="0">
-            <a:spAutoFit/>
-          </a:bodyPr>
-          <a:lstStyle/>
-          <a:p>
-            <a:r>
-              <a:rPr lang="en-US" altLang="ko-KR" sz="300" dirty="0"/>
-              <a:t> 7</a:t>
-            </a:r>
-            <a:r>
-              <a:rPr lang="ko-KR" altLang="en-US" sz="300" dirty="0"/>
-              <a:t>주차</a:t>
-            </a:r>
-            <a:r>
-              <a:rPr lang="en-US" altLang="ko-KR" sz="300" dirty="0"/>
-              <a:t>: </a:t>
-            </a:r>
-            <a:r>
-              <a:rPr lang="ko-KR" altLang="ko-KR" sz="300" dirty="0"/>
-              <a:t>학습 및 W&amp;B 로깅 시스템 </a:t>
-            </a:r>
-            <a:r>
-              <a:rPr lang="en-US" altLang="ko-KR" sz="300" dirty="0"/>
-              <a:t>			</a:t>
-            </a:r>
-            <a:r>
-              <a:rPr lang="ko-KR" altLang="ko-KR" sz="300" dirty="0"/>
-              <a:t>구축</a:t>
-            </a:r>
-            <a:endParaRPr lang="en-US" altLang="ko-KR" sz="300" dirty="0"/>
-          </a:p>
-          <a:p>
-            <a:r>
-              <a:rPr lang="en-US" altLang="ko-KR" sz="300" dirty="0"/>
-              <a:t> 8</a:t>
-            </a:r>
-            <a:r>
-              <a:rPr lang="ko-KR" altLang="en-US" sz="300" dirty="0"/>
-              <a:t>주차</a:t>
-            </a:r>
-            <a:r>
-              <a:rPr lang="en-US" altLang="ko-KR" sz="300" dirty="0"/>
-              <a:t>: </a:t>
-            </a:r>
-            <a:r>
-              <a:rPr lang="ko-KR" altLang="en-US" sz="300" dirty="0"/>
-              <a:t>경량화 모델 학습</a:t>
-            </a:r>
-            <a:endParaRPr lang="en-US" altLang="ko-KR" sz="300" dirty="0"/>
-          </a:p>
-          <a:p>
-            <a:r>
-              <a:rPr lang="en-US" altLang="ko-KR" sz="300" dirty="0"/>
-              <a:t> 9</a:t>
-            </a:r>
-            <a:r>
-              <a:rPr lang="ko-KR" altLang="en-US" sz="300" dirty="0"/>
-              <a:t>주차</a:t>
-            </a:r>
-            <a:r>
-              <a:rPr lang="en-US" altLang="ko-KR" sz="300" dirty="0"/>
-              <a:t>: </a:t>
-            </a:r>
-            <a:r>
-              <a:rPr lang="ko-KR" altLang="en-US" sz="300" dirty="0"/>
-              <a:t>경량화 모델 학습</a:t>
-            </a:r>
-            <a:endParaRPr lang="en-US" altLang="ko-KR" sz="300" dirty="0"/>
-          </a:p>
-          <a:p>
-            <a:r>
-              <a:rPr lang="en-US" altLang="ko-KR" sz="300" dirty="0"/>
-              <a:t> 10</a:t>
-            </a:r>
-            <a:r>
-              <a:rPr lang="ko-KR" altLang="en-US" sz="300" dirty="0"/>
-              <a:t>주차</a:t>
-            </a:r>
-            <a:r>
-              <a:rPr lang="en-US" altLang="ko-KR" sz="300" dirty="0"/>
-              <a:t>: </a:t>
-            </a:r>
-            <a:r>
-              <a:rPr lang="ko-KR" altLang="en-US" sz="300" dirty="0"/>
-              <a:t>경량화 모델 학습</a:t>
-            </a:r>
-            <a:endParaRPr lang="en-US" altLang="ko-KR" sz="300" dirty="0"/>
-          </a:p>
-          <a:p>
-            <a:r>
-              <a:rPr lang="en-US" altLang="ko-KR" sz="300" dirty="0"/>
-              <a:t> 11</a:t>
-            </a:r>
-            <a:r>
-              <a:rPr lang="ko-KR" altLang="en-US" sz="300" dirty="0"/>
-              <a:t>주차</a:t>
-            </a:r>
-            <a:r>
-              <a:rPr lang="en-US" altLang="ko-KR" sz="300" dirty="0"/>
-              <a:t>: rollout </a:t>
-            </a:r>
-            <a:r>
-              <a:rPr lang="ko-KR" altLang="en-US" sz="300" dirty="0"/>
-              <a:t>안정화 및 평가 개선</a:t>
-            </a:r>
-            <a:endParaRPr lang="en-US" altLang="ko-KR" sz="300" dirty="0"/>
-          </a:p>
-          <a:p>
-            <a:r>
-              <a:rPr lang="en-US" altLang="ko-KR" sz="300" dirty="0"/>
-              <a:t> 12</a:t>
-            </a:r>
-            <a:r>
-              <a:rPr lang="ko-KR" altLang="en-US" sz="300" dirty="0"/>
-              <a:t>주차</a:t>
-            </a:r>
-            <a:r>
-              <a:rPr lang="en-US" altLang="ko-KR" sz="300" dirty="0"/>
-              <a:t>: </a:t>
-            </a:r>
-            <a:r>
-              <a:rPr lang="ko-KR" altLang="ko-KR" sz="300" dirty="0"/>
-              <a:t>최종 실험 결과 정리</a:t>
-            </a:r>
-            <a:endParaRPr lang="en-US" altLang="ko-KR" sz="300" dirty="0"/>
-          </a:p>
-          <a:p>
-            <a:endParaRPr lang="ko-KR" altLang="en-US" sz="225" dirty="0"/>
-          </a:p>
-        </p:txBody>
-      </p:sp>
-      <p:sp>
-        <p:nvSpPr>
-          <p:cNvPr id="24" name="TextBox 23">
-            <a:extLst>
-              <a:ext uri="{FF2B5EF4-FFF2-40B4-BE49-F238E27FC236}">
-                <a16:creationId xmlns:a16="http://schemas.microsoft.com/office/drawing/2014/main" id="{2028F00E-856C-97B8-EDC1-27E6B218DCA2}"/>
-              </a:ext>
-            </a:extLst>
-          </p:cNvPr>
-          <p:cNvSpPr txBox="1"/>
-          <p:nvPr/>
-        </p:nvSpPr>
-        <p:spPr>
-          <a:xfrm>
-            <a:off x="3779837" y="4407760"/>
-            <a:ext cx="1269629" cy="184666"/>
-          </a:xfrm>
-          <a:prstGeom prst="rect">
-            <a:avLst/>
-          </a:prstGeom>
-          <a:noFill/>
-          <a:ln w="57150">
-            <a:noFill/>
-          </a:ln>
-        </p:spPr>
-        <p:txBody>
-          <a:bodyPr wrap="square" rtlCol="0">
-            <a:spAutoFit/>
-          </a:bodyPr>
-          <a:lstStyle/>
-          <a:p>
-            <a:r>
-              <a:rPr lang="ko-KR" altLang="en-US" sz="300" dirty="0">
-                <a:latin typeface="+mn-ea"/>
-              </a:rPr>
-              <a:t> 강지호</a:t>
-            </a:r>
-            <a:r>
-              <a:rPr lang="en-US" altLang="ko-KR" sz="300" dirty="0">
-                <a:latin typeface="+mn-ea"/>
-              </a:rPr>
-              <a:t>: </a:t>
-            </a:r>
-            <a:r>
-              <a:rPr lang="ko-KR" altLang="ko-KR" sz="300" dirty="0"/>
-              <a:t>VLA 모델 </a:t>
-            </a:r>
-            <a:r>
-              <a:rPr lang="ko-KR" altLang="ko-KR" sz="300" dirty="0" err="1"/>
-              <a:t>구현·학습</a:t>
-            </a:r>
-            <a:r>
-              <a:rPr lang="ko-KR" altLang="ko-KR" sz="300" dirty="0"/>
-              <a:t> 및 핵심 알고리즘 실험 진행</a:t>
-            </a:r>
-            <a:endParaRPr lang="en-US" altLang="ko-KR" sz="300" dirty="0">
-              <a:latin typeface="+mn-ea"/>
-            </a:endParaRPr>
-          </a:p>
-          <a:p>
-            <a:r>
-              <a:rPr lang="ko-KR" altLang="en-US" sz="300" dirty="0">
-                <a:latin typeface="+mn-ea"/>
-              </a:rPr>
-              <a:t> </a:t>
-            </a:r>
-            <a:r>
-              <a:rPr lang="ko-KR" altLang="en-US" sz="300" dirty="0" err="1">
-                <a:latin typeface="+mn-ea"/>
-              </a:rPr>
-              <a:t>문병선</a:t>
-            </a:r>
-            <a:r>
-              <a:rPr lang="en-US" altLang="ko-KR" sz="300" dirty="0">
-                <a:latin typeface="+mn-ea"/>
-              </a:rPr>
-              <a:t>: </a:t>
-            </a:r>
-            <a:r>
-              <a:rPr lang="ko-KR" altLang="ko-KR" sz="300" dirty="0" err="1"/>
-              <a:t>OmniGibson</a:t>
-            </a:r>
-            <a:r>
-              <a:rPr lang="ko-KR" altLang="ko-KR" sz="300" dirty="0"/>
-              <a:t> 평가 환경 </a:t>
-            </a:r>
-            <a:r>
-              <a:rPr lang="ko-KR" altLang="ko-KR" sz="300" dirty="0" err="1"/>
-              <a:t>구축·영상</a:t>
-            </a:r>
-            <a:r>
-              <a:rPr lang="ko-KR" altLang="ko-KR" sz="300" dirty="0"/>
-              <a:t> 생성 및 결과 정리</a:t>
-            </a:r>
-            <a:endParaRPr lang="en-US" altLang="ko-KR" sz="300" dirty="0">
-              <a:latin typeface="+mn-ea"/>
-            </a:endParaRPr>
-          </a:p>
-        </p:txBody>
-      </p:sp>
-      <p:sp>
-        <p:nvSpPr>
-          <p:cNvPr id="27" name="TextBox 26">
-            <a:extLst>
-              <a:ext uri="{FF2B5EF4-FFF2-40B4-BE49-F238E27FC236}">
-                <a16:creationId xmlns:a16="http://schemas.microsoft.com/office/drawing/2014/main" id="{AD26A61D-12C0-0739-A1E6-47055D9A7D9B}"/>
-              </a:ext>
-            </a:extLst>
-          </p:cNvPr>
-          <p:cNvSpPr txBox="1"/>
-          <p:nvPr/>
-        </p:nvSpPr>
-        <p:spPr>
-          <a:xfrm>
-            <a:off x="2509170" y="4226302"/>
-            <a:ext cx="1271708" cy="1973489"/>
-          </a:xfrm>
-          <a:prstGeom prst="rect">
-            <a:avLst/>
-          </a:prstGeom>
-          <a:noFill/>
-          <a:ln w="57150">
-            <a:solidFill>
-              <a:schemeClr val="accent4">
-                <a:lumMod val="50000"/>
-              </a:schemeClr>
-            </a:solidFill>
-          </a:ln>
-        </p:spPr>
-        <p:txBody>
-          <a:bodyPr wrap="square" rtlCol="0">
-            <a:spAutoFit/>
-          </a:bodyPr>
-          <a:lstStyle/>
-          <a:p>
-            <a:pPr algn="ctr"/>
-            <a:endParaRPr lang="en-US" altLang="ko-KR" sz="674" b="1" dirty="0">
-              <a:latin typeface="+mn-ea"/>
-            </a:endParaRPr>
-          </a:p>
-          <a:p>
-            <a:pPr algn="ctr"/>
-            <a:endParaRPr lang="en-US" altLang="ko-KR" sz="450" dirty="0">
-              <a:latin typeface="+mn-ea"/>
-            </a:endParaRPr>
-          </a:p>
-          <a:p>
-            <a:pPr algn="ctr"/>
-            <a:endParaRPr lang="en-US" altLang="ko-KR" sz="450" dirty="0">
-              <a:latin typeface="+mn-ea"/>
-            </a:endParaRPr>
-          </a:p>
-          <a:p>
-            <a:pPr algn="ctr"/>
-            <a:endParaRPr lang="en-US" altLang="ko-KR" sz="450" dirty="0">
-              <a:latin typeface="+mn-ea"/>
-            </a:endParaRPr>
-          </a:p>
-          <a:p>
-            <a:pPr algn="ctr"/>
-            <a:endParaRPr lang="en-US" altLang="ko-KR" sz="450" dirty="0">
-              <a:latin typeface="+mn-ea"/>
-            </a:endParaRPr>
-          </a:p>
-          <a:p>
-            <a:pPr algn="ctr"/>
-            <a:endParaRPr lang="en-US" altLang="ko-KR" sz="450" dirty="0">
-              <a:latin typeface="+mn-ea"/>
-            </a:endParaRPr>
-          </a:p>
-          <a:p>
-            <a:pPr algn="ctr"/>
-            <a:endParaRPr lang="en-US" altLang="ko-KR" sz="450" dirty="0">
-              <a:latin typeface="+mn-ea"/>
-            </a:endParaRPr>
-          </a:p>
-          <a:p>
-            <a:pPr algn="ctr"/>
-            <a:endParaRPr lang="en-US" altLang="ko-KR" sz="450" dirty="0">
-              <a:latin typeface="+mn-ea"/>
-            </a:endParaRPr>
-          </a:p>
-          <a:p>
-            <a:pPr algn="ctr"/>
-            <a:endParaRPr lang="en-US" altLang="ko-KR" sz="450" dirty="0">
-              <a:latin typeface="+mn-ea"/>
-            </a:endParaRPr>
-          </a:p>
-          <a:p>
-            <a:pPr algn="ctr"/>
-            <a:endParaRPr lang="en-US" altLang="ko-KR" sz="450" dirty="0">
-              <a:latin typeface="+mn-ea"/>
-            </a:endParaRPr>
-          </a:p>
-          <a:p>
-            <a:pPr algn="ctr"/>
-            <a:endParaRPr lang="en-US" altLang="ko-KR" sz="450" dirty="0">
-              <a:latin typeface="+mn-ea"/>
-            </a:endParaRPr>
-          </a:p>
-          <a:p>
-            <a:pPr marL="42813" indent="-42813">
-              <a:buFont typeface="Arial" panose="020B0604020202020204" pitchFamily="34" charset="0"/>
-              <a:buChar char="•"/>
-            </a:pPr>
-            <a:r>
-              <a:rPr lang="en-US" altLang="ko-KR" sz="300" b="1" dirty="0">
-                <a:latin typeface="+mn-ea"/>
-              </a:rPr>
-              <a:t>Model Architecture</a:t>
-            </a:r>
-          </a:p>
-          <a:p>
-            <a:r>
-              <a:rPr lang="en-US" altLang="ko-KR" sz="300" dirty="0">
-                <a:latin typeface="+mn-ea"/>
-              </a:rPr>
-              <a:t> </a:t>
-            </a:r>
-            <a:r>
-              <a:rPr lang="en-US" altLang="ko-KR" sz="300" b="1" dirty="0">
-                <a:latin typeface="+mn-ea"/>
-              </a:rPr>
-              <a:t>Backbone:</a:t>
-            </a:r>
-            <a:r>
-              <a:rPr lang="en-US" altLang="ko-KR" sz="300" dirty="0">
-                <a:latin typeface="+mn-ea"/>
-              </a:rPr>
-              <a:t> </a:t>
-            </a:r>
-            <a:r>
-              <a:rPr lang="ko-KR" altLang="ko-KR" sz="300" dirty="0" err="1">
-                <a:latin typeface="+mn-ea"/>
-              </a:rPr>
-              <a:t>OpenPI의</a:t>
-            </a:r>
-            <a:r>
-              <a:rPr lang="ko-KR" altLang="ko-KR" sz="300" dirty="0">
-                <a:latin typeface="+mn-ea"/>
-              </a:rPr>
-              <a:t> Pi0.5 기반 구조(</a:t>
-            </a:r>
-            <a:r>
-              <a:rPr lang="ko-KR" altLang="ko-KR" sz="300" dirty="0" err="1">
-                <a:latin typeface="+mn-ea"/>
-              </a:rPr>
-              <a:t>SigLIP</a:t>
-            </a:r>
-            <a:r>
-              <a:rPr lang="en-US" altLang="ko-KR" sz="300" dirty="0">
-                <a:latin typeface="+mn-ea"/>
-              </a:rPr>
-              <a:t> </a:t>
-            </a:r>
-            <a:r>
-              <a:rPr lang="ko-KR" altLang="ko-KR" sz="300" dirty="0">
-                <a:latin typeface="+mn-ea"/>
-              </a:rPr>
-              <a:t>+</a:t>
-            </a:r>
-            <a:r>
-              <a:rPr lang="en-US" altLang="ko-KR" sz="300" dirty="0">
-                <a:latin typeface="+mn-ea"/>
-              </a:rPr>
-              <a:t> </a:t>
-            </a:r>
-            <a:r>
-              <a:rPr lang="ko-KR" altLang="ko-KR" sz="300" dirty="0" err="1">
-                <a:latin typeface="+mn-ea"/>
-              </a:rPr>
-              <a:t>PaliGemma</a:t>
-            </a:r>
-            <a:r>
-              <a:rPr lang="en-US" altLang="ko-KR" sz="300" dirty="0">
-                <a:latin typeface="+mn-ea"/>
-              </a:rPr>
-              <a:t> + </a:t>
-            </a:r>
-            <a:r>
-              <a:rPr lang="ko-KR" altLang="ko-KR" sz="300" dirty="0" err="1">
-                <a:latin typeface="+mn-ea"/>
-              </a:rPr>
-              <a:t>Flow</a:t>
-            </a:r>
-            <a:r>
-              <a:rPr lang="en-US" altLang="ko-KR" sz="300" dirty="0">
-                <a:latin typeface="+mn-ea"/>
-              </a:rPr>
-              <a:t> </a:t>
-            </a:r>
-            <a:r>
-              <a:rPr lang="ko-KR" altLang="ko-KR" sz="300" dirty="0" err="1">
-                <a:latin typeface="+mn-ea"/>
-              </a:rPr>
-              <a:t>Matching</a:t>
-            </a:r>
-            <a:r>
-              <a:rPr lang="en-US" altLang="ko-KR" sz="300" dirty="0">
-                <a:latin typeface="+mn-ea"/>
-              </a:rPr>
-              <a:t> </a:t>
-            </a:r>
-            <a:r>
-              <a:rPr lang="ko-KR" altLang="ko-KR" sz="300" dirty="0" err="1">
-                <a:latin typeface="+mn-ea"/>
-              </a:rPr>
-              <a:t>Action</a:t>
-            </a:r>
-            <a:r>
-              <a:rPr lang="ko-KR" altLang="ko-KR" sz="300" dirty="0">
-                <a:latin typeface="+mn-ea"/>
-              </a:rPr>
-              <a:t> </a:t>
-            </a:r>
-            <a:r>
-              <a:rPr lang="ko-KR" altLang="ko-KR" sz="300" dirty="0" err="1">
-                <a:latin typeface="+mn-ea"/>
-              </a:rPr>
-              <a:t>Expert</a:t>
-            </a:r>
-            <a:r>
-              <a:rPr lang="ko-KR" altLang="ko-KR" sz="300" dirty="0">
-                <a:latin typeface="+mn-ea"/>
-              </a:rPr>
-              <a:t>)</a:t>
-            </a:r>
-            <a:endParaRPr lang="en-US" altLang="ko-KR" sz="300" dirty="0">
-              <a:latin typeface="+mn-ea"/>
-            </a:endParaRPr>
-          </a:p>
-          <a:p>
-            <a:endParaRPr lang="en-US" altLang="ko-KR" sz="300" dirty="0">
-              <a:latin typeface="+mn-ea"/>
-            </a:endParaRPr>
-          </a:p>
-          <a:p>
-            <a:r>
-              <a:rPr lang="en-US" altLang="ko-KR" sz="300" b="1" dirty="0">
-                <a:latin typeface="+mn-ea"/>
-              </a:rPr>
-              <a:t> System 2 Stage Tracking</a:t>
-            </a:r>
-            <a:endParaRPr lang="en-US" altLang="ko-KR" sz="300" dirty="0">
-              <a:latin typeface="+mn-ea"/>
-            </a:endParaRPr>
-          </a:p>
-          <a:p>
-            <a:r>
-              <a:rPr lang="en-US" altLang="ko-KR" sz="300" b="1" dirty="0">
-                <a:latin typeface="+mn-ea"/>
-              </a:rPr>
-              <a:t> Task Embedding</a:t>
-            </a:r>
-            <a:endParaRPr lang="en-US" altLang="ko-KR" sz="300" dirty="0">
-              <a:latin typeface="+mn-ea"/>
-            </a:endParaRPr>
-          </a:p>
-          <a:p>
-            <a:r>
-              <a:rPr lang="en-US" altLang="ko-KR" sz="300" b="1" dirty="0">
-                <a:latin typeface="+mn-ea"/>
-              </a:rPr>
-              <a:t> FAST Auxiliary</a:t>
-            </a:r>
-            <a:endParaRPr lang="en-US" altLang="ko-KR" sz="300" dirty="0">
-              <a:latin typeface="+mn-ea"/>
-            </a:endParaRPr>
-          </a:p>
-          <a:p>
-            <a:r>
-              <a:rPr lang="en-US" altLang="ko-KR" sz="300" b="1" dirty="0">
-                <a:latin typeface="+mn-ea"/>
-              </a:rPr>
-              <a:t> Correlated Noise</a:t>
-            </a:r>
-            <a:endParaRPr lang="en-US" altLang="ko-KR" sz="300" dirty="0">
-              <a:latin typeface="+mn-ea"/>
-            </a:endParaRPr>
-          </a:p>
-          <a:p>
-            <a:r>
-              <a:rPr lang="en-US" altLang="ko-KR" sz="300" b="1" dirty="0">
-                <a:latin typeface="+mn-ea"/>
-              </a:rPr>
-              <a:t> KV Transform</a:t>
-            </a:r>
-          </a:p>
-          <a:p>
-            <a:r>
-              <a:rPr lang="en-US" altLang="ko-KR" sz="300" b="1" dirty="0">
-                <a:latin typeface="+mn-ea"/>
-              </a:rPr>
-              <a:t> Custom Attention Masks</a:t>
-            </a:r>
-          </a:p>
-          <a:p>
-            <a:endParaRPr lang="en-US" altLang="ko-KR" sz="300" b="1" dirty="0">
-              <a:latin typeface="+mn-ea"/>
-            </a:endParaRPr>
-          </a:p>
-          <a:p>
-            <a:endParaRPr lang="en-US" altLang="ko-KR" sz="300" b="1" dirty="0">
-              <a:latin typeface="+mn-ea"/>
-            </a:endParaRPr>
-          </a:p>
-          <a:p>
-            <a:endParaRPr lang="en-US" altLang="ko-KR" sz="300" b="1" dirty="0">
-              <a:latin typeface="+mn-ea"/>
-            </a:endParaRPr>
-          </a:p>
-          <a:p>
-            <a:endParaRPr lang="en-US" altLang="ko-KR" sz="300" b="1" dirty="0">
-              <a:latin typeface="+mn-ea"/>
-            </a:endParaRPr>
-          </a:p>
-          <a:p>
-            <a:endParaRPr lang="en-US" altLang="ko-KR" sz="300" b="1" dirty="0">
-              <a:latin typeface="+mn-ea"/>
-            </a:endParaRPr>
-          </a:p>
-          <a:p>
-            <a:endParaRPr lang="en-US" altLang="ko-KR" sz="300" b="1" dirty="0">
-              <a:latin typeface="+mn-ea"/>
-            </a:endParaRPr>
-          </a:p>
-          <a:p>
-            <a:endParaRPr lang="en-US" altLang="ko-KR" sz="300" b="1" dirty="0">
-              <a:latin typeface="+mn-ea"/>
-            </a:endParaRPr>
-          </a:p>
-          <a:p>
-            <a:endParaRPr lang="en-US" altLang="ko-KR" sz="300" b="1" dirty="0">
-              <a:latin typeface="+mn-ea"/>
-            </a:endParaRPr>
-          </a:p>
-          <a:p>
-            <a:endParaRPr lang="en-US" altLang="ko-KR" sz="300" b="1" dirty="0">
-              <a:latin typeface="+mn-ea"/>
-            </a:endParaRPr>
-          </a:p>
-          <a:p>
-            <a:endParaRPr lang="en-US" altLang="ko-KR" sz="300" b="1" dirty="0">
-              <a:latin typeface="+mn-ea"/>
-            </a:endParaRPr>
-          </a:p>
-          <a:p>
-            <a:endParaRPr lang="en-US" altLang="ko-KR" sz="300" b="1" dirty="0">
-              <a:latin typeface="+mn-ea"/>
-            </a:endParaRPr>
-          </a:p>
-          <a:p>
-            <a:endParaRPr lang="en-US" altLang="ko-KR" sz="300" b="1" dirty="0">
-              <a:latin typeface="+mn-ea"/>
-            </a:endParaRPr>
-          </a:p>
-          <a:p>
-            <a:endParaRPr lang="en-US" altLang="ko-KR" sz="450" b="1" dirty="0">
-              <a:latin typeface="+mn-ea"/>
-            </a:endParaRPr>
-          </a:p>
-        </p:txBody>
-      </p:sp>
-      <p:sp>
-        <p:nvSpPr>
-          <p:cNvPr id="28" name="TextBox 27">
-            <a:extLst>
-              <a:ext uri="{FF2B5EF4-FFF2-40B4-BE49-F238E27FC236}">
-                <a16:creationId xmlns:a16="http://schemas.microsoft.com/office/drawing/2014/main" id="{FA8B75AA-D85E-C3A4-7671-DD508ADE16BA}"/>
-              </a:ext>
-            </a:extLst>
-          </p:cNvPr>
-          <p:cNvSpPr txBox="1"/>
-          <p:nvPr/>
-        </p:nvSpPr>
-        <p:spPr>
-          <a:xfrm>
-            <a:off x="2511249" y="4226302"/>
-            <a:ext cx="501770" cy="161583"/>
-          </a:xfrm>
-          <a:prstGeom prst="rect">
-            <a:avLst/>
-          </a:prstGeom>
-          <a:gradFill flip="none" rotWithShape="1">
-            <a:gsLst>
-              <a:gs pos="0">
-                <a:schemeClr val="accent4">
-                  <a:shade val="30000"/>
-                  <a:satMod val="115000"/>
-                  <a:lumMod val="48000"/>
-                  <a:alpha val="95000"/>
-                </a:schemeClr>
-              </a:gs>
-              <a:gs pos="50000">
-                <a:schemeClr val="accent4">
-                  <a:lumMod val="50000"/>
-                  <a:shade val="67500"/>
-                  <a:satMod val="115000"/>
-                </a:schemeClr>
-              </a:gs>
-              <a:gs pos="100000">
-                <a:schemeClr val="accent4">
-                  <a:lumMod val="50000"/>
-                  <a:shade val="100000"/>
-                  <a:satMod val="115000"/>
-                </a:schemeClr>
-              </a:gs>
-            </a:gsLst>
-            <a:path path="rect">
-              <a:fillToRect l="50000" t="50000" r="50000" b="50000"/>
-            </a:path>
-            <a:tileRect/>
-          </a:gradFill>
-          <a:ln w="57150">
-            <a:solidFill>
-              <a:schemeClr val="accent4">
-                <a:lumMod val="50000"/>
-              </a:schemeClr>
-            </a:solidFill>
-          </a:ln>
-        </p:spPr>
-        <p:txBody>
-          <a:bodyPr wrap="square" rtlCol="0">
-            <a:spAutoFit/>
-          </a:bodyPr>
-          <a:lstStyle/>
-          <a:p>
-            <a:pPr algn="ctr"/>
-            <a:r>
-              <a:rPr lang="ko-KR" altLang="en-US" sz="450" b="1" dirty="0">
-                <a:solidFill>
-                  <a:schemeClr val="bg1"/>
-                </a:solidFill>
-                <a:latin typeface="+mn-ea"/>
-              </a:rPr>
-              <a:t>모델 구조</a:t>
-            </a:r>
-          </a:p>
-        </p:txBody>
-      </p:sp>
       <p:grpSp>
         <p:nvGrpSpPr>
           <p:cNvPr id="29" name="그룹 28">
@@ -4915,10 +3423,10 @@
         </p:nvGrpSpPr>
         <p:grpSpPr>
           <a:xfrm>
-            <a:off x="3780598" y="4521541"/>
-            <a:ext cx="1269695" cy="1442574"/>
+            <a:off x="10705017" y="7916913"/>
+            <a:ext cx="10180800" cy="8658000"/>
             <a:chOff x="530719" y="2641752"/>
-            <a:chExt cx="10169298" cy="11554526"/>
+            <a:chExt cx="10169298" cy="8679299"/>
           </a:xfrm>
         </p:grpSpPr>
         <p:sp>
@@ -4936,7 +3444,7 @@
           <p:spPr>
             <a:xfrm>
               <a:off x="530719" y="2641752"/>
-              <a:ext cx="10169298" cy="11554526"/>
+              <a:ext cx="10169298" cy="8679299"/>
             </a:xfrm>
             <a:prstGeom prst="rect">
               <a:avLst/>
@@ -4957,115 +3465,91 @@
             <a:lstStyle/>
             <a:p>
               <a:pPr algn="ctr"/>
-              <a:endParaRPr lang="en-US" altLang="ko-KR" sz="674" b="1" dirty="0">
+              <a:endParaRPr lang="en-US" altLang="ko-KR" sz="5400" b="1" dirty="0">
                 <a:latin typeface="+mn-ea"/>
               </a:endParaRPr>
             </a:p>
             <a:p>
               <a:pPr algn="ctr"/>
-              <a:endParaRPr lang="en-US" altLang="ko-KR" sz="450" dirty="0">
+              <a:endParaRPr lang="en-US" altLang="ko-KR" sz="3600" dirty="0">
                 <a:latin typeface="+mn-ea"/>
               </a:endParaRPr>
             </a:p>
             <a:p>
               <a:pPr algn="ctr"/>
-              <a:endParaRPr lang="en-US" altLang="ko-KR" sz="450" dirty="0">
+              <a:endParaRPr lang="en-US" altLang="ko-KR" sz="3600" dirty="0">
                 <a:latin typeface="+mn-ea"/>
               </a:endParaRPr>
             </a:p>
             <a:p>
               <a:pPr algn="ctr"/>
-              <a:endParaRPr lang="en-US" altLang="ko-KR" sz="450" dirty="0">
+              <a:endParaRPr lang="en-US" altLang="ko-KR" sz="3600" dirty="0">
                 <a:latin typeface="+mn-ea"/>
               </a:endParaRPr>
             </a:p>
             <a:p>
               <a:pPr algn="ctr"/>
-              <a:endParaRPr lang="en-US" altLang="ko-KR" sz="450" dirty="0">
+              <a:endParaRPr lang="en-US" altLang="ko-KR" sz="3600" dirty="0">
                 <a:latin typeface="+mn-ea"/>
               </a:endParaRPr>
             </a:p>
             <a:p>
               <a:pPr algn="ctr"/>
-              <a:endParaRPr lang="en-US" altLang="ko-KR" sz="450" dirty="0">
+              <a:endParaRPr lang="en-US" altLang="ko-KR" sz="3600" dirty="0">
                 <a:latin typeface="+mn-ea"/>
               </a:endParaRPr>
             </a:p>
             <a:p>
               <a:pPr algn="ctr"/>
-              <a:endParaRPr lang="en-US" altLang="ko-KR" sz="450" dirty="0">
+              <a:endParaRPr lang="en-US" altLang="ko-KR" sz="3600" dirty="0">
                 <a:latin typeface="+mn-ea"/>
               </a:endParaRPr>
             </a:p>
             <a:p>
               <a:pPr algn="ctr"/>
-              <a:endParaRPr lang="en-US" altLang="ko-KR" sz="450" dirty="0">
+              <a:endParaRPr lang="en-US" altLang="ko-KR" sz="3600" dirty="0">
                 <a:latin typeface="+mn-ea"/>
               </a:endParaRPr>
             </a:p>
             <a:p>
               <a:pPr algn="ctr"/>
-              <a:endParaRPr lang="en-US" altLang="ko-KR" sz="450" dirty="0">
+              <a:endParaRPr lang="en-US" altLang="ko-KR" sz="3600" dirty="0">
                 <a:latin typeface="+mn-ea"/>
               </a:endParaRPr>
             </a:p>
             <a:p>
               <a:pPr algn="ctr"/>
-              <a:endParaRPr lang="en-US" altLang="ko-KR" sz="450" dirty="0">
+              <a:endParaRPr lang="en-US" altLang="ko-KR" sz="3600" dirty="0">
                 <a:latin typeface="+mn-ea"/>
               </a:endParaRPr>
             </a:p>
             <a:p>
               <a:pPr algn="ctr"/>
-              <a:endParaRPr lang="en-US" altLang="ko-KR" sz="450" dirty="0">
+              <a:endParaRPr lang="en-US" altLang="ko-KR" sz="3600" dirty="0">
                 <a:latin typeface="+mn-ea"/>
               </a:endParaRPr>
             </a:p>
             <a:p>
               <a:pPr algn="ctr"/>
-              <a:endParaRPr lang="en-US" altLang="ko-KR" sz="450" dirty="0">
+              <a:endParaRPr lang="en-US" altLang="ko-KR" sz="3600" dirty="0">
                 <a:latin typeface="+mn-ea"/>
               </a:endParaRPr>
             </a:p>
             <a:p>
               <a:pPr algn="ctr"/>
-              <a:endParaRPr lang="en-US" altLang="ko-KR" sz="450" dirty="0">
+              <a:endParaRPr lang="en-US" altLang="ko-KR" sz="3600" dirty="0">
                 <a:latin typeface="+mn-ea"/>
               </a:endParaRPr>
             </a:p>
             <a:p>
               <a:pPr algn="ctr"/>
-              <a:endParaRPr lang="en-US" altLang="ko-KR" sz="450" dirty="0">
+              <a:endParaRPr lang="en-US" altLang="ko-KR" sz="3600" dirty="0">
                 <a:latin typeface="+mn-ea"/>
               </a:endParaRPr>
             </a:p>
             <a:p>
               <a:pPr algn="ctr"/>
-              <a:endParaRPr lang="en-US" altLang="ko-KR" sz="450" dirty="0">
-                <a:latin typeface="+mn-ea"/>
-              </a:endParaRPr>
-            </a:p>
-            <a:p>
-              <a:pPr algn="ctr"/>
-              <a:endParaRPr lang="en-US" altLang="ko-KR" sz="450" dirty="0">
-                <a:latin typeface="+mn-ea"/>
-              </a:endParaRPr>
-            </a:p>
-            <a:p>
-              <a:pPr algn="ctr"/>
-              <a:endParaRPr lang="en-US" altLang="ko-KR" sz="450" dirty="0">
-                <a:latin typeface="+mn-ea"/>
-              </a:endParaRPr>
-            </a:p>
-            <a:p>
-              <a:pPr algn="ctr"/>
-              <a:endParaRPr lang="en-US" altLang="ko-KR" sz="450" dirty="0">
-                <a:latin typeface="+mn-ea"/>
-              </a:endParaRPr>
-            </a:p>
-            <a:p>
-              <a:pPr algn="ctr"/>
-              <a:endParaRPr lang="en-US" altLang="ko-KR" sz="450" dirty="0">
+              <a:endParaRPr lang="en-US" altLang="ko-KR" sz="3600" dirty="0">
                 <a:latin typeface="+mn-ea"/>
               </a:endParaRPr>
             </a:p>
@@ -5085,8 +3569,8 @@
           </p:nvSpPr>
           <p:spPr>
             <a:xfrm>
-              <a:off x="545664" y="2679037"/>
-              <a:ext cx="4019007" cy="1294225"/>
+              <a:off x="545663" y="2679034"/>
+              <a:ext cx="4019006" cy="646331"/>
             </a:xfrm>
             <a:prstGeom prst="rect">
               <a:avLst/>
@@ -5136,7 +3620,7 @@
             <a:p>
               <a:pPr algn="ctr"/>
               <a:r>
-                <a:rPr lang="ko-KR" altLang="en-US" sz="450" b="1" dirty="0">
+                <a:rPr lang="ko-KR" altLang="en-US" sz="3600" b="1" dirty="0">
                   <a:solidFill>
                     <a:schemeClr val="bg1"/>
                   </a:solidFill>
@@ -5148,6 +3632,1790 @@
           </p:txBody>
         </p:sp>
       </p:grpSp>
+      <p:sp>
+        <p:nvSpPr>
+          <p:cNvPr id="2" name="TextBox 1">
+            <a:extLst>
+              <a:ext uri="{FF2B5EF4-FFF2-40B4-BE49-F238E27FC236}">
+                <a16:creationId xmlns:a16="http://schemas.microsoft.com/office/drawing/2014/main" id="{DD04E150-3344-E153-815A-D2847E49875B}"/>
+              </a:ext>
+            </a:extLst>
+          </p:cNvPr>
+          <p:cNvSpPr txBox="1"/>
+          <p:nvPr/>
+        </p:nvSpPr>
+        <p:spPr>
+          <a:xfrm>
+            <a:off x="526514" y="6173468"/>
+            <a:ext cx="10180800" cy="5293757"/>
+          </a:xfrm>
+          <a:prstGeom prst="rect">
+            <a:avLst/>
+          </a:prstGeom>
+          <a:noFill/>
+          <a:ln w="57150">
+            <a:solidFill>
+              <a:schemeClr val="accent4">
+                <a:lumMod val="50000"/>
+              </a:schemeClr>
+            </a:solidFill>
+          </a:ln>
+        </p:spPr>
+        <p:txBody>
+          <a:bodyPr wrap="square" rtlCol="0">
+            <a:spAutoFit/>
+          </a:bodyPr>
+          <a:lstStyle/>
+          <a:p>
+            <a:pPr algn="ctr"/>
+            <a:endParaRPr lang="en-US" altLang="ko-KR" sz="5400" b="1" dirty="0">
+              <a:latin typeface="+mn-ea"/>
+            </a:endParaRPr>
+          </a:p>
+          <a:p>
+            <a:pPr algn="ctr"/>
+            <a:r>
+              <a:rPr lang="ko-KR" altLang="ko-KR" sz="2400" dirty="0" err="1"/>
+              <a:t>OmniGibson</a:t>
+            </a:r>
+            <a:r>
+              <a:rPr lang="ko-KR" altLang="ko-KR" sz="2400" dirty="0"/>
+              <a:t> 기반 가정환경 시뮬레이션 벤치마크로, 로봇의 장기 작업 </a:t>
+            </a:r>
+            <a:r>
+              <a:rPr lang="ko-KR" altLang="ko-KR" sz="2400" dirty="0" err="1"/>
+              <a:t>수행·이동·양팔</a:t>
+            </a:r>
+            <a:r>
+              <a:rPr lang="ko-KR" altLang="ko-KR" sz="2400" dirty="0"/>
+              <a:t> </a:t>
+            </a:r>
+            <a:r>
+              <a:rPr lang="ko-KR" altLang="ko-KR" sz="2400" dirty="0" err="1"/>
+              <a:t>조작·물체</a:t>
+            </a:r>
+            <a:r>
+              <a:rPr lang="ko-KR" altLang="ko-KR" sz="2400" dirty="0"/>
+              <a:t> 상호작용 능력을 평가하는 데이터셋 및 환경</a:t>
+            </a:r>
+            <a:endParaRPr lang="en-US" altLang="ko-KR" sz="2400" dirty="0">
+              <a:latin typeface="+mn-ea"/>
+            </a:endParaRPr>
+          </a:p>
+          <a:p>
+            <a:pPr algn="ctr"/>
+            <a:endParaRPr lang="en-US" altLang="ko-KR" sz="3600" dirty="0">
+              <a:latin typeface="+mn-ea"/>
+            </a:endParaRPr>
+          </a:p>
+          <a:p>
+            <a:pPr algn="ctr"/>
+            <a:endParaRPr lang="en-US" altLang="ko-KR" sz="3200" dirty="0">
+              <a:latin typeface="+mn-ea"/>
+            </a:endParaRPr>
+          </a:p>
+          <a:p>
+            <a:pPr algn="ctr"/>
+            <a:endParaRPr lang="en-US" altLang="ko-KR" sz="2000" dirty="0">
+              <a:latin typeface="+mn-ea"/>
+            </a:endParaRPr>
+          </a:p>
+          <a:p>
+            <a:pPr algn="ctr"/>
+            <a:endParaRPr lang="en-US" altLang="ko-KR" sz="3600" dirty="0">
+              <a:latin typeface="+mn-ea"/>
+            </a:endParaRPr>
+          </a:p>
+          <a:p>
+            <a:pPr algn="ctr"/>
+            <a:endParaRPr lang="en-US" altLang="ko-KR" sz="3600" dirty="0">
+              <a:latin typeface="+mn-ea"/>
+            </a:endParaRPr>
+          </a:p>
+          <a:p>
+            <a:pPr algn="ctr"/>
+            <a:endParaRPr lang="en-US" altLang="ko-KR" sz="3600" dirty="0">
+              <a:latin typeface="+mn-ea"/>
+            </a:endParaRPr>
+          </a:p>
+          <a:p>
+            <a:pPr algn="ctr"/>
+            <a:endParaRPr lang="en-US" altLang="ko-KR" sz="3600" dirty="0">
+              <a:latin typeface="+mn-ea"/>
+            </a:endParaRPr>
+          </a:p>
+        </p:txBody>
+      </p:sp>
+      <p:pic>
+        <p:nvPicPr>
+          <p:cNvPr id="70" name="그림 69">
+            <a:extLst>
+              <a:ext uri="{FF2B5EF4-FFF2-40B4-BE49-F238E27FC236}">
+                <a16:creationId xmlns:a16="http://schemas.microsoft.com/office/drawing/2014/main" id="{960D056F-BB26-F74E-8730-70D872199D00}"/>
+              </a:ext>
+            </a:extLst>
+          </p:cNvPr>
+          <p:cNvPicPr>
+            <a:picLocks noChangeAspect="1"/>
+          </p:cNvPicPr>
+          <p:nvPr/>
+        </p:nvPicPr>
+        <p:blipFill>
+          <a:blip r:embed="rId3"/>
+          <a:stretch>
+            <a:fillRect/>
+          </a:stretch>
+        </p:blipFill>
+        <p:spPr>
+          <a:xfrm>
+            <a:off x="10844213" y="8738894"/>
+            <a:ext cx="9882248" cy="3722346"/>
+          </a:xfrm>
+          <a:prstGeom prst="rect">
+            <a:avLst/>
+          </a:prstGeom>
+        </p:spPr>
+      </p:pic>
+      <p:sp>
+        <p:nvSpPr>
+          <p:cNvPr id="4" name="TextBox 3">
+            <a:extLst>
+              <a:ext uri="{FF2B5EF4-FFF2-40B4-BE49-F238E27FC236}">
+                <a16:creationId xmlns:a16="http://schemas.microsoft.com/office/drawing/2014/main" id="{F837C99B-9CE4-13DD-7E3A-61A600B1E6F9}"/>
+              </a:ext>
+            </a:extLst>
+          </p:cNvPr>
+          <p:cNvSpPr txBox="1"/>
+          <p:nvPr/>
+        </p:nvSpPr>
+        <p:spPr>
+          <a:xfrm>
+            <a:off x="522513" y="436991"/>
+            <a:ext cx="20338596" cy="1015663"/>
+          </a:xfrm>
+          <a:prstGeom prst="rect">
+            <a:avLst/>
+          </a:prstGeom>
+          <a:noFill/>
+        </p:spPr>
+        <p:txBody>
+          <a:bodyPr wrap="square" rtlCol="0">
+            <a:spAutoFit/>
+          </a:bodyPr>
+          <a:lstStyle/>
+          <a:p>
+            <a:pPr algn="ctr"/>
+            <a:r>
+              <a:rPr lang="en-US" altLang="ko-KR" sz="6000" b="1" dirty="0"/>
+              <a:t>BEHAVIOR-1K </a:t>
+            </a:r>
+            <a:r>
+              <a:rPr lang="ko-KR" altLang="en-US" sz="6000" b="1" dirty="0"/>
+              <a:t>기반 양팔 로봇 정책 학습</a:t>
+            </a:r>
+            <a:endParaRPr lang="ko-KR" altLang="en-US" sz="5400" b="1" dirty="0"/>
+          </a:p>
+        </p:txBody>
+      </p:sp>
+      <p:sp>
+        <p:nvSpPr>
+          <p:cNvPr id="5" name="TextBox 4">
+            <a:extLst>
+              <a:ext uri="{FF2B5EF4-FFF2-40B4-BE49-F238E27FC236}">
+                <a16:creationId xmlns:a16="http://schemas.microsoft.com/office/drawing/2014/main" id="{3EA791E0-6CF5-D63E-BD9E-794012C4381A}"/>
+              </a:ext>
+            </a:extLst>
+          </p:cNvPr>
+          <p:cNvSpPr txBox="1"/>
+          <p:nvPr/>
+        </p:nvSpPr>
+        <p:spPr>
+          <a:xfrm>
+            <a:off x="525846" y="1767279"/>
+            <a:ext cx="10179301" cy="830997"/>
+          </a:xfrm>
+          <a:prstGeom prst="rect">
+            <a:avLst/>
+          </a:prstGeom>
+          <a:noFill/>
+          <a:ln w="57150">
+            <a:solidFill>
+              <a:schemeClr val="accent4">
+                <a:lumMod val="50000"/>
+              </a:schemeClr>
+            </a:solidFill>
+          </a:ln>
+        </p:spPr>
+        <p:txBody>
+          <a:bodyPr wrap="square" rtlCol="0">
+            <a:spAutoFit/>
+          </a:bodyPr>
+          <a:lstStyle/>
+          <a:p>
+            <a:pPr algn="ctr"/>
+            <a:r>
+              <a:rPr lang="ko-KR" altLang="en-US" sz="4800" b="1" dirty="0">
+                <a:latin typeface="+mn-ea"/>
+              </a:rPr>
+              <a:t>지도 교수님</a:t>
+            </a:r>
+            <a:r>
+              <a:rPr lang="en-US" altLang="ko-KR" sz="4800" b="1" dirty="0">
+                <a:latin typeface="+mn-ea"/>
+              </a:rPr>
+              <a:t>: </a:t>
+            </a:r>
+            <a:r>
+              <a:rPr lang="ko-KR" altLang="en-US" sz="4800" b="1" dirty="0" err="1">
+                <a:latin typeface="+mn-ea"/>
+              </a:rPr>
+              <a:t>하종은</a:t>
+            </a:r>
+            <a:r>
+              <a:rPr lang="ko-KR" altLang="en-US" sz="4800" b="1" dirty="0">
+                <a:latin typeface="+mn-ea"/>
+              </a:rPr>
+              <a:t> 교수님</a:t>
+            </a:r>
+          </a:p>
+        </p:txBody>
+      </p:sp>
+      <p:sp>
+        <p:nvSpPr>
+          <p:cNvPr id="6" name="TextBox 5">
+            <a:extLst>
+              <a:ext uri="{FF2B5EF4-FFF2-40B4-BE49-F238E27FC236}">
+                <a16:creationId xmlns:a16="http://schemas.microsoft.com/office/drawing/2014/main" id="{28CC29D6-F5C9-1FEE-2470-ECFA1AD996C6}"/>
+              </a:ext>
+            </a:extLst>
+          </p:cNvPr>
+          <p:cNvSpPr txBox="1"/>
+          <p:nvPr/>
+        </p:nvSpPr>
+        <p:spPr>
+          <a:xfrm>
+            <a:off x="10705529" y="1767279"/>
+            <a:ext cx="10180800" cy="830997"/>
+          </a:xfrm>
+          <a:prstGeom prst="rect">
+            <a:avLst/>
+          </a:prstGeom>
+          <a:noFill/>
+          <a:ln w="57150">
+            <a:solidFill>
+              <a:schemeClr val="accent4">
+                <a:lumMod val="50000"/>
+              </a:schemeClr>
+            </a:solidFill>
+          </a:ln>
+        </p:spPr>
+        <p:txBody>
+          <a:bodyPr wrap="square" rtlCol="0">
+            <a:spAutoFit/>
+          </a:bodyPr>
+          <a:lstStyle/>
+          <a:p>
+            <a:pPr algn="ctr"/>
+            <a:r>
+              <a:rPr lang="ko-KR" altLang="en-US" sz="4800" b="1" dirty="0">
+                <a:latin typeface="+mn-ea"/>
+              </a:rPr>
+              <a:t>조원</a:t>
+            </a:r>
+            <a:r>
+              <a:rPr lang="en-US" altLang="ko-KR" sz="4800" b="1" dirty="0">
+                <a:latin typeface="+mn-ea"/>
+              </a:rPr>
+              <a:t>: </a:t>
+            </a:r>
+            <a:r>
+              <a:rPr lang="ko-KR" altLang="en-US" sz="4800" b="1" dirty="0">
+                <a:latin typeface="+mn-ea"/>
+              </a:rPr>
+              <a:t>강지호</a:t>
+            </a:r>
+            <a:r>
+              <a:rPr lang="en-US" altLang="ko-KR" sz="4800" b="1" dirty="0">
+                <a:latin typeface="+mn-ea"/>
+              </a:rPr>
+              <a:t>, </a:t>
+            </a:r>
+            <a:r>
+              <a:rPr lang="ko-KR" altLang="en-US" sz="4800" b="1" dirty="0" err="1">
+                <a:latin typeface="+mn-ea"/>
+              </a:rPr>
+              <a:t>문병선</a:t>
+            </a:r>
+            <a:endParaRPr lang="ko-KR" altLang="en-US" sz="4800" b="1" dirty="0">
+              <a:latin typeface="+mn-ea"/>
+            </a:endParaRPr>
+          </a:p>
+        </p:txBody>
+      </p:sp>
+      <p:sp>
+        <p:nvSpPr>
+          <p:cNvPr id="7" name="TextBox 6">
+            <a:extLst>
+              <a:ext uri="{FF2B5EF4-FFF2-40B4-BE49-F238E27FC236}">
+                <a16:creationId xmlns:a16="http://schemas.microsoft.com/office/drawing/2014/main" id="{ACF21E68-84F7-27E5-88B3-AD831848791A}"/>
+              </a:ext>
+            </a:extLst>
+          </p:cNvPr>
+          <p:cNvSpPr txBox="1"/>
+          <p:nvPr/>
+        </p:nvSpPr>
+        <p:spPr>
+          <a:xfrm>
+            <a:off x="526393" y="2598276"/>
+            <a:ext cx="10180800" cy="3570208"/>
+          </a:xfrm>
+          <a:prstGeom prst="rect">
+            <a:avLst/>
+          </a:prstGeom>
+          <a:noFill/>
+          <a:ln w="57150">
+            <a:solidFill>
+              <a:schemeClr val="accent4">
+                <a:lumMod val="50000"/>
+              </a:schemeClr>
+            </a:solidFill>
+          </a:ln>
+        </p:spPr>
+        <p:txBody>
+          <a:bodyPr wrap="square" rtlCol="0">
+            <a:spAutoFit/>
+          </a:bodyPr>
+          <a:lstStyle/>
+          <a:p>
+            <a:pPr algn="ctr"/>
+            <a:endParaRPr lang="en-US" altLang="ko-KR" sz="5400" b="1" dirty="0">
+              <a:latin typeface="+mn-ea"/>
+            </a:endParaRPr>
+          </a:p>
+          <a:p>
+            <a:pPr marL="342900" indent="-342900" algn="ctr">
+              <a:buFont typeface="Arial" panose="020B0604020202020204" pitchFamily="34" charset="0"/>
+              <a:buChar char="•"/>
+            </a:pPr>
+            <a:r>
+              <a:rPr lang="en-US" altLang="ko-KR" sz="2400" dirty="0">
+                <a:latin typeface="+mn-ea"/>
+              </a:rPr>
+              <a:t>BEHAVIOR-1K </a:t>
+            </a:r>
+            <a:r>
+              <a:rPr lang="ko-KR" altLang="en-US" sz="2400" dirty="0">
+                <a:latin typeface="+mn-ea"/>
+              </a:rPr>
+              <a:t>환경에서 </a:t>
+            </a:r>
+            <a:r>
+              <a:rPr lang="en-US" altLang="ko-KR" sz="2400" dirty="0">
+                <a:latin typeface="+mn-ea"/>
+              </a:rPr>
+              <a:t>Vision-Language-Action </a:t>
+            </a:r>
+            <a:r>
+              <a:rPr lang="ko-KR" altLang="en-US" sz="2400" dirty="0">
+                <a:latin typeface="+mn-ea"/>
+              </a:rPr>
+              <a:t>기반 양팔 로봇 조작 정책을 구현하고 평가</a:t>
+            </a:r>
+            <a:endParaRPr lang="en-US" altLang="ko-KR" sz="2400" dirty="0">
+              <a:latin typeface="+mn-ea"/>
+            </a:endParaRPr>
+          </a:p>
+          <a:p>
+            <a:pPr marL="285750" indent="-285750" algn="ctr">
+              <a:buFont typeface="Arial" panose="020B0604020202020204" pitchFamily="34" charset="0"/>
+              <a:buChar char="•"/>
+            </a:pPr>
+            <a:endParaRPr lang="en-US" altLang="ko-KR" dirty="0"/>
+          </a:p>
+          <a:p>
+            <a:pPr marL="342900" indent="-342900" algn="ctr">
+              <a:buFont typeface="Arial" panose="020B0604020202020204" pitchFamily="34" charset="0"/>
+              <a:buChar char="•"/>
+            </a:pPr>
+            <a:r>
+              <a:rPr lang="ko-KR" altLang="ko-KR" sz="2400" dirty="0"/>
+              <a:t>Pi0.5 기반 모델을 활용하여 장기 시퀀스 작업 수행 성능을 분석하고, </a:t>
+            </a:r>
+            <a:r>
+              <a:rPr lang="ko-KR" altLang="ko-KR" sz="2400" dirty="0" err="1"/>
+              <a:t>Flow</a:t>
+            </a:r>
+            <a:r>
+              <a:rPr lang="ko-KR" altLang="ko-KR" sz="2400" dirty="0"/>
+              <a:t> </a:t>
+            </a:r>
+            <a:r>
+              <a:rPr lang="ko-KR" altLang="ko-KR" sz="2400" dirty="0" err="1"/>
+              <a:t>Matching</a:t>
+            </a:r>
+            <a:r>
+              <a:rPr lang="ko-KR" altLang="ko-KR" sz="2400" dirty="0"/>
+              <a:t> 기반 정책 학습 구조를 적용</a:t>
+            </a:r>
+            <a:endParaRPr lang="en-US" altLang="ko-KR" sz="2400" dirty="0"/>
+          </a:p>
+          <a:p>
+            <a:pPr marL="342900" indent="-342900" algn="ctr">
+              <a:buFont typeface="Arial" panose="020B0604020202020204" pitchFamily="34" charset="0"/>
+              <a:buChar char="•"/>
+            </a:pPr>
+            <a:endParaRPr lang="en-US" altLang="ko-KR" dirty="0"/>
+          </a:p>
+          <a:p>
+            <a:pPr marL="342900" indent="-342900" algn="ctr">
+              <a:buFont typeface="Arial" panose="020B0604020202020204" pitchFamily="34" charset="0"/>
+              <a:buChar char="•"/>
+            </a:pPr>
+            <a:r>
+              <a:rPr lang="ko-KR" altLang="ko-KR" sz="2400" dirty="0" err="1"/>
+              <a:t>OmniGibson</a:t>
+            </a:r>
+            <a:r>
+              <a:rPr lang="ko-KR" altLang="ko-KR" sz="2400" dirty="0"/>
+              <a:t> 환경에서 다양한 작업 수행 결과를 통해 모델의 실효성 검증</a:t>
+            </a:r>
+            <a:endParaRPr lang="en-US" altLang="ko-KR" sz="2400" dirty="0"/>
+          </a:p>
+          <a:p>
+            <a:pPr algn="ctr"/>
+            <a:endParaRPr lang="en-US" altLang="ko-KR" sz="1600" dirty="0"/>
+          </a:p>
+        </p:txBody>
+      </p:sp>
+      <p:sp>
+        <p:nvSpPr>
+          <p:cNvPr id="8" name="TextBox 7">
+            <a:extLst>
+              <a:ext uri="{FF2B5EF4-FFF2-40B4-BE49-F238E27FC236}">
+                <a16:creationId xmlns:a16="http://schemas.microsoft.com/office/drawing/2014/main" id="{2E8A191C-5F83-480C-7015-4DA81E72DAFF}"/>
+              </a:ext>
+            </a:extLst>
+          </p:cNvPr>
+          <p:cNvSpPr txBox="1"/>
+          <p:nvPr/>
+        </p:nvSpPr>
+        <p:spPr>
+          <a:xfrm>
+            <a:off x="542326" y="2598276"/>
+            <a:ext cx="4019006" cy="646331"/>
+          </a:xfrm>
+          <a:prstGeom prst="rect">
+            <a:avLst/>
+          </a:prstGeom>
+          <a:gradFill>
+            <a:gsLst>
+              <a:gs pos="0">
+                <a:schemeClr val="accent4">
+                  <a:shade val="30000"/>
+                  <a:satMod val="115000"/>
+                  <a:lumMod val="48000"/>
+                  <a:alpha val="95000"/>
+                </a:schemeClr>
+              </a:gs>
+              <a:gs pos="50000">
+                <a:schemeClr val="accent4">
+                  <a:lumMod val="50000"/>
+                  <a:shade val="67500"/>
+                  <a:satMod val="115000"/>
+                </a:schemeClr>
+              </a:gs>
+              <a:gs pos="100000">
+                <a:schemeClr val="accent4">
+                  <a:lumMod val="50000"/>
+                  <a:shade val="100000"/>
+                  <a:satMod val="115000"/>
+                </a:schemeClr>
+              </a:gs>
+            </a:gsLst>
+            <a:path path="rect">
+              <a:fillToRect l="50000" t="50000" r="50000" b="50000"/>
+            </a:path>
+          </a:gradFill>
+          <a:ln w="57150">
+            <a:solidFill>
+              <a:schemeClr val="accent4">
+                <a:lumMod val="50000"/>
+              </a:schemeClr>
+            </a:solidFill>
+          </a:ln>
+        </p:spPr>
+        <p:txBody>
+          <a:bodyPr wrap="square" rtlCol="0">
+            <a:spAutoFit/>
+          </a:bodyPr>
+          <a:lstStyle/>
+          <a:p>
+            <a:pPr algn="ctr"/>
+            <a:r>
+              <a:rPr lang="ko-KR" altLang="en-US" sz="3600" b="1" dirty="0">
+                <a:solidFill>
+                  <a:schemeClr val="bg1"/>
+                </a:solidFill>
+                <a:latin typeface="+mn-ea"/>
+              </a:rPr>
+              <a:t>연구 목적</a:t>
+            </a:r>
+          </a:p>
+        </p:txBody>
+      </p:sp>
+      <p:sp>
+        <p:nvSpPr>
+          <p:cNvPr id="11" name="TextBox 10">
+            <a:extLst>
+              <a:ext uri="{FF2B5EF4-FFF2-40B4-BE49-F238E27FC236}">
+                <a16:creationId xmlns:a16="http://schemas.microsoft.com/office/drawing/2014/main" id="{3836297D-C66E-2FF3-A2C5-91FB5F095DDA}"/>
+              </a:ext>
+            </a:extLst>
+          </p:cNvPr>
+          <p:cNvSpPr txBox="1"/>
+          <p:nvPr/>
+        </p:nvSpPr>
+        <p:spPr>
+          <a:xfrm>
+            <a:off x="10705820" y="2588074"/>
+            <a:ext cx="10180800" cy="5324535"/>
+          </a:xfrm>
+          <a:prstGeom prst="rect">
+            <a:avLst/>
+          </a:prstGeom>
+          <a:noFill/>
+          <a:ln w="57150">
+            <a:solidFill>
+              <a:schemeClr val="accent4">
+                <a:lumMod val="50000"/>
+              </a:schemeClr>
+            </a:solidFill>
+          </a:ln>
+        </p:spPr>
+        <p:txBody>
+          <a:bodyPr wrap="square" rtlCol="0">
+            <a:spAutoFit/>
+          </a:bodyPr>
+          <a:lstStyle/>
+          <a:p>
+            <a:pPr algn="ctr"/>
+            <a:endParaRPr lang="en-US" altLang="ko-KR" sz="3600" b="1" dirty="0">
+              <a:latin typeface="+mn-ea"/>
+            </a:endParaRPr>
+          </a:p>
+          <a:p>
+            <a:pPr algn="ctr"/>
+            <a:endParaRPr lang="en-US" altLang="ko-KR" sz="3600" dirty="0">
+              <a:latin typeface="+mn-ea"/>
+            </a:endParaRPr>
+          </a:p>
+          <a:p>
+            <a:pPr algn="ctr"/>
+            <a:endParaRPr lang="en-US" altLang="ko-KR" sz="3600" dirty="0">
+              <a:latin typeface="+mn-ea"/>
+            </a:endParaRPr>
+          </a:p>
+          <a:p>
+            <a:pPr algn="ctr"/>
+            <a:endParaRPr lang="en-US" altLang="ko-KR" sz="3600" dirty="0">
+              <a:latin typeface="+mn-ea"/>
+            </a:endParaRPr>
+          </a:p>
+          <a:p>
+            <a:pPr algn="ctr"/>
+            <a:endParaRPr lang="en-US" altLang="ko-KR" sz="3600" dirty="0">
+              <a:latin typeface="+mn-ea"/>
+            </a:endParaRPr>
+          </a:p>
+          <a:p>
+            <a:pPr algn="ctr"/>
+            <a:endParaRPr lang="en-US" altLang="ko-KR" sz="3600" dirty="0">
+              <a:latin typeface="+mn-ea"/>
+            </a:endParaRPr>
+          </a:p>
+          <a:p>
+            <a:pPr algn="ctr"/>
+            <a:endParaRPr lang="en-US" altLang="ko-KR" sz="3600" dirty="0">
+              <a:latin typeface="+mn-ea"/>
+            </a:endParaRPr>
+          </a:p>
+          <a:p>
+            <a:pPr algn="ctr"/>
+            <a:endParaRPr lang="en-US" altLang="ko-KR" sz="3600" dirty="0">
+              <a:latin typeface="+mn-ea"/>
+            </a:endParaRPr>
+          </a:p>
+          <a:p>
+            <a:pPr algn="ctr"/>
+            <a:endParaRPr lang="en-US" altLang="ko-KR" sz="3600" dirty="0">
+              <a:latin typeface="+mn-ea"/>
+            </a:endParaRPr>
+          </a:p>
+          <a:p>
+            <a:pPr algn="ctr"/>
+            <a:endParaRPr lang="en-US" altLang="ko-KR" sz="1600" dirty="0">
+              <a:latin typeface="+mn-ea"/>
+            </a:endParaRPr>
+          </a:p>
+        </p:txBody>
+      </p:sp>
+      <p:sp>
+        <p:nvSpPr>
+          <p:cNvPr id="12" name="TextBox 11">
+            <a:extLst>
+              <a:ext uri="{FF2B5EF4-FFF2-40B4-BE49-F238E27FC236}">
+                <a16:creationId xmlns:a16="http://schemas.microsoft.com/office/drawing/2014/main" id="{EE4BA792-A182-B99F-83BD-30DF7E0EBF88}"/>
+              </a:ext>
+            </a:extLst>
+          </p:cNvPr>
+          <p:cNvSpPr txBox="1"/>
+          <p:nvPr/>
+        </p:nvSpPr>
+        <p:spPr>
+          <a:xfrm>
+            <a:off x="10712132" y="2598276"/>
+            <a:ext cx="8112004" cy="646331"/>
+          </a:xfrm>
+          <a:prstGeom prst="rect">
+            <a:avLst/>
+          </a:prstGeom>
+          <a:gradFill>
+            <a:gsLst>
+              <a:gs pos="0">
+                <a:schemeClr val="accent4">
+                  <a:shade val="30000"/>
+                  <a:satMod val="115000"/>
+                  <a:lumMod val="48000"/>
+                  <a:alpha val="95000"/>
+                </a:schemeClr>
+              </a:gs>
+              <a:gs pos="50000">
+                <a:schemeClr val="accent4">
+                  <a:lumMod val="50000"/>
+                  <a:shade val="67500"/>
+                  <a:satMod val="115000"/>
+                </a:schemeClr>
+              </a:gs>
+              <a:gs pos="100000">
+                <a:schemeClr val="accent4">
+                  <a:lumMod val="50000"/>
+                  <a:shade val="100000"/>
+                  <a:satMod val="115000"/>
+                </a:schemeClr>
+              </a:gs>
+            </a:gsLst>
+            <a:path path="rect">
+              <a:fillToRect l="50000" t="50000" r="50000" b="50000"/>
+            </a:path>
+          </a:gradFill>
+          <a:ln w="57150">
+            <a:solidFill>
+              <a:schemeClr val="accent4">
+                <a:lumMod val="50000"/>
+              </a:schemeClr>
+            </a:solidFill>
+          </a:ln>
+        </p:spPr>
+        <p:txBody>
+          <a:bodyPr wrap="square" rtlCol="0">
+            <a:spAutoFit/>
+          </a:bodyPr>
+          <a:lstStyle/>
+          <a:p>
+            <a:pPr algn="ctr"/>
+            <a:r>
+              <a:rPr lang="ko-KR" altLang="en-US" sz="3600" b="1" dirty="0">
+                <a:solidFill>
+                  <a:schemeClr val="bg1"/>
+                </a:solidFill>
+                <a:latin typeface="+mn-ea"/>
+              </a:rPr>
+              <a:t>주차별 진행 상황 및 역할 분담</a:t>
+            </a:r>
+          </a:p>
+        </p:txBody>
+      </p:sp>
+      <p:sp>
+        <p:nvSpPr>
+          <p:cNvPr id="13" name="TextBox 12">
+            <a:extLst>
+              <a:ext uri="{FF2B5EF4-FFF2-40B4-BE49-F238E27FC236}">
+                <a16:creationId xmlns:a16="http://schemas.microsoft.com/office/drawing/2014/main" id="{C4E37084-1706-89B6-3818-C425F45E15B4}"/>
+              </a:ext>
+            </a:extLst>
+          </p:cNvPr>
+          <p:cNvSpPr txBox="1"/>
+          <p:nvPr/>
+        </p:nvSpPr>
+        <p:spPr>
+          <a:xfrm>
+            <a:off x="10685715" y="3343435"/>
+            <a:ext cx="5084650" cy="3416320"/>
+          </a:xfrm>
+          <a:prstGeom prst="rect">
+            <a:avLst/>
+          </a:prstGeom>
+          <a:noFill/>
+          <a:ln w="57150">
+            <a:noFill/>
+            <a:prstDash val="dash"/>
+          </a:ln>
+        </p:spPr>
+        <p:txBody>
+          <a:bodyPr wrap="square" rtlCol="0">
+            <a:spAutoFit/>
+          </a:bodyPr>
+          <a:lstStyle/>
+          <a:p>
+            <a:r>
+              <a:rPr lang="en-US" altLang="ko-KR" sz="2400" dirty="0"/>
+              <a:t> 1</a:t>
+            </a:r>
+            <a:r>
+              <a:rPr lang="ko-KR" altLang="en-US" sz="2400" dirty="0"/>
+              <a:t>주차</a:t>
+            </a:r>
+            <a:r>
+              <a:rPr lang="en-US" altLang="ko-KR" sz="2400" dirty="0"/>
+              <a:t>: </a:t>
+            </a:r>
+            <a:r>
+              <a:rPr lang="ko-KR" altLang="en-US" sz="2400" dirty="0"/>
+              <a:t>프로젝트 주제 선정 및 개발 </a:t>
+            </a:r>
+            <a:r>
+              <a:rPr lang="en-US" altLang="ko-KR" sz="2400" dirty="0"/>
+              <a:t>		</a:t>
+            </a:r>
+            <a:r>
+              <a:rPr lang="ko-KR" altLang="en-US" sz="2400" dirty="0"/>
+              <a:t>환경 조사</a:t>
+            </a:r>
+            <a:endParaRPr lang="en-US" altLang="ko-KR" sz="2400" dirty="0"/>
+          </a:p>
+          <a:p>
+            <a:r>
+              <a:rPr lang="en-US" altLang="ko-KR" sz="2400" dirty="0"/>
+              <a:t> 2</a:t>
+            </a:r>
+            <a:r>
+              <a:rPr lang="ko-KR" altLang="en-US" sz="2400" dirty="0"/>
+              <a:t>주차</a:t>
+            </a:r>
+            <a:r>
+              <a:rPr lang="en-US" altLang="ko-KR" sz="2400" dirty="0"/>
+              <a:t>: </a:t>
+            </a:r>
+            <a:r>
+              <a:rPr lang="ko-KR" altLang="ko-KR" sz="2400" dirty="0"/>
+              <a:t>OpenPI·Pi0.5 기반 코드 구조 </a:t>
+            </a:r>
+            <a:r>
+              <a:rPr lang="en-US" altLang="ko-KR" sz="2400" dirty="0"/>
+              <a:t>		</a:t>
+            </a:r>
+            <a:r>
+              <a:rPr lang="ko-KR" altLang="ko-KR" sz="2400" dirty="0"/>
+              <a:t>분석 및 학습 파이프라인 구축</a:t>
+            </a:r>
+            <a:endParaRPr lang="en-US" altLang="ko-KR" sz="2400" dirty="0"/>
+          </a:p>
+          <a:p>
+            <a:r>
+              <a:rPr lang="en-US" altLang="ko-KR" sz="2400" dirty="0"/>
+              <a:t> 3</a:t>
+            </a:r>
+            <a:r>
+              <a:rPr lang="ko-KR" altLang="en-US" sz="2400" dirty="0"/>
+              <a:t>주차</a:t>
+            </a:r>
+            <a:r>
+              <a:rPr lang="en-US" altLang="ko-KR" sz="2400" dirty="0"/>
+              <a:t>: </a:t>
+            </a:r>
+            <a:r>
+              <a:rPr lang="ko-KR" altLang="ko-KR" sz="2400" dirty="0"/>
+              <a:t>모델 구조 설계 및 실험 환경 </a:t>
+            </a:r>
+            <a:r>
+              <a:rPr lang="en-US" altLang="ko-KR" sz="2400" dirty="0"/>
+              <a:t>		</a:t>
+            </a:r>
+            <a:r>
+              <a:rPr lang="ko-KR" altLang="ko-KR" sz="2400" dirty="0"/>
+              <a:t>구성</a:t>
+            </a:r>
+            <a:endParaRPr lang="en-US" altLang="ko-KR" sz="2400" dirty="0"/>
+          </a:p>
+          <a:p>
+            <a:r>
+              <a:rPr lang="en-US" altLang="ko-KR" sz="2400" dirty="0"/>
+              <a:t> 4</a:t>
+            </a:r>
+            <a:r>
+              <a:rPr lang="ko-KR" altLang="en-US" sz="2400" dirty="0"/>
+              <a:t>주차</a:t>
+            </a:r>
+            <a:r>
+              <a:rPr lang="en-US" altLang="ko-KR" sz="2400" dirty="0"/>
+              <a:t>:  </a:t>
+            </a:r>
+            <a:r>
+              <a:rPr lang="ko-KR" altLang="ko-KR" sz="2400" dirty="0" err="1"/>
+              <a:t>OmniGibson</a:t>
+            </a:r>
+            <a:r>
+              <a:rPr lang="ko-KR" altLang="ko-KR" sz="2400" dirty="0"/>
+              <a:t> 평가 환경 구축</a:t>
+            </a:r>
+            <a:endParaRPr lang="en-US" altLang="ko-KR" sz="2400" dirty="0"/>
+          </a:p>
+          <a:p>
+            <a:r>
+              <a:rPr lang="en-US" altLang="ko-KR" sz="2400" dirty="0"/>
+              <a:t> 5</a:t>
+            </a:r>
+            <a:r>
+              <a:rPr lang="ko-KR" altLang="en-US" sz="2400" dirty="0"/>
+              <a:t>주차</a:t>
+            </a:r>
+            <a:r>
+              <a:rPr lang="en-US" altLang="ko-KR" sz="2400" dirty="0"/>
+              <a:t>: </a:t>
+            </a:r>
+            <a:r>
+              <a:rPr lang="ko-KR" altLang="ko-KR" sz="2400" dirty="0"/>
+              <a:t>실데이터 학습 파이프라인 </a:t>
+            </a:r>
+            <a:r>
+              <a:rPr lang="en-US" altLang="ko-KR" sz="2400" dirty="0"/>
+              <a:t>			</a:t>
+            </a:r>
+            <a:r>
+              <a:rPr lang="ko-KR" altLang="ko-KR" sz="2400" dirty="0"/>
+              <a:t>구현</a:t>
+            </a:r>
+            <a:endParaRPr lang="en-US" altLang="ko-KR" sz="2400" dirty="0"/>
+          </a:p>
+        </p:txBody>
+      </p:sp>
+      <p:sp>
+        <p:nvSpPr>
+          <p:cNvPr id="18" name="TextBox 17">
+            <a:extLst>
+              <a:ext uri="{FF2B5EF4-FFF2-40B4-BE49-F238E27FC236}">
+                <a16:creationId xmlns:a16="http://schemas.microsoft.com/office/drawing/2014/main" id="{2CFBE48B-B887-151D-2BF6-D02E76534210}"/>
+              </a:ext>
+            </a:extLst>
+          </p:cNvPr>
+          <p:cNvSpPr txBox="1"/>
+          <p:nvPr/>
+        </p:nvSpPr>
+        <p:spPr>
+          <a:xfrm>
+            <a:off x="15776460" y="3306162"/>
+            <a:ext cx="5084650" cy="3693319"/>
+          </a:xfrm>
+          <a:prstGeom prst="rect">
+            <a:avLst/>
+          </a:prstGeom>
+          <a:noFill/>
+          <a:ln w="57150">
+            <a:noFill/>
+            <a:prstDash val="dash"/>
+          </a:ln>
+        </p:spPr>
+        <p:txBody>
+          <a:bodyPr wrap="square" rtlCol="0">
+            <a:spAutoFit/>
+          </a:bodyPr>
+          <a:lstStyle/>
+          <a:p>
+            <a:r>
+              <a:rPr lang="en-US" altLang="ko-KR" sz="2400" dirty="0"/>
+              <a:t> 6</a:t>
+            </a:r>
+            <a:r>
+              <a:rPr lang="ko-KR" altLang="en-US" sz="2400" dirty="0"/>
+              <a:t>주차</a:t>
+            </a:r>
+            <a:r>
+              <a:rPr lang="en-US" altLang="ko-KR" sz="2400" dirty="0"/>
+              <a:t>: </a:t>
+            </a:r>
+            <a:r>
+              <a:rPr lang="ko-KR" altLang="ko-KR" sz="2400" dirty="0"/>
+              <a:t>메모리 최적화 및 학습 성능 </a:t>
+            </a:r>
+            <a:r>
+              <a:rPr lang="en-US" altLang="ko-KR" sz="2400" dirty="0"/>
+              <a:t>		</a:t>
+            </a:r>
+            <a:r>
+              <a:rPr lang="ko-KR" altLang="ko-KR" sz="2400" dirty="0"/>
+              <a:t>분석</a:t>
+            </a:r>
+            <a:r>
+              <a:rPr lang="en-US" altLang="ko-KR" sz="2400" dirty="0"/>
+              <a:t>  </a:t>
+            </a:r>
+          </a:p>
+          <a:p>
+            <a:r>
+              <a:rPr lang="en-US" altLang="ko-KR" sz="2400" dirty="0"/>
+              <a:t>7</a:t>
+            </a:r>
+            <a:r>
+              <a:rPr lang="ko-KR" altLang="en-US" sz="2400" dirty="0"/>
+              <a:t>주차</a:t>
+            </a:r>
+            <a:r>
+              <a:rPr lang="en-US" altLang="ko-KR" sz="2400" dirty="0"/>
+              <a:t>: </a:t>
+            </a:r>
+            <a:r>
+              <a:rPr lang="ko-KR" altLang="ko-KR" sz="2400" dirty="0"/>
+              <a:t>학습 및 W&amp;B 로깅 시스템 </a:t>
+            </a:r>
+            <a:r>
+              <a:rPr lang="en-US" altLang="ko-KR" sz="2400" dirty="0"/>
+              <a:t>			</a:t>
+            </a:r>
+            <a:r>
+              <a:rPr lang="ko-KR" altLang="ko-KR" sz="2400" dirty="0"/>
+              <a:t>구축</a:t>
+            </a:r>
+            <a:endParaRPr lang="en-US" altLang="ko-KR" sz="2400" dirty="0"/>
+          </a:p>
+          <a:p>
+            <a:r>
+              <a:rPr lang="en-US" altLang="ko-KR" sz="2400" dirty="0"/>
+              <a:t> 8</a:t>
+            </a:r>
+            <a:r>
+              <a:rPr lang="ko-KR" altLang="en-US" sz="2400" dirty="0"/>
+              <a:t>주차</a:t>
+            </a:r>
+            <a:r>
+              <a:rPr lang="en-US" altLang="ko-KR" sz="2400" dirty="0"/>
+              <a:t>: </a:t>
+            </a:r>
+            <a:r>
+              <a:rPr lang="ko-KR" altLang="en-US" sz="2400" dirty="0"/>
+              <a:t>경량화 모델 학습</a:t>
+            </a:r>
+            <a:endParaRPr lang="en-US" altLang="ko-KR" sz="2400" dirty="0"/>
+          </a:p>
+          <a:p>
+            <a:r>
+              <a:rPr lang="en-US" altLang="ko-KR" sz="2400" dirty="0"/>
+              <a:t> 9</a:t>
+            </a:r>
+            <a:r>
+              <a:rPr lang="ko-KR" altLang="en-US" sz="2400" dirty="0"/>
+              <a:t>주차</a:t>
+            </a:r>
+            <a:r>
+              <a:rPr lang="en-US" altLang="ko-KR" sz="2400" dirty="0"/>
+              <a:t>: </a:t>
+            </a:r>
+            <a:r>
+              <a:rPr lang="ko-KR" altLang="en-US" sz="2400" dirty="0"/>
+              <a:t>경량화 모델 학습</a:t>
+            </a:r>
+            <a:endParaRPr lang="en-US" altLang="ko-KR" sz="2400" dirty="0"/>
+          </a:p>
+          <a:p>
+            <a:r>
+              <a:rPr lang="en-US" altLang="ko-KR" sz="2400" dirty="0"/>
+              <a:t> 10</a:t>
+            </a:r>
+            <a:r>
+              <a:rPr lang="ko-KR" altLang="en-US" sz="2400" dirty="0"/>
+              <a:t>주차</a:t>
+            </a:r>
+            <a:r>
+              <a:rPr lang="en-US" altLang="ko-KR" sz="2400" dirty="0"/>
+              <a:t>: </a:t>
+            </a:r>
+            <a:r>
+              <a:rPr lang="ko-KR" altLang="en-US" sz="2400" dirty="0"/>
+              <a:t>경량화 모델 학습</a:t>
+            </a:r>
+            <a:endParaRPr lang="en-US" altLang="ko-KR" sz="2400" dirty="0"/>
+          </a:p>
+          <a:p>
+            <a:r>
+              <a:rPr lang="en-US" altLang="ko-KR" sz="2400" dirty="0"/>
+              <a:t> 11</a:t>
+            </a:r>
+            <a:r>
+              <a:rPr lang="ko-KR" altLang="en-US" sz="2400" dirty="0"/>
+              <a:t>주차</a:t>
+            </a:r>
+            <a:r>
+              <a:rPr lang="en-US" altLang="ko-KR" sz="2400" dirty="0"/>
+              <a:t>: rollout </a:t>
+            </a:r>
+            <a:r>
+              <a:rPr lang="ko-KR" altLang="en-US" sz="2400" dirty="0"/>
+              <a:t>안정화 및 평가 개선</a:t>
+            </a:r>
+            <a:endParaRPr lang="en-US" altLang="ko-KR" sz="2400" dirty="0"/>
+          </a:p>
+          <a:p>
+            <a:r>
+              <a:rPr lang="en-US" altLang="ko-KR" sz="2400" dirty="0"/>
+              <a:t> 12</a:t>
+            </a:r>
+            <a:r>
+              <a:rPr lang="ko-KR" altLang="en-US" sz="2400" dirty="0"/>
+              <a:t>주차</a:t>
+            </a:r>
+            <a:r>
+              <a:rPr lang="en-US" altLang="ko-KR" sz="2400" dirty="0"/>
+              <a:t>: </a:t>
+            </a:r>
+            <a:r>
+              <a:rPr lang="ko-KR" altLang="ko-KR" sz="2400" dirty="0"/>
+              <a:t>최종 실험 결과 정리</a:t>
+            </a:r>
+            <a:endParaRPr lang="en-US" altLang="ko-KR" sz="2400" dirty="0"/>
+          </a:p>
+          <a:p>
+            <a:endParaRPr lang="ko-KR" altLang="en-US" dirty="0"/>
+          </a:p>
+        </p:txBody>
+      </p:sp>
+      <p:sp>
+        <p:nvSpPr>
+          <p:cNvPr id="24" name="TextBox 23">
+            <a:extLst>
+              <a:ext uri="{FF2B5EF4-FFF2-40B4-BE49-F238E27FC236}">
+                <a16:creationId xmlns:a16="http://schemas.microsoft.com/office/drawing/2014/main" id="{2028F00E-856C-97B8-EDC1-27E6B218DCA2}"/>
+              </a:ext>
+            </a:extLst>
+          </p:cNvPr>
+          <p:cNvSpPr txBox="1"/>
+          <p:nvPr/>
+        </p:nvSpPr>
+        <p:spPr>
+          <a:xfrm>
+            <a:off x="10691811" y="6968060"/>
+            <a:ext cx="10169298" cy="830997"/>
+          </a:xfrm>
+          <a:prstGeom prst="rect">
+            <a:avLst/>
+          </a:prstGeom>
+          <a:noFill/>
+          <a:ln w="57150">
+            <a:noFill/>
+          </a:ln>
+        </p:spPr>
+        <p:txBody>
+          <a:bodyPr wrap="square" rtlCol="0">
+            <a:spAutoFit/>
+          </a:bodyPr>
+          <a:lstStyle/>
+          <a:p>
+            <a:r>
+              <a:rPr lang="ko-KR" altLang="en-US" sz="2400" dirty="0">
+                <a:latin typeface="+mn-ea"/>
+              </a:rPr>
+              <a:t> 강지호</a:t>
+            </a:r>
+            <a:r>
+              <a:rPr lang="en-US" altLang="ko-KR" sz="2400" dirty="0">
+                <a:latin typeface="+mn-ea"/>
+              </a:rPr>
+              <a:t>: </a:t>
+            </a:r>
+            <a:r>
+              <a:rPr lang="ko-KR" altLang="ko-KR" sz="2400" dirty="0"/>
+              <a:t>VLA 모델 </a:t>
+            </a:r>
+            <a:r>
+              <a:rPr lang="ko-KR" altLang="ko-KR" sz="2400" dirty="0" err="1"/>
+              <a:t>구현·학습</a:t>
+            </a:r>
+            <a:r>
+              <a:rPr lang="ko-KR" altLang="ko-KR" sz="2400" dirty="0"/>
+              <a:t> 및 핵심 알고리즘 실험 진행</a:t>
+            </a:r>
+            <a:endParaRPr lang="en-US" altLang="ko-KR" sz="2400" dirty="0">
+              <a:latin typeface="+mn-ea"/>
+            </a:endParaRPr>
+          </a:p>
+          <a:p>
+            <a:r>
+              <a:rPr lang="ko-KR" altLang="en-US" sz="2400" dirty="0">
+                <a:latin typeface="+mn-ea"/>
+              </a:rPr>
+              <a:t> </a:t>
+            </a:r>
+            <a:r>
+              <a:rPr lang="ko-KR" altLang="en-US" sz="2400" dirty="0" err="1">
+                <a:latin typeface="+mn-ea"/>
+              </a:rPr>
+              <a:t>문병선</a:t>
+            </a:r>
+            <a:r>
+              <a:rPr lang="en-US" altLang="ko-KR" sz="2400" dirty="0">
+                <a:latin typeface="+mn-ea"/>
+              </a:rPr>
+              <a:t>: </a:t>
+            </a:r>
+            <a:r>
+              <a:rPr lang="ko-KR" altLang="ko-KR" sz="2400" dirty="0" err="1"/>
+              <a:t>OmniGibson</a:t>
+            </a:r>
+            <a:r>
+              <a:rPr lang="ko-KR" altLang="ko-KR" sz="2400" dirty="0"/>
+              <a:t> 평가 환경 </a:t>
+            </a:r>
+            <a:r>
+              <a:rPr lang="ko-KR" altLang="ko-KR" sz="2400" dirty="0" err="1"/>
+              <a:t>구축·영상</a:t>
+            </a:r>
+            <a:r>
+              <a:rPr lang="ko-KR" altLang="ko-KR" sz="2400" dirty="0"/>
+              <a:t> 생성 및 결과 정리</a:t>
+            </a:r>
+            <a:endParaRPr lang="en-US" altLang="ko-KR" sz="2400" dirty="0">
+              <a:latin typeface="+mn-ea"/>
+            </a:endParaRPr>
+          </a:p>
+        </p:txBody>
+      </p:sp>
+      <p:sp>
+        <p:nvSpPr>
+          <p:cNvPr id="27" name="TextBox 26">
+            <a:extLst>
+              <a:ext uri="{FF2B5EF4-FFF2-40B4-BE49-F238E27FC236}">
+                <a16:creationId xmlns:a16="http://schemas.microsoft.com/office/drawing/2014/main" id="{AD26A61D-12C0-0739-A1E6-47055D9A7D9B}"/>
+              </a:ext>
+            </a:extLst>
+          </p:cNvPr>
+          <p:cNvSpPr txBox="1"/>
+          <p:nvPr/>
+        </p:nvSpPr>
+        <p:spPr>
+          <a:xfrm>
+            <a:off x="526393" y="11468788"/>
+            <a:ext cx="10180800" cy="8340745"/>
+          </a:xfrm>
+          <a:prstGeom prst="rect">
+            <a:avLst/>
+          </a:prstGeom>
+          <a:noFill/>
+          <a:ln w="57150">
+            <a:solidFill>
+              <a:schemeClr val="accent4">
+                <a:lumMod val="50000"/>
+              </a:schemeClr>
+            </a:solidFill>
+          </a:ln>
+        </p:spPr>
+        <p:txBody>
+          <a:bodyPr wrap="square" rtlCol="0">
+            <a:spAutoFit/>
+          </a:bodyPr>
+          <a:lstStyle/>
+          <a:p>
+            <a:pPr algn="ctr"/>
+            <a:endParaRPr lang="en-US" altLang="ko-KR" sz="5400" b="1" dirty="0">
+              <a:latin typeface="+mn-ea"/>
+            </a:endParaRPr>
+          </a:p>
+          <a:p>
+            <a:pPr algn="ctr"/>
+            <a:endParaRPr lang="en-US" altLang="ko-KR" sz="3600" dirty="0">
+              <a:latin typeface="+mn-ea"/>
+            </a:endParaRPr>
+          </a:p>
+          <a:p>
+            <a:pPr algn="ctr"/>
+            <a:endParaRPr lang="en-US" altLang="ko-KR" sz="3600" dirty="0">
+              <a:latin typeface="+mn-ea"/>
+            </a:endParaRPr>
+          </a:p>
+          <a:p>
+            <a:pPr algn="ctr"/>
+            <a:endParaRPr lang="en-US" altLang="ko-KR" sz="3600" dirty="0">
+              <a:latin typeface="+mn-ea"/>
+            </a:endParaRPr>
+          </a:p>
+          <a:p>
+            <a:pPr algn="ctr"/>
+            <a:endParaRPr lang="en-US" altLang="ko-KR" sz="3600" dirty="0">
+              <a:latin typeface="+mn-ea"/>
+            </a:endParaRPr>
+          </a:p>
+          <a:p>
+            <a:pPr algn="ctr"/>
+            <a:endParaRPr lang="en-US" altLang="ko-KR" sz="3600" dirty="0">
+              <a:latin typeface="+mn-ea"/>
+            </a:endParaRPr>
+          </a:p>
+          <a:p>
+            <a:pPr algn="ctr"/>
+            <a:endParaRPr lang="en-US" altLang="ko-KR" sz="3600" dirty="0">
+              <a:latin typeface="+mn-ea"/>
+            </a:endParaRPr>
+          </a:p>
+          <a:p>
+            <a:pPr algn="ctr"/>
+            <a:endParaRPr lang="en-US" altLang="ko-KR" sz="3600" dirty="0">
+              <a:latin typeface="+mn-ea"/>
+            </a:endParaRPr>
+          </a:p>
+          <a:p>
+            <a:pPr marL="342900" indent="-342900">
+              <a:buFont typeface="Arial" panose="020B0604020202020204" pitchFamily="34" charset="0"/>
+              <a:buChar char="•"/>
+            </a:pPr>
+            <a:r>
+              <a:rPr lang="en-US" altLang="ko-KR" sz="2400" b="1" dirty="0">
+                <a:latin typeface="+mn-ea"/>
+              </a:rPr>
+              <a:t>Model Architecture</a:t>
+            </a:r>
+          </a:p>
+          <a:p>
+            <a:r>
+              <a:rPr lang="en-US" altLang="ko-KR" sz="2200" dirty="0">
+                <a:latin typeface="+mn-ea"/>
+              </a:rPr>
+              <a:t> </a:t>
+            </a:r>
+            <a:r>
+              <a:rPr lang="en-US" altLang="ko-KR" sz="2200" b="1" dirty="0">
+                <a:latin typeface="+mn-ea"/>
+              </a:rPr>
+              <a:t>Backbone:</a:t>
+            </a:r>
+            <a:r>
+              <a:rPr lang="en-US" altLang="ko-KR" sz="2200" dirty="0">
+                <a:latin typeface="+mn-ea"/>
+              </a:rPr>
+              <a:t> </a:t>
+            </a:r>
+            <a:r>
+              <a:rPr lang="ko-KR" altLang="ko-KR" sz="2200" dirty="0" err="1">
+                <a:latin typeface="+mn-ea"/>
+              </a:rPr>
+              <a:t>OpenPI의</a:t>
+            </a:r>
+            <a:r>
+              <a:rPr lang="ko-KR" altLang="ko-KR" sz="2200" dirty="0">
+                <a:latin typeface="+mn-ea"/>
+              </a:rPr>
+              <a:t> Pi0.5 기반 구조</a:t>
+            </a:r>
+            <a:endParaRPr lang="en-US" altLang="ko-KR" sz="2200" dirty="0">
+              <a:latin typeface="+mn-ea"/>
+            </a:endParaRPr>
+          </a:p>
+          <a:p>
+            <a:r>
+              <a:rPr lang="ko-KR" altLang="ko-KR" sz="2200" dirty="0">
+                <a:latin typeface="+mn-ea"/>
+              </a:rPr>
+              <a:t>(</a:t>
+            </a:r>
+            <a:r>
+              <a:rPr lang="ko-KR" altLang="ko-KR" sz="2200" dirty="0" err="1">
+                <a:latin typeface="+mn-ea"/>
+              </a:rPr>
+              <a:t>SigLIP</a:t>
+            </a:r>
+            <a:r>
+              <a:rPr lang="en-US" altLang="ko-KR" sz="2200" dirty="0">
+                <a:latin typeface="+mn-ea"/>
+              </a:rPr>
+              <a:t> </a:t>
+            </a:r>
+            <a:r>
+              <a:rPr lang="ko-KR" altLang="ko-KR" sz="2200" dirty="0">
+                <a:latin typeface="+mn-ea"/>
+              </a:rPr>
+              <a:t>+</a:t>
+            </a:r>
+            <a:r>
+              <a:rPr lang="en-US" altLang="ko-KR" sz="2200" dirty="0">
+                <a:latin typeface="+mn-ea"/>
+              </a:rPr>
+              <a:t> </a:t>
+            </a:r>
+            <a:r>
+              <a:rPr lang="ko-KR" altLang="ko-KR" sz="2200" dirty="0" err="1">
+                <a:latin typeface="+mn-ea"/>
+              </a:rPr>
+              <a:t>PaliGemma</a:t>
+            </a:r>
+            <a:r>
+              <a:rPr lang="en-US" altLang="ko-KR" sz="2200" dirty="0">
+                <a:latin typeface="+mn-ea"/>
+              </a:rPr>
+              <a:t> + </a:t>
+            </a:r>
+            <a:r>
+              <a:rPr lang="ko-KR" altLang="ko-KR" sz="2200" dirty="0" err="1">
+                <a:latin typeface="+mn-ea"/>
+              </a:rPr>
+              <a:t>Flow</a:t>
+            </a:r>
+            <a:r>
+              <a:rPr lang="en-US" altLang="ko-KR" sz="2200" dirty="0">
+                <a:latin typeface="+mn-ea"/>
+              </a:rPr>
+              <a:t> </a:t>
+            </a:r>
+            <a:r>
+              <a:rPr lang="ko-KR" altLang="ko-KR" sz="2200" dirty="0" err="1">
+                <a:latin typeface="+mn-ea"/>
+              </a:rPr>
+              <a:t>Matching</a:t>
+            </a:r>
+            <a:r>
+              <a:rPr lang="en-US" altLang="ko-KR" sz="2200" dirty="0">
+                <a:latin typeface="+mn-ea"/>
+              </a:rPr>
+              <a:t> </a:t>
+            </a:r>
+            <a:r>
+              <a:rPr lang="ko-KR" altLang="ko-KR" sz="2200" dirty="0" err="1">
+                <a:latin typeface="+mn-ea"/>
+              </a:rPr>
+              <a:t>Action</a:t>
+            </a:r>
+            <a:r>
+              <a:rPr lang="ko-KR" altLang="ko-KR" sz="2200" dirty="0">
+                <a:latin typeface="+mn-ea"/>
+              </a:rPr>
+              <a:t> </a:t>
+            </a:r>
+            <a:r>
+              <a:rPr lang="ko-KR" altLang="ko-KR" sz="2200" dirty="0" err="1">
+                <a:latin typeface="+mn-ea"/>
+              </a:rPr>
+              <a:t>Expert</a:t>
+            </a:r>
+            <a:r>
+              <a:rPr lang="ko-KR" altLang="ko-KR" sz="2200" dirty="0">
+                <a:latin typeface="+mn-ea"/>
+              </a:rPr>
+              <a:t>)</a:t>
+            </a:r>
+            <a:endParaRPr lang="en-US" altLang="ko-KR" sz="2200" dirty="0">
+              <a:latin typeface="+mn-ea"/>
+            </a:endParaRPr>
+          </a:p>
+          <a:p>
+            <a:endParaRPr lang="en-US" altLang="ko-KR" sz="2400" dirty="0">
+              <a:latin typeface="+mn-ea"/>
+            </a:endParaRPr>
+          </a:p>
+          <a:p>
+            <a:pPr lvl="0" defTabSz="914400" eaLnBrk="0" fontAlgn="base" hangingPunct="0">
+              <a:spcBef>
+                <a:spcPct val="0"/>
+              </a:spcBef>
+              <a:spcAft>
+                <a:spcPct val="0"/>
+              </a:spcAft>
+            </a:pPr>
+            <a:r>
+              <a:rPr lang="en-US" altLang="ko-KR" sz="2400" b="1" dirty="0">
+                <a:latin typeface="Arial" panose="020B0604020202020204" pitchFamily="34" charset="0"/>
+              </a:rPr>
+              <a:t> </a:t>
+            </a:r>
+            <a:r>
+              <a:rPr lang="ko-KR" altLang="ko-KR" sz="2200" b="1" dirty="0">
+                <a:latin typeface="Arial" panose="020B0604020202020204" pitchFamily="34" charset="0"/>
+              </a:rPr>
+              <a:t>System 2 </a:t>
+            </a:r>
+            <a:r>
+              <a:rPr lang="ko-KR" altLang="ko-KR" sz="2200" b="1" dirty="0" err="1">
+                <a:latin typeface="Arial" panose="020B0604020202020204" pitchFamily="34" charset="0"/>
+              </a:rPr>
+              <a:t>Stage</a:t>
+            </a:r>
+            <a:r>
+              <a:rPr lang="ko-KR" altLang="ko-KR" sz="2200" b="1" dirty="0">
+                <a:latin typeface="Arial" panose="020B0604020202020204" pitchFamily="34" charset="0"/>
+              </a:rPr>
+              <a:t> </a:t>
+            </a:r>
+            <a:r>
+              <a:rPr lang="ko-KR" altLang="ko-KR" sz="2200" b="1" dirty="0" err="1">
+                <a:latin typeface="Arial" panose="020B0604020202020204" pitchFamily="34" charset="0"/>
+              </a:rPr>
+              <a:t>Tracking</a:t>
+            </a:r>
+            <a:r>
+              <a:rPr lang="ko-KR" altLang="ko-KR" sz="2200" dirty="0">
+                <a:latin typeface="Arial" panose="020B0604020202020204" pitchFamily="34" charset="0"/>
+              </a:rPr>
+              <a:t> : 현재 작업 진행 단계 예측 및 추적 </a:t>
+            </a:r>
+          </a:p>
+          <a:p>
+            <a:pPr lvl="0" defTabSz="914400" eaLnBrk="0" fontAlgn="base" hangingPunct="0">
+              <a:spcBef>
+                <a:spcPct val="0"/>
+              </a:spcBef>
+              <a:spcAft>
+                <a:spcPct val="0"/>
+              </a:spcAft>
+            </a:pPr>
+            <a:r>
+              <a:rPr lang="en-US" altLang="ko-KR" sz="2200" b="1" dirty="0">
+                <a:latin typeface="Arial" panose="020B0604020202020204" pitchFamily="34" charset="0"/>
+              </a:rPr>
+              <a:t> </a:t>
+            </a:r>
+            <a:r>
+              <a:rPr lang="ko-KR" altLang="ko-KR" sz="2200" b="1" dirty="0" err="1">
+                <a:latin typeface="Arial" panose="020B0604020202020204" pitchFamily="34" charset="0"/>
+              </a:rPr>
+              <a:t>Task</a:t>
+            </a:r>
+            <a:r>
+              <a:rPr lang="ko-KR" altLang="ko-KR" sz="2200" b="1" dirty="0">
+                <a:latin typeface="Arial" panose="020B0604020202020204" pitchFamily="34" charset="0"/>
+              </a:rPr>
+              <a:t> </a:t>
+            </a:r>
+            <a:r>
+              <a:rPr lang="ko-KR" altLang="ko-KR" sz="2200" b="1" dirty="0" err="1">
+                <a:latin typeface="Arial" panose="020B0604020202020204" pitchFamily="34" charset="0"/>
+              </a:rPr>
+              <a:t>Embedding</a:t>
+            </a:r>
+            <a:r>
+              <a:rPr lang="ko-KR" altLang="ko-KR" sz="2200" dirty="0">
+                <a:latin typeface="Arial" panose="020B0604020202020204" pitchFamily="34" charset="0"/>
+              </a:rPr>
+              <a:t> : 작업 종류를 벡터로 표현하는 조건 정보 </a:t>
+            </a:r>
+          </a:p>
+          <a:p>
+            <a:pPr lvl="0" defTabSz="914400" eaLnBrk="0" fontAlgn="base" hangingPunct="0">
+              <a:spcBef>
+                <a:spcPct val="0"/>
+              </a:spcBef>
+              <a:spcAft>
+                <a:spcPct val="0"/>
+              </a:spcAft>
+            </a:pPr>
+            <a:r>
+              <a:rPr lang="en-US" altLang="ko-KR" sz="2200" b="1" dirty="0">
+                <a:latin typeface="Arial" panose="020B0604020202020204" pitchFamily="34" charset="0"/>
+              </a:rPr>
+              <a:t> </a:t>
+            </a:r>
+            <a:r>
+              <a:rPr lang="ko-KR" altLang="ko-KR" sz="2200" b="1" dirty="0">
+                <a:latin typeface="Arial" panose="020B0604020202020204" pitchFamily="34" charset="0"/>
+              </a:rPr>
+              <a:t>FAST </a:t>
+            </a:r>
+            <a:r>
+              <a:rPr lang="ko-KR" altLang="ko-KR" sz="2200" b="1" dirty="0" err="1">
+                <a:latin typeface="Arial" panose="020B0604020202020204" pitchFamily="34" charset="0"/>
+              </a:rPr>
+              <a:t>Auxiliary</a:t>
+            </a:r>
+            <a:r>
+              <a:rPr lang="ko-KR" altLang="ko-KR" sz="2200" dirty="0">
+                <a:latin typeface="Arial" panose="020B0604020202020204" pitchFamily="34" charset="0"/>
+              </a:rPr>
+              <a:t> : 행동 시퀀스를 토큰화해 보조 학습</a:t>
+            </a:r>
+          </a:p>
+          <a:p>
+            <a:pPr lvl="0" defTabSz="914400" eaLnBrk="0" fontAlgn="base" hangingPunct="0">
+              <a:spcBef>
+                <a:spcPct val="0"/>
+              </a:spcBef>
+              <a:spcAft>
+                <a:spcPct val="0"/>
+              </a:spcAft>
+            </a:pPr>
+            <a:r>
+              <a:rPr lang="en-US" altLang="ko-KR" sz="2200" b="1" dirty="0">
+                <a:latin typeface="Arial" panose="020B0604020202020204" pitchFamily="34" charset="0"/>
+              </a:rPr>
+              <a:t> </a:t>
+            </a:r>
+            <a:r>
+              <a:rPr lang="ko-KR" altLang="ko-KR" sz="2200" b="1" dirty="0" err="1">
+                <a:latin typeface="Arial" panose="020B0604020202020204" pitchFamily="34" charset="0"/>
+              </a:rPr>
+              <a:t>Correlated</a:t>
+            </a:r>
+            <a:r>
+              <a:rPr lang="ko-KR" altLang="ko-KR" sz="2200" b="1" dirty="0">
+                <a:latin typeface="Arial" panose="020B0604020202020204" pitchFamily="34" charset="0"/>
+              </a:rPr>
+              <a:t> </a:t>
+            </a:r>
+            <a:r>
+              <a:rPr lang="ko-KR" altLang="ko-KR" sz="2200" b="1" dirty="0" err="1">
+                <a:latin typeface="Arial" panose="020B0604020202020204" pitchFamily="34" charset="0"/>
+              </a:rPr>
+              <a:t>Noise</a:t>
+            </a:r>
+            <a:r>
+              <a:rPr lang="ko-KR" altLang="ko-KR" sz="2200" dirty="0">
+                <a:latin typeface="Arial" panose="020B0604020202020204" pitchFamily="34" charset="0"/>
+              </a:rPr>
+              <a:t> : 행동 간 </a:t>
+            </a:r>
+            <a:r>
+              <a:rPr lang="ko-KR" altLang="ko-KR" sz="2200" dirty="0" err="1">
+                <a:latin typeface="Arial" panose="020B0604020202020204" pitchFamily="34" charset="0"/>
+              </a:rPr>
+              <a:t>시간적·공간적</a:t>
+            </a:r>
+            <a:r>
+              <a:rPr lang="ko-KR" altLang="ko-KR" sz="2200" dirty="0">
+                <a:latin typeface="Arial" panose="020B0604020202020204" pitchFamily="34" charset="0"/>
+              </a:rPr>
+              <a:t> 상관관계를 반영한 노이즈 </a:t>
+            </a:r>
+          </a:p>
+          <a:p>
+            <a:pPr lvl="0" defTabSz="914400" eaLnBrk="0" fontAlgn="base" hangingPunct="0">
+              <a:spcBef>
+                <a:spcPct val="0"/>
+              </a:spcBef>
+              <a:spcAft>
+                <a:spcPct val="0"/>
+              </a:spcAft>
+            </a:pPr>
+            <a:r>
+              <a:rPr lang="en-US" altLang="ko-KR" sz="2200" b="1" dirty="0">
+                <a:latin typeface="Arial" panose="020B0604020202020204" pitchFamily="34" charset="0"/>
+              </a:rPr>
+              <a:t> </a:t>
+            </a:r>
+            <a:r>
+              <a:rPr lang="ko-KR" altLang="ko-KR" sz="2200" b="1" dirty="0">
+                <a:latin typeface="Arial" panose="020B0604020202020204" pitchFamily="34" charset="0"/>
+              </a:rPr>
+              <a:t>KV </a:t>
+            </a:r>
+            <a:r>
+              <a:rPr lang="ko-KR" altLang="ko-KR" sz="2200" b="1" dirty="0" err="1">
+                <a:latin typeface="Arial" panose="020B0604020202020204" pitchFamily="34" charset="0"/>
+              </a:rPr>
+              <a:t>Transform</a:t>
+            </a:r>
+            <a:r>
+              <a:rPr lang="ko-KR" altLang="ko-KR" sz="2200" dirty="0">
+                <a:latin typeface="Arial" panose="020B0604020202020204" pitchFamily="34" charset="0"/>
+              </a:rPr>
+              <a:t> : </a:t>
+            </a:r>
+            <a:r>
+              <a:rPr lang="ko-KR" altLang="ko-KR" sz="2200" dirty="0" err="1">
+                <a:latin typeface="Arial" panose="020B0604020202020204" pitchFamily="34" charset="0"/>
+              </a:rPr>
+              <a:t>VLM의</a:t>
+            </a:r>
+            <a:r>
+              <a:rPr lang="ko-KR" altLang="ko-KR" sz="2200" dirty="0">
+                <a:latin typeface="Arial" panose="020B0604020202020204" pitchFamily="34" charset="0"/>
+              </a:rPr>
+              <a:t> </a:t>
+            </a:r>
+            <a:r>
+              <a:rPr lang="ko-KR" altLang="ko-KR" sz="2200" dirty="0" err="1">
+                <a:latin typeface="Arial" panose="020B0604020202020204" pitchFamily="34" charset="0"/>
+              </a:rPr>
+              <a:t>Key</a:t>
+            </a:r>
+            <a:r>
+              <a:rPr lang="ko-KR" altLang="ko-KR" sz="2200" dirty="0">
+                <a:latin typeface="Arial" panose="020B0604020202020204" pitchFamily="34" charset="0"/>
+              </a:rPr>
+              <a:t>/</a:t>
+            </a:r>
+            <a:r>
+              <a:rPr lang="ko-KR" altLang="ko-KR" sz="2200" dirty="0" err="1">
+                <a:latin typeface="Arial" panose="020B0604020202020204" pitchFamily="34" charset="0"/>
+              </a:rPr>
+              <a:t>Value</a:t>
+            </a:r>
+            <a:r>
+              <a:rPr lang="ko-KR" altLang="ko-KR" sz="2200" dirty="0">
+                <a:latin typeface="Arial" panose="020B0604020202020204" pitchFamily="34" charset="0"/>
+              </a:rPr>
+              <a:t> 정보를 조합해 </a:t>
+            </a:r>
+            <a:r>
+              <a:rPr lang="ko-KR" altLang="ko-KR" sz="2200" dirty="0" err="1">
+                <a:latin typeface="Arial" panose="020B0604020202020204" pitchFamily="34" charset="0"/>
+              </a:rPr>
+              <a:t>attention</a:t>
+            </a:r>
+            <a:r>
+              <a:rPr lang="ko-KR" altLang="ko-KR" sz="2200" dirty="0">
+                <a:latin typeface="Arial" panose="020B0604020202020204" pitchFamily="34" charset="0"/>
+              </a:rPr>
+              <a:t> 활용 개선 </a:t>
+            </a:r>
+          </a:p>
+          <a:p>
+            <a:pPr lvl="0" defTabSz="914400" eaLnBrk="0" fontAlgn="base" hangingPunct="0">
+              <a:spcBef>
+                <a:spcPct val="0"/>
+              </a:spcBef>
+              <a:spcAft>
+                <a:spcPct val="0"/>
+              </a:spcAft>
+            </a:pPr>
+            <a:r>
+              <a:rPr lang="en-US" altLang="ko-KR" sz="2200" b="1" dirty="0">
+                <a:latin typeface="Arial" panose="020B0604020202020204" pitchFamily="34" charset="0"/>
+              </a:rPr>
+              <a:t> </a:t>
+            </a:r>
+            <a:r>
+              <a:rPr lang="ko-KR" altLang="ko-KR" sz="2200" b="1" dirty="0" err="1">
+                <a:latin typeface="Arial" panose="020B0604020202020204" pitchFamily="34" charset="0"/>
+              </a:rPr>
+              <a:t>Custom</a:t>
+            </a:r>
+            <a:r>
+              <a:rPr lang="ko-KR" altLang="ko-KR" sz="2200" b="1" dirty="0">
+                <a:latin typeface="Arial" panose="020B0604020202020204" pitchFamily="34" charset="0"/>
+              </a:rPr>
+              <a:t> </a:t>
+            </a:r>
+            <a:r>
+              <a:rPr lang="ko-KR" altLang="ko-KR" sz="2200" b="1" dirty="0" err="1">
+                <a:latin typeface="Arial" panose="020B0604020202020204" pitchFamily="34" charset="0"/>
+              </a:rPr>
+              <a:t>Attention</a:t>
+            </a:r>
+            <a:r>
+              <a:rPr lang="ko-KR" altLang="ko-KR" sz="2200" b="1" dirty="0">
+                <a:latin typeface="Arial" panose="020B0604020202020204" pitchFamily="34" charset="0"/>
+              </a:rPr>
+              <a:t> </a:t>
+            </a:r>
+            <a:r>
+              <a:rPr lang="ko-KR" altLang="ko-KR" sz="2200" b="1" dirty="0" err="1">
+                <a:latin typeface="Arial" panose="020B0604020202020204" pitchFamily="34" charset="0"/>
+              </a:rPr>
+              <a:t>Masks</a:t>
+            </a:r>
+            <a:r>
+              <a:rPr lang="ko-KR" altLang="ko-KR" sz="2200" dirty="0">
+                <a:latin typeface="Arial" panose="020B0604020202020204" pitchFamily="34" charset="0"/>
+              </a:rPr>
+              <a:t> : </a:t>
+            </a:r>
+            <a:r>
+              <a:rPr lang="ko-KR" altLang="ko-KR" sz="2200" dirty="0" err="1">
+                <a:latin typeface="Arial" panose="020B0604020202020204" pitchFamily="34" charset="0"/>
+              </a:rPr>
+              <a:t>token</a:t>
+            </a:r>
+            <a:r>
+              <a:rPr lang="ko-KR" altLang="ko-KR" sz="2200" dirty="0">
+                <a:latin typeface="Arial" panose="020B0604020202020204" pitchFamily="34" charset="0"/>
+              </a:rPr>
+              <a:t> 간 정보 흐름을 제한해 학습 안정성 향상</a:t>
+            </a:r>
+            <a:endParaRPr lang="en-US" altLang="ko-KR" sz="2200" dirty="0">
+              <a:latin typeface="+mn-ea"/>
+            </a:endParaRPr>
+          </a:p>
+        </p:txBody>
+      </p:sp>
+      <p:sp>
+        <p:nvSpPr>
+          <p:cNvPr id="28" name="TextBox 27">
+            <a:extLst>
+              <a:ext uri="{FF2B5EF4-FFF2-40B4-BE49-F238E27FC236}">
+                <a16:creationId xmlns:a16="http://schemas.microsoft.com/office/drawing/2014/main" id="{FA8B75AA-D85E-C3A4-7671-DD508ADE16BA}"/>
+              </a:ext>
+            </a:extLst>
+          </p:cNvPr>
+          <p:cNvSpPr txBox="1"/>
+          <p:nvPr/>
+        </p:nvSpPr>
+        <p:spPr>
+          <a:xfrm>
+            <a:off x="530855" y="11468788"/>
+            <a:ext cx="4019006" cy="646331"/>
+          </a:xfrm>
+          <a:prstGeom prst="rect">
+            <a:avLst/>
+          </a:prstGeom>
+          <a:gradFill flip="none" rotWithShape="1">
+            <a:gsLst>
+              <a:gs pos="0">
+                <a:schemeClr val="accent4">
+                  <a:shade val="30000"/>
+                  <a:satMod val="115000"/>
+                  <a:lumMod val="48000"/>
+                  <a:alpha val="95000"/>
+                </a:schemeClr>
+              </a:gs>
+              <a:gs pos="50000">
+                <a:schemeClr val="accent4">
+                  <a:lumMod val="50000"/>
+                  <a:shade val="67500"/>
+                  <a:satMod val="115000"/>
+                </a:schemeClr>
+              </a:gs>
+              <a:gs pos="100000">
+                <a:schemeClr val="accent4">
+                  <a:lumMod val="50000"/>
+                  <a:shade val="100000"/>
+                  <a:satMod val="115000"/>
+                </a:schemeClr>
+              </a:gs>
+            </a:gsLst>
+            <a:path path="rect">
+              <a:fillToRect l="50000" t="50000" r="50000" b="50000"/>
+            </a:path>
+            <a:tileRect/>
+          </a:gradFill>
+          <a:ln w="57150">
+            <a:solidFill>
+              <a:schemeClr val="accent4">
+                <a:lumMod val="50000"/>
+              </a:schemeClr>
+            </a:solidFill>
+          </a:ln>
+        </p:spPr>
+        <p:txBody>
+          <a:bodyPr wrap="square" rtlCol="0">
+            <a:spAutoFit/>
+          </a:bodyPr>
+          <a:lstStyle/>
+          <a:p>
+            <a:pPr algn="ctr"/>
+            <a:r>
+              <a:rPr lang="ko-KR" altLang="en-US" sz="3600" b="1" dirty="0">
+                <a:solidFill>
+                  <a:schemeClr val="bg1"/>
+                </a:solidFill>
+                <a:latin typeface="+mn-ea"/>
+              </a:rPr>
+              <a:t>모델 구조</a:t>
+            </a:r>
+          </a:p>
+        </p:txBody>
+      </p:sp>
       <p:grpSp>
         <p:nvGrpSpPr>
           <p:cNvPr id="35" name="그룹 34">
@@ -5162,10 +5430,10 @@
         </p:nvGrpSpPr>
         <p:grpSpPr>
           <a:xfrm>
-            <a:off x="3780825" y="5882483"/>
-            <a:ext cx="1269629" cy="473078"/>
-            <a:chOff x="518849" y="2676208"/>
-            <a:chExt cx="10169298" cy="3580629"/>
+            <a:off x="10704929" y="16574975"/>
+            <a:ext cx="10180800" cy="6084000"/>
+            <a:chOff x="518849" y="571413"/>
+            <a:chExt cx="10169298" cy="6009061"/>
           </a:xfrm>
         </p:grpSpPr>
         <p:sp>
@@ -5182,8 +5450,8 @@
           </p:nvSpPr>
           <p:spPr>
             <a:xfrm>
-              <a:off x="518849" y="2676208"/>
-              <a:ext cx="10169298" cy="3580629"/>
+              <a:off x="518849" y="571413"/>
+              <a:ext cx="10169298" cy="6009061"/>
             </a:xfrm>
             <a:prstGeom prst="rect">
               <a:avLst/>
@@ -5204,123 +5472,236 @@
             <a:lstStyle/>
             <a:p>
               <a:pPr algn="ctr"/>
-              <a:endParaRPr lang="en-US" altLang="ko-KR" sz="674" b="1" dirty="0">
+              <a:endParaRPr lang="en-US" altLang="ko-KR" sz="4800" b="1" dirty="0">
                 <a:latin typeface="+mn-ea"/>
               </a:endParaRPr>
             </a:p>
             <a:p>
-              <a:pPr marL="42813" indent="-42813">
-                <a:buFont typeface="Arial" panose="020B0604020202020204" pitchFamily="34" charset="0"/>
-                <a:buChar char="•"/>
-              </a:pPr>
               <a:r>
-                <a:rPr lang="ko-KR" altLang="ko-KR" sz="300" dirty="0" err="1"/>
-                <a:t>Loss는</a:t>
+                <a:rPr lang="en-US" altLang="ko-KR" sz="2400" b="1" dirty="0"/>
+                <a:t> </a:t>
               </a:r>
               <a:r>
-                <a:rPr lang="ko-KR" altLang="ko-KR" sz="300" dirty="0"/>
-                <a:t> 안정적으로 감소했으나 실제 </a:t>
+                <a:rPr lang="ko-KR" altLang="ko-KR" sz="2400" b="1" dirty="0"/>
+                <a:t>1. 학습 및 파이프라인 검증</a:t>
+              </a:r>
+            </a:p>
+            <a:p>
+              <a:r>
+                <a:rPr lang="en-US" altLang="ko-KR" sz="2200" dirty="0"/>
+                <a:t> </a:t>
               </a:r>
               <a:r>
-                <a:rPr lang="ko-KR" altLang="ko-KR" sz="300" dirty="0" err="1"/>
+                <a:rPr lang="ko-KR" altLang="ko-KR" sz="2200" dirty="0" err="1"/>
+                <a:t>Total</a:t>
+              </a:r>
+              <a:r>
+                <a:rPr lang="ko-KR" altLang="ko-KR" sz="2200" dirty="0"/>
+                <a:t> </a:t>
+              </a:r>
+              <a:r>
+                <a:rPr lang="ko-KR" altLang="ko-KR" sz="2200" dirty="0" err="1"/>
+                <a:t>loss</a:t>
+              </a:r>
+              <a:r>
+                <a:rPr lang="ko-KR" altLang="ko-KR" sz="2200" dirty="0"/>
+                <a:t> 감소 및 </a:t>
+              </a:r>
+              <a:r>
+                <a:rPr lang="ko-KR" altLang="ko-KR" sz="2200" dirty="0" err="1"/>
+                <a:t>stage</a:t>
+              </a:r>
+              <a:r>
+                <a:rPr lang="ko-KR" altLang="ko-KR" sz="2200" dirty="0"/>
+                <a:t> </a:t>
+              </a:r>
+              <a:r>
+                <a:rPr lang="ko-KR" altLang="ko-KR" sz="2200" dirty="0" err="1"/>
+                <a:t>accuracy</a:t>
+              </a:r>
+              <a:r>
+                <a:rPr lang="ko-KR" altLang="ko-KR" sz="2200" dirty="0"/>
+                <a:t> 향상 </a:t>
+              </a:r>
+            </a:p>
+            <a:p>
+              <a:r>
+                <a:rPr lang="en-US" altLang="ko-KR" sz="2200" dirty="0"/>
+                <a:t> </a:t>
+              </a:r>
+              <a:r>
+                <a:rPr lang="ko-KR" altLang="ko-KR" sz="2200" dirty="0"/>
+                <a:t>W&amp;B </a:t>
+              </a:r>
+              <a:r>
+                <a:rPr lang="ko-KR" altLang="ko-KR" sz="2200" dirty="0" err="1"/>
+                <a:t>logging</a:t>
+              </a:r>
+              <a:r>
+                <a:rPr lang="ko-KR" altLang="ko-KR" sz="2200" dirty="0"/>
+                <a:t> / </a:t>
+              </a:r>
+              <a:r>
+                <a:rPr lang="ko-KR" altLang="ko-KR" sz="2200" dirty="0" err="1"/>
+                <a:t>checkpoint</a:t>
+              </a:r>
+              <a:r>
+                <a:rPr lang="ko-KR" altLang="ko-KR" sz="2200" dirty="0"/>
+                <a:t> 저장 검증 </a:t>
+              </a:r>
+            </a:p>
+            <a:p>
+              <a:r>
+                <a:rPr lang="en-US" altLang="ko-KR" sz="2200" dirty="0"/>
+                <a:t> </a:t>
+              </a:r>
+              <a:r>
+                <a:rPr lang="ko-KR" altLang="ko-KR" sz="2200" dirty="0"/>
+                <a:t>A100–RTX5070 기반 </a:t>
+              </a:r>
+              <a:r>
+                <a:rPr lang="ko-KR" altLang="ko-KR" sz="2200" dirty="0" err="1"/>
                 <a:t>rollout</a:t>
               </a:r>
               <a:r>
-                <a:rPr lang="ko-KR" altLang="ko-KR" sz="300" dirty="0"/>
-                <a:t> 성능과 완전히 비례하지 않음</a:t>
+                <a:rPr lang="ko-KR" altLang="ko-KR" sz="2200" dirty="0"/>
+                <a:t> </a:t>
               </a:r>
-              <a:endParaRPr lang="en-US" altLang="ko-KR" sz="300" dirty="0"/>
+              <a:r>
+                <a:rPr lang="ko-KR" altLang="ko-KR" sz="2200" dirty="0" err="1"/>
+                <a:t>pipeline</a:t>
+              </a:r>
+              <a:r>
+                <a:rPr lang="ko-KR" altLang="ko-KR" sz="2200" dirty="0"/>
+                <a:t> 구축 </a:t>
+              </a:r>
+              <a:endParaRPr lang="en-US" altLang="ko-KR" sz="2200" dirty="0"/>
             </a:p>
             <a:p>
-              <a:pPr marL="42813" indent="-42813">
-                <a:buFont typeface="Arial" panose="020B0604020202020204" pitchFamily="34" charset="0"/>
-                <a:buChar char="•"/>
-              </a:pPr>
+              <a:endParaRPr lang="ko-KR" altLang="ko-KR" sz="1400" dirty="0"/>
+            </a:p>
+            <a:p>
               <a:r>
-                <a:rPr lang="ko-KR" altLang="ko-KR" sz="300" dirty="0" err="1"/>
-                <a:t>Out</a:t>
+                <a:rPr lang="en-US" altLang="ko-KR" sz="2400" b="1" dirty="0"/>
+                <a:t> 2. </a:t>
               </a:r>
               <a:r>
-                <a:rPr lang="ko-KR" altLang="ko-KR" sz="300" dirty="0"/>
-                <a:t>-of-</a:t>
+                <a:rPr lang="ko-KR" altLang="en-US" sz="2400" b="1" dirty="0"/>
+                <a:t>결과 비교</a:t>
+              </a:r>
+              <a:endParaRPr lang="en-US" altLang="ko-KR" sz="2400" b="1" dirty="0"/>
+            </a:p>
+            <a:p>
+              <a:endParaRPr lang="en-US" altLang="ko-KR" sz="2400" b="1" dirty="0"/>
+            </a:p>
+            <a:p>
+              <a:endParaRPr lang="en-US" altLang="ko-KR" sz="2400" b="1" dirty="0"/>
+            </a:p>
+            <a:p>
+              <a:endParaRPr lang="en-US" altLang="ko-KR" sz="2400" b="1" dirty="0"/>
+            </a:p>
+            <a:p>
+              <a:endParaRPr lang="en-US" altLang="ko-KR" sz="2400" b="1" dirty="0"/>
+            </a:p>
+            <a:p>
+              <a:endParaRPr lang="en-US" altLang="ko-KR" sz="2000" b="1" dirty="0"/>
+            </a:p>
+            <a:p>
+              <a:r>
+                <a:rPr lang="en-US" altLang="ko-KR" sz="2400" b="1" dirty="0"/>
+                <a:t> 3</a:t>
               </a:r>
               <a:r>
-                <a:rPr lang="ko-KR" altLang="ko-KR" sz="300" dirty="0" err="1"/>
-                <a:t>Distribution</a:t>
+                <a:rPr lang="ko-KR" altLang="ko-KR" sz="2400" b="1" dirty="0"/>
+                <a:t>. </a:t>
               </a:r>
               <a:r>
-                <a:rPr lang="ko-KR" altLang="ko-KR" sz="300" dirty="0"/>
-                <a:t>(OOD) 상태 취약성</a:t>
+                <a:rPr lang="ko-KR" altLang="ko-KR" sz="2400" b="1" dirty="0" err="1"/>
+                <a:t>Rollout</a:t>
               </a:r>
-              <a:endParaRPr lang="en-US" altLang="ko-KR" sz="450" dirty="0">
-                <a:latin typeface="+mn-ea"/>
-              </a:endParaRPr>
+              <a:r>
+                <a:rPr lang="ko-KR" altLang="ko-KR" sz="2400" b="1" dirty="0"/>
+                <a:t> 성능 한계</a:t>
+              </a:r>
             </a:p>
             <a:p>
-              <a:pPr marL="42813" indent="-42813">
-                <a:buFont typeface="Arial" panose="020B0604020202020204" pitchFamily="34" charset="0"/>
-                <a:buChar char="•"/>
-              </a:pPr>
               <a:r>
-                <a:rPr lang="ko-KR" altLang="ko-KR" sz="300" dirty="0" err="1"/>
+                <a:rPr lang="en-US" altLang="ko-KR" sz="2400" dirty="0"/>
+                <a:t> </a:t>
+              </a:r>
+              <a:r>
+                <a:rPr lang="ko-KR" altLang="ko-KR" sz="2200" dirty="0"/>
+                <a:t>OOD 상태에서 </a:t>
+              </a:r>
+              <a:r>
+                <a:rPr lang="ko-KR" altLang="ko-KR" sz="2200" dirty="0" err="1"/>
+                <a:t>freeze·반복</a:t>
+              </a:r>
+              <a:r>
+                <a:rPr lang="ko-KR" altLang="ko-KR" sz="2200" dirty="0"/>
+                <a:t> 행동 발생 </a:t>
+              </a:r>
+            </a:p>
+            <a:p>
+              <a:r>
+                <a:rPr lang="en-US" altLang="ko-KR" sz="2200" dirty="0"/>
+                <a:t> </a:t>
+              </a:r>
+              <a:r>
+                <a:rPr lang="ko-KR" altLang="ko-KR" sz="2200" dirty="0" err="1"/>
+                <a:t>Normalization</a:t>
+              </a:r>
+              <a:r>
+                <a:rPr lang="ko-KR" altLang="ko-KR" sz="2200" dirty="0"/>
+                <a:t> 및 </a:t>
+              </a:r>
+              <a:r>
+                <a:rPr lang="ko-KR" altLang="ko-KR" sz="2200" dirty="0" err="1"/>
+                <a:t>action</a:t>
+              </a:r>
+              <a:r>
+                <a:rPr lang="ko-KR" altLang="ko-KR" sz="2200" dirty="0"/>
+                <a:t> </a:t>
+              </a:r>
+              <a:r>
+                <a:rPr lang="ko-KR" altLang="ko-KR" sz="2200" dirty="0" err="1"/>
+                <a:t>scale</a:t>
+              </a:r>
+              <a:r>
+                <a:rPr lang="ko-KR" altLang="ko-KR" sz="2200" dirty="0"/>
+                <a:t> 차이로 </a:t>
+              </a:r>
+              <a:r>
+                <a:rPr lang="ko-KR" altLang="ko-KR" sz="2200" dirty="0" err="1"/>
+                <a:t>base</a:t>
+              </a:r>
+              <a:r>
+                <a:rPr lang="ko-KR" altLang="ko-KR" sz="2200" dirty="0"/>
+                <a:t> 불안정 </a:t>
+              </a:r>
+            </a:p>
+            <a:p>
+              <a:r>
+                <a:rPr lang="en-US" altLang="ko-KR" sz="2200" dirty="0"/>
+                <a:t> </a:t>
+              </a:r>
+              <a:r>
+                <a:rPr lang="ko-KR" altLang="ko-KR" sz="2200" dirty="0" err="1"/>
                 <a:t>Stage</a:t>
               </a:r>
               <a:r>
-                <a:rPr lang="ko-KR" altLang="ko-KR" sz="300" dirty="0"/>
+                <a:rPr lang="ko-KR" altLang="ko-KR" sz="2200" dirty="0"/>
                 <a:t> </a:t>
               </a:r>
               <a:r>
-                <a:rPr lang="ko-KR" altLang="ko-KR" sz="300" dirty="0" err="1"/>
-                <a:t>Tracking</a:t>
+                <a:rPr lang="ko-KR" altLang="ko-KR" sz="2200" dirty="0" err="1"/>
+                <a:t>tracking</a:t>
               </a:r>
               <a:r>
-                <a:rPr lang="ko-KR" altLang="ko-KR" sz="300" dirty="0"/>
-                <a:t> 한계</a:t>
+                <a:rPr lang="ko-KR" altLang="ko-KR" sz="2200" dirty="0"/>
+                <a:t> 및 정밀 조작 성능 한계 확인</a:t>
               </a:r>
-              <a:endParaRPr lang="en-US" altLang="ko-KR" sz="300" dirty="0"/>
-            </a:p>
-            <a:p>
-              <a:pPr marL="42813" indent="-42813">
-                <a:buFont typeface="Arial" panose="020B0604020202020204" pitchFamily="34" charset="0"/>
-                <a:buChar char="•"/>
-              </a:pPr>
-              <a:r>
-                <a:rPr lang="ko-KR" altLang="ko-KR" sz="300" dirty="0"/>
-                <a:t>제한된 GPU 자원 환경에서 </a:t>
-              </a:r>
-              <a:r>
-                <a:rPr lang="ko-KR" altLang="ko-KR" sz="300" dirty="0" err="1"/>
-                <a:t>stable</a:t>
-              </a:r>
-              <a:r>
-                <a:rPr lang="ko-KR" altLang="ko-KR" sz="300" dirty="0"/>
-                <a:t> </a:t>
-              </a:r>
-              <a:r>
-                <a:rPr lang="ko-KR" altLang="ko-KR" sz="300" dirty="0" err="1"/>
-                <a:t>training</a:t>
-              </a:r>
-              <a:r>
-                <a:rPr lang="ko-KR" altLang="ko-KR" sz="300" dirty="0"/>
-                <a:t> 및 </a:t>
-              </a:r>
-              <a:r>
-                <a:rPr lang="ko-KR" altLang="ko-KR" sz="300" dirty="0" err="1"/>
-                <a:t>rollout</a:t>
-              </a:r>
-              <a:r>
-                <a:rPr lang="ko-KR" altLang="ko-KR" sz="300" dirty="0"/>
-                <a:t> </a:t>
-              </a:r>
-              <a:r>
-                <a:rPr lang="ko-KR" altLang="ko-KR" sz="300" dirty="0" err="1"/>
-                <a:t>pipeline</a:t>
-              </a:r>
-              <a:r>
-                <a:rPr lang="ko-KR" altLang="ko-KR" sz="300" dirty="0"/>
-                <a:t> 검증</a:t>
-              </a:r>
-              <a:endParaRPr lang="en-US" altLang="ko-KR" sz="300" dirty="0"/>
+              <a:endParaRPr lang="en-US" altLang="ko-KR" sz="2200" dirty="0"/>
             </a:p>
           </p:txBody>
         </p:sp>
@@ -5338,8 +5719,8 @@
           </p:nvSpPr>
           <p:spPr>
             <a:xfrm>
-              <a:off x="522509" y="2690611"/>
-              <a:ext cx="4019008" cy="1222988"/>
+              <a:off x="522513" y="585816"/>
+              <a:ext cx="4019006" cy="610757"/>
             </a:xfrm>
             <a:prstGeom prst="rect">
               <a:avLst/>
@@ -5389,7 +5770,7 @@
             <a:p>
               <a:pPr algn="ctr"/>
               <a:r>
-                <a:rPr lang="ko-KR" altLang="en-US" sz="450" b="1" dirty="0">
+                <a:rPr lang="ko-KR" altLang="en-US" sz="3600" b="1" dirty="0">
                   <a:solidFill>
                     <a:schemeClr val="bg1"/>
                   </a:solidFill>
@@ -5415,8 +5796,8 @@
         </p:nvSpPr>
         <p:spPr>
           <a:xfrm>
-            <a:off x="2509170" y="6069508"/>
-            <a:ext cx="1271494" cy="873188"/>
+            <a:off x="526393" y="19808001"/>
+            <a:ext cx="10180800" cy="7452000"/>
           </a:xfrm>
           <a:prstGeom prst="rect">
             <a:avLst/>
@@ -5437,13 +5818,13 @@
           <a:lstStyle/>
           <a:p>
             <a:pPr algn="ctr"/>
-            <a:endParaRPr lang="en-US" altLang="ko-KR" sz="674" b="1" dirty="0">
+            <a:endParaRPr lang="en-US" altLang="ko-KR" sz="5400" b="1" dirty="0">
               <a:latin typeface="+mn-ea"/>
             </a:endParaRPr>
           </a:p>
           <a:p>
             <a:r>
-              <a:rPr lang="en-US" altLang="ko-KR" sz="300" b="1" dirty="0">
+              <a:rPr lang="en-US" altLang="ko-KR" sz="2400" b="1" dirty="0">
                 <a:latin typeface="+mn-ea"/>
               </a:rPr>
               <a:t> 1. Hardware Environment</a:t>
@@ -5451,75 +5832,91 @@
           </a:p>
           <a:p>
             <a:r>
-              <a:rPr lang="en-US" altLang="ko-KR" sz="300" dirty="0">
+              <a:rPr lang="en-US" altLang="ko-KR" sz="2200" dirty="0">
                 <a:latin typeface="+mn-ea"/>
               </a:rPr>
               <a:t> A100 80GB GPU Server, RTX 5070 PC, Ubuntu + JAX/Flax</a:t>
             </a:r>
           </a:p>
           <a:p>
-            <a:endParaRPr lang="en-US" altLang="ko-KR" sz="350" b="1" dirty="0">
+            <a:endParaRPr lang="en-US" altLang="ko-KR" sz="1200" b="1" dirty="0">
               <a:latin typeface="+mn-ea"/>
             </a:endParaRPr>
           </a:p>
           <a:p>
             <a:r>
-              <a:rPr lang="en-US" altLang="ko-KR" sz="300" b="1" dirty="0">
+              <a:rPr lang="en-US" altLang="ko-KR" sz="2400" b="1" dirty="0">
                 <a:latin typeface="+mn-ea"/>
               </a:rPr>
               <a:t> 2. </a:t>
             </a:r>
             <a:r>
-              <a:rPr lang="ko-KR" altLang="en-US" sz="300" b="1" dirty="0">
+              <a:rPr lang="ko-KR" altLang="en-US" sz="2400" b="1" dirty="0">
                 <a:latin typeface="+mn-ea"/>
               </a:rPr>
               <a:t>실험 및 모델 경량화</a:t>
             </a:r>
-            <a:endParaRPr lang="en-US" altLang="ko-KR" sz="300" b="1" dirty="0">
+            <a:endParaRPr lang="en-US" altLang="ko-KR" sz="2400" b="1" dirty="0">
               <a:latin typeface="+mn-ea"/>
             </a:endParaRPr>
           </a:p>
           <a:p>
             <a:pPr algn="ctr"/>
-            <a:endParaRPr lang="en-US" altLang="ko-KR" sz="450" dirty="0">
+            <a:endParaRPr lang="en-US" altLang="ko-KR" sz="3600" dirty="0">
               <a:latin typeface="+mn-ea"/>
             </a:endParaRPr>
           </a:p>
           <a:p>
             <a:pPr algn="ctr"/>
-            <a:endParaRPr lang="en-US" altLang="ko-KR" sz="450" dirty="0">
+            <a:endParaRPr lang="en-US" altLang="ko-KR" sz="3600" dirty="0">
               <a:latin typeface="+mn-ea"/>
             </a:endParaRPr>
           </a:p>
           <a:p>
             <a:pPr algn="ctr"/>
-            <a:endParaRPr lang="en-US" altLang="ko-KR" sz="450" dirty="0">
+            <a:endParaRPr lang="en-US" altLang="ko-KR" sz="3600" dirty="0">
               <a:latin typeface="+mn-ea"/>
             </a:endParaRPr>
           </a:p>
           <a:p>
             <a:pPr algn="ctr"/>
-            <a:endParaRPr lang="en-US" altLang="ko-KR" sz="450" dirty="0">
+            <a:endParaRPr lang="en-US" altLang="ko-KR" sz="3600" dirty="0">
               <a:latin typeface="+mn-ea"/>
             </a:endParaRPr>
           </a:p>
           <a:p>
             <a:pPr algn="ctr"/>
-            <a:endParaRPr lang="en-US" altLang="ko-KR" sz="450" dirty="0">
+            <a:endParaRPr lang="en-US" altLang="ko-KR" sz="3600" dirty="0">
               <a:latin typeface="+mn-ea"/>
             </a:endParaRPr>
           </a:p>
           <a:p>
             <a:pPr algn="ctr"/>
-            <a:endParaRPr lang="en-US" altLang="ko-KR" sz="450" dirty="0">
+            <a:endParaRPr lang="en-US" altLang="ko-KR" sz="3600" dirty="0">
               <a:latin typeface="+mn-ea"/>
             </a:endParaRPr>
           </a:p>
           <a:p>
             <a:pPr algn="ctr"/>
-            <a:endParaRPr lang="en-US" altLang="ko-KR" sz="450" dirty="0">
+            <a:endParaRPr lang="en-US" altLang="ko-KR" sz="2000" dirty="0">
               <a:latin typeface="+mn-ea"/>
             </a:endParaRPr>
+          </a:p>
+          <a:p>
+            <a:r>
+              <a:rPr lang="en-US" altLang="ko-KR" sz="2400" b="1" dirty="0">
+                <a:latin typeface="+mn-ea"/>
+              </a:rPr>
+              <a:t>3. Selected 12 Tasks</a:t>
+            </a:r>
+          </a:p>
+          <a:p>
+            <a:r>
+              <a:rPr lang="en-US" altLang="ko-KR" sz="2200" dirty="0">
+                <a:latin typeface="+mn-ea"/>
+              </a:rPr>
+              <a:t>Turning on radio, Picking up trash, Setting mousetraps, Putting dishes away, Preparing lunch box, Outfit a basic toolbox, Putting shoes on rack, Clean boxing gloves, Spraying fruit trees, Make microwave popcorn, Cook hot dogs, Cook bacon</a:t>
+            </a:r>
           </a:p>
         </p:txBody>
       </p:sp>
@@ -5537,8 +5934,8 @@
         </p:nvSpPr>
         <p:spPr>
           <a:xfrm>
-            <a:off x="2511653" y="6069508"/>
-            <a:ext cx="501199" cy="161583"/>
+            <a:off x="534087" y="19808001"/>
+            <a:ext cx="4014431" cy="646331"/>
           </a:xfrm>
           <a:prstGeom prst="rect">
             <a:avLst/>
@@ -5588,13 +5985,13 @@
           <a:p>
             <a:pPr algn="ctr"/>
             <a:r>
-              <a:rPr lang="ko-KR" altLang="en-US" sz="450" b="1" dirty="0">
+              <a:rPr lang="ko-KR" altLang="en-US" sz="3600" b="1" dirty="0">
                 <a:solidFill>
                   <a:schemeClr val="bg1"/>
                 </a:solidFill>
                 <a:latin typeface="+mn-ea"/>
               </a:rPr>
-              <a:t>실험 전략</a:t>
+              <a:t>실험 환경</a:t>
             </a:r>
           </a:p>
         </p:txBody>
@@ -5613,8 +6010,8 @@
         </p:nvSpPr>
         <p:spPr>
           <a:xfrm>
-            <a:off x="2509170" y="6860750"/>
-            <a:ext cx="2541123" cy="407676"/>
+            <a:off x="526393" y="27268442"/>
+            <a:ext cx="20359424" cy="2462213"/>
           </a:xfrm>
           <a:prstGeom prst="rect">
             <a:avLst/>
@@ -5634,449 +6031,645 @@
           </a:bodyPr>
           <a:lstStyle/>
           <a:p>
-            <a:endParaRPr lang="en-US" altLang="ko-KR" sz="549" b="1" dirty="0">
+            <a:endParaRPr lang="en-US" altLang="ko-KR" sz="4400" b="1" dirty="0">
               <a:latin typeface="+mn-ea"/>
             </a:endParaRPr>
           </a:p>
           <a:p>
             <a:r>
-              <a:rPr lang="en-US" altLang="ko-KR" sz="300" dirty="0"/>
-              <a:t>1.</a:t>
-            </a:r>
-            <a:r>
-              <a:rPr lang="ko-KR" altLang="ko-KR" sz="300" dirty="0"/>
+              <a:rPr lang="en-US" altLang="ko-KR" sz="2200" dirty="0">
+                <a:latin typeface="+mn-ea"/>
+              </a:rPr>
+              <a:t>1. </a:t>
+            </a:r>
+            <a:r>
+              <a:rPr lang="ko-KR" altLang="ko-KR" sz="2200" dirty="0" err="1">
+                <a:latin typeface="+mn-ea"/>
+              </a:rPr>
+              <a:t>Ilia</a:t>
+            </a:r>
+            <a:r>
+              <a:rPr lang="ko-KR" altLang="ko-KR" sz="2200" dirty="0">
+                <a:latin typeface="+mn-ea"/>
+              </a:rPr>
               <a:t> </a:t>
             </a:r>
             <a:r>
-              <a:rPr lang="ko-KR" altLang="ko-KR" sz="300" dirty="0" err="1"/>
-              <a:t>Ilia</a:t>
-            </a:r>
-            <a:r>
-              <a:rPr lang="ko-KR" altLang="ko-KR" sz="300" dirty="0"/>
+              <a:rPr lang="ko-KR" altLang="ko-KR" sz="2200" dirty="0" err="1">
+                <a:latin typeface="+mn-ea"/>
+              </a:rPr>
+              <a:t>Larchenko</a:t>
+            </a:r>
+            <a:r>
+              <a:rPr lang="ko-KR" altLang="ko-KR" sz="2200" dirty="0">
+                <a:latin typeface="+mn-ea"/>
+              </a:rPr>
+              <a:t>, </a:t>
+            </a:r>
+            <a:r>
+              <a:rPr lang="ko-KR" altLang="ko-KR" sz="2200" dirty="0" err="1">
+                <a:latin typeface="+mn-ea"/>
+              </a:rPr>
+              <a:t>Gleb</a:t>
+            </a:r>
+            <a:r>
+              <a:rPr lang="ko-KR" altLang="ko-KR" sz="2200" dirty="0">
+                <a:latin typeface="+mn-ea"/>
+              </a:rPr>
               <a:t> </a:t>
             </a:r>
             <a:r>
-              <a:rPr lang="ko-KR" altLang="ko-KR" sz="300" dirty="0" err="1"/>
-              <a:t>Larchenko</a:t>
-            </a:r>
-            <a:r>
-              <a:rPr lang="ko-KR" altLang="ko-KR" sz="300" dirty="0"/>
+              <a:rPr lang="ko-KR" altLang="ko-KR" sz="2200" dirty="0" err="1">
+                <a:latin typeface="+mn-ea"/>
+              </a:rPr>
+              <a:t>Zarin</a:t>
+            </a:r>
+            <a:r>
+              <a:rPr lang="ko-KR" altLang="ko-KR" sz="2200" dirty="0">
+                <a:latin typeface="+mn-ea"/>
+              </a:rPr>
+              <a:t>, </a:t>
+            </a:r>
+            <a:r>
+              <a:rPr lang="ko-KR" altLang="ko-KR" sz="2200" dirty="0" err="1">
+                <a:latin typeface="+mn-ea"/>
+              </a:rPr>
+              <a:t>Akash</a:t>
+            </a:r>
+            <a:r>
+              <a:rPr lang="ko-KR" altLang="ko-KR" sz="2200" dirty="0">
+                <a:latin typeface="+mn-ea"/>
+              </a:rPr>
               <a:t> </a:t>
             </a:r>
             <a:r>
-              <a:rPr lang="ko-KR" altLang="ko-KR" sz="300" dirty="0" err="1"/>
+              <a:rPr lang="ko-KR" altLang="ko-KR" sz="2200" dirty="0" err="1">
+                <a:latin typeface="+mn-ea"/>
+              </a:rPr>
+              <a:t>Karnatak</a:t>
+            </a:r>
+            <a:r>
+              <a:rPr lang="ko-KR" altLang="ko-KR" sz="2200" dirty="0">
+                <a:latin typeface="+mn-ea"/>
+              </a:rPr>
+              <a:t>,</a:t>
+            </a:r>
+            <a:r>
+              <a:rPr lang="en-US" altLang="ko-KR" sz="2200" dirty="0">
+                <a:latin typeface="+mn-ea"/>
+              </a:rPr>
+              <a:t> </a:t>
+            </a:r>
+            <a:r>
+              <a:rPr lang="ko-KR" altLang="ko-KR" sz="2200" dirty="0">
+                <a:latin typeface="+mn-ea"/>
+              </a:rPr>
+              <a:t>“</a:t>
+            </a:r>
+            <a:r>
+              <a:rPr lang="ko-KR" altLang="ko-KR" sz="2200" dirty="0" err="1">
+                <a:latin typeface="+mn-ea"/>
+              </a:rPr>
+              <a:t>Task</a:t>
+            </a:r>
+            <a:r>
+              <a:rPr lang="ko-KR" altLang="ko-KR" sz="2200" dirty="0">
+                <a:latin typeface="+mn-ea"/>
+              </a:rPr>
+              <a:t> </a:t>
+            </a:r>
+            <a:r>
+              <a:rPr lang="ko-KR" altLang="ko-KR" sz="2200" dirty="0" err="1">
+                <a:latin typeface="+mn-ea"/>
+              </a:rPr>
+              <a:t>Adaptation</a:t>
+            </a:r>
+            <a:r>
+              <a:rPr lang="ko-KR" altLang="ko-KR" sz="2200" dirty="0">
+                <a:latin typeface="+mn-ea"/>
+              </a:rPr>
+              <a:t> of </a:t>
+            </a:r>
+            <a:r>
+              <a:rPr lang="ko-KR" altLang="ko-KR" sz="2200" dirty="0" err="1">
+                <a:latin typeface="+mn-ea"/>
+              </a:rPr>
+              <a:t>Vision-Language-Action</a:t>
+            </a:r>
+            <a:r>
+              <a:rPr lang="ko-KR" altLang="ko-KR" sz="2200" dirty="0">
+                <a:latin typeface="+mn-ea"/>
+              </a:rPr>
+              <a:t> </a:t>
+            </a:r>
+            <a:r>
+              <a:rPr lang="ko-KR" altLang="ko-KR" sz="2200" dirty="0" err="1">
+                <a:latin typeface="+mn-ea"/>
+              </a:rPr>
+              <a:t>Model</a:t>
+            </a:r>
+            <a:r>
+              <a:rPr lang="ko-KR" altLang="ko-KR" sz="2200" dirty="0">
+                <a:latin typeface="+mn-ea"/>
+              </a:rPr>
+              <a:t>: 1st </a:t>
+            </a:r>
+            <a:r>
+              <a:rPr lang="ko-KR" altLang="ko-KR" sz="2200" dirty="0" err="1">
+                <a:latin typeface="+mn-ea"/>
+              </a:rPr>
+              <a:t>Place</a:t>
+            </a:r>
+            <a:r>
+              <a:rPr lang="ko-KR" altLang="ko-KR" sz="2200" dirty="0">
+                <a:latin typeface="+mn-ea"/>
+              </a:rPr>
+              <a:t> </a:t>
+            </a:r>
+            <a:r>
+              <a:rPr lang="ko-KR" altLang="ko-KR" sz="2200" dirty="0" err="1">
+                <a:latin typeface="+mn-ea"/>
+              </a:rPr>
+              <a:t>Solution</a:t>
+            </a:r>
+            <a:r>
+              <a:rPr lang="ko-KR" altLang="ko-KR" sz="2200" dirty="0">
+                <a:latin typeface="+mn-ea"/>
+              </a:rPr>
+              <a:t> </a:t>
+            </a:r>
+            <a:r>
+              <a:rPr lang="ko-KR" altLang="ko-KR" sz="2200" dirty="0" err="1">
+                <a:latin typeface="+mn-ea"/>
+              </a:rPr>
+              <a:t>for</a:t>
+            </a:r>
+            <a:r>
+              <a:rPr lang="ko-KR" altLang="ko-KR" sz="2200" dirty="0">
+                <a:latin typeface="+mn-ea"/>
+              </a:rPr>
+              <a:t> </a:t>
+            </a:r>
+            <a:r>
+              <a:rPr lang="ko-KR" altLang="ko-KR" sz="2200" dirty="0" err="1">
+                <a:latin typeface="+mn-ea"/>
+              </a:rPr>
+              <a:t>the</a:t>
+            </a:r>
+            <a:r>
+              <a:rPr lang="ko-KR" altLang="ko-KR" sz="2200" dirty="0">
+                <a:latin typeface="+mn-ea"/>
+              </a:rPr>
+              <a:t> 2025 BEHAVIOR </a:t>
+            </a:r>
+            <a:r>
+              <a:rPr lang="ko-KR" altLang="ko-KR" sz="2200" dirty="0" err="1">
+                <a:latin typeface="+mn-ea"/>
+              </a:rPr>
+              <a:t>Challenge</a:t>
+            </a:r>
+            <a:r>
+              <a:rPr lang="ko-KR" altLang="ko-KR" sz="2200" dirty="0">
+                <a:latin typeface="+mn-ea"/>
+              </a:rPr>
+              <a:t>”, 2025,</a:t>
+            </a:r>
+            <a:r>
+              <a:rPr lang="en-US" altLang="ko-KR" sz="2200" dirty="0">
+                <a:latin typeface="+mn-ea"/>
+              </a:rPr>
+              <a:t> </a:t>
+            </a:r>
+            <a:r>
+              <a:rPr lang="ko-KR" altLang="ko-KR" sz="2200" dirty="0">
+                <a:latin typeface="+mn-ea"/>
+              </a:rPr>
+              <a:t>arXiv:2512.06951.</a:t>
+            </a:r>
+            <a:endParaRPr lang="en-US" altLang="ko-KR" sz="2200" dirty="0">
+              <a:latin typeface="+mn-ea"/>
+            </a:endParaRPr>
+          </a:p>
+          <a:p>
+            <a:r>
+              <a:rPr lang="en-US" altLang="ko-KR" sz="2200" dirty="0">
+                <a:latin typeface="+mn-ea"/>
+              </a:rPr>
+              <a:t>2. </a:t>
+            </a:r>
+            <a:r>
+              <a:rPr lang="ko-KR" altLang="ko-KR" sz="2200" dirty="0" err="1">
+                <a:latin typeface="+mn-ea"/>
+              </a:rPr>
+              <a:t>Marcel</a:t>
+            </a:r>
+            <a:r>
+              <a:rPr lang="ko-KR" altLang="ko-KR" sz="2200" dirty="0">
+                <a:latin typeface="+mn-ea"/>
+              </a:rPr>
+              <a:t> </a:t>
+            </a:r>
+            <a:r>
+              <a:rPr lang="ko-KR" altLang="ko-KR" sz="2200" dirty="0" err="1">
+                <a:latin typeface="+mn-ea"/>
+              </a:rPr>
+              <a:t>Torne</a:t>
+            </a:r>
+            <a:r>
+              <a:rPr lang="ko-KR" altLang="ko-KR" sz="2200" dirty="0">
+                <a:latin typeface="+mn-ea"/>
+              </a:rPr>
+              <a:t> </a:t>
+            </a:r>
+            <a:r>
+              <a:rPr lang="ko-KR" altLang="ko-KR" sz="2200" dirty="0" err="1">
+                <a:latin typeface="+mn-ea"/>
+              </a:rPr>
               <a:t>et</a:t>
             </a:r>
             <a:r>
-              <a:rPr lang="ko-KR" altLang="ko-KR" sz="300" dirty="0"/>
+              <a:rPr lang="ko-KR" altLang="ko-KR" sz="2200" dirty="0">
+                <a:latin typeface="+mn-ea"/>
+              </a:rPr>
               <a:t> </a:t>
             </a:r>
             <a:r>
-              <a:rPr lang="ko-KR" altLang="ko-KR" sz="300" dirty="0" err="1"/>
+              <a:rPr lang="ko-KR" altLang="ko-KR" sz="2200" dirty="0" err="1">
+                <a:latin typeface="+mn-ea"/>
+              </a:rPr>
               <a:t>al</a:t>
             </a:r>
             <a:r>
-              <a:rPr lang="ko-KR" altLang="ko-KR" sz="300" dirty="0"/>
-              <a:t>., “</a:t>
-            </a:r>
-            <a:r>
-              <a:rPr lang="ko-KR" altLang="ko-KR" sz="300" dirty="0" err="1"/>
-              <a:t>Task</a:t>
-            </a:r>
-            <a:r>
-              <a:rPr lang="ko-KR" altLang="ko-KR" sz="300" dirty="0"/>
+              <a:rPr lang="ko-KR" altLang="ko-KR" sz="2200" dirty="0">
+                <a:latin typeface="+mn-ea"/>
+              </a:rPr>
+              <a:t>.,</a:t>
+            </a:r>
+            <a:r>
+              <a:rPr lang="en-US" altLang="ko-KR" sz="2200" dirty="0">
+                <a:latin typeface="+mn-ea"/>
+              </a:rPr>
               <a:t> </a:t>
             </a:r>
             <a:r>
-              <a:rPr lang="ko-KR" altLang="ko-KR" sz="300" dirty="0" err="1"/>
-              <a:t>Adaptation</a:t>
-            </a:r>
-            <a:r>
-              <a:rPr lang="ko-KR" altLang="ko-KR" sz="300" dirty="0"/>
+              <a:rPr lang="ko-KR" altLang="ko-KR" sz="2200" dirty="0">
+                <a:latin typeface="+mn-ea"/>
+              </a:rPr>
+              <a:t>“MEM: </a:t>
+            </a:r>
+            <a:r>
+              <a:rPr lang="ko-KR" altLang="ko-KR" sz="2200" dirty="0" err="1">
+                <a:latin typeface="+mn-ea"/>
+              </a:rPr>
+              <a:t>Multi-Scale</a:t>
+            </a:r>
+            <a:r>
+              <a:rPr lang="ko-KR" altLang="ko-KR" sz="2200" dirty="0">
+                <a:latin typeface="+mn-ea"/>
+              </a:rPr>
+              <a:t> </a:t>
+            </a:r>
+            <a:r>
+              <a:rPr lang="ko-KR" altLang="ko-KR" sz="2200" dirty="0" err="1">
+                <a:latin typeface="+mn-ea"/>
+              </a:rPr>
+              <a:t>Embodied</a:t>
+            </a:r>
+            <a:r>
+              <a:rPr lang="ko-KR" altLang="ko-KR" sz="2200" dirty="0">
+                <a:latin typeface="+mn-ea"/>
+              </a:rPr>
+              <a:t> </a:t>
+            </a:r>
+            <a:r>
+              <a:rPr lang="ko-KR" altLang="ko-KR" sz="2200" dirty="0" err="1">
+                <a:latin typeface="+mn-ea"/>
+              </a:rPr>
+              <a:t>Memory</a:t>
+            </a:r>
+            <a:r>
+              <a:rPr lang="ko-KR" altLang="ko-KR" sz="2200" dirty="0">
+                <a:latin typeface="+mn-ea"/>
+              </a:rPr>
+              <a:t> </a:t>
+            </a:r>
+            <a:r>
+              <a:rPr lang="ko-KR" altLang="ko-KR" sz="2200" dirty="0" err="1">
+                <a:latin typeface="+mn-ea"/>
+              </a:rPr>
+              <a:t>for</a:t>
+            </a:r>
+            <a:r>
+              <a:rPr lang="ko-KR" altLang="ko-KR" sz="2200" dirty="0">
+                <a:latin typeface="+mn-ea"/>
+              </a:rPr>
+              <a:t> </a:t>
+            </a:r>
+            <a:r>
+              <a:rPr lang="ko-KR" altLang="ko-KR" sz="2200" dirty="0" err="1">
+                <a:latin typeface="+mn-ea"/>
+              </a:rPr>
+              <a:t>Vision</a:t>
+            </a:r>
+            <a:r>
+              <a:rPr lang="ko-KR" altLang="ko-KR" sz="2200" dirty="0">
+                <a:latin typeface="+mn-ea"/>
+              </a:rPr>
+              <a:t> </a:t>
+            </a:r>
+            <a:r>
+              <a:rPr lang="ko-KR" altLang="ko-KR" sz="2200" dirty="0" err="1">
+                <a:latin typeface="+mn-ea"/>
+              </a:rPr>
+              <a:t>Language</a:t>
+            </a:r>
+            <a:r>
+              <a:rPr lang="ko-KR" altLang="ko-KR" sz="2200" dirty="0">
+                <a:latin typeface="+mn-ea"/>
+              </a:rPr>
+              <a:t> </a:t>
+            </a:r>
+            <a:r>
+              <a:rPr lang="ko-KR" altLang="ko-KR" sz="2200" dirty="0" err="1">
+                <a:latin typeface="+mn-ea"/>
+              </a:rPr>
+              <a:t>Action</a:t>
+            </a:r>
+            <a:r>
+              <a:rPr lang="ko-KR" altLang="ko-KR" sz="2200" dirty="0">
+                <a:latin typeface="+mn-ea"/>
+              </a:rPr>
+              <a:t> </a:t>
+            </a:r>
+            <a:r>
+              <a:rPr lang="ko-KR" altLang="ko-KR" sz="2200" dirty="0" err="1">
+                <a:latin typeface="+mn-ea"/>
+              </a:rPr>
+              <a:t>Models</a:t>
+            </a:r>
+            <a:r>
+              <a:rPr lang="ko-KR" altLang="ko-KR" sz="2200" dirty="0">
+                <a:latin typeface="+mn-ea"/>
+              </a:rPr>
+              <a:t>”, 2026,</a:t>
+            </a:r>
+            <a:r>
+              <a:rPr lang="en-US" altLang="ko-KR" sz="2200" dirty="0">
+                <a:latin typeface="+mn-ea"/>
+              </a:rPr>
+              <a:t> </a:t>
+            </a:r>
+            <a:r>
+              <a:rPr lang="ko-KR" altLang="ko-KR" sz="2200" dirty="0">
+                <a:latin typeface="+mn-ea"/>
+              </a:rPr>
+              <a:t>arXiv:2603.03596.</a:t>
+            </a:r>
+            <a:endParaRPr lang="en-US" altLang="ko-KR" sz="2200" dirty="0">
+              <a:latin typeface="+mn-ea"/>
+            </a:endParaRPr>
+          </a:p>
+          <a:p>
+            <a:r>
+              <a:rPr lang="en-US" altLang="ko-KR" sz="2200" dirty="0">
+                <a:latin typeface="+mn-ea"/>
+              </a:rPr>
+              <a:t>3. </a:t>
+            </a:r>
+            <a:r>
+              <a:rPr lang="ko-KR" altLang="ko-KR" sz="2200" dirty="0" err="1"/>
+              <a:t>Yalcin</a:t>
+            </a:r>
+            <a:r>
+              <a:rPr lang="ko-KR" altLang="ko-KR" sz="2200" dirty="0"/>
+              <a:t> </a:t>
+            </a:r>
+            <a:r>
+              <a:rPr lang="ko-KR" altLang="ko-KR" sz="2200" dirty="0" err="1"/>
+              <a:t>Tur</a:t>
+            </a:r>
+            <a:r>
+              <a:rPr lang="ko-KR" altLang="ko-KR" sz="2200" dirty="0"/>
+              <a:t> </a:t>
+            </a:r>
+            <a:r>
+              <a:rPr lang="ko-KR" altLang="ko-KR" sz="2200" dirty="0" err="1"/>
+              <a:t>et</a:t>
+            </a:r>
+            <a:r>
+              <a:rPr lang="ko-KR" altLang="ko-KR" sz="2200" dirty="0"/>
+              <a:t> </a:t>
+            </a:r>
+            <a:r>
+              <a:rPr lang="ko-KR" altLang="ko-KR" sz="2200" dirty="0" err="1"/>
+              <a:t>al</a:t>
+            </a:r>
+            <a:r>
+              <a:rPr lang="ko-KR" altLang="ko-KR" sz="2200" dirty="0"/>
+              <a:t>.,</a:t>
+            </a:r>
+            <a:r>
+              <a:rPr lang="en-US" altLang="ko-KR" sz="2200" dirty="0"/>
+              <a:t> </a:t>
+            </a:r>
+            <a:r>
+              <a:rPr lang="ko-KR" altLang="ko-KR" sz="2200" dirty="0"/>
+              <a:t>“</a:t>
+            </a:r>
+            <a:r>
+              <a:rPr lang="ko-KR" altLang="ko-KR" sz="2200" dirty="0" err="1"/>
+              <a:t>Recurrent-Depth</a:t>
+            </a:r>
+            <a:r>
+              <a:rPr lang="ko-KR" altLang="ko-KR" sz="2200" dirty="0"/>
+              <a:t> VLA: </a:t>
+            </a:r>
+            <a:r>
+              <a:rPr lang="ko-KR" altLang="ko-KR" sz="2200" dirty="0" err="1"/>
+              <a:t>Implicit</a:t>
+            </a:r>
+            <a:r>
+              <a:rPr lang="ko-KR" altLang="ko-KR" sz="2200" dirty="0"/>
+              <a:t> </a:t>
+            </a:r>
+            <a:r>
+              <a:rPr lang="ko-KR" altLang="ko-KR" sz="2200" dirty="0" err="1"/>
+              <a:t>Test</a:t>
+            </a:r>
+            <a:r>
+              <a:rPr lang="ko-KR" altLang="ko-KR" sz="2200" dirty="0"/>
+              <a:t>-Time </a:t>
+            </a:r>
+            <a:r>
+              <a:rPr lang="ko-KR" altLang="ko-KR" sz="2200" dirty="0" err="1"/>
+              <a:t>Compute</a:t>
+            </a:r>
+            <a:r>
+              <a:rPr lang="ko-KR" altLang="ko-KR" sz="2200" dirty="0"/>
+              <a:t> </a:t>
+            </a:r>
+            <a:r>
+              <a:rPr lang="ko-KR" altLang="ko-KR" sz="2200" dirty="0" err="1"/>
+              <a:t>Scaling</a:t>
+            </a:r>
+            <a:r>
+              <a:rPr lang="ko-KR" altLang="ko-KR" sz="2200" dirty="0"/>
               <a:t> of </a:t>
             </a:r>
             <a:r>
-              <a:rPr lang="ko-KR" altLang="ko-KR" sz="300" dirty="0" err="1"/>
+              <a:rPr lang="ko-KR" altLang="ko-KR" sz="2200" dirty="0" err="1"/>
               <a:t>Vision-Language-Action</a:t>
             </a:r>
             <a:r>
-              <a:rPr lang="ko-KR" altLang="ko-KR" sz="300" dirty="0"/>
+              <a:rPr lang="ko-KR" altLang="ko-KR" sz="2200" dirty="0"/>
               <a:t> </a:t>
             </a:r>
             <a:r>
-              <a:rPr lang="ko-KR" altLang="ko-KR" sz="300" dirty="0" err="1"/>
-              <a:t>Model</a:t>
-            </a:r>
-            <a:r>
-              <a:rPr lang="ko-KR" altLang="ko-KR" sz="300" dirty="0"/>
-              <a:t>: 1st </a:t>
-            </a:r>
-            <a:r>
-              <a:rPr lang="ko-KR" altLang="ko-KR" sz="300" dirty="0" err="1"/>
-              <a:t>Place</a:t>
-            </a:r>
-            <a:r>
-              <a:rPr lang="ko-KR" altLang="ko-KR" sz="300" dirty="0"/>
+              <a:rPr lang="ko-KR" altLang="ko-KR" sz="2200" dirty="0" err="1"/>
+              <a:t>Models</a:t>
+            </a:r>
+            <a:r>
+              <a:rPr lang="ko-KR" altLang="ko-KR" sz="2200" dirty="0"/>
               <a:t> </a:t>
             </a:r>
             <a:r>
-              <a:rPr lang="ko-KR" altLang="ko-KR" sz="300" dirty="0" err="1"/>
-              <a:t>Solution</a:t>
-            </a:r>
-            <a:r>
-              <a:rPr lang="ko-KR" altLang="ko-KR" sz="300" dirty="0"/>
+              <a:rPr lang="ko-KR" altLang="ko-KR" sz="2200" dirty="0" err="1"/>
+              <a:t>via</a:t>
+            </a:r>
+            <a:r>
+              <a:rPr lang="ko-KR" altLang="ko-KR" sz="2200" dirty="0"/>
               <a:t> </a:t>
             </a:r>
             <a:r>
-              <a:rPr lang="ko-KR" altLang="ko-KR" sz="300" dirty="0" err="1"/>
-              <a:t>for</a:t>
-            </a:r>
-            <a:r>
-              <a:rPr lang="ko-KR" altLang="ko-KR" sz="300" dirty="0"/>
+              <a:rPr lang="ko-KR" altLang="ko-KR" sz="2200" dirty="0" err="1"/>
+              <a:t>Latent</a:t>
+            </a:r>
+            <a:r>
+              <a:rPr lang="ko-KR" altLang="ko-KR" sz="2200" dirty="0"/>
               <a:t> </a:t>
             </a:r>
             <a:r>
-              <a:rPr lang="ko-KR" altLang="ko-KR" sz="300" dirty="0" err="1"/>
-              <a:t>the</a:t>
-            </a:r>
-            <a:r>
-              <a:rPr lang="ko-KR" altLang="ko-KR" sz="300" dirty="0"/>
-              <a:t> 2025 BEHAVIOR </a:t>
-            </a:r>
-            <a:r>
-              <a:rPr lang="ko-KR" altLang="ko-KR" sz="300" dirty="0" err="1"/>
-              <a:t>Challenge</a:t>
-            </a:r>
-            <a:r>
-              <a:rPr lang="ko-KR" altLang="ko-KR" sz="300" dirty="0"/>
-              <a:t>”, 2025</a:t>
-            </a:r>
-            <a:br>
-              <a:rPr lang="ko-KR" altLang="ko-KR" sz="300" dirty="0"/>
-            </a:br>
-            <a:r>
-              <a:rPr lang="ko-KR" altLang="ko-KR" sz="300" dirty="0"/>
-              <a:t>2. </a:t>
-            </a:r>
-            <a:r>
-              <a:rPr lang="ko-KR" altLang="ko-KR" sz="300" dirty="0" err="1"/>
-              <a:t>M</a:t>
-            </a:r>
-            <a:r>
-              <a:rPr lang="ko-KR" altLang="ko-KR" sz="300" dirty="0"/>
-              <a:t>. </a:t>
-            </a:r>
-            <a:r>
-              <a:rPr lang="ko-KR" altLang="ko-KR" sz="300" dirty="0" err="1"/>
-              <a:t>Torne</a:t>
-            </a:r>
-            <a:r>
-              <a:rPr lang="ko-KR" altLang="ko-KR" sz="300" dirty="0"/>
+              <a:rPr lang="ko-KR" altLang="ko-KR" sz="2200" dirty="0" err="1"/>
+              <a:t>Iterative</a:t>
+            </a:r>
+            <a:r>
+              <a:rPr lang="ko-KR" altLang="ko-KR" sz="2200" dirty="0"/>
               <a:t> </a:t>
             </a:r>
             <a:r>
-              <a:rPr lang="ko-KR" altLang="ko-KR" sz="300" dirty="0" err="1"/>
+              <a:rPr lang="ko-KR" altLang="ko-KR" sz="2200" dirty="0" err="1"/>
+              <a:t>Reasoning</a:t>
+            </a:r>
+            <a:r>
+              <a:rPr lang="ko-KR" altLang="ko-KR" sz="2200" dirty="0"/>
+              <a:t>”, 2026,</a:t>
+            </a:r>
+            <a:r>
+              <a:rPr lang="en-US" altLang="ko-KR" sz="2200" dirty="0"/>
+              <a:t> </a:t>
+            </a:r>
+            <a:r>
+              <a:rPr lang="ko-KR" altLang="ko-KR" sz="2200" dirty="0"/>
+              <a:t>arXiv:2602.07845.</a:t>
+            </a:r>
+            <a:endParaRPr lang="en-US" altLang="ko-KR" sz="2200" dirty="0"/>
+          </a:p>
+          <a:p>
+            <a:r>
+              <a:rPr lang="en-US" altLang="ko-KR" sz="2200" dirty="0">
+                <a:latin typeface="+mn-ea"/>
+              </a:rPr>
+              <a:t>4. </a:t>
+            </a:r>
+            <a:r>
+              <a:rPr lang="ko-KR" altLang="ko-KR" sz="2200" dirty="0" err="1"/>
+              <a:t>Ali</a:t>
+            </a:r>
+            <a:r>
+              <a:rPr lang="ko-KR" altLang="ko-KR" sz="2200" dirty="0"/>
+              <a:t> </a:t>
+            </a:r>
+            <a:r>
+              <a:rPr lang="ko-KR" altLang="ko-KR" sz="2200" dirty="0" err="1"/>
+              <a:t>Amin</a:t>
+            </a:r>
+            <a:r>
+              <a:rPr lang="ko-KR" altLang="ko-KR" sz="2200" dirty="0"/>
+              <a:t> </a:t>
+            </a:r>
+            <a:r>
+              <a:rPr lang="ko-KR" altLang="ko-KR" sz="2200" dirty="0" err="1"/>
               <a:t>et</a:t>
             </a:r>
             <a:r>
-              <a:rPr lang="ko-KR" altLang="ko-KR" sz="300" dirty="0"/>
+              <a:rPr lang="ko-KR" altLang="ko-KR" sz="2200" dirty="0"/>
               <a:t> </a:t>
             </a:r>
             <a:r>
-              <a:rPr lang="ko-KR" altLang="ko-KR" sz="300" dirty="0" err="1"/>
+              <a:rPr lang="ko-KR" altLang="ko-KR" sz="2200" dirty="0" err="1"/>
               <a:t>al</a:t>
             </a:r>
             <a:r>
-              <a:rPr lang="ko-KR" altLang="ko-KR" sz="300" dirty="0"/>
+              <a:rPr lang="ko-KR" altLang="ko-KR" sz="2200" dirty="0"/>
               <a:t>.,</a:t>
             </a:r>
             <a:r>
-              <a:rPr lang="en-US" altLang="ko-KR" sz="300" dirty="0"/>
+              <a:rPr lang="en-US" altLang="ko-KR" sz="2200" dirty="0"/>
               <a:t> </a:t>
             </a:r>
             <a:r>
-              <a:rPr lang="ko-KR" altLang="ko-KR" sz="300" dirty="0"/>
-              <a:t>“</a:t>
-            </a:r>
-            <a:r>
-              <a:rPr lang="ko-KR" altLang="ko-KR" sz="300" dirty="0" err="1"/>
-              <a:t>MeM</a:t>
-            </a:r>
-            <a:r>
-              <a:rPr lang="ko-KR" altLang="ko-KR" sz="300" dirty="0"/>
-              <a:t>: </a:t>
-            </a:r>
-            <a:r>
-              <a:rPr lang="ko-KR" altLang="ko-KR" sz="300" dirty="0" err="1"/>
-              <a:t>Multi-Scale</a:t>
-            </a:r>
-            <a:r>
-              <a:rPr lang="ko-KR" altLang="ko-KR" sz="300" dirty="0"/>
+              <a:rPr lang="ko-KR" altLang="ko-KR" sz="2200" dirty="0"/>
+              <a:t>“π*0.6: </a:t>
+            </a:r>
+            <a:r>
+              <a:rPr lang="ko-KR" altLang="ko-KR" sz="2200" dirty="0" err="1"/>
+              <a:t>A</a:t>
+            </a:r>
+            <a:r>
+              <a:rPr lang="ko-KR" altLang="ko-KR" sz="2200" dirty="0"/>
+              <a:t> VLA </a:t>
+            </a:r>
+            <a:r>
+              <a:rPr lang="ko-KR" altLang="ko-KR" sz="2200" dirty="0" err="1"/>
+              <a:t>That</a:t>
+            </a:r>
+            <a:r>
+              <a:rPr lang="ko-KR" altLang="ko-KR" sz="2200" dirty="0"/>
               <a:t> </a:t>
             </a:r>
             <a:r>
-              <a:rPr lang="ko-KR" altLang="ko-KR" sz="300" dirty="0" err="1"/>
-              <a:t>Embodied</a:t>
-            </a:r>
-            <a:r>
-              <a:rPr lang="ko-KR" altLang="ko-KR" sz="300" dirty="0"/>
+              <a:rPr lang="ko-KR" altLang="ko-KR" sz="2200" dirty="0" err="1"/>
+              <a:t>Learns</a:t>
+            </a:r>
+            <a:r>
+              <a:rPr lang="ko-KR" altLang="ko-KR" sz="2200" dirty="0"/>
               <a:t> </a:t>
             </a:r>
             <a:r>
-              <a:rPr lang="ko-KR" altLang="ko-KR" sz="300" dirty="0" err="1"/>
-              <a:t>Memory</a:t>
-            </a:r>
-            <a:r>
-              <a:rPr lang="ko-KR" altLang="ko-KR" sz="300" dirty="0"/>
+              <a:rPr lang="ko-KR" altLang="ko-KR" sz="2200" dirty="0" err="1"/>
+              <a:t>From</a:t>
+            </a:r>
+            <a:r>
+              <a:rPr lang="ko-KR" altLang="ko-KR" sz="2200" dirty="0"/>
               <a:t> </a:t>
             </a:r>
             <a:r>
-              <a:rPr lang="ko-KR" altLang="ko-KR" sz="300" dirty="0" err="1"/>
-              <a:t>for</a:t>
-            </a:r>
-            <a:r>
-              <a:rPr lang="ko-KR" altLang="ko-KR" sz="300" dirty="0"/>
+              <a:rPr lang="ko-KR" altLang="ko-KR" sz="2200" dirty="0" err="1"/>
+              <a:t>Experience</a:t>
+            </a:r>
+            <a:r>
+              <a:rPr lang="ko-KR" altLang="ko-KR" sz="2200" dirty="0"/>
+              <a:t>”, 2025,</a:t>
+            </a:r>
+            <a:r>
+              <a:rPr lang="en-US" altLang="ko-KR" sz="2200" dirty="0"/>
               <a:t> </a:t>
             </a:r>
             <a:r>
-              <a:rPr lang="ko-KR" altLang="ko-KR" sz="300" dirty="0" err="1"/>
-              <a:t>Vision-Language-Action</a:t>
-            </a:r>
-            <a:r>
-              <a:rPr lang="ko-KR" altLang="ko-KR" sz="300" dirty="0"/>
-              <a:t> </a:t>
-            </a:r>
-            <a:r>
-              <a:rPr lang="ko-KR" altLang="ko-KR" sz="300" dirty="0" err="1"/>
-              <a:t>Models</a:t>
-            </a:r>
-            <a:r>
-              <a:rPr lang="ko-KR" altLang="ko-KR" sz="300" dirty="0"/>
-              <a:t>”, 2026</a:t>
-            </a:r>
-            <a:br>
-              <a:rPr lang="ko-KR" altLang="ko-KR" sz="300" dirty="0"/>
-            </a:br>
-            <a:r>
-              <a:rPr lang="ko-KR" altLang="ko-KR" sz="300" dirty="0"/>
-              <a:t>3. </a:t>
-            </a:r>
-            <a:r>
-              <a:rPr lang="ko-KR" altLang="ko-KR" sz="300" dirty="0" err="1"/>
-              <a:t>Y</a:t>
-            </a:r>
-            <a:r>
-              <a:rPr lang="ko-KR" altLang="ko-KR" sz="300" dirty="0"/>
-              <a:t>. </a:t>
-            </a:r>
-            <a:r>
-              <a:rPr lang="ko-KR" altLang="ko-KR" sz="300" dirty="0" err="1"/>
-              <a:t>Tur</a:t>
-            </a:r>
-            <a:r>
-              <a:rPr lang="ko-KR" altLang="ko-KR" sz="300" dirty="0"/>
-              <a:t> </a:t>
-            </a:r>
-            <a:r>
-              <a:rPr lang="ko-KR" altLang="ko-KR" sz="300" dirty="0" err="1"/>
-              <a:t>et</a:t>
-            </a:r>
-            <a:r>
-              <a:rPr lang="ko-KR" altLang="ko-KR" sz="300" dirty="0"/>
-              <a:t> </a:t>
-            </a:r>
-            <a:r>
-              <a:rPr lang="ko-KR" altLang="ko-KR" sz="300" dirty="0" err="1"/>
-              <a:t>al</a:t>
-            </a:r>
-            <a:r>
-              <a:rPr lang="ko-KR" altLang="ko-KR" sz="300" dirty="0"/>
-              <a:t>.,</a:t>
-            </a:r>
-            <a:r>
-              <a:rPr lang="en-US" altLang="ko-KR" sz="300" dirty="0"/>
-              <a:t> </a:t>
-            </a:r>
-            <a:r>
-              <a:rPr lang="ko-KR" altLang="ko-KR" sz="300" dirty="0"/>
-              <a:t>“</a:t>
-            </a:r>
-            <a:r>
-              <a:rPr lang="ko-KR" altLang="ko-KR" sz="300" dirty="0" err="1"/>
-              <a:t>Recurrent-Depth</a:t>
-            </a:r>
-            <a:r>
-              <a:rPr lang="ko-KR" altLang="ko-KR" sz="300" dirty="0"/>
-              <a:t> VLA: </a:t>
-            </a:r>
-            <a:r>
-              <a:rPr lang="ko-KR" altLang="ko-KR" sz="300" dirty="0" err="1"/>
-              <a:t>Implicit</a:t>
-            </a:r>
-            <a:r>
-              <a:rPr lang="ko-KR" altLang="ko-KR" sz="300" dirty="0"/>
-              <a:t> </a:t>
-            </a:r>
-            <a:r>
-              <a:rPr lang="ko-KR" altLang="ko-KR" sz="300" dirty="0" err="1"/>
-              <a:t>Test</a:t>
-            </a:r>
-            <a:r>
-              <a:rPr lang="ko-KR" altLang="ko-KR" sz="300" dirty="0"/>
-              <a:t>-Time </a:t>
-            </a:r>
-            <a:r>
-              <a:rPr lang="ko-KR" altLang="ko-KR" sz="300" dirty="0" err="1"/>
-              <a:t>Compute</a:t>
-            </a:r>
-            <a:r>
-              <a:rPr lang="ko-KR" altLang="ko-KR" sz="300" dirty="0"/>
-              <a:t> </a:t>
-            </a:r>
-            <a:r>
-              <a:rPr lang="ko-KR" altLang="ko-KR" sz="300" dirty="0" err="1"/>
-              <a:t>Scaling</a:t>
-            </a:r>
-            <a:r>
-              <a:rPr lang="ko-KR" altLang="ko-KR" sz="300" dirty="0"/>
-              <a:t> of </a:t>
-            </a:r>
-            <a:r>
-              <a:rPr lang="ko-KR" altLang="ko-KR" sz="300" dirty="0" err="1"/>
-              <a:t>Vision-Language-Action</a:t>
-            </a:r>
-            <a:r>
-              <a:rPr lang="ko-KR" altLang="ko-KR" sz="300" dirty="0"/>
-              <a:t> </a:t>
-            </a:r>
-            <a:r>
-              <a:rPr lang="ko-KR" altLang="ko-KR" sz="300" dirty="0" err="1"/>
-              <a:t>Models</a:t>
-            </a:r>
-            <a:r>
-              <a:rPr lang="ko-KR" altLang="ko-KR" sz="300" dirty="0"/>
-              <a:t> </a:t>
-            </a:r>
-            <a:r>
-              <a:rPr lang="ko-KR" altLang="ko-KR" sz="300" dirty="0" err="1"/>
-              <a:t>via</a:t>
-            </a:r>
-            <a:r>
-              <a:rPr lang="ko-KR" altLang="ko-KR" sz="300" dirty="0"/>
-              <a:t> </a:t>
-            </a:r>
-            <a:r>
-              <a:rPr lang="ko-KR" altLang="ko-KR" sz="300" dirty="0" err="1"/>
-              <a:t>Latent</a:t>
-            </a:r>
-            <a:r>
-              <a:rPr lang="ko-KR" altLang="ko-KR" sz="300" dirty="0"/>
-              <a:t> </a:t>
-            </a:r>
-            <a:r>
-              <a:rPr lang="ko-KR" altLang="ko-KR" sz="300" dirty="0" err="1"/>
-              <a:t>Iterative</a:t>
-            </a:r>
-            <a:r>
-              <a:rPr lang="ko-KR" altLang="ko-KR" sz="300" dirty="0"/>
-              <a:t> </a:t>
-            </a:r>
-            <a:r>
-              <a:rPr lang="ko-KR" altLang="ko-KR" sz="300" dirty="0" err="1"/>
-              <a:t>Reasoning</a:t>
-            </a:r>
-            <a:r>
-              <a:rPr lang="ko-KR" altLang="ko-KR" sz="300" dirty="0"/>
-              <a:t>”, 2026</a:t>
-            </a:r>
-            <a:br>
-              <a:rPr lang="ko-KR" altLang="ko-KR" sz="300" dirty="0"/>
-            </a:br>
-            <a:r>
-              <a:rPr lang="ko-KR" altLang="ko-KR" sz="300" dirty="0"/>
-              <a:t>4. </a:t>
-            </a:r>
-            <a:r>
-              <a:rPr lang="ko-KR" altLang="ko-KR" sz="300" dirty="0" err="1"/>
-              <a:t>Physical</a:t>
-            </a:r>
-            <a:r>
-              <a:rPr lang="ko-KR" altLang="ko-KR" sz="300" dirty="0"/>
-              <a:t> </a:t>
-            </a:r>
-            <a:r>
-              <a:rPr lang="ko-KR" altLang="ko-KR" sz="300" dirty="0" err="1"/>
-              <a:t>Intelligence</a:t>
-            </a:r>
-            <a:r>
-              <a:rPr lang="ko-KR" altLang="ko-KR" sz="300" dirty="0"/>
-              <a:t>,</a:t>
-            </a:r>
-            <a:r>
-              <a:rPr lang="en-US" altLang="ko-KR" sz="300" dirty="0"/>
-              <a:t> </a:t>
-            </a:r>
-            <a:r>
-              <a:rPr lang="ko-KR" altLang="ko-KR" sz="300" dirty="0"/>
-              <a:t>“π*0.6: </a:t>
-            </a:r>
-            <a:r>
-              <a:rPr lang="ko-KR" altLang="ko-KR" sz="300" dirty="0" err="1"/>
-              <a:t>A</a:t>
-            </a:r>
-            <a:r>
-              <a:rPr lang="ko-KR" altLang="ko-KR" sz="300" dirty="0"/>
-              <a:t> </a:t>
-            </a:r>
-            <a:r>
-              <a:rPr lang="ko-KR" altLang="ko-KR" sz="300" dirty="0" err="1"/>
-              <a:t>Vision-Language-Action</a:t>
-            </a:r>
-            <a:r>
-              <a:rPr lang="ko-KR" altLang="ko-KR" sz="300" dirty="0"/>
-              <a:t> </a:t>
-            </a:r>
-            <a:r>
-              <a:rPr lang="ko-KR" altLang="ko-KR" sz="300" dirty="0" err="1"/>
-              <a:t>Model</a:t>
-            </a:r>
-            <a:r>
-              <a:rPr lang="ko-KR" altLang="ko-KR" sz="300" dirty="0"/>
-              <a:t> </a:t>
-            </a:r>
-            <a:r>
-              <a:rPr lang="ko-KR" altLang="ko-KR" sz="300" dirty="0" err="1"/>
-              <a:t>That</a:t>
-            </a:r>
-            <a:r>
-              <a:rPr lang="ko-KR" altLang="ko-KR" sz="300" dirty="0"/>
-              <a:t> </a:t>
-            </a:r>
-            <a:r>
-              <a:rPr lang="ko-KR" altLang="ko-KR" sz="300" dirty="0" err="1"/>
-              <a:t>Learns</a:t>
-            </a:r>
-            <a:r>
-              <a:rPr lang="ko-KR" altLang="ko-KR" sz="300" dirty="0"/>
-              <a:t> </a:t>
-            </a:r>
-            <a:r>
-              <a:rPr lang="ko-KR" altLang="ko-KR" sz="300" dirty="0" err="1"/>
-              <a:t>From</a:t>
-            </a:r>
-            <a:r>
-              <a:rPr lang="ko-KR" altLang="ko-KR" sz="300" dirty="0"/>
-              <a:t> </a:t>
-            </a:r>
-            <a:r>
-              <a:rPr lang="ko-KR" altLang="ko-KR" sz="300" dirty="0" err="1"/>
-              <a:t>Experience</a:t>
-            </a:r>
-            <a:r>
-              <a:rPr lang="ko-KR" altLang="ko-KR" sz="300" dirty="0"/>
-              <a:t>”, 2025</a:t>
-            </a:r>
-            <a:endParaRPr lang="en-US" altLang="ko-KR" sz="450" dirty="0">
+              <a:rPr lang="ko-KR" altLang="ko-KR" sz="2200" dirty="0"/>
+              <a:t>arXiv:2511.14759.</a:t>
+            </a:r>
+            <a:endParaRPr lang="en-US" altLang="ko-KR" sz="2200" dirty="0">
               <a:latin typeface="+mn-ea"/>
             </a:endParaRPr>
           </a:p>
@@ -6096,8 +6689,8 @@
         </p:nvSpPr>
         <p:spPr>
           <a:xfrm>
-            <a:off x="2511163" y="6860749"/>
-            <a:ext cx="502138" cy="161583"/>
+            <a:off x="530160" y="27262776"/>
+            <a:ext cx="4021957" cy="646330"/>
           </a:xfrm>
           <a:prstGeom prst="rect">
             <a:avLst/>
@@ -6147,7 +6740,7 @@
           <a:p>
             <a:pPr algn="ctr"/>
             <a:r>
-              <a:rPr lang="ko-KR" altLang="en-US" sz="450" b="1" dirty="0">
+              <a:rPr lang="ko-KR" altLang="en-US" sz="3600" b="1" dirty="0">
                 <a:solidFill>
                   <a:schemeClr val="bg1"/>
                 </a:solidFill>
@@ -6155,7 +6748,7 @@
               </a:rPr>
               <a:t>참고 문헌</a:t>
             </a:r>
-            <a:endParaRPr lang="en-US" altLang="ko-KR" sz="450" b="1" dirty="0">
+            <a:endParaRPr lang="en-US" altLang="ko-KR" sz="3600" b="1" dirty="0">
               <a:solidFill>
                 <a:schemeClr val="bg1"/>
               </a:solidFill>
@@ -6180,8 +6773,8 @@
         </p:nvCxnSpPr>
         <p:spPr>
           <a:xfrm>
-            <a:off x="4414651" y="3883980"/>
-            <a:ext cx="0" cy="492915"/>
+            <a:off x="15776460" y="3428082"/>
+            <a:ext cx="6358" cy="3331673"/>
           </a:xfrm>
           <a:prstGeom prst="line">
             <a:avLst/>
@@ -6225,8 +6818,8 @@
         </p:nvCxnSpPr>
         <p:spPr>
           <a:xfrm>
-            <a:off x="3813015" y="4395811"/>
-            <a:ext cx="1204411" cy="0"/>
+            <a:off x="10942381" y="6890969"/>
+            <a:ext cx="9646920" cy="0"/>
           </a:xfrm>
           <a:prstGeom prst="line">
             <a:avLst/>
@@ -6276,8 +6869,8 @@
         </p:blipFill>
         <p:spPr>
           <a:xfrm>
-            <a:off x="2546050" y="4335372"/>
-            <a:ext cx="1197944" cy="645306"/>
+            <a:off x="587093" y="12236892"/>
+            <a:ext cx="6652406" cy="3583504"/>
           </a:xfrm>
           <a:prstGeom prst="rect">
             <a:avLst/>
@@ -6300,8 +6893,8 @@
         </p:nvSpPr>
         <p:spPr bwMode="auto">
           <a:xfrm>
-            <a:off x="3760810" y="5326780"/>
-            <a:ext cx="38054" cy="38054"/>
+            <a:off x="10539413" y="13366631"/>
+            <a:ext cx="304800" cy="304800"/>
           </a:xfrm>
           <a:prstGeom prst="rect">
             <a:avLst/>
@@ -6318,14 +6911,14 @@
           </a:extLst>
         </p:spPr>
         <p:txBody>
-          <a:bodyPr vert="horz" wrap="square" lIns="11416" tIns="5708" rIns="11416" bIns="5708" numCol="1" anchor="t" anchorCtr="0" compatLnSpc="1">
+          <a:bodyPr vert="horz" wrap="square" lIns="91440" tIns="45720" rIns="91440" bIns="45720" numCol="1" anchor="t" anchorCtr="0" compatLnSpc="1">
             <a:prstTxWarp prst="textNoShape">
               <a:avLst/>
             </a:prstTxWarp>
           </a:bodyPr>
           <a:lstStyle/>
           <a:p>
-            <a:endParaRPr lang="ko-KR" altLang="en-US" sz="225"/>
+            <a:endParaRPr lang="ko-KR" altLang="en-US"/>
           </a:p>
         </p:txBody>
       </p:sp>
@@ -6351,8 +6944,8 @@
         </p:blipFill>
         <p:spPr>
           <a:xfrm>
-            <a:off x="3798864" y="5188921"/>
-            <a:ext cx="1235122" cy="633601"/>
+            <a:off x="10830770" y="12518400"/>
+            <a:ext cx="9895691" cy="3665926"/>
           </a:xfrm>
           <a:prstGeom prst="rect">
             <a:avLst/>
@@ -6375,8 +6968,8 @@
             </p:nvSpPr>
             <p:spPr>
               <a:xfrm>
-                <a:off x="3999219" y="4885950"/>
-                <a:ext cx="835810" cy="173637"/>
+                <a:off x="13213034" y="10357804"/>
+                <a:ext cx="6694550" cy="1384738"/>
               </a:xfrm>
               <a:prstGeom prst="rect">
                 <a:avLst/>
@@ -6398,41 +6991,41 @@
               <a:p>
                 <a:pPr algn="ctr"/>
                 <a:r>
-                  <a:rPr lang="ko-KR" altLang="ko-KR" sz="325" b="1" dirty="0"/>
+                  <a:rPr lang="ko-KR" altLang="ko-KR" sz="2600" b="1" dirty="0"/>
                   <a:t>System2 </a:t>
                 </a:r>
                 <a:r>
-                  <a:rPr lang="ko-KR" altLang="ko-KR" sz="325" b="1" dirty="0" err="1"/>
+                  <a:rPr lang="ko-KR" altLang="ko-KR" sz="2600" b="1" dirty="0" err="1"/>
                   <a:t>stage</a:t>
                 </a:r>
                 <a:r>
-                  <a:rPr lang="ko-KR" altLang="ko-KR" sz="325" b="1" dirty="0"/>
+                  <a:rPr lang="ko-KR" altLang="ko-KR" sz="2600" b="1" dirty="0"/>
                   <a:t>/</a:t>
                 </a:r>
                 <a:r>
-                  <a:rPr lang="ko-KR" altLang="ko-KR" sz="325" b="1" dirty="0" err="1"/>
+                  <a:rPr lang="ko-KR" altLang="ko-KR" sz="2600" b="1" dirty="0" err="1"/>
                   <a:t>subtask</a:t>
                 </a:r>
                 <a:r>
-                  <a:rPr lang="ko-KR" altLang="ko-KR" sz="325" b="1" dirty="0"/>
+                  <a:rPr lang="ko-KR" altLang="ko-KR" sz="2600" b="1" dirty="0"/>
                   <a:t> </a:t>
                 </a:r>
                 <a:r>
-                  <a:rPr lang="ko-KR" altLang="ko-KR" sz="325" b="1" dirty="0" err="1"/>
+                  <a:rPr lang="ko-KR" altLang="ko-KR" sz="2600" b="1" dirty="0" err="1"/>
                   <a:t>prediction의</a:t>
                 </a:r>
                 <a:r>
-                  <a:rPr lang="ko-KR" altLang="ko-KR" sz="325" b="1" dirty="0"/>
+                  <a:rPr lang="ko-KR" altLang="ko-KR" sz="2600" b="1" dirty="0"/>
                   <a:t> 정확도</a:t>
                 </a:r>
-                <a:endParaRPr lang="en-US" altLang="ko-KR" sz="325" b="1" dirty="0"/>
+                <a:endParaRPr lang="en-US" altLang="ko-KR" sz="2600" b="1" dirty="0"/>
               </a:p>
               <a:p>
-                <a:pPr marL="42813" indent="-42813" algn="ctr">
+                <a:pPr marL="342900" indent="-342900" algn="ctr">
                   <a:buFont typeface="Arial" panose="020B0604020202020204" pitchFamily="34" charset="0"/>
                   <a:buChar char="•"/>
                 </a:pPr>
-                <a:endParaRPr lang="en-US" altLang="ko-KR" sz="325" b="1" dirty="0">
+                <a:endParaRPr lang="en-US" altLang="ko-KR" sz="2600" b="1" dirty="0">
                   <a:latin typeface="+mj-ea"/>
                   <a:ea typeface="+mj-ea"/>
                 </a:endParaRPr>
@@ -6440,7 +7033,7 @@
               <a:p>
                 <a:pPr algn="ctr"/>
                 <a:r>
-                  <a:rPr lang="en-US" altLang="ko-KR" sz="325" dirty="0">
+                  <a:rPr lang="en-US" altLang="ko-KR" sz="2600" dirty="0">
                     <a:latin typeface="+mj-ea"/>
                     <a:ea typeface="+mj-ea"/>
                   </a:rPr>
@@ -6451,7 +7044,7 @@
                     <m:f>
                       <m:fPr>
                         <m:ctrlPr>
-                          <a:rPr lang="ko-KR" altLang="en-US" sz="325" i="1">
+                          <a:rPr lang="ko-KR" altLang="en-US" sz="2600" i="1" smtClean="0">
                             <a:latin typeface="Cambria Math" panose="02040503050406030204" pitchFamily="18" charset="0"/>
                             <a:ea typeface="+mj-ea"/>
                           </a:rPr>
@@ -6462,14 +7055,14 @@
                           <m:rPr>
                             <m:sty m:val="p"/>
                           </m:rPr>
-                          <a:rPr lang="en-US" altLang="ko-KR" sz="325">
+                          <a:rPr lang="en-US" altLang="ko-KR" sz="2600" b="0" i="0" smtClean="0">
                             <a:latin typeface="Cambria Math" panose="02040503050406030204" pitchFamily="18" charset="0"/>
                             <a:ea typeface="+mj-ea"/>
                           </a:rPr>
                           <m:t>Number</m:t>
                         </m:r>
                         <m:r>
-                          <a:rPr lang="en-US" altLang="ko-KR" sz="325">
+                          <a:rPr lang="en-US" altLang="ko-KR" sz="2600" b="0" i="0" smtClean="0">
                             <a:latin typeface="Cambria Math" panose="02040503050406030204" pitchFamily="18" charset="0"/>
                             <a:ea typeface="+mj-ea"/>
                           </a:rPr>
@@ -6479,14 +7072,14 @@
                           <m:rPr>
                             <m:sty m:val="p"/>
                           </m:rPr>
-                          <a:rPr lang="en-US" altLang="ko-KR" sz="325">
+                          <a:rPr lang="en-US" altLang="ko-KR" sz="2600" b="0" i="0" smtClean="0">
                             <a:latin typeface="Cambria Math" panose="02040503050406030204" pitchFamily="18" charset="0"/>
                             <a:ea typeface="+mj-ea"/>
                           </a:rPr>
                           <m:t>of</m:t>
                         </m:r>
                         <m:r>
-                          <a:rPr lang="en-US" altLang="ko-KR" sz="325">
+                          <a:rPr lang="en-US" altLang="ko-KR" sz="2600" b="0" i="0" smtClean="0">
                             <a:latin typeface="Cambria Math" panose="02040503050406030204" pitchFamily="18" charset="0"/>
                             <a:ea typeface="+mj-ea"/>
                           </a:rPr>
@@ -6496,14 +7089,14 @@
                           <m:rPr>
                             <m:sty m:val="p"/>
                           </m:rPr>
-                          <a:rPr lang="en-US" altLang="ko-KR" sz="325">
+                          <a:rPr lang="en-US" altLang="ko-KR" sz="2600" b="0" i="0" smtClean="0">
                             <a:latin typeface="Cambria Math" panose="02040503050406030204" pitchFamily="18" charset="0"/>
                             <a:ea typeface="+mj-ea"/>
                           </a:rPr>
                           <m:t>Correct</m:t>
                         </m:r>
                         <m:r>
-                          <a:rPr lang="en-US" altLang="ko-KR" sz="325">
+                          <a:rPr lang="en-US" altLang="ko-KR" sz="2600" b="0" i="0" smtClean="0">
                             <a:latin typeface="Cambria Math" panose="02040503050406030204" pitchFamily="18" charset="0"/>
                             <a:ea typeface="+mj-ea"/>
                           </a:rPr>
@@ -6513,7 +7106,7 @@
                           <m:rPr>
                             <m:sty m:val="p"/>
                           </m:rPr>
-                          <a:rPr lang="en-US" altLang="ko-KR" sz="325">
+                          <a:rPr lang="en-US" altLang="ko-KR" sz="2600" b="0" i="0" smtClean="0">
                             <a:latin typeface="Cambria Math" panose="02040503050406030204" pitchFamily="18" charset="0"/>
                             <a:ea typeface="+mj-ea"/>
                           </a:rPr>
@@ -6525,14 +7118,14 @@
                           <m:rPr>
                             <m:sty m:val="p"/>
                           </m:rPr>
-                          <a:rPr lang="en-US" altLang="ko-KR" sz="325">
+                          <a:rPr lang="en-US" altLang="ko-KR" sz="2600" b="0" i="0" smtClean="0">
                             <a:latin typeface="Cambria Math" panose="02040503050406030204" pitchFamily="18" charset="0"/>
                             <a:ea typeface="+mj-ea"/>
                           </a:rPr>
                           <m:t>Total</m:t>
                         </m:r>
                         <m:r>
-                          <a:rPr lang="en-US" altLang="ko-KR" sz="325">
+                          <a:rPr lang="en-US" altLang="ko-KR" sz="2600" b="0" i="0" smtClean="0">
                             <a:latin typeface="Cambria Math" panose="02040503050406030204" pitchFamily="18" charset="0"/>
                             <a:ea typeface="+mj-ea"/>
                           </a:rPr>
@@ -6542,7 +7135,7 @@
                           <m:rPr>
                             <m:sty m:val="p"/>
                           </m:rPr>
-                          <a:rPr lang="en-US" altLang="ko-KR" sz="325">
+                          <a:rPr lang="en-US" altLang="ko-KR" sz="2600" b="0" i="0" smtClean="0">
                             <a:latin typeface="Cambria Math" panose="02040503050406030204" pitchFamily="18" charset="0"/>
                             <a:ea typeface="+mj-ea"/>
                           </a:rPr>
@@ -6552,7 +7145,7 @@
                     </m:f>
                   </m:oMath>
                 </a14:m>
-                <a:endParaRPr lang="ko-KR" altLang="en-US" sz="325" dirty="0">
+                <a:endParaRPr lang="ko-KR" altLang="en-US" sz="2600" dirty="0">
                   <a:latin typeface="+mj-ea"/>
                   <a:ea typeface="+mj-ea"/>
                 </a:endParaRPr>
@@ -6577,8 +7170,8 @@
             </p:nvSpPr>
             <p:spPr>
               <a:xfrm>
-                <a:off x="3999219" y="4885950"/>
-                <a:ext cx="835810" cy="173637"/>
+                <a:off x="13213034" y="10357804"/>
+                <a:ext cx="6694550" cy="1384738"/>
               </a:xfrm>
               <a:prstGeom prst="rect">
                 <a:avLst/>
@@ -6586,7 +7179,7 @@
               <a:blipFill>
                 <a:blip r:embed="rId6"/>
                 <a:stretch>
-                  <a:fillRect l="-1439" t="-6667" r="-2158" b="-6667"/>
+                  <a:fillRect l="-1272" t="-7860" r="-1362" b="-6550"/>
                 </a:stretch>
               </a:blipFill>
               <a:ln>
@@ -6626,8 +7219,8 @@
             </p:nvSpPr>
             <p:spPr>
               <a:xfrm>
-                <a:off x="4084565" y="5342164"/>
-                <a:ext cx="665118" cy="154145"/>
+                <a:off x="13691800" y="13562575"/>
+                <a:ext cx="5392630" cy="1238224"/>
               </a:xfrm>
               <a:prstGeom prst="rect">
                 <a:avLst/>
@@ -6649,14 +7242,14 @@
               <a:p>
                 <a:pPr algn="ctr"/>
                 <a:r>
-                  <a:rPr lang="ko-KR" altLang="en-US" sz="325" b="1" dirty="0">
+                  <a:rPr lang="ko-KR" altLang="en-US" sz="2600" b="1" dirty="0">
                     <a:latin typeface="+mj-ea"/>
                     <a:ea typeface="+mj-ea"/>
                   </a:rPr>
                   <a:t>모델의 전체 학습 손실</a:t>
                 </a:r>
                 <a:r>
-                  <a:rPr lang="en-US" altLang="ko-KR" sz="325" b="1" dirty="0">
+                  <a:rPr lang="en-US" altLang="ko-KR" sz="2600" b="1" dirty="0">
                     <a:latin typeface="+mj-ea"/>
                     <a:ea typeface="+mj-ea"/>
                   </a:rPr>
@@ -6664,11 +7257,11 @@
                 </a:r>
               </a:p>
               <a:p>
-                <a:pPr marL="42813" indent="-42813">
+                <a:pPr marL="342900" indent="-342900">
                   <a:buFont typeface="Arial" panose="020B0604020202020204" pitchFamily="34" charset="0"/>
                   <a:buChar char="•"/>
                 </a:pPr>
-                <a:endParaRPr lang="en-US" altLang="ko-KR" sz="325" i="1" dirty="0">
+                <a:endParaRPr lang="en-US" altLang="ko-KR" sz="2600" i="1" dirty="0">
                   <a:latin typeface="+mj-ea"/>
                   <a:ea typeface="+mj-ea"/>
                 </a:endParaRPr>
@@ -6680,7 +7273,7 @@
                     <m:sSub>
                       <m:sSubPr>
                         <m:ctrlPr>
-                          <a:rPr lang="ko-KR" altLang="en-US" sz="325" i="1">
+                          <a:rPr lang="ko-KR" altLang="en-US" sz="2600" i="1" smtClean="0">
                             <a:latin typeface="Cambria Math" panose="02040503050406030204" pitchFamily="18" charset="0"/>
                             <a:ea typeface="+mj-ea"/>
                           </a:rPr>
@@ -6688,7 +7281,7 @@
                       </m:sSubPr>
                       <m:e>
                         <m:r>
-                          <a:rPr lang="en-US" altLang="ko-KR" sz="325" i="1">
+                          <a:rPr lang="en-US" altLang="ko-KR" sz="2600" b="0" i="1" smtClean="0">
                             <a:latin typeface="Cambria Math" panose="02040503050406030204" pitchFamily="18" charset="0"/>
                             <a:ea typeface="+mj-ea"/>
                           </a:rPr>
@@ -6697,7 +7290,7 @@
                       </m:e>
                       <m:sub>
                         <m:r>
-                          <a:rPr lang="en-US" altLang="ko-KR" sz="325" i="1">
+                          <a:rPr lang="en-US" altLang="ko-KR" sz="2600" b="0" i="1" smtClean="0">
                             <a:latin typeface="Cambria Math" panose="02040503050406030204" pitchFamily="18" charset="0"/>
                             <a:ea typeface="+mj-ea"/>
                           </a:rPr>
@@ -6708,14 +7301,14 @@
                   </m:oMath>
                 </a14:m>
                 <a:r>
-                  <a:rPr lang="ko-KR" altLang="en-US" sz="325" dirty="0">
+                  <a:rPr lang="ko-KR" altLang="en-US" sz="2600" dirty="0">
                     <a:latin typeface="+mj-ea"/>
                     <a:ea typeface="+mj-ea"/>
                   </a:rPr>
                   <a:t> </a:t>
                 </a:r>
                 <a:r>
-                  <a:rPr lang="en-US" altLang="ko-KR" sz="325" dirty="0">
+                  <a:rPr lang="en-US" altLang="ko-KR" sz="2600" dirty="0">
                     <a:latin typeface="+mj-ea"/>
                     <a:ea typeface="+mj-ea"/>
                   </a:rPr>
@@ -6726,7 +7319,7 @@
                     <m:sSub>
                       <m:sSubPr>
                         <m:ctrlPr>
-                          <a:rPr lang="ko-KR" altLang="en-US" sz="325" i="1">
+                          <a:rPr lang="ko-KR" altLang="en-US" sz="2600" i="1">
                             <a:latin typeface="Cambria Math" panose="02040503050406030204" pitchFamily="18" charset="0"/>
                             <a:ea typeface="+mj-ea"/>
                           </a:rPr>
@@ -6734,7 +7327,7 @@
                       </m:sSubPr>
                       <m:e>
                         <m:r>
-                          <a:rPr lang="en-US" altLang="ko-KR" sz="325" i="1">
+                          <a:rPr lang="en-US" altLang="ko-KR" sz="2600" b="0" i="1">
                             <a:latin typeface="Cambria Math" panose="02040503050406030204" pitchFamily="18" charset="0"/>
                             <a:ea typeface="+mj-ea"/>
                           </a:rPr>
@@ -6743,7 +7336,7 @@
                       </m:e>
                       <m:sub>
                         <m:r>
-                          <a:rPr lang="en-US" altLang="ko-KR" sz="325" i="1">
+                          <a:rPr lang="en-US" altLang="ko-KR" sz="2600" b="0" i="1" smtClean="0">
                             <a:latin typeface="Cambria Math" panose="02040503050406030204" pitchFamily="18" charset="0"/>
                             <a:ea typeface="+mj-ea"/>
                           </a:rPr>
@@ -6754,14 +7347,14 @@
                   </m:oMath>
                 </a14:m>
                 <a:r>
-                  <a:rPr lang="ko-KR" altLang="en-US" sz="325" dirty="0">
+                  <a:rPr lang="ko-KR" altLang="en-US" sz="2600" dirty="0">
                     <a:latin typeface="+mj-ea"/>
                     <a:ea typeface="+mj-ea"/>
                   </a:rPr>
                   <a:t> </a:t>
                 </a:r>
                 <a:r>
-                  <a:rPr lang="en-US" altLang="ko-KR" sz="325" dirty="0">
+                  <a:rPr lang="en-US" altLang="ko-KR" sz="2600" dirty="0">
                     <a:latin typeface="+mj-ea"/>
                     <a:ea typeface="+mj-ea"/>
                   </a:rPr>
@@ -6772,7 +7365,7 @@
                     <m:sSub>
                       <m:sSubPr>
                         <m:ctrlPr>
-                          <a:rPr lang="ko-KR" altLang="en-US" sz="325" i="1">
+                          <a:rPr lang="ko-KR" altLang="en-US" sz="2600" i="1">
                             <a:latin typeface="Cambria Math" panose="02040503050406030204" pitchFamily="18" charset="0"/>
                             <a:ea typeface="+mj-ea"/>
                           </a:rPr>
@@ -6782,7 +7375,7 @@
                         <m:sSub>
                           <m:sSubPr>
                             <m:ctrlPr>
-                              <a:rPr lang="ko-KR" altLang="en-US" sz="325" i="1">
+                              <a:rPr lang="ko-KR" altLang="en-US" sz="2600" i="1">
                                 <a:latin typeface="Cambria Math" panose="02040503050406030204" pitchFamily="18" charset="0"/>
                                 <a:ea typeface="+mj-ea"/>
                               </a:rPr>
@@ -6790,7 +7383,7 @@
                           </m:sSubPr>
                           <m:e>
                             <m:r>
-                              <a:rPr lang="ko-KR" altLang="en-US" sz="325" i="1">
+                              <a:rPr lang="ko-KR" altLang="en-US" sz="2600" b="0" i="1" smtClean="0">
                                 <a:latin typeface="Cambria Math" panose="02040503050406030204" pitchFamily="18" charset="0"/>
                                 <a:ea typeface="+mj-ea"/>
                               </a:rPr>
@@ -6799,7 +7392,7 @@
                           </m:e>
                           <m:sub>
                             <m:r>
-                              <a:rPr lang="en-US" altLang="ko-KR" sz="325" i="1">
+                              <a:rPr lang="en-US" altLang="ko-KR" sz="2600" b="0" i="1" smtClean="0">
                                 <a:latin typeface="Cambria Math" panose="02040503050406030204" pitchFamily="18" charset="0"/>
                                 <a:ea typeface="+mj-ea"/>
                               </a:rPr>
@@ -6808,7 +7401,7 @@
                           </m:sub>
                         </m:sSub>
                         <m:r>
-                          <a:rPr lang="en-US" altLang="ko-KR" sz="325" i="1">
+                          <a:rPr lang="en-US" altLang="ko-KR" sz="2600" b="0" i="1">
                             <a:latin typeface="Cambria Math" panose="02040503050406030204" pitchFamily="18" charset="0"/>
                             <a:ea typeface="+mj-ea"/>
                           </a:rPr>
@@ -6817,7 +7410,7 @@
                       </m:e>
                       <m:sub>
                         <m:r>
-                          <a:rPr lang="en-US" altLang="ko-KR" sz="325" i="1">
+                          <a:rPr lang="en-US" altLang="ko-KR" sz="2600" b="0" i="1" smtClean="0">
                             <a:latin typeface="Cambria Math" panose="02040503050406030204" pitchFamily="18" charset="0"/>
                             <a:ea typeface="+mj-ea"/>
                           </a:rPr>
@@ -6828,14 +7421,14 @@
                   </m:oMath>
                 </a14:m>
                 <a:r>
-                  <a:rPr lang="ko-KR" altLang="en-US" sz="325" dirty="0">
+                  <a:rPr lang="ko-KR" altLang="en-US" sz="2600" dirty="0">
                     <a:latin typeface="+mj-ea"/>
                     <a:ea typeface="+mj-ea"/>
                   </a:rPr>
                   <a:t> </a:t>
                 </a:r>
                 <a:r>
-                  <a:rPr lang="en-US" altLang="ko-KR" sz="325" dirty="0">
+                  <a:rPr lang="en-US" altLang="ko-KR" sz="2600" dirty="0">
                     <a:latin typeface="+mj-ea"/>
                     <a:ea typeface="+mj-ea"/>
                   </a:rPr>
@@ -6846,7 +7439,7 @@
                     <m:sSub>
                       <m:sSubPr>
                         <m:ctrlPr>
-                          <a:rPr lang="ko-KR" altLang="en-US" sz="325" i="1">
+                          <a:rPr lang="ko-KR" altLang="en-US" sz="2600" i="1">
                             <a:latin typeface="Cambria Math" panose="02040503050406030204" pitchFamily="18" charset="0"/>
                             <a:ea typeface="+mj-ea"/>
                           </a:rPr>
@@ -6854,7 +7447,7 @@
                       </m:sSubPr>
                       <m:e>
                         <m:r>
-                          <a:rPr lang="ko-KR" altLang="en-US" sz="325" i="1">
+                          <a:rPr lang="ko-KR" altLang="en-US" sz="2600" b="0" i="1">
                             <a:latin typeface="Cambria Math" panose="02040503050406030204" pitchFamily="18" charset="0"/>
                             <a:ea typeface="+mj-ea"/>
                           </a:rPr>
@@ -6863,7 +7456,7 @@
                       </m:e>
                       <m:sub>
                         <m:r>
-                          <a:rPr lang="en-US" altLang="ko-KR" sz="325" i="1">
+                          <a:rPr lang="en-US" altLang="ko-KR" sz="2600" b="0" i="1" smtClean="0">
                             <a:latin typeface="Cambria Math" panose="02040503050406030204" pitchFamily="18" charset="0"/>
                             <a:ea typeface="+mj-ea"/>
                           </a:rPr>
@@ -6874,7 +7467,7 @@
                     <m:sSub>
                       <m:sSubPr>
                         <m:ctrlPr>
-                          <a:rPr lang="ko-KR" altLang="en-US" sz="325" i="1">
+                          <a:rPr lang="ko-KR" altLang="en-US" sz="2600" i="1">
                             <a:latin typeface="Cambria Math" panose="02040503050406030204" pitchFamily="18" charset="0"/>
                             <a:ea typeface="+mj-ea"/>
                           </a:rPr>
@@ -6882,7 +7475,7 @@
                       </m:sSubPr>
                       <m:e>
                         <m:r>
-                          <a:rPr lang="en-US" altLang="ko-KR" sz="325" i="1">
+                          <a:rPr lang="en-US" altLang="ko-KR" sz="2600" b="0" i="1">
                             <a:latin typeface="Cambria Math" panose="02040503050406030204" pitchFamily="18" charset="0"/>
                             <a:ea typeface="+mj-ea"/>
                           </a:rPr>
@@ -6891,7 +7484,7 @@
                       </m:e>
                       <m:sub>
                         <m:r>
-                          <a:rPr lang="en-US" altLang="ko-KR" sz="325" i="1">
+                          <a:rPr lang="en-US" altLang="ko-KR" sz="2600" b="0" i="1" smtClean="0">
                             <a:latin typeface="Cambria Math" panose="02040503050406030204" pitchFamily="18" charset="0"/>
                             <a:ea typeface="+mj-ea"/>
                           </a:rPr>
@@ -6901,7 +7494,7 @@
                     </m:sSub>
                   </m:oMath>
                 </a14:m>
-                <a:endParaRPr lang="ko-KR" altLang="en-US" sz="325" dirty="0">
+                <a:endParaRPr lang="ko-KR" altLang="en-US" sz="2600" dirty="0">
                   <a:latin typeface="+mj-ea"/>
                   <a:ea typeface="+mj-ea"/>
                 </a:endParaRPr>
@@ -6926,8 +7519,8 @@
             </p:nvSpPr>
             <p:spPr>
               <a:xfrm>
-                <a:off x="4084565" y="5342164"/>
-                <a:ext cx="665118" cy="154145"/>
+                <a:off x="13691800" y="13562575"/>
+                <a:ext cx="5392630" cy="1238224"/>
               </a:xfrm>
               <a:prstGeom prst="rect">
                 <a:avLst/>
@@ -6935,7 +7528,7 @@
               <a:blipFill>
                 <a:blip r:embed="rId7"/>
                 <a:stretch>
-                  <a:fillRect l="-1802" r="-1802" b="-10714"/>
+                  <a:fillRect t="-7805" b="-11220"/>
                 </a:stretch>
               </a:blipFill>
               <a:ln>
@@ -6974,14 +7567,14 @@
           <p:nvPr>
             <p:extLst>
               <p:ext uri="{D42A27DB-BD31-4B8C-83A1-F6EECF244321}">
-                <p14:modId xmlns:p14="http://schemas.microsoft.com/office/powerpoint/2010/main" val="3069877192"/>
+                <p14:modId xmlns:p14="http://schemas.microsoft.com/office/powerpoint/2010/main" val="2554557120"/>
               </p:ext>
             </p:extLst>
           </p:nvPr>
         </p:nvGraphicFramePr>
         <p:xfrm>
-          <a:off x="2664319" y="6388728"/>
-          <a:ext cx="960159" cy="452843"/>
+          <a:off x="2000727" y="21991308"/>
+          <a:ext cx="7321297" cy="3352800"/>
         </p:xfrm>
         <a:graphic>
           <a:graphicData uri="http://schemas.openxmlformats.org/drawingml/2006/table">
@@ -6990,21 +7583,21 @@
                 <a:tableStyleId>{3B4B98B0-60AC-42C2-AFA5-B58CD77FA1E5}</a:tableStyleId>
               </a:tblPr>
               <a:tblGrid>
-                <a:gridCol w="238694">
+                <a:gridCol w="1770825">
                   <a:extLst>
                     <a:ext uri="{9D8B030D-6E8A-4147-A177-3AD203B41FA5}">
                       <a16:colId xmlns:a16="http://schemas.microsoft.com/office/drawing/2014/main" val="75515524"/>
                     </a:ext>
                   </a:extLst>
                 </a:gridCol>
-                <a:gridCol w="370940">
+                <a:gridCol w="2742883">
                   <a:extLst>
                     <a:ext uri="{9D8B030D-6E8A-4147-A177-3AD203B41FA5}">
                       <a16:colId xmlns:a16="http://schemas.microsoft.com/office/drawing/2014/main" val="3559314400"/>
                     </a:ext>
                   </a:extLst>
                 </a:gridCol>
-                <a:gridCol w="350525">
+                <a:gridCol w="2807589">
                   <a:extLst>
                     <a:ext uri="{9D8B030D-6E8A-4147-A177-3AD203B41FA5}">
                       <a16:colId xmlns:a16="http://schemas.microsoft.com/office/drawing/2014/main" val="1007297346"/>
@@ -7012,17 +7605,17 @@
                   </a:extLst>
                 </a:gridCol>
               </a:tblGrid>
-              <a:tr h="65237">
+              <a:tr h="370840">
                 <a:tc>
                   <a:txBody>
                     <a:bodyPr/>
                     <a:lstStyle/>
                     <a:p>
                       <a:pPr latinLnBrk="1"/>
-                      <a:endParaRPr lang="ko-KR" altLang="en-US" sz="400" dirty="0"/>
+                      <a:endParaRPr lang="ko-KR" altLang="en-US" sz="2400" dirty="0"/>
                     </a:p>
                   </a:txBody>
-                  <a:tcPr marL="11416" marR="11416" marT="5708" marB="5708"/>
+                  <a:tcPr/>
                 </a:tc>
                 <a:tc>
                   <a:txBody>
@@ -7031,21 +7624,21 @@
                     <a:p>
                       <a:pPr algn="ctr" latinLnBrk="1"/>
                       <a:r>
-                        <a:rPr lang="en-US" altLang="ko-KR" sz="400" dirty="0"/>
+                        <a:rPr lang="en-US" altLang="ko-KR" sz="2400" dirty="0"/>
                         <a:t>1</a:t>
                       </a:r>
                       <a:r>
-                        <a:rPr lang="en-US" altLang="ko-KR" sz="400" baseline="30000" dirty="0"/>
+                        <a:rPr lang="en-US" altLang="ko-KR" sz="2400" baseline="30000" dirty="0"/>
                         <a:t>st</a:t>
                       </a:r>
                       <a:r>
-                        <a:rPr lang="en-US" altLang="ko-KR" sz="400" dirty="0"/>
+                        <a:rPr lang="en-US" altLang="ko-KR" sz="2400" dirty="0"/>
                         <a:t> </a:t>
                       </a:r>
-                      <a:endParaRPr lang="ko-KR" altLang="en-US" sz="400" dirty="0"/>
+                      <a:endParaRPr lang="ko-KR" altLang="en-US" sz="2400" dirty="0"/>
                     </a:p>
                   </a:txBody>
-                  <a:tcPr marL="11416" marR="11416" marT="5708" marB="5708"/>
+                  <a:tcPr/>
                 </a:tc>
                 <a:tc>
                   <a:txBody>
@@ -7054,12 +7647,12 @@
                     <a:p>
                       <a:pPr algn="ctr" latinLnBrk="1"/>
                       <a:r>
-                        <a:rPr lang="ko-KR" altLang="en-US" sz="400" dirty="0"/>
+                        <a:rPr lang="ko-KR" altLang="en-US" sz="2400" dirty="0"/>
                         <a:t>경량화 모델</a:t>
                       </a:r>
                     </a:p>
                   </a:txBody>
-                  <a:tcPr marL="11416" marR="11416" marT="5708" marB="5708"/>
+                  <a:tcPr/>
                 </a:tc>
                 <a:extLst>
                   <a:ext uri="{0D108BD9-81ED-4DB2-BD59-A6C34878D82A}">
@@ -7067,7 +7660,7 @@
                   </a:ext>
                 </a:extLst>
               </a:tr>
-              <a:tr h="102746">
+              <a:tr h="370840">
                 <a:tc>
                   <a:txBody>
                     <a:bodyPr/>
@@ -7075,13 +7668,13 @@
                     <a:p>
                       <a:pPr latinLnBrk="1"/>
                       <a:r>
-                        <a:rPr lang="en-US" altLang="ko-KR" sz="300" dirty="0"/>
+                        <a:rPr lang="en-US" altLang="ko-KR" sz="2200" dirty="0"/>
                         <a:t>GPU</a:t>
                       </a:r>
-                      <a:endParaRPr lang="ko-KR" altLang="en-US" sz="300" dirty="0"/>
+                      <a:endParaRPr lang="ko-KR" altLang="en-US" sz="2200" dirty="0"/>
                     </a:p>
                   </a:txBody>
-                  <a:tcPr marL="11416" marR="11416" marT="5708" marB="5708"/>
+                  <a:tcPr/>
                 </a:tc>
                 <a:tc>
                   <a:txBody>
@@ -7090,28 +7683,28 @@
                     <a:p>
                       <a:pPr algn="ctr" latinLnBrk="1"/>
                       <a:r>
-                        <a:rPr lang="en-US" altLang="ko-KR" sz="300" dirty="0"/>
+                        <a:rPr lang="en-US" altLang="ko-KR" sz="2200" dirty="0"/>
                         <a:t>H200 x 8</a:t>
                       </a:r>
                     </a:p>
                     <a:p>
                       <a:pPr algn="ctr" latinLnBrk="1"/>
                       <a:r>
-                        <a:rPr lang="en-US" altLang="ko-KR" sz="300" dirty="0"/>
+                        <a:rPr lang="en-US" altLang="ko-KR" sz="2200" dirty="0"/>
                         <a:t>RTX 4090 x</a:t>
                       </a:r>
                       <a:r>
-                        <a:rPr lang="ko-KR" altLang="en-US" sz="300" dirty="0"/>
+                        <a:rPr lang="ko-KR" altLang="en-US" sz="2200" dirty="0"/>
                         <a:t> </a:t>
                       </a:r>
                       <a:r>
-                        <a:rPr lang="en-US" altLang="ko-KR" sz="300" dirty="0"/>
+                        <a:rPr lang="en-US" altLang="ko-KR" sz="2200" dirty="0"/>
                         <a:t>20</a:t>
                       </a:r>
-                      <a:endParaRPr lang="ko-KR" altLang="en-US" sz="300" dirty="0"/>
+                      <a:endParaRPr lang="ko-KR" altLang="en-US" sz="2200" dirty="0"/>
                     </a:p>
                   </a:txBody>
-                  <a:tcPr marL="11416" marR="11416" marT="5708" marB="5708"/>
+                  <a:tcPr/>
                 </a:tc>
                 <a:tc>
                   <a:txBody>
@@ -7120,20 +7713,20 @@
                     <a:p>
                       <a:pPr algn="ctr" latinLnBrk="1"/>
                       <a:r>
-                        <a:rPr lang="en-US" altLang="ko-KR" sz="300" dirty="0"/>
+                        <a:rPr lang="en-US" altLang="ko-KR" sz="2200" dirty="0"/>
                         <a:t>A100 x 1</a:t>
                       </a:r>
                     </a:p>
                     <a:p>
                       <a:pPr algn="ctr" latinLnBrk="1"/>
                       <a:r>
-                        <a:rPr lang="en-US" altLang="ko-KR" sz="300" dirty="0"/>
+                        <a:rPr lang="en-US" altLang="ko-KR" sz="2200" dirty="0"/>
                         <a:t>RTX 5070 x 2</a:t>
                       </a:r>
-                      <a:endParaRPr lang="ko-KR" altLang="en-US" sz="300" dirty="0"/>
+                      <a:endParaRPr lang="ko-KR" altLang="en-US" sz="2200" dirty="0"/>
                     </a:p>
                   </a:txBody>
-                  <a:tcPr marL="11416" marR="11416" marT="5708" marB="5708"/>
+                  <a:tcPr/>
                 </a:tc>
                 <a:extLst>
                   <a:ext uri="{0D108BD9-81ED-4DB2-BD59-A6C34878D82A}">
@@ -7141,7 +7734,7 @@
                   </a:ext>
                 </a:extLst>
               </a:tr>
-              <a:tr h="57081">
+              <a:tr h="370840">
                 <a:tc>
                   <a:txBody>
                     <a:bodyPr/>
@@ -7149,13 +7742,13 @@
                     <a:p>
                       <a:pPr latinLnBrk="1"/>
                       <a:r>
-                        <a:rPr lang="en-US" altLang="ko-KR" sz="300" dirty="0"/>
+                        <a:rPr lang="en-US" altLang="ko-KR" sz="2200" dirty="0"/>
                         <a:t>Task</a:t>
                       </a:r>
-                      <a:endParaRPr lang="ko-KR" altLang="en-US" sz="300" dirty="0"/>
+                      <a:endParaRPr lang="ko-KR" altLang="en-US" sz="2200" dirty="0"/>
                     </a:p>
                   </a:txBody>
-                  <a:tcPr marL="11416" marR="11416" marT="5708" marB="5708"/>
+                  <a:tcPr/>
                 </a:tc>
                 <a:tc>
                   <a:txBody>
@@ -7164,13 +7757,13 @@
                     <a:p>
                       <a:pPr algn="ctr" latinLnBrk="1"/>
                       <a:r>
-                        <a:rPr lang="en-US" altLang="ko-KR" sz="300" dirty="0"/>
+                        <a:rPr lang="en-US" altLang="ko-KR" sz="2200" dirty="0"/>
                         <a:t>50</a:t>
                       </a:r>
-                      <a:endParaRPr lang="ko-KR" altLang="en-US" sz="300" dirty="0"/>
+                      <a:endParaRPr lang="ko-KR" altLang="en-US" sz="2200" dirty="0"/>
                     </a:p>
                   </a:txBody>
-                  <a:tcPr marL="11416" marR="11416" marT="5708" marB="5708"/>
+                  <a:tcPr/>
                 </a:tc>
                 <a:tc>
                   <a:txBody>
@@ -7179,13 +7772,13 @@
                     <a:p>
                       <a:pPr algn="ctr" latinLnBrk="1"/>
                       <a:r>
-                        <a:rPr lang="en-US" altLang="ko-KR" sz="300" dirty="0"/>
+                        <a:rPr lang="en-US" altLang="ko-KR" sz="2200" dirty="0"/>
                         <a:t>12</a:t>
                       </a:r>
-                      <a:endParaRPr lang="ko-KR" altLang="en-US" sz="300" dirty="0"/>
+                      <a:endParaRPr lang="ko-KR" altLang="en-US" sz="2200" dirty="0"/>
                     </a:p>
                   </a:txBody>
-                  <a:tcPr marL="11416" marR="11416" marT="5708" marB="5708"/>
+                  <a:tcPr/>
                 </a:tc>
                 <a:extLst>
                   <a:ext uri="{0D108BD9-81ED-4DB2-BD59-A6C34878D82A}">
@@ -7193,7 +7786,7 @@
                   </a:ext>
                 </a:extLst>
               </a:tr>
-              <a:tr h="57081">
+              <a:tr h="370840">
                 <a:tc>
                   <a:txBody>
                     <a:bodyPr/>
@@ -7201,13 +7794,13 @@
                     <a:p>
                       <a:pPr latinLnBrk="1"/>
                       <a:r>
-                        <a:rPr lang="en-US" altLang="ko-KR" sz="300" dirty="0"/>
+                        <a:rPr lang="en-US" altLang="ko-KR" sz="2200" dirty="0"/>
                         <a:t>Batch size</a:t>
                       </a:r>
-                      <a:endParaRPr lang="ko-KR" altLang="en-US" sz="300" dirty="0"/>
+                      <a:endParaRPr lang="ko-KR" altLang="en-US" sz="2200" dirty="0"/>
                     </a:p>
                   </a:txBody>
-                  <a:tcPr marL="11416" marR="11416" marT="5708" marB="5708"/>
+                  <a:tcPr/>
                 </a:tc>
                 <a:tc>
                   <a:txBody>
@@ -7216,13 +7809,13 @@
                     <a:p>
                       <a:pPr algn="ctr" latinLnBrk="1"/>
                       <a:r>
-                        <a:rPr lang="en-US" altLang="ko-KR" sz="300" dirty="0"/>
+                        <a:rPr lang="en-US" altLang="ko-KR" sz="2200" dirty="0"/>
                         <a:t>2048</a:t>
                       </a:r>
-                      <a:endParaRPr lang="ko-KR" altLang="en-US" sz="300" dirty="0"/>
+                      <a:endParaRPr lang="ko-KR" altLang="en-US" sz="2200" dirty="0"/>
                     </a:p>
                   </a:txBody>
-                  <a:tcPr marL="11416" marR="11416" marT="5708" marB="5708"/>
+                  <a:tcPr/>
                 </a:tc>
                 <a:tc>
                   <a:txBody>
@@ -7231,13 +7824,13 @@
                     <a:p>
                       <a:pPr algn="ctr" latinLnBrk="1"/>
                       <a:r>
-                        <a:rPr lang="en-US" altLang="ko-KR" sz="300" dirty="0"/>
+                        <a:rPr lang="en-US" altLang="ko-KR" sz="2200" dirty="0"/>
                         <a:t>16</a:t>
                       </a:r>
-                      <a:endParaRPr lang="ko-KR" altLang="en-US" sz="300" dirty="0"/>
+                      <a:endParaRPr lang="ko-KR" altLang="en-US" sz="2200" dirty="0"/>
                     </a:p>
                   </a:txBody>
-                  <a:tcPr marL="11416" marR="11416" marT="5708" marB="5708"/>
+                  <a:tcPr/>
                 </a:tc>
                 <a:extLst>
                   <a:ext uri="{0D108BD9-81ED-4DB2-BD59-A6C34878D82A}">
@@ -7245,7 +7838,7 @@
                   </a:ext>
                 </a:extLst>
               </a:tr>
-              <a:tr h="57081">
+              <a:tr h="370840">
                 <a:tc>
                   <a:txBody>
                     <a:bodyPr/>
@@ -7253,13 +7846,13 @@
                     <a:p>
                       <a:pPr latinLnBrk="1"/>
                       <a:r>
-                        <a:rPr lang="en-US" altLang="ko-KR" sz="300" dirty="0"/>
+                        <a:rPr lang="en-US" altLang="ko-KR" sz="2200" dirty="0"/>
                         <a:t>Step</a:t>
                       </a:r>
-                      <a:endParaRPr lang="ko-KR" altLang="en-US" sz="300" dirty="0"/>
+                      <a:endParaRPr lang="ko-KR" altLang="en-US" sz="2200" dirty="0"/>
                     </a:p>
                   </a:txBody>
-                  <a:tcPr marL="11416" marR="11416" marT="5708" marB="5708"/>
+                  <a:tcPr/>
                 </a:tc>
                 <a:tc>
                   <a:txBody>
@@ -7268,13 +7861,13 @@
                     <a:p>
                       <a:pPr algn="ctr" latinLnBrk="1"/>
                       <a:r>
-                        <a:rPr lang="en-US" altLang="ko-KR" sz="300" dirty="0"/>
+                        <a:rPr lang="en-US" altLang="ko-KR" sz="2200" dirty="0"/>
                         <a:t>200,000</a:t>
                       </a:r>
-                      <a:endParaRPr lang="ko-KR" altLang="en-US" sz="300" dirty="0"/>
+                      <a:endParaRPr lang="ko-KR" altLang="en-US" sz="2200" dirty="0"/>
                     </a:p>
                   </a:txBody>
-                  <a:tcPr marL="11416" marR="11416" marT="5708" marB="5708"/>
+                  <a:tcPr/>
                 </a:tc>
                 <a:tc>
                   <a:txBody>
@@ -7283,13 +7876,13 @@
                     <a:p>
                       <a:pPr algn="ctr" latinLnBrk="1"/>
                       <a:r>
-                        <a:rPr lang="en-US" altLang="ko-KR" sz="300" dirty="0"/>
+                        <a:rPr lang="en-US" altLang="ko-KR" sz="2200" dirty="0"/>
                         <a:t>70,000</a:t>
                       </a:r>
-                      <a:endParaRPr lang="ko-KR" altLang="en-US" sz="300" dirty="0"/>
+                      <a:endParaRPr lang="ko-KR" altLang="en-US" sz="2200" dirty="0"/>
                     </a:p>
                   </a:txBody>
-                  <a:tcPr marL="11416" marR="11416" marT="5708" marB="5708"/>
+                  <a:tcPr/>
                 </a:tc>
                 <a:extLst>
                   <a:ext uri="{0D108BD9-81ED-4DB2-BD59-A6C34878D82A}">
@@ -7297,7 +7890,7 @@
                   </a:ext>
                 </a:extLst>
               </a:tr>
-              <a:tr h="57081">
+              <a:tr h="370840">
                 <a:tc>
                   <a:txBody>
                     <a:bodyPr/>
@@ -7305,13 +7898,13 @@
                     <a:p>
                       <a:pPr latinLnBrk="1"/>
                       <a:r>
-                        <a:rPr lang="en-US" altLang="ko-KR" sz="300" dirty="0"/>
+                        <a:rPr lang="en-US" altLang="ko-KR" sz="2200" dirty="0"/>
                         <a:t>Flow sample</a:t>
                       </a:r>
-                      <a:endParaRPr lang="ko-KR" altLang="en-US" sz="300" dirty="0"/>
+                      <a:endParaRPr lang="ko-KR" altLang="en-US" sz="2200" dirty="0"/>
                     </a:p>
                   </a:txBody>
-                  <a:tcPr marL="11416" marR="11416" marT="5708" marB="5708"/>
+                  <a:tcPr/>
                 </a:tc>
                 <a:tc>
                   <a:txBody>
@@ -7320,13 +7913,13 @@
                     <a:p>
                       <a:pPr algn="ctr" latinLnBrk="1"/>
                       <a:r>
-                        <a:rPr lang="en-US" altLang="ko-KR" sz="300" dirty="0"/>
+                        <a:rPr lang="en-US" altLang="ko-KR" sz="2200" dirty="0"/>
                         <a:t>15</a:t>
                       </a:r>
-                      <a:endParaRPr lang="ko-KR" altLang="en-US" sz="300" dirty="0"/>
+                      <a:endParaRPr lang="ko-KR" altLang="en-US" sz="2200" dirty="0"/>
                     </a:p>
                   </a:txBody>
-                  <a:tcPr marL="11416" marR="11416" marT="5708" marB="5708"/>
+                  <a:tcPr/>
                 </a:tc>
                 <a:tc>
                   <a:txBody>
@@ -7335,13 +7928,13 @@
                     <a:p>
                       <a:pPr algn="ctr" latinLnBrk="1"/>
                       <a:r>
-                        <a:rPr lang="en-US" altLang="ko-KR" sz="300" dirty="0"/>
+                        <a:rPr lang="en-US" altLang="ko-KR" sz="2200" dirty="0"/>
                         <a:t>1</a:t>
                       </a:r>
-                      <a:endParaRPr lang="ko-KR" altLang="en-US" sz="300" dirty="0"/>
+                      <a:endParaRPr lang="ko-KR" altLang="en-US" sz="2200" dirty="0"/>
                     </a:p>
                   </a:txBody>
-                  <a:tcPr marL="11416" marR="11416" marT="5708" marB="5708"/>
+                  <a:tcPr/>
                 </a:tc>
                 <a:extLst>
                   <a:ext uri="{0D108BD9-81ED-4DB2-BD59-A6C34878D82A}">
@@ -7349,7 +7942,7 @@
                   </a:ext>
                 </a:extLst>
               </a:tr>
-              <a:tr h="57081">
+              <a:tr h="370840">
                 <a:tc>
                   <a:txBody>
                     <a:bodyPr/>
@@ -7357,13 +7950,13 @@
                     <a:p>
                       <a:pPr latinLnBrk="1"/>
                       <a:r>
-                        <a:rPr lang="en-US" altLang="ko-KR" sz="300" dirty="0"/>
+                        <a:rPr lang="en-US" altLang="ko-KR" sz="2200" dirty="0"/>
                         <a:t>evaluation</a:t>
                       </a:r>
-                      <a:endParaRPr lang="ko-KR" altLang="en-US" sz="300" dirty="0"/>
+                      <a:endParaRPr lang="ko-KR" altLang="en-US" sz="2200" dirty="0"/>
                     </a:p>
                   </a:txBody>
-                  <a:tcPr marL="11416" marR="11416" marT="5708" marB="5708"/>
+                  <a:tcPr/>
                 </a:tc>
                 <a:tc>
                   <a:txBody>
@@ -7372,13 +7965,13 @@
                     <a:p>
                       <a:pPr algn="ctr" latinLnBrk="1"/>
                       <a:r>
-                        <a:rPr lang="en-US" altLang="ko-KR" sz="300" dirty="0"/>
+                        <a:rPr lang="en-US" altLang="ko-KR" sz="2200" dirty="0"/>
                         <a:t>50 task x 10 instance</a:t>
                       </a:r>
-                      <a:endParaRPr lang="ko-KR" altLang="en-US" sz="300" dirty="0"/>
+                      <a:endParaRPr lang="ko-KR" altLang="en-US" sz="2200" dirty="0"/>
                     </a:p>
                   </a:txBody>
-                  <a:tcPr marL="11416" marR="11416" marT="5708" marB="5708"/>
+                  <a:tcPr/>
                 </a:tc>
                 <a:tc>
                   <a:txBody>
@@ -7387,13 +7980,13 @@
                     <a:p>
                       <a:pPr algn="ctr" latinLnBrk="1"/>
                       <a:r>
-                        <a:rPr lang="en-US" altLang="ko-KR" sz="300" dirty="0"/>
+                        <a:rPr lang="en-US" altLang="ko-KR" sz="2200" dirty="0"/>
                         <a:t>12 task x 1 instance</a:t>
                       </a:r>
-                      <a:endParaRPr lang="ko-KR" altLang="en-US" sz="300" dirty="0"/>
+                      <a:endParaRPr lang="ko-KR" altLang="en-US" sz="2200" dirty="0"/>
                     </a:p>
                   </a:txBody>
-                  <a:tcPr marL="11416" marR="11416" marT="5708" marB="5708"/>
+                  <a:tcPr/>
                 </a:tc>
                 <a:extLst>
                   <a:ext uri="{0D108BD9-81ED-4DB2-BD59-A6C34878D82A}">
@@ -7419,8 +8012,8 @@
         </p:nvSpPr>
         <p:spPr>
           <a:xfrm>
-            <a:off x="3780664" y="6182279"/>
-            <a:ext cx="1269629" cy="850105"/>
+            <a:off x="10705545" y="22640929"/>
+            <a:ext cx="10180800" cy="4616648"/>
           </a:xfrm>
           <a:prstGeom prst="rect">
             <a:avLst/>
@@ -7441,373 +8034,388 @@
           <a:lstStyle/>
           <a:p>
             <a:pPr algn="ctr"/>
-            <a:endParaRPr lang="en-US" altLang="ko-KR" sz="674" b="1" dirty="0">
+            <a:endParaRPr lang="en-US" altLang="ko-KR" sz="5400" b="1" dirty="0">
               <a:latin typeface="+mn-ea"/>
             </a:endParaRPr>
           </a:p>
           <a:p>
             <a:r>
-              <a:rPr lang="en-US" altLang="ko-KR" sz="300" b="1" dirty="0"/>
+              <a:rPr lang="en-US" altLang="ko-KR" sz="2400" b="1" dirty="0">
+                <a:latin typeface="+mn-ea"/>
+              </a:rPr>
               <a:t>1. </a:t>
             </a:r>
             <a:r>
-              <a:rPr lang="ko-KR" altLang="en-US" sz="300" b="1" dirty="0"/>
+              <a:rPr lang="ko-KR" altLang="en-US" sz="2400" b="1" dirty="0">
+                <a:latin typeface="+mn-ea"/>
+              </a:rPr>
               <a:t>학습 관련</a:t>
             </a:r>
-            <a:endParaRPr lang="en-US" altLang="ko-KR" sz="300" b="1" dirty="0"/>
-          </a:p>
-          <a:p>
-            <a:r>
-              <a:rPr lang="ko-KR" altLang="ko-KR" sz="300" dirty="0"/>
-              <a:t>학습 </a:t>
-            </a:r>
-            <a:r>
-              <a:rPr lang="ko-KR" altLang="ko-KR" sz="300" dirty="0" err="1"/>
-              <a:t>step</a:t>
-            </a:r>
-            <a:r>
-              <a:rPr lang="ko-KR" altLang="ko-KR" sz="300" dirty="0"/>
-              <a:t> 증가를 통한 장기 수렴 성능 분석</a:t>
-            </a:r>
-            <a:endParaRPr lang="en-US" altLang="ko-KR" sz="300" dirty="0"/>
-          </a:p>
-          <a:p>
-            <a:r>
-              <a:rPr lang="ko-KR" altLang="ko-KR" sz="300" dirty="0">
-                <a:latin typeface="Arial" panose="020B0604020202020204" pitchFamily="34" charset="0"/>
-              </a:rPr>
-              <a:t>다양한 </a:t>
-            </a:r>
-            <a:r>
-              <a:rPr lang="ko-KR" altLang="ko-KR" sz="300" dirty="0" err="1">
-                <a:latin typeface="Arial" panose="020B0604020202020204" pitchFamily="34" charset="0"/>
-              </a:rPr>
-              <a:t>seed</a:t>
-            </a:r>
-            <a:r>
-              <a:rPr lang="ko-KR" altLang="ko-KR" sz="300" dirty="0">
-                <a:latin typeface="Arial" panose="020B0604020202020204" pitchFamily="34" charset="0"/>
-              </a:rPr>
-              <a:t> 기반 반복 실험을 통한 모델 재현성 검증 </a:t>
-            </a:r>
-          </a:p>
-          <a:p>
-            <a:pPr defTabSz="114168" eaLnBrk="0" fontAlgn="base" hangingPunct="0">
-              <a:spcBef>
-                <a:spcPct val="0"/>
-              </a:spcBef>
-              <a:spcAft>
-                <a:spcPct val="0"/>
-              </a:spcAft>
-            </a:pPr>
-            <a:r>
-              <a:rPr lang="ko-KR" altLang="ko-KR" sz="300" dirty="0" err="1">
-                <a:latin typeface="Arial" panose="020B0604020202020204" pitchFamily="34" charset="0"/>
-              </a:rPr>
-              <a:t>Task</a:t>
-            </a:r>
-            <a:r>
-              <a:rPr lang="ko-KR" altLang="ko-KR" sz="300" dirty="0">
-                <a:latin typeface="Arial" panose="020B0604020202020204" pitchFamily="34" charset="0"/>
-              </a:rPr>
-              <a:t> 수 확장을 통한 </a:t>
-            </a:r>
-            <a:r>
-              <a:rPr lang="ko-KR" altLang="ko-KR" sz="300" dirty="0" err="1">
-                <a:latin typeface="Arial" panose="020B0604020202020204" pitchFamily="34" charset="0"/>
-              </a:rPr>
-              <a:t>multi-task</a:t>
-            </a:r>
-            <a:r>
-              <a:rPr lang="ko-KR" altLang="ko-KR" sz="300" dirty="0">
-                <a:latin typeface="Arial" panose="020B0604020202020204" pitchFamily="34" charset="0"/>
-              </a:rPr>
-              <a:t> </a:t>
-            </a:r>
-            <a:r>
-              <a:rPr lang="ko-KR" altLang="ko-KR" sz="300" dirty="0" err="1">
-                <a:latin typeface="Arial" panose="020B0604020202020204" pitchFamily="34" charset="0"/>
-              </a:rPr>
-              <a:t>generalization</a:t>
-            </a:r>
-            <a:r>
-              <a:rPr lang="ko-KR" altLang="ko-KR" sz="300" dirty="0">
-                <a:latin typeface="Arial" panose="020B0604020202020204" pitchFamily="34" charset="0"/>
-              </a:rPr>
-              <a:t> 성능 분석 </a:t>
-            </a:r>
-            <a:endParaRPr lang="en-US" altLang="ko-KR" sz="300" dirty="0"/>
-          </a:p>
-          <a:p>
-            <a:endParaRPr lang="en-US" altLang="ko-KR" sz="350" b="1" dirty="0">
+            <a:endParaRPr lang="en-US" altLang="ko-KR" sz="2400" b="1" dirty="0">
               <a:latin typeface="+mn-ea"/>
             </a:endParaRPr>
           </a:p>
           <a:p>
             <a:r>
-              <a:rPr lang="en-US" altLang="ko-KR" sz="300" b="1" dirty="0"/>
+              <a:rPr lang="ko-KR" altLang="ko-KR" sz="2200" dirty="0">
+                <a:latin typeface="+mn-ea"/>
+              </a:rPr>
+              <a:t>학습 </a:t>
+            </a:r>
+            <a:r>
+              <a:rPr lang="ko-KR" altLang="ko-KR" sz="2200" dirty="0" err="1">
+                <a:latin typeface="+mn-ea"/>
+              </a:rPr>
+              <a:t>step</a:t>
+            </a:r>
+            <a:r>
+              <a:rPr lang="ko-KR" altLang="ko-KR" sz="2200" dirty="0">
+                <a:latin typeface="+mn-ea"/>
+              </a:rPr>
+              <a:t> 증가를 통한 장기 수렴 성능 분석</a:t>
+            </a:r>
+            <a:endParaRPr lang="en-US" altLang="ko-KR" sz="2200" dirty="0">
+              <a:latin typeface="+mn-ea"/>
+            </a:endParaRPr>
+          </a:p>
+          <a:p>
+            <a:r>
+              <a:rPr lang="ko-KR" altLang="ko-KR" sz="2200" dirty="0">
+                <a:latin typeface="+mn-ea"/>
+              </a:rPr>
+              <a:t>다양한 </a:t>
+            </a:r>
+            <a:r>
+              <a:rPr lang="ko-KR" altLang="ko-KR" sz="2200" dirty="0" err="1">
+                <a:latin typeface="+mn-ea"/>
+              </a:rPr>
+              <a:t>seed</a:t>
+            </a:r>
+            <a:r>
+              <a:rPr lang="ko-KR" altLang="ko-KR" sz="2200" dirty="0">
+                <a:latin typeface="+mn-ea"/>
+              </a:rPr>
+              <a:t> </a:t>
+            </a:r>
+            <a:r>
+              <a:rPr lang="ko-KR" altLang="en-US" sz="2200" dirty="0">
+                <a:latin typeface="+mn-ea"/>
+              </a:rPr>
+              <a:t>활용 및 </a:t>
+            </a:r>
+            <a:r>
+              <a:rPr lang="en-US" altLang="ko-KR" sz="2200" dirty="0">
+                <a:latin typeface="+mn-ea"/>
+              </a:rPr>
+              <a:t>task </a:t>
+            </a:r>
+            <a:r>
+              <a:rPr lang="ko-KR" altLang="en-US" sz="2200" dirty="0">
+                <a:latin typeface="+mn-ea"/>
+              </a:rPr>
+              <a:t>수 확장 통한 일반화 성능 향상</a:t>
+            </a:r>
+            <a:r>
+              <a:rPr lang="ko-KR" altLang="ko-KR" sz="2200" dirty="0">
+                <a:latin typeface="+mn-ea"/>
+              </a:rPr>
+              <a:t> </a:t>
+            </a:r>
+          </a:p>
+          <a:p>
+            <a:endParaRPr lang="en-US" altLang="ko-KR" sz="1400" b="1" dirty="0">
+              <a:latin typeface="+mn-ea"/>
+            </a:endParaRPr>
+          </a:p>
+          <a:p>
+            <a:r>
+              <a:rPr lang="en-US" altLang="ko-KR" sz="2400" b="1" dirty="0">
+                <a:latin typeface="+mn-ea"/>
+              </a:rPr>
               <a:t>2. </a:t>
             </a:r>
             <a:r>
-              <a:rPr lang="ko-KR" altLang="en-US" sz="300" b="1" dirty="0"/>
+              <a:rPr lang="ko-KR" altLang="en-US" sz="2400" b="1" dirty="0">
+                <a:latin typeface="+mn-ea"/>
+              </a:rPr>
               <a:t>추가 </a:t>
             </a:r>
             <a:r>
-              <a:rPr lang="en-US" altLang="ko-KR" sz="300" b="1" dirty="0"/>
+              <a:rPr lang="en-US" altLang="ko-KR" sz="2400" b="1" dirty="0">
+                <a:latin typeface="+mn-ea"/>
+              </a:rPr>
               <a:t>VLA </a:t>
             </a:r>
             <a:r>
-              <a:rPr lang="ko-KR" altLang="en-US" sz="300" b="1" dirty="0"/>
+              <a:rPr lang="ko-KR" altLang="en-US" sz="2400" b="1" dirty="0">
+                <a:latin typeface="+mn-ea"/>
+              </a:rPr>
               <a:t>기술</a:t>
             </a:r>
-            <a:endParaRPr lang="en-US" altLang="ko-KR" sz="300" b="1" dirty="0"/>
-          </a:p>
-          <a:p>
-            <a:r>
-              <a:rPr lang="ko-KR" altLang="ko-KR" sz="300" b="1" dirty="0" err="1"/>
+            <a:endParaRPr lang="en-US" altLang="ko-KR" sz="2400" b="1" dirty="0">
+              <a:latin typeface="+mn-ea"/>
+            </a:endParaRPr>
+          </a:p>
+          <a:p>
+            <a:r>
+              <a:rPr lang="ko-KR" altLang="ko-KR" sz="2200" b="1" dirty="0" err="1">
+                <a:latin typeface="+mn-ea"/>
+              </a:rPr>
               <a:t>MeM</a:t>
             </a:r>
             <a:r>
-              <a:rPr lang="ko-KR" altLang="ko-KR" sz="300" b="1" dirty="0"/>
+              <a:rPr lang="ko-KR" altLang="ko-KR" sz="2200" b="1" dirty="0">
+                <a:latin typeface="+mn-ea"/>
+              </a:rPr>
               <a:t> (</a:t>
             </a:r>
             <a:r>
-              <a:rPr lang="ko-KR" altLang="ko-KR" sz="300" b="1" dirty="0" err="1"/>
+              <a:rPr lang="ko-KR" altLang="ko-KR" sz="2200" b="1" dirty="0" err="1">
+                <a:latin typeface="+mn-ea"/>
+              </a:rPr>
               <a:t>Multi-Scale</a:t>
             </a:r>
             <a:r>
-              <a:rPr lang="ko-KR" altLang="ko-KR" sz="300" b="1" dirty="0"/>
+              <a:rPr lang="ko-KR" altLang="ko-KR" sz="2200" b="1" dirty="0">
+                <a:latin typeface="+mn-ea"/>
+              </a:rPr>
               <a:t> </a:t>
             </a:r>
             <a:r>
-              <a:rPr lang="ko-KR" altLang="ko-KR" sz="300" b="1" dirty="0" err="1"/>
+              <a:rPr lang="ko-KR" altLang="ko-KR" sz="2200" b="1" dirty="0" err="1">
+                <a:latin typeface="+mn-ea"/>
+              </a:rPr>
               <a:t>Embodied</a:t>
             </a:r>
             <a:r>
-              <a:rPr lang="ko-KR" altLang="ko-KR" sz="300" b="1" dirty="0"/>
+              <a:rPr lang="ko-KR" altLang="ko-KR" sz="2200" b="1" dirty="0">
+                <a:latin typeface="+mn-ea"/>
+              </a:rPr>
               <a:t> </a:t>
             </a:r>
             <a:r>
-              <a:rPr lang="ko-KR" altLang="ko-KR" sz="300" b="1" dirty="0" err="1"/>
+              <a:rPr lang="ko-KR" altLang="ko-KR" sz="2200" b="1" dirty="0" err="1">
+                <a:latin typeface="+mn-ea"/>
+              </a:rPr>
               <a:t>Memory</a:t>
             </a:r>
             <a:r>
-              <a:rPr lang="ko-KR" altLang="ko-KR" sz="300" b="1" dirty="0"/>
+              <a:rPr lang="ko-KR" altLang="ko-KR" sz="2200" b="1" dirty="0">
+                <a:latin typeface="+mn-ea"/>
+              </a:rPr>
               <a:t>)</a:t>
             </a:r>
             <a:r>
-              <a:rPr lang="en-US" altLang="ko-KR" sz="300" b="1" dirty="0"/>
+              <a:rPr lang="en-US" altLang="ko-KR" sz="2200" b="1" dirty="0">
+                <a:latin typeface="+mn-ea"/>
+              </a:rPr>
               <a:t>:</a:t>
             </a:r>
             <a:r>
-              <a:rPr lang="ko-KR" altLang="ko-KR" sz="300" dirty="0"/>
+              <a:rPr lang="ko-KR" altLang="ko-KR" sz="2200" dirty="0">
+                <a:latin typeface="+mn-ea"/>
+              </a:rPr>
               <a:t> </a:t>
             </a:r>
             <a:r>
-              <a:rPr lang="ko-KR" altLang="ko-KR" sz="300" dirty="0" err="1"/>
+              <a:rPr lang="ko-KR" altLang="ko-KR" sz="2200" dirty="0" err="1">
+                <a:latin typeface="+mn-ea"/>
+              </a:rPr>
               <a:t>short-term</a:t>
             </a:r>
             <a:r>
-              <a:rPr lang="ko-KR" altLang="ko-KR" sz="300" dirty="0"/>
+              <a:rPr lang="ko-KR" altLang="ko-KR" sz="2200" dirty="0">
+                <a:latin typeface="+mn-ea"/>
+              </a:rPr>
               <a:t> / </a:t>
             </a:r>
             <a:r>
-              <a:rPr lang="ko-KR" altLang="ko-KR" sz="300" dirty="0" err="1"/>
+              <a:rPr lang="ko-KR" altLang="ko-KR" sz="2200" dirty="0" err="1">
+                <a:latin typeface="+mn-ea"/>
+              </a:rPr>
               <a:t>long-term</a:t>
             </a:r>
             <a:r>
-              <a:rPr lang="ko-KR" altLang="ko-KR" sz="300" dirty="0"/>
+              <a:rPr lang="ko-KR" altLang="ko-KR" sz="2200" dirty="0">
+                <a:latin typeface="+mn-ea"/>
+              </a:rPr>
               <a:t> </a:t>
             </a:r>
             <a:r>
-              <a:rPr lang="ko-KR" altLang="ko-KR" sz="300" dirty="0" err="1"/>
+              <a:rPr lang="ko-KR" altLang="ko-KR" sz="2200" dirty="0" err="1">
+                <a:latin typeface="+mn-ea"/>
+              </a:rPr>
               <a:t>memory</a:t>
             </a:r>
             <a:r>
-              <a:rPr lang="ko-KR" altLang="ko-KR" sz="300" dirty="0"/>
+              <a:rPr lang="ko-KR" altLang="ko-KR" sz="2200" dirty="0">
+                <a:latin typeface="+mn-ea"/>
+              </a:rPr>
               <a:t> 기반 </a:t>
             </a:r>
             <a:r>
-              <a:rPr lang="ko-KR" altLang="ko-KR" sz="300" dirty="0" err="1"/>
+              <a:rPr lang="ko-KR" altLang="ko-KR" sz="2200" dirty="0" err="1">
+                <a:latin typeface="+mn-ea"/>
+              </a:rPr>
               <a:t>long-horizon</a:t>
             </a:r>
             <a:r>
-              <a:rPr lang="ko-KR" altLang="ko-KR" sz="300" dirty="0"/>
+              <a:rPr lang="ko-KR" altLang="ko-KR" sz="2200" dirty="0">
+                <a:latin typeface="+mn-ea"/>
+              </a:rPr>
               <a:t> </a:t>
             </a:r>
             <a:r>
-              <a:rPr lang="ko-KR" altLang="ko-KR" sz="300" dirty="0" err="1"/>
+              <a:rPr lang="ko-KR" altLang="ko-KR" sz="2200" dirty="0" err="1">
+                <a:latin typeface="+mn-ea"/>
+              </a:rPr>
               <a:t>task</a:t>
             </a:r>
             <a:r>
-              <a:rPr lang="ko-KR" altLang="ko-KR" sz="300" dirty="0"/>
+              <a:rPr lang="ko-KR" altLang="ko-KR" sz="2200" dirty="0">
+                <a:latin typeface="+mn-ea"/>
+              </a:rPr>
               <a:t> 안정성 향상</a:t>
             </a:r>
-            <a:endParaRPr lang="en-US" altLang="ko-KR" sz="300" dirty="0"/>
-          </a:p>
-          <a:p>
-            <a:r>
-              <a:rPr lang="ko-KR" altLang="ko-KR" sz="300" b="1" dirty="0"/>
+            <a:endParaRPr lang="en-US" altLang="ko-KR" sz="2200" dirty="0">
+              <a:latin typeface="+mn-ea"/>
+            </a:endParaRPr>
+          </a:p>
+          <a:p>
+            <a:r>
+              <a:rPr lang="ko-KR" altLang="ko-KR" sz="2200" b="1" dirty="0">
+                <a:latin typeface="+mn-ea"/>
+              </a:rPr>
               <a:t>RD-VLA (</a:t>
             </a:r>
             <a:r>
-              <a:rPr lang="ko-KR" altLang="ko-KR" sz="300" b="1" dirty="0" err="1"/>
+              <a:rPr lang="ko-KR" altLang="ko-KR" sz="2200" b="1" dirty="0" err="1">
+                <a:latin typeface="+mn-ea"/>
+              </a:rPr>
               <a:t>Recurrent-Depth</a:t>
             </a:r>
             <a:r>
-              <a:rPr lang="ko-KR" altLang="ko-KR" sz="300" b="1" dirty="0"/>
+              <a:rPr lang="ko-KR" altLang="ko-KR" sz="2200" b="1" dirty="0">
+                <a:latin typeface="+mn-ea"/>
+              </a:rPr>
               <a:t> VLA)</a:t>
             </a:r>
             <a:r>
-              <a:rPr lang="en-US" altLang="ko-KR" sz="300" b="1" dirty="0"/>
+              <a:rPr lang="en-US" altLang="ko-KR" sz="2200" b="1" dirty="0">
+                <a:latin typeface="+mn-ea"/>
+              </a:rPr>
               <a:t>: </a:t>
             </a:r>
             <a:r>
-              <a:rPr lang="ko-KR" altLang="ko-KR" sz="300" dirty="0" err="1"/>
-              <a:t>latent</a:t>
-            </a:r>
-            <a:r>
-              <a:rPr lang="ko-KR" altLang="ko-KR" sz="300" dirty="0"/>
+              <a:rPr lang="ko-KR" altLang="en-US" sz="2200" dirty="0">
+                <a:latin typeface="+mn-ea"/>
+              </a:rPr>
+              <a:t>잠재 행동 계획을 반복적으로 </a:t>
+            </a:r>
+            <a:r>
+              <a:rPr lang="ko-KR" altLang="en-US" sz="2200" dirty="0" err="1">
+                <a:latin typeface="+mn-ea"/>
+              </a:rPr>
+              <a:t>정교화하여</a:t>
+            </a:r>
+            <a:r>
+              <a:rPr lang="ko-KR" altLang="en-US" sz="2200" dirty="0">
+                <a:latin typeface="+mn-ea"/>
+              </a:rPr>
+              <a:t> 장기 작업에서 더 정밀한 행동 궤적 생성</a:t>
+            </a:r>
+            <a:endParaRPr lang="en-US" altLang="ko-KR" sz="2200" dirty="0">
+              <a:latin typeface="+mn-ea"/>
+            </a:endParaRPr>
+          </a:p>
+          <a:p>
+            <a:r>
+              <a:rPr lang="ko-KR" altLang="ko-KR" sz="2200" b="1" dirty="0">
+                <a:latin typeface="+mn-ea"/>
+              </a:rPr>
+              <a:t>π*0.6-lite </a:t>
+            </a:r>
+            <a:r>
+              <a:rPr lang="ko-KR" altLang="ko-KR" sz="2200" b="1" dirty="0" err="1">
+                <a:latin typeface="+mn-ea"/>
+              </a:rPr>
+              <a:t>Recovery</a:t>
+            </a:r>
+            <a:r>
+              <a:rPr lang="ko-KR" altLang="ko-KR" sz="2200" b="1" dirty="0">
+                <a:latin typeface="+mn-ea"/>
+              </a:rPr>
               <a:t> </a:t>
             </a:r>
             <a:r>
-              <a:rPr lang="ko-KR" altLang="ko-KR" sz="300" dirty="0" err="1"/>
-              <a:t>action</a:t>
-            </a:r>
-            <a:r>
-              <a:rPr lang="ko-KR" altLang="ko-KR" sz="300" dirty="0"/>
+              <a:rPr lang="ko-KR" altLang="ko-KR" sz="2200" b="1" dirty="0" err="1">
+                <a:latin typeface="+mn-ea"/>
+              </a:rPr>
+              <a:t>Learning</a:t>
+            </a:r>
+            <a:r>
+              <a:rPr lang="en-US" altLang="ko-KR" sz="2200" b="1" dirty="0">
+                <a:latin typeface="+mn-ea"/>
+              </a:rPr>
+              <a:t>: </a:t>
+            </a:r>
+            <a:r>
+              <a:rPr lang="ko-KR" altLang="ko-KR" sz="2200" dirty="0">
+                <a:latin typeface="+mn-ea"/>
+              </a:rPr>
+              <a:t>실패 </a:t>
+            </a:r>
+            <a:r>
+              <a:rPr lang="ko-KR" altLang="ko-KR" sz="2200" dirty="0" err="1">
+                <a:latin typeface="+mn-ea"/>
+              </a:rPr>
+              <a:t>rollout과</a:t>
+            </a:r>
+            <a:r>
+              <a:rPr lang="ko-KR" altLang="ko-KR" sz="2200" dirty="0">
+                <a:latin typeface="+mn-ea"/>
+              </a:rPr>
               <a:t> </a:t>
             </a:r>
             <a:r>
-              <a:rPr lang="ko-KR" altLang="ko-KR" sz="300" dirty="0" err="1"/>
-              <a:t>plan을</a:t>
-            </a:r>
-            <a:r>
-              <a:rPr lang="ko-KR" altLang="ko-KR" sz="300" dirty="0"/>
-              <a:t> 반복적으로 </a:t>
-            </a:r>
-            <a:r>
-              <a:rPr lang="ko-KR" altLang="ko-KR" sz="300" dirty="0" err="1"/>
-              <a:t>refinement하여</a:t>
-            </a:r>
-            <a:r>
-              <a:rPr lang="ko-KR" altLang="ko-KR" sz="300" dirty="0"/>
-              <a:t> </a:t>
-            </a:r>
-            <a:r>
-              <a:rPr lang="ko-KR" altLang="ko-KR" sz="300" dirty="0" err="1"/>
-              <a:t>long-horizon</a:t>
-            </a:r>
-            <a:r>
-              <a:rPr lang="ko-KR" altLang="ko-KR" sz="300" dirty="0"/>
-              <a:t> </a:t>
-            </a:r>
-            <a:r>
-              <a:rPr lang="ko-KR" altLang="ko-KR" sz="300" dirty="0" err="1"/>
-              <a:t>task에서</a:t>
-            </a:r>
-            <a:r>
-              <a:rPr lang="ko-KR" altLang="ko-KR" sz="300" dirty="0"/>
-              <a:t> 더 정밀한 </a:t>
-            </a:r>
-            <a:r>
-              <a:rPr lang="ko-KR" altLang="ko-KR" sz="300" dirty="0" err="1"/>
-              <a:t>action</a:t>
-            </a:r>
-            <a:r>
-              <a:rPr lang="ko-KR" altLang="ko-KR" sz="300" dirty="0"/>
-              <a:t> </a:t>
-            </a:r>
-            <a:r>
-              <a:rPr lang="ko-KR" altLang="ko-KR" sz="300" dirty="0" err="1"/>
-              <a:t>trajectory</a:t>
-            </a:r>
-            <a:r>
-              <a:rPr lang="ko-KR" altLang="ko-KR" sz="300" dirty="0"/>
-              <a:t> 생성</a:t>
-            </a:r>
-          </a:p>
-          <a:p>
-            <a:r>
-              <a:rPr lang="ko-KR" altLang="ko-KR" sz="300" b="1" dirty="0"/>
-              <a:t>π*0.6-lite </a:t>
-            </a:r>
-            <a:r>
-              <a:rPr lang="ko-KR" altLang="ko-KR" sz="300" b="1" dirty="0" err="1"/>
-              <a:t>Recovery</a:t>
-            </a:r>
-            <a:r>
-              <a:rPr lang="ko-KR" altLang="ko-KR" sz="300" b="1" dirty="0"/>
-              <a:t> </a:t>
-            </a:r>
-            <a:r>
-              <a:rPr lang="ko-KR" altLang="ko-KR" sz="300" b="1" dirty="0" err="1"/>
-              <a:t>Learning</a:t>
-            </a:r>
-            <a:r>
-              <a:rPr lang="en-US" altLang="ko-KR" sz="300" b="1" dirty="0"/>
-              <a:t>: </a:t>
-            </a:r>
-            <a:r>
-              <a:rPr lang="ko-KR" altLang="ko-KR" sz="300" dirty="0"/>
-              <a:t>실패 </a:t>
-            </a:r>
-            <a:r>
-              <a:rPr lang="ko-KR" altLang="ko-KR" sz="300" dirty="0" err="1"/>
-              <a:t>rollout과</a:t>
-            </a:r>
-            <a:r>
-              <a:rPr lang="ko-KR" altLang="ko-KR" sz="300" dirty="0"/>
-              <a:t> </a:t>
-            </a:r>
-            <a:r>
-              <a:rPr lang="ko-KR" altLang="ko-KR" sz="300" dirty="0" err="1"/>
+              <a:rPr lang="ko-KR" altLang="ko-KR" sz="2200" dirty="0" err="1">
+                <a:latin typeface="+mn-ea"/>
+              </a:rPr>
               <a:t>stage</a:t>
             </a:r>
             <a:r>
-              <a:rPr lang="ko-KR" altLang="ko-KR" sz="300" dirty="0"/>
+              <a:rPr lang="ko-KR" altLang="ko-KR" sz="2200" dirty="0">
+                <a:latin typeface="+mn-ea"/>
+              </a:rPr>
               <a:t>/</a:t>
             </a:r>
             <a:r>
-              <a:rPr lang="ko-KR" altLang="ko-KR" sz="300" dirty="0" err="1"/>
+              <a:rPr lang="ko-KR" altLang="ko-KR" sz="2200" dirty="0" err="1">
+                <a:latin typeface="+mn-ea"/>
+              </a:rPr>
               <a:t>value</a:t>
             </a:r>
             <a:r>
-              <a:rPr lang="ko-KR" altLang="ko-KR" sz="300" dirty="0"/>
+              <a:rPr lang="ko-KR" altLang="ko-KR" sz="2200" dirty="0">
+                <a:latin typeface="+mn-ea"/>
+              </a:rPr>
               <a:t> 정보를 활용하여 OOD 상태에서 </a:t>
             </a:r>
             <a:r>
-              <a:rPr lang="ko-KR" altLang="ko-KR" sz="300" dirty="0" err="1"/>
-              <a:t>recovery</a:t>
-            </a:r>
-            <a:r>
-              <a:rPr lang="ko-KR" altLang="ko-KR" sz="300" dirty="0"/>
-              <a:t> </a:t>
-            </a:r>
-            <a:r>
-              <a:rPr lang="ko-KR" altLang="ko-KR" sz="300" dirty="0" err="1"/>
-              <a:t>behavior</a:t>
-            </a:r>
-            <a:r>
-              <a:rPr lang="ko-KR" altLang="ko-KR" sz="300" dirty="0"/>
-              <a:t> 및 </a:t>
-            </a:r>
-            <a:r>
-              <a:rPr lang="ko-KR" altLang="ko-KR" sz="300" dirty="0" err="1"/>
+              <a:rPr lang="ko-KR" altLang="ko-KR" sz="2200" dirty="0"/>
+              <a:t>복구 행동 및 </a:t>
+            </a:r>
+            <a:r>
+              <a:rPr lang="ko-KR" altLang="ko-KR" sz="2200" dirty="0" err="1"/>
               <a:t>rollout</a:t>
             </a:r>
             <a:r>
-              <a:rPr lang="ko-KR" altLang="ko-KR" sz="300" dirty="0"/>
-              <a:t> </a:t>
-            </a:r>
-            <a:r>
-              <a:rPr lang="ko-KR" altLang="ko-KR" sz="300" dirty="0" err="1"/>
-              <a:t>robustness</a:t>
-            </a:r>
-            <a:r>
-              <a:rPr lang="ko-KR" altLang="ko-KR" sz="300" dirty="0"/>
-              <a:t> 향상</a:t>
-            </a:r>
+              <a:rPr lang="ko-KR" altLang="ko-KR" sz="2200" dirty="0"/>
+              <a:t> 안정성 향상</a:t>
+            </a:r>
+            <a:endParaRPr lang="ko-KR" altLang="ko-KR" sz="2200" dirty="0">
+              <a:latin typeface="+mn-ea"/>
+            </a:endParaRPr>
           </a:p>
         </p:txBody>
       </p:sp>
@@ -7825,8 +8433,8 @@
         </p:nvSpPr>
         <p:spPr>
           <a:xfrm>
-            <a:off x="3781121" y="6182560"/>
-            <a:ext cx="501770" cy="161583"/>
+            <a:off x="10702097" y="22643179"/>
+            <a:ext cx="4019006" cy="646331"/>
           </a:xfrm>
           <a:prstGeom prst="rect">
             <a:avLst/>
@@ -7876,7 +8484,7 @@
           <a:p>
             <a:pPr algn="ctr"/>
             <a:r>
-              <a:rPr lang="ko-KR" altLang="en-US" sz="450" b="1" dirty="0">
+              <a:rPr lang="ko-KR" altLang="en-US" sz="3600" b="1" dirty="0">
                 <a:solidFill>
                   <a:schemeClr val="bg1"/>
                 </a:solidFill>
@@ -7909,8 +8517,8 @@
         </p:blipFill>
         <p:spPr>
           <a:xfrm>
-            <a:off x="2525689" y="5491329"/>
-            <a:ext cx="571967" cy="552644"/>
+            <a:off x="7233326" y="11508031"/>
+            <a:ext cx="2862087" cy="2765395"/>
           </a:xfrm>
           <a:prstGeom prst="rect">
             <a:avLst/>
@@ -7939,8 +8547,198 @@
         </p:blipFill>
         <p:spPr>
           <a:xfrm>
-            <a:off x="3105312" y="5431396"/>
-            <a:ext cx="663549" cy="611489"/>
+            <a:off x="7399664" y="14246612"/>
+            <a:ext cx="2993894" cy="2759000"/>
+          </a:xfrm>
+          <a:prstGeom prst="rect">
+            <a:avLst/>
+          </a:prstGeom>
+        </p:spPr>
+      </p:pic>
+      <p:sp>
+        <p:nvSpPr>
+          <p:cNvPr id="3" name="TextBox 2">
+            <a:extLst>
+              <a:ext uri="{FF2B5EF4-FFF2-40B4-BE49-F238E27FC236}">
+                <a16:creationId xmlns:a16="http://schemas.microsoft.com/office/drawing/2014/main" id="{8E6FF358-D573-5D4E-831E-BD28FE64B33F}"/>
+              </a:ext>
+            </a:extLst>
+          </p:cNvPr>
+          <p:cNvSpPr txBox="1"/>
+          <p:nvPr/>
+        </p:nvSpPr>
+        <p:spPr>
+          <a:xfrm>
+            <a:off x="542579" y="6188708"/>
+            <a:ext cx="4019006" cy="646331"/>
+          </a:xfrm>
+          <a:prstGeom prst="rect">
+            <a:avLst/>
+          </a:prstGeom>
+          <a:gradFill flip="none" rotWithShape="1">
+            <a:gsLst>
+              <a:gs pos="0">
+                <a:schemeClr val="accent4">
+                  <a:shade val="30000"/>
+                  <a:satMod val="115000"/>
+                  <a:lumMod val="48000"/>
+                  <a:alpha val="95000"/>
+                </a:schemeClr>
+              </a:gs>
+              <a:gs pos="50000">
+                <a:schemeClr val="accent4">
+                  <a:lumMod val="50000"/>
+                  <a:shade val="67500"/>
+                  <a:satMod val="115000"/>
+                </a:schemeClr>
+              </a:gs>
+              <a:gs pos="100000">
+                <a:schemeClr val="accent4">
+                  <a:lumMod val="50000"/>
+                  <a:shade val="100000"/>
+                  <a:satMod val="115000"/>
+                </a:schemeClr>
+              </a:gs>
+            </a:gsLst>
+            <a:path path="rect">
+              <a:fillToRect l="50000" t="50000" r="50000" b="50000"/>
+            </a:path>
+            <a:tileRect/>
+          </a:gradFill>
+          <a:ln w="57150">
+            <a:solidFill>
+              <a:schemeClr val="accent4">
+                <a:lumMod val="50000"/>
+              </a:schemeClr>
+            </a:solidFill>
+          </a:ln>
+        </p:spPr>
+        <p:txBody>
+          <a:bodyPr wrap="square" rtlCol="0">
+            <a:spAutoFit/>
+          </a:bodyPr>
+          <a:lstStyle/>
+          <a:p>
+            <a:pPr algn="ctr"/>
+            <a:r>
+              <a:rPr lang="en-US" altLang="ko-KR" sz="3600" b="1" dirty="0">
+                <a:solidFill>
+                  <a:schemeClr val="bg1"/>
+                </a:solidFill>
+                <a:latin typeface="+mn-ea"/>
+              </a:rPr>
+              <a:t>BEHAVIOR-1K</a:t>
+            </a:r>
+            <a:endParaRPr lang="ko-KR" altLang="en-US" sz="3600" b="1" dirty="0">
+              <a:solidFill>
+                <a:schemeClr val="bg1"/>
+              </a:solidFill>
+              <a:latin typeface="+mn-ea"/>
+            </a:endParaRPr>
+          </a:p>
+        </p:txBody>
+      </p:sp>
+      <p:pic>
+        <p:nvPicPr>
+          <p:cNvPr id="10" name="그림 9">
+            <a:extLst>
+              <a:ext uri="{FF2B5EF4-FFF2-40B4-BE49-F238E27FC236}">
+                <a16:creationId xmlns:a16="http://schemas.microsoft.com/office/drawing/2014/main" id="{A12EBF0F-0233-940F-A3D3-B1FFA605E3DB}"/>
+              </a:ext>
+            </a:extLst>
+          </p:cNvPr>
+          <p:cNvPicPr>
+            <a:picLocks noChangeAspect="1"/>
+          </p:cNvPicPr>
+          <p:nvPr/>
+        </p:nvPicPr>
+        <p:blipFill>
+          <a:blip r:embed="rId10"/>
+          <a:stretch>
+            <a:fillRect/>
+          </a:stretch>
+        </p:blipFill>
+        <p:spPr>
+          <a:xfrm>
+            <a:off x="8268456" y="8125139"/>
+            <a:ext cx="2270957" cy="2865368"/>
+          </a:xfrm>
+          <a:prstGeom prst="rect">
+            <a:avLst/>
+          </a:prstGeom>
+        </p:spPr>
+      </p:pic>
+      <p:pic>
+        <p:nvPicPr>
+          <p:cNvPr id="1026" name="Picture 2" descr="OmniGibson architecture overview">
+            <a:extLst>
+              <a:ext uri="{FF2B5EF4-FFF2-40B4-BE49-F238E27FC236}">
+                <a16:creationId xmlns:a16="http://schemas.microsoft.com/office/drawing/2014/main" id="{3690E041-F017-F0CC-822B-BCF385407C61}"/>
+              </a:ext>
+            </a:extLst>
+          </p:cNvPr>
+          <p:cNvPicPr>
+            <a:picLocks noChangeAspect="1" noChangeArrowheads="1"/>
+          </p:cNvPicPr>
+          <p:nvPr/>
+        </p:nvPicPr>
+        <p:blipFill>
+          <a:blip r:embed="rId11">
+            <a:extLst>
+              <a:ext uri="{28A0092B-C50C-407E-A947-70E740481C1C}">
+                <a14:useLocalDpi xmlns:a14="http://schemas.microsoft.com/office/drawing/2010/main" val="0"/>
+              </a:ext>
+            </a:extLst>
+          </a:blip>
+          <a:srcRect/>
+          <a:stretch>
+            <a:fillRect/>
+          </a:stretch>
+        </p:blipFill>
+        <p:spPr bwMode="auto">
+          <a:xfrm>
+            <a:off x="603747" y="7715795"/>
+            <a:ext cx="7824983" cy="3826489"/>
+          </a:xfrm>
+          <a:prstGeom prst="rect">
+            <a:avLst/>
+          </a:prstGeom>
+          <a:noFill/>
+          <a:extLst>
+            <a:ext uri="{909E8E84-426E-40DD-AFC4-6F175D3DCCD1}">
+              <a14:hiddenFill xmlns:a14="http://schemas.microsoft.com/office/drawing/2010/main">
+                <a:solidFill>
+                  <a:srgbClr val="FFFFFF"/>
+                </a:solidFill>
+              </a14:hiddenFill>
+            </a:ext>
+          </a:extLst>
+        </p:spPr>
+      </p:pic>
+      <p:pic>
+        <p:nvPicPr>
+          <p:cNvPr id="17" name="그림 16">
+            <a:extLst>
+              <a:ext uri="{FF2B5EF4-FFF2-40B4-BE49-F238E27FC236}">
+                <a16:creationId xmlns:a16="http://schemas.microsoft.com/office/drawing/2014/main" id="{2D95F6C5-0ADB-4C41-3094-33DAAD2B2707}"/>
+              </a:ext>
+            </a:extLst>
+          </p:cNvPr>
+          <p:cNvPicPr>
+            <a:picLocks noChangeAspect="1"/>
+          </p:cNvPicPr>
+          <p:nvPr/>
+        </p:nvPicPr>
+        <p:blipFill>
+          <a:blip r:embed="rId12"/>
+          <a:stretch>
+            <a:fillRect/>
+          </a:stretch>
+        </p:blipFill>
+        <p:spPr>
+          <a:xfrm>
+            <a:off x="10840930" y="19346429"/>
+            <a:ext cx="9758531" cy="1551302"/>
           </a:xfrm>
           <a:prstGeom prst="rect">
             <a:avLst/>

--- a/docs/presentation/capstone_midterm_presentation_compact.pptx
+++ b/docs/presentation/capstone_midterm_presentation_compact.pptx
@@ -197,7 +197,7 @@
           <a:p>
             <a:fld id="{EC3CE3CB-5277-48E6-BCBF-B434DC32A1C2}" type="datetimeFigureOut">
               <a:rPr lang="ko-KR" altLang="en-US" smtClean="0"/>
-              <a:t>2026-05-28</a:t>
+              <a:t>2026-05-26</a:t>
             </a:fld>
             <a:endParaRPr lang="ko-KR" altLang="en-US"/>
           </a:p>
@@ -679,7 +679,7 @@
           <a:p>
             <a:fld id="{E6031A69-130F-4AFA-87E1-41757229F71B}" type="datetimeFigureOut">
               <a:rPr lang="ko-KR" altLang="en-US" smtClean="0"/>
-              <a:t>2026-05-28</a:t>
+              <a:t>2026-05-26</a:t>
             </a:fld>
             <a:endParaRPr lang="ko-KR" altLang="en-US"/>
           </a:p>
@@ -849,7 +849,7 @@
           <a:p>
             <a:fld id="{E6031A69-130F-4AFA-87E1-41757229F71B}" type="datetimeFigureOut">
               <a:rPr lang="ko-KR" altLang="en-US" smtClean="0"/>
-              <a:t>2026-05-28</a:t>
+              <a:t>2026-05-26</a:t>
             </a:fld>
             <a:endParaRPr lang="ko-KR" altLang="en-US"/>
           </a:p>
@@ -1029,7 +1029,7 @@
           <a:p>
             <a:fld id="{E6031A69-130F-4AFA-87E1-41757229F71B}" type="datetimeFigureOut">
               <a:rPr lang="ko-KR" altLang="en-US" smtClean="0"/>
-              <a:t>2026-05-28</a:t>
+              <a:t>2026-05-26</a:t>
             </a:fld>
             <a:endParaRPr lang="ko-KR" altLang="en-US"/>
           </a:p>
@@ -1199,7 +1199,7 @@
           <a:p>
             <a:fld id="{E6031A69-130F-4AFA-87E1-41757229F71B}" type="datetimeFigureOut">
               <a:rPr lang="ko-KR" altLang="en-US" smtClean="0"/>
-              <a:t>2026-05-28</a:t>
+              <a:t>2026-05-26</a:t>
             </a:fld>
             <a:endParaRPr lang="ko-KR" altLang="en-US"/>
           </a:p>
@@ -1445,7 +1445,7 @@
           <a:p>
             <a:fld id="{E6031A69-130F-4AFA-87E1-41757229F71B}" type="datetimeFigureOut">
               <a:rPr lang="ko-KR" altLang="en-US" smtClean="0"/>
-              <a:t>2026-05-28</a:t>
+              <a:t>2026-05-26</a:t>
             </a:fld>
             <a:endParaRPr lang="ko-KR" altLang="en-US"/>
           </a:p>
@@ -1677,7 +1677,7 @@
           <a:p>
             <a:fld id="{E6031A69-130F-4AFA-87E1-41757229F71B}" type="datetimeFigureOut">
               <a:rPr lang="ko-KR" altLang="en-US" smtClean="0"/>
-              <a:t>2026-05-28</a:t>
+              <a:t>2026-05-26</a:t>
             </a:fld>
             <a:endParaRPr lang="ko-KR" altLang="en-US"/>
           </a:p>
@@ -2044,7 +2044,7 @@
           <a:p>
             <a:fld id="{E6031A69-130F-4AFA-87E1-41757229F71B}" type="datetimeFigureOut">
               <a:rPr lang="ko-KR" altLang="en-US" smtClean="0"/>
-              <a:t>2026-05-28</a:t>
+              <a:t>2026-05-26</a:t>
             </a:fld>
             <a:endParaRPr lang="ko-KR" altLang="en-US"/>
           </a:p>
@@ -2162,7 +2162,7 @@
           <a:p>
             <a:fld id="{E6031A69-130F-4AFA-87E1-41757229F71B}" type="datetimeFigureOut">
               <a:rPr lang="ko-KR" altLang="en-US" smtClean="0"/>
-              <a:t>2026-05-28</a:t>
+              <a:t>2026-05-26</a:t>
             </a:fld>
             <a:endParaRPr lang="ko-KR" altLang="en-US"/>
           </a:p>
@@ -2257,7 +2257,7 @@
           <a:p>
             <a:fld id="{E6031A69-130F-4AFA-87E1-41757229F71B}" type="datetimeFigureOut">
               <a:rPr lang="ko-KR" altLang="en-US" smtClean="0"/>
-              <a:t>2026-05-28</a:t>
+              <a:t>2026-05-26</a:t>
             </a:fld>
             <a:endParaRPr lang="ko-KR" altLang="en-US"/>
           </a:p>
@@ -2534,7 +2534,7 @@
           <a:p>
             <a:fld id="{E6031A69-130F-4AFA-87E1-41757229F71B}" type="datetimeFigureOut">
               <a:rPr lang="ko-KR" altLang="en-US" smtClean="0"/>
-              <a:t>2026-05-28</a:t>
+              <a:t>2026-05-26</a:t>
             </a:fld>
             <a:endParaRPr lang="ko-KR" altLang="en-US"/>
           </a:p>
@@ -2791,7 +2791,7 @@
           <a:p>
             <a:fld id="{E6031A69-130F-4AFA-87E1-41757229F71B}" type="datetimeFigureOut">
               <a:rPr lang="ko-KR" altLang="en-US" smtClean="0"/>
-              <a:t>2026-05-28</a:t>
+              <a:t>2026-05-26</a:t>
             </a:fld>
             <a:endParaRPr lang="ko-KR" altLang="en-US"/>
           </a:p>
@@ -3004,7 +3004,7 @@
           <a:p>
             <a:fld id="{E6031A69-130F-4AFA-87E1-41757229F71B}" type="datetimeFigureOut">
               <a:rPr lang="ko-KR" altLang="en-US" smtClean="0"/>
-              <a:t>2026-05-28</a:t>
+              <a:t>2026-05-26</a:t>
             </a:fld>
             <a:endParaRPr lang="ko-KR" altLang="en-US"/>
           </a:p>
@@ -3409,6 +3409,1483 @@
           <a:chExt cx="0" cy="0"/>
         </a:xfrm>
       </p:grpSpPr>
+      <p:pic>
+        <p:nvPicPr>
+          <p:cNvPr id="70" name="그림 69">
+            <a:extLst>
+              <a:ext uri="{FF2B5EF4-FFF2-40B4-BE49-F238E27FC236}">
+                <a16:creationId xmlns:a16="http://schemas.microsoft.com/office/drawing/2014/main" id="{960D056F-BB26-F74E-8730-70D872199D00}"/>
+              </a:ext>
+            </a:extLst>
+          </p:cNvPr>
+          <p:cNvPicPr>
+            <a:picLocks noChangeAspect="1"/>
+          </p:cNvPicPr>
+          <p:nvPr/>
+        </p:nvPicPr>
+        <p:blipFill>
+          <a:blip r:embed="rId3"/>
+          <a:stretch>
+            <a:fillRect/>
+          </a:stretch>
+        </p:blipFill>
+        <p:spPr>
+          <a:xfrm>
+            <a:off x="10844213" y="8854428"/>
+            <a:ext cx="9892902" cy="5074931"/>
+          </a:xfrm>
+          <a:prstGeom prst="rect">
+            <a:avLst/>
+          </a:prstGeom>
+        </p:spPr>
+      </p:pic>
+      <p:sp>
+        <p:nvSpPr>
+          <p:cNvPr id="4" name="TextBox 3">
+            <a:extLst>
+              <a:ext uri="{FF2B5EF4-FFF2-40B4-BE49-F238E27FC236}">
+                <a16:creationId xmlns:a16="http://schemas.microsoft.com/office/drawing/2014/main" id="{F837C99B-9CE4-13DD-7E3A-61A600B1E6F9}"/>
+              </a:ext>
+            </a:extLst>
+          </p:cNvPr>
+          <p:cNvSpPr txBox="1"/>
+          <p:nvPr/>
+        </p:nvSpPr>
+        <p:spPr>
+          <a:xfrm>
+            <a:off x="522513" y="436991"/>
+            <a:ext cx="20338596" cy="1015663"/>
+          </a:xfrm>
+          <a:prstGeom prst="rect">
+            <a:avLst/>
+          </a:prstGeom>
+          <a:noFill/>
+        </p:spPr>
+        <p:txBody>
+          <a:bodyPr wrap="square" rtlCol="0">
+            <a:spAutoFit/>
+          </a:bodyPr>
+          <a:lstStyle/>
+          <a:p>
+            <a:pPr algn="ctr"/>
+            <a:r>
+              <a:rPr lang="en-US" altLang="ko-KR" sz="6000" b="1" dirty="0"/>
+              <a:t>BEHAVIOR-1K </a:t>
+            </a:r>
+            <a:r>
+              <a:rPr lang="ko-KR" altLang="en-US" sz="6000" b="1" dirty="0"/>
+              <a:t>기반 양팔 로봇 정책 학습</a:t>
+            </a:r>
+            <a:endParaRPr lang="ko-KR" altLang="en-US" sz="5400" b="1" dirty="0"/>
+          </a:p>
+        </p:txBody>
+      </p:sp>
+      <p:sp>
+        <p:nvSpPr>
+          <p:cNvPr id="5" name="TextBox 4">
+            <a:extLst>
+              <a:ext uri="{FF2B5EF4-FFF2-40B4-BE49-F238E27FC236}">
+                <a16:creationId xmlns:a16="http://schemas.microsoft.com/office/drawing/2014/main" id="{3EA791E0-6CF5-D63E-BD9E-794012C4381A}"/>
+              </a:ext>
+            </a:extLst>
+          </p:cNvPr>
+          <p:cNvSpPr txBox="1"/>
+          <p:nvPr/>
+        </p:nvSpPr>
+        <p:spPr>
+          <a:xfrm>
+            <a:off x="512511" y="1767279"/>
+            <a:ext cx="10179301" cy="830997"/>
+          </a:xfrm>
+          <a:prstGeom prst="rect">
+            <a:avLst/>
+          </a:prstGeom>
+          <a:noFill/>
+          <a:ln w="57150">
+            <a:solidFill>
+              <a:schemeClr val="accent4">
+                <a:lumMod val="50000"/>
+              </a:schemeClr>
+            </a:solidFill>
+          </a:ln>
+        </p:spPr>
+        <p:txBody>
+          <a:bodyPr wrap="square" rtlCol="0">
+            <a:spAutoFit/>
+          </a:bodyPr>
+          <a:lstStyle/>
+          <a:p>
+            <a:pPr algn="ctr"/>
+            <a:r>
+              <a:rPr lang="ko-KR" altLang="en-US" sz="4800" b="1" dirty="0">
+                <a:latin typeface="+mn-ea"/>
+              </a:rPr>
+              <a:t>지도 교수님</a:t>
+            </a:r>
+            <a:r>
+              <a:rPr lang="en-US" altLang="ko-KR" sz="4800" b="1" dirty="0">
+                <a:latin typeface="+mn-ea"/>
+              </a:rPr>
+              <a:t>: </a:t>
+            </a:r>
+            <a:r>
+              <a:rPr lang="ko-KR" altLang="en-US" sz="4800" b="1" dirty="0" err="1">
+                <a:latin typeface="+mn-ea"/>
+              </a:rPr>
+              <a:t>하종은</a:t>
+            </a:r>
+            <a:r>
+              <a:rPr lang="ko-KR" altLang="en-US" sz="4800" b="1" dirty="0">
+                <a:latin typeface="+mn-ea"/>
+              </a:rPr>
+              <a:t> 교수님</a:t>
+            </a:r>
+          </a:p>
+        </p:txBody>
+      </p:sp>
+      <p:sp>
+        <p:nvSpPr>
+          <p:cNvPr id="6" name="TextBox 5">
+            <a:extLst>
+              <a:ext uri="{FF2B5EF4-FFF2-40B4-BE49-F238E27FC236}">
+                <a16:creationId xmlns:a16="http://schemas.microsoft.com/office/drawing/2014/main" id="{28CC29D6-F5C9-1FEE-2470-ECFA1AD996C6}"/>
+              </a:ext>
+            </a:extLst>
+          </p:cNvPr>
+          <p:cNvSpPr txBox="1"/>
+          <p:nvPr/>
+        </p:nvSpPr>
+        <p:spPr>
+          <a:xfrm>
+            <a:off x="10691813" y="1767279"/>
+            <a:ext cx="10175918" cy="830997"/>
+          </a:xfrm>
+          <a:prstGeom prst="rect">
+            <a:avLst/>
+          </a:prstGeom>
+          <a:noFill/>
+          <a:ln w="57150">
+            <a:solidFill>
+              <a:schemeClr val="accent4">
+                <a:lumMod val="50000"/>
+              </a:schemeClr>
+            </a:solidFill>
+          </a:ln>
+        </p:spPr>
+        <p:txBody>
+          <a:bodyPr wrap="square" rtlCol="0">
+            <a:spAutoFit/>
+          </a:bodyPr>
+          <a:lstStyle/>
+          <a:p>
+            <a:pPr algn="ctr"/>
+            <a:r>
+              <a:rPr lang="ko-KR" altLang="en-US" sz="4800" b="1" dirty="0">
+                <a:latin typeface="+mn-ea"/>
+              </a:rPr>
+              <a:t>조원</a:t>
+            </a:r>
+            <a:r>
+              <a:rPr lang="en-US" altLang="ko-KR" sz="4800" b="1" dirty="0">
+                <a:latin typeface="+mn-ea"/>
+              </a:rPr>
+              <a:t>: </a:t>
+            </a:r>
+            <a:r>
+              <a:rPr lang="ko-KR" altLang="en-US" sz="4800" b="1" dirty="0">
+                <a:latin typeface="+mn-ea"/>
+              </a:rPr>
+              <a:t>강지호</a:t>
+            </a:r>
+            <a:r>
+              <a:rPr lang="en-US" altLang="ko-KR" sz="4800" b="1" dirty="0">
+                <a:latin typeface="+mn-ea"/>
+              </a:rPr>
+              <a:t>, </a:t>
+            </a:r>
+            <a:r>
+              <a:rPr lang="ko-KR" altLang="en-US" sz="4800" b="1" dirty="0" err="1">
+                <a:latin typeface="+mn-ea"/>
+              </a:rPr>
+              <a:t>문병선</a:t>
+            </a:r>
+            <a:endParaRPr lang="ko-KR" altLang="en-US" sz="4800" b="1" dirty="0">
+              <a:latin typeface="+mn-ea"/>
+            </a:endParaRPr>
+          </a:p>
+        </p:txBody>
+      </p:sp>
+      <p:sp>
+        <p:nvSpPr>
+          <p:cNvPr id="7" name="TextBox 6">
+            <a:extLst>
+              <a:ext uri="{FF2B5EF4-FFF2-40B4-BE49-F238E27FC236}">
+                <a16:creationId xmlns:a16="http://schemas.microsoft.com/office/drawing/2014/main" id="{ACF21E68-84F7-27E5-88B3-AD831848791A}"/>
+              </a:ext>
+            </a:extLst>
+          </p:cNvPr>
+          <p:cNvSpPr txBox="1"/>
+          <p:nvPr/>
+        </p:nvSpPr>
+        <p:spPr>
+          <a:xfrm>
+            <a:off x="514201" y="2598276"/>
+            <a:ext cx="10177612" cy="3570208"/>
+          </a:xfrm>
+          <a:prstGeom prst="rect">
+            <a:avLst/>
+          </a:prstGeom>
+          <a:noFill/>
+          <a:ln w="57150">
+            <a:solidFill>
+              <a:schemeClr val="accent4">
+                <a:lumMod val="50000"/>
+              </a:schemeClr>
+            </a:solidFill>
+          </a:ln>
+        </p:spPr>
+        <p:txBody>
+          <a:bodyPr wrap="square" rtlCol="0">
+            <a:spAutoFit/>
+          </a:bodyPr>
+          <a:lstStyle/>
+          <a:p>
+            <a:pPr algn="ctr"/>
+            <a:endParaRPr lang="en-US" altLang="ko-KR" sz="5400" b="1" dirty="0">
+              <a:latin typeface="+mn-ea"/>
+            </a:endParaRPr>
+          </a:p>
+          <a:p>
+            <a:pPr marL="342900" indent="-342900" algn="ctr">
+              <a:buFont typeface="Arial" panose="020B0604020202020204" pitchFamily="34" charset="0"/>
+              <a:buChar char="•"/>
+            </a:pPr>
+            <a:r>
+              <a:rPr lang="en-US" altLang="ko-KR" sz="2400" dirty="0">
+                <a:latin typeface="+mn-ea"/>
+              </a:rPr>
+              <a:t>BEHAVIOR-1K </a:t>
+            </a:r>
+            <a:r>
+              <a:rPr lang="ko-KR" altLang="en-US" sz="2400" dirty="0">
+                <a:latin typeface="+mn-ea"/>
+              </a:rPr>
+              <a:t>환경에서 </a:t>
+            </a:r>
+            <a:r>
+              <a:rPr lang="en-US" altLang="ko-KR" sz="2400" dirty="0">
+                <a:latin typeface="+mn-ea"/>
+              </a:rPr>
+              <a:t>Vision-Language-Action </a:t>
+            </a:r>
+            <a:r>
+              <a:rPr lang="ko-KR" altLang="en-US" sz="2400" dirty="0">
+                <a:latin typeface="+mn-ea"/>
+              </a:rPr>
+              <a:t>기반 양팔 로봇 조작 정책을 구현하고 평가</a:t>
+            </a:r>
+            <a:endParaRPr lang="en-US" altLang="ko-KR" sz="2400" dirty="0">
+              <a:latin typeface="+mn-ea"/>
+            </a:endParaRPr>
+          </a:p>
+          <a:p>
+            <a:pPr marL="285750" indent="-285750" algn="ctr">
+              <a:buFont typeface="Arial" panose="020B0604020202020204" pitchFamily="34" charset="0"/>
+              <a:buChar char="•"/>
+            </a:pPr>
+            <a:endParaRPr lang="en-US" altLang="ko-KR" dirty="0"/>
+          </a:p>
+          <a:p>
+            <a:pPr marL="342900" indent="-342900" algn="ctr">
+              <a:buFont typeface="Arial" panose="020B0604020202020204" pitchFamily="34" charset="0"/>
+              <a:buChar char="•"/>
+            </a:pPr>
+            <a:r>
+              <a:rPr lang="ko-KR" altLang="ko-KR" sz="2400" dirty="0"/>
+              <a:t>Pi0.5 기반 모델을 활용하여 장기 시퀀스 작업 수행 성능을 분석하고, </a:t>
+            </a:r>
+            <a:r>
+              <a:rPr lang="ko-KR" altLang="ko-KR" sz="2400" dirty="0" err="1"/>
+              <a:t>Flow</a:t>
+            </a:r>
+            <a:r>
+              <a:rPr lang="ko-KR" altLang="ko-KR" sz="2400" dirty="0"/>
+              <a:t> </a:t>
+            </a:r>
+            <a:r>
+              <a:rPr lang="ko-KR" altLang="ko-KR" sz="2400" dirty="0" err="1"/>
+              <a:t>Matching</a:t>
+            </a:r>
+            <a:r>
+              <a:rPr lang="ko-KR" altLang="ko-KR" sz="2400" dirty="0"/>
+              <a:t> 기반 정책 학습 구조를 적용</a:t>
+            </a:r>
+            <a:endParaRPr lang="en-US" altLang="ko-KR" sz="2400" dirty="0"/>
+          </a:p>
+          <a:p>
+            <a:pPr marL="342900" indent="-342900" algn="ctr">
+              <a:buFont typeface="Arial" panose="020B0604020202020204" pitchFamily="34" charset="0"/>
+              <a:buChar char="•"/>
+            </a:pPr>
+            <a:endParaRPr lang="en-US" altLang="ko-KR" dirty="0"/>
+          </a:p>
+          <a:p>
+            <a:pPr marL="342900" indent="-342900" algn="ctr">
+              <a:buFont typeface="Arial" panose="020B0604020202020204" pitchFamily="34" charset="0"/>
+              <a:buChar char="•"/>
+            </a:pPr>
+            <a:r>
+              <a:rPr lang="ko-KR" altLang="ko-KR" sz="2400" dirty="0" err="1"/>
+              <a:t>OmniGibson</a:t>
+            </a:r>
+            <a:r>
+              <a:rPr lang="ko-KR" altLang="ko-KR" sz="2400" dirty="0"/>
+              <a:t> 환경에서 다양한 작업 수행 결과를 통해 모델의 실효성 검증</a:t>
+            </a:r>
+            <a:endParaRPr lang="en-US" altLang="ko-KR" sz="2400" dirty="0"/>
+          </a:p>
+          <a:p>
+            <a:pPr algn="ctr"/>
+            <a:endParaRPr lang="en-US" altLang="ko-KR" sz="1600" dirty="0"/>
+          </a:p>
+        </p:txBody>
+      </p:sp>
+      <p:sp>
+        <p:nvSpPr>
+          <p:cNvPr id="8" name="TextBox 7">
+            <a:extLst>
+              <a:ext uri="{FF2B5EF4-FFF2-40B4-BE49-F238E27FC236}">
+                <a16:creationId xmlns:a16="http://schemas.microsoft.com/office/drawing/2014/main" id="{2E8A191C-5F83-480C-7015-4DA81E72DAFF}"/>
+              </a:ext>
+            </a:extLst>
+          </p:cNvPr>
+          <p:cNvSpPr txBox="1"/>
+          <p:nvPr/>
+        </p:nvSpPr>
+        <p:spPr>
+          <a:xfrm>
+            <a:off x="530134" y="2598276"/>
+            <a:ext cx="4019006" cy="646331"/>
+          </a:xfrm>
+          <a:prstGeom prst="rect">
+            <a:avLst/>
+          </a:prstGeom>
+          <a:gradFill>
+            <a:gsLst>
+              <a:gs pos="0">
+                <a:schemeClr val="accent4">
+                  <a:shade val="30000"/>
+                  <a:satMod val="115000"/>
+                  <a:lumMod val="48000"/>
+                  <a:alpha val="95000"/>
+                </a:schemeClr>
+              </a:gs>
+              <a:gs pos="50000">
+                <a:schemeClr val="accent4">
+                  <a:lumMod val="50000"/>
+                  <a:shade val="67500"/>
+                  <a:satMod val="115000"/>
+                </a:schemeClr>
+              </a:gs>
+              <a:gs pos="100000">
+                <a:schemeClr val="accent4">
+                  <a:lumMod val="50000"/>
+                  <a:shade val="100000"/>
+                  <a:satMod val="115000"/>
+                </a:schemeClr>
+              </a:gs>
+            </a:gsLst>
+            <a:path path="rect">
+              <a:fillToRect l="50000" t="50000" r="50000" b="50000"/>
+            </a:path>
+          </a:gradFill>
+          <a:ln w="57150">
+            <a:solidFill>
+              <a:schemeClr val="accent4">
+                <a:lumMod val="50000"/>
+              </a:schemeClr>
+            </a:solidFill>
+          </a:ln>
+        </p:spPr>
+        <p:txBody>
+          <a:bodyPr wrap="square" rtlCol="0">
+            <a:spAutoFit/>
+          </a:bodyPr>
+          <a:lstStyle/>
+          <a:p>
+            <a:pPr algn="ctr"/>
+            <a:r>
+              <a:rPr lang="ko-KR" altLang="en-US" sz="3600" b="1" dirty="0">
+                <a:solidFill>
+                  <a:schemeClr val="bg1"/>
+                </a:solidFill>
+                <a:latin typeface="+mn-ea"/>
+              </a:rPr>
+              <a:t>연구 목적</a:t>
+            </a:r>
+          </a:p>
+        </p:txBody>
+      </p:sp>
+      <p:sp>
+        <p:nvSpPr>
+          <p:cNvPr id="11" name="TextBox 10">
+            <a:extLst>
+              <a:ext uri="{FF2B5EF4-FFF2-40B4-BE49-F238E27FC236}">
+                <a16:creationId xmlns:a16="http://schemas.microsoft.com/office/drawing/2014/main" id="{3836297D-C66E-2FF3-A2C5-91FB5F095DDA}"/>
+              </a:ext>
+            </a:extLst>
+          </p:cNvPr>
+          <p:cNvSpPr txBox="1"/>
+          <p:nvPr/>
+        </p:nvSpPr>
+        <p:spPr>
+          <a:xfrm>
+            <a:off x="10700123" y="2588074"/>
+            <a:ext cx="10167608" cy="5940088"/>
+          </a:xfrm>
+          <a:prstGeom prst="rect">
+            <a:avLst/>
+          </a:prstGeom>
+          <a:noFill/>
+          <a:ln w="57150">
+            <a:solidFill>
+              <a:schemeClr val="accent4">
+                <a:lumMod val="50000"/>
+              </a:schemeClr>
+            </a:solidFill>
+          </a:ln>
+        </p:spPr>
+        <p:txBody>
+          <a:bodyPr wrap="square" rtlCol="0">
+            <a:spAutoFit/>
+          </a:bodyPr>
+          <a:lstStyle/>
+          <a:p>
+            <a:pPr algn="ctr"/>
+            <a:endParaRPr lang="en-US" altLang="ko-KR" sz="3600" b="1" dirty="0">
+              <a:latin typeface="+mn-ea"/>
+            </a:endParaRPr>
+          </a:p>
+          <a:p>
+            <a:pPr algn="ctr"/>
+            <a:endParaRPr lang="en-US" altLang="ko-KR" sz="3600" dirty="0">
+              <a:latin typeface="+mn-ea"/>
+            </a:endParaRPr>
+          </a:p>
+          <a:p>
+            <a:pPr algn="ctr"/>
+            <a:endParaRPr lang="en-US" altLang="ko-KR" sz="3600" dirty="0">
+              <a:latin typeface="+mn-ea"/>
+            </a:endParaRPr>
+          </a:p>
+          <a:p>
+            <a:pPr algn="ctr"/>
+            <a:endParaRPr lang="en-US" altLang="ko-KR" sz="3600" dirty="0">
+              <a:latin typeface="+mn-ea"/>
+            </a:endParaRPr>
+          </a:p>
+          <a:p>
+            <a:pPr algn="ctr"/>
+            <a:endParaRPr lang="en-US" altLang="ko-KR" sz="3600" dirty="0">
+              <a:latin typeface="+mn-ea"/>
+            </a:endParaRPr>
+          </a:p>
+          <a:p>
+            <a:pPr algn="ctr"/>
+            <a:endParaRPr lang="en-US" altLang="ko-KR" sz="3600" dirty="0">
+              <a:latin typeface="+mn-ea"/>
+            </a:endParaRPr>
+          </a:p>
+          <a:p>
+            <a:pPr algn="ctr"/>
+            <a:endParaRPr lang="en-US" altLang="ko-KR" sz="3600" dirty="0">
+              <a:latin typeface="+mn-ea"/>
+            </a:endParaRPr>
+          </a:p>
+          <a:p>
+            <a:pPr algn="ctr"/>
+            <a:endParaRPr lang="en-US" altLang="ko-KR" sz="3600" dirty="0">
+              <a:latin typeface="+mn-ea"/>
+            </a:endParaRPr>
+          </a:p>
+          <a:p>
+            <a:pPr algn="ctr"/>
+            <a:endParaRPr lang="en-US" altLang="ko-KR" sz="3600" dirty="0">
+              <a:latin typeface="+mn-ea"/>
+            </a:endParaRPr>
+          </a:p>
+          <a:p>
+            <a:pPr algn="ctr"/>
+            <a:endParaRPr lang="en-US" altLang="ko-KR" sz="3600" dirty="0">
+              <a:latin typeface="+mn-ea"/>
+            </a:endParaRPr>
+          </a:p>
+          <a:p>
+            <a:pPr algn="ctr"/>
+            <a:endParaRPr lang="en-US" altLang="ko-KR" sz="1600" dirty="0">
+              <a:latin typeface="+mn-ea"/>
+            </a:endParaRPr>
+          </a:p>
+        </p:txBody>
+      </p:sp>
+      <p:sp>
+        <p:nvSpPr>
+          <p:cNvPr id="12" name="TextBox 11">
+            <a:extLst>
+              <a:ext uri="{FF2B5EF4-FFF2-40B4-BE49-F238E27FC236}">
+                <a16:creationId xmlns:a16="http://schemas.microsoft.com/office/drawing/2014/main" id="{EE4BA792-A182-B99F-83BD-30DF7E0EBF88}"/>
+              </a:ext>
+            </a:extLst>
+          </p:cNvPr>
+          <p:cNvSpPr txBox="1"/>
+          <p:nvPr/>
+        </p:nvSpPr>
+        <p:spPr>
+          <a:xfrm>
+            <a:off x="10691812" y="2598276"/>
+            <a:ext cx="8112004" cy="646331"/>
+          </a:xfrm>
+          <a:prstGeom prst="rect">
+            <a:avLst/>
+          </a:prstGeom>
+          <a:gradFill>
+            <a:gsLst>
+              <a:gs pos="0">
+                <a:schemeClr val="accent4">
+                  <a:shade val="30000"/>
+                  <a:satMod val="115000"/>
+                  <a:lumMod val="48000"/>
+                  <a:alpha val="95000"/>
+                </a:schemeClr>
+              </a:gs>
+              <a:gs pos="50000">
+                <a:schemeClr val="accent4">
+                  <a:lumMod val="50000"/>
+                  <a:shade val="67500"/>
+                  <a:satMod val="115000"/>
+                </a:schemeClr>
+              </a:gs>
+              <a:gs pos="100000">
+                <a:schemeClr val="accent4">
+                  <a:lumMod val="50000"/>
+                  <a:shade val="100000"/>
+                  <a:satMod val="115000"/>
+                </a:schemeClr>
+              </a:gs>
+            </a:gsLst>
+            <a:path path="rect">
+              <a:fillToRect l="50000" t="50000" r="50000" b="50000"/>
+            </a:path>
+          </a:gradFill>
+          <a:ln w="57150">
+            <a:solidFill>
+              <a:schemeClr val="accent4">
+                <a:lumMod val="50000"/>
+              </a:schemeClr>
+            </a:solidFill>
+          </a:ln>
+        </p:spPr>
+        <p:txBody>
+          <a:bodyPr wrap="square" rtlCol="0">
+            <a:spAutoFit/>
+          </a:bodyPr>
+          <a:lstStyle/>
+          <a:p>
+            <a:pPr algn="ctr"/>
+            <a:r>
+              <a:rPr lang="ko-KR" altLang="en-US" sz="3600" b="1" dirty="0">
+                <a:solidFill>
+                  <a:schemeClr val="bg1"/>
+                </a:solidFill>
+                <a:latin typeface="+mn-ea"/>
+              </a:rPr>
+              <a:t>주차별 진행 상황 및 역할 분담</a:t>
+            </a:r>
+          </a:p>
+        </p:txBody>
+      </p:sp>
+      <p:sp>
+        <p:nvSpPr>
+          <p:cNvPr id="13" name="TextBox 12">
+            <a:extLst>
+              <a:ext uri="{FF2B5EF4-FFF2-40B4-BE49-F238E27FC236}">
+                <a16:creationId xmlns:a16="http://schemas.microsoft.com/office/drawing/2014/main" id="{C4E37084-1706-89B6-3818-C425F45E15B4}"/>
+              </a:ext>
+            </a:extLst>
+          </p:cNvPr>
+          <p:cNvSpPr txBox="1"/>
+          <p:nvPr/>
+        </p:nvSpPr>
+        <p:spPr>
+          <a:xfrm>
+            <a:off x="10691811" y="3343435"/>
+            <a:ext cx="5084650" cy="4154984"/>
+          </a:xfrm>
+          <a:prstGeom prst="rect">
+            <a:avLst/>
+          </a:prstGeom>
+          <a:noFill/>
+          <a:ln w="57150">
+            <a:noFill/>
+            <a:prstDash val="dash"/>
+          </a:ln>
+        </p:spPr>
+        <p:txBody>
+          <a:bodyPr wrap="square" rtlCol="0">
+            <a:spAutoFit/>
+          </a:bodyPr>
+          <a:lstStyle/>
+          <a:p>
+            <a:r>
+              <a:rPr lang="en-US" altLang="ko-KR" sz="2400" dirty="0"/>
+              <a:t> 1</a:t>
+            </a:r>
+            <a:r>
+              <a:rPr lang="ko-KR" altLang="en-US" sz="2400" dirty="0"/>
+              <a:t>주차</a:t>
+            </a:r>
+            <a:r>
+              <a:rPr lang="en-US" altLang="ko-KR" sz="2400" dirty="0"/>
+              <a:t>: </a:t>
+            </a:r>
+            <a:r>
+              <a:rPr lang="ko-KR" altLang="en-US" sz="2400" dirty="0"/>
+              <a:t>프로젝트 주제 선정 및 개발 </a:t>
+            </a:r>
+            <a:r>
+              <a:rPr lang="en-US" altLang="ko-KR" sz="2400" dirty="0"/>
+              <a:t>		</a:t>
+            </a:r>
+            <a:r>
+              <a:rPr lang="ko-KR" altLang="en-US" sz="2400" dirty="0"/>
+              <a:t>환경 조사</a:t>
+            </a:r>
+            <a:endParaRPr lang="en-US" altLang="ko-KR" sz="2400" dirty="0"/>
+          </a:p>
+          <a:p>
+            <a:r>
+              <a:rPr lang="en-US" altLang="ko-KR" sz="2400" dirty="0"/>
+              <a:t> 2</a:t>
+            </a:r>
+            <a:r>
+              <a:rPr lang="ko-KR" altLang="en-US" sz="2400" dirty="0"/>
+              <a:t>주차</a:t>
+            </a:r>
+            <a:r>
+              <a:rPr lang="en-US" altLang="ko-KR" sz="2400" dirty="0"/>
+              <a:t>: </a:t>
+            </a:r>
+            <a:r>
+              <a:rPr lang="ko-KR" altLang="ko-KR" sz="2400" dirty="0"/>
+              <a:t>OpenPI·Pi0.5 기반 코드 구조 </a:t>
+            </a:r>
+            <a:r>
+              <a:rPr lang="en-US" altLang="ko-KR" sz="2400" dirty="0"/>
+              <a:t>		</a:t>
+            </a:r>
+            <a:r>
+              <a:rPr lang="ko-KR" altLang="ko-KR" sz="2400" dirty="0"/>
+              <a:t>분석 및 학습 파이프라인 구축</a:t>
+            </a:r>
+            <a:endParaRPr lang="en-US" altLang="ko-KR" sz="2400" dirty="0"/>
+          </a:p>
+          <a:p>
+            <a:r>
+              <a:rPr lang="en-US" altLang="ko-KR" sz="2400" dirty="0"/>
+              <a:t> 3</a:t>
+            </a:r>
+            <a:r>
+              <a:rPr lang="ko-KR" altLang="en-US" sz="2400" dirty="0"/>
+              <a:t>주차</a:t>
+            </a:r>
+            <a:r>
+              <a:rPr lang="en-US" altLang="ko-KR" sz="2400" dirty="0"/>
+              <a:t>: </a:t>
+            </a:r>
+            <a:r>
+              <a:rPr lang="ko-KR" altLang="ko-KR" sz="2400" dirty="0"/>
+              <a:t>모델 구조 설계 및 실험 환경 </a:t>
+            </a:r>
+            <a:r>
+              <a:rPr lang="en-US" altLang="ko-KR" sz="2400" dirty="0"/>
+              <a:t>		</a:t>
+            </a:r>
+            <a:r>
+              <a:rPr lang="ko-KR" altLang="ko-KR" sz="2400" dirty="0"/>
+              <a:t>구성</a:t>
+            </a:r>
+            <a:endParaRPr lang="en-US" altLang="ko-KR" sz="2400" dirty="0"/>
+          </a:p>
+          <a:p>
+            <a:r>
+              <a:rPr lang="en-US" altLang="ko-KR" sz="2400" dirty="0"/>
+              <a:t> 4</a:t>
+            </a:r>
+            <a:r>
+              <a:rPr lang="ko-KR" altLang="en-US" sz="2400" dirty="0"/>
+              <a:t>주차</a:t>
+            </a:r>
+            <a:r>
+              <a:rPr lang="en-US" altLang="ko-KR" sz="2400" dirty="0"/>
+              <a:t>:  </a:t>
+            </a:r>
+            <a:r>
+              <a:rPr lang="ko-KR" altLang="ko-KR" sz="2400" dirty="0" err="1"/>
+              <a:t>OmniGibson</a:t>
+            </a:r>
+            <a:r>
+              <a:rPr lang="ko-KR" altLang="ko-KR" sz="2400" dirty="0"/>
+              <a:t> 평가 환경 구축</a:t>
+            </a:r>
+            <a:endParaRPr lang="en-US" altLang="ko-KR" sz="2400" dirty="0"/>
+          </a:p>
+          <a:p>
+            <a:r>
+              <a:rPr lang="en-US" altLang="ko-KR" sz="2400" dirty="0"/>
+              <a:t> 5</a:t>
+            </a:r>
+            <a:r>
+              <a:rPr lang="ko-KR" altLang="en-US" sz="2400" dirty="0"/>
+              <a:t>주차</a:t>
+            </a:r>
+            <a:r>
+              <a:rPr lang="en-US" altLang="ko-KR" sz="2400" dirty="0"/>
+              <a:t>: </a:t>
+            </a:r>
+            <a:r>
+              <a:rPr lang="ko-KR" altLang="ko-KR" sz="2400" dirty="0"/>
+              <a:t>실데이터 학습 파이프라인 </a:t>
+            </a:r>
+            <a:r>
+              <a:rPr lang="en-US" altLang="ko-KR" sz="2400" dirty="0"/>
+              <a:t>			</a:t>
+            </a:r>
+            <a:r>
+              <a:rPr lang="ko-KR" altLang="ko-KR" sz="2400" dirty="0"/>
+              <a:t>구현</a:t>
+            </a:r>
+            <a:endParaRPr lang="en-US" altLang="ko-KR" sz="2400" dirty="0"/>
+          </a:p>
+          <a:p>
+            <a:r>
+              <a:rPr lang="en-US" altLang="ko-KR" sz="2400" dirty="0"/>
+              <a:t> 6</a:t>
+            </a:r>
+            <a:r>
+              <a:rPr lang="ko-KR" altLang="en-US" sz="2400" dirty="0"/>
+              <a:t>주차</a:t>
+            </a:r>
+            <a:r>
+              <a:rPr lang="en-US" altLang="ko-KR" sz="2400" dirty="0"/>
+              <a:t>: </a:t>
+            </a:r>
+            <a:r>
+              <a:rPr lang="ko-KR" altLang="ko-KR" sz="2400" dirty="0"/>
+              <a:t>메모리 최적화 및 학습 성능 </a:t>
+            </a:r>
+            <a:r>
+              <a:rPr lang="en-US" altLang="ko-KR" sz="2400" dirty="0"/>
+              <a:t>		</a:t>
+            </a:r>
+            <a:r>
+              <a:rPr lang="ko-KR" altLang="ko-KR" sz="2400" dirty="0"/>
+              <a:t>분석</a:t>
+            </a:r>
+            <a:r>
+              <a:rPr lang="en-US" altLang="ko-KR" sz="2400" dirty="0"/>
+              <a:t> </a:t>
+            </a:r>
+          </a:p>
+        </p:txBody>
+      </p:sp>
+      <p:sp>
+        <p:nvSpPr>
+          <p:cNvPr id="18" name="TextBox 17">
+            <a:extLst>
+              <a:ext uri="{FF2B5EF4-FFF2-40B4-BE49-F238E27FC236}">
+                <a16:creationId xmlns:a16="http://schemas.microsoft.com/office/drawing/2014/main" id="{2CFBE48B-B887-151D-2BF6-D02E76534210}"/>
+              </a:ext>
+            </a:extLst>
+          </p:cNvPr>
+          <p:cNvSpPr txBox="1"/>
+          <p:nvPr/>
+        </p:nvSpPr>
+        <p:spPr>
+          <a:xfrm>
+            <a:off x="15776460" y="3306162"/>
+            <a:ext cx="5084650" cy="2954655"/>
+          </a:xfrm>
+          <a:prstGeom prst="rect">
+            <a:avLst/>
+          </a:prstGeom>
+          <a:noFill/>
+          <a:ln w="57150">
+            <a:noFill/>
+            <a:prstDash val="dash"/>
+          </a:ln>
+        </p:spPr>
+        <p:txBody>
+          <a:bodyPr wrap="square" rtlCol="0">
+            <a:spAutoFit/>
+          </a:bodyPr>
+          <a:lstStyle/>
+          <a:p>
+            <a:r>
+              <a:rPr lang="en-US" altLang="ko-KR" sz="2400" dirty="0"/>
+              <a:t> 7</a:t>
+            </a:r>
+            <a:r>
+              <a:rPr lang="ko-KR" altLang="en-US" sz="2400" dirty="0"/>
+              <a:t>주차</a:t>
+            </a:r>
+            <a:r>
+              <a:rPr lang="en-US" altLang="ko-KR" sz="2400" dirty="0"/>
+              <a:t>: </a:t>
+            </a:r>
+            <a:r>
+              <a:rPr lang="ko-KR" altLang="ko-KR" sz="2400" dirty="0"/>
+              <a:t>학습 및 W&amp;B 로깅 시스템 </a:t>
+            </a:r>
+            <a:r>
+              <a:rPr lang="en-US" altLang="ko-KR" sz="2400" dirty="0"/>
+              <a:t>			</a:t>
+            </a:r>
+            <a:r>
+              <a:rPr lang="ko-KR" altLang="ko-KR" sz="2400" dirty="0"/>
+              <a:t>구축</a:t>
+            </a:r>
+            <a:endParaRPr lang="en-US" altLang="ko-KR" sz="2400" dirty="0"/>
+          </a:p>
+          <a:p>
+            <a:r>
+              <a:rPr lang="en-US" altLang="ko-KR" sz="2400" dirty="0"/>
+              <a:t> 8</a:t>
+            </a:r>
+            <a:r>
+              <a:rPr lang="ko-KR" altLang="en-US" sz="2400" dirty="0"/>
+              <a:t>주차</a:t>
+            </a:r>
+            <a:r>
+              <a:rPr lang="en-US" altLang="ko-KR" sz="2400" dirty="0"/>
+              <a:t>: </a:t>
+            </a:r>
+            <a:r>
+              <a:rPr lang="ko-KR" altLang="en-US" sz="2400" dirty="0"/>
+              <a:t>경량화 모델 학습</a:t>
+            </a:r>
+            <a:endParaRPr lang="en-US" altLang="ko-KR" sz="2400" dirty="0"/>
+          </a:p>
+          <a:p>
+            <a:r>
+              <a:rPr lang="en-US" altLang="ko-KR" sz="2400" dirty="0"/>
+              <a:t> 9</a:t>
+            </a:r>
+            <a:r>
+              <a:rPr lang="ko-KR" altLang="en-US" sz="2400" dirty="0"/>
+              <a:t>주차</a:t>
+            </a:r>
+            <a:r>
+              <a:rPr lang="en-US" altLang="ko-KR" sz="2400" dirty="0"/>
+              <a:t>: </a:t>
+            </a:r>
+            <a:r>
+              <a:rPr lang="ko-KR" altLang="en-US" sz="2400" dirty="0"/>
+              <a:t>경량화 모델 학습</a:t>
+            </a:r>
+            <a:endParaRPr lang="en-US" altLang="ko-KR" sz="2400" dirty="0"/>
+          </a:p>
+          <a:p>
+            <a:r>
+              <a:rPr lang="en-US" altLang="ko-KR" sz="2400" dirty="0"/>
+              <a:t> 10</a:t>
+            </a:r>
+            <a:r>
+              <a:rPr lang="ko-KR" altLang="en-US" sz="2400" dirty="0"/>
+              <a:t>주차</a:t>
+            </a:r>
+            <a:r>
+              <a:rPr lang="en-US" altLang="ko-KR" sz="2400" dirty="0"/>
+              <a:t>: </a:t>
+            </a:r>
+            <a:r>
+              <a:rPr lang="ko-KR" altLang="en-US" sz="2400" dirty="0"/>
+              <a:t>경량화 모델 학습</a:t>
+            </a:r>
+            <a:endParaRPr lang="en-US" altLang="ko-KR" sz="2400" dirty="0"/>
+          </a:p>
+          <a:p>
+            <a:r>
+              <a:rPr lang="en-US" altLang="ko-KR" sz="2400" dirty="0"/>
+              <a:t> 11</a:t>
+            </a:r>
+            <a:r>
+              <a:rPr lang="ko-KR" altLang="en-US" sz="2400" dirty="0"/>
+              <a:t>주차</a:t>
+            </a:r>
+            <a:r>
+              <a:rPr lang="en-US" altLang="ko-KR" sz="2400" dirty="0"/>
+              <a:t>: rollout </a:t>
+            </a:r>
+            <a:r>
+              <a:rPr lang="ko-KR" altLang="en-US" sz="2400" dirty="0"/>
+              <a:t>안정화 및 평가 개선</a:t>
+            </a:r>
+            <a:endParaRPr lang="en-US" altLang="ko-KR" sz="2400" dirty="0"/>
+          </a:p>
+          <a:p>
+            <a:r>
+              <a:rPr lang="en-US" altLang="ko-KR" sz="2400" dirty="0"/>
+              <a:t> 12</a:t>
+            </a:r>
+            <a:r>
+              <a:rPr lang="ko-KR" altLang="en-US" sz="2400" dirty="0"/>
+              <a:t>주차</a:t>
+            </a:r>
+            <a:r>
+              <a:rPr lang="en-US" altLang="ko-KR" sz="2400" dirty="0"/>
+              <a:t>: </a:t>
+            </a:r>
+            <a:r>
+              <a:rPr lang="ko-KR" altLang="ko-KR" sz="2400" dirty="0"/>
+              <a:t>최종 실험 결과 정리</a:t>
+            </a:r>
+            <a:endParaRPr lang="en-US" altLang="ko-KR" sz="2400" dirty="0"/>
+          </a:p>
+          <a:p>
+            <a:endParaRPr lang="ko-KR" altLang="en-US" dirty="0"/>
+          </a:p>
+        </p:txBody>
+      </p:sp>
+      <p:sp>
+        <p:nvSpPr>
+          <p:cNvPr id="24" name="TextBox 23">
+            <a:extLst>
+              <a:ext uri="{FF2B5EF4-FFF2-40B4-BE49-F238E27FC236}">
+                <a16:creationId xmlns:a16="http://schemas.microsoft.com/office/drawing/2014/main" id="{2028F00E-856C-97B8-EDC1-27E6B218DCA2}"/>
+              </a:ext>
+            </a:extLst>
+          </p:cNvPr>
+          <p:cNvSpPr txBox="1"/>
+          <p:nvPr/>
+        </p:nvSpPr>
+        <p:spPr>
+          <a:xfrm>
+            <a:off x="10691811" y="7623380"/>
+            <a:ext cx="10169298" cy="830997"/>
+          </a:xfrm>
+          <a:prstGeom prst="rect">
+            <a:avLst/>
+          </a:prstGeom>
+          <a:noFill/>
+          <a:ln w="57150">
+            <a:noFill/>
+          </a:ln>
+        </p:spPr>
+        <p:txBody>
+          <a:bodyPr wrap="square" rtlCol="0">
+            <a:spAutoFit/>
+          </a:bodyPr>
+          <a:lstStyle/>
+          <a:p>
+            <a:r>
+              <a:rPr lang="ko-KR" altLang="en-US" sz="2400" dirty="0">
+                <a:latin typeface="+mn-ea"/>
+              </a:rPr>
+              <a:t> 강지호</a:t>
+            </a:r>
+            <a:r>
+              <a:rPr lang="en-US" altLang="ko-KR" sz="2400" dirty="0">
+                <a:latin typeface="+mn-ea"/>
+              </a:rPr>
+              <a:t>: </a:t>
+            </a:r>
+            <a:r>
+              <a:rPr lang="ko-KR" altLang="ko-KR" sz="2400" dirty="0"/>
+              <a:t>VLA 모델 </a:t>
+            </a:r>
+            <a:r>
+              <a:rPr lang="ko-KR" altLang="ko-KR" sz="2400" dirty="0" err="1"/>
+              <a:t>구현·학습</a:t>
+            </a:r>
+            <a:r>
+              <a:rPr lang="ko-KR" altLang="ko-KR" sz="2400" dirty="0"/>
+              <a:t> 및 핵심 알고리즘 실험 진행</a:t>
+            </a:r>
+            <a:endParaRPr lang="en-US" altLang="ko-KR" sz="2400" dirty="0">
+              <a:latin typeface="+mn-ea"/>
+            </a:endParaRPr>
+          </a:p>
+          <a:p>
+            <a:r>
+              <a:rPr lang="ko-KR" altLang="en-US" sz="2400" dirty="0">
+                <a:latin typeface="+mn-ea"/>
+              </a:rPr>
+              <a:t> </a:t>
+            </a:r>
+            <a:r>
+              <a:rPr lang="ko-KR" altLang="en-US" sz="2400" dirty="0" err="1">
+                <a:latin typeface="+mn-ea"/>
+              </a:rPr>
+              <a:t>문병선</a:t>
+            </a:r>
+            <a:r>
+              <a:rPr lang="en-US" altLang="ko-KR" sz="2400" dirty="0">
+                <a:latin typeface="+mn-ea"/>
+              </a:rPr>
+              <a:t>: </a:t>
+            </a:r>
+            <a:r>
+              <a:rPr lang="ko-KR" altLang="ko-KR" sz="2400" dirty="0" err="1"/>
+              <a:t>OmniGibson</a:t>
+            </a:r>
+            <a:r>
+              <a:rPr lang="ko-KR" altLang="ko-KR" sz="2400" dirty="0"/>
+              <a:t> 평가 환경 </a:t>
+            </a:r>
+            <a:r>
+              <a:rPr lang="ko-KR" altLang="ko-KR" sz="2400" dirty="0" err="1"/>
+              <a:t>구축·영상</a:t>
+            </a:r>
+            <a:r>
+              <a:rPr lang="ko-KR" altLang="ko-KR" sz="2400" dirty="0"/>
+              <a:t> 생성 및 결과 정리</a:t>
+            </a:r>
+            <a:endParaRPr lang="en-US" altLang="ko-KR" sz="2400" dirty="0">
+              <a:latin typeface="+mn-ea"/>
+            </a:endParaRPr>
+          </a:p>
+        </p:txBody>
+      </p:sp>
+      <p:sp>
+        <p:nvSpPr>
+          <p:cNvPr id="27" name="TextBox 26">
+            <a:extLst>
+              <a:ext uri="{FF2B5EF4-FFF2-40B4-BE49-F238E27FC236}">
+                <a16:creationId xmlns:a16="http://schemas.microsoft.com/office/drawing/2014/main" id="{AD26A61D-12C0-0739-A1E6-47055D9A7D9B}"/>
+              </a:ext>
+            </a:extLst>
+          </p:cNvPr>
+          <p:cNvSpPr txBox="1"/>
+          <p:nvPr/>
+        </p:nvSpPr>
+        <p:spPr>
+          <a:xfrm>
+            <a:off x="514202" y="6169960"/>
+            <a:ext cx="10185952" cy="14773275"/>
+          </a:xfrm>
+          <a:prstGeom prst="rect">
+            <a:avLst/>
+          </a:prstGeom>
+          <a:noFill/>
+          <a:ln w="57150">
+            <a:solidFill>
+              <a:schemeClr val="accent4">
+                <a:lumMod val="50000"/>
+              </a:schemeClr>
+            </a:solidFill>
+          </a:ln>
+        </p:spPr>
+        <p:txBody>
+          <a:bodyPr wrap="square" rtlCol="0">
+            <a:spAutoFit/>
+          </a:bodyPr>
+          <a:lstStyle/>
+          <a:p>
+            <a:pPr algn="ctr"/>
+            <a:endParaRPr lang="en-US" altLang="ko-KR" sz="5400" b="1" dirty="0">
+              <a:latin typeface="+mn-ea"/>
+            </a:endParaRPr>
+          </a:p>
+          <a:p>
+            <a:pPr algn="ctr"/>
+            <a:endParaRPr lang="en-US" altLang="ko-KR" sz="3600" dirty="0">
+              <a:latin typeface="+mn-ea"/>
+            </a:endParaRPr>
+          </a:p>
+          <a:p>
+            <a:pPr algn="ctr"/>
+            <a:endParaRPr lang="en-US" altLang="ko-KR" sz="3600" dirty="0">
+              <a:latin typeface="+mn-ea"/>
+            </a:endParaRPr>
+          </a:p>
+          <a:p>
+            <a:pPr algn="ctr"/>
+            <a:endParaRPr lang="en-US" altLang="ko-KR" sz="3600" dirty="0">
+              <a:latin typeface="+mn-ea"/>
+            </a:endParaRPr>
+          </a:p>
+          <a:p>
+            <a:pPr algn="ctr"/>
+            <a:endParaRPr lang="en-US" altLang="ko-KR" sz="3600" dirty="0">
+              <a:latin typeface="+mn-ea"/>
+            </a:endParaRPr>
+          </a:p>
+          <a:p>
+            <a:pPr algn="ctr"/>
+            <a:endParaRPr lang="en-US" altLang="ko-KR" sz="3600" dirty="0">
+              <a:latin typeface="+mn-ea"/>
+            </a:endParaRPr>
+          </a:p>
+          <a:p>
+            <a:pPr algn="ctr"/>
+            <a:endParaRPr lang="en-US" altLang="ko-KR" sz="3600" dirty="0">
+              <a:latin typeface="+mn-ea"/>
+            </a:endParaRPr>
+          </a:p>
+          <a:p>
+            <a:pPr algn="ctr"/>
+            <a:endParaRPr lang="en-US" altLang="ko-KR" sz="3600" dirty="0">
+              <a:latin typeface="+mn-ea"/>
+            </a:endParaRPr>
+          </a:p>
+          <a:p>
+            <a:pPr algn="ctr"/>
+            <a:endParaRPr lang="en-US" altLang="ko-KR" sz="3600" dirty="0">
+              <a:latin typeface="+mn-ea"/>
+            </a:endParaRPr>
+          </a:p>
+          <a:p>
+            <a:pPr algn="ctr"/>
+            <a:endParaRPr lang="en-US" altLang="ko-KR" sz="3600" dirty="0">
+              <a:latin typeface="+mn-ea"/>
+            </a:endParaRPr>
+          </a:p>
+          <a:p>
+            <a:pPr algn="ctr"/>
+            <a:endParaRPr lang="en-US" altLang="ko-KR" sz="3600" dirty="0">
+              <a:latin typeface="+mn-ea"/>
+            </a:endParaRPr>
+          </a:p>
+          <a:p>
+            <a:pPr marL="342900" indent="-342900">
+              <a:buFont typeface="Arial" panose="020B0604020202020204" pitchFamily="34" charset="0"/>
+              <a:buChar char="•"/>
+            </a:pPr>
+            <a:r>
+              <a:rPr lang="en-US" altLang="ko-KR" sz="2400" b="1" dirty="0">
+                <a:latin typeface="+mn-ea"/>
+              </a:rPr>
+              <a:t>Model Architecture</a:t>
+            </a:r>
+          </a:p>
+          <a:p>
+            <a:r>
+              <a:rPr lang="en-US" altLang="ko-KR" sz="2400" dirty="0">
+                <a:latin typeface="+mn-ea"/>
+              </a:rPr>
+              <a:t> </a:t>
+            </a:r>
+            <a:r>
+              <a:rPr lang="en-US" altLang="ko-KR" sz="2400" b="1" dirty="0">
+                <a:latin typeface="+mn-ea"/>
+              </a:rPr>
+              <a:t>Backbone:</a:t>
+            </a:r>
+            <a:r>
+              <a:rPr lang="en-US" altLang="ko-KR" sz="2400" dirty="0">
+                <a:latin typeface="+mn-ea"/>
+              </a:rPr>
+              <a:t> </a:t>
+            </a:r>
+            <a:r>
+              <a:rPr lang="ko-KR" altLang="ko-KR" sz="2400" dirty="0" err="1">
+                <a:latin typeface="+mn-ea"/>
+              </a:rPr>
+              <a:t>OpenPI의</a:t>
+            </a:r>
+            <a:r>
+              <a:rPr lang="ko-KR" altLang="ko-KR" sz="2400" dirty="0">
+                <a:latin typeface="+mn-ea"/>
+              </a:rPr>
+              <a:t> Pi0.5 기반 구조(</a:t>
+            </a:r>
+            <a:r>
+              <a:rPr lang="ko-KR" altLang="ko-KR" sz="2400" dirty="0" err="1">
+                <a:latin typeface="+mn-ea"/>
+              </a:rPr>
+              <a:t>SigLIP</a:t>
+            </a:r>
+            <a:r>
+              <a:rPr lang="en-US" altLang="ko-KR" sz="2400" dirty="0">
+                <a:latin typeface="+mn-ea"/>
+              </a:rPr>
+              <a:t> </a:t>
+            </a:r>
+            <a:r>
+              <a:rPr lang="ko-KR" altLang="ko-KR" sz="2400" dirty="0">
+                <a:latin typeface="+mn-ea"/>
+              </a:rPr>
+              <a:t>+</a:t>
+            </a:r>
+            <a:r>
+              <a:rPr lang="en-US" altLang="ko-KR" sz="2400" dirty="0">
+                <a:latin typeface="+mn-ea"/>
+              </a:rPr>
+              <a:t> </a:t>
+            </a:r>
+            <a:r>
+              <a:rPr lang="ko-KR" altLang="ko-KR" sz="2400" dirty="0" err="1">
+                <a:latin typeface="+mn-ea"/>
+              </a:rPr>
+              <a:t>PaliGemma</a:t>
+            </a:r>
+            <a:r>
+              <a:rPr lang="en-US" altLang="ko-KR" sz="2400" dirty="0">
+                <a:latin typeface="+mn-ea"/>
+              </a:rPr>
+              <a:t> + </a:t>
+            </a:r>
+            <a:r>
+              <a:rPr lang="ko-KR" altLang="ko-KR" sz="2400" dirty="0" err="1">
+                <a:latin typeface="+mn-ea"/>
+              </a:rPr>
+              <a:t>Flow</a:t>
+            </a:r>
+            <a:r>
+              <a:rPr lang="en-US" altLang="ko-KR" sz="2400" dirty="0">
+                <a:latin typeface="+mn-ea"/>
+              </a:rPr>
+              <a:t> </a:t>
+            </a:r>
+            <a:r>
+              <a:rPr lang="ko-KR" altLang="ko-KR" sz="2400" dirty="0" err="1">
+                <a:latin typeface="+mn-ea"/>
+              </a:rPr>
+              <a:t>Matching</a:t>
+            </a:r>
+            <a:r>
+              <a:rPr lang="en-US" altLang="ko-KR" sz="2400" dirty="0">
+                <a:latin typeface="+mn-ea"/>
+              </a:rPr>
+              <a:t> </a:t>
+            </a:r>
+            <a:r>
+              <a:rPr lang="ko-KR" altLang="ko-KR" sz="2400" dirty="0" err="1">
+                <a:latin typeface="+mn-ea"/>
+              </a:rPr>
+              <a:t>Action</a:t>
+            </a:r>
+            <a:r>
+              <a:rPr lang="ko-KR" altLang="ko-KR" sz="2400" dirty="0">
+                <a:latin typeface="+mn-ea"/>
+              </a:rPr>
+              <a:t> </a:t>
+            </a:r>
+            <a:r>
+              <a:rPr lang="ko-KR" altLang="ko-KR" sz="2400" dirty="0" err="1">
+                <a:latin typeface="+mn-ea"/>
+              </a:rPr>
+              <a:t>Expert</a:t>
+            </a:r>
+            <a:r>
+              <a:rPr lang="ko-KR" altLang="ko-KR" sz="2400" dirty="0">
+                <a:latin typeface="+mn-ea"/>
+              </a:rPr>
+              <a:t>)</a:t>
+            </a:r>
+            <a:endParaRPr lang="en-US" altLang="ko-KR" sz="2400" dirty="0">
+              <a:latin typeface="+mn-ea"/>
+            </a:endParaRPr>
+          </a:p>
+          <a:p>
+            <a:endParaRPr lang="en-US" altLang="ko-KR" sz="2400" dirty="0">
+              <a:latin typeface="+mn-ea"/>
+            </a:endParaRPr>
+          </a:p>
+          <a:p>
+            <a:r>
+              <a:rPr lang="en-US" altLang="ko-KR" sz="2400" b="1" dirty="0">
+                <a:latin typeface="+mn-ea"/>
+              </a:rPr>
+              <a:t> System 2 Stage Tracking</a:t>
+            </a:r>
+            <a:endParaRPr lang="en-US" altLang="ko-KR" sz="2400" dirty="0">
+              <a:latin typeface="+mn-ea"/>
+            </a:endParaRPr>
+          </a:p>
+          <a:p>
+            <a:r>
+              <a:rPr lang="en-US" altLang="ko-KR" sz="2400" b="1" dirty="0">
+                <a:latin typeface="+mn-ea"/>
+              </a:rPr>
+              <a:t> Task Embedding</a:t>
+            </a:r>
+            <a:endParaRPr lang="en-US" altLang="ko-KR" sz="2400" dirty="0">
+              <a:latin typeface="+mn-ea"/>
+            </a:endParaRPr>
+          </a:p>
+          <a:p>
+            <a:r>
+              <a:rPr lang="en-US" altLang="ko-KR" sz="2400" b="1" dirty="0">
+                <a:latin typeface="+mn-ea"/>
+              </a:rPr>
+              <a:t> FAST Auxiliary</a:t>
+            </a:r>
+            <a:endParaRPr lang="en-US" altLang="ko-KR" sz="2400" dirty="0">
+              <a:latin typeface="+mn-ea"/>
+            </a:endParaRPr>
+          </a:p>
+          <a:p>
+            <a:r>
+              <a:rPr lang="en-US" altLang="ko-KR" sz="2400" b="1" dirty="0">
+                <a:latin typeface="+mn-ea"/>
+              </a:rPr>
+              <a:t> Correlated Noise</a:t>
+            </a:r>
+            <a:endParaRPr lang="en-US" altLang="ko-KR" sz="2400" dirty="0">
+              <a:latin typeface="+mn-ea"/>
+            </a:endParaRPr>
+          </a:p>
+          <a:p>
+            <a:r>
+              <a:rPr lang="en-US" altLang="ko-KR" sz="2400" b="1" dirty="0">
+                <a:latin typeface="+mn-ea"/>
+              </a:rPr>
+              <a:t> KV Transform</a:t>
+            </a:r>
+          </a:p>
+          <a:p>
+            <a:r>
+              <a:rPr lang="en-US" altLang="ko-KR" sz="2400" b="1" dirty="0">
+                <a:latin typeface="+mn-ea"/>
+              </a:rPr>
+              <a:t> Custom Attention Masks</a:t>
+            </a:r>
+          </a:p>
+          <a:p>
+            <a:endParaRPr lang="en-US" altLang="ko-KR" sz="2400" b="1" dirty="0">
+              <a:latin typeface="+mn-ea"/>
+            </a:endParaRPr>
+          </a:p>
+          <a:p>
+            <a:endParaRPr lang="en-US" altLang="ko-KR" sz="2400" b="1" dirty="0">
+              <a:latin typeface="+mn-ea"/>
+            </a:endParaRPr>
+          </a:p>
+          <a:p>
+            <a:endParaRPr lang="en-US" altLang="ko-KR" sz="2400" b="1" dirty="0">
+              <a:latin typeface="+mn-ea"/>
+            </a:endParaRPr>
+          </a:p>
+          <a:p>
+            <a:endParaRPr lang="en-US" altLang="ko-KR" sz="2400" b="1" dirty="0">
+              <a:latin typeface="+mn-ea"/>
+            </a:endParaRPr>
+          </a:p>
+          <a:p>
+            <a:endParaRPr lang="en-US" altLang="ko-KR" sz="2400" b="1" dirty="0">
+              <a:latin typeface="+mn-ea"/>
+            </a:endParaRPr>
+          </a:p>
+          <a:p>
+            <a:endParaRPr lang="en-US" altLang="ko-KR" sz="2400" b="1" dirty="0">
+              <a:latin typeface="+mn-ea"/>
+            </a:endParaRPr>
+          </a:p>
+          <a:p>
+            <a:endParaRPr lang="en-US" altLang="ko-KR" sz="2400" b="1" dirty="0">
+              <a:latin typeface="+mn-ea"/>
+            </a:endParaRPr>
+          </a:p>
+          <a:p>
+            <a:endParaRPr lang="en-US" altLang="ko-KR" sz="2400" b="1" dirty="0">
+              <a:latin typeface="+mn-ea"/>
+            </a:endParaRPr>
+          </a:p>
+          <a:p>
+            <a:endParaRPr lang="en-US" altLang="ko-KR" sz="2400" b="1" dirty="0">
+              <a:latin typeface="+mn-ea"/>
+            </a:endParaRPr>
+          </a:p>
+          <a:p>
+            <a:endParaRPr lang="en-US" altLang="ko-KR" sz="2400" b="1" dirty="0">
+              <a:latin typeface="+mn-ea"/>
+            </a:endParaRPr>
+          </a:p>
+          <a:p>
+            <a:endParaRPr lang="en-US" altLang="ko-KR" sz="3600" b="1" dirty="0">
+              <a:latin typeface="+mn-ea"/>
+            </a:endParaRPr>
+          </a:p>
+        </p:txBody>
+      </p:sp>
+      <p:sp>
+        <p:nvSpPr>
+          <p:cNvPr id="28" name="TextBox 27">
+            <a:extLst>
+              <a:ext uri="{FF2B5EF4-FFF2-40B4-BE49-F238E27FC236}">
+                <a16:creationId xmlns:a16="http://schemas.microsoft.com/office/drawing/2014/main" id="{FA8B75AA-D85E-C3A4-7671-DD508ADE16BA}"/>
+              </a:ext>
+            </a:extLst>
+          </p:cNvPr>
+          <p:cNvSpPr txBox="1"/>
+          <p:nvPr/>
+        </p:nvSpPr>
+        <p:spPr>
+          <a:xfrm>
+            <a:off x="530855" y="6169960"/>
+            <a:ext cx="4019006" cy="646331"/>
+          </a:xfrm>
+          <a:prstGeom prst="rect">
+            <a:avLst/>
+          </a:prstGeom>
+          <a:gradFill flip="none" rotWithShape="1">
+            <a:gsLst>
+              <a:gs pos="0">
+                <a:schemeClr val="accent4">
+                  <a:shade val="30000"/>
+                  <a:satMod val="115000"/>
+                  <a:lumMod val="48000"/>
+                  <a:alpha val="95000"/>
+                </a:schemeClr>
+              </a:gs>
+              <a:gs pos="50000">
+                <a:schemeClr val="accent4">
+                  <a:lumMod val="50000"/>
+                  <a:shade val="67500"/>
+                  <a:satMod val="115000"/>
+                </a:schemeClr>
+              </a:gs>
+              <a:gs pos="100000">
+                <a:schemeClr val="accent4">
+                  <a:lumMod val="50000"/>
+                  <a:shade val="100000"/>
+                  <a:satMod val="115000"/>
+                </a:schemeClr>
+              </a:gs>
+            </a:gsLst>
+            <a:path path="rect">
+              <a:fillToRect l="50000" t="50000" r="50000" b="50000"/>
+            </a:path>
+            <a:tileRect/>
+          </a:gradFill>
+          <a:ln w="57150">
+            <a:solidFill>
+              <a:schemeClr val="accent4">
+                <a:lumMod val="50000"/>
+              </a:schemeClr>
+            </a:solidFill>
+          </a:ln>
+        </p:spPr>
+        <p:txBody>
+          <a:bodyPr wrap="square" rtlCol="0">
+            <a:spAutoFit/>
+          </a:bodyPr>
+          <a:lstStyle/>
+          <a:p>
+            <a:pPr algn="ctr"/>
+            <a:r>
+              <a:rPr lang="ko-KR" altLang="en-US" sz="3600" b="1" dirty="0">
+                <a:solidFill>
+                  <a:schemeClr val="bg1"/>
+                </a:solidFill>
+                <a:latin typeface="+mn-ea"/>
+              </a:rPr>
+              <a:t>모델 구조</a:t>
+            </a:r>
+          </a:p>
+        </p:txBody>
+      </p:sp>
       <p:grpSp>
         <p:nvGrpSpPr>
           <p:cNvPr id="29" name="그룹 28">
@@ -3423,10 +4900,10 @@
         </p:nvGrpSpPr>
         <p:grpSpPr>
           <a:xfrm>
-            <a:off x="10705017" y="7916913"/>
-            <a:ext cx="10180800" cy="8658000"/>
+            <a:off x="10697906" y="8534723"/>
+            <a:ext cx="10169825" cy="10895290"/>
             <a:chOff x="530719" y="2641752"/>
-            <a:chExt cx="10169298" cy="8679299"/>
+            <a:chExt cx="10169298" cy="10895290"/>
           </a:xfrm>
         </p:grpSpPr>
         <p:sp>
@@ -3444,7 +4921,7 @@
           <p:spPr>
             <a:xfrm>
               <a:off x="530719" y="2641752"/>
-              <a:ext cx="10169298" cy="8679299"/>
+              <a:ext cx="10169298" cy="10895290"/>
             </a:xfrm>
             <a:prstGeom prst="rect">
               <a:avLst/>
@@ -3466,6 +4943,30 @@
             <a:p>
               <a:pPr algn="ctr"/>
               <a:endParaRPr lang="en-US" altLang="ko-KR" sz="5400" b="1" dirty="0">
+                <a:latin typeface="+mn-ea"/>
+              </a:endParaRPr>
+            </a:p>
+            <a:p>
+              <a:pPr algn="ctr"/>
+              <a:endParaRPr lang="en-US" altLang="ko-KR" sz="3600" dirty="0">
+                <a:latin typeface="+mn-ea"/>
+              </a:endParaRPr>
+            </a:p>
+            <a:p>
+              <a:pPr algn="ctr"/>
+              <a:endParaRPr lang="en-US" altLang="ko-KR" sz="3600" dirty="0">
+                <a:latin typeface="+mn-ea"/>
+              </a:endParaRPr>
+            </a:p>
+            <a:p>
+              <a:pPr algn="ctr"/>
+              <a:endParaRPr lang="en-US" altLang="ko-KR" sz="3600" dirty="0">
+                <a:latin typeface="+mn-ea"/>
+              </a:endParaRPr>
+            </a:p>
+            <a:p>
+              <a:pPr algn="ctr"/>
+              <a:endParaRPr lang="en-US" altLang="ko-KR" sz="3600" dirty="0">
                 <a:latin typeface="+mn-ea"/>
               </a:endParaRPr>
             </a:p>
@@ -3632,1790 +5133,6 @@
           </p:txBody>
         </p:sp>
       </p:grpSp>
-      <p:sp>
-        <p:nvSpPr>
-          <p:cNvPr id="2" name="TextBox 1">
-            <a:extLst>
-              <a:ext uri="{FF2B5EF4-FFF2-40B4-BE49-F238E27FC236}">
-                <a16:creationId xmlns:a16="http://schemas.microsoft.com/office/drawing/2014/main" id="{DD04E150-3344-E153-815A-D2847E49875B}"/>
-              </a:ext>
-            </a:extLst>
-          </p:cNvPr>
-          <p:cNvSpPr txBox="1"/>
-          <p:nvPr/>
-        </p:nvSpPr>
-        <p:spPr>
-          <a:xfrm>
-            <a:off x="526514" y="6173468"/>
-            <a:ext cx="10180800" cy="5293757"/>
-          </a:xfrm>
-          <a:prstGeom prst="rect">
-            <a:avLst/>
-          </a:prstGeom>
-          <a:noFill/>
-          <a:ln w="57150">
-            <a:solidFill>
-              <a:schemeClr val="accent4">
-                <a:lumMod val="50000"/>
-              </a:schemeClr>
-            </a:solidFill>
-          </a:ln>
-        </p:spPr>
-        <p:txBody>
-          <a:bodyPr wrap="square" rtlCol="0">
-            <a:spAutoFit/>
-          </a:bodyPr>
-          <a:lstStyle/>
-          <a:p>
-            <a:pPr algn="ctr"/>
-            <a:endParaRPr lang="en-US" altLang="ko-KR" sz="5400" b="1" dirty="0">
-              <a:latin typeface="+mn-ea"/>
-            </a:endParaRPr>
-          </a:p>
-          <a:p>
-            <a:pPr algn="ctr"/>
-            <a:r>
-              <a:rPr lang="ko-KR" altLang="ko-KR" sz="2400" dirty="0" err="1"/>
-              <a:t>OmniGibson</a:t>
-            </a:r>
-            <a:r>
-              <a:rPr lang="ko-KR" altLang="ko-KR" sz="2400" dirty="0"/>
-              <a:t> 기반 가정환경 시뮬레이션 벤치마크로, 로봇의 장기 작업 </a:t>
-            </a:r>
-            <a:r>
-              <a:rPr lang="ko-KR" altLang="ko-KR" sz="2400" dirty="0" err="1"/>
-              <a:t>수행·이동·양팔</a:t>
-            </a:r>
-            <a:r>
-              <a:rPr lang="ko-KR" altLang="ko-KR" sz="2400" dirty="0"/>
-              <a:t> </a:t>
-            </a:r>
-            <a:r>
-              <a:rPr lang="ko-KR" altLang="ko-KR" sz="2400" dirty="0" err="1"/>
-              <a:t>조작·물체</a:t>
-            </a:r>
-            <a:r>
-              <a:rPr lang="ko-KR" altLang="ko-KR" sz="2400" dirty="0"/>
-              <a:t> 상호작용 능력을 평가하는 데이터셋 및 환경</a:t>
-            </a:r>
-            <a:endParaRPr lang="en-US" altLang="ko-KR" sz="2400" dirty="0">
-              <a:latin typeface="+mn-ea"/>
-            </a:endParaRPr>
-          </a:p>
-          <a:p>
-            <a:pPr algn="ctr"/>
-            <a:endParaRPr lang="en-US" altLang="ko-KR" sz="3600" dirty="0">
-              <a:latin typeface="+mn-ea"/>
-            </a:endParaRPr>
-          </a:p>
-          <a:p>
-            <a:pPr algn="ctr"/>
-            <a:endParaRPr lang="en-US" altLang="ko-KR" sz="3200" dirty="0">
-              <a:latin typeface="+mn-ea"/>
-            </a:endParaRPr>
-          </a:p>
-          <a:p>
-            <a:pPr algn="ctr"/>
-            <a:endParaRPr lang="en-US" altLang="ko-KR" sz="2000" dirty="0">
-              <a:latin typeface="+mn-ea"/>
-            </a:endParaRPr>
-          </a:p>
-          <a:p>
-            <a:pPr algn="ctr"/>
-            <a:endParaRPr lang="en-US" altLang="ko-KR" sz="3600" dirty="0">
-              <a:latin typeface="+mn-ea"/>
-            </a:endParaRPr>
-          </a:p>
-          <a:p>
-            <a:pPr algn="ctr"/>
-            <a:endParaRPr lang="en-US" altLang="ko-KR" sz="3600" dirty="0">
-              <a:latin typeface="+mn-ea"/>
-            </a:endParaRPr>
-          </a:p>
-          <a:p>
-            <a:pPr algn="ctr"/>
-            <a:endParaRPr lang="en-US" altLang="ko-KR" sz="3600" dirty="0">
-              <a:latin typeface="+mn-ea"/>
-            </a:endParaRPr>
-          </a:p>
-          <a:p>
-            <a:pPr algn="ctr"/>
-            <a:endParaRPr lang="en-US" altLang="ko-KR" sz="3600" dirty="0">
-              <a:latin typeface="+mn-ea"/>
-            </a:endParaRPr>
-          </a:p>
-        </p:txBody>
-      </p:sp>
-      <p:pic>
-        <p:nvPicPr>
-          <p:cNvPr id="70" name="그림 69">
-            <a:extLst>
-              <a:ext uri="{FF2B5EF4-FFF2-40B4-BE49-F238E27FC236}">
-                <a16:creationId xmlns:a16="http://schemas.microsoft.com/office/drawing/2014/main" id="{960D056F-BB26-F74E-8730-70D872199D00}"/>
-              </a:ext>
-            </a:extLst>
-          </p:cNvPr>
-          <p:cNvPicPr>
-            <a:picLocks noChangeAspect="1"/>
-          </p:cNvPicPr>
-          <p:nvPr/>
-        </p:nvPicPr>
-        <p:blipFill>
-          <a:blip r:embed="rId3"/>
-          <a:stretch>
-            <a:fillRect/>
-          </a:stretch>
-        </p:blipFill>
-        <p:spPr>
-          <a:xfrm>
-            <a:off x="10844213" y="8738894"/>
-            <a:ext cx="9882248" cy="3722346"/>
-          </a:xfrm>
-          <a:prstGeom prst="rect">
-            <a:avLst/>
-          </a:prstGeom>
-        </p:spPr>
-      </p:pic>
-      <p:sp>
-        <p:nvSpPr>
-          <p:cNvPr id="4" name="TextBox 3">
-            <a:extLst>
-              <a:ext uri="{FF2B5EF4-FFF2-40B4-BE49-F238E27FC236}">
-                <a16:creationId xmlns:a16="http://schemas.microsoft.com/office/drawing/2014/main" id="{F837C99B-9CE4-13DD-7E3A-61A600B1E6F9}"/>
-              </a:ext>
-            </a:extLst>
-          </p:cNvPr>
-          <p:cNvSpPr txBox="1"/>
-          <p:nvPr/>
-        </p:nvSpPr>
-        <p:spPr>
-          <a:xfrm>
-            <a:off x="522513" y="436991"/>
-            <a:ext cx="20338596" cy="1015663"/>
-          </a:xfrm>
-          <a:prstGeom prst="rect">
-            <a:avLst/>
-          </a:prstGeom>
-          <a:noFill/>
-        </p:spPr>
-        <p:txBody>
-          <a:bodyPr wrap="square" rtlCol="0">
-            <a:spAutoFit/>
-          </a:bodyPr>
-          <a:lstStyle/>
-          <a:p>
-            <a:pPr algn="ctr"/>
-            <a:r>
-              <a:rPr lang="en-US" altLang="ko-KR" sz="6000" b="1" dirty="0"/>
-              <a:t>BEHAVIOR-1K </a:t>
-            </a:r>
-            <a:r>
-              <a:rPr lang="ko-KR" altLang="en-US" sz="6000" b="1" dirty="0"/>
-              <a:t>기반 양팔 로봇 정책 학습</a:t>
-            </a:r>
-            <a:endParaRPr lang="ko-KR" altLang="en-US" sz="5400" b="1" dirty="0"/>
-          </a:p>
-        </p:txBody>
-      </p:sp>
-      <p:sp>
-        <p:nvSpPr>
-          <p:cNvPr id="5" name="TextBox 4">
-            <a:extLst>
-              <a:ext uri="{FF2B5EF4-FFF2-40B4-BE49-F238E27FC236}">
-                <a16:creationId xmlns:a16="http://schemas.microsoft.com/office/drawing/2014/main" id="{3EA791E0-6CF5-D63E-BD9E-794012C4381A}"/>
-              </a:ext>
-            </a:extLst>
-          </p:cNvPr>
-          <p:cNvSpPr txBox="1"/>
-          <p:nvPr/>
-        </p:nvSpPr>
-        <p:spPr>
-          <a:xfrm>
-            <a:off x="525846" y="1767279"/>
-            <a:ext cx="10179301" cy="830997"/>
-          </a:xfrm>
-          <a:prstGeom prst="rect">
-            <a:avLst/>
-          </a:prstGeom>
-          <a:noFill/>
-          <a:ln w="57150">
-            <a:solidFill>
-              <a:schemeClr val="accent4">
-                <a:lumMod val="50000"/>
-              </a:schemeClr>
-            </a:solidFill>
-          </a:ln>
-        </p:spPr>
-        <p:txBody>
-          <a:bodyPr wrap="square" rtlCol="0">
-            <a:spAutoFit/>
-          </a:bodyPr>
-          <a:lstStyle/>
-          <a:p>
-            <a:pPr algn="ctr"/>
-            <a:r>
-              <a:rPr lang="ko-KR" altLang="en-US" sz="4800" b="1" dirty="0">
-                <a:latin typeface="+mn-ea"/>
-              </a:rPr>
-              <a:t>지도 교수님</a:t>
-            </a:r>
-            <a:r>
-              <a:rPr lang="en-US" altLang="ko-KR" sz="4800" b="1" dirty="0">
-                <a:latin typeface="+mn-ea"/>
-              </a:rPr>
-              <a:t>: </a:t>
-            </a:r>
-            <a:r>
-              <a:rPr lang="ko-KR" altLang="en-US" sz="4800" b="1" dirty="0" err="1">
-                <a:latin typeface="+mn-ea"/>
-              </a:rPr>
-              <a:t>하종은</a:t>
-            </a:r>
-            <a:r>
-              <a:rPr lang="ko-KR" altLang="en-US" sz="4800" b="1" dirty="0">
-                <a:latin typeface="+mn-ea"/>
-              </a:rPr>
-              <a:t> 교수님</a:t>
-            </a:r>
-          </a:p>
-        </p:txBody>
-      </p:sp>
-      <p:sp>
-        <p:nvSpPr>
-          <p:cNvPr id="6" name="TextBox 5">
-            <a:extLst>
-              <a:ext uri="{FF2B5EF4-FFF2-40B4-BE49-F238E27FC236}">
-                <a16:creationId xmlns:a16="http://schemas.microsoft.com/office/drawing/2014/main" id="{28CC29D6-F5C9-1FEE-2470-ECFA1AD996C6}"/>
-              </a:ext>
-            </a:extLst>
-          </p:cNvPr>
-          <p:cNvSpPr txBox="1"/>
-          <p:nvPr/>
-        </p:nvSpPr>
-        <p:spPr>
-          <a:xfrm>
-            <a:off x="10705529" y="1767279"/>
-            <a:ext cx="10180800" cy="830997"/>
-          </a:xfrm>
-          <a:prstGeom prst="rect">
-            <a:avLst/>
-          </a:prstGeom>
-          <a:noFill/>
-          <a:ln w="57150">
-            <a:solidFill>
-              <a:schemeClr val="accent4">
-                <a:lumMod val="50000"/>
-              </a:schemeClr>
-            </a:solidFill>
-          </a:ln>
-        </p:spPr>
-        <p:txBody>
-          <a:bodyPr wrap="square" rtlCol="0">
-            <a:spAutoFit/>
-          </a:bodyPr>
-          <a:lstStyle/>
-          <a:p>
-            <a:pPr algn="ctr"/>
-            <a:r>
-              <a:rPr lang="ko-KR" altLang="en-US" sz="4800" b="1" dirty="0">
-                <a:latin typeface="+mn-ea"/>
-              </a:rPr>
-              <a:t>조원</a:t>
-            </a:r>
-            <a:r>
-              <a:rPr lang="en-US" altLang="ko-KR" sz="4800" b="1" dirty="0">
-                <a:latin typeface="+mn-ea"/>
-              </a:rPr>
-              <a:t>: </a:t>
-            </a:r>
-            <a:r>
-              <a:rPr lang="ko-KR" altLang="en-US" sz="4800" b="1" dirty="0">
-                <a:latin typeface="+mn-ea"/>
-              </a:rPr>
-              <a:t>강지호</a:t>
-            </a:r>
-            <a:r>
-              <a:rPr lang="en-US" altLang="ko-KR" sz="4800" b="1" dirty="0">
-                <a:latin typeface="+mn-ea"/>
-              </a:rPr>
-              <a:t>, </a:t>
-            </a:r>
-            <a:r>
-              <a:rPr lang="ko-KR" altLang="en-US" sz="4800" b="1" dirty="0" err="1">
-                <a:latin typeface="+mn-ea"/>
-              </a:rPr>
-              <a:t>문병선</a:t>
-            </a:r>
-            <a:endParaRPr lang="ko-KR" altLang="en-US" sz="4800" b="1" dirty="0">
-              <a:latin typeface="+mn-ea"/>
-            </a:endParaRPr>
-          </a:p>
-        </p:txBody>
-      </p:sp>
-      <p:sp>
-        <p:nvSpPr>
-          <p:cNvPr id="7" name="TextBox 6">
-            <a:extLst>
-              <a:ext uri="{FF2B5EF4-FFF2-40B4-BE49-F238E27FC236}">
-                <a16:creationId xmlns:a16="http://schemas.microsoft.com/office/drawing/2014/main" id="{ACF21E68-84F7-27E5-88B3-AD831848791A}"/>
-              </a:ext>
-            </a:extLst>
-          </p:cNvPr>
-          <p:cNvSpPr txBox="1"/>
-          <p:nvPr/>
-        </p:nvSpPr>
-        <p:spPr>
-          <a:xfrm>
-            <a:off x="526393" y="2598276"/>
-            <a:ext cx="10180800" cy="3570208"/>
-          </a:xfrm>
-          <a:prstGeom prst="rect">
-            <a:avLst/>
-          </a:prstGeom>
-          <a:noFill/>
-          <a:ln w="57150">
-            <a:solidFill>
-              <a:schemeClr val="accent4">
-                <a:lumMod val="50000"/>
-              </a:schemeClr>
-            </a:solidFill>
-          </a:ln>
-        </p:spPr>
-        <p:txBody>
-          <a:bodyPr wrap="square" rtlCol="0">
-            <a:spAutoFit/>
-          </a:bodyPr>
-          <a:lstStyle/>
-          <a:p>
-            <a:pPr algn="ctr"/>
-            <a:endParaRPr lang="en-US" altLang="ko-KR" sz="5400" b="1" dirty="0">
-              <a:latin typeface="+mn-ea"/>
-            </a:endParaRPr>
-          </a:p>
-          <a:p>
-            <a:pPr marL="342900" indent="-342900" algn="ctr">
-              <a:buFont typeface="Arial" panose="020B0604020202020204" pitchFamily="34" charset="0"/>
-              <a:buChar char="•"/>
-            </a:pPr>
-            <a:r>
-              <a:rPr lang="en-US" altLang="ko-KR" sz="2400" dirty="0">
-                <a:latin typeface="+mn-ea"/>
-              </a:rPr>
-              <a:t>BEHAVIOR-1K </a:t>
-            </a:r>
-            <a:r>
-              <a:rPr lang="ko-KR" altLang="en-US" sz="2400" dirty="0">
-                <a:latin typeface="+mn-ea"/>
-              </a:rPr>
-              <a:t>환경에서 </a:t>
-            </a:r>
-            <a:r>
-              <a:rPr lang="en-US" altLang="ko-KR" sz="2400" dirty="0">
-                <a:latin typeface="+mn-ea"/>
-              </a:rPr>
-              <a:t>Vision-Language-Action </a:t>
-            </a:r>
-            <a:r>
-              <a:rPr lang="ko-KR" altLang="en-US" sz="2400" dirty="0">
-                <a:latin typeface="+mn-ea"/>
-              </a:rPr>
-              <a:t>기반 양팔 로봇 조작 정책을 구현하고 평가</a:t>
-            </a:r>
-            <a:endParaRPr lang="en-US" altLang="ko-KR" sz="2400" dirty="0">
-              <a:latin typeface="+mn-ea"/>
-            </a:endParaRPr>
-          </a:p>
-          <a:p>
-            <a:pPr marL="285750" indent="-285750" algn="ctr">
-              <a:buFont typeface="Arial" panose="020B0604020202020204" pitchFamily="34" charset="0"/>
-              <a:buChar char="•"/>
-            </a:pPr>
-            <a:endParaRPr lang="en-US" altLang="ko-KR" dirty="0"/>
-          </a:p>
-          <a:p>
-            <a:pPr marL="342900" indent="-342900" algn="ctr">
-              <a:buFont typeface="Arial" panose="020B0604020202020204" pitchFamily="34" charset="0"/>
-              <a:buChar char="•"/>
-            </a:pPr>
-            <a:r>
-              <a:rPr lang="ko-KR" altLang="ko-KR" sz="2400" dirty="0"/>
-              <a:t>Pi0.5 기반 모델을 활용하여 장기 시퀀스 작업 수행 성능을 분석하고, </a:t>
-            </a:r>
-            <a:r>
-              <a:rPr lang="ko-KR" altLang="ko-KR" sz="2400" dirty="0" err="1"/>
-              <a:t>Flow</a:t>
-            </a:r>
-            <a:r>
-              <a:rPr lang="ko-KR" altLang="ko-KR" sz="2400" dirty="0"/>
-              <a:t> </a:t>
-            </a:r>
-            <a:r>
-              <a:rPr lang="ko-KR" altLang="ko-KR" sz="2400" dirty="0" err="1"/>
-              <a:t>Matching</a:t>
-            </a:r>
-            <a:r>
-              <a:rPr lang="ko-KR" altLang="ko-KR" sz="2400" dirty="0"/>
-              <a:t> 기반 정책 학습 구조를 적용</a:t>
-            </a:r>
-            <a:endParaRPr lang="en-US" altLang="ko-KR" sz="2400" dirty="0"/>
-          </a:p>
-          <a:p>
-            <a:pPr marL="342900" indent="-342900" algn="ctr">
-              <a:buFont typeface="Arial" panose="020B0604020202020204" pitchFamily="34" charset="0"/>
-              <a:buChar char="•"/>
-            </a:pPr>
-            <a:endParaRPr lang="en-US" altLang="ko-KR" dirty="0"/>
-          </a:p>
-          <a:p>
-            <a:pPr marL="342900" indent="-342900" algn="ctr">
-              <a:buFont typeface="Arial" panose="020B0604020202020204" pitchFamily="34" charset="0"/>
-              <a:buChar char="•"/>
-            </a:pPr>
-            <a:r>
-              <a:rPr lang="ko-KR" altLang="ko-KR" sz="2400" dirty="0" err="1"/>
-              <a:t>OmniGibson</a:t>
-            </a:r>
-            <a:r>
-              <a:rPr lang="ko-KR" altLang="ko-KR" sz="2400" dirty="0"/>
-              <a:t> 환경에서 다양한 작업 수행 결과를 통해 모델의 실효성 검증</a:t>
-            </a:r>
-            <a:endParaRPr lang="en-US" altLang="ko-KR" sz="2400" dirty="0"/>
-          </a:p>
-          <a:p>
-            <a:pPr algn="ctr"/>
-            <a:endParaRPr lang="en-US" altLang="ko-KR" sz="1600" dirty="0"/>
-          </a:p>
-        </p:txBody>
-      </p:sp>
-      <p:sp>
-        <p:nvSpPr>
-          <p:cNvPr id="8" name="TextBox 7">
-            <a:extLst>
-              <a:ext uri="{FF2B5EF4-FFF2-40B4-BE49-F238E27FC236}">
-                <a16:creationId xmlns:a16="http://schemas.microsoft.com/office/drawing/2014/main" id="{2E8A191C-5F83-480C-7015-4DA81E72DAFF}"/>
-              </a:ext>
-            </a:extLst>
-          </p:cNvPr>
-          <p:cNvSpPr txBox="1"/>
-          <p:nvPr/>
-        </p:nvSpPr>
-        <p:spPr>
-          <a:xfrm>
-            <a:off x="542326" y="2598276"/>
-            <a:ext cx="4019006" cy="646331"/>
-          </a:xfrm>
-          <a:prstGeom prst="rect">
-            <a:avLst/>
-          </a:prstGeom>
-          <a:gradFill>
-            <a:gsLst>
-              <a:gs pos="0">
-                <a:schemeClr val="accent4">
-                  <a:shade val="30000"/>
-                  <a:satMod val="115000"/>
-                  <a:lumMod val="48000"/>
-                  <a:alpha val="95000"/>
-                </a:schemeClr>
-              </a:gs>
-              <a:gs pos="50000">
-                <a:schemeClr val="accent4">
-                  <a:lumMod val="50000"/>
-                  <a:shade val="67500"/>
-                  <a:satMod val="115000"/>
-                </a:schemeClr>
-              </a:gs>
-              <a:gs pos="100000">
-                <a:schemeClr val="accent4">
-                  <a:lumMod val="50000"/>
-                  <a:shade val="100000"/>
-                  <a:satMod val="115000"/>
-                </a:schemeClr>
-              </a:gs>
-            </a:gsLst>
-            <a:path path="rect">
-              <a:fillToRect l="50000" t="50000" r="50000" b="50000"/>
-            </a:path>
-          </a:gradFill>
-          <a:ln w="57150">
-            <a:solidFill>
-              <a:schemeClr val="accent4">
-                <a:lumMod val="50000"/>
-              </a:schemeClr>
-            </a:solidFill>
-          </a:ln>
-        </p:spPr>
-        <p:txBody>
-          <a:bodyPr wrap="square" rtlCol="0">
-            <a:spAutoFit/>
-          </a:bodyPr>
-          <a:lstStyle/>
-          <a:p>
-            <a:pPr algn="ctr"/>
-            <a:r>
-              <a:rPr lang="ko-KR" altLang="en-US" sz="3600" b="1" dirty="0">
-                <a:solidFill>
-                  <a:schemeClr val="bg1"/>
-                </a:solidFill>
-                <a:latin typeface="+mn-ea"/>
-              </a:rPr>
-              <a:t>연구 목적</a:t>
-            </a:r>
-          </a:p>
-        </p:txBody>
-      </p:sp>
-      <p:sp>
-        <p:nvSpPr>
-          <p:cNvPr id="11" name="TextBox 10">
-            <a:extLst>
-              <a:ext uri="{FF2B5EF4-FFF2-40B4-BE49-F238E27FC236}">
-                <a16:creationId xmlns:a16="http://schemas.microsoft.com/office/drawing/2014/main" id="{3836297D-C66E-2FF3-A2C5-91FB5F095DDA}"/>
-              </a:ext>
-            </a:extLst>
-          </p:cNvPr>
-          <p:cNvSpPr txBox="1"/>
-          <p:nvPr/>
-        </p:nvSpPr>
-        <p:spPr>
-          <a:xfrm>
-            <a:off x="10705820" y="2588074"/>
-            <a:ext cx="10180800" cy="5324535"/>
-          </a:xfrm>
-          <a:prstGeom prst="rect">
-            <a:avLst/>
-          </a:prstGeom>
-          <a:noFill/>
-          <a:ln w="57150">
-            <a:solidFill>
-              <a:schemeClr val="accent4">
-                <a:lumMod val="50000"/>
-              </a:schemeClr>
-            </a:solidFill>
-          </a:ln>
-        </p:spPr>
-        <p:txBody>
-          <a:bodyPr wrap="square" rtlCol="0">
-            <a:spAutoFit/>
-          </a:bodyPr>
-          <a:lstStyle/>
-          <a:p>
-            <a:pPr algn="ctr"/>
-            <a:endParaRPr lang="en-US" altLang="ko-KR" sz="3600" b="1" dirty="0">
-              <a:latin typeface="+mn-ea"/>
-            </a:endParaRPr>
-          </a:p>
-          <a:p>
-            <a:pPr algn="ctr"/>
-            <a:endParaRPr lang="en-US" altLang="ko-KR" sz="3600" dirty="0">
-              <a:latin typeface="+mn-ea"/>
-            </a:endParaRPr>
-          </a:p>
-          <a:p>
-            <a:pPr algn="ctr"/>
-            <a:endParaRPr lang="en-US" altLang="ko-KR" sz="3600" dirty="0">
-              <a:latin typeface="+mn-ea"/>
-            </a:endParaRPr>
-          </a:p>
-          <a:p>
-            <a:pPr algn="ctr"/>
-            <a:endParaRPr lang="en-US" altLang="ko-KR" sz="3600" dirty="0">
-              <a:latin typeface="+mn-ea"/>
-            </a:endParaRPr>
-          </a:p>
-          <a:p>
-            <a:pPr algn="ctr"/>
-            <a:endParaRPr lang="en-US" altLang="ko-KR" sz="3600" dirty="0">
-              <a:latin typeface="+mn-ea"/>
-            </a:endParaRPr>
-          </a:p>
-          <a:p>
-            <a:pPr algn="ctr"/>
-            <a:endParaRPr lang="en-US" altLang="ko-KR" sz="3600" dirty="0">
-              <a:latin typeface="+mn-ea"/>
-            </a:endParaRPr>
-          </a:p>
-          <a:p>
-            <a:pPr algn="ctr"/>
-            <a:endParaRPr lang="en-US" altLang="ko-KR" sz="3600" dirty="0">
-              <a:latin typeface="+mn-ea"/>
-            </a:endParaRPr>
-          </a:p>
-          <a:p>
-            <a:pPr algn="ctr"/>
-            <a:endParaRPr lang="en-US" altLang="ko-KR" sz="3600" dirty="0">
-              <a:latin typeface="+mn-ea"/>
-            </a:endParaRPr>
-          </a:p>
-          <a:p>
-            <a:pPr algn="ctr"/>
-            <a:endParaRPr lang="en-US" altLang="ko-KR" sz="3600" dirty="0">
-              <a:latin typeface="+mn-ea"/>
-            </a:endParaRPr>
-          </a:p>
-          <a:p>
-            <a:pPr algn="ctr"/>
-            <a:endParaRPr lang="en-US" altLang="ko-KR" sz="1600" dirty="0">
-              <a:latin typeface="+mn-ea"/>
-            </a:endParaRPr>
-          </a:p>
-        </p:txBody>
-      </p:sp>
-      <p:sp>
-        <p:nvSpPr>
-          <p:cNvPr id="12" name="TextBox 11">
-            <a:extLst>
-              <a:ext uri="{FF2B5EF4-FFF2-40B4-BE49-F238E27FC236}">
-                <a16:creationId xmlns:a16="http://schemas.microsoft.com/office/drawing/2014/main" id="{EE4BA792-A182-B99F-83BD-30DF7E0EBF88}"/>
-              </a:ext>
-            </a:extLst>
-          </p:cNvPr>
-          <p:cNvSpPr txBox="1"/>
-          <p:nvPr/>
-        </p:nvSpPr>
-        <p:spPr>
-          <a:xfrm>
-            <a:off x="10712132" y="2598276"/>
-            <a:ext cx="8112004" cy="646331"/>
-          </a:xfrm>
-          <a:prstGeom prst="rect">
-            <a:avLst/>
-          </a:prstGeom>
-          <a:gradFill>
-            <a:gsLst>
-              <a:gs pos="0">
-                <a:schemeClr val="accent4">
-                  <a:shade val="30000"/>
-                  <a:satMod val="115000"/>
-                  <a:lumMod val="48000"/>
-                  <a:alpha val="95000"/>
-                </a:schemeClr>
-              </a:gs>
-              <a:gs pos="50000">
-                <a:schemeClr val="accent4">
-                  <a:lumMod val="50000"/>
-                  <a:shade val="67500"/>
-                  <a:satMod val="115000"/>
-                </a:schemeClr>
-              </a:gs>
-              <a:gs pos="100000">
-                <a:schemeClr val="accent4">
-                  <a:lumMod val="50000"/>
-                  <a:shade val="100000"/>
-                  <a:satMod val="115000"/>
-                </a:schemeClr>
-              </a:gs>
-            </a:gsLst>
-            <a:path path="rect">
-              <a:fillToRect l="50000" t="50000" r="50000" b="50000"/>
-            </a:path>
-          </a:gradFill>
-          <a:ln w="57150">
-            <a:solidFill>
-              <a:schemeClr val="accent4">
-                <a:lumMod val="50000"/>
-              </a:schemeClr>
-            </a:solidFill>
-          </a:ln>
-        </p:spPr>
-        <p:txBody>
-          <a:bodyPr wrap="square" rtlCol="0">
-            <a:spAutoFit/>
-          </a:bodyPr>
-          <a:lstStyle/>
-          <a:p>
-            <a:pPr algn="ctr"/>
-            <a:r>
-              <a:rPr lang="ko-KR" altLang="en-US" sz="3600" b="1" dirty="0">
-                <a:solidFill>
-                  <a:schemeClr val="bg1"/>
-                </a:solidFill>
-                <a:latin typeface="+mn-ea"/>
-              </a:rPr>
-              <a:t>주차별 진행 상황 및 역할 분담</a:t>
-            </a:r>
-          </a:p>
-        </p:txBody>
-      </p:sp>
-      <p:sp>
-        <p:nvSpPr>
-          <p:cNvPr id="13" name="TextBox 12">
-            <a:extLst>
-              <a:ext uri="{FF2B5EF4-FFF2-40B4-BE49-F238E27FC236}">
-                <a16:creationId xmlns:a16="http://schemas.microsoft.com/office/drawing/2014/main" id="{C4E37084-1706-89B6-3818-C425F45E15B4}"/>
-              </a:ext>
-            </a:extLst>
-          </p:cNvPr>
-          <p:cNvSpPr txBox="1"/>
-          <p:nvPr/>
-        </p:nvSpPr>
-        <p:spPr>
-          <a:xfrm>
-            <a:off x="10685715" y="3343435"/>
-            <a:ext cx="5084650" cy="3416320"/>
-          </a:xfrm>
-          <a:prstGeom prst="rect">
-            <a:avLst/>
-          </a:prstGeom>
-          <a:noFill/>
-          <a:ln w="57150">
-            <a:noFill/>
-            <a:prstDash val="dash"/>
-          </a:ln>
-        </p:spPr>
-        <p:txBody>
-          <a:bodyPr wrap="square" rtlCol="0">
-            <a:spAutoFit/>
-          </a:bodyPr>
-          <a:lstStyle/>
-          <a:p>
-            <a:r>
-              <a:rPr lang="en-US" altLang="ko-KR" sz="2400" dirty="0"/>
-              <a:t> 1</a:t>
-            </a:r>
-            <a:r>
-              <a:rPr lang="ko-KR" altLang="en-US" sz="2400" dirty="0"/>
-              <a:t>주차</a:t>
-            </a:r>
-            <a:r>
-              <a:rPr lang="en-US" altLang="ko-KR" sz="2400" dirty="0"/>
-              <a:t>: </a:t>
-            </a:r>
-            <a:r>
-              <a:rPr lang="ko-KR" altLang="en-US" sz="2400" dirty="0"/>
-              <a:t>프로젝트 주제 선정 및 개발 </a:t>
-            </a:r>
-            <a:r>
-              <a:rPr lang="en-US" altLang="ko-KR" sz="2400" dirty="0"/>
-              <a:t>		</a:t>
-            </a:r>
-            <a:r>
-              <a:rPr lang="ko-KR" altLang="en-US" sz="2400" dirty="0"/>
-              <a:t>환경 조사</a:t>
-            </a:r>
-            <a:endParaRPr lang="en-US" altLang="ko-KR" sz="2400" dirty="0"/>
-          </a:p>
-          <a:p>
-            <a:r>
-              <a:rPr lang="en-US" altLang="ko-KR" sz="2400" dirty="0"/>
-              <a:t> 2</a:t>
-            </a:r>
-            <a:r>
-              <a:rPr lang="ko-KR" altLang="en-US" sz="2400" dirty="0"/>
-              <a:t>주차</a:t>
-            </a:r>
-            <a:r>
-              <a:rPr lang="en-US" altLang="ko-KR" sz="2400" dirty="0"/>
-              <a:t>: </a:t>
-            </a:r>
-            <a:r>
-              <a:rPr lang="ko-KR" altLang="ko-KR" sz="2400" dirty="0"/>
-              <a:t>OpenPI·Pi0.5 기반 코드 구조 </a:t>
-            </a:r>
-            <a:r>
-              <a:rPr lang="en-US" altLang="ko-KR" sz="2400" dirty="0"/>
-              <a:t>		</a:t>
-            </a:r>
-            <a:r>
-              <a:rPr lang="ko-KR" altLang="ko-KR" sz="2400" dirty="0"/>
-              <a:t>분석 및 학습 파이프라인 구축</a:t>
-            </a:r>
-            <a:endParaRPr lang="en-US" altLang="ko-KR" sz="2400" dirty="0"/>
-          </a:p>
-          <a:p>
-            <a:r>
-              <a:rPr lang="en-US" altLang="ko-KR" sz="2400" dirty="0"/>
-              <a:t> 3</a:t>
-            </a:r>
-            <a:r>
-              <a:rPr lang="ko-KR" altLang="en-US" sz="2400" dirty="0"/>
-              <a:t>주차</a:t>
-            </a:r>
-            <a:r>
-              <a:rPr lang="en-US" altLang="ko-KR" sz="2400" dirty="0"/>
-              <a:t>: </a:t>
-            </a:r>
-            <a:r>
-              <a:rPr lang="ko-KR" altLang="ko-KR" sz="2400" dirty="0"/>
-              <a:t>모델 구조 설계 및 실험 환경 </a:t>
-            </a:r>
-            <a:r>
-              <a:rPr lang="en-US" altLang="ko-KR" sz="2400" dirty="0"/>
-              <a:t>		</a:t>
-            </a:r>
-            <a:r>
-              <a:rPr lang="ko-KR" altLang="ko-KR" sz="2400" dirty="0"/>
-              <a:t>구성</a:t>
-            </a:r>
-            <a:endParaRPr lang="en-US" altLang="ko-KR" sz="2400" dirty="0"/>
-          </a:p>
-          <a:p>
-            <a:r>
-              <a:rPr lang="en-US" altLang="ko-KR" sz="2400" dirty="0"/>
-              <a:t> 4</a:t>
-            </a:r>
-            <a:r>
-              <a:rPr lang="ko-KR" altLang="en-US" sz="2400" dirty="0"/>
-              <a:t>주차</a:t>
-            </a:r>
-            <a:r>
-              <a:rPr lang="en-US" altLang="ko-KR" sz="2400" dirty="0"/>
-              <a:t>:  </a:t>
-            </a:r>
-            <a:r>
-              <a:rPr lang="ko-KR" altLang="ko-KR" sz="2400" dirty="0" err="1"/>
-              <a:t>OmniGibson</a:t>
-            </a:r>
-            <a:r>
-              <a:rPr lang="ko-KR" altLang="ko-KR" sz="2400" dirty="0"/>
-              <a:t> 평가 환경 구축</a:t>
-            </a:r>
-            <a:endParaRPr lang="en-US" altLang="ko-KR" sz="2400" dirty="0"/>
-          </a:p>
-          <a:p>
-            <a:r>
-              <a:rPr lang="en-US" altLang="ko-KR" sz="2400" dirty="0"/>
-              <a:t> 5</a:t>
-            </a:r>
-            <a:r>
-              <a:rPr lang="ko-KR" altLang="en-US" sz="2400" dirty="0"/>
-              <a:t>주차</a:t>
-            </a:r>
-            <a:r>
-              <a:rPr lang="en-US" altLang="ko-KR" sz="2400" dirty="0"/>
-              <a:t>: </a:t>
-            </a:r>
-            <a:r>
-              <a:rPr lang="ko-KR" altLang="ko-KR" sz="2400" dirty="0"/>
-              <a:t>실데이터 학습 파이프라인 </a:t>
-            </a:r>
-            <a:r>
-              <a:rPr lang="en-US" altLang="ko-KR" sz="2400" dirty="0"/>
-              <a:t>			</a:t>
-            </a:r>
-            <a:r>
-              <a:rPr lang="ko-KR" altLang="ko-KR" sz="2400" dirty="0"/>
-              <a:t>구현</a:t>
-            </a:r>
-            <a:endParaRPr lang="en-US" altLang="ko-KR" sz="2400" dirty="0"/>
-          </a:p>
-        </p:txBody>
-      </p:sp>
-      <p:sp>
-        <p:nvSpPr>
-          <p:cNvPr id="18" name="TextBox 17">
-            <a:extLst>
-              <a:ext uri="{FF2B5EF4-FFF2-40B4-BE49-F238E27FC236}">
-                <a16:creationId xmlns:a16="http://schemas.microsoft.com/office/drawing/2014/main" id="{2CFBE48B-B887-151D-2BF6-D02E76534210}"/>
-              </a:ext>
-            </a:extLst>
-          </p:cNvPr>
-          <p:cNvSpPr txBox="1"/>
-          <p:nvPr/>
-        </p:nvSpPr>
-        <p:spPr>
-          <a:xfrm>
-            <a:off x="15776460" y="3306162"/>
-            <a:ext cx="5084650" cy="3693319"/>
-          </a:xfrm>
-          <a:prstGeom prst="rect">
-            <a:avLst/>
-          </a:prstGeom>
-          <a:noFill/>
-          <a:ln w="57150">
-            <a:noFill/>
-            <a:prstDash val="dash"/>
-          </a:ln>
-        </p:spPr>
-        <p:txBody>
-          <a:bodyPr wrap="square" rtlCol="0">
-            <a:spAutoFit/>
-          </a:bodyPr>
-          <a:lstStyle/>
-          <a:p>
-            <a:r>
-              <a:rPr lang="en-US" altLang="ko-KR" sz="2400" dirty="0"/>
-              <a:t> 6</a:t>
-            </a:r>
-            <a:r>
-              <a:rPr lang="ko-KR" altLang="en-US" sz="2400" dirty="0"/>
-              <a:t>주차</a:t>
-            </a:r>
-            <a:r>
-              <a:rPr lang="en-US" altLang="ko-KR" sz="2400" dirty="0"/>
-              <a:t>: </a:t>
-            </a:r>
-            <a:r>
-              <a:rPr lang="ko-KR" altLang="ko-KR" sz="2400" dirty="0"/>
-              <a:t>메모리 최적화 및 학습 성능 </a:t>
-            </a:r>
-            <a:r>
-              <a:rPr lang="en-US" altLang="ko-KR" sz="2400" dirty="0"/>
-              <a:t>		</a:t>
-            </a:r>
-            <a:r>
-              <a:rPr lang="ko-KR" altLang="ko-KR" sz="2400" dirty="0"/>
-              <a:t>분석</a:t>
-            </a:r>
-            <a:r>
-              <a:rPr lang="en-US" altLang="ko-KR" sz="2400" dirty="0"/>
-              <a:t>  </a:t>
-            </a:r>
-          </a:p>
-          <a:p>
-            <a:r>
-              <a:rPr lang="en-US" altLang="ko-KR" sz="2400" dirty="0"/>
-              <a:t>7</a:t>
-            </a:r>
-            <a:r>
-              <a:rPr lang="ko-KR" altLang="en-US" sz="2400" dirty="0"/>
-              <a:t>주차</a:t>
-            </a:r>
-            <a:r>
-              <a:rPr lang="en-US" altLang="ko-KR" sz="2400" dirty="0"/>
-              <a:t>: </a:t>
-            </a:r>
-            <a:r>
-              <a:rPr lang="ko-KR" altLang="ko-KR" sz="2400" dirty="0"/>
-              <a:t>학습 및 W&amp;B 로깅 시스템 </a:t>
-            </a:r>
-            <a:r>
-              <a:rPr lang="en-US" altLang="ko-KR" sz="2400" dirty="0"/>
-              <a:t>			</a:t>
-            </a:r>
-            <a:r>
-              <a:rPr lang="ko-KR" altLang="ko-KR" sz="2400" dirty="0"/>
-              <a:t>구축</a:t>
-            </a:r>
-            <a:endParaRPr lang="en-US" altLang="ko-KR" sz="2400" dirty="0"/>
-          </a:p>
-          <a:p>
-            <a:r>
-              <a:rPr lang="en-US" altLang="ko-KR" sz="2400" dirty="0"/>
-              <a:t> 8</a:t>
-            </a:r>
-            <a:r>
-              <a:rPr lang="ko-KR" altLang="en-US" sz="2400" dirty="0"/>
-              <a:t>주차</a:t>
-            </a:r>
-            <a:r>
-              <a:rPr lang="en-US" altLang="ko-KR" sz="2400" dirty="0"/>
-              <a:t>: </a:t>
-            </a:r>
-            <a:r>
-              <a:rPr lang="ko-KR" altLang="en-US" sz="2400" dirty="0"/>
-              <a:t>경량화 모델 학습</a:t>
-            </a:r>
-            <a:endParaRPr lang="en-US" altLang="ko-KR" sz="2400" dirty="0"/>
-          </a:p>
-          <a:p>
-            <a:r>
-              <a:rPr lang="en-US" altLang="ko-KR" sz="2400" dirty="0"/>
-              <a:t> 9</a:t>
-            </a:r>
-            <a:r>
-              <a:rPr lang="ko-KR" altLang="en-US" sz="2400" dirty="0"/>
-              <a:t>주차</a:t>
-            </a:r>
-            <a:r>
-              <a:rPr lang="en-US" altLang="ko-KR" sz="2400" dirty="0"/>
-              <a:t>: </a:t>
-            </a:r>
-            <a:r>
-              <a:rPr lang="ko-KR" altLang="en-US" sz="2400" dirty="0"/>
-              <a:t>경량화 모델 학습</a:t>
-            </a:r>
-            <a:endParaRPr lang="en-US" altLang="ko-KR" sz="2400" dirty="0"/>
-          </a:p>
-          <a:p>
-            <a:r>
-              <a:rPr lang="en-US" altLang="ko-KR" sz="2400" dirty="0"/>
-              <a:t> 10</a:t>
-            </a:r>
-            <a:r>
-              <a:rPr lang="ko-KR" altLang="en-US" sz="2400" dirty="0"/>
-              <a:t>주차</a:t>
-            </a:r>
-            <a:r>
-              <a:rPr lang="en-US" altLang="ko-KR" sz="2400" dirty="0"/>
-              <a:t>: </a:t>
-            </a:r>
-            <a:r>
-              <a:rPr lang="ko-KR" altLang="en-US" sz="2400" dirty="0"/>
-              <a:t>경량화 모델 학습</a:t>
-            </a:r>
-            <a:endParaRPr lang="en-US" altLang="ko-KR" sz="2400" dirty="0"/>
-          </a:p>
-          <a:p>
-            <a:r>
-              <a:rPr lang="en-US" altLang="ko-KR" sz="2400" dirty="0"/>
-              <a:t> 11</a:t>
-            </a:r>
-            <a:r>
-              <a:rPr lang="ko-KR" altLang="en-US" sz="2400" dirty="0"/>
-              <a:t>주차</a:t>
-            </a:r>
-            <a:r>
-              <a:rPr lang="en-US" altLang="ko-KR" sz="2400" dirty="0"/>
-              <a:t>: rollout </a:t>
-            </a:r>
-            <a:r>
-              <a:rPr lang="ko-KR" altLang="en-US" sz="2400" dirty="0"/>
-              <a:t>안정화 및 평가 개선</a:t>
-            </a:r>
-            <a:endParaRPr lang="en-US" altLang="ko-KR" sz="2400" dirty="0"/>
-          </a:p>
-          <a:p>
-            <a:r>
-              <a:rPr lang="en-US" altLang="ko-KR" sz="2400" dirty="0"/>
-              <a:t> 12</a:t>
-            </a:r>
-            <a:r>
-              <a:rPr lang="ko-KR" altLang="en-US" sz="2400" dirty="0"/>
-              <a:t>주차</a:t>
-            </a:r>
-            <a:r>
-              <a:rPr lang="en-US" altLang="ko-KR" sz="2400" dirty="0"/>
-              <a:t>: </a:t>
-            </a:r>
-            <a:r>
-              <a:rPr lang="ko-KR" altLang="ko-KR" sz="2400" dirty="0"/>
-              <a:t>최종 실험 결과 정리</a:t>
-            </a:r>
-            <a:endParaRPr lang="en-US" altLang="ko-KR" sz="2400" dirty="0"/>
-          </a:p>
-          <a:p>
-            <a:endParaRPr lang="ko-KR" altLang="en-US" dirty="0"/>
-          </a:p>
-        </p:txBody>
-      </p:sp>
-      <p:sp>
-        <p:nvSpPr>
-          <p:cNvPr id="24" name="TextBox 23">
-            <a:extLst>
-              <a:ext uri="{FF2B5EF4-FFF2-40B4-BE49-F238E27FC236}">
-                <a16:creationId xmlns:a16="http://schemas.microsoft.com/office/drawing/2014/main" id="{2028F00E-856C-97B8-EDC1-27E6B218DCA2}"/>
-              </a:ext>
-            </a:extLst>
-          </p:cNvPr>
-          <p:cNvSpPr txBox="1"/>
-          <p:nvPr/>
-        </p:nvSpPr>
-        <p:spPr>
-          <a:xfrm>
-            <a:off x="10691811" y="6968060"/>
-            <a:ext cx="10169298" cy="830997"/>
-          </a:xfrm>
-          <a:prstGeom prst="rect">
-            <a:avLst/>
-          </a:prstGeom>
-          <a:noFill/>
-          <a:ln w="57150">
-            <a:noFill/>
-          </a:ln>
-        </p:spPr>
-        <p:txBody>
-          <a:bodyPr wrap="square" rtlCol="0">
-            <a:spAutoFit/>
-          </a:bodyPr>
-          <a:lstStyle/>
-          <a:p>
-            <a:r>
-              <a:rPr lang="ko-KR" altLang="en-US" sz="2400" dirty="0">
-                <a:latin typeface="+mn-ea"/>
-              </a:rPr>
-              <a:t> 강지호</a:t>
-            </a:r>
-            <a:r>
-              <a:rPr lang="en-US" altLang="ko-KR" sz="2400" dirty="0">
-                <a:latin typeface="+mn-ea"/>
-              </a:rPr>
-              <a:t>: </a:t>
-            </a:r>
-            <a:r>
-              <a:rPr lang="ko-KR" altLang="ko-KR" sz="2400" dirty="0"/>
-              <a:t>VLA 모델 </a:t>
-            </a:r>
-            <a:r>
-              <a:rPr lang="ko-KR" altLang="ko-KR" sz="2400" dirty="0" err="1"/>
-              <a:t>구현·학습</a:t>
-            </a:r>
-            <a:r>
-              <a:rPr lang="ko-KR" altLang="ko-KR" sz="2400" dirty="0"/>
-              <a:t> 및 핵심 알고리즘 실험 진행</a:t>
-            </a:r>
-            <a:endParaRPr lang="en-US" altLang="ko-KR" sz="2400" dirty="0">
-              <a:latin typeface="+mn-ea"/>
-            </a:endParaRPr>
-          </a:p>
-          <a:p>
-            <a:r>
-              <a:rPr lang="ko-KR" altLang="en-US" sz="2400" dirty="0">
-                <a:latin typeface="+mn-ea"/>
-              </a:rPr>
-              <a:t> </a:t>
-            </a:r>
-            <a:r>
-              <a:rPr lang="ko-KR" altLang="en-US" sz="2400" dirty="0" err="1">
-                <a:latin typeface="+mn-ea"/>
-              </a:rPr>
-              <a:t>문병선</a:t>
-            </a:r>
-            <a:r>
-              <a:rPr lang="en-US" altLang="ko-KR" sz="2400" dirty="0">
-                <a:latin typeface="+mn-ea"/>
-              </a:rPr>
-              <a:t>: </a:t>
-            </a:r>
-            <a:r>
-              <a:rPr lang="ko-KR" altLang="ko-KR" sz="2400" dirty="0" err="1"/>
-              <a:t>OmniGibson</a:t>
-            </a:r>
-            <a:r>
-              <a:rPr lang="ko-KR" altLang="ko-KR" sz="2400" dirty="0"/>
-              <a:t> 평가 환경 </a:t>
-            </a:r>
-            <a:r>
-              <a:rPr lang="ko-KR" altLang="ko-KR" sz="2400" dirty="0" err="1"/>
-              <a:t>구축·영상</a:t>
-            </a:r>
-            <a:r>
-              <a:rPr lang="ko-KR" altLang="ko-KR" sz="2400" dirty="0"/>
-              <a:t> 생성 및 결과 정리</a:t>
-            </a:r>
-            <a:endParaRPr lang="en-US" altLang="ko-KR" sz="2400" dirty="0">
-              <a:latin typeface="+mn-ea"/>
-            </a:endParaRPr>
-          </a:p>
-        </p:txBody>
-      </p:sp>
-      <p:sp>
-        <p:nvSpPr>
-          <p:cNvPr id="27" name="TextBox 26">
-            <a:extLst>
-              <a:ext uri="{FF2B5EF4-FFF2-40B4-BE49-F238E27FC236}">
-                <a16:creationId xmlns:a16="http://schemas.microsoft.com/office/drawing/2014/main" id="{AD26A61D-12C0-0739-A1E6-47055D9A7D9B}"/>
-              </a:ext>
-            </a:extLst>
-          </p:cNvPr>
-          <p:cNvSpPr txBox="1"/>
-          <p:nvPr/>
-        </p:nvSpPr>
-        <p:spPr>
-          <a:xfrm>
-            <a:off x="526393" y="11468788"/>
-            <a:ext cx="10180800" cy="8340745"/>
-          </a:xfrm>
-          <a:prstGeom prst="rect">
-            <a:avLst/>
-          </a:prstGeom>
-          <a:noFill/>
-          <a:ln w="57150">
-            <a:solidFill>
-              <a:schemeClr val="accent4">
-                <a:lumMod val="50000"/>
-              </a:schemeClr>
-            </a:solidFill>
-          </a:ln>
-        </p:spPr>
-        <p:txBody>
-          <a:bodyPr wrap="square" rtlCol="0">
-            <a:spAutoFit/>
-          </a:bodyPr>
-          <a:lstStyle/>
-          <a:p>
-            <a:pPr algn="ctr"/>
-            <a:endParaRPr lang="en-US" altLang="ko-KR" sz="5400" b="1" dirty="0">
-              <a:latin typeface="+mn-ea"/>
-            </a:endParaRPr>
-          </a:p>
-          <a:p>
-            <a:pPr algn="ctr"/>
-            <a:endParaRPr lang="en-US" altLang="ko-KR" sz="3600" dirty="0">
-              <a:latin typeface="+mn-ea"/>
-            </a:endParaRPr>
-          </a:p>
-          <a:p>
-            <a:pPr algn="ctr"/>
-            <a:endParaRPr lang="en-US" altLang="ko-KR" sz="3600" dirty="0">
-              <a:latin typeface="+mn-ea"/>
-            </a:endParaRPr>
-          </a:p>
-          <a:p>
-            <a:pPr algn="ctr"/>
-            <a:endParaRPr lang="en-US" altLang="ko-KR" sz="3600" dirty="0">
-              <a:latin typeface="+mn-ea"/>
-            </a:endParaRPr>
-          </a:p>
-          <a:p>
-            <a:pPr algn="ctr"/>
-            <a:endParaRPr lang="en-US" altLang="ko-KR" sz="3600" dirty="0">
-              <a:latin typeface="+mn-ea"/>
-            </a:endParaRPr>
-          </a:p>
-          <a:p>
-            <a:pPr algn="ctr"/>
-            <a:endParaRPr lang="en-US" altLang="ko-KR" sz="3600" dirty="0">
-              <a:latin typeface="+mn-ea"/>
-            </a:endParaRPr>
-          </a:p>
-          <a:p>
-            <a:pPr algn="ctr"/>
-            <a:endParaRPr lang="en-US" altLang="ko-KR" sz="3600" dirty="0">
-              <a:latin typeface="+mn-ea"/>
-            </a:endParaRPr>
-          </a:p>
-          <a:p>
-            <a:pPr algn="ctr"/>
-            <a:endParaRPr lang="en-US" altLang="ko-KR" sz="3600" dirty="0">
-              <a:latin typeface="+mn-ea"/>
-            </a:endParaRPr>
-          </a:p>
-          <a:p>
-            <a:pPr marL="342900" indent="-342900">
-              <a:buFont typeface="Arial" panose="020B0604020202020204" pitchFamily="34" charset="0"/>
-              <a:buChar char="•"/>
-            </a:pPr>
-            <a:r>
-              <a:rPr lang="en-US" altLang="ko-KR" sz="2400" b="1" dirty="0">
-                <a:latin typeface="+mn-ea"/>
-              </a:rPr>
-              <a:t>Model Architecture</a:t>
-            </a:r>
-          </a:p>
-          <a:p>
-            <a:r>
-              <a:rPr lang="en-US" altLang="ko-KR" sz="2200" dirty="0">
-                <a:latin typeface="+mn-ea"/>
-              </a:rPr>
-              <a:t> </a:t>
-            </a:r>
-            <a:r>
-              <a:rPr lang="en-US" altLang="ko-KR" sz="2200" b="1" dirty="0">
-                <a:latin typeface="+mn-ea"/>
-              </a:rPr>
-              <a:t>Backbone:</a:t>
-            </a:r>
-            <a:r>
-              <a:rPr lang="en-US" altLang="ko-KR" sz="2200" dirty="0">
-                <a:latin typeface="+mn-ea"/>
-              </a:rPr>
-              <a:t> </a:t>
-            </a:r>
-            <a:r>
-              <a:rPr lang="ko-KR" altLang="ko-KR" sz="2200" dirty="0" err="1">
-                <a:latin typeface="+mn-ea"/>
-              </a:rPr>
-              <a:t>OpenPI의</a:t>
-            </a:r>
-            <a:r>
-              <a:rPr lang="ko-KR" altLang="ko-KR" sz="2200" dirty="0">
-                <a:latin typeface="+mn-ea"/>
-              </a:rPr>
-              <a:t> Pi0.5 기반 구조</a:t>
-            </a:r>
-            <a:endParaRPr lang="en-US" altLang="ko-KR" sz="2200" dirty="0">
-              <a:latin typeface="+mn-ea"/>
-            </a:endParaRPr>
-          </a:p>
-          <a:p>
-            <a:r>
-              <a:rPr lang="ko-KR" altLang="ko-KR" sz="2200" dirty="0">
-                <a:latin typeface="+mn-ea"/>
-              </a:rPr>
-              <a:t>(</a:t>
-            </a:r>
-            <a:r>
-              <a:rPr lang="ko-KR" altLang="ko-KR" sz="2200" dirty="0" err="1">
-                <a:latin typeface="+mn-ea"/>
-              </a:rPr>
-              <a:t>SigLIP</a:t>
-            </a:r>
-            <a:r>
-              <a:rPr lang="en-US" altLang="ko-KR" sz="2200" dirty="0">
-                <a:latin typeface="+mn-ea"/>
-              </a:rPr>
-              <a:t> </a:t>
-            </a:r>
-            <a:r>
-              <a:rPr lang="ko-KR" altLang="ko-KR" sz="2200" dirty="0">
-                <a:latin typeface="+mn-ea"/>
-              </a:rPr>
-              <a:t>+</a:t>
-            </a:r>
-            <a:r>
-              <a:rPr lang="en-US" altLang="ko-KR" sz="2200" dirty="0">
-                <a:latin typeface="+mn-ea"/>
-              </a:rPr>
-              <a:t> </a:t>
-            </a:r>
-            <a:r>
-              <a:rPr lang="ko-KR" altLang="ko-KR" sz="2200" dirty="0" err="1">
-                <a:latin typeface="+mn-ea"/>
-              </a:rPr>
-              <a:t>PaliGemma</a:t>
-            </a:r>
-            <a:r>
-              <a:rPr lang="en-US" altLang="ko-KR" sz="2200" dirty="0">
-                <a:latin typeface="+mn-ea"/>
-              </a:rPr>
-              <a:t> + </a:t>
-            </a:r>
-            <a:r>
-              <a:rPr lang="ko-KR" altLang="ko-KR" sz="2200" dirty="0" err="1">
-                <a:latin typeface="+mn-ea"/>
-              </a:rPr>
-              <a:t>Flow</a:t>
-            </a:r>
-            <a:r>
-              <a:rPr lang="en-US" altLang="ko-KR" sz="2200" dirty="0">
-                <a:latin typeface="+mn-ea"/>
-              </a:rPr>
-              <a:t> </a:t>
-            </a:r>
-            <a:r>
-              <a:rPr lang="ko-KR" altLang="ko-KR" sz="2200" dirty="0" err="1">
-                <a:latin typeface="+mn-ea"/>
-              </a:rPr>
-              <a:t>Matching</a:t>
-            </a:r>
-            <a:r>
-              <a:rPr lang="en-US" altLang="ko-KR" sz="2200" dirty="0">
-                <a:latin typeface="+mn-ea"/>
-              </a:rPr>
-              <a:t> </a:t>
-            </a:r>
-            <a:r>
-              <a:rPr lang="ko-KR" altLang="ko-KR" sz="2200" dirty="0" err="1">
-                <a:latin typeface="+mn-ea"/>
-              </a:rPr>
-              <a:t>Action</a:t>
-            </a:r>
-            <a:r>
-              <a:rPr lang="ko-KR" altLang="ko-KR" sz="2200" dirty="0">
-                <a:latin typeface="+mn-ea"/>
-              </a:rPr>
-              <a:t> </a:t>
-            </a:r>
-            <a:r>
-              <a:rPr lang="ko-KR" altLang="ko-KR" sz="2200" dirty="0" err="1">
-                <a:latin typeface="+mn-ea"/>
-              </a:rPr>
-              <a:t>Expert</a:t>
-            </a:r>
-            <a:r>
-              <a:rPr lang="ko-KR" altLang="ko-KR" sz="2200" dirty="0">
-                <a:latin typeface="+mn-ea"/>
-              </a:rPr>
-              <a:t>)</a:t>
-            </a:r>
-            <a:endParaRPr lang="en-US" altLang="ko-KR" sz="2200" dirty="0">
-              <a:latin typeface="+mn-ea"/>
-            </a:endParaRPr>
-          </a:p>
-          <a:p>
-            <a:endParaRPr lang="en-US" altLang="ko-KR" sz="2400" dirty="0">
-              <a:latin typeface="+mn-ea"/>
-            </a:endParaRPr>
-          </a:p>
-          <a:p>
-            <a:pPr lvl="0" defTabSz="914400" eaLnBrk="0" fontAlgn="base" hangingPunct="0">
-              <a:spcBef>
-                <a:spcPct val="0"/>
-              </a:spcBef>
-              <a:spcAft>
-                <a:spcPct val="0"/>
-              </a:spcAft>
-            </a:pPr>
-            <a:r>
-              <a:rPr lang="en-US" altLang="ko-KR" sz="2400" b="1" dirty="0">
-                <a:latin typeface="Arial" panose="020B0604020202020204" pitchFamily="34" charset="0"/>
-              </a:rPr>
-              <a:t> </a:t>
-            </a:r>
-            <a:r>
-              <a:rPr lang="ko-KR" altLang="ko-KR" sz="2200" b="1" dirty="0">
-                <a:latin typeface="Arial" panose="020B0604020202020204" pitchFamily="34" charset="0"/>
-              </a:rPr>
-              <a:t>System 2 </a:t>
-            </a:r>
-            <a:r>
-              <a:rPr lang="ko-KR" altLang="ko-KR" sz="2200" b="1" dirty="0" err="1">
-                <a:latin typeface="Arial" panose="020B0604020202020204" pitchFamily="34" charset="0"/>
-              </a:rPr>
-              <a:t>Stage</a:t>
-            </a:r>
-            <a:r>
-              <a:rPr lang="ko-KR" altLang="ko-KR" sz="2200" b="1" dirty="0">
-                <a:latin typeface="Arial" panose="020B0604020202020204" pitchFamily="34" charset="0"/>
-              </a:rPr>
-              <a:t> </a:t>
-            </a:r>
-            <a:r>
-              <a:rPr lang="ko-KR" altLang="ko-KR" sz="2200" b="1" dirty="0" err="1">
-                <a:latin typeface="Arial" panose="020B0604020202020204" pitchFamily="34" charset="0"/>
-              </a:rPr>
-              <a:t>Tracking</a:t>
-            </a:r>
-            <a:r>
-              <a:rPr lang="ko-KR" altLang="ko-KR" sz="2200" dirty="0">
-                <a:latin typeface="Arial" panose="020B0604020202020204" pitchFamily="34" charset="0"/>
-              </a:rPr>
-              <a:t> : 현재 작업 진행 단계 예측 및 추적 </a:t>
-            </a:r>
-          </a:p>
-          <a:p>
-            <a:pPr lvl="0" defTabSz="914400" eaLnBrk="0" fontAlgn="base" hangingPunct="0">
-              <a:spcBef>
-                <a:spcPct val="0"/>
-              </a:spcBef>
-              <a:spcAft>
-                <a:spcPct val="0"/>
-              </a:spcAft>
-            </a:pPr>
-            <a:r>
-              <a:rPr lang="en-US" altLang="ko-KR" sz="2200" b="1" dirty="0">
-                <a:latin typeface="Arial" panose="020B0604020202020204" pitchFamily="34" charset="0"/>
-              </a:rPr>
-              <a:t> </a:t>
-            </a:r>
-            <a:r>
-              <a:rPr lang="ko-KR" altLang="ko-KR" sz="2200" b="1" dirty="0" err="1">
-                <a:latin typeface="Arial" panose="020B0604020202020204" pitchFamily="34" charset="0"/>
-              </a:rPr>
-              <a:t>Task</a:t>
-            </a:r>
-            <a:r>
-              <a:rPr lang="ko-KR" altLang="ko-KR" sz="2200" b="1" dirty="0">
-                <a:latin typeface="Arial" panose="020B0604020202020204" pitchFamily="34" charset="0"/>
-              </a:rPr>
-              <a:t> </a:t>
-            </a:r>
-            <a:r>
-              <a:rPr lang="ko-KR" altLang="ko-KR" sz="2200" b="1" dirty="0" err="1">
-                <a:latin typeface="Arial" panose="020B0604020202020204" pitchFamily="34" charset="0"/>
-              </a:rPr>
-              <a:t>Embedding</a:t>
-            </a:r>
-            <a:r>
-              <a:rPr lang="ko-KR" altLang="ko-KR" sz="2200" dirty="0">
-                <a:latin typeface="Arial" panose="020B0604020202020204" pitchFamily="34" charset="0"/>
-              </a:rPr>
-              <a:t> : 작업 종류를 벡터로 표현하는 조건 정보 </a:t>
-            </a:r>
-          </a:p>
-          <a:p>
-            <a:pPr lvl="0" defTabSz="914400" eaLnBrk="0" fontAlgn="base" hangingPunct="0">
-              <a:spcBef>
-                <a:spcPct val="0"/>
-              </a:spcBef>
-              <a:spcAft>
-                <a:spcPct val="0"/>
-              </a:spcAft>
-            </a:pPr>
-            <a:r>
-              <a:rPr lang="en-US" altLang="ko-KR" sz="2200" b="1" dirty="0">
-                <a:latin typeface="Arial" panose="020B0604020202020204" pitchFamily="34" charset="0"/>
-              </a:rPr>
-              <a:t> </a:t>
-            </a:r>
-            <a:r>
-              <a:rPr lang="ko-KR" altLang="ko-KR" sz="2200" b="1" dirty="0">
-                <a:latin typeface="Arial" panose="020B0604020202020204" pitchFamily="34" charset="0"/>
-              </a:rPr>
-              <a:t>FAST </a:t>
-            </a:r>
-            <a:r>
-              <a:rPr lang="ko-KR" altLang="ko-KR" sz="2200" b="1" dirty="0" err="1">
-                <a:latin typeface="Arial" panose="020B0604020202020204" pitchFamily="34" charset="0"/>
-              </a:rPr>
-              <a:t>Auxiliary</a:t>
-            </a:r>
-            <a:r>
-              <a:rPr lang="ko-KR" altLang="ko-KR" sz="2200" dirty="0">
-                <a:latin typeface="Arial" panose="020B0604020202020204" pitchFamily="34" charset="0"/>
-              </a:rPr>
-              <a:t> : 행동 시퀀스를 토큰화해 보조 학습</a:t>
-            </a:r>
-          </a:p>
-          <a:p>
-            <a:pPr lvl="0" defTabSz="914400" eaLnBrk="0" fontAlgn="base" hangingPunct="0">
-              <a:spcBef>
-                <a:spcPct val="0"/>
-              </a:spcBef>
-              <a:spcAft>
-                <a:spcPct val="0"/>
-              </a:spcAft>
-            </a:pPr>
-            <a:r>
-              <a:rPr lang="en-US" altLang="ko-KR" sz="2200" b="1" dirty="0">
-                <a:latin typeface="Arial" panose="020B0604020202020204" pitchFamily="34" charset="0"/>
-              </a:rPr>
-              <a:t> </a:t>
-            </a:r>
-            <a:r>
-              <a:rPr lang="ko-KR" altLang="ko-KR" sz="2200" b="1" dirty="0" err="1">
-                <a:latin typeface="Arial" panose="020B0604020202020204" pitchFamily="34" charset="0"/>
-              </a:rPr>
-              <a:t>Correlated</a:t>
-            </a:r>
-            <a:r>
-              <a:rPr lang="ko-KR" altLang="ko-KR" sz="2200" b="1" dirty="0">
-                <a:latin typeface="Arial" panose="020B0604020202020204" pitchFamily="34" charset="0"/>
-              </a:rPr>
-              <a:t> </a:t>
-            </a:r>
-            <a:r>
-              <a:rPr lang="ko-KR" altLang="ko-KR" sz="2200" b="1" dirty="0" err="1">
-                <a:latin typeface="Arial" panose="020B0604020202020204" pitchFamily="34" charset="0"/>
-              </a:rPr>
-              <a:t>Noise</a:t>
-            </a:r>
-            <a:r>
-              <a:rPr lang="ko-KR" altLang="ko-KR" sz="2200" dirty="0">
-                <a:latin typeface="Arial" panose="020B0604020202020204" pitchFamily="34" charset="0"/>
-              </a:rPr>
-              <a:t> : 행동 간 </a:t>
-            </a:r>
-            <a:r>
-              <a:rPr lang="ko-KR" altLang="ko-KR" sz="2200" dirty="0" err="1">
-                <a:latin typeface="Arial" panose="020B0604020202020204" pitchFamily="34" charset="0"/>
-              </a:rPr>
-              <a:t>시간적·공간적</a:t>
-            </a:r>
-            <a:r>
-              <a:rPr lang="ko-KR" altLang="ko-KR" sz="2200" dirty="0">
-                <a:latin typeface="Arial" panose="020B0604020202020204" pitchFamily="34" charset="0"/>
-              </a:rPr>
-              <a:t> 상관관계를 반영한 노이즈 </a:t>
-            </a:r>
-          </a:p>
-          <a:p>
-            <a:pPr lvl="0" defTabSz="914400" eaLnBrk="0" fontAlgn="base" hangingPunct="0">
-              <a:spcBef>
-                <a:spcPct val="0"/>
-              </a:spcBef>
-              <a:spcAft>
-                <a:spcPct val="0"/>
-              </a:spcAft>
-            </a:pPr>
-            <a:r>
-              <a:rPr lang="en-US" altLang="ko-KR" sz="2200" b="1" dirty="0">
-                <a:latin typeface="Arial" panose="020B0604020202020204" pitchFamily="34" charset="0"/>
-              </a:rPr>
-              <a:t> </a:t>
-            </a:r>
-            <a:r>
-              <a:rPr lang="ko-KR" altLang="ko-KR" sz="2200" b="1" dirty="0">
-                <a:latin typeface="Arial" panose="020B0604020202020204" pitchFamily="34" charset="0"/>
-              </a:rPr>
-              <a:t>KV </a:t>
-            </a:r>
-            <a:r>
-              <a:rPr lang="ko-KR" altLang="ko-KR" sz="2200" b="1" dirty="0" err="1">
-                <a:latin typeface="Arial" panose="020B0604020202020204" pitchFamily="34" charset="0"/>
-              </a:rPr>
-              <a:t>Transform</a:t>
-            </a:r>
-            <a:r>
-              <a:rPr lang="ko-KR" altLang="ko-KR" sz="2200" dirty="0">
-                <a:latin typeface="Arial" panose="020B0604020202020204" pitchFamily="34" charset="0"/>
-              </a:rPr>
-              <a:t> : </a:t>
-            </a:r>
-            <a:r>
-              <a:rPr lang="ko-KR" altLang="ko-KR" sz="2200" dirty="0" err="1">
-                <a:latin typeface="Arial" panose="020B0604020202020204" pitchFamily="34" charset="0"/>
-              </a:rPr>
-              <a:t>VLM의</a:t>
-            </a:r>
-            <a:r>
-              <a:rPr lang="ko-KR" altLang="ko-KR" sz="2200" dirty="0">
-                <a:latin typeface="Arial" panose="020B0604020202020204" pitchFamily="34" charset="0"/>
-              </a:rPr>
-              <a:t> </a:t>
-            </a:r>
-            <a:r>
-              <a:rPr lang="ko-KR" altLang="ko-KR" sz="2200" dirty="0" err="1">
-                <a:latin typeface="Arial" panose="020B0604020202020204" pitchFamily="34" charset="0"/>
-              </a:rPr>
-              <a:t>Key</a:t>
-            </a:r>
-            <a:r>
-              <a:rPr lang="ko-KR" altLang="ko-KR" sz="2200" dirty="0">
-                <a:latin typeface="Arial" panose="020B0604020202020204" pitchFamily="34" charset="0"/>
-              </a:rPr>
-              <a:t>/</a:t>
-            </a:r>
-            <a:r>
-              <a:rPr lang="ko-KR" altLang="ko-KR" sz="2200" dirty="0" err="1">
-                <a:latin typeface="Arial" panose="020B0604020202020204" pitchFamily="34" charset="0"/>
-              </a:rPr>
-              <a:t>Value</a:t>
-            </a:r>
-            <a:r>
-              <a:rPr lang="ko-KR" altLang="ko-KR" sz="2200" dirty="0">
-                <a:latin typeface="Arial" panose="020B0604020202020204" pitchFamily="34" charset="0"/>
-              </a:rPr>
-              <a:t> 정보를 조합해 </a:t>
-            </a:r>
-            <a:r>
-              <a:rPr lang="ko-KR" altLang="ko-KR" sz="2200" dirty="0" err="1">
-                <a:latin typeface="Arial" panose="020B0604020202020204" pitchFamily="34" charset="0"/>
-              </a:rPr>
-              <a:t>attention</a:t>
-            </a:r>
-            <a:r>
-              <a:rPr lang="ko-KR" altLang="ko-KR" sz="2200" dirty="0">
-                <a:latin typeface="Arial" panose="020B0604020202020204" pitchFamily="34" charset="0"/>
-              </a:rPr>
-              <a:t> 활용 개선 </a:t>
-            </a:r>
-          </a:p>
-          <a:p>
-            <a:pPr lvl="0" defTabSz="914400" eaLnBrk="0" fontAlgn="base" hangingPunct="0">
-              <a:spcBef>
-                <a:spcPct val="0"/>
-              </a:spcBef>
-              <a:spcAft>
-                <a:spcPct val="0"/>
-              </a:spcAft>
-            </a:pPr>
-            <a:r>
-              <a:rPr lang="en-US" altLang="ko-KR" sz="2200" b="1" dirty="0">
-                <a:latin typeface="Arial" panose="020B0604020202020204" pitchFamily="34" charset="0"/>
-              </a:rPr>
-              <a:t> </a:t>
-            </a:r>
-            <a:r>
-              <a:rPr lang="ko-KR" altLang="ko-KR" sz="2200" b="1" dirty="0" err="1">
-                <a:latin typeface="Arial" panose="020B0604020202020204" pitchFamily="34" charset="0"/>
-              </a:rPr>
-              <a:t>Custom</a:t>
-            </a:r>
-            <a:r>
-              <a:rPr lang="ko-KR" altLang="ko-KR" sz="2200" b="1" dirty="0">
-                <a:latin typeface="Arial" panose="020B0604020202020204" pitchFamily="34" charset="0"/>
-              </a:rPr>
-              <a:t> </a:t>
-            </a:r>
-            <a:r>
-              <a:rPr lang="ko-KR" altLang="ko-KR" sz="2200" b="1" dirty="0" err="1">
-                <a:latin typeface="Arial" panose="020B0604020202020204" pitchFamily="34" charset="0"/>
-              </a:rPr>
-              <a:t>Attention</a:t>
-            </a:r>
-            <a:r>
-              <a:rPr lang="ko-KR" altLang="ko-KR" sz="2200" b="1" dirty="0">
-                <a:latin typeface="Arial" panose="020B0604020202020204" pitchFamily="34" charset="0"/>
-              </a:rPr>
-              <a:t> </a:t>
-            </a:r>
-            <a:r>
-              <a:rPr lang="ko-KR" altLang="ko-KR" sz="2200" b="1" dirty="0" err="1">
-                <a:latin typeface="Arial" panose="020B0604020202020204" pitchFamily="34" charset="0"/>
-              </a:rPr>
-              <a:t>Masks</a:t>
-            </a:r>
-            <a:r>
-              <a:rPr lang="ko-KR" altLang="ko-KR" sz="2200" dirty="0">
-                <a:latin typeface="Arial" panose="020B0604020202020204" pitchFamily="34" charset="0"/>
-              </a:rPr>
-              <a:t> : </a:t>
-            </a:r>
-            <a:r>
-              <a:rPr lang="ko-KR" altLang="ko-KR" sz="2200" dirty="0" err="1">
-                <a:latin typeface="Arial" panose="020B0604020202020204" pitchFamily="34" charset="0"/>
-              </a:rPr>
-              <a:t>token</a:t>
-            </a:r>
-            <a:r>
-              <a:rPr lang="ko-KR" altLang="ko-KR" sz="2200" dirty="0">
-                <a:latin typeface="Arial" panose="020B0604020202020204" pitchFamily="34" charset="0"/>
-              </a:rPr>
-              <a:t> 간 정보 흐름을 제한해 학습 안정성 향상</a:t>
-            </a:r>
-            <a:endParaRPr lang="en-US" altLang="ko-KR" sz="2200" dirty="0">
-              <a:latin typeface="+mn-ea"/>
-            </a:endParaRPr>
-          </a:p>
-        </p:txBody>
-      </p:sp>
-      <p:sp>
-        <p:nvSpPr>
-          <p:cNvPr id="28" name="TextBox 27">
-            <a:extLst>
-              <a:ext uri="{FF2B5EF4-FFF2-40B4-BE49-F238E27FC236}">
-                <a16:creationId xmlns:a16="http://schemas.microsoft.com/office/drawing/2014/main" id="{FA8B75AA-D85E-C3A4-7671-DD508ADE16BA}"/>
-              </a:ext>
-            </a:extLst>
-          </p:cNvPr>
-          <p:cNvSpPr txBox="1"/>
-          <p:nvPr/>
-        </p:nvSpPr>
-        <p:spPr>
-          <a:xfrm>
-            <a:off x="530855" y="11468788"/>
-            <a:ext cx="4019006" cy="646331"/>
-          </a:xfrm>
-          <a:prstGeom prst="rect">
-            <a:avLst/>
-          </a:prstGeom>
-          <a:gradFill flip="none" rotWithShape="1">
-            <a:gsLst>
-              <a:gs pos="0">
-                <a:schemeClr val="accent4">
-                  <a:shade val="30000"/>
-                  <a:satMod val="115000"/>
-                  <a:lumMod val="48000"/>
-                  <a:alpha val="95000"/>
-                </a:schemeClr>
-              </a:gs>
-              <a:gs pos="50000">
-                <a:schemeClr val="accent4">
-                  <a:lumMod val="50000"/>
-                  <a:shade val="67500"/>
-                  <a:satMod val="115000"/>
-                </a:schemeClr>
-              </a:gs>
-              <a:gs pos="100000">
-                <a:schemeClr val="accent4">
-                  <a:lumMod val="50000"/>
-                  <a:shade val="100000"/>
-                  <a:satMod val="115000"/>
-                </a:schemeClr>
-              </a:gs>
-            </a:gsLst>
-            <a:path path="rect">
-              <a:fillToRect l="50000" t="50000" r="50000" b="50000"/>
-            </a:path>
-            <a:tileRect/>
-          </a:gradFill>
-          <a:ln w="57150">
-            <a:solidFill>
-              <a:schemeClr val="accent4">
-                <a:lumMod val="50000"/>
-              </a:schemeClr>
-            </a:solidFill>
-          </a:ln>
-        </p:spPr>
-        <p:txBody>
-          <a:bodyPr wrap="square" rtlCol="0">
-            <a:spAutoFit/>
-          </a:bodyPr>
-          <a:lstStyle/>
-          <a:p>
-            <a:pPr algn="ctr"/>
-            <a:r>
-              <a:rPr lang="ko-KR" altLang="en-US" sz="3600" b="1" dirty="0">
-                <a:solidFill>
-                  <a:schemeClr val="bg1"/>
-                </a:solidFill>
-                <a:latin typeface="+mn-ea"/>
-              </a:rPr>
-              <a:t>모델 구조</a:t>
-            </a:r>
-          </a:p>
-        </p:txBody>
-      </p:sp>
       <p:grpSp>
         <p:nvGrpSpPr>
           <p:cNvPr id="35" name="그룹 34">
@@ -5430,10 +5147,10 @@
         </p:nvGrpSpPr>
         <p:grpSpPr>
           <a:xfrm>
-            <a:off x="10704929" y="16574975"/>
-            <a:ext cx="10180800" cy="6084000"/>
-            <a:chOff x="518849" y="571413"/>
-            <a:chExt cx="10169298" cy="6009061"/>
+            <a:off x="10699722" y="19435401"/>
+            <a:ext cx="10169298" cy="2400657"/>
+            <a:chOff x="518849" y="2676208"/>
+            <a:chExt cx="10169298" cy="2268526"/>
           </a:xfrm>
         </p:grpSpPr>
         <p:sp>
@@ -5450,8 +5167,8 @@
           </p:nvSpPr>
           <p:spPr>
             <a:xfrm>
-              <a:off x="518849" y="571413"/>
-              <a:ext cx="10169298" cy="6009061"/>
+              <a:off x="518849" y="2676208"/>
+              <a:ext cx="10169298" cy="2268526"/>
             </a:xfrm>
             <a:prstGeom prst="rect">
               <a:avLst/>
@@ -5472,236 +5189,115 @@
             <a:lstStyle/>
             <a:p>
               <a:pPr algn="ctr"/>
-              <a:endParaRPr lang="en-US" altLang="ko-KR" sz="4800" b="1" dirty="0">
+              <a:endParaRPr lang="en-US" altLang="ko-KR" sz="5400" b="1" dirty="0">
                 <a:latin typeface="+mn-ea"/>
               </a:endParaRPr>
             </a:p>
             <a:p>
+              <a:pPr marL="342900" indent="-342900">
+                <a:buFont typeface="Arial" panose="020B0604020202020204" pitchFamily="34" charset="0"/>
+                <a:buChar char="•"/>
+              </a:pPr>
               <a:r>
-                <a:rPr lang="en-US" altLang="ko-KR" sz="2400" b="1" dirty="0"/>
+                <a:rPr lang="ko-KR" altLang="ko-KR" sz="2400" dirty="0" err="1"/>
+                <a:t>Loss는</a:t>
+              </a:r>
+              <a:r>
+                <a:rPr lang="ko-KR" altLang="ko-KR" sz="2400" dirty="0"/>
+                <a:t> 안정적으로 감소했으나 실제 </a:t>
+              </a:r>
+              <a:r>
+                <a:rPr lang="ko-KR" altLang="ko-KR" sz="2400" dirty="0" err="1"/>
+                <a:t>rollout</a:t>
+              </a:r>
+              <a:r>
+                <a:rPr lang="ko-KR" altLang="ko-KR" sz="2400" dirty="0"/>
+                <a:t> 성능과 완전히 비례하지 않음</a:t>
+              </a:r>
+              <a:endParaRPr lang="en-US" altLang="ko-KR" sz="2400" dirty="0"/>
+            </a:p>
+            <a:p>
+              <a:pPr marL="342900" indent="-342900">
+                <a:buFont typeface="Arial" panose="020B0604020202020204" pitchFamily="34" charset="0"/>
+                <a:buChar char="•"/>
+              </a:pPr>
+              <a:r>
+                <a:rPr lang="ko-KR" altLang="ko-KR" sz="2400" dirty="0" err="1"/>
+                <a:t>Out</a:t>
+              </a:r>
+              <a:r>
+                <a:rPr lang="ko-KR" altLang="ko-KR" sz="2400" dirty="0"/>
+                <a:t>-of-</a:t>
+              </a:r>
+              <a:r>
+                <a:rPr lang="ko-KR" altLang="ko-KR" sz="2400" dirty="0" err="1"/>
+                <a:t>Distribution</a:t>
+              </a:r>
+              <a:r>
+                <a:rPr lang="ko-KR" altLang="ko-KR" sz="2400" dirty="0"/>
+                <a:t>(OOD) 상태 취약성</a:t>
+              </a:r>
+              <a:endParaRPr lang="en-US" altLang="ko-KR" sz="3600" dirty="0">
+                <a:latin typeface="+mn-ea"/>
+              </a:endParaRPr>
+            </a:p>
+            <a:p>
+              <a:pPr marL="342900" indent="-342900">
+                <a:buFont typeface="Arial" panose="020B0604020202020204" pitchFamily="34" charset="0"/>
+                <a:buChar char="•"/>
+              </a:pPr>
+              <a:r>
+                <a:rPr lang="ko-KR" altLang="ko-KR" sz="2400" dirty="0" err="1"/>
+                <a:t>Stage</a:t>
+              </a:r>
+              <a:r>
+                <a:rPr lang="ko-KR" altLang="ko-KR" sz="2400" dirty="0"/>
                 <a:t> </a:t>
               </a:r>
               <a:r>
-                <a:rPr lang="ko-KR" altLang="ko-KR" sz="2400" b="1" dirty="0"/>
-                <a:t>1. 학습 및 파이프라인 검증</a:t>
+                <a:rPr lang="ko-KR" altLang="ko-KR" sz="2400" dirty="0" err="1"/>
+                <a:t>Tracking</a:t>
               </a:r>
+              <a:r>
+                <a:rPr lang="ko-KR" altLang="ko-KR" sz="2400" dirty="0"/>
+                <a:t> 한계</a:t>
+              </a:r>
+              <a:endParaRPr lang="en-US" altLang="ko-KR" sz="2400" dirty="0"/>
             </a:p>
             <a:p>
+              <a:pPr marL="342900" indent="-342900">
+                <a:buFont typeface="Arial" panose="020B0604020202020204" pitchFamily="34" charset="0"/>
+                <a:buChar char="•"/>
+              </a:pPr>
               <a:r>
-                <a:rPr lang="en-US" altLang="ko-KR" sz="2200" dirty="0"/>
+                <a:rPr lang="ko-KR" altLang="ko-KR" sz="2400" dirty="0"/>
+                <a:t>제한된 GPU 자원 환경에서 </a:t>
+              </a:r>
+              <a:r>
+                <a:rPr lang="ko-KR" altLang="en-US" sz="2400" dirty="0"/>
+                <a:t>학습 </a:t>
+              </a:r>
+              <a:r>
+                <a:rPr lang="ko-KR" altLang="ko-KR" sz="2400" dirty="0"/>
+                <a:t>및 </a:t>
+              </a:r>
+              <a:r>
+                <a:rPr lang="ko-KR" altLang="ko-KR" sz="2400" dirty="0" err="1"/>
+                <a:t>rollout</a:t>
+              </a:r>
+              <a:r>
+                <a:rPr lang="ko-KR" altLang="ko-KR" sz="2400" dirty="0"/>
                 <a:t> </a:t>
               </a:r>
               <a:r>
-                <a:rPr lang="ko-KR" altLang="ko-KR" sz="2200" dirty="0" err="1"/>
-                <a:t>Total</a:t>
-              </a:r>
-              <a:r>
-                <a:rPr lang="ko-KR" altLang="ko-KR" sz="2200" dirty="0"/>
-                <a:t> </a:t>
-              </a:r>
-              <a:r>
-                <a:rPr lang="ko-KR" altLang="ko-KR" sz="2200" dirty="0" err="1"/>
-                <a:t>loss</a:t>
-              </a:r>
-              <a:r>
-                <a:rPr lang="ko-KR" altLang="ko-KR" sz="2200" dirty="0"/>
-                <a:t> 감소 및 </a:t>
-              </a:r>
-              <a:r>
-                <a:rPr lang="ko-KR" altLang="ko-KR" sz="2200" dirty="0" err="1"/>
-                <a:t>stage</a:t>
-              </a:r>
-              <a:r>
-                <a:rPr lang="ko-KR" altLang="ko-KR" sz="2200" dirty="0"/>
-                <a:t> </a:t>
-              </a:r>
-              <a:r>
-                <a:rPr lang="ko-KR" altLang="ko-KR" sz="2200" dirty="0" err="1"/>
-                <a:t>accuracy</a:t>
-              </a:r>
-              <a:r>
-                <a:rPr lang="ko-KR" altLang="ko-KR" sz="2200" dirty="0"/>
-                <a:t> 향상 </a:t>
-              </a:r>
-            </a:p>
-            <a:p>
-              <a:r>
-                <a:rPr lang="en-US" altLang="ko-KR" sz="2200" dirty="0"/>
-                <a:t> </a:t>
-              </a:r>
-              <a:r>
-                <a:rPr lang="ko-KR" altLang="ko-KR" sz="2200" dirty="0"/>
-                <a:t>W&amp;B </a:t>
-              </a:r>
-              <a:r>
-                <a:rPr lang="ko-KR" altLang="ko-KR" sz="2200" dirty="0" err="1"/>
-                <a:t>logging</a:t>
-              </a:r>
-              <a:r>
-                <a:rPr lang="ko-KR" altLang="ko-KR" sz="2200" dirty="0"/>
-                <a:t> / </a:t>
-              </a:r>
-              <a:r>
-                <a:rPr lang="ko-KR" altLang="ko-KR" sz="2200" dirty="0" err="1"/>
-                <a:t>checkpoint</a:t>
-              </a:r>
-              <a:r>
-                <a:rPr lang="ko-KR" altLang="ko-KR" sz="2200" dirty="0"/>
-                <a:t> 저장 검증 </a:t>
-              </a:r>
-            </a:p>
-            <a:p>
-              <a:r>
-                <a:rPr lang="en-US" altLang="ko-KR" sz="2200" dirty="0"/>
-                <a:t> </a:t>
-              </a:r>
-              <a:r>
-                <a:rPr lang="ko-KR" altLang="ko-KR" sz="2200" dirty="0"/>
-                <a:t>A100–RTX5070 기반 </a:t>
-              </a:r>
-              <a:r>
-                <a:rPr lang="ko-KR" altLang="ko-KR" sz="2200" dirty="0" err="1"/>
-                <a:t>rollout</a:t>
-              </a:r>
-              <a:r>
-                <a:rPr lang="ko-KR" altLang="ko-KR" sz="2200" dirty="0"/>
-                <a:t> </a:t>
-              </a:r>
-              <a:r>
-                <a:rPr lang="ko-KR" altLang="ko-KR" sz="2200" dirty="0" err="1"/>
+                <a:rPr lang="ko-KR" altLang="ko-KR" sz="2400" dirty="0" err="1"/>
                 <a:t>pipeline</a:t>
               </a:r>
               <a:r>
-                <a:rPr lang="ko-KR" altLang="ko-KR" sz="2200" dirty="0"/>
-                <a:t> 구축 </a:t>
+                <a:rPr lang="ko-KR" altLang="ko-KR" sz="2400" dirty="0"/>
+                <a:t> 검증</a:t>
               </a:r>
-              <a:endParaRPr lang="en-US" altLang="ko-KR" sz="2200" dirty="0"/>
-            </a:p>
-            <a:p>
-              <a:endParaRPr lang="ko-KR" altLang="ko-KR" sz="1400" dirty="0"/>
-            </a:p>
-            <a:p>
-              <a:r>
-                <a:rPr lang="en-US" altLang="ko-KR" sz="2400" b="1" dirty="0"/>
-                <a:t> 2. </a:t>
-              </a:r>
-              <a:r>
-                <a:rPr lang="ko-KR" altLang="en-US" sz="2400" b="1" dirty="0"/>
-                <a:t>결과 비교</a:t>
-              </a:r>
-              <a:endParaRPr lang="en-US" altLang="ko-KR" sz="2400" b="1" dirty="0"/>
-            </a:p>
-            <a:p>
-              <a:endParaRPr lang="en-US" altLang="ko-KR" sz="2400" b="1" dirty="0"/>
-            </a:p>
-            <a:p>
-              <a:endParaRPr lang="en-US" altLang="ko-KR" sz="2400" b="1" dirty="0"/>
-            </a:p>
-            <a:p>
-              <a:endParaRPr lang="en-US" altLang="ko-KR" sz="2400" b="1" dirty="0"/>
-            </a:p>
-            <a:p>
-              <a:endParaRPr lang="en-US" altLang="ko-KR" sz="2400" b="1" dirty="0"/>
-            </a:p>
-            <a:p>
-              <a:endParaRPr lang="en-US" altLang="ko-KR" sz="2000" b="1" dirty="0"/>
-            </a:p>
-            <a:p>
-              <a:r>
-                <a:rPr lang="en-US" altLang="ko-KR" sz="2400" b="1" dirty="0"/>
-                <a:t> 3</a:t>
-              </a:r>
-              <a:r>
-                <a:rPr lang="ko-KR" altLang="ko-KR" sz="2400" b="1" dirty="0"/>
-                <a:t>. </a:t>
-              </a:r>
-              <a:r>
-                <a:rPr lang="ko-KR" altLang="ko-KR" sz="2400" b="1" dirty="0" err="1"/>
-                <a:t>Rollout</a:t>
-              </a:r>
-              <a:r>
-                <a:rPr lang="ko-KR" altLang="ko-KR" sz="2400" b="1" dirty="0"/>
-                <a:t> 성능 한계</a:t>
-              </a:r>
-            </a:p>
-            <a:p>
-              <a:r>
-                <a:rPr lang="en-US" altLang="ko-KR" sz="2400" dirty="0"/>
-                <a:t> </a:t>
-              </a:r>
-              <a:r>
-                <a:rPr lang="ko-KR" altLang="ko-KR" sz="2200" dirty="0"/>
-                <a:t>OOD 상태에서 </a:t>
-              </a:r>
-              <a:r>
-                <a:rPr lang="ko-KR" altLang="ko-KR" sz="2200" dirty="0" err="1"/>
-                <a:t>freeze·반복</a:t>
-              </a:r>
-              <a:r>
-                <a:rPr lang="ko-KR" altLang="ko-KR" sz="2200" dirty="0"/>
-                <a:t> 행동 발생 </a:t>
-              </a:r>
-            </a:p>
-            <a:p>
-              <a:r>
-                <a:rPr lang="en-US" altLang="ko-KR" sz="2200" dirty="0"/>
-                <a:t> </a:t>
-              </a:r>
-              <a:r>
-                <a:rPr lang="ko-KR" altLang="ko-KR" sz="2200" dirty="0" err="1"/>
-                <a:t>Normalization</a:t>
-              </a:r>
-              <a:r>
-                <a:rPr lang="ko-KR" altLang="ko-KR" sz="2200" dirty="0"/>
-                <a:t> 및 </a:t>
-              </a:r>
-              <a:r>
-                <a:rPr lang="ko-KR" altLang="ko-KR" sz="2200" dirty="0" err="1"/>
-                <a:t>action</a:t>
-              </a:r>
-              <a:r>
-                <a:rPr lang="ko-KR" altLang="ko-KR" sz="2200" dirty="0"/>
-                <a:t> </a:t>
-              </a:r>
-              <a:r>
-                <a:rPr lang="ko-KR" altLang="ko-KR" sz="2200" dirty="0" err="1"/>
-                <a:t>scale</a:t>
-              </a:r>
-              <a:r>
-                <a:rPr lang="ko-KR" altLang="ko-KR" sz="2200" dirty="0"/>
-                <a:t> 차이로 </a:t>
-              </a:r>
-              <a:r>
-                <a:rPr lang="ko-KR" altLang="ko-KR" sz="2200" dirty="0" err="1"/>
-                <a:t>base</a:t>
-              </a:r>
-              <a:r>
-                <a:rPr lang="ko-KR" altLang="ko-KR" sz="2200" dirty="0"/>
-                <a:t> 불안정 </a:t>
-              </a:r>
-            </a:p>
-            <a:p>
-              <a:r>
-                <a:rPr lang="en-US" altLang="ko-KR" sz="2200" dirty="0"/>
-                <a:t> </a:t>
-              </a:r>
-              <a:r>
-                <a:rPr lang="ko-KR" altLang="ko-KR" sz="2200" dirty="0" err="1"/>
-                <a:t>Stage</a:t>
-              </a:r>
-              <a:r>
-                <a:rPr lang="ko-KR" altLang="ko-KR" sz="2200" dirty="0"/>
-                <a:t> </a:t>
-              </a:r>
-              <a:r>
-                <a:rPr lang="ko-KR" altLang="ko-KR" sz="2200" dirty="0" err="1"/>
-                <a:t>tracking</a:t>
-              </a:r>
-              <a:r>
-                <a:rPr lang="ko-KR" altLang="ko-KR" sz="2200" dirty="0"/>
-                <a:t> 및 정밀 조작 성능 한계 확인</a:t>
-              </a:r>
-              <a:endParaRPr lang="en-US" altLang="ko-KR" sz="2200" dirty="0"/>
+              <a:endParaRPr lang="en-US" altLang="ko-KR" sz="2400" dirty="0"/>
             </a:p>
           </p:txBody>
         </p:sp>
@@ -5719,7 +5315,7 @@
           </p:nvSpPr>
           <p:spPr>
             <a:xfrm>
-              <a:off x="522513" y="585816"/>
+              <a:off x="522513" y="2690609"/>
               <a:ext cx="4019006" cy="610757"/>
             </a:xfrm>
             <a:prstGeom prst="rect">
@@ -5796,8 +5392,8 @@
         </p:nvSpPr>
         <p:spPr>
           <a:xfrm>
-            <a:off x="526393" y="19808001"/>
-            <a:ext cx="10180800" cy="7452000"/>
+            <a:off x="514201" y="20933409"/>
+            <a:ext cx="10184232" cy="6340197"/>
           </a:xfrm>
           <a:prstGeom prst="rect">
             <a:avLst/>
@@ -5832,14 +5428,14 @@
           </a:p>
           <a:p>
             <a:r>
-              <a:rPr lang="en-US" altLang="ko-KR" sz="2200" dirty="0">
+              <a:rPr lang="en-US" altLang="ko-KR" sz="2400" dirty="0">
                 <a:latin typeface="+mn-ea"/>
               </a:rPr>
               <a:t> A100 80GB GPU Server, RTX 5070 PC, Ubuntu + JAX/Flax</a:t>
             </a:r>
           </a:p>
           <a:p>
-            <a:endParaRPr lang="en-US" altLang="ko-KR" sz="1200" b="1" dirty="0">
+            <a:endParaRPr lang="en-US" altLang="ko-KR" sz="2800" b="1" dirty="0">
               <a:latin typeface="+mn-ea"/>
             </a:endParaRPr>
           </a:p>
@@ -5898,25 +5494,9 @@
           </a:p>
           <a:p>
             <a:pPr algn="ctr"/>
-            <a:endParaRPr lang="en-US" altLang="ko-KR" sz="2000" dirty="0">
+            <a:endParaRPr lang="en-US" altLang="ko-KR" sz="3600" dirty="0">
               <a:latin typeface="+mn-ea"/>
             </a:endParaRPr>
-          </a:p>
-          <a:p>
-            <a:r>
-              <a:rPr lang="en-US" altLang="ko-KR" sz="2400" b="1" dirty="0">
-                <a:latin typeface="+mn-ea"/>
-              </a:rPr>
-              <a:t>3. Selected 12 Tasks</a:t>
-            </a:r>
-          </a:p>
-          <a:p>
-            <a:r>
-              <a:rPr lang="en-US" altLang="ko-KR" sz="2200" dirty="0">
-                <a:latin typeface="+mn-ea"/>
-              </a:rPr>
-              <a:t>Turning on radio, Picking up trash, Setting mousetraps, Putting dishes away, Preparing lunch box, Outfit a basic toolbox, Putting shoes on rack, Clean boxing gloves, Spraying fruit trees, Make microwave popcorn, Cook hot dogs, Cook bacon</a:t>
-            </a:r>
           </a:p>
         </p:txBody>
       </p:sp>
@@ -5934,7 +5514,7 @@
         </p:nvSpPr>
         <p:spPr>
           <a:xfrm>
-            <a:off x="534087" y="19808001"/>
+            <a:off x="534087" y="20933409"/>
             <a:ext cx="4014431" cy="646331"/>
           </a:xfrm>
           <a:prstGeom prst="rect">
@@ -5991,7 +5571,7 @@
                 </a:solidFill>
                 <a:latin typeface="+mn-ea"/>
               </a:rPr>
-              <a:t>실험 환경</a:t>
+              <a:t>실험 전략</a:t>
             </a:r>
           </a:p>
         </p:txBody>
@@ -6010,8 +5590,8 @@
         </p:nvSpPr>
         <p:spPr>
           <a:xfrm>
-            <a:off x="526393" y="27268442"/>
-            <a:ext cx="20359424" cy="2462213"/>
+            <a:off x="514202" y="27270982"/>
+            <a:ext cx="20353529" cy="2268000"/>
           </a:xfrm>
           <a:prstGeom prst="rect">
             <a:avLst/>
@@ -6037,639 +5617,443 @@
           </a:p>
           <a:p>
             <a:r>
-              <a:rPr lang="en-US" altLang="ko-KR" sz="2200" dirty="0">
-                <a:latin typeface="+mn-ea"/>
-              </a:rPr>
-              <a:t>1. </a:t>
-            </a:r>
-            <a:r>
-              <a:rPr lang="ko-KR" altLang="ko-KR" sz="2200" dirty="0" err="1">
-                <a:latin typeface="+mn-ea"/>
-              </a:rPr>
+              <a:rPr lang="en-US" altLang="ko-KR" sz="2400" dirty="0"/>
+              <a:t>1.</a:t>
+            </a:r>
+            <a:r>
+              <a:rPr lang="ko-KR" altLang="ko-KR" sz="2400" dirty="0"/>
+              <a:t> </a:t>
+            </a:r>
+            <a:r>
+              <a:rPr lang="ko-KR" altLang="ko-KR" sz="2400" dirty="0" err="1"/>
               <a:t>Ilia</a:t>
             </a:r>
             <a:r>
-              <a:rPr lang="ko-KR" altLang="ko-KR" sz="2200" dirty="0">
-                <a:latin typeface="+mn-ea"/>
-              </a:rPr>
+              <a:rPr lang="ko-KR" altLang="ko-KR" sz="2400" dirty="0"/>
               <a:t> </a:t>
             </a:r>
             <a:r>
-              <a:rPr lang="ko-KR" altLang="ko-KR" sz="2200" dirty="0" err="1">
-                <a:latin typeface="+mn-ea"/>
-              </a:rPr>
+              <a:rPr lang="ko-KR" altLang="ko-KR" sz="2400" dirty="0" err="1"/>
               <a:t>Larchenko</a:t>
             </a:r>
             <a:r>
-              <a:rPr lang="ko-KR" altLang="ko-KR" sz="2200" dirty="0">
-                <a:latin typeface="+mn-ea"/>
-              </a:rPr>
-              <a:t>, </a:t>
-            </a:r>
-            <a:r>
-              <a:rPr lang="ko-KR" altLang="ko-KR" sz="2200" dirty="0" err="1">
-                <a:latin typeface="+mn-ea"/>
-              </a:rPr>
-              <a:t>Gleb</a:t>
-            </a:r>
-            <a:r>
-              <a:rPr lang="ko-KR" altLang="ko-KR" sz="2200" dirty="0">
-                <a:latin typeface="+mn-ea"/>
-              </a:rPr>
+              <a:rPr lang="ko-KR" altLang="ko-KR" sz="2400" dirty="0"/>
               <a:t> </a:t>
             </a:r>
             <a:r>
-              <a:rPr lang="ko-KR" altLang="ko-KR" sz="2200" dirty="0" err="1">
-                <a:latin typeface="+mn-ea"/>
-              </a:rPr>
-              <a:t>Zarin</a:t>
-            </a:r>
-            <a:r>
-              <a:rPr lang="ko-KR" altLang="ko-KR" sz="2200" dirty="0">
-                <a:latin typeface="+mn-ea"/>
-              </a:rPr>
-              <a:t>, </a:t>
-            </a:r>
-            <a:r>
-              <a:rPr lang="ko-KR" altLang="ko-KR" sz="2200" dirty="0" err="1">
-                <a:latin typeface="+mn-ea"/>
-              </a:rPr>
-              <a:t>Akash</a:t>
-            </a:r>
-            <a:r>
-              <a:rPr lang="ko-KR" altLang="ko-KR" sz="2200" dirty="0">
-                <a:latin typeface="+mn-ea"/>
-              </a:rPr>
+              <a:rPr lang="ko-KR" altLang="ko-KR" sz="2400" dirty="0" err="1"/>
+              <a:t>et</a:t>
+            </a:r>
+            <a:r>
+              <a:rPr lang="ko-KR" altLang="ko-KR" sz="2400" dirty="0"/>
               <a:t> </a:t>
             </a:r>
             <a:r>
-              <a:rPr lang="ko-KR" altLang="ko-KR" sz="2200" dirty="0" err="1">
-                <a:latin typeface="+mn-ea"/>
-              </a:rPr>
-              <a:t>Karnatak</a:t>
-            </a:r>
-            <a:r>
-              <a:rPr lang="ko-KR" altLang="ko-KR" sz="2200" dirty="0">
-                <a:latin typeface="+mn-ea"/>
-              </a:rPr>
+              <a:rPr lang="ko-KR" altLang="ko-KR" sz="2400" dirty="0" err="1"/>
+              <a:t>al</a:t>
+            </a:r>
+            <a:r>
+              <a:rPr lang="ko-KR" altLang="ko-KR" sz="2400" dirty="0"/>
+              <a:t>., “</a:t>
+            </a:r>
+            <a:r>
+              <a:rPr lang="ko-KR" altLang="ko-KR" sz="2400" dirty="0" err="1"/>
+              <a:t>Task</a:t>
+            </a:r>
+            <a:r>
+              <a:rPr lang="ko-KR" altLang="ko-KR" sz="2400" dirty="0"/>
+              <a:t> </a:t>
+            </a:r>
+            <a:r>
+              <a:rPr lang="ko-KR" altLang="ko-KR" sz="2400" dirty="0" err="1"/>
+              <a:t>Adaptation</a:t>
+            </a:r>
+            <a:r>
+              <a:rPr lang="ko-KR" altLang="ko-KR" sz="2400" dirty="0"/>
+              <a:t> of </a:t>
+            </a:r>
+            <a:r>
+              <a:rPr lang="ko-KR" altLang="ko-KR" sz="2400" dirty="0" err="1"/>
+              <a:t>Vision-Language-Action</a:t>
+            </a:r>
+            <a:r>
+              <a:rPr lang="ko-KR" altLang="ko-KR" sz="2400" dirty="0"/>
+              <a:t> </a:t>
+            </a:r>
+            <a:r>
+              <a:rPr lang="ko-KR" altLang="ko-KR" sz="2400" dirty="0" err="1"/>
+              <a:t>Model</a:t>
+            </a:r>
+            <a:r>
+              <a:rPr lang="ko-KR" altLang="ko-KR" sz="2400" dirty="0"/>
+              <a:t>: 1st </a:t>
+            </a:r>
+            <a:r>
+              <a:rPr lang="ko-KR" altLang="ko-KR" sz="2400" dirty="0" err="1"/>
+              <a:t>Place</a:t>
+            </a:r>
+            <a:r>
+              <a:rPr lang="ko-KR" altLang="ko-KR" sz="2400" dirty="0"/>
+              <a:t> </a:t>
+            </a:r>
+            <a:r>
+              <a:rPr lang="ko-KR" altLang="ko-KR" sz="2400" dirty="0" err="1"/>
+              <a:t>Solution</a:t>
+            </a:r>
+            <a:r>
+              <a:rPr lang="ko-KR" altLang="ko-KR" sz="2400" dirty="0"/>
+              <a:t> </a:t>
+            </a:r>
+            <a:r>
+              <a:rPr lang="ko-KR" altLang="ko-KR" sz="2400" dirty="0" err="1"/>
+              <a:t>for</a:t>
+            </a:r>
+            <a:r>
+              <a:rPr lang="ko-KR" altLang="ko-KR" sz="2400" dirty="0"/>
+              <a:t> </a:t>
+            </a:r>
+            <a:r>
+              <a:rPr lang="ko-KR" altLang="ko-KR" sz="2400" dirty="0" err="1"/>
+              <a:t>the</a:t>
+            </a:r>
+            <a:r>
+              <a:rPr lang="ko-KR" altLang="ko-KR" sz="2400" dirty="0"/>
+              <a:t> 2025 BEHAVIOR </a:t>
+            </a:r>
+            <a:r>
+              <a:rPr lang="ko-KR" altLang="ko-KR" sz="2400" dirty="0" err="1"/>
+              <a:t>Challenge</a:t>
+            </a:r>
+            <a:r>
+              <a:rPr lang="ko-KR" altLang="ko-KR" sz="2400" dirty="0"/>
+              <a:t>”, 2025</a:t>
+            </a:r>
+            <a:br>
+              <a:rPr lang="ko-KR" altLang="ko-KR" sz="2400" dirty="0"/>
+            </a:br>
+            <a:r>
+              <a:rPr lang="ko-KR" altLang="ko-KR" sz="2400" dirty="0"/>
+              <a:t>2. </a:t>
+            </a:r>
+            <a:r>
+              <a:rPr lang="ko-KR" altLang="ko-KR" sz="2400" dirty="0" err="1"/>
+              <a:t>M</a:t>
+            </a:r>
+            <a:r>
+              <a:rPr lang="ko-KR" altLang="ko-KR" sz="2400" dirty="0"/>
+              <a:t>. </a:t>
+            </a:r>
+            <a:r>
+              <a:rPr lang="ko-KR" altLang="ko-KR" sz="2400" dirty="0" err="1"/>
+              <a:t>Torne</a:t>
+            </a:r>
+            <a:r>
+              <a:rPr lang="ko-KR" altLang="ko-KR" sz="2400" dirty="0"/>
+              <a:t> </a:t>
+            </a:r>
+            <a:r>
+              <a:rPr lang="ko-KR" altLang="ko-KR" sz="2400" dirty="0" err="1"/>
+              <a:t>et</a:t>
+            </a:r>
+            <a:r>
+              <a:rPr lang="ko-KR" altLang="ko-KR" sz="2400" dirty="0"/>
+              <a:t> </a:t>
+            </a:r>
+            <a:r>
+              <a:rPr lang="ko-KR" altLang="ko-KR" sz="2400" dirty="0" err="1"/>
+              <a:t>al</a:t>
+            </a:r>
+            <a:r>
+              <a:rPr lang="ko-KR" altLang="ko-KR" sz="2400" dirty="0"/>
+              <a:t>.,</a:t>
+            </a:r>
+            <a:r>
+              <a:rPr lang="en-US" altLang="ko-KR" sz="2400" dirty="0"/>
+              <a:t> </a:t>
+            </a:r>
+            <a:r>
+              <a:rPr lang="ko-KR" altLang="ko-KR" sz="2400" dirty="0"/>
+              <a:t>“</a:t>
+            </a:r>
+            <a:r>
+              <a:rPr lang="ko-KR" altLang="ko-KR" sz="2400" dirty="0" err="1"/>
+              <a:t>MeM</a:t>
+            </a:r>
+            <a:r>
+              <a:rPr lang="ko-KR" altLang="ko-KR" sz="2400" dirty="0"/>
+              <a:t>: </a:t>
+            </a:r>
+            <a:r>
+              <a:rPr lang="ko-KR" altLang="ko-KR" sz="2400" dirty="0" err="1"/>
+              <a:t>Multi-Scale</a:t>
+            </a:r>
+            <a:r>
+              <a:rPr lang="ko-KR" altLang="ko-KR" sz="2400" dirty="0"/>
+              <a:t> </a:t>
+            </a:r>
+            <a:r>
+              <a:rPr lang="ko-KR" altLang="ko-KR" sz="2400" dirty="0" err="1"/>
+              <a:t>Embodied</a:t>
+            </a:r>
+            <a:r>
+              <a:rPr lang="ko-KR" altLang="ko-KR" sz="2400" dirty="0"/>
+              <a:t> </a:t>
+            </a:r>
+            <a:r>
+              <a:rPr lang="ko-KR" altLang="ko-KR" sz="2400" dirty="0" err="1"/>
+              <a:t>Memory</a:t>
+            </a:r>
+            <a:r>
+              <a:rPr lang="ko-KR" altLang="ko-KR" sz="2400" dirty="0"/>
+              <a:t> </a:t>
+            </a:r>
+            <a:r>
+              <a:rPr lang="ko-KR" altLang="ko-KR" sz="2400" dirty="0" err="1"/>
+              <a:t>for</a:t>
+            </a:r>
+            <a:r>
+              <a:rPr lang="ko-KR" altLang="ko-KR" sz="2400" dirty="0"/>
+              <a:t> </a:t>
+            </a:r>
+            <a:r>
+              <a:rPr lang="ko-KR" altLang="ko-KR" sz="2400" dirty="0" err="1"/>
+              <a:t>Vision-Language-Action</a:t>
+            </a:r>
+            <a:r>
+              <a:rPr lang="ko-KR" altLang="ko-KR" sz="2400" dirty="0"/>
+              <a:t> </a:t>
+            </a:r>
+            <a:r>
+              <a:rPr lang="ko-KR" altLang="ko-KR" sz="2400" dirty="0" err="1"/>
+              <a:t>Models</a:t>
+            </a:r>
+            <a:r>
+              <a:rPr lang="ko-KR" altLang="ko-KR" sz="2400" dirty="0"/>
+              <a:t>”, 2026</a:t>
+            </a:r>
+            <a:br>
+              <a:rPr lang="ko-KR" altLang="ko-KR" sz="2400" dirty="0"/>
+            </a:br>
+            <a:r>
+              <a:rPr lang="ko-KR" altLang="ko-KR" sz="2400" dirty="0"/>
+              <a:t>3. </a:t>
+            </a:r>
+            <a:r>
+              <a:rPr lang="ko-KR" altLang="ko-KR" sz="2400" dirty="0" err="1"/>
+              <a:t>Y</a:t>
+            </a:r>
+            <a:r>
+              <a:rPr lang="ko-KR" altLang="ko-KR" sz="2400" dirty="0"/>
+              <a:t>. </a:t>
+            </a:r>
+            <a:r>
+              <a:rPr lang="ko-KR" altLang="ko-KR" sz="2400" dirty="0" err="1"/>
+              <a:t>Tur</a:t>
+            </a:r>
+            <a:r>
+              <a:rPr lang="ko-KR" altLang="ko-KR" sz="2400" dirty="0"/>
+              <a:t> </a:t>
+            </a:r>
+            <a:r>
+              <a:rPr lang="ko-KR" altLang="ko-KR" sz="2400" dirty="0" err="1"/>
+              <a:t>et</a:t>
+            </a:r>
+            <a:r>
+              <a:rPr lang="ko-KR" altLang="ko-KR" sz="2400" dirty="0"/>
+              <a:t> </a:t>
+            </a:r>
+            <a:r>
+              <a:rPr lang="ko-KR" altLang="ko-KR" sz="2400" dirty="0" err="1"/>
+              <a:t>al</a:t>
+            </a:r>
+            <a:r>
+              <a:rPr lang="ko-KR" altLang="ko-KR" sz="2400" dirty="0"/>
+              <a:t>.,</a:t>
+            </a:r>
+            <a:r>
+              <a:rPr lang="en-US" altLang="ko-KR" sz="2400" dirty="0"/>
+              <a:t> </a:t>
+            </a:r>
+            <a:r>
+              <a:rPr lang="ko-KR" altLang="ko-KR" sz="2400" dirty="0"/>
+              <a:t>“</a:t>
+            </a:r>
+            <a:r>
+              <a:rPr lang="ko-KR" altLang="ko-KR" sz="2400" dirty="0" err="1"/>
+              <a:t>Recurrent-Depth</a:t>
+            </a:r>
+            <a:r>
+              <a:rPr lang="ko-KR" altLang="ko-KR" sz="2400" dirty="0"/>
+              <a:t> VLA: </a:t>
+            </a:r>
+            <a:r>
+              <a:rPr lang="ko-KR" altLang="ko-KR" sz="2400" dirty="0" err="1"/>
+              <a:t>Implicit</a:t>
+            </a:r>
+            <a:r>
+              <a:rPr lang="ko-KR" altLang="ko-KR" sz="2400" dirty="0"/>
+              <a:t> </a:t>
+            </a:r>
+            <a:r>
+              <a:rPr lang="ko-KR" altLang="ko-KR" sz="2400" dirty="0" err="1"/>
+              <a:t>Test</a:t>
+            </a:r>
+            <a:r>
+              <a:rPr lang="ko-KR" altLang="ko-KR" sz="2400" dirty="0"/>
+              <a:t>-Time </a:t>
+            </a:r>
+            <a:r>
+              <a:rPr lang="ko-KR" altLang="ko-KR" sz="2400" dirty="0" err="1"/>
+              <a:t>Compute</a:t>
+            </a:r>
+            <a:r>
+              <a:rPr lang="ko-KR" altLang="ko-KR" sz="2400" dirty="0"/>
+              <a:t> </a:t>
+            </a:r>
+            <a:r>
+              <a:rPr lang="ko-KR" altLang="ko-KR" sz="2400" dirty="0" err="1"/>
+              <a:t>Scaling</a:t>
+            </a:r>
+            <a:r>
+              <a:rPr lang="ko-KR" altLang="ko-KR" sz="2400" dirty="0"/>
+              <a:t> of </a:t>
+            </a:r>
+            <a:r>
+              <a:rPr lang="ko-KR" altLang="ko-KR" sz="2400" dirty="0" err="1"/>
+              <a:t>Vision-Language-Action</a:t>
+            </a:r>
+            <a:r>
+              <a:rPr lang="ko-KR" altLang="ko-KR" sz="2400" dirty="0"/>
+              <a:t> </a:t>
+            </a:r>
+            <a:r>
+              <a:rPr lang="ko-KR" altLang="ko-KR" sz="2400" dirty="0" err="1"/>
+              <a:t>Models</a:t>
+            </a:r>
+            <a:r>
+              <a:rPr lang="ko-KR" altLang="ko-KR" sz="2400" dirty="0"/>
+              <a:t> </a:t>
+            </a:r>
+            <a:r>
+              <a:rPr lang="ko-KR" altLang="ko-KR" sz="2400" dirty="0" err="1"/>
+              <a:t>via</a:t>
+            </a:r>
+            <a:r>
+              <a:rPr lang="ko-KR" altLang="ko-KR" sz="2400" dirty="0"/>
+              <a:t> </a:t>
+            </a:r>
+            <a:r>
+              <a:rPr lang="ko-KR" altLang="ko-KR" sz="2400" dirty="0" err="1"/>
+              <a:t>Latent</a:t>
+            </a:r>
+            <a:r>
+              <a:rPr lang="ko-KR" altLang="ko-KR" sz="2400" dirty="0"/>
+              <a:t> </a:t>
+            </a:r>
+            <a:r>
+              <a:rPr lang="ko-KR" altLang="ko-KR" sz="2400" dirty="0" err="1"/>
+              <a:t>Iterative</a:t>
+            </a:r>
+            <a:r>
+              <a:rPr lang="ko-KR" altLang="ko-KR" sz="2400" dirty="0"/>
+              <a:t> </a:t>
+            </a:r>
+            <a:r>
+              <a:rPr lang="ko-KR" altLang="ko-KR" sz="2400" dirty="0" err="1"/>
+              <a:t>Reasoning</a:t>
+            </a:r>
+            <a:r>
+              <a:rPr lang="ko-KR" altLang="ko-KR" sz="2400" dirty="0"/>
+              <a:t>”, 2026</a:t>
+            </a:r>
+            <a:br>
+              <a:rPr lang="ko-KR" altLang="ko-KR" sz="2400" dirty="0"/>
+            </a:br>
+            <a:r>
+              <a:rPr lang="ko-KR" altLang="ko-KR" sz="2400" dirty="0"/>
+              <a:t>4. </a:t>
+            </a:r>
+            <a:r>
+              <a:rPr lang="ko-KR" altLang="ko-KR" sz="2400" dirty="0" err="1"/>
+              <a:t>Physical</a:t>
+            </a:r>
+            <a:r>
+              <a:rPr lang="ko-KR" altLang="ko-KR" sz="2400" dirty="0"/>
+              <a:t> </a:t>
+            </a:r>
+            <a:r>
+              <a:rPr lang="ko-KR" altLang="ko-KR" sz="2400" dirty="0" err="1"/>
+              <a:t>Intelligence</a:t>
+            </a:r>
+            <a:r>
+              <a:rPr lang="ko-KR" altLang="ko-KR" sz="2400" dirty="0"/>
               <a:t>,</a:t>
             </a:r>
             <a:r>
-              <a:rPr lang="en-US" altLang="ko-KR" sz="2200" dirty="0">
-                <a:latin typeface="+mn-ea"/>
-              </a:rPr>
+              <a:rPr lang="en-US" altLang="ko-KR" sz="2400" dirty="0"/>
               <a:t> </a:t>
             </a:r>
             <a:r>
-              <a:rPr lang="ko-KR" altLang="ko-KR" sz="2200" dirty="0">
-                <a:latin typeface="+mn-ea"/>
-              </a:rPr>
-              <a:t>“</a:t>
-            </a:r>
-            <a:r>
-              <a:rPr lang="ko-KR" altLang="ko-KR" sz="2200" dirty="0" err="1">
-                <a:latin typeface="+mn-ea"/>
-              </a:rPr>
-              <a:t>Task</a:t>
-            </a:r>
-            <a:r>
-              <a:rPr lang="ko-KR" altLang="ko-KR" sz="2200" dirty="0">
-                <a:latin typeface="+mn-ea"/>
-              </a:rPr>
+              <a:rPr lang="ko-KR" altLang="ko-KR" sz="2400" dirty="0"/>
+              <a:t>“π*0.6: </a:t>
+            </a:r>
+            <a:r>
+              <a:rPr lang="ko-KR" altLang="ko-KR" sz="2400" dirty="0" err="1"/>
+              <a:t>A</a:t>
+            </a:r>
+            <a:r>
+              <a:rPr lang="ko-KR" altLang="ko-KR" sz="2400" dirty="0"/>
               <a:t> </a:t>
             </a:r>
             <a:r>
-              <a:rPr lang="ko-KR" altLang="ko-KR" sz="2200" dirty="0" err="1">
-                <a:latin typeface="+mn-ea"/>
-              </a:rPr>
-              <a:t>Adaptation</a:t>
-            </a:r>
-            <a:r>
-              <a:rPr lang="ko-KR" altLang="ko-KR" sz="2200" dirty="0">
-                <a:latin typeface="+mn-ea"/>
-              </a:rPr>
-              <a:t> of </a:t>
-            </a:r>
-            <a:r>
-              <a:rPr lang="ko-KR" altLang="ko-KR" sz="2200" dirty="0" err="1">
-                <a:latin typeface="+mn-ea"/>
-              </a:rPr>
+              <a:rPr lang="ko-KR" altLang="ko-KR" sz="2400" dirty="0" err="1"/>
               <a:t>Vision-Language-Action</a:t>
             </a:r>
             <a:r>
-              <a:rPr lang="ko-KR" altLang="ko-KR" sz="2200" dirty="0">
-                <a:latin typeface="+mn-ea"/>
-              </a:rPr>
+              <a:rPr lang="ko-KR" altLang="ko-KR" sz="2400" dirty="0"/>
               <a:t> </a:t>
             </a:r>
             <a:r>
-              <a:rPr lang="ko-KR" altLang="ko-KR" sz="2200" dirty="0" err="1">
-                <a:latin typeface="+mn-ea"/>
-              </a:rPr>
+              <a:rPr lang="ko-KR" altLang="ko-KR" sz="2400" dirty="0" err="1"/>
               <a:t>Model</a:t>
             </a:r>
             <a:r>
-              <a:rPr lang="ko-KR" altLang="ko-KR" sz="2200" dirty="0">
-                <a:latin typeface="+mn-ea"/>
-              </a:rPr>
-              <a:t>: 1st </a:t>
-            </a:r>
-            <a:r>
-              <a:rPr lang="ko-KR" altLang="ko-KR" sz="2200" dirty="0" err="1">
-                <a:latin typeface="+mn-ea"/>
-              </a:rPr>
-              <a:t>Place</a:t>
-            </a:r>
-            <a:r>
-              <a:rPr lang="ko-KR" altLang="ko-KR" sz="2200" dirty="0">
-                <a:latin typeface="+mn-ea"/>
-              </a:rPr>
+              <a:rPr lang="ko-KR" altLang="ko-KR" sz="2400" dirty="0"/>
               <a:t> </a:t>
             </a:r>
             <a:r>
-              <a:rPr lang="ko-KR" altLang="ko-KR" sz="2200" dirty="0" err="1">
-                <a:latin typeface="+mn-ea"/>
-              </a:rPr>
-              <a:t>Solution</a:t>
-            </a:r>
-            <a:r>
-              <a:rPr lang="ko-KR" altLang="ko-KR" sz="2200" dirty="0">
-                <a:latin typeface="+mn-ea"/>
-              </a:rPr>
+              <a:rPr lang="ko-KR" altLang="ko-KR" sz="2400" dirty="0" err="1"/>
+              <a:t>That</a:t>
+            </a:r>
+            <a:r>
+              <a:rPr lang="ko-KR" altLang="ko-KR" sz="2400" dirty="0"/>
               <a:t> </a:t>
             </a:r>
             <a:r>
-              <a:rPr lang="ko-KR" altLang="ko-KR" sz="2200" dirty="0" err="1">
-                <a:latin typeface="+mn-ea"/>
-              </a:rPr>
-              <a:t>for</a:t>
-            </a:r>
-            <a:r>
-              <a:rPr lang="ko-KR" altLang="ko-KR" sz="2200" dirty="0">
-                <a:latin typeface="+mn-ea"/>
-              </a:rPr>
+              <a:rPr lang="ko-KR" altLang="ko-KR" sz="2400" dirty="0" err="1"/>
+              <a:t>Learns</a:t>
+            </a:r>
+            <a:r>
+              <a:rPr lang="ko-KR" altLang="ko-KR" sz="2400" dirty="0"/>
               <a:t> </a:t>
             </a:r>
             <a:r>
-              <a:rPr lang="ko-KR" altLang="ko-KR" sz="2200" dirty="0" err="1">
-                <a:latin typeface="+mn-ea"/>
-              </a:rPr>
-              <a:t>the</a:t>
-            </a:r>
-            <a:r>
-              <a:rPr lang="ko-KR" altLang="ko-KR" sz="2200" dirty="0">
-                <a:latin typeface="+mn-ea"/>
-              </a:rPr>
-              <a:t> 2025 BEHAVIOR </a:t>
-            </a:r>
-            <a:r>
-              <a:rPr lang="ko-KR" altLang="ko-KR" sz="2200" dirty="0" err="1">
-                <a:latin typeface="+mn-ea"/>
-              </a:rPr>
-              <a:t>Challenge</a:t>
-            </a:r>
-            <a:r>
-              <a:rPr lang="ko-KR" altLang="ko-KR" sz="2200" dirty="0">
-                <a:latin typeface="+mn-ea"/>
-              </a:rPr>
-              <a:t>”, 2025,</a:t>
-            </a:r>
-            <a:r>
-              <a:rPr lang="en-US" altLang="ko-KR" sz="2200" dirty="0">
-                <a:latin typeface="+mn-ea"/>
-              </a:rPr>
+              <a:rPr lang="ko-KR" altLang="ko-KR" sz="2400" dirty="0" err="1"/>
+              <a:t>From</a:t>
+            </a:r>
+            <a:r>
+              <a:rPr lang="ko-KR" altLang="ko-KR" sz="2400" dirty="0"/>
               <a:t> </a:t>
             </a:r>
             <a:r>
-              <a:rPr lang="ko-KR" altLang="ko-KR" sz="2200" dirty="0">
-                <a:latin typeface="+mn-ea"/>
-              </a:rPr>
-              <a:t>arXiv:2512.06951.</a:t>
-            </a:r>
-            <a:endParaRPr lang="en-US" altLang="ko-KR" sz="2200" dirty="0">
-              <a:latin typeface="+mn-ea"/>
-            </a:endParaRPr>
-          </a:p>
-          <a:p>
-            <a:r>
-              <a:rPr lang="en-US" altLang="ko-KR" sz="2200" dirty="0">
-                <a:latin typeface="+mn-ea"/>
-              </a:rPr>
-              <a:t>2. </a:t>
-            </a:r>
-            <a:r>
-              <a:rPr lang="ko-KR" altLang="ko-KR" sz="2200" dirty="0" err="1">
-                <a:latin typeface="+mn-ea"/>
-              </a:rPr>
-              <a:t>Marcel</a:t>
-            </a:r>
-            <a:r>
-              <a:rPr lang="ko-KR" altLang="ko-KR" sz="2200" dirty="0">
-                <a:latin typeface="+mn-ea"/>
-              </a:rPr>
-              <a:t> </a:t>
-            </a:r>
-            <a:r>
-              <a:rPr lang="ko-KR" altLang="ko-KR" sz="2200" dirty="0" err="1">
-                <a:latin typeface="+mn-ea"/>
-              </a:rPr>
-              <a:t>Torne</a:t>
-            </a:r>
-            <a:r>
-              <a:rPr lang="ko-KR" altLang="ko-KR" sz="2200" dirty="0">
-                <a:latin typeface="+mn-ea"/>
-              </a:rPr>
-              <a:t> </a:t>
-            </a:r>
-            <a:r>
-              <a:rPr lang="ko-KR" altLang="ko-KR" sz="2200" dirty="0" err="1">
-                <a:latin typeface="+mn-ea"/>
-              </a:rPr>
-              <a:t>et</a:t>
-            </a:r>
-            <a:r>
-              <a:rPr lang="ko-KR" altLang="ko-KR" sz="2200" dirty="0">
-                <a:latin typeface="+mn-ea"/>
-              </a:rPr>
-              <a:t> </a:t>
-            </a:r>
-            <a:r>
-              <a:rPr lang="ko-KR" altLang="ko-KR" sz="2200" dirty="0" err="1">
-                <a:latin typeface="+mn-ea"/>
-              </a:rPr>
-              <a:t>al</a:t>
-            </a:r>
-            <a:r>
-              <a:rPr lang="ko-KR" altLang="ko-KR" sz="2200" dirty="0">
-                <a:latin typeface="+mn-ea"/>
-              </a:rPr>
-              <a:t>.,</a:t>
-            </a:r>
-            <a:r>
-              <a:rPr lang="en-US" altLang="ko-KR" sz="2200" dirty="0">
-                <a:latin typeface="+mn-ea"/>
-              </a:rPr>
-              <a:t> </a:t>
-            </a:r>
-            <a:r>
-              <a:rPr lang="ko-KR" altLang="ko-KR" sz="2200" dirty="0">
-                <a:latin typeface="+mn-ea"/>
-              </a:rPr>
-              <a:t>“MEM: </a:t>
-            </a:r>
-            <a:r>
-              <a:rPr lang="ko-KR" altLang="ko-KR" sz="2200" dirty="0" err="1">
-                <a:latin typeface="+mn-ea"/>
-              </a:rPr>
-              <a:t>Multi-Scale</a:t>
-            </a:r>
-            <a:r>
-              <a:rPr lang="ko-KR" altLang="ko-KR" sz="2200" dirty="0">
-                <a:latin typeface="+mn-ea"/>
-              </a:rPr>
-              <a:t> </a:t>
-            </a:r>
-            <a:r>
-              <a:rPr lang="ko-KR" altLang="ko-KR" sz="2200" dirty="0" err="1">
-                <a:latin typeface="+mn-ea"/>
-              </a:rPr>
-              <a:t>Embodied</a:t>
-            </a:r>
-            <a:r>
-              <a:rPr lang="ko-KR" altLang="ko-KR" sz="2200" dirty="0">
-                <a:latin typeface="+mn-ea"/>
-              </a:rPr>
-              <a:t> </a:t>
-            </a:r>
-            <a:r>
-              <a:rPr lang="ko-KR" altLang="ko-KR" sz="2200" dirty="0" err="1">
-                <a:latin typeface="+mn-ea"/>
-              </a:rPr>
-              <a:t>Memory</a:t>
-            </a:r>
-            <a:r>
-              <a:rPr lang="ko-KR" altLang="ko-KR" sz="2200" dirty="0">
-                <a:latin typeface="+mn-ea"/>
-              </a:rPr>
-              <a:t> </a:t>
-            </a:r>
-            <a:r>
-              <a:rPr lang="ko-KR" altLang="ko-KR" sz="2200" dirty="0" err="1">
-                <a:latin typeface="+mn-ea"/>
-              </a:rPr>
-              <a:t>for</a:t>
-            </a:r>
-            <a:r>
-              <a:rPr lang="ko-KR" altLang="ko-KR" sz="2200" dirty="0">
-                <a:latin typeface="+mn-ea"/>
-              </a:rPr>
-              <a:t> </a:t>
-            </a:r>
-            <a:r>
-              <a:rPr lang="ko-KR" altLang="ko-KR" sz="2200" dirty="0" err="1">
-                <a:latin typeface="+mn-ea"/>
-              </a:rPr>
-              <a:t>Vision</a:t>
-            </a:r>
-            <a:r>
-              <a:rPr lang="ko-KR" altLang="ko-KR" sz="2200" dirty="0">
-                <a:latin typeface="+mn-ea"/>
-              </a:rPr>
-              <a:t> </a:t>
-            </a:r>
-            <a:r>
-              <a:rPr lang="ko-KR" altLang="ko-KR" sz="2200" dirty="0" err="1">
-                <a:latin typeface="+mn-ea"/>
-              </a:rPr>
-              <a:t>Language</a:t>
-            </a:r>
-            <a:r>
-              <a:rPr lang="ko-KR" altLang="ko-KR" sz="2200" dirty="0">
-                <a:latin typeface="+mn-ea"/>
-              </a:rPr>
-              <a:t> </a:t>
-            </a:r>
-            <a:r>
-              <a:rPr lang="ko-KR" altLang="ko-KR" sz="2200" dirty="0" err="1">
-                <a:latin typeface="+mn-ea"/>
-              </a:rPr>
-              <a:t>Action</a:t>
-            </a:r>
-            <a:r>
-              <a:rPr lang="ko-KR" altLang="ko-KR" sz="2200" dirty="0">
-                <a:latin typeface="+mn-ea"/>
-              </a:rPr>
-              <a:t> </a:t>
-            </a:r>
-            <a:r>
-              <a:rPr lang="ko-KR" altLang="ko-KR" sz="2200" dirty="0" err="1">
-                <a:latin typeface="+mn-ea"/>
-              </a:rPr>
-              <a:t>Models</a:t>
-            </a:r>
-            <a:r>
-              <a:rPr lang="ko-KR" altLang="ko-KR" sz="2200" dirty="0">
-                <a:latin typeface="+mn-ea"/>
-              </a:rPr>
-              <a:t>”, 2026,</a:t>
-            </a:r>
-            <a:r>
-              <a:rPr lang="en-US" altLang="ko-KR" sz="2200" dirty="0">
-                <a:latin typeface="+mn-ea"/>
-              </a:rPr>
-              <a:t> </a:t>
-            </a:r>
-            <a:r>
-              <a:rPr lang="ko-KR" altLang="ko-KR" sz="2200" dirty="0">
-                <a:latin typeface="+mn-ea"/>
-              </a:rPr>
-              <a:t>arXiv:2603.03596.</a:t>
-            </a:r>
-            <a:endParaRPr lang="en-US" altLang="ko-KR" sz="2200" dirty="0">
-              <a:latin typeface="+mn-ea"/>
-            </a:endParaRPr>
-          </a:p>
-          <a:p>
-            <a:r>
-              <a:rPr lang="en-US" altLang="ko-KR" sz="2200" dirty="0">
-                <a:latin typeface="+mn-ea"/>
-              </a:rPr>
-              <a:t>3. </a:t>
-            </a:r>
-            <a:r>
-              <a:rPr lang="ko-KR" altLang="ko-KR" sz="2200" dirty="0" err="1"/>
-              <a:t>Yalcin</a:t>
-            </a:r>
-            <a:r>
-              <a:rPr lang="ko-KR" altLang="ko-KR" sz="2200" dirty="0"/>
-              <a:t> </a:t>
-            </a:r>
-            <a:r>
-              <a:rPr lang="ko-KR" altLang="ko-KR" sz="2200" dirty="0" err="1"/>
-              <a:t>Tur</a:t>
-            </a:r>
-            <a:r>
-              <a:rPr lang="ko-KR" altLang="ko-KR" sz="2200" dirty="0"/>
-              <a:t> </a:t>
-            </a:r>
-            <a:r>
-              <a:rPr lang="ko-KR" altLang="ko-KR" sz="2200" dirty="0" err="1"/>
-              <a:t>et</a:t>
-            </a:r>
-            <a:r>
-              <a:rPr lang="ko-KR" altLang="ko-KR" sz="2200" dirty="0"/>
-              <a:t> </a:t>
-            </a:r>
-            <a:r>
-              <a:rPr lang="ko-KR" altLang="ko-KR" sz="2200" dirty="0" err="1"/>
-              <a:t>al</a:t>
-            </a:r>
-            <a:r>
-              <a:rPr lang="ko-KR" altLang="ko-KR" sz="2200" dirty="0"/>
-              <a:t>.,</a:t>
-            </a:r>
-            <a:r>
-              <a:rPr lang="en-US" altLang="ko-KR" sz="2200" dirty="0"/>
-              <a:t> </a:t>
-            </a:r>
-            <a:r>
-              <a:rPr lang="ko-KR" altLang="ko-KR" sz="2200" dirty="0"/>
-              <a:t>“</a:t>
-            </a:r>
-            <a:r>
-              <a:rPr lang="ko-KR" altLang="ko-KR" sz="2200" dirty="0" err="1"/>
-              <a:t>Recurrent-Depth</a:t>
-            </a:r>
-            <a:r>
-              <a:rPr lang="ko-KR" altLang="ko-KR" sz="2200" dirty="0"/>
-              <a:t> VLA: </a:t>
-            </a:r>
-            <a:r>
-              <a:rPr lang="ko-KR" altLang="ko-KR" sz="2200" dirty="0" err="1"/>
-              <a:t>Implicit</a:t>
-            </a:r>
-            <a:r>
-              <a:rPr lang="ko-KR" altLang="ko-KR" sz="2200" dirty="0"/>
-              <a:t> </a:t>
-            </a:r>
-            <a:r>
-              <a:rPr lang="ko-KR" altLang="ko-KR" sz="2200" dirty="0" err="1"/>
-              <a:t>Test</a:t>
-            </a:r>
-            <a:r>
-              <a:rPr lang="ko-KR" altLang="ko-KR" sz="2200" dirty="0"/>
-              <a:t>-Time </a:t>
-            </a:r>
-            <a:r>
-              <a:rPr lang="ko-KR" altLang="ko-KR" sz="2200" dirty="0" err="1"/>
-              <a:t>Compute</a:t>
-            </a:r>
-            <a:r>
-              <a:rPr lang="ko-KR" altLang="ko-KR" sz="2200" dirty="0"/>
-              <a:t> </a:t>
-            </a:r>
-            <a:r>
-              <a:rPr lang="ko-KR" altLang="ko-KR" sz="2200" dirty="0" err="1"/>
-              <a:t>Scaling</a:t>
-            </a:r>
-            <a:r>
-              <a:rPr lang="ko-KR" altLang="ko-KR" sz="2200" dirty="0"/>
-              <a:t> of </a:t>
-            </a:r>
-            <a:r>
-              <a:rPr lang="ko-KR" altLang="ko-KR" sz="2200" dirty="0" err="1"/>
-              <a:t>Vision-Language-Action</a:t>
-            </a:r>
-            <a:r>
-              <a:rPr lang="ko-KR" altLang="ko-KR" sz="2200" dirty="0"/>
-              <a:t> </a:t>
-            </a:r>
-            <a:r>
-              <a:rPr lang="ko-KR" altLang="ko-KR" sz="2200" dirty="0" err="1"/>
-              <a:t>Models</a:t>
-            </a:r>
-            <a:r>
-              <a:rPr lang="ko-KR" altLang="ko-KR" sz="2200" dirty="0"/>
-              <a:t> </a:t>
-            </a:r>
-            <a:r>
-              <a:rPr lang="ko-KR" altLang="ko-KR" sz="2200" dirty="0" err="1"/>
-              <a:t>via</a:t>
-            </a:r>
-            <a:r>
-              <a:rPr lang="ko-KR" altLang="ko-KR" sz="2200" dirty="0"/>
-              <a:t> </a:t>
-            </a:r>
-            <a:r>
-              <a:rPr lang="ko-KR" altLang="ko-KR" sz="2200" dirty="0" err="1"/>
-              <a:t>Latent</a:t>
-            </a:r>
-            <a:r>
-              <a:rPr lang="ko-KR" altLang="ko-KR" sz="2200" dirty="0"/>
-              <a:t> </a:t>
-            </a:r>
-            <a:r>
-              <a:rPr lang="ko-KR" altLang="ko-KR" sz="2200" dirty="0" err="1"/>
-              <a:t>Iterative</a:t>
-            </a:r>
-            <a:r>
-              <a:rPr lang="ko-KR" altLang="ko-KR" sz="2200" dirty="0"/>
-              <a:t> </a:t>
-            </a:r>
-            <a:r>
-              <a:rPr lang="ko-KR" altLang="ko-KR" sz="2200" dirty="0" err="1"/>
-              <a:t>Reasoning</a:t>
-            </a:r>
-            <a:r>
-              <a:rPr lang="ko-KR" altLang="ko-KR" sz="2200" dirty="0"/>
-              <a:t>”, 2026,</a:t>
-            </a:r>
-            <a:r>
-              <a:rPr lang="en-US" altLang="ko-KR" sz="2200" dirty="0"/>
-              <a:t> </a:t>
-            </a:r>
-            <a:r>
-              <a:rPr lang="ko-KR" altLang="ko-KR" sz="2200" dirty="0"/>
-              <a:t>arXiv:2602.07845.</a:t>
-            </a:r>
-            <a:endParaRPr lang="en-US" altLang="ko-KR" sz="2200" dirty="0"/>
-          </a:p>
-          <a:p>
-            <a:r>
-              <a:rPr lang="en-US" altLang="ko-KR" sz="2200" dirty="0">
-                <a:latin typeface="+mn-ea"/>
-              </a:rPr>
-              <a:t>4. </a:t>
-            </a:r>
-            <a:r>
-              <a:rPr lang="ko-KR" altLang="ko-KR" sz="2200" dirty="0" err="1"/>
-              <a:t>Ali</a:t>
-            </a:r>
-            <a:r>
-              <a:rPr lang="ko-KR" altLang="ko-KR" sz="2200" dirty="0"/>
-              <a:t> </a:t>
-            </a:r>
-            <a:r>
-              <a:rPr lang="ko-KR" altLang="ko-KR" sz="2200" dirty="0" err="1"/>
-              <a:t>Amin</a:t>
-            </a:r>
-            <a:r>
-              <a:rPr lang="ko-KR" altLang="ko-KR" sz="2200" dirty="0"/>
-              <a:t> </a:t>
-            </a:r>
-            <a:r>
-              <a:rPr lang="ko-KR" altLang="ko-KR" sz="2200" dirty="0" err="1"/>
-              <a:t>et</a:t>
-            </a:r>
-            <a:r>
-              <a:rPr lang="ko-KR" altLang="ko-KR" sz="2200" dirty="0"/>
-              <a:t> </a:t>
-            </a:r>
-            <a:r>
-              <a:rPr lang="ko-KR" altLang="ko-KR" sz="2200" dirty="0" err="1"/>
-              <a:t>al</a:t>
-            </a:r>
-            <a:r>
-              <a:rPr lang="ko-KR" altLang="ko-KR" sz="2200" dirty="0"/>
-              <a:t>.,</a:t>
-            </a:r>
-            <a:r>
-              <a:rPr lang="en-US" altLang="ko-KR" sz="2200" dirty="0"/>
-              <a:t> </a:t>
-            </a:r>
-            <a:r>
-              <a:rPr lang="ko-KR" altLang="ko-KR" sz="2200" dirty="0"/>
-              <a:t>“π*0.6: </a:t>
-            </a:r>
-            <a:r>
-              <a:rPr lang="ko-KR" altLang="ko-KR" sz="2200" dirty="0" err="1"/>
-              <a:t>A</a:t>
-            </a:r>
-            <a:r>
-              <a:rPr lang="ko-KR" altLang="ko-KR" sz="2200" dirty="0"/>
-              <a:t> VLA </a:t>
-            </a:r>
-            <a:r>
-              <a:rPr lang="ko-KR" altLang="ko-KR" sz="2200" dirty="0" err="1"/>
-              <a:t>That</a:t>
-            </a:r>
-            <a:r>
-              <a:rPr lang="ko-KR" altLang="ko-KR" sz="2200" dirty="0"/>
-              <a:t> </a:t>
-            </a:r>
-            <a:r>
-              <a:rPr lang="ko-KR" altLang="ko-KR" sz="2200" dirty="0" err="1"/>
-              <a:t>Learns</a:t>
-            </a:r>
-            <a:r>
-              <a:rPr lang="ko-KR" altLang="ko-KR" sz="2200" dirty="0"/>
-              <a:t> </a:t>
-            </a:r>
-            <a:r>
-              <a:rPr lang="ko-KR" altLang="ko-KR" sz="2200" dirty="0" err="1"/>
-              <a:t>From</a:t>
-            </a:r>
-            <a:r>
-              <a:rPr lang="ko-KR" altLang="ko-KR" sz="2200" dirty="0"/>
-              <a:t> </a:t>
-            </a:r>
-            <a:r>
-              <a:rPr lang="ko-KR" altLang="ko-KR" sz="2200" dirty="0" err="1"/>
+              <a:rPr lang="ko-KR" altLang="ko-KR" sz="2400" dirty="0" err="1"/>
               <a:t>Experience</a:t>
             </a:r>
             <a:r>
-              <a:rPr lang="ko-KR" altLang="ko-KR" sz="2200" dirty="0"/>
-              <a:t>”, 2025,</a:t>
-            </a:r>
-            <a:r>
-              <a:rPr lang="en-US" altLang="ko-KR" sz="2200" dirty="0"/>
-              <a:t> </a:t>
-            </a:r>
-            <a:r>
-              <a:rPr lang="ko-KR" altLang="ko-KR" sz="2200" dirty="0"/>
-              <a:t>arXiv:2511.14759.</a:t>
-            </a:r>
-            <a:endParaRPr lang="en-US" altLang="ko-KR" sz="2200" dirty="0">
+              <a:rPr lang="ko-KR" altLang="ko-KR" sz="2400" dirty="0"/>
+              <a:t>”, 2025</a:t>
+            </a:r>
+            <a:endParaRPr lang="en-US" altLang="ko-KR" sz="3600" dirty="0">
               <a:latin typeface="+mn-ea"/>
             </a:endParaRPr>
           </a:p>
@@ -6689,7 +6073,7 @@
         </p:nvSpPr>
         <p:spPr>
           <a:xfrm>
-            <a:off x="530160" y="27262776"/>
+            <a:off x="530160" y="27270982"/>
             <a:ext cx="4021957" cy="646330"/>
           </a:xfrm>
           <a:prstGeom prst="rect">
@@ -6774,7 +6158,7 @@
         <p:spPr>
           <a:xfrm>
             <a:off x="15776460" y="3428082"/>
-            <a:ext cx="6358" cy="3331673"/>
+            <a:ext cx="0" cy="3948078"/>
           </a:xfrm>
           <a:prstGeom prst="line">
             <a:avLst/>
@@ -6818,7 +6202,7 @@
         </p:nvCxnSpPr>
         <p:spPr>
           <a:xfrm>
-            <a:off x="10942381" y="6890969"/>
+            <a:off x="10957560" y="7527669"/>
             <a:ext cx="9646920" cy="0"/>
           </a:xfrm>
           <a:prstGeom prst="line">
@@ -6869,8 +6253,8 @@
         </p:blipFill>
         <p:spPr>
           <a:xfrm>
-            <a:off x="587093" y="12236892"/>
-            <a:ext cx="6652406" cy="3583504"/>
+            <a:off x="809600" y="7043570"/>
+            <a:ext cx="9595121" cy="5168680"/>
           </a:xfrm>
           <a:prstGeom prst="rect">
             <a:avLst/>
@@ -6893,7 +6277,7 @@
         </p:nvSpPr>
         <p:spPr bwMode="auto">
           <a:xfrm>
-            <a:off x="10539413" y="13366631"/>
+            <a:off x="10539413" y="14984413"/>
             <a:ext cx="304800" cy="304800"/>
           </a:xfrm>
           <a:prstGeom prst="rect">
@@ -6944,16 +6328,16 @@
         </p:blipFill>
         <p:spPr>
           <a:xfrm>
-            <a:off x="10830770" y="12518400"/>
-            <a:ext cx="9895691" cy="3665926"/>
+            <a:off x="10844213" y="13880209"/>
+            <a:ext cx="9892903" cy="5074930"/>
           </a:xfrm>
           <a:prstGeom prst="rect">
             <a:avLst/>
           </a:prstGeom>
         </p:spPr>
       </p:pic>
-      <mc:AlternateContent xmlns:mc="http://schemas.openxmlformats.org/markup-compatibility/2006">
-        <mc:Choice xmlns:a14="http://schemas.microsoft.com/office/drawing/2010/main" Requires="a14">
+      <mc:AlternateContent xmlns:mc="http://schemas.openxmlformats.org/markup-compatibility/2006" xmlns:a14="http://schemas.microsoft.com/office/drawing/2010/main">
+        <mc:Choice Requires="a14">
           <p:sp>
             <p:nvSpPr>
               <p:cNvPr id="76" name="TextBox 75">
@@ -6968,7 +6352,7 @@
             </p:nvSpPr>
             <p:spPr>
               <a:xfrm>
-                <a:off x="13213034" y="10357804"/>
+                <a:off x="12448985" y="11453512"/>
                 <a:ext cx="6694550" cy="1384738"/>
               </a:xfrm>
               <a:prstGeom prst="rect">
@@ -7153,7 +6537,7 @@
             </p:txBody>
           </p:sp>
         </mc:Choice>
-        <mc:Fallback>
+        <mc:Fallback xmlns="">
           <p:sp>
             <p:nvSpPr>
               <p:cNvPr id="76" name="TextBox 75">
@@ -7170,7 +6554,7 @@
             </p:nvSpPr>
             <p:spPr>
               <a:xfrm>
-                <a:off x="13213034" y="10357804"/>
+                <a:off x="12448985" y="11453512"/>
                 <a:ext cx="6694550" cy="1384738"/>
               </a:xfrm>
               <a:prstGeom prst="rect">
@@ -7179,7 +6563,7 @@
               <a:blipFill>
                 <a:blip r:embed="rId6"/>
                 <a:stretch>
-                  <a:fillRect l="-1272" t="-7860" r="-1362" b="-6550"/>
+                  <a:fillRect l="-1364" t="-7860" r="-1364" b="-6114"/>
                 </a:stretch>
               </a:blipFill>
               <a:ln>
@@ -7203,8 +6587,8 @@
           </p:sp>
         </mc:Fallback>
       </mc:AlternateContent>
-      <mc:AlternateContent xmlns:mc="http://schemas.openxmlformats.org/markup-compatibility/2006">
-        <mc:Choice xmlns:a14="http://schemas.microsoft.com/office/drawing/2010/main" Requires="a14">
+      <mc:AlternateContent xmlns:mc="http://schemas.openxmlformats.org/markup-compatibility/2006" xmlns:a14="http://schemas.microsoft.com/office/drawing/2010/main">
+        <mc:Choice Requires="a14">
           <p:sp>
             <p:nvSpPr>
               <p:cNvPr id="77" name="TextBox 76">
@@ -7219,7 +6603,7 @@
             </p:nvSpPr>
             <p:spPr>
               <a:xfrm>
-                <a:off x="13691800" y="13562575"/>
+                <a:off x="13099945" y="15107630"/>
                 <a:ext cx="5392630" cy="1238224"/>
               </a:xfrm>
               <a:prstGeom prst="rect">
@@ -7502,7 +6886,7 @@
             </p:txBody>
           </p:sp>
         </mc:Choice>
-        <mc:Fallback>
+        <mc:Fallback xmlns="">
           <p:sp>
             <p:nvSpPr>
               <p:cNvPr id="77" name="TextBox 76">
@@ -7519,7 +6903,7 @@
             </p:nvSpPr>
             <p:spPr>
               <a:xfrm>
-                <a:off x="13691800" y="13562575"/>
+                <a:off x="13099945" y="15107630"/>
                 <a:ext cx="5392630" cy="1238224"/>
               </a:xfrm>
               <a:prstGeom prst="rect">
@@ -7528,7 +6912,7 @@
               <a:blipFill>
                 <a:blip r:embed="rId7"/>
                 <a:stretch>
-                  <a:fillRect t="-7805" b="-11220"/>
+                  <a:fillRect t="-7317" b="-11220"/>
                 </a:stretch>
               </a:blipFill>
               <a:ln>
@@ -7567,14 +6951,14 @@
           <p:nvPr>
             <p:extLst>
               <p:ext uri="{D42A27DB-BD31-4B8C-83A1-F6EECF244321}">
-                <p14:modId xmlns:p14="http://schemas.microsoft.com/office/powerpoint/2010/main" val="2554557120"/>
+                <p14:modId xmlns:p14="http://schemas.microsoft.com/office/powerpoint/2010/main" val="3069877192"/>
               </p:ext>
             </p:extLst>
           </p:nvPr>
         </p:nvGraphicFramePr>
         <p:xfrm>
-          <a:off x="2000727" y="21991308"/>
-          <a:ext cx="7321297" cy="3352800"/>
+          <a:off x="1756887" y="23490254"/>
+          <a:ext cx="7690548" cy="3627120"/>
         </p:xfrm>
         <a:graphic>
           <a:graphicData uri="http://schemas.openxmlformats.org/drawingml/2006/table">
@@ -7583,14 +6967,14 @@
                 <a:tableStyleId>{3B4B98B0-60AC-42C2-AFA5-B58CD77FA1E5}</a:tableStyleId>
               </a:tblPr>
               <a:tblGrid>
-                <a:gridCol w="1770825">
+                <a:gridCol w="1911858">
                   <a:extLst>
                     <a:ext uri="{9D8B030D-6E8A-4147-A177-3AD203B41FA5}">
                       <a16:colId xmlns:a16="http://schemas.microsoft.com/office/drawing/2014/main" val="75515524"/>
                     </a:ext>
                   </a:extLst>
                 </a:gridCol>
-                <a:gridCol w="2742883">
+                <a:gridCol w="2971101">
                   <a:extLst>
                     <a:ext uri="{9D8B030D-6E8A-4147-A177-3AD203B41FA5}">
                       <a16:colId xmlns:a16="http://schemas.microsoft.com/office/drawing/2014/main" val="3559314400"/>
@@ -7612,7 +6996,7 @@
                     <a:lstStyle/>
                     <a:p>
                       <a:pPr latinLnBrk="1"/>
-                      <a:endParaRPr lang="ko-KR" altLang="en-US" sz="2400" dirty="0"/>
+                      <a:endParaRPr lang="ko-KR" altLang="en-US" sz="2800" dirty="0"/>
                     </a:p>
                   </a:txBody>
                   <a:tcPr/>
@@ -7624,18 +7008,18 @@
                     <a:p>
                       <a:pPr algn="ctr" latinLnBrk="1"/>
                       <a:r>
-                        <a:rPr lang="en-US" altLang="ko-KR" sz="2400" dirty="0"/>
+                        <a:rPr lang="en-US" altLang="ko-KR" sz="2800" dirty="0"/>
                         <a:t>1</a:t>
                       </a:r>
                       <a:r>
-                        <a:rPr lang="en-US" altLang="ko-KR" sz="2400" baseline="30000" dirty="0"/>
+                        <a:rPr lang="en-US" altLang="ko-KR" sz="2800" baseline="30000" dirty="0"/>
                         <a:t>st</a:t>
                       </a:r>
                       <a:r>
-                        <a:rPr lang="en-US" altLang="ko-KR" sz="2400" dirty="0"/>
+                        <a:rPr lang="en-US" altLang="ko-KR" sz="2800" dirty="0"/>
                         <a:t> </a:t>
                       </a:r>
-                      <a:endParaRPr lang="ko-KR" altLang="en-US" sz="2400" dirty="0"/>
+                      <a:endParaRPr lang="ko-KR" altLang="en-US" sz="2800" dirty="0"/>
                     </a:p>
                   </a:txBody>
                   <a:tcPr/>
@@ -7647,7 +7031,7 @@
                     <a:p>
                       <a:pPr algn="ctr" latinLnBrk="1"/>
                       <a:r>
-                        <a:rPr lang="ko-KR" altLang="en-US" sz="2400" dirty="0"/>
+                        <a:rPr lang="ko-KR" altLang="en-US" sz="2800" dirty="0"/>
                         <a:t>경량화 모델</a:t>
                       </a:r>
                     </a:p>
@@ -7668,10 +7052,10 @@
                     <a:p>
                       <a:pPr latinLnBrk="1"/>
                       <a:r>
-                        <a:rPr lang="en-US" altLang="ko-KR" sz="2200" dirty="0"/>
+                        <a:rPr lang="en-US" altLang="ko-KR" sz="2400" dirty="0"/>
                         <a:t>GPU</a:t>
                       </a:r>
-                      <a:endParaRPr lang="ko-KR" altLang="en-US" sz="2200" dirty="0"/>
+                      <a:endParaRPr lang="ko-KR" altLang="en-US" sz="2400" dirty="0"/>
                     </a:p>
                   </a:txBody>
                   <a:tcPr/>
@@ -7683,25 +7067,25 @@
                     <a:p>
                       <a:pPr algn="ctr" latinLnBrk="1"/>
                       <a:r>
-                        <a:rPr lang="en-US" altLang="ko-KR" sz="2200" dirty="0"/>
+                        <a:rPr lang="en-US" altLang="ko-KR" sz="2400" dirty="0"/>
                         <a:t>H200 x 8</a:t>
                       </a:r>
                     </a:p>
                     <a:p>
                       <a:pPr algn="ctr" latinLnBrk="1"/>
                       <a:r>
-                        <a:rPr lang="en-US" altLang="ko-KR" sz="2200" dirty="0"/>
+                        <a:rPr lang="en-US" altLang="ko-KR" sz="2400" dirty="0"/>
                         <a:t>RTX 4090 x</a:t>
                       </a:r>
                       <a:r>
-                        <a:rPr lang="ko-KR" altLang="en-US" sz="2200" dirty="0"/>
+                        <a:rPr lang="ko-KR" altLang="en-US" sz="2400" dirty="0"/>
                         <a:t> </a:t>
                       </a:r>
                       <a:r>
-                        <a:rPr lang="en-US" altLang="ko-KR" sz="2200" dirty="0"/>
+                        <a:rPr lang="en-US" altLang="ko-KR" sz="2400" dirty="0"/>
                         <a:t>20</a:t>
                       </a:r>
-                      <a:endParaRPr lang="ko-KR" altLang="en-US" sz="2200" dirty="0"/>
+                      <a:endParaRPr lang="ko-KR" altLang="en-US" sz="2400" dirty="0"/>
                     </a:p>
                   </a:txBody>
                   <a:tcPr/>
@@ -7713,17 +7097,17 @@
                     <a:p>
                       <a:pPr algn="ctr" latinLnBrk="1"/>
                       <a:r>
-                        <a:rPr lang="en-US" altLang="ko-KR" sz="2200" dirty="0"/>
+                        <a:rPr lang="en-US" altLang="ko-KR" sz="2400" dirty="0"/>
                         <a:t>A100 x 1</a:t>
                       </a:r>
                     </a:p>
                     <a:p>
                       <a:pPr algn="ctr" latinLnBrk="1"/>
                       <a:r>
-                        <a:rPr lang="en-US" altLang="ko-KR" sz="2200" dirty="0"/>
+                        <a:rPr lang="en-US" altLang="ko-KR" sz="2400" dirty="0"/>
                         <a:t>RTX 5070 x 2</a:t>
                       </a:r>
-                      <a:endParaRPr lang="ko-KR" altLang="en-US" sz="2200" dirty="0"/>
+                      <a:endParaRPr lang="ko-KR" altLang="en-US" sz="2400" dirty="0"/>
                     </a:p>
                   </a:txBody>
                   <a:tcPr/>
@@ -7742,10 +7126,10 @@
                     <a:p>
                       <a:pPr latinLnBrk="1"/>
                       <a:r>
-                        <a:rPr lang="en-US" altLang="ko-KR" sz="2200" dirty="0"/>
+                        <a:rPr lang="en-US" altLang="ko-KR" sz="2400" dirty="0"/>
                         <a:t>Task</a:t>
                       </a:r>
-                      <a:endParaRPr lang="ko-KR" altLang="en-US" sz="2200" dirty="0"/>
+                      <a:endParaRPr lang="ko-KR" altLang="en-US" sz="2400" dirty="0"/>
                     </a:p>
                   </a:txBody>
                   <a:tcPr/>
@@ -7757,10 +7141,10 @@
                     <a:p>
                       <a:pPr algn="ctr" latinLnBrk="1"/>
                       <a:r>
-                        <a:rPr lang="en-US" altLang="ko-KR" sz="2200" dirty="0"/>
+                        <a:rPr lang="en-US" altLang="ko-KR" sz="2400" dirty="0"/>
                         <a:t>50</a:t>
                       </a:r>
-                      <a:endParaRPr lang="ko-KR" altLang="en-US" sz="2200" dirty="0"/>
+                      <a:endParaRPr lang="ko-KR" altLang="en-US" sz="2400" dirty="0"/>
                     </a:p>
                   </a:txBody>
                   <a:tcPr/>
@@ -7772,10 +7156,10 @@
                     <a:p>
                       <a:pPr algn="ctr" latinLnBrk="1"/>
                       <a:r>
-                        <a:rPr lang="en-US" altLang="ko-KR" sz="2200" dirty="0"/>
+                        <a:rPr lang="en-US" altLang="ko-KR" sz="2400" dirty="0"/>
                         <a:t>12</a:t>
                       </a:r>
-                      <a:endParaRPr lang="ko-KR" altLang="en-US" sz="2200" dirty="0"/>
+                      <a:endParaRPr lang="ko-KR" altLang="en-US" sz="2400" dirty="0"/>
                     </a:p>
                   </a:txBody>
                   <a:tcPr/>
@@ -7794,10 +7178,10 @@
                     <a:p>
                       <a:pPr latinLnBrk="1"/>
                       <a:r>
-                        <a:rPr lang="en-US" altLang="ko-KR" sz="2200" dirty="0"/>
+                        <a:rPr lang="en-US" altLang="ko-KR" sz="2400" dirty="0"/>
                         <a:t>Batch size</a:t>
                       </a:r>
-                      <a:endParaRPr lang="ko-KR" altLang="en-US" sz="2200" dirty="0"/>
+                      <a:endParaRPr lang="ko-KR" altLang="en-US" sz="2400" dirty="0"/>
                     </a:p>
                   </a:txBody>
                   <a:tcPr/>
@@ -7809,10 +7193,10 @@
                     <a:p>
                       <a:pPr algn="ctr" latinLnBrk="1"/>
                       <a:r>
-                        <a:rPr lang="en-US" altLang="ko-KR" sz="2200" dirty="0"/>
+                        <a:rPr lang="en-US" altLang="ko-KR" sz="2400" dirty="0"/>
                         <a:t>2048</a:t>
                       </a:r>
-                      <a:endParaRPr lang="ko-KR" altLang="en-US" sz="2200" dirty="0"/>
+                      <a:endParaRPr lang="ko-KR" altLang="en-US" sz="2400" dirty="0"/>
                     </a:p>
                   </a:txBody>
                   <a:tcPr/>
@@ -7824,10 +7208,10 @@
                     <a:p>
                       <a:pPr algn="ctr" latinLnBrk="1"/>
                       <a:r>
-                        <a:rPr lang="en-US" altLang="ko-KR" sz="2200" dirty="0"/>
+                        <a:rPr lang="en-US" altLang="ko-KR" sz="2400" dirty="0"/>
                         <a:t>16</a:t>
                       </a:r>
-                      <a:endParaRPr lang="ko-KR" altLang="en-US" sz="2200" dirty="0"/>
+                      <a:endParaRPr lang="ko-KR" altLang="en-US" sz="2400" dirty="0"/>
                     </a:p>
                   </a:txBody>
                   <a:tcPr/>
@@ -7846,10 +7230,10 @@
                     <a:p>
                       <a:pPr latinLnBrk="1"/>
                       <a:r>
-                        <a:rPr lang="en-US" altLang="ko-KR" sz="2200" dirty="0"/>
+                        <a:rPr lang="en-US" altLang="ko-KR" sz="2400" dirty="0"/>
                         <a:t>Step</a:t>
                       </a:r>
-                      <a:endParaRPr lang="ko-KR" altLang="en-US" sz="2200" dirty="0"/>
+                      <a:endParaRPr lang="ko-KR" altLang="en-US" sz="2400" dirty="0"/>
                     </a:p>
                   </a:txBody>
                   <a:tcPr/>
@@ -7861,10 +7245,10 @@
                     <a:p>
                       <a:pPr algn="ctr" latinLnBrk="1"/>
                       <a:r>
-                        <a:rPr lang="en-US" altLang="ko-KR" sz="2200" dirty="0"/>
+                        <a:rPr lang="en-US" altLang="ko-KR" sz="2400" dirty="0"/>
                         <a:t>200,000</a:t>
                       </a:r>
-                      <a:endParaRPr lang="ko-KR" altLang="en-US" sz="2200" dirty="0"/>
+                      <a:endParaRPr lang="ko-KR" altLang="en-US" sz="2400" dirty="0"/>
                     </a:p>
                   </a:txBody>
                   <a:tcPr/>
@@ -7876,10 +7260,10 @@
                     <a:p>
                       <a:pPr algn="ctr" latinLnBrk="1"/>
                       <a:r>
-                        <a:rPr lang="en-US" altLang="ko-KR" sz="2200" dirty="0"/>
+                        <a:rPr lang="en-US" altLang="ko-KR" sz="2400" dirty="0"/>
                         <a:t>70,000</a:t>
                       </a:r>
-                      <a:endParaRPr lang="ko-KR" altLang="en-US" sz="2200" dirty="0"/>
+                      <a:endParaRPr lang="ko-KR" altLang="en-US" sz="2400" dirty="0"/>
                     </a:p>
                   </a:txBody>
                   <a:tcPr/>
@@ -7898,10 +7282,10 @@
                     <a:p>
                       <a:pPr latinLnBrk="1"/>
                       <a:r>
-                        <a:rPr lang="en-US" altLang="ko-KR" sz="2200" dirty="0"/>
+                        <a:rPr lang="en-US" altLang="ko-KR" sz="2400" dirty="0"/>
                         <a:t>Flow sample</a:t>
                       </a:r>
-                      <a:endParaRPr lang="ko-KR" altLang="en-US" sz="2200" dirty="0"/>
+                      <a:endParaRPr lang="ko-KR" altLang="en-US" sz="2400" dirty="0"/>
                     </a:p>
                   </a:txBody>
                   <a:tcPr/>
@@ -7913,10 +7297,10 @@
                     <a:p>
                       <a:pPr algn="ctr" latinLnBrk="1"/>
                       <a:r>
-                        <a:rPr lang="en-US" altLang="ko-KR" sz="2200" dirty="0"/>
+                        <a:rPr lang="en-US" altLang="ko-KR" sz="2400" dirty="0"/>
                         <a:t>15</a:t>
                       </a:r>
-                      <a:endParaRPr lang="ko-KR" altLang="en-US" sz="2200" dirty="0"/>
+                      <a:endParaRPr lang="ko-KR" altLang="en-US" sz="2400" dirty="0"/>
                     </a:p>
                   </a:txBody>
                   <a:tcPr/>
@@ -7928,10 +7312,10 @@
                     <a:p>
                       <a:pPr algn="ctr" latinLnBrk="1"/>
                       <a:r>
-                        <a:rPr lang="en-US" altLang="ko-KR" sz="2200" dirty="0"/>
+                        <a:rPr lang="en-US" altLang="ko-KR" sz="2400" dirty="0"/>
                         <a:t>1</a:t>
                       </a:r>
-                      <a:endParaRPr lang="ko-KR" altLang="en-US" sz="2200" dirty="0"/>
+                      <a:endParaRPr lang="ko-KR" altLang="en-US" sz="2400" dirty="0"/>
                     </a:p>
                   </a:txBody>
                   <a:tcPr/>
@@ -7950,10 +7334,10 @@
                     <a:p>
                       <a:pPr latinLnBrk="1"/>
                       <a:r>
-                        <a:rPr lang="en-US" altLang="ko-KR" sz="2200" dirty="0"/>
+                        <a:rPr lang="en-US" altLang="ko-KR" sz="2400" dirty="0"/>
                         <a:t>evaluation</a:t>
                       </a:r>
-                      <a:endParaRPr lang="ko-KR" altLang="en-US" sz="2200" dirty="0"/>
+                      <a:endParaRPr lang="ko-KR" altLang="en-US" sz="2400" dirty="0"/>
                     </a:p>
                   </a:txBody>
                   <a:tcPr/>
@@ -7965,10 +7349,10 @@
                     <a:p>
                       <a:pPr algn="ctr" latinLnBrk="1"/>
                       <a:r>
-                        <a:rPr lang="en-US" altLang="ko-KR" sz="2200" dirty="0"/>
+                        <a:rPr lang="en-US" altLang="ko-KR" sz="2400" dirty="0"/>
                         <a:t>50 task x 10 instance</a:t>
                       </a:r>
-                      <a:endParaRPr lang="ko-KR" altLang="en-US" sz="2200" dirty="0"/>
+                      <a:endParaRPr lang="ko-KR" altLang="en-US" sz="2400" dirty="0"/>
                     </a:p>
                   </a:txBody>
                   <a:tcPr/>
@@ -7980,10 +7364,10 @@
                     <a:p>
                       <a:pPr algn="ctr" latinLnBrk="1"/>
                       <a:r>
-                        <a:rPr lang="en-US" altLang="ko-KR" sz="2200" dirty="0"/>
+                        <a:rPr lang="en-US" altLang="ko-KR" sz="2400" dirty="0"/>
                         <a:t>12 task x 1 instance</a:t>
                       </a:r>
-                      <a:endParaRPr lang="ko-KR" altLang="en-US" sz="2200" dirty="0"/>
+                      <a:endParaRPr lang="ko-KR" altLang="en-US" sz="2400" dirty="0"/>
                     </a:p>
                   </a:txBody>
                   <a:tcPr/>
@@ -8012,8 +7396,8 @@
         </p:nvSpPr>
         <p:spPr>
           <a:xfrm>
-            <a:off x="10705545" y="22640929"/>
-            <a:ext cx="10180800" cy="4616648"/>
+            <a:off x="10698433" y="21836668"/>
+            <a:ext cx="10169298" cy="5436000"/>
           </a:xfrm>
           <a:prstGeom prst="rect">
             <a:avLst/>
@@ -8057,73 +7441,98 @@
           </a:p>
           <a:p>
             <a:r>
-              <a:rPr lang="ko-KR" altLang="ko-KR" sz="2200" dirty="0">
+              <a:rPr lang="ko-KR" altLang="ko-KR" sz="2400" dirty="0">
                 <a:latin typeface="+mn-ea"/>
               </a:rPr>
               <a:t>학습 </a:t>
             </a:r>
             <a:r>
-              <a:rPr lang="ko-KR" altLang="ko-KR" sz="2200" dirty="0" err="1">
+              <a:rPr lang="ko-KR" altLang="ko-KR" sz="2400" dirty="0" err="1">
                 <a:latin typeface="+mn-ea"/>
               </a:rPr>
               <a:t>step</a:t>
             </a:r>
             <a:r>
-              <a:rPr lang="ko-KR" altLang="ko-KR" sz="2200" dirty="0">
+              <a:rPr lang="ko-KR" altLang="ko-KR" sz="2400" dirty="0">
                 <a:latin typeface="+mn-ea"/>
               </a:rPr>
               <a:t> 증가를 통한 장기 수렴 성능 분석</a:t>
             </a:r>
-            <a:endParaRPr lang="en-US" altLang="ko-KR" sz="2200" dirty="0">
+            <a:endParaRPr lang="en-US" altLang="ko-KR" sz="2400" dirty="0">
               <a:latin typeface="+mn-ea"/>
             </a:endParaRPr>
           </a:p>
           <a:p>
             <a:r>
-              <a:rPr lang="ko-KR" altLang="ko-KR" sz="2200" dirty="0">
+              <a:rPr lang="ko-KR" altLang="ko-KR" sz="2400" dirty="0">
                 <a:latin typeface="+mn-ea"/>
               </a:rPr>
               <a:t>다양한 </a:t>
             </a:r>
             <a:r>
-              <a:rPr lang="ko-KR" altLang="ko-KR" sz="2200" dirty="0" err="1">
+              <a:rPr lang="ko-KR" altLang="ko-KR" sz="2400" dirty="0" err="1">
                 <a:latin typeface="+mn-ea"/>
               </a:rPr>
               <a:t>seed</a:t>
             </a:r>
             <a:r>
-              <a:rPr lang="ko-KR" altLang="ko-KR" sz="2200" dirty="0">
+              <a:rPr lang="ko-KR" altLang="ko-KR" sz="2400" dirty="0">
+                <a:latin typeface="+mn-ea"/>
+              </a:rPr>
+              <a:t> 기반 반복 실험을 통한 모델 재현성 검증 </a:t>
+            </a:r>
+          </a:p>
+          <a:p>
+            <a:pPr lvl="0" defTabSz="914400" eaLnBrk="0" fontAlgn="base" hangingPunct="0">
+              <a:spcBef>
+                <a:spcPct val="0"/>
+              </a:spcBef>
+              <a:spcAft>
+                <a:spcPct val="0"/>
+              </a:spcAft>
+            </a:pPr>
+            <a:r>
+              <a:rPr lang="ko-KR" altLang="ko-KR" sz="2400" dirty="0" err="1">
+                <a:latin typeface="+mn-ea"/>
+              </a:rPr>
+              <a:t>Task</a:t>
+            </a:r>
+            <a:r>
+              <a:rPr lang="ko-KR" altLang="ko-KR" sz="2400" dirty="0">
+                <a:latin typeface="+mn-ea"/>
+              </a:rPr>
+              <a:t> 수 확장을 통한 </a:t>
+            </a:r>
+            <a:r>
+              <a:rPr lang="ko-KR" altLang="ko-KR" sz="2400" dirty="0" err="1">
+                <a:latin typeface="+mn-ea"/>
+              </a:rPr>
+              <a:t>multi-task</a:t>
+            </a:r>
+            <a:r>
+              <a:rPr lang="ko-KR" altLang="ko-KR" sz="2400" dirty="0">
                 <a:latin typeface="+mn-ea"/>
               </a:rPr>
               <a:t> </a:t>
             </a:r>
             <a:r>
-              <a:rPr lang="ko-KR" altLang="en-US" sz="2200" dirty="0">
-                <a:latin typeface="+mn-ea"/>
-              </a:rPr>
-              <a:t>활용 및 </a:t>
-            </a:r>
-            <a:r>
-              <a:rPr lang="en-US" altLang="ko-KR" sz="2200" dirty="0">
-                <a:latin typeface="+mn-ea"/>
-              </a:rPr>
-              <a:t>task </a:t>
-            </a:r>
-            <a:r>
-              <a:rPr lang="ko-KR" altLang="en-US" sz="2200" dirty="0">
-                <a:latin typeface="+mn-ea"/>
-              </a:rPr>
-              <a:t>수 확장 통한 일반화 성능 향상</a:t>
-            </a:r>
-            <a:r>
-              <a:rPr lang="ko-KR" altLang="ko-KR" sz="2200" dirty="0">
-                <a:latin typeface="+mn-ea"/>
-              </a:rPr>
-              <a:t> </a:t>
-            </a:r>
-          </a:p>
-          <a:p>
-            <a:endParaRPr lang="en-US" altLang="ko-KR" sz="1400" b="1" dirty="0">
+              <a:rPr lang="ko-KR" altLang="ko-KR" sz="2400" dirty="0" err="1">
+                <a:latin typeface="+mn-ea"/>
+              </a:rPr>
+              <a:t>generalization</a:t>
+            </a:r>
+            <a:r>
+              <a:rPr lang="ko-KR" altLang="ko-KR" sz="2400" dirty="0">
+                <a:latin typeface="+mn-ea"/>
+              </a:rPr>
+              <a:t> 성능 분석 </a:t>
+            </a:r>
+            <a:endParaRPr lang="en-US" altLang="ko-KR" sz="2400" dirty="0">
+              <a:latin typeface="+mn-ea"/>
+            </a:endParaRPr>
+          </a:p>
+          <a:p>
+            <a:endParaRPr lang="en-US" altLang="ko-KR" sz="2800" b="1" dirty="0">
               <a:latin typeface="+mn-ea"/>
             </a:endParaRPr>
           </a:p>
@@ -8158,262 +7567,262 @@
           </a:p>
           <a:p>
             <a:r>
-              <a:rPr lang="ko-KR" altLang="ko-KR" sz="2200" b="1" dirty="0" err="1">
+              <a:rPr lang="ko-KR" altLang="ko-KR" sz="2400" b="1" dirty="0" err="1">
                 <a:latin typeface="+mn-ea"/>
               </a:rPr>
               <a:t>MeM</a:t>
             </a:r>
             <a:r>
-              <a:rPr lang="ko-KR" altLang="ko-KR" sz="2200" b="1" dirty="0">
+              <a:rPr lang="ko-KR" altLang="ko-KR" sz="2400" b="1" dirty="0">
                 <a:latin typeface="+mn-ea"/>
               </a:rPr>
               <a:t> (</a:t>
             </a:r>
             <a:r>
-              <a:rPr lang="ko-KR" altLang="ko-KR" sz="2200" b="1" dirty="0" err="1">
+              <a:rPr lang="ko-KR" altLang="ko-KR" sz="2400" b="1" dirty="0" err="1">
                 <a:latin typeface="+mn-ea"/>
               </a:rPr>
               <a:t>Multi-Scale</a:t>
             </a:r>
             <a:r>
-              <a:rPr lang="ko-KR" altLang="ko-KR" sz="2200" b="1" dirty="0">
+              <a:rPr lang="ko-KR" altLang="ko-KR" sz="2400" b="1" dirty="0">
                 <a:latin typeface="+mn-ea"/>
               </a:rPr>
               <a:t> </a:t>
             </a:r>
             <a:r>
-              <a:rPr lang="ko-KR" altLang="ko-KR" sz="2200" b="1" dirty="0" err="1">
+              <a:rPr lang="ko-KR" altLang="ko-KR" sz="2400" b="1" dirty="0" err="1">
                 <a:latin typeface="+mn-ea"/>
               </a:rPr>
               <a:t>Embodied</a:t>
             </a:r>
             <a:r>
-              <a:rPr lang="ko-KR" altLang="ko-KR" sz="2200" b="1" dirty="0">
+              <a:rPr lang="ko-KR" altLang="ko-KR" sz="2400" b="1" dirty="0">
                 <a:latin typeface="+mn-ea"/>
               </a:rPr>
               <a:t> </a:t>
             </a:r>
             <a:r>
-              <a:rPr lang="ko-KR" altLang="ko-KR" sz="2200" b="1" dirty="0" err="1">
+              <a:rPr lang="ko-KR" altLang="ko-KR" sz="2400" b="1" dirty="0" err="1">
                 <a:latin typeface="+mn-ea"/>
               </a:rPr>
               <a:t>Memory</a:t>
             </a:r>
             <a:r>
-              <a:rPr lang="ko-KR" altLang="ko-KR" sz="2200" b="1" dirty="0">
+              <a:rPr lang="ko-KR" altLang="ko-KR" sz="2400" b="1" dirty="0">
                 <a:latin typeface="+mn-ea"/>
               </a:rPr>
               <a:t>)</a:t>
             </a:r>
             <a:r>
-              <a:rPr lang="en-US" altLang="ko-KR" sz="2200" b="1" dirty="0">
+              <a:rPr lang="en-US" altLang="ko-KR" sz="2400" b="1" dirty="0">
                 <a:latin typeface="+mn-ea"/>
               </a:rPr>
               <a:t>:</a:t>
             </a:r>
             <a:r>
-              <a:rPr lang="ko-KR" altLang="ko-KR" sz="2200" dirty="0">
+              <a:rPr lang="ko-KR" altLang="ko-KR" sz="2400" dirty="0">
                 <a:latin typeface="+mn-ea"/>
               </a:rPr>
               <a:t> </a:t>
             </a:r>
             <a:r>
-              <a:rPr lang="ko-KR" altLang="ko-KR" sz="2200" dirty="0" err="1">
+              <a:rPr lang="ko-KR" altLang="ko-KR" sz="2400" dirty="0" err="1">
                 <a:latin typeface="+mn-ea"/>
               </a:rPr>
               <a:t>short-term</a:t>
             </a:r>
             <a:r>
-              <a:rPr lang="ko-KR" altLang="ko-KR" sz="2200" dirty="0">
+              <a:rPr lang="ko-KR" altLang="ko-KR" sz="2400" dirty="0">
                 <a:latin typeface="+mn-ea"/>
               </a:rPr>
               <a:t> / </a:t>
             </a:r>
             <a:r>
-              <a:rPr lang="ko-KR" altLang="ko-KR" sz="2200" dirty="0" err="1">
+              <a:rPr lang="ko-KR" altLang="ko-KR" sz="2400" dirty="0" err="1">
                 <a:latin typeface="+mn-ea"/>
               </a:rPr>
               <a:t>long-term</a:t>
             </a:r>
             <a:r>
-              <a:rPr lang="ko-KR" altLang="ko-KR" sz="2200" dirty="0">
+              <a:rPr lang="ko-KR" altLang="ko-KR" sz="2400" dirty="0">
                 <a:latin typeface="+mn-ea"/>
               </a:rPr>
               <a:t> </a:t>
             </a:r>
             <a:r>
-              <a:rPr lang="ko-KR" altLang="ko-KR" sz="2200" dirty="0" err="1">
+              <a:rPr lang="ko-KR" altLang="ko-KR" sz="2400" dirty="0" err="1">
                 <a:latin typeface="+mn-ea"/>
               </a:rPr>
               <a:t>memory</a:t>
             </a:r>
             <a:r>
-              <a:rPr lang="ko-KR" altLang="ko-KR" sz="2200" dirty="0">
+              <a:rPr lang="ko-KR" altLang="ko-KR" sz="2400" dirty="0">
                 <a:latin typeface="+mn-ea"/>
               </a:rPr>
               <a:t> 기반 </a:t>
             </a:r>
             <a:r>
-              <a:rPr lang="ko-KR" altLang="ko-KR" sz="2200" dirty="0" err="1">
+              <a:rPr lang="ko-KR" altLang="ko-KR" sz="2400" dirty="0" err="1">
                 <a:latin typeface="+mn-ea"/>
               </a:rPr>
               <a:t>long-horizon</a:t>
             </a:r>
             <a:r>
-              <a:rPr lang="ko-KR" altLang="ko-KR" sz="2200" dirty="0">
+              <a:rPr lang="ko-KR" altLang="ko-KR" sz="2400" dirty="0">
                 <a:latin typeface="+mn-ea"/>
               </a:rPr>
               <a:t> </a:t>
             </a:r>
             <a:r>
-              <a:rPr lang="ko-KR" altLang="ko-KR" sz="2200" dirty="0" err="1">
+              <a:rPr lang="ko-KR" altLang="ko-KR" sz="2400" dirty="0" err="1">
                 <a:latin typeface="+mn-ea"/>
               </a:rPr>
               <a:t>task</a:t>
             </a:r>
             <a:r>
-              <a:rPr lang="ko-KR" altLang="ko-KR" sz="2200" dirty="0">
+              <a:rPr lang="ko-KR" altLang="ko-KR" sz="2400" dirty="0">
                 <a:latin typeface="+mn-ea"/>
               </a:rPr>
               <a:t> 안정성 향상</a:t>
             </a:r>
-            <a:endParaRPr lang="en-US" altLang="ko-KR" sz="2200" dirty="0">
+            <a:endParaRPr lang="en-US" altLang="ko-KR" sz="2400" dirty="0">
               <a:latin typeface="+mn-ea"/>
             </a:endParaRPr>
           </a:p>
           <a:p>
             <a:r>
-              <a:rPr lang="ko-KR" altLang="ko-KR" sz="2200" b="1" dirty="0">
+              <a:rPr lang="ko-KR" altLang="ko-KR" sz="2400" b="1" dirty="0">
                 <a:latin typeface="+mn-ea"/>
               </a:rPr>
               <a:t>RD-VLA (</a:t>
             </a:r>
             <a:r>
-              <a:rPr lang="ko-KR" altLang="ko-KR" sz="2200" b="1" dirty="0" err="1">
+              <a:rPr lang="ko-KR" altLang="ko-KR" sz="2400" b="1" dirty="0" err="1">
                 <a:latin typeface="+mn-ea"/>
               </a:rPr>
               <a:t>Recurrent-Depth</a:t>
             </a:r>
             <a:r>
-              <a:rPr lang="ko-KR" altLang="ko-KR" sz="2200" b="1" dirty="0">
+              <a:rPr lang="ko-KR" altLang="ko-KR" sz="2400" b="1" dirty="0">
                 <a:latin typeface="+mn-ea"/>
               </a:rPr>
               <a:t> VLA)</a:t>
             </a:r>
             <a:r>
-              <a:rPr lang="en-US" altLang="ko-KR" sz="2200" b="1" dirty="0">
+              <a:rPr lang="en-US" altLang="ko-KR" sz="2400" b="1" dirty="0">
                 <a:latin typeface="+mn-ea"/>
               </a:rPr>
               <a:t>: </a:t>
             </a:r>
             <a:r>
-              <a:rPr lang="ko-KR" altLang="en-US" sz="2200" dirty="0">
+              <a:rPr lang="ko-KR" altLang="en-US" sz="2400" dirty="0">
                 <a:latin typeface="+mn-ea"/>
               </a:rPr>
               <a:t>잠재 행동 계획을 반복적으로 </a:t>
             </a:r>
             <a:r>
-              <a:rPr lang="ko-KR" altLang="en-US" sz="2200" dirty="0" err="1">
+              <a:rPr lang="ko-KR" altLang="en-US" sz="2400" dirty="0" err="1">
                 <a:latin typeface="+mn-ea"/>
               </a:rPr>
               <a:t>정교화하여</a:t>
             </a:r>
             <a:r>
-              <a:rPr lang="ko-KR" altLang="en-US" sz="2200" dirty="0">
+              <a:rPr lang="ko-KR" altLang="en-US" sz="2400" dirty="0">
                 <a:latin typeface="+mn-ea"/>
               </a:rPr>
               <a:t> 장기 작업에서 더 정밀한 행동 궤적 생성</a:t>
             </a:r>
-            <a:endParaRPr lang="en-US" altLang="ko-KR" sz="2200" dirty="0">
+            <a:endParaRPr lang="en-US" altLang="ko-KR" sz="2400" dirty="0">
               <a:latin typeface="+mn-ea"/>
             </a:endParaRPr>
           </a:p>
           <a:p>
             <a:r>
-              <a:rPr lang="ko-KR" altLang="ko-KR" sz="2200" b="1" dirty="0">
+              <a:rPr lang="ko-KR" altLang="ko-KR" sz="2400" b="1" dirty="0">
                 <a:latin typeface="+mn-ea"/>
               </a:rPr>
               <a:t>π*0.6-lite </a:t>
             </a:r>
             <a:r>
-              <a:rPr lang="ko-KR" altLang="ko-KR" sz="2200" b="1" dirty="0" err="1">
+              <a:rPr lang="ko-KR" altLang="ko-KR" sz="2400" b="1" dirty="0" err="1">
                 <a:latin typeface="+mn-ea"/>
               </a:rPr>
               <a:t>Recovery</a:t>
             </a:r>
             <a:r>
-              <a:rPr lang="ko-KR" altLang="ko-KR" sz="2200" b="1" dirty="0">
+              <a:rPr lang="ko-KR" altLang="ko-KR" sz="2400" b="1" dirty="0">
                 <a:latin typeface="+mn-ea"/>
               </a:rPr>
               <a:t> </a:t>
             </a:r>
             <a:r>
-              <a:rPr lang="ko-KR" altLang="ko-KR" sz="2200" b="1" dirty="0" err="1">
+              <a:rPr lang="ko-KR" altLang="ko-KR" sz="2400" b="1" dirty="0" err="1">
                 <a:latin typeface="+mn-ea"/>
               </a:rPr>
               <a:t>Learning</a:t>
             </a:r>
             <a:r>
-              <a:rPr lang="en-US" altLang="ko-KR" sz="2200" b="1" dirty="0">
+              <a:rPr lang="en-US" altLang="ko-KR" sz="2400" b="1" dirty="0">
                 <a:latin typeface="+mn-ea"/>
               </a:rPr>
               <a:t>: </a:t>
             </a:r>
             <a:r>
-              <a:rPr lang="ko-KR" altLang="ko-KR" sz="2200" dirty="0">
+              <a:rPr lang="ko-KR" altLang="ko-KR" sz="2400" dirty="0">
                 <a:latin typeface="+mn-ea"/>
               </a:rPr>
               <a:t>실패 </a:t>
             </a:r>
             <a:r>
-              <a:rPr lang="ko-KR" altLang="ko-KR" sz="2200" dirty="0" err="1">
+              <a:rPr lang="ko-KR" altLang="ko-KR" sz="2400" dirty="0" err="1">
                 <a:latin typeface="+mn-ea"/>
               </a:rPr>
               <a:t>rollout과</a:t>
             </a:r>
             <a:r>
-              <a:rPr lang="ko-KR" altLang="ko-KR" sz="2200" dirty="0">
+              <a:rPr lang="ko-KR" altLang="ko-KR" sz="2400" dirty="0">
                 <a:latin typeface="+mn-ea"/>
               </a:rPr>
               <a:t> </a:t>
             </a:r>
             <a:r>
-              <a:rPr lang="ko-KR" altLang="ko-KR" sz="2200" dirty="0" err="1">
+              <a:rPr lang="ko-KR" altLang="ko-KR" sz="2400" dirty="0" err="1">
                 <a:latin typeface="+mn-ea"/>
               </a:rPr>
               <a:t>stage</a:t>
             </a:r>
             <a:r>
-              <a:rPr lang="ko-KR" altLang="ko-KR" sz="2200" dirty="0">
+              <a:rPr lang="ko-KR" altLang="ko-KR" sz="2400" dirty="0">
                 <a:latin typeface="+mn-ea"/>
               </a:rPr>
               <a:t>/</a:t>
             </a:r>
             <a:r>
-              <a:rPr lang="ko-KR" altLang="ko-KR" sz="2200" dirty="0" err="1">
+              <a:rPr lang="ko-KR" altLang="ko-KR" sz="2400" dirty="0" err="1">
                 <a:latin typeface="+mn-ea"/>
               </a:rPr>
               <a:t>value</a:t>
             </a:r>
             <a:r>
-              <a:rPr lang="ko-KR" altLang="ko-KR" sz="2200" dirty="0">
+              <a:rPr lang="ko-KR" altLang="ko-KR" sz="2400" dirty="0">
                 <a:latin typeface="+mn-ea"/>
               </a:rPr>
               <a:t> 정보를 활용하여 OOD 상태에서 </a:t>
             </a:r>
             <a:r>
-              <a:rPr lang="ko-KR" altLang="ko-KR" sz="2200" dirty="0"/>
+              <a:rPr lang="ko-KR" altLang="ko-KR" sz="2400" dirty="0"/>
               <a:t>복구 행동 및 </a:t>
             </a:r>
             <a:r>
-              <a:rPr lang="ko-KR" altLang="ko-KR" sz="2200" dirty="0" err="1"/>
+              <a:rPr lang="ko-KR" altLang="ko-KR" sz="2400" dirty="0" err="1"/>
               <a:t>rollout</a:t>
             </a:r>
             <a:r>
-              <a:rPr lang="ko-KR" altLang="ko-KR" sz="2200" dirty="0"/>
+              <a:rPr lang="ko-KR" altLang="ko-KR" sz="2400" dirty="0"/>
               <a:t> 안정성 향상</a:t>
             </a:r>
-            <a:endParaRPr lang="ko-KR" altLang="ko-KR" sz="2200" dirty="0">
+            <a:endParaRPr lang="ko-KR" altLang="ko-KR" sz="2400" dirty="0">
               <a:latin typeface="+mn-ea"/>
             </a:endParaRPr>
           </a:p>
@@ -8433,7 +7842,7 @@
         </p:nvSpPr>
         <p:spPr>
           <a:xfrm>
-            <a:off x="10702097" y="22643179"/>
+            <a:off x="10702097" y="21838918"/>
             <a:ext cx="4019006" cy="646331"/>
           </a:xfrm>
           <a:prstGeom prst="rect">
@@ -8517,8 +7926,8 @@
         </p:blipFill>
         <p:spPr>
           <a:xfrm>
-            <a:off x="7233326" y="11508031"/>
-            <a:ext cx="2862087" cy="2765395"/>
+            <a:off x="646510" y="16302393"/>
+            <a:ext cx="4581260" cy="4426488"/>
           </a:xfrm>
           <a:prstGeom prst="rect">
             <a:avLst/>
@@ -8547,198 +7956,8 @@
         </p:blipFill>
         <p:spPr>
           <a:xfrm>
-            <a:off x="7399664" y="14246612"/>
-            <a:ext cx="2993894" cy="2759000"/>
-          </a:xfrm>
-          <a:prstGeom prst="rect">
-            <a:avLst/>
-          </a:prstGeom>
-        </p:spPr>
-      </p:pic>
-      <p:sp>
-        <p:nvSpPr>
-          <p:cNvPr id="3" name="TextBox 2">
-            <a:extLst>
-              <a:ext uri="{FF2B5EF4-FFF2-40B4-BE49-F238E27FC236}">
-                <a16:creationId xmlns:a16="http://schemas.microsoft.com/office/drawing/2014/main" id="{8E6FF358-D573-5D4E-831E-BD28FE64B33F}"/>
-              </a:ext>
-            </a:extLst>
-          </p:cNvPr>
-          <p:cNvSpPr txBox="1"/>
-          <p:nvPr/>
-        </p:nvSpPr>
-        <p:spPr>
-          <a:xfrm>
-            <a:off x="542579" y="6188708"/>
-            <a:ext cx="4019006" cy="646331"/>
-          </a:xfrm>
-          <a:prstGeom prst="rect">
-            <a:avLst/>
-          </a:prstGeom>
-          <a:gradFill flip="none" rotWithShape="1">
-            <a:gsLst>
-              <a:gs pos="0">
-                <a:schemeClr val="accent4">
-                  <a:shade val="30000"/>
-                  <a:satMod val="115000"/>
-                  <a:lumMod val="48000"/>
-                  <a:alpha val="95000"/>
-                </a:schemeClr>
-              </a:gs>
-              <a:gs pos="50000">
-                <a:schemeClr val="accent4">
-                  <a:lumMod val="50000"/>
-                  <a:shade val="67500"/>
-                  <a:satMod val="115000"/>
-                </a:schemeClr>
-              </a:gs>
-              <a:gs pos="100000">
-                <a:schemeClr val="accent4">
-                  <a:lumMod val="50000"/>
-                  <a:shade val="100000"/>
-                  <a:satMod val="115000"/>
-                </a:schemeClr>
-              </a:gs>
-            </a:gsLst>
-            <a:path path="rect">
-              <a:fillToRect l="50000" t="50000" r="50000" b="50000"/>
-            </a:path>
-            <a:tileRect/>
-          </a:gradFill>
-          <a:ln w="57150">
-            <a:solidFill>
-              <a:schemeClr val="accent4">
-                <a:lumMod val="50000"/>
-              </a:schemeClr>
-            </a:solidFill>
-          </a:ln>
-        </p:spPr>
-        <p:txBody>
-          <a:bodyPr wrap="square" rtlCol="0">
-            <a:spAutoFit/>
-          </a:bodyPr>
-          <a:lstStyle/>
-          <a:p>
-            <a:pPr algn="ctr"/>
-            <a:r>
-              <a:rPr lang="en-US" altLang="ko-KR" sz="3600" b="1" dirty="0">
-                <a:solidFill>
-                  <a:schemeClr val="bg1"/>
-                </a:solidFill>
-                <a:latin typeface="+mn-ea"/>
-              </a:rPr>
-              <a:t>BEHAVIOR-1K</a:t>
-            </a:r>
-            <a:endParaRPr lang="ko-KR" altLang="en-US" sz="3600" b="1" dirty="0">
-              <a:solidFill>
-                <a:schemeClr val="bg1"/>
-              </a:solidFill>
-              <a:latin typeface="+mn-ea"/>
-            </a:endParaRPr>
-          </a:p>
-        </p:txBody>
-      </p:sp>
-      <p:pic>
-        <p:nvPicPr>
-          <p:cNvPr id="10" name="그림 9">
-            <a:extLst>
-              <a:ext uri="{FF2B5EF4-FFF2-40B4-BE49-F238E27FC236}">
-                <a16:creationId xmlns:a16="http://schemas.microsoft.com/office/drawing/2014/main" id="{A12EBF0F-0233-940F-A3D3-B1FFA605E3DB}"/>
-              </a:ext>
-            </a:extLst>
-          </p:cNvPr>
-          <p:cNvPicPr>
-            <a:picLocks noChangeAspect="1"/>
-          </p:cNvPicPr>
-          <p:nvPr/>
-        </p:nvPicPr>
-        <p:blipFill>
-          <a:blip r:embed="rId10"/>
-          <a:stretch>
-            <a:fillRect/>
-          </a:stretch>
-        </p:blipFill>
-        <p:spPr>
-          <a:xfrm>
-            <a:off x="8268456" y="8125139"/>
-            <a:ext cx="2270957" cy="2865368"/>
-          </a:xfrm>
-          <a:prstGeom prst="rect">
-            <a:avLst/>
-          </a:prstGeom>
-        </p:spPr>
-      </p:pic>
-      <p:pic>
-        <p:nvPicPr>
-          <p:cNvPr id="1026" name="Picture 2" descr="OmniGibson architecture overview">
-            <a:extLst>
-              <a:ext uri="{FF2B5EF4-FFF2-40B4-BE49-F238E27FC236}">
-                <a16:creationId xmlns:a16="http://schemas.microsoft.com/office/drawing/2014/main" id="{3690E041-F017-F0CC-822B-BCF385407C61}"/>
-              </a:ext>
-            </a:extLst>
-          </p:cNvPr>
-          <p:cNvPicPr>
-            <a:picLocks noChangeAspect="1" noChangeArrowheads="1"/>
-          </p:cNvPicPr>
-          <p:nvPr/>
-        </p:nvPicPr>
-        <p:blipFill>
-          <a:blip r:embed="rId11">
-            <a:extLst>
-              <a:ext uri="{28A0092B-C50C-407E-A947-70E740481C1C}">
-                <a14:useLocalDpi xmlns:a14="http://schemas.microsoft.com/office/drawing/2010/main" val="0"/>
-              </a:ext>
-            </a:extLst>
-          </a:blip>
-          <a:srcRect/>
-          <a:stretch>
-            <a:fillRect/>
-          </a:stretch>
-        </p:blipFill>
-        <p:spPr bwMode="auto">
-          <a:xfrm>
-            <a:off x="603747" y="7715795"/>
-            <a:ext cx="7824983" cy="3826489"/>
-          </a:xfrm>
-          <a:prstGeom prst="rect">
-            <a:avLst/>
-          </a:prstGeom>
-          <a:noFill/>
-          <a:extLst>
-            <a:ext uri="{909E8E84-426E-40DD-AFC4-6F175D3DCCD1}">
-              <a14:hiddenFill xmlns:a14="http://schemas.microsoft.com/office/drawing/2010/main">
-                <a:solidFill>
-                  <a:srgbClr val="FFFFFF"/>
-                </a:solidFill>
-              </a14:hiddenFill>
-            </a:ext>
-          </a:extLst>
-        </p:spPr>
-      </p:pic>
-      <p:pic>
-        <p:nvPicPr>
-          <p:cNvPr id="17" name="그림 16">
-            <a:extLst>
-              <a:ext uri="{FF2B5EF4-FFF2-40B4-BE49-F238E27FC236}">
-                <a16:creationId xmlns:a16="http://schemas.microsoft.com/office/drawing/2014/main" id="{2D95F6C5-0ADB-4C41-3094-33DAAD2B2707}"/>
-              </a:ext>
-            </a:extLst>
-          </p:cNvPr>
-          <p:cNvPicPr>
-            <a:picLocks noChangeAspect="1"/>
-          </p:cNvPicPr>
-          <p:nvPr/>
-        </p:nvPicPr>
-        <p:blipFill>
-          <a:blip r:embed="rId12"/>
-          <a:stretch>
-            <a:fillRect/>
-          </a:stretch>
-        </p:blipFill>
-        <p:spPr>
-          <a:xfrm>
-            <a:off x="10840930" y="19346429"/>
-            <a:ext cx="9758531" cy="1551302"/>
+            <a:off x="5289097" y="15822354"/>
+            <a:ext cx="5314803" cy="4897816"/>
           </a:xfrm>
           <a:prstGeom prst="rect">
             <a:avLst/>
